--- a/Learning_series_copilot_sas_python.pptx
+++ b/Learning_series_copilot_sas_python.pptx
@@ -28,10 +28,9 @@
     <p:sldId id="276" r:id="rId22"/>
     <p:sldId id="277" r:id="rId23"/>
     <p:sldId id="278" r:id="rId24"/>
-    <p:sldId id="279" r:id="rId25"/>
   </p:sldIdLst>
   <p:notesMasterIdLst>
-    <p:notesMasterId r:id="rId26"/>
+    <p:notesMasterId r:id="rId25"/>
   </p:notesMasterIdLst>
   <p:sldSz cx="9144000" cy="5143500"/>
   <p:notesSz cx="5143500" cy="9144000"/>
@@ -1892,94 +1891,6 @@
 </p:notes>
 </file>
 
-<file path=ppt/notesSlides/notesSlide24.xml><?xml version="1.0" encoding="utf-8"?>
-<p:notes xmlns:a="http://schemas.openxmlformats.org/drawingml/2006/main" xmlns:r="http://schemas.openxmlformats.org/officeDocument/2006/relationships" xmlns:p="http://schemas.openxmlformats.org/presentationml/2006/main">
-  <p:cSld>
-    <p:spTree>
-      <p:nvGrpSpPr>
-        <p:cNvPr id="1" name=""/>
-        <p:cNvGrpSpPr/>
-        <p:nvPr/>
-      </p:nvGrpSpPr>
-      <p:grpSpPr>
-        <a:xfrm>
-          <a:off x="0" y="0"/>
-          <a:ext cx="0" cy="0"/>
-          <a:chOff x="0" y="0"/>
-          <a:chExt cx="0" cy="0"/>
-        </a:xfrm>
-      </p:grpSpPr>
-      <p:sp>
-        <p:nvSpPr>
-          <p:cNvPr id="2" name="Slide Image Placeholder 1"/>
-          <p:cNvSpPr>
-            <a:spLocks noGrp="1" noRot="1" noChangeAspect="1"/>
-          </p:cNvSpPr>
-          <p:nvPr>
-            <p:ph type="sldImg"/>
-          </p:nvPr>
-        </p:nvSpPr>
-        <p:spPr/>
-      </p:sp>
-      <p:sp>
-        <p:nvSpPr>
-          <p:cNvPr id="3" name="Notes Placeholder 2"/>
-          <p:cNvSpPr>
-            <a:spLocks noGrp="1"/>
-          </p:cNvSpPr>
-          <p:nvPr>
-            <p:ph type="body" idx="1"/>
-          </p:nvPr>
-        </p:nvSpPr>
-        <p:spPr/>
-        <p:txBody>
-          <a:bodyPr/>
-          <a:lstStyle/>
-          <a:p>
-            <a:r>
-              <a:rPr lang="en-US" dirty="0"/>
-              <a:t>This is my final definition of done. Done does not mean Copilot generated Python. Done means the intent was approved, the semantics were made explicit, evidence passed, runtime was proven when it was in scope, review was independent, release was a human decision, and rollback is ready. That keeps the project honest: we do not confuse generated output with trusted migration.</a:t>
-            </a:r>
-            <a:endParaRPr lang="en-US" dirty="0"/>
-          </a:p>
-        </p:txBody>
-      </p:sp>
-      <p:sp>
-        <p:nvSpPr>
-          <p:cNvPr id="4" name="Slide Number Placeholder 3"/>
-          <p:cNvSpPr>
-            <a:spLocks noGrp="1"/>
-          </p:cNvSpPr>
-          <p:nvPr>
-            <p:ph type="sldNum" sz="quarter" idx="10"/>
-          </p:nvPr>
-        </p:nvSpPr>
-        <p:spPr/>
-        <p:txBody>
-          <a:bodyPr/>
-          <a:lstStyle/>
-          <a:p>
-            <a:fld id="{F7021451-1387-4CA6-816F-3879F97B5CBC}" type="slidenum">
-              <a:rPr lang="en-US"/>
-              <a:t>24</a:t>
-            </a:fld>
-            <a:endParaRPr lang="en-US"/>
-          </a:p>
-        </p:txBody>
-      </p:sp>
-    </p:spTree>
-    <p:extLst>
-      <p:ext uri="{BB962C8B-B14F-4D97-AF65-F5344CB8AC3E}">
-        <p14:creationId xmlns:p14="http://schemas.microsoft.com/office/powerpoint/2010/main" val="1024086991"/>
-      </p:ext>
-    </p:extLst>
-  </p:cSld>
-  <p:clrMapOvr>
-    <a:masterClrMapping/>
-  </p:clrMapOvr>
-</p:notes>
-</file>
-
 <file path=ppt/notesSlides/notesSlide3.xml><?xml version="1.0" encoding="utf-8"?>
 <p:notes xmlns:a="http://schemas.openxmlformats.org/drawingml/2006/main" xmlns:r="http://schemas.openxmlformats.org/officeDocument/2006/relationships" xmlns:p="http://schemas.openxmlformats.org/presentationml/2006/main">
   <p:cSld>
@@ -22746,1281 +22657,6 @@
 </p:sld>
 </file>
 
-<file path=ppt/slides/slide24.xml><?xml version="1.0" encoding="utf-8"?>
-<p:sld xmlns:a="http://schemas.openxmlformats.org/drawingml/2006/main" xmlns:r="http://schemas.openxmlformats.org/officeDocument/2006/relationships" xmlns:p="http://schemas.openxmlformats.org/presentationml/2006/main">
-  <p:cSld name="Slide 24">
-    <p:spTree>
-      <p:nvGrpSpPr>
-        <p:cNvPr id="1" name=""/>
-        <p:cNvGrpSpPr/>
-        <p:nvPr/>
-      </p:nvGrpSpPr>
-      <p:grpSpPr>
-        <a:xfrm>
-          <a:off x="0" y="0"/>
-          <a:ext cx="0" cy="0"/>
-          <a:chOff x="0" y="0"/>
-          <a:chExt cx="0" cy="0"/>
-        </a:xfrm>
-      </p:grpSpPr>
-      <p:pic>
-        <p:nvPicPr>
-          <p:cNvPr id="3" name="Image 0" descr="preencoded.png">    </p:cNvPr>
-          <p:cNvPicPr>
-            <a:picLocks noChangeAspect="1"/>
-          </p:cNvPicPr>
-          <p:nvPr/>
-        </p:nvPicPr>
-        <p:blipFill>
-          <a:blip r:embed="rId1"/>
-          <a:stretch>
-            <a:fillRect/>
-          </a:stretch>
-        </p:blipFill>
-        <p:spPr>
-          <a:xfrm>
-            <a:off x="0" y="0"/>
-            <a:ext cx="9144000" cy="5143500"/>
-          </a:xfrm>
-          <a:prstGeom prst="rect">
-            <a:avLst/>
-          </a:prstGeom>
-        </p:spPr>
-      </p:pic>
-      <p:sp>
-        <p:nvSpPr>
-          <p:cNvPr id="4" name="Shape 0"/>
-          <p:cNvSpPr/>
-          <p:nvPr/>
-        </p:nvSpPr>
-        <p:spPr>
-          <a:xfrm>
-            <a:off x="242888" y="128588"/>
-            <a:ext cx="8658225" cy="637859"/>
-          </a:xfrm>
-          <a:prstGeom prst="rect">
-            <a:avLst/>
-          </a:prstGeom>
-          <a:solidFill>
-            <a:srgbClr val="000000">
-              <a:alpha val="0"/>
-            </a:srgbClr>
-          </a:solidFill>
-          <a:ln/>
-        </p:spPr>
-      </p:sp>
-      <p:sp>
-        <p:nvSpPr>
-          <p:cNvPr id="5" name="Shape 1"/>
-          <p:cNvSpPr/>
-          <p:nvPr/>
-        </p:nvSpPr>
-        <p:spPr>
-          <a:xfrm>
-            <a:off x="242888" y="745015"/>
-            <a:ext cx="8658225" cy="21431"/>
-          </a:xfrm>
-          <a:prstGeom prst="rect">
-            <a:avLst/>
-          </a:prstGeom>
-          <a:solidFill>
-            <a:srgbClr val="111111"/>
-          </a:solidFill>
-          <a:ln/>
-        </p:spPr>
-      </p:sp>
-      <p:sp>
-        <p:nvSpPr>
-          <p:cNvPr id="6" name="Text 2"/>
-          <p:cNvSpPr/>
-          <p:nvPr/>
-        </p:nvSpPr>
-        <p:spPr>
-          <a:xfrm>
-            <a:off x="242888" y="197123"/>
-            <a:ext cx="8601075" cy="314995"/>
-          </a:xfrm>
-          <a:prstGeom prst="rect">
-            <a:avLst/>
-          </a:prstGeom>
-          <a:noFill/>
-          <a:ln/>
-        </p:spPr>
-        <p:txBody>
-          <a:bodyPr wrap="none" lIns="0" tIns="0" rIns="0" bIns="0" rtlCol="0" anchor="t">
-            <a:spAutoFit/>
-          </a:bodyPr>
-          <a:lstStyle/>
-          <a:p>
-            <a:pPr algn="l" indent="0" marL="0">
-              <a:lnSpc>
-                <a:spcPct val="84000"/>
-              </a:lnSpc>
-              <a:buNone/>
-            </a:pPr>
-            <a:r>
-              <a:rPr lang="en-US" sz="2100" b="1" dirty="0">
-                <a:solidFill>
-                  <a:srgbClr val="111111"/>
-                </a:solidFill>
-                <a:latin typeface="Oswald SemiBold" pitchFamily="34" charset="0"/>
-                <a:ea typeface="Oswald SemiBold" pitchFamily="34" charset="-122"/>
-                <a:cs typeface="Oswald SemiBold" pitchFamily="34" charset="-120"/>
-              </a:rPr>
-              <a:t>WHAT COUNTS AS DONE</a:t>
-            </a:r>
-            <a:endParaRPr lang="en-US" sz="2100" dirty="0"/>
-          </a:p>
-        </p:txBody>
-      </p:sp>
-      <p:sp>
-        <p:nvSpPr>
-          <p:cNvPr id="7" name="Text 3"/>
-          <p:cNvSpPr/>
-          <p:nvPr/>
-        </p:nvSpPr>
-        <p:spPr>
-          <a:xfrm>
-            <a:off x="242888" y="540693"/>
-            <a:ext cx="8601075" cy="157163"/>
-          </a:xfrm>
-          <a:prstGeom prst="rect">
-            <a:avLst/>
-          </a:prstGeom>
-          <a:noFill/>
-          <a:ln/>
-        </p:spPr>
-        <p:txBody>
-          <a:bodyPr wrap="square" lIns="0" tIns="0" rIns="0" bIns="0" rtlCol="0" anchor="t">
-            <a:spAutoFit/>
-          </a:bodyPr>
-          <a:lstStyle/>
-          <a:p>
-            <a:pPr algn="l" indent="0" marL="0">
-              <a:buNone/>
-            </a:pPr>
-            <a:r>
-              <a:rPr lang="en-US" sz="900" b="1" dirty="0">
-                <a:solidFill>
-                  <a:srgbClr val="444444"/>
-                </a:solidFill>
-                <a:latin typeface="Inter SemiBold" pitchFamily="34" charset="0"/>
-                <a:ea typeface="Inter SemiBold" pitchFamily="34" charset="-122"/>
-                <a:cs typeface="Inter SemiBold" pitchFamily="34" charset="-120"/>
-              </a:rPr>
-              <a:t>Generated code is not the finish line. Evidence and human verdict close the migration.</a:t>
-            </a:r>
-            <a:endParaRPr lang="en-US" sz="900" dirty="0"/>
-          </a:p>
-        </p:txBody>
-      </p:sp>
-      <p:sp>
-        <p:nvSpPr>
-          <p:cNvPr id="8" name="Text 4"/>
-          <p:cNvSpPr/>
-          <p:nvPr/>
-        </p:nvSpPr>
-        <p:spPr>
-          <a:xfrm>
-            <a:off x="242888" y="866459"/>
-            <a:ext cx="2571750" cy="253603"/>
-          </a:xfrm>
-          <a:prstGeom prst="rect">
-            <a:avLst/>
-          </a:prstGeom>
-          <a:noFill/>
-          <a:ln/>
-        </p:spPr>
-        <p:txBody>
-          <a:bodyPr wrap="square" lIns="0" tIns="0" rIns="0" bIns="0" rtlCol="0" anchor="t">
-            <a:spAutoFit/>
-          </a:bodyPr>
-          <a:lstStyle/>
-          <a:p>
-            <a:pPr algn="l" indent="0" marL="0">
-              <a:buNone/>
-            </a:pPr>
-            <a:r>
-              <a:rPr lang="en-US" sz="1250" dirty="0">
-                <a:solidFill>
-                  <a:srgbClr val="27C93F"/>
-                </a:solidFill>
-                <a:latin typeface="Oswald SemiBold" pitchFamily="34" charset="0"/>
-                <a:ea typeface="Oswald SemiBold" pitchFamily="34" charset="-122"/>
-                <a:cs typeface="Oswald SemiBold" pitchFamily="34" charset="-120"/>
-              </a:rPr>
-              <a:t>DONE MEANS:</a:t>
-            </a:r>
-            <a:endParaRPr lang="en-US" sz="1250" dirty="0"/>
-          </a:p>
-        </p:txBody>
-      </p:sp>
-      <p:sp>
-        <p:nvSpPr>
-          <p:cNvPr id="9" name="Shape 5"/>
-          <p:cNvSpPr/>
-          <p:nvPr/>
-        </p:nvSpPr>
-        <p:spPr>
-          <a:xfrm>
-            <a:off x="242888" y="1220074"/>
-            <a:ext cx="2571750" cy="385763"/>
-          </a:xfrm>
-          <a:prstGeom prst="rect">
-            <a:avLst/>
-          </a:prstGeom>
-          <a:solidFill>
-            <a:srgbClr val="FFFFFF"/>
-          </a:solidFill>
-          <a:ln w="18288">
-            <a:solidFill>
-              <a:srgbClr val="111111"/>
-            </a:solidFill>
-            <a:prstDash val="solid"/>
-          </a:ln>
-        </p:spPr>
-      </p:sp>
-      <p:sp>
-        <p:nvSpPr>
-          <p:cNvPr id="10" name="Shape 6"/>
-          <p:cNvSpPr/>
-          <p:nvPr/>
-        </p:nvSpPr>
-        <p:spPr>
-          <a:xfrm>
-            <a:off x="342900" y="1291512"/>
-            <a:ext cx="200025" cy="200025"/>
-          </a:xfrm>
-          <a:prstGeom prst="rect">
-            <a:avLst/>
-          </a:prstGeom>
-          <a:solidFill>
-            <a:srgbClr val="111111"/>
-          </a:solidFill>
-          <a:ln/>
-        </p:spPr>
-      </p:sp>
-      <p:sp>
-        <p:nvSpPr>
-          <p:cNvPr id="11" name="Text 7"/>
-          <p:cNvSpPr/>
-          <p:nvPr/>
-        </p:nvSpPr>
-        <p:spPr>
-          <a:xfrm>
-            <a:off x="342900" y="1291512"/>
-            <a:ext cx="200025" cy="200025"/>
-          </a:xfrm>
-          <a:prstGeom prst="rect">
-            <a:avLst/>
-          </a:prstGeom>
-          <a:noFill/>
-          <a:ln/>
-        </p:spPr>
-        <p:txBody>
-          <a:bodyPr wrap="none" lIns="0" tIns="0" rIns="0" bIns="0" rtlCol="0" anchor="ctr">
-            <a:spAutoFit/>
-          </a:bodyPr>
-          <a:lstStyle/>
-          <a:p>
-            <a:pPr algn="ctr" indent="0" marL="0">
-              <a:buNone/>
-            </a:pPr>
-            <a:r>
-              <a:rPr lang="en-US" sz="850" dirty="0">
-                <a:solidFill>
-                  <a:srgbClr val="FFFFFF"/>
-                </a:solidFill>
-                <a:latin typeface="Oswald SemiBold" pitchFamily="34" charset="0"/>
-                <a:ea typeface="Oswald SemiBold" pitchFamily="34" charset="-122"/>
-                <a:cs typeface="Oswald SemiBold" pitchFamily="34" charset="-120"/>
-              </a:rPr>
-              <a:t>1</a:t>
-            </a:r>
-            <a:endParaRPr lang="en-US" sz="850" dirty="0"/>
-          </a:p>
-        </p:txBody>
-      </p:sp>
-      <p:sp>
-        <p:nvSpPr>
-          <p:cNvPr id="12" name="Text 8"/>
-          <p:cNvSpPr/>
-          <p:nvPr/>
-        </p:nvSpPr>
-        <p:spPr>
-          <a:xfrm>
-            <a:off x="614363" y="1322933"/>
-            <a:ext cx="2100263" cy="137127"/>
-          </a:xfrm>
-          <a:prstGeom prst="rect">
-            <a:avLst/>
-          </a:prstGeom>
-          <a:noFill/>
-          <a:ln/>
-        </p:spPr>
-        <p:txBody>
-          <a:bodyPr wrap="none" lIns="0" tIns="0" rIns="0" bIns="0" rtlCol="0" anchor="t">
-            <a:spAutoFit/>
-          </a:bodyPr>
-          <a:lstStyle/>
-          <a:p>
-            <a:pPr algn="l" indent="0" marL="0">
-              <a:lnSpc>
-                <a:spcPct val="96000"/>
-              </a:lnSpc>
-              <a:buNone/>
-            </a:pPr>
-            <a:r>
-              <a:rPr lang="en-US" sz="800" b="1" dirty="0">
-                <a:solidFill>
-                  <a:srgbClr val="30343B"/>
-                </a:solidFill>
-                <a:latin typeface="Inter Bold" pitchFamily="34" charset="0"/>
-                <a:ea typeface="Inter Bold" pitchFamily="34" charset="-122"/>
-                <a:cs typeface="Inter Bold" pitchFamily="34" charset="-120"/>
-              </a:rPr>
-              <a:t>Intent approved</a:t>
-            </a:r>
-            <a:endParaRPr lang="en-US" sz="800" dirty="0"/>
-          </a:p>
-        </p:txBody>
-      </p:sp>
-      <p:sp>
-        <p:nvSpPr>
-          <p:cNvPr id="13" name="Shape 9"/>
-          <p:cNvSpPr/>
-          <p:nvPr/>
-        </p:nvSpPr>
-        <p:spPr>
-          <a:xfrm>
-            <a:off x="242888" y="1634412"/>
-            <a:ext cx="2571750" cy="385763"/>
-          </a:xfrm>
-          <a:prstGeom prst="rect">
-            <a:avLst/>
-          </a:prstGeom>
-          <a:solidFill>
-            <a:srgbClr val="FFFFFF"/>
-          </a:solidFill>
-          <a:ln w="18288">
-            <a:solidFill>
-              <a:srgbClr val="111111"/>
-            </a:solidFill>
-            <a:prstDash val="solid"/>
-          </a:ln>
-        </p:spPr>
-      </p:sp>
-      <p:sp>
-        <p:nvSpPr>
-          <p:cNvPr id="14" name="Shape 10"/>
-          <p:cNvSpPr/>
-          <p:nvPr/>
-        </p:nvSpPr>
-        <p:spPr>
-          <a:xfrm>
-            <a:off x="342900" y="1705849"/>
-            <a:ext cx="200025" cy="200025"/>
-          </a:xfrm>
-          <a:prstGeom prst="rect">
-            <a:avLst/>
-          </a:prstGeom>
-          <a:solidFill>
-            <a:srgbClr val="111111"/>
-          </a:solidFill>
-          <a:ln/>
-        </p:spPr>
-      </p:sp>
-      <p:sp>
-        <p:nvSpPr>
-          <p:cNvPr id="15" name="Text 11"/>
-          <p:cNvSpPr/>
-          <p:nvPr/>
-        </p:nvSpPr>
-        <p:spPr>
-          <a:xfrm>
-            <a:off x="342900" y="1705849"/>
-            <a:ext cx="200025" cy="200025"/>
-          </a:xfrm>
-          <a:prstGeom prst="rect">
-            <a:avLst/>
-          </a:prstGeom>
-          <a:noFill/>
-          <a:ln/>
-        </p:spPr>
-        <p:txBody>
-          <a:bodyPr wrap="none" lIns="0" tIns="0" rIns="0" bIns="0" rtlCol="0" anchor="ctr">
-            <a:spAutoFit/>
-          </a:bodyPr>
-          <a:lstStyle/>
-          <a:p>
-            <a:pPr algn="ctr" indent="0" marL="0">
-              <a:buNone/>
-            </a:pPr>
-            <a:r>
-              <a:rPr lang="en-US" sz="850" dirty="0">
-                <a:solidFill>
-                  <a:srgbClr val="FFFFFF"/>
-                </a:solidFill>
-                <a:latin typeface="Oswald SemiBold" pitchFamily="34" charset="0"/>
-                <a:ea typeface="Oswald SemiBold" pitchFamily="34" charset="-122"/>
-                <a:cs typeface="Oswald SemiBold" pitchFamily="34" charset="-120"/>
-              </a:rPr>
-              <a:t>2</a:t>
-            </a:r>
-            <a:endParaRPr lang="en-US" sz="850" dirty="0"/>
-          </a:p>
-        </p:txBody>
-      </p:sp>
-      <p:sp>
-        <p:nvSpPr>
-          <p:cNvPr id="16" name="Text 12"/>
-          <p:cNvSpPr/>
-          <p:nvPr/>
-        </p:nvSpPr>
-        <p:spPr>
-          <a:xfrm>
-            <a:off x="614363" y="1737271"/>
-            <a:ext cx="2100263" cy="137127"/>
-          </a:xfrm>
-          <a:prstGeom prst="rect">
-            <a:avLst/>
-          </a:prstGeom>
-          <a:noFill/>
-          <a:ln/>
-        </p:spPr>
-        <p:txBody>
-          <a:bodyPr wrap="none" lIns="0" tIns="0" rIns="0" bIns="0" rtlCol="0" anchor="t">
-            <a:spAutoFit/>
-          </a:bodyPr>
-          <a:lstStyle/>
-          <a:p>
-            <a:pPr algn="l" indent="0" marL="0">
-              <a:lnSpc>
-                <a:spcPct val="96000"/>
-              </a:lnSpc>
-              <a:buNone/>
-            </a:pPr>
-            <a:r>
-              <a:rPr lang="en-US" sz="800" b="1" dirty="0">
-                <a:solidFill>
-                  <a:srgbClr val="30343B"/>
-                </a:solidFill>
-                <a:latin typeface="Inter Bold" pitchFamily="34" charset="0"/>
-                <a:ea typeface="Inter Bold" pitchFamily="34" charset="-122"/>
-                <a:cs typeface="Inter Bold" pitchFamily="34" charset="-120"/>
-              </a:rPr>
-              <a:t>Semantics explicit</a:t>
-            </a:r>
-            <a:endParaRPr lang="en-US" sz="800" dirty="0"/>
-          </a:p>
-        </p:txBody>
-      </p:sp>
-      <p:sp>
-        <p:nvSpPr>
-          <p:cNvPr id="17" name="Shape 13"/>
-          <p:cNvSpPr/>
-          <p:nvPr/>
-        </p:nvSpPr>
-        <p:spPr>
-          <a:xfrm>
-            <a:off x="242888" y="2048749"/>
-            <a:ext cx="2571750" cy="385763"/>
-          </a:xfrm>
-          <a:prstGeom prst="rect">
-            <a:avLst/>
-          </a:prstGeom>
-          <a:solidFill>
-            <a:srgbClr val="FFFFFF"/>
-          </a:solidFill>
-          <a:ln w="18288">
-            <a:solidFill>
-              <a:srgbClr val="111111"/>
-            </a:solidFill>
-            <a:prstDash val="solid"/>
-          </a:ln>
-        </p:spPr>
-      </p:sp>
-      <p:sp>
-        <p:nvSpPr>
-          <p:cNvPr id="18" name="Shape 14"/>
-          <p:cNvSpPr/>
-          <p:nvPr/>
-        </p:nvSpPr>
-        <p:spPr>
-          <a:xfrm>
-            <a:off x="342900" y="2120187"/>
-            <a:ext cx="200025" cy="200025"/>
-          </a:xfrm>
-          <a:prstGeom prst="rect">
-            <a:avLst/>
-          </a:prstGeom>
-          <a:solidFill>
-            <a:srgbClr val="111111"/>
-          </a:solidFill>
-          <a:ln/>
-        </p:spPr>
-      </p:sp>
-      <p:sp>
-        <p:nvSpPr>
-          <p:cNvPr id="19" name="Text 15"/>
-          <p:cNvSpPr/>
-          <p:nvPr/>
-        </p:nvSpPr>
-        <p:spPr>
-          <a:xfrm>
-            <a:off x="342900" y="2120187"/>
-            <a:ext cx="200025" cy="200025"/>
-          </a:xfrm>
-          <a:prstGeom prst="rect">
-            <a:avLst/>
-          </a:prstGeom>
-          <a:noFill/>
-          <a:ln/>
-        </p:spPr>
-        <p:txBody>
-          <a:bodyPr wrap="none" lIns="0" tIns="0" rIns="0" bIns="0" rtlCol="0" anchor="ctr">
-            <a:spAutoFit/>
-          </a:bodyPr>
-          <a:lstStyle/>
-          <a:p>
-            <a:pPr algn="ctr" indent="0" marL="0">
-              <a:buNone/>
-            </a:pPr>
-            <a:r>
-              <a:rPr lang="en-US" sz="850" dirty="0">
-                <a:solidFill>
-                  <a:srgbClr val="FFFFFF"/>
-                </a:solidFill>
-                <a:latin typeface="Oswald SemiBold" pitchFamily="34" charset="0"/>
-                <a:ea typeface="Oswald SemiBold" pitchFamily="34" charset="-122"/>
-                <a:cs typeface="Oswald SemiBold" pitchFamily="34" charset="-120"/>
-              </a:rPr>
-              <a:t>3</a:t>
-            </a:r>
-            <a:endParaRPr lang="en-US" sz="850" dirty="0"/>
-          </a:p>
-        </p:txBody>
-      </p:sp>
-      <p:sp>
-        <p:nvSpPr>
-          <p:cNvPr id="20" name="Text 16"/>
-          <p:cNvSpPr/>
-          <p:nvPr/>
-        </p:nvSpPr>
-        <p:spPr>
-          <a:xfrm>
-            <a:off x="614363" y="2151608"/>
-            <a:ext cx="2100263" cy="137127"/>
-          </a:xfrm>
-          <a:prstGeom prst="rect">
-            <a:avLst/>
-          </a:prstGeom>
-          <a:noFill/>
-          <a:ln/>
-        </p:spPr>
-        <p:txBody>
-          <a:bodyPr wrap="none" lIns="0" tIns="0" rIns="0" bIns="0" rtlCol="0" anchor="t">
-            <a:spAutoFit/>
-          </a:bodyPr>
-          <a:lstStyle/>
-          <a:p>
-            <a:pPr algn="l" indent="0" marL="0">
-              <a:lnSpc>
-                <a:spcPct val="96000"/>
-              </a:lnSpc>
-              <a:buNone/>
-            </a:pPr>
-            <a:r>
-              <a:rPr lang="en-US" sz="800" b="1" dirty="0">
-                <a:solidFill>
-                  <a:srgbClr val="30343B"/>
-                </a:solidFill>
-                <a:latin typeface="Inter Bold" pitchFamily="34" charset="0"/>
-                <a:ea typeface="Inter Bold" pitchFamily="34" charset="-122"/>
-                <a:cs typeface="Inter Bold" pitchFamily="34" charset="-120"/>
-              </a:rPr>
-              <a:t>Evidence passed</a:t>
-            </a:r>
-            <a:endParaRPr lang="en-US" sz="800" dirty="0"/>
-          </a:p>
-        </p:txBody>
-      </p:sp>
-      <p:sp>
-        <p:nvSpPr>
-          <p:cNvPr id="21" name="Shape 17"/>
-          <p:cNvSpPr/>
-          <p:nvPr/>
-        </p:nvSpPr>
-        <p:spPr>
-          <a:xfrm>
-            <a:off x="242888" y="2463087"/>
-            <a:ext cx="2571750" cy="385763"/>
-          </a:xfrm>
-          <a:prstGeom prst="rect">
-            <a:avLst/>
-          </a:prstGeom>
-          <a:solidFill>
-            <a:srgbClr val="FFFFFF"/>
-          </a:solidFill>
-          <a:ln w="18288">
-            <a:solidFill>
-              <a:srgbClr val="111111"/>
-            </a:solidFill>
-            <a:prstDash val="solid"/>
-          </a:ln>
-        </p:spPr>
-      </p:sp>
-      <p:sp>
-        <p:nvSpPr>
-          <p:cNvPr id="22" name="Shape 18"/>
-          <p:cNvSpPr/>
-          <p:nvPr/>
-        </p:nvSpPr>
-        <p:spPr>
-          <a:xfrm>
-            <a:off x="342900" y="2534524"/>
-            <a:ext cx="200025" cy="200025"/>
-          </a:xfrm>
-          <a:prstGeom prst="rect">
-            <a:avLst/>
-          </a:prstGeom>
-          <a:solidFill>
-            <a:srgbClr val="111111"/>
-          </a:solidFill>
-          <a:ln/>
-        </p:spPr>
-      </p:sp>
-      <p:sp>
-        <p:nvSpPr>
-          <p:cNvPr id="23" name="Text 19"/>
-          <p:cNvSpPr/>
-          <p:nvPr/>
-        </p:nvSpPr>
-        <p:spPr>
-          <a:xfrm>
-            <a:off x="342900" y="2534524"/>
-            <a:ext cx="200025" cy="200025"/>
-          </a:xfrm>
-          <a:prstGeom prst="rect">
-            <a:avLst/>
-          </a:prstGeom>
-          <a:noFill/>
-          <a:ln/>
-        </p:spPr>
-        <p:txBody>
-          <a:bodyPr wrap="none" lIns="0" tIns="0" rIns="0" bIns="0" rtlCol="0" anchor="ctr">
-            <a:spAutoFit/>
-          </a:bodyPr>
-          <a:lstStyle/>
-          <a:p>
-            <a:pPr algn="ctr" indent="0" marL="0">
-              <a:buNone/>
-            </a:pPr>
-            <a:r>
-              <a:rPr lang="en-US" sz="850" dirty="0">
-                <a:solidFill>
-                  <a:srgbClr val="FFFFFF"/>
-                </a:solidFill>
-                <a:latin typeface="Oswald SemiBold" pitchFamily="34" charset="0"/>
-                <a:ea typeface="Oswald SemiBold" pitchFamily="34" charset="-122"/>
-                <a:cs typeface="Oswald SemiBold" pitchFamily="34" charset="-120"/>
-              </a:rPr>
-              <a:t>4</a:t>
-            </a:r>
-            <a:endParaRPr lang="en-US" sz="850" dirty="0"/>
-          </a:p>
-        </p:txBody>
-      </p:sp>
-      <p:sp>
-        <p:nvSpPr>
-          <p:cNvPr id="24" name="Text 20"/>
-          <p:cNvSpPr/>
-          <p:nvPr/>
-        </p:nvSpPr>
-        <p:spPr>
-          <a:xfrm>
-            <a:off x="614363" y="2565946"/>
-            <a:ext cx="2100263" cy="137127"/>
-          </a:xfrm>
-          <a:prstGeom prst="rect">
-            <a:avLst/>
-          </a:prstGeom>
-          <a:noFill/>
-          <a:ln/>
-        </p:spPr>
-        <p:txBody>
-          <a:bodyPr wrap="none" lIns="0" tIns="0" rIns="0" bIns="0" rtlCol="0" anchor="t">
-            <a:spAutoFit/>
-          </a:bodyPr>
-          <a:lstStyle/>
-          <a:p>
-            <a:pPr algn="l" indent="0" marL="0">
-              <a:lnSpc>
-                <a:spcPct val="96000"/>
-              </a:lnSpc>
-              <a:buNone/>
-            </a:pPr>
-            <a:r>
-              <a:rPr lang="en-US" sz="800" b="1" dirty="0">
-                <a:solidFill>
-                  <a:srgbClr val="30343B"/>
-                </a:solidFill>
-                <a:latin typeface="Inter Bold" pitchFamily="34" charset="0"/>
-                <a:ea typeface="Inter Bold" pitchFamily="34" charset="-122"/>
-                <a:cs typeface="Inter Bold" pitchFamily="34" charset="-120"/>
-              </a:rPr>
-              <a:t>Runtime proven when in scope</a:t>
-            </a:r>
-            <a:endParaRPr lang="en-US" sz="800" dirty="0"/>
-          </a:p>
-        </p:txBody>
-      </p:sp>
-      <p:sp>
-        <p:nvSpPr>
-          <p:cNvPr id="25" name="Shape 21"/>
-          <p:cNvSpPr/>
-          <p:nvPr/>
-        </p:nvSpPr>
-        <p:spPr>
-          <a:xfrm>
-            <a:off x="242888" y="2877424"/>
-            <a:ext cx="2571750" cy="385763"/>
-          </a:xfrm>
-          <a:prstGeom prst="rect">
-            <a:avLst/>
-          </a:prstGeom>
-          <a:solidFill>
-            <a:srgbClr val="FFFFFF"/>
-          </a:solidFill>
-          <a:ln w="18288">
-            <a:solidFill>
-              <a:srgbClr val="111111"/>
-            </a:solidFill>
-            <a:prstDash val="solid"/>
-          </a:ln>
-        </p:spPr>
-      </p:sp>
-      <p:sp>
-        <p:nvSpPr>
-          <p:cNvPr id="26" name="Shape 22"/>
-          <p:cNvSpPr/>
-          <p:nvPr/>
-        </p:nvSpPr>
-        <p:spPr>
-          <a:xfrm>
-            <a:off x="342900" y="2948862"/>
-            <a:ext cx="200025" cy="200025"/>
-          </a:xfrm>
-          <a:prstGeom prst="rect">
-            <a:avLst/>
-          </a:prstGeom>
-          <a:solidFill>
-            <a:srgbClr val="111111"/>
-          </a:solidFill>
-          <a:ln/>
-        </p:spPr>
-      </p:sp>
-      <p:sp>
-        <p:nvSpPr>
-          <p:cNvPr id="27" name="Text 23"/>
-          <p:cNvSpPr/>
-          <p:nvPr/>
-        </p:nvSpPr>
-        <p:spPr>
-          <a:xfrm>
-            <a:off x="342900" y="2948862"/>
-            <a:ext cx="200025" cy="200025"/>
-          </a:xfrm>
-          <a:prstGeom prst="rect">
-            <a:avLst/>
-          </a:prstGeom>
-          <a:noFill/>
-          <a:ln/>
-        </p:spPr>
-        <p:txBody>
-          <a:bodyPr wrap="none" lIns="0" tIns="0" rIns="0" bIns="0" rtlCol="0" anchor="ctr">
-            <a:spAutoFit/>
-          </a:bodyPr>
-          <a:lstStyle/>
-          <a:p>
-            <a:pPr algn="ctr" indent="0" marL="0">
-              <a:buNone/>
-            </a:pPr>
-            <a:r>
-              <a:rPr lang="en-US" sz="850" dirty="0">
-                <a:solidFill>
-                  <a:srgbClr val="FFFFFF"/>
-                </a:solidFill>
-                <a:latin typeface="Oswald SemiBold" pitchFamily="34" charset="0"/>
-                <a:ea typeface="Oswald SemiBold" pitchFamily="34" charset="-122"/>
-                <a:cs typeface="Oswald SemiBold" pitchFamily="34" charset="-120"/>
-              </a:rPr>
-              <a:t>5</a:t>
-            </a:r>
-            <a:endParaRPr lang="en-US" sz="850" dirty="0"/>
-          </a:p>
-        </p:txBody>
-      </p:sp>
-      <p:sp>
-        <p:nvSpPr>
-          <p:cNvPr id="28" name="Text 24"/>
-          <p:cNvSpPr/>
-          <p:nvPr/>
-        </p:nvSpPr>
-        <p:spPr>
-          <a:xfrm>
-            <a:off x="614363" y="2980283"/>
-            <a:ext cx="2100263" cy="137127"/>
-          </a:xfrm>
-          <a:prstGeom prst="rect">
-            <a:avLst/>
-          </a:prstGeom>
-          <a:noFill/>
-          <a:ln/>
-        </p:spPr>
-        <p:txBody>
-          <a:bodyPr wrap="none" lIns="0" tIns="0" rIns="0" bIns="0" rtlCol="0" anchor="t">
-            <a:spAutoFit/>
-          </a:bodyPr>
-          <a:lstStyle/>
-          <a:p>
-            <a:pPr algn="l" indent="0" marL="0">
-              <a:lnSpc>
-                <a:spcPct val="96000"/>
-              </a:lnSpc>
-              <a:buNone/>
-            </a:pPr>
-            <a:r>
-              <a:rPr lang="en-US" sz="800" b="1" dirty="0">
-                <a:solidFill>
-                  <a:srgbClr val="30343B"/>
-                </a:solidFill>
-                <a:latin typeface="Inter Bold" pitchFamily="34" charset="0"/>
-                <a:ea typeface="Inter Bold" pitchFamily="34" charset="-122"/>
-                <a:cs typeface="Inter Bold" pitchFamily="34" charset="-120"/>
-              </a:rPr>
-              <a:t>Independent review complete</a:t>
-            </a:r>
-            <a:endParaRPr lang="en-US" sz="800" dirty="0"/>
-          </a:p>
-        </p:txBody>
-      </p:sp>
-      <p:sp>
-        <p:nvSpPr>
-          <p:cNvPr id="29" name="Shape 25"/>
-          <p:cNvSpPr/>
-          <p:nvPr/>
-        </p:nvSpPr>
-        <p:spPr>
-          <a:xfrm>
-            <a:off x="242888" y="3291762"/>
-            <a:ext cx="2571750" cy="385763"/>
-          </a:xfrm>
-          <a:prstGeom prst="rect">
-            <a:avLst/>
-          </a:prstGeom>
-          <a:solidFill>
-            <a:srgbClr val="FFFFFF"/>
-          </a:solidFill>
-          <a:ln w="18288">
-            <a:solidFill>
-              <a:srgbClr val="111111"/>
-            </a:solidFill>
-            <a:prstDash val="solid"/>
-          </a:ln>
-        </p:spPr>
-      </p:sp>
-      <p:sp>
-        <p:nvSpPr>
-          <p:cNvPr id="30" name="Shape 26"/>
-          <p:cNvSpPr/>
-          <p:nvPr/>
-        </p:nvSpPr>
-        <p:spPr>
-          <a:xfrm>
-            <a:off x="342900" y="3363199"/>
-            <a:ext cx="200025" cy="200025"/>
-          </a:xfrm>
-          <a:prstGeom prst="rect">
-            <a:avLst/>
-          </a:prstGeom>
-          <a:solidFill>
-            <a:srgbClr val="111111"/>
-          </a:solidFill>
-          <a:ln/>
-        </p:spPr>
-      </p:sp>
-      <p:sp>
-        <p:nvSpPr>
-          <p:cNvPr id="31" name="Text 27"/>
-          <p:cNvSpPr/>
-          <p:nvPr/>
-        </p:nvSpPr>
-        <p:spPr>
-          <a:xfrm>
-            <a:off x="342900" y="3363199"/>
-            <a:ext cx="200025" cy="200025"/>
-          </a:xfrm>
-          <a:prstGeom prst="rect">
-            <a:avLst/>
-          </a:prstGeom>
-          <a:noFill/>
-          <a:ln/>
-        </p:spPr>
-        <p:txBody>
-          <a:bodyPr wrap="none" lIns="0" tIns="0" rIns="0" bIns="0" rtlCol="0" anchor="ctr">
-            <a:spAutoFit/>
-          </a:bodyPr>
-          <a:lstStyle/>
-          <a:p>
-            <a:pPr algn="ctr" indent="0" marL="0">
-              <a:buNone/>
-            </a:pPr>
-            <a:r>
-              <a:rPr lang="en-US" sz="850" dirty="0">
-                <a:solidFill>
-                  <a:srgbClr val="FFFFFF"/>
-                </a:solidFill>
-                <a:latin typeface="Oswald SemiBold" pitchFamily="34" charset="0"/>
-                <a:ea typeface="Oswald SemiBold" pitchFamily="34" charset="-122"/>
-                <a:cs typeface="Oswald SemiBold" pitchFamily="34" charset="-120"/>
-              </a:rPr>
-              <a:t>6</a:t>
-            </a:r>
-            <a:endParaRPr lang="en-US" sz="850" dirty="0"/>
-          </a:p>
-        </p:txBody>
-      </p:sp>
-      <p:sp>
-        <p:nvSpPr>
-          <p:cNvPr id="32" name="Text 28"/>
-          <p:cNvSpPr/>
-          <p:nvPr/>
-        </p:nvSpPr>
-        <p:spPr>
-          <a:xfrm>
-            <a:off x="614363" y="3394621"/>
-            <a:ext cx="2100263" cy="137127"/>
-          </a:xfrm>
-          <a:prstGeom prst="rect">
-            <a:avLst/>
-          </a:prstGeom>
-          <a:noFill/>
-          <a:ln/>
-        </p:spPr>
-        <p:txBody>
-          <a:bodyPr wrap="none" lIns="0" tIns="0" rIns="0" bIns="0" rtlCol="0" anchor="t">
-            <a:spAutoFit/>
-          </a:bodyPr>
-          <a:lstStyle/>
-          <a:p>
-            <a:pPr algn="l" indent="0" marL="0">
-              <a:lnSpc>
-                <a:spcPct val="96000"/>
-              </a:lnSpc>
-              <a:buNone/>
-            </a:pPr>
-            <a:r>
-              <a:rPr lang="en-US" sz="800" b="1" dirty="0">
-                <a:solidFill>
-                  <a:srgbClr val="30343B"/>
-                </a:solidFill>
-                <a:latin typeface="Inter Bold" pitchFamily="34" charset="0"/>
-                <a:ea typeface="Inter Bold" pitchFamily="34" charset="-122"/>
-                <a:cs typeface="Inter Bold" pitchFamily="34" charset="-120"/>
-              </a:rPr>
-              <a:t>Human release recorded</a:t>
-            </a:r>
-            <a:endParaRPr lang="en-US" sz="800" dirty="0"/>
-          </a:p>
-        </p:txBody>
-      </p:sp>
-      <p:sp>
-        <p:nvSpPr>
-          <p:cNvPr id="33" name="Shape 29"/>
-          <p:cNvSpPr/>
-          <p:nvPr/>
-        </p:nvSpPr>
-        <p:spPr>
-          <a:xfrm>
-            <a:off x="242888" y="3706099"/>
-            <a:ext cx="2571750" cy="385763"/>
-          </a:xfrm>
-          <a:prstGeom prst="rect">
-            <a:avLst/>
-          </a:prstGeom>
-          <a:solidFill>
-            <a:srgbClr val="FFFFFF"/>
-          </a:solidFill>
-          <a:ln w="18288">
-            <a:solidFill>
-              <a:srgbClr val="111111"/>
-            </a:solidFill>
-            <a:prstDash val="solid"/>
-          </a:ln>
-        </p:spPr>
-      </p:sp>
-      <p:sp>
-        <p:nvSpPr>
-          <p:cNvPr id="34" name="Shape 30"/>
-          <p:cNvSpPr/>
-          <p:nvPr/>
-        </p:nvSpPr>
-        <p:spPr>
-          <a:xfrm>
-            <a:off x="342900" y="3777537"/>
-            <a:ext cx="200025" cy="200025"/>
-          </a:xfrm>
-          <a:prstGeom prst="rect">
-            <a:avLst/>
-          </a:prstGeom>
-          <a:solidFill>
-            <a:srgbClr val="111111"/>
-          </a:solidFill>
-          <a:ln/>
-        </p:spPr>
-      </p:sp>
-      <p:sp>
-        <p:nvSpPr>
-          <p:cNvPr id="35" name="Text 31"/>
-          <p:cNvSpPr/>
-          <p:nvPr/>
-        </p:nvSpPr>
-        <p:spPr>
-          <a:xfrm>
-            <a:off x="342900" y="3777537"/>
-            <a:ext cx="200025" cy="200025"/>
-          </a:xfrm>
-          <a:prstGeom prst="rect">
-            <a:avLst/>
-          </a:prstGeom>
-          <a:noFill/>
-          <a:ln/>
-        </p:spPr>
-        <p:txBody>
-          <a:bodyPr wrap="none" lIns="0" tIns="0" rIns="0" bIns="0" rtlCol="0" anchor="ctr">
-            <a:spAutoFit/>
-          </a:bodyPr>
-          <a:lstStyle/>
-          <a:p>
-            <a:pPr algn="ctr" indent="0" marL="0">
-              <a:buNone/>
-            </a:pPr>
-            <a:r>
-              <a:rPr lang="en-US" sz="850" dirty="0">
-                <a:solidFill>
-                  <a:srgbClr val="FFFFFF"/>
-                </a:solidFill>
-                <a:latin typeface="Oswald SemiBold" pitchFamily="34" charset="0"/>
-                <a:ea typeface="Oswald SemiBold" pitchFamily="34" charset="-122"/>
-                <a:cs typeface="Oswald SemiBold" pitchFamily="34" charset="-120"/>
-              </a:rPr>
-              <a:t>7</a:t>
-            </a:r>
-            <a:endParaRPr lang="en-US" sz="850" dirty="0"/>
-          </a:p>
-        </p:txBody>
-      </p:sp>
-      <p:sp>
-        <p:nvSpPr>
-          <p:cNvPr id="36" name="Text 32"/>
-          <p:cNvSpPr/>
-          <p:nvPr/>
-        </p:nvSpPr>
-        <p:spPr>
-          <a:xfrm>
-            <a:off x="614363" y="3808958"/>
-            <a:ext cx="2100263" cy="137127"/>
-          </a:xfrm>
-          <a:prstGeom prst="rect">
-            <a:avLst/>
-          </a:prstGeom>
-          <a:noFill/>
-          <a:ln/>
-        </p:spPr>
-        <p:txBody>
-          <a:bodyPr wrap="none" lIns="0" tIns="0" rIns="0" bIns="0" rtlCol="0" anchor="t">
-            <a:spAutoFit/>
-          </a:bodyPr>
-          <a:lstStyle/>
-          <a:p>
-            <a:pPr algn="l" indent="0" marL="0">
-              <a:lnSpc>
-                <a:spcPct val="96000"/>
-              </a:lnSpc>
-              <a:buNone/>
-            </a:pPr>
-            <a:r>
-              <a:rPr lang="en-US" sz="800" b="1" dirty="0">
-                <a:solidFill>
-                  <a:srgbClr val="30343B"/>
-                </a:solidFill>
-                <a:latin typeface="Inter Bold" pitchFamily="34" charset="0"/>
-                <a:ea typeface="Inter Bold" pitchFamily="34" charset="-122"/>
-                <a:cs typeface="Inter Bold" pitchFamily="34" charset="-120"/>
-              </a:rPr>
-              <a:t>Rollback ready</a:t>
-            </a:r>
-            <a:endParaRPr lang="en-US" sz="800" dirty="0"/>
-          </a:p>
-        </p:txBody>
-      </p:sp>
-      <p:pic>
-        <p:nvPicPr>
-          <p:cNvPr id="37" name="Image 1" descr="preencoded.png">    </p:cNvPr>
-          <p:cNvPicPr>
-            <a:picLocks noChangeAspect="1"/>
-          </p:cNvPicPr>
-          <p:nvPr/>
-        </p:nvPicPr>
-        <p:blipFill>
-          <a:blip r:embed="rId2"/>
-          <a:stretch>
-            <a:fillRect/>
-          </a:stretch>
-        </p:blipFill>
-        <p:spPr>
-          <a:xfrm>
-            <a:off x="3243263" y="909321"/>
-            <a:ext cx="5429250" cy="3505516"/>
-          </a:xfrm>
-          <a:prstGeom prst="rect">
-            <a:avLst/>
-          </a:prstGeom>
-        </p:spPr>
-      </p:pic>
-      <p:sp>
-        <p:nvSpPr>
-          <p:cNvPr id="38" name="Shape 33"/>
-          <p:cNvSpPr/>
-          <p:nvPr/>
-        </p:nvSpPr>
-        <p:spPr>
-          <a:xfrm>
-            <a:off x="484553" y="4522047"/>
-            <a:ext cx="8174893" cy="435663"/>
-          </a:xfrm>
-          <a:prstGeom prst="rect">
-            <a:avLst/>
-          </a:prstGeom>
-          <a:solidFill>
-            <a:srgbClr val="FFDF00"/>
-          </a:solidFill>
-          <a:ln w="18288">
-            <a:solidFill>
-              <a:srgbClr val="111111"/>
-            </a:solidFill>
-            <a:prstDash val="solid"/>
-          </a:ln>
-        </p:spPr>
-      </p:sp>
-      <p:sp>
-        <p:nvSpPr>
-          <p:cNvPr id="39" name="Text 34"/>
-          <p:cNvSpPr/>
-          <p:nvPr/>
-        </p:nvSpPr>
-        <p:spPr>
-          <a:xfrm>
-            <a:off x="484553" y="4522047"/>
-            <a:ext cx="8174893" cy="435663"/>
-          </a:xfrm>
-          <a:prstGeom prst="rect">
-            <a:avLst/>
-          </a:prstGeom>
-          <a:noFill/>
-          <a:ln/>
-        </p:spPr>
-        <p:txBody>
-          <a:bodyPr wrap="square" lIns="153035" tIns="102108" rIns="153035" bIns="102108" rtlCol="0" anchor="t">
-            <a:spAutoFit/>
-          </a:bodyPr>
-          <a:lstStyle/>
-          <a:p>
-            <a:pPr algn="ctr" indent="0" marL="0">
-              <a:lnSpc>
-                <a:spcPct val="92000"/>
-              </a:lnSpc>
-              <a:buNone/>
-            </a:pPr>
-            <a:r>
-              <a:rPr lang="en-US" sz="1000" b="1" dirty="0">
-                <a:solidFill>
-                  <a:srgbClr val="111111"/>
-                </a:solidFill>
-                <a:latin typeface="Kalam Bold" pitchFamily="34" charset="0"/>
-                <a:ea typeface="Kalam Bold" pitchFamily="34" charset="-122"/>
-                <a:cs typeface="Kalam Bold" pitchFamily="34" charset="-120"/>
-              </a:rPr>
-              <a:t>Business meaning:</a:t>
-            </a:r>
-            <a:r>
-              <a:rPr lang="en-US" sz="1050" dirty="0">
-                <a:solidFill>
-                  <a:srgbClr val="111111"/>
-                </a:solidFill>
-                <a:latin typeface="Kalam Bold" pitchFamily="34" charset="0"/>
-                <a:ea typeface="Kalam Bold" pitchFamily="34" charset="-122"/>
-                <a:cs typeface="Kalam Bold" pitchFamily="34" charset="-120"/>
-              </a:rPr>
-              <a:t> If evidence,</a:t>
-            </a:r>
-            <a:r>
-              <a:rPr lang="en-US" sz="1050" dirty="0">
-                <a:solidFill>
-                  <a:srgbClr val="111111"/>
-                </a:solidFill>
-                <a:latin typeface="Kalam Bold" pitchFamily="34" charset="0"/>
-                <a:ea typeface="Kalam Bold" pitchFamily="34" charset="-122"/>
-                <a:cs typeface="Kalam Bold" pitchFamily="34" charset="-120"/>
-              </a:rPr>
-              <a:t> review, or huma</a:t>
-            </a:r>
-            <a:r>
-              <a:rPr lang="en-US" sz="1050" dirty="0">
-                <a:solidFill>
-                  <a:srgbClr val="111111"/>
-                </a:solidFill>
-                <a:latin typeface="Kalam Bold" pitchFamily="34" charset="0"/>
-                <a:ea typeface="Kalam Bold" pitchFamily="34" charset="-122"/>
-                <a:cs typeface="Kalam Bold" pitchFamily="34" charset="-120"/>
-              </a:rPr>
-              <a:t>n verdict is mis</a:t>
-            </a:r>
-            <a:r>
-              <a:rPr lang="en-US" sz="1050" dirty="0">
-                <a:solidFill>
-                  <a:srgbClr val="111111"/>
-                </a:solidFill>
-                <a:latin typeface="Kalam Bold" pitchFamily="34" charset="0"/>
-                <a:ea typeface="Kalam Bold" pitchFamily="34" charset="-122"/>
-                <a:cs typeface="Kalam Bold" pitchFamily="34" charset="-120"/>
-              </a:rPr>
-              <a:t>sing, the migrati</a:t>
-            </a:r>
-            <a:r>
-              <a:rPr lang="en-US" sz="1050" dirty="0">
-                <a:solidFill>
-                  <a:srgbClr val="111111"/>
-                </a:solidFill>
-                <a:latin typeface="Kalam Bold" pitchFamily="34" charset="0"/>
-                <a:ea typeface="Kalam Bold" pitchFamily="34" charset="-122"/>
-                <a:cs typeface="Kalam Bold" pitchFamily="34" charset="-120"/>
-              </a:rPr>
-              <a:t>on is not done.</a:t>
-            </a:r>
-            <a:endParaRPr lang="en-US" sz="1000" dirty="0"/>
-          </a:p>
-        </p:txBody>
-      </p:sp>
-    </p:spTree>
-  </p:cSld>
-  <p:clrMapOvr>
-    <a:masterClrMapping/>
-  </p:clrMapOvr>
-</p:sld>
-</file>
-
 <file path=ppt/slides/slide3.xml><?xml version="1.0" encoding="utf-8"?>
 <p:sld xmlns:a="http://schemas.openxmlformats.org/drawingml/2006/main" xmlns:r="http://schemas.openxmlformats.org/officeDocument/2006/relationships" xmlns:p="http://schemas.openxmlformats.org/presentationml/2006/main">
   <p:cSld name="Slide 3">
@@ -26186,8 +24822,8 @@
         </p:nvSpPr>
         <p:spPr>
           <a:xfrm>
-            <a:off x="142875" y="85725"/>
-            <a:ext cx="8858250" cy="457200"/>
+            <a:off x="114300" y="57150"/>
+            <a:ext cx="8915400" cy="400050"/>
           </a:xfrm>
           <a:prstGeom prst="rect">
             <a:avLst/>
@@ -26208,8 +24844,8 @@
         </p:nvSpPr>
         <p:spPr>
           <a:xfrm>
-            <a:off x="142875" y="514350"/>
-            <a:ext cx="8858250" cy="28575"/>
+            <a:off x="114300" y="428625"/>
+            <a:ext cx="8915400" cy="28575"/>
           </a:xfrm>
           <a:prstGeom prst="rect">
             <a:avLst/>
@@ -26228,8 +24864,8 @@
         </p:nvSpPr>
         <p:spPr>
           <a:xfrm>
-            <a:off x="142875" y="85725"/>
-            <a:ext cx="4061222" cy="270011"/>
+            <a:off x="114300" y="57150"/>
+            <a:ext cx="3353991" cy="225028"/>
           </a:xfrm>
           <a:prstGeom prst="rect">
             <a:avLst/>
@@ -26250,7 +24886,7 @@
               <a:buNone/>
             </a:pPr>
             <a:r>
-              <a:rPr lang="en-US" sz="1800" b="1" dirty="0">
+              <a:rPr lang="en-US" sz="1500" b="1" dirty="0">
                 <a:solidFill>
                   <a:srgbClr val="111111"/>
                 </a:solidFill>
@@ -26260,7 +24896,7 @@
               </a:rPr>
               <a:t>AGENTS.MD: THE OPERATING CONTRACT</a:t>
             </a:r>
-            <a:endParaRPr lang="en-US" sz="1800" dirty="0"/>
+            <a:endParaRPr lang="en-US" sz="1500" dirty="0"/>
           </a:p>
         </p:txBody>
       </p:sp>
@@ -26272,8 +24908,8 @@
         </p:nvSpPr>
         <p:spPr>
           <a:xfrm>
-            <a:off x="142875" y="384311"/>
-            <a:ext cx="4061222" cy="182166"/>
+            <a:off x="114300" y="296466"/>
+            <a:ext cx="3353991" cy="160734"/>
           </a:xfrm>
           <a:prstGeom prst="rect">
             <a:avLst/>
@@ -26291,7 +24927,7 @@
               <a:buNone/>
             </a:pPr>
             <a:r>
-              <a:rPr lang="en-US" sz="850" dirty="0">
+              <a:rPr lang="en-US" sz="750" dirty="0">
                 <a:solidFill>
                   <a:srgbClr val="0055FF"/>
                 </a:solidFill>
@@ -26301,7 +24937,7 @@
               </a:rPr>
               <a:t>What to read, what may run, and who owns each decision.</a:t>
             </a:r>
-            <a:endParaRPr lang="en-US" sz="850" dirty="0"/>
+            <a:endParaRPr lang="en-US" sz="750" dirty="0"/>
           </a:p>
         </p:txBody>
       </p:sp>
@@ -26313,8 +24949,8 @@
         </p:nvSpPr>
         <p:spPr>
           <a:xfrm>
-            <a:off x="142875" y="642938"/>
-            <a:ext cx="2571750" cy="742950"/>
+            <a:off x="114300" y="528638"/>
+            <a:ext cx="2286000" cy="644947"/>
           </a:xfrm>
           <a:prstGeom prst="rect">
             <a:avLst/>
@@ -26338,8 +24974,8 @@
         </p:nvSpPr>
         <p:spPr>
           <a:xfrm>
-            <a:off x="200025" y="700088"/>
-            <a:ext cx="214313" cy="214313"/>
+            <a:off x="157163" y="571500"/>
+            <a:ext cx="185738" cy="185738"/>
           </a:xfrm>
           <a:prstGeom prst="rect">
             <a:avLst/>
@@ -26363,8 +24999,8 @@
         </p:nvSpPr>
         <p:spPr>
           <a:xfrm>
-            <a:off x="200025" y="700088"/>
-            <a:ext cx="214313" cy="214313"/>
+            <a:off x="157163" y="571500"/>
+            <a:ext cx="185738" cy="185738"/>
           </a:xfrm>
           <a:prstGeom prst="rect">
             <a:avLst/>
@@ -26382,7 +25018,7 @@
               <a:buNone/>
             </a:pPr>
             <a:r>
-              <a:rPr lang="en-US" sz="950" dirty="0">
+              <a:rPr lang="en-US" sz="850" dirty="0">
                 <a:solidFill>
                   <a:srgbClr val="FFFFFF"/>
                 </a:solidFill>
@@ -26392,7 +25028,7 @@
               </a:rPr>
               <a:t>1</a:t>
             </a:r>
-            <a:endParaRPr lang="en-US" sz="950" dirty="0"/>
+            <a:endParaRPr lang="en-US" sz="850" dirty="0"/>
           </a:p>
         </p:txBody>
       </p:sp>
@@ -26404,8 +25040,8 @@
         </p:nvSpPr>
         <p:spPr>
           <a:xfrm>
-            <a:off x="485775" y="714375"/>
-            <a:ext cx="2143125" cy="128588"/>
+            <a:off x="428625" y="585788"/>
+            <a:ext cx="1900238" cy="114300"/>
           </a:xfrm>
           <a:prstGeom prst="rect">
             <a:avLst/>
@@ -26426,7 +25062,7 @@
               <a:buNone/>
             </a:pPr>
             <a:r>
-              <a:rPr lang="en-US" sz="900" b="1" dirty="0">
+              <a:rPr lang="en-US" sz="800" b="1" dirty="0">
                 <a:solidFill>
                   <a:srgbClr val="0055FF"/>
                 </a:solidFill>
@@ -26436,7 +25072,7 @@
               </a:rPr>
               <a:t>READ ORDER</a:t>
             </a:r>
-            <a:endParaRPr lang="en-US" sz="900" dirty="0"/>
+            <a:endParaRPr lang="en-US" sz="800" dirty="0"/>
           </a:p>
         </p:txBody>
       </p:sp>
@@ -26448,8 +25084,8 @@
         </p:nvSpPr>
         <p:spPr>
           <a:xfrm>
-            <a:off x="485775" y="885825"/>
-            <a:ext cx="2143125" cy="385763"/>
+            <a:off x="428625" y="728663"/>
+            <a:ext cx="1900238" cy="344909"/>
           </a:xfrm>
           <a:prstGeom prst="rect">
             <a:avLst/>
@@ -26465,12 +25101,12 @@
           <a:p>
             <a:pPr algn="l" indent="0" marL="0">
               <a:lnSpc>
-                <a:spcPct val="96000"/>
+                <a:spcPct val="92000"/>
               </a:lnSpc>
               <a:buNone/>
             </a:pPr>
             <a:r>
-              <a:rPr lang="en-US" sz="750" b="1" dirty="0">
+              <a:rPr lang="en-US" sz="700" b="1" dirty="0">
                 <a:solidFill>
                   <a:srgbClr val="30343B"/>
                 </a:solidFill>
@@ -26480,7 +25116,7 @@
               </a:rPr>
               <a:t>Forces the AI to load the business constraints, run state, and exact stage rules.</a:t>
             </a:r>
-            <a:endParaRPr lang="en-US" sz="750" dirty="0"/>
+            <a:endParaRPr lang="en-US" sz="700" dirty="0"/>
           </a:p>
         </p:txBody>
       </p:sp>
@@ -26492,8 +25128,8 @@
         </p:nvSpPr>
         <p:spPr>
           <a:xfrm>
-            <a:off x="142875" y="1443038"/>
-            <a:ext cx="2571750" cy="614363"/>
+            <a:off x="114300" y="1202159"/>
+            <a:ext cx="2286000" cy="529977"/>
           </a:xfrm>
           <a:prstGeom prst="rect">
             <a:avLst/>
@@ -26517,8 +25153,8 @@
         </p:nvSpPr>
         <p:spPr>
           <a:xfrm>
-            <a:off x="200025" y="1500188"/>
-            <a:ext cx="214313" cy="214313"/>
+            <a:off x="157163" y="1245022"/>
+            <a:ext cx="185738" cy="185738"/>
           </a:xfrm>
           <a:prstGeom prst="rect">
             <a:avLst/>
@@ -26542,8 +25178,8 @@
         </p:nvSpPr>
         <p:spPr>
           <a:xfrm>
-            <a:off x="200025" y="1500188"/>
-            <a:ext cx="214313" cy="214313"/>
+            <a:off x="157163" y="1245022"/>
+            <a:ext cx="185738" cy="185738"/>
           </a:xfrm>
           <a:prstGeom prst="rect">
             <a:avLst/>
@@ -26561,7 +25197,7 @@
               <a:buNone/>
             </a:pPr>
             <a:r>
-              <a:rPr lang="en-US" sz="950" dirty="0">
+              <a:rPr lang="en-US" sz="850" dirty="0">
                 <a:solidFill>
                   <a:srgbClr val="FFFFFF"/>
                 </a:solidFill>
@@ -26571,7 +25207,7 @@
               </a:rPr>
               <a:t>2</a:t>
             </a:r>
-            <a:endParaRPr lang="en-US" sz="950" dirty="0"/>
+            <a:endParaRPr lang="en-US" sz="850" dirty="0"/>
           </a:p>
         </p:txBody>
       </p:sp>
@@ -26583,8 +25219,8 @@
         </p:nvSpPr>
         <p:spPr>
           <a:xfrm>
-            <a:off x="485775" y="1514475"/>
-            <a:ext cx="2143125" cy="128588"/>
+            <a:off x="428625" y="1259309"/>
+            <a:ext cx="1900238" cy="114300"/>
           </a:xfrm>
           <a:prstGeom prst="rect">
             <a:avLst/>
@@ -26605,7 +25241,7 @@
               <a:buNone/>
             </a:pPr>
             <a:r>
-              <a:rPr lang="en-US" sz="900" b="1" dirty="0">
+              <a:rPr lang="en-US" sz="800" b="1" dirty="0">
                 <a:solidFill>
                   <a:srgbClr val="0055FF"/>
                 </a:solidFill>
@@ -26615,7 +25251,7 @@
               </a:rPr>
               <a:t>SKILL SEQUENCE</a:t>
             </a:r>
-            <a:endParaRPr lang="en-US" sz="900" dirty="0"/>
+            <a:endParaRPr lang="en-US" sz="800" dirty="0"/>
           </a:p>
         </p:txBody>
       </p:sp>
@@ -26627,8 +25263,8 @@
         </p:nvSpPr>
         <p:spPr>
           <a:xfrm>
-            <a:off x="485775" y="1685925"/>
-            <a:ext cx="2143125" cy="257175"/>
+            <a:off x="428625" y="1402184"/>
+            <a:ext cx="1900238" cy="229939"/>
           </a:xfrm>
           <a:prstGeom prst="rect">
             <a:avLst/>
@@ -26644,12 +25280,12 @@
           <a:p>
             <a:pPr algn="l" indent="0" marL="0">
               <a:lnSpc>
-                <a:spcPct val="96000"/>
+                <a:spcPct val="92000"/>
               </a:lnSpc>
               <a:buNone/>
             </a:pPr>
             <a:r>
-              <a:rPr lang="en-US" sz="750" b="1" dirty="0">
+              <a:rPr lang="en-US" sz="700" b="1" dirty="0">
                 <a:solidFill>
                   <a:srgbClr val="30343B"/>
                 </a:solidFill>
@@ -26659,7 +25295,7 @@
               </a:rPr>
               <a:t>Defines the only permitted order of execution.</a:t>
             </a:r>
-            <a:endParaRPr lang="en-US" sz="750" dirty="0"/>
+            <a:endParaRPr lang="en-US" sz="700" dirty="0"/>
           </a:p>
         </p:txBody>
       </p:sp>
@@ -26671,8 +25307,8 @@
         </p:nvSpPr>
         <p:spPr>
           <a:xfrm>
-            <a:off x="142875" y="2114550"/>
-            <a:ext cx="2571750" cy="614363"/>
+            <a:off x="114300" y="1760711"/>
+            <a:ext cx="2286000" cy="644947"/>
           </a:xfrm>
           <a:prstGeom prst="rect">
             <a:avLst/>
@@ -26696,8 +25332,8 @@
         </p:nvSpPr>
         <p:spPr>
           <a:xfrm>
-            <a:off x="200025" y="2171700"/>
-            <a:ext cx="214313" cy="214313"/>
+            <a:off x="157163" y="1803574"/>
+            <a:ext cx="185738" cy="185738"/>
           </a:xfrm>
           <a:prstGeom prst="rect">
             <a:avLst/>
@@ -26721,8 +25357,8 @@
         </p:nvSpPr>
         <p:spPr>
           <a:xfrm>
-            <a:off x="200025" y="2171700"/>
-            <a:ext cx="214313" cy="214313"/>
+            <a:off x="157163" y="1803574"/>
+            <a:ext cx="185738" cy="185738"/>
           </a:xfrm>
           <a:prstGeom prst="rect">
             <a:avLst/>
@@ -26740,7 +25376,7 @@
               <a:buNone/>
             </a:pPr>
             <a:r>
-              <a:rPr lang="en-US" sz="950" dirty="0">
+              <a:rPr lang="en-US" sz="850" dirty="0">
                 <a:solidFill>
                   <a:srgbClr val="FFFFFF"/>
                 </a:solidFill>
@@ -26750,7 +25386,7 @@
               </a:rPr>
               <a:t>3</a:t>
             </a:r>
-            <a:endParaRPr lang="en-US" sz="950" dirty="0"/>
+            <a:endParaRPr lang="en-US" sz="850" dirty="0"/>
           </a:p>
         </p:txBody>
       </p:sp>
@@ -26762,8 +25398,8 @@
         </p:nvSpPr>
         <p:spPr>
           <a:xfrm>
-            <a:off x="485775" y="2185988"/>
-            <a:ext cx="2143125" cy="128588"/>
+            <a:off x="428625" y="1817861"/>
+            <a:ext cx="1900238" cy="114300"/>
           </a:xfrm>
           <a:prstGeom prst="rect">
             <a:avLst/>
@@ -26784,7 +25420,7 @@
               <a:buNone/>
             </a:pPr>
             <a:r>
-              <a:rPr lang="en-US" sz="900" b="1" dirty="0">
+              <a:rPr lang="en-US" sz="800" b="1" dirty="0">
                 <a:solidFill>
                   <a:srgbClr val="0055FF"/>
                 </a:solidFill>
@@ -26794,7 +25430,7 @@
               </a:rPr>
               <a:t>ROLES &amp; AUTHORITY</a:t>
             </a:r>
-            <a:endParaRPr lang="en-US" sz="900" dirty="0"/>
+            <a:endParaRPr lang="en-US" sz="800" dirty="0"/>
           </a:p>
         </p:txBody>
       </p:sp>
@@ -26806,8 +25442,8 @@
         </p:nvSpPr>
         <p:spPr>
           <a:xfrm>
-            <a:off x="485775" y="2357438"/>
-            <a:ext cx="2143125" cy="257175"/>
+            <a:off x="428625" y="1960736"/>
+            <a:ext cx="1900238" cy="229939"/>
           </a:xfrm>
           <a:prstGeom prst="rect">
             <a:avLst/>
@@ -26823,12 +25459,12 @@
           <a:p>
             <a:pPr algn="l" indent="0" marL="0">
               <a:lnSpc>
-                <a:spcPct val="96000"/>
+                <a:spcPct val="92000"/>
               </a:lnSpc>
               <a:buNone/>
             </a:pPr>
             <a:r>
-              <a:rPr lang="en-US" sz="750" b="1" dirty="0">
+              <a:rPr lang="en-US" sz="700" b="1" dirty="0">
                 <a:solidFill>
                   <a:srgbClr val="30343B"/>
                 </a:solidFill>
@@ -26838,7 +25474,7 @@
               </a:rPr>
               <a:t>Separates analysis, building, diagnosis, checking, routing, and human approval.</a:t>
             </a:r>
-            <a:endParaRPr lang="en-US" sz="750" dirty="0"/>
+            <a:endParaRPr lang="en-US" sz="700" dirty="0"/>
           </a:p>
         </p:txBody>
       </p:sp>
@@ -26850,290 +25486,14 @@
         </p:nvSpPr>
         <p:spPr>
           <a:xfrm>
-            <a:off x="2843213" y="614363"/>
-            <a:ext cx="6157913" cy="4186461"/>
+            <a:off x="2486025" y="514350"/>
+            <a:ext cx="6543675" cy="4357688"/>
           </a:xfrm>
           <a:prstGeom prst="rect">
             <a:avLst/>
           </a:prstGeom>
           <a:solidFill>
             <a:srgbClr val="1E1E1E"/>
-          </a:solidFill>
-          <a:ln w="27432">
-            <a:solidFill>
-              <a:srgbClr val="111111"/>
-            </a:solidFill>
-            <a:prstDash val="solid"/>
-          </a:ln>
-        </p:spPr>
-      </p:sp>
-      <p:sp>
-        <p:nvSpPr>
-          <p:cNvPr id="24" name="Shape 20"/>
-          <p:cNvSpPr/>
-          <p:nvPr/>
-        </p:nvSpPr>
-        <p:spPr>
-          <a:xfrm>
-            <a:off x="2843213" y="614363"/>
-            <a:ext cx="6157913" cy="242888"/>
-          </a:xfrm>
-          <a:prstGeom prst="rect">
-            <a:avLst/>
-          </a:prstGeom>
-          <a:solidFill>
-            <a:srgbClr val="323233"/>
-          </a:solidFill>
-          <a:ln/>
-        </p:spPr>
-      </p:sp>
-      <p:sp>
-        <p:nvSpPr>
-          <p:cNvPr id="25" name="Shape 21"/>
-          <p:cNvSpPr/>
-          <p:nvPr/>
-        </p:nvSpPr>
-        <p:spPr>
-          <a:xfrm>
-            <a:off x="2843213" y="842963"/>
-            <a:ext cx="6157913" cy="14288"/>
-          </a:xfrm>
-          <a:prstGeom prst="rect">
-            <a:avLst/>
-          </a:prstGeom>
-          <a:solidFill>
-            <a:srgbClr val="111111"/>
-          </a:solidFill>
-          <a:ln/>
-        </p:spPr>
-      </p:sp>
-      <p:sp>
-        <p:nvSpPr>
-          <p:cNvPr id="26" name="Shape 22"/>
-          <p:cNvSpPr/>
-          <p:nvPr/>
-        </p:nvSpPr>
-        <p:spPr>
-          <a:xfrm>
-            <a:off x="3343275" y="621506"/>
-            <a:ext cx="732234" cy="228600"/>
-          </a:xfrm>
-          <a:prstGeom prst="rect">
-            <a:avLst/>
-          </a:prstGeom>
-          <a:solidFill>
-            <a:srgbClr val="1E1E1E"/>
-          </a:solidFill>
-          <a:ln/>
-        </p:spPr>
-      </p:sp>
-      <p:sp>
-        <p:nvSpPr>
-          <p:cNvPr id="27" name="Shape 23"/>
-          <p:cNvSpPr/>
-          <p:nvPr/>
-        </p:nvSpPr>
-        <p:spPr>
-          <a:xfrm>
-            <a:off x="3343275" y="621506"/>
-            <a:ext cx="732234" cy="28575"/>
-          </a:xfrm>
-          <a:prstGeom prst="rect">
-            <a:avLst/>
-          </a:prstGeom>
-          <a:solidFill>
-            <a:srgbClr val="0055FF"/>
-          </a:solidFill>
-          <a:ln/>
-        </p:spPr>
-      </p:sp>
-      <p:sp>
-        <p:nvSpPr>
-          <p:cNvPr id="28" name="Text 24"/>
-          <p:cNvSpPr/>
-          <p:nvPr/>
-        </p:nvSpPr>
-        <p:spPr>
-          <a:xfrm>
-            <a:off x="3343275" y="621506"/>
-            <a:ext cx="732234" cy="228600"/>
-          </a:xfrm>
-          <a:prstGeom prst="rect">
-            <a:avLst/>
-          </a:prstGeom>
-          <a:noFill/>
-          <a:ln/>
-        </p:spPr>
-        <p:txBody>
-          <a:bodyPr wrap="none" lIns="102108" tIns="51054" rIns="102108" bIns="0" rtlCol="0" anchor="t">
-            <a:spAutoFit/>
-          </a:bodyPr>
-          <a:lstStyle/>
-          <a:p>
-            <a:pPr algn="l" indent="0" marL="0">
-              <a:buNone/>
-            </a:pPr>
-            <a:r>
-              <a:rPr lang="en-US" sz="650" b="1" dirty="0">
-                <a:solidFill>
-                  <a:srgbClr val="D4D4D4"/>
-                </a:solidFill>
-                <a:latin typeface="Inter Bold" pitchFamily="34" charset="0"/>
-                <a:ea typeface="Inter Bold" pitchFamily="34" charset="-122"/>
-                <a:cs typeface="Inter Bold" pitchFamily="34" charset="-120"/>
-              </a:rPr>
-              <a:t>AGENTS.md</a:t>
-            </a:r>
-            <a:endParaRPr lang="en-US" sz="650" dirty="0"/>
-          </a:p>
-        </p:txBody>
-      </p:sp>
-      <p:sp>
-        <p:nvSpPr>
-          <p:cNvPr id="29" name="Text 25"/>
-          <p:cNvSpPr/>
-          <p:nvPr/>
-        </p:nvSpPr>
-        <p:spPr>
-          <a:xfrm>
-            <a:off x="7954566" y="689372"/>
-            <a:ext cx="975122" cy="92869"/>
-          </a:xfrm>
-          <a:prstGeom prst="rect">
-            <a:avLst/>
-          </a:prstGeom>
-          <a:noFill/>
-          <a:ln/>
-        </p:spPr>
-        <p:txBody>
-          <a:bodyPr wrap="none" lIns="0" tIns="0" rIns="0" bIns="0" rtlCol="0" anchor="t">
-            <a:spAutoFit/>
-          </a:bodyPr>
-          <a:lstStyle/>
-          <a:p>
-            <a:pPr algn="l" indent="0" marL="0">
-              <a:buNone/>
-            </a:pPr>
-            <a:r>
-              <a:rPr lang="en-US" sz="550" b="1" spc="1" kern="0" dirty="0">
-                <a:solidFill>
-                  <a:srgbClr val="9CDCFE"/>
-                </a:solidFill>
-                <a:latin typeface="Inter SemiBold" pitchFamily="34" charset="0"/>
-                <a:ea typeface="Inter SemiBold" pitchFamily="34" charset="-122"/>
-                <a:cs typeface="Inter SemiBold" pitchFamily="34" charset="-120"/>
-              </a:rPr>
-              <a:t>MARKDOWN PREVIEW</a:t>
-            </a:r>
-            <a:endParaRPr lang="en-US" sz="550" dirty="0"/>
-          </a:p>
-        </p:txBody>
-      </p:sp>
-      <p:sp>
-        <p:nvSpPr>
-          <p:cNvPr id="30" name="Shape 26"/>
-          <p:cNvSpPr/>
-          <p:nvPr/>
-        </p:nvSpPr>
-        <p:spPr>
-          <a:xfrm>
-            <a:off x="2843213" y="857250"/>
-            <a:ext cx="6157913" cy="3943350"/>
-          </a:xfrm>
-          <a:prstGeom prst="rect">
-            <a:avLst/>
-          </a:prstGeom>
-          <a:solidFill>
-            <a:srgbClr val="FFFFFF"/>
-          </a:solidFill>
-          <a:ln/>
-        </p:spPr>
-      </p:sp>
-      <p:sp>
-        <p:nvSpPr>
-          <p:cNvPr id="31" name="Text 27"/>
-          <p:cNvSpPr/>
-          <p:nvPr/>
-        </p:nvSpPr>
-        <p:spPr>
-          <a:xfrm>
-            <a:off x="2957513" y="942975"/>
-            <a:ext cx="5929313" cy="242888"/>
-          </a:xfrm>
-          <a:prstGeom prst="rect">
-            <a:avLst/>
-          </a:prstGeom>
-          <a:noFill/>
-          <a:ln/>
-        </p:spPr>
-        <p:txBody>
-          <a:bodyPr wrap="none" lIns="0" tIns="0" rIns="0" bIns="51054" rtlCol="0" anchor="t">
-            <a:spAutoFit/>
-          </a:bodyPr>
-          <a:lstStyle/>
-          <a:p>
-            <a:pPr algn="l" indent="0" marL="0">
-              <a:lnSpc>
-                <a:spcPct val="104000"/>
-              </a:lnSpc>
-              <a:buNone/>
-            </a:pPr>
-            <a:r>
-              <a:rPr lang="en-US" sz="1000" b="1" dirty="0">
-                <a:solidFill>
-                  <a:srgbClr val="222222"/>
-                </a:solidFill>
-                <a:latin typeface="Inter Bold" pitchFamily="34" charset="0"/>
-                <a:ea typeface="Inter Bold" pitchFamily="34" charset="-122"/>
-                <a:cs typeface="Inter Bold" pitchFamily="34" charset="-120"/>
-              </a:rPr>
-              <a:t>Agent Operating Contract</a:t>
-            </a:r>
-            <a:endParaRPr lang="en-US" sz="1000" dirty="0"/>
-          </a:p>
-        </p:txBody>
-      </p:sp>
-      <p:sp>
-        <p:nvSpPr>
-          <p:cNvPr id="32" name="Shape 28"/>
-          <p:cNvSpPr/>
-          <p:nvPr/>
-        </p:nvSpPr>
-        <p:spPr>
-          <a:xfrm>
-            <a:off x="2957513" y="1257300"/>
-            <a:ext cx="5929313" cy="1097403"/>
-          </a:xfrm>
-          <a:prstGeom prst="rect">
-            <a:avLst/>
-          </a:prstGeom>
-          <a:solidFill>
-            <a:srgbClr val="FFF8F7"/>
-          </a:solidFill>
-          <a:ln w="27432">
-            <a:solidFill>
-              <a:srgbClr val="FF443A"/>
-            </a:solidFill>
-            <a:prstDash val="solid"/>
-          </a:ln>
-        </p:spPr>
-      </p:sp>
-      <p:sp>
-        <p:nvSpPr>
-          <p:cNvPr id="33" name="Shape 29"/>
-          <p:cNvSpPr/>
-          <p:nvPr/>
-        </p:nvSpPr>
-        <p:spPr>
-          <a:xfrm>
-            <a:off x="8758238" y="1185863"/>
-            <a:ext cx="200025" cy="200025"/>
-          </a:xfrm>
-          <a:prstGeom prst="rect">
-            <a:avLst/>
-          </a:prstGeom>
-          <a:solidFill>
-            <a:srgbClr val="FF443A"/>
           </a:solidFill>
           <a:ln w="18288">
             <a:solidFill>
@@ -27145,234 +25505,135 @@
       </p:sp>
       <p:sp>
         <p:nvSpPr>
-          <p:cNvPr id="34" name="Text 30"/>
-          <p:cNvSpPr/>
-          <p:nvPr/>
-        </p:nvSpPr>
-        <p:spPr>
-          <a:xfrm>
-            <a:off x="8758238" y="1185863"/>
-            <a:ext cx="200025" cy="200025"/>
-          </a:xfrm>
-          <a:prstGeom prst="rect">
-            <a:avLst/>
-          </a:prstGeom>
-          <a:noFill/>
-          <a:ln/>
-        </p:spPr>
-        <p:txBody>
-          <a:bodyPr wrap="none" lIns="0" tIns="0" rIns="0" bIns="0" rtlCol="0" anchor="ctr">
-            <a:spAutoFit/>
-          </a:bodyPr>
-          <a:lstStyle/>
-          <a:p>
-            <a:pPr algn="ctr" indent="0" marL="0">
-              <a:lnSpc>
-                <a:spcPct val="104000"/>
-              </a:lnSpc>
-              <a:buNone/>
-            </a:pPr>
-            <a:r>
-              <a:rPr lang="en-US" sz="850" dirty="0">
-                <a:solidFill>
-                  <a:srgbClr val="FFFFFF"/>
-                </a:solidFill>
-                <a:latin typeface="Oswald SemiBold" pitchFamily="34" charset="0"/>
-                <a:ea typeface="Oswald SemiBold" pitchFamily="34" charset="-122"/>
-                <a:cs typeface="Oswald SemiBold" pitchFamily="34" charset="-120"/>
-              </a:rPr>
-              <a:t>1</a:t>
-            </a:r>
-            <a:endParaRPr lang="en-US" sz="850" dirty="0"/>
-          </a:p>
-        </p:txBody>
-      </p:sp>
-      <p:sp>
-        <p:nvSpPr>
-          <p:cNvPr id="35" name="Text 31"/>
-          <p:cNvSpPr/>
-          <p:nvPr/>
-        </p:nvSpPr>
-        <p:spPr>
-          <a:xfrm>
-            <a:off x="3043238" y="1328738"/>
-            <a:ext cx="5757863" cy="167153"/>
-          </a:xfrm>
-          <a:prstGeom prst="rect">
-            <a:avLst/>
-          </a:prstGeom>
-          <a:noFill/>
-          <a:ln/>
-        </p:spPr>
-        <p:txBody>
-          <a:bodyPr wrap="none" lIns="0" tIns="0" rIns="0" bIns="0" rtlCol="0" anchor="t">
+          <p:cNvPr id="24" name="Shape 20"/>
+          <p:cNvSpPr/>
+          <p:nvPr/>
+        </p:nvSpPr>
+        <p:spPr>
+          <a:xfrm>
+            <a:off x="2486025" y="514350"/>
+            <a:ext cx="6543675" cy="214313"/>
+          </a:xfrm>
+          <a:prstGeom prst="rect">
+            <a:avLst/>
+          </a:prstGeom>
+          <a:solidFill>
+            <a:srgbClr val="323233"/>
+          </a:solidFill>
+          <a:ln/>
+        </p:spPr>
+      </p:sp>
+      <p:sp>
+        <p:nvSpPr>
+          <p:cNvPr id="25" name="Shape 21"/>
+          <p:cNvSpPr/>
+          <p:nvPr/>
+        </p:nvSpPr>
+        <p:spPr>
+          <a:xfrm>
+            <a:off x="2486025" y="714375"/>
+            <a:ext cx="6543675" cy="14288"/>
+          </a:xfrm>
+          <a:prstGeom prst="rect">
+            <a:avLst/>
+          </a:prstGeom>
+          <a:solidFill>
+            <a:srgbClr val="111111"/>
+          </a:solidFill>
+          <a:ln/>
+        </p:spPr>
+      </p:sp>
+      <p:sp>
+        <p:nvSpPr>
+          <p:cNvPr id="26" name="Shape 22"/>
+          <p:cNvSpPr/>
+          <p:nvPr/>
+        </p:nvSpPr>
+        <p:spPr>
+          <a:xfrm>
+            <a:off x="2914650" y="521494"/>
+            <a:ext cx="660797" cy="200025"/>
+          </a:xfrm>
+          <a:prstGeom prst="rect">
+            <a:avLst/>
+          </a:prstGeom>
+          <a:solidFill>
+            <a:srgbClr val="1E1E1E"/>
+          </a:solidFill>
+          <a:ln/>
+        </p:spPr>
+      </p:sp>
+      <p:sp>
+        <p:nvSpPr>
+          <p:cNvPr id="27" name="Shape 23"/>
+          <p:cNvSpPr/>
+          <p:nvPr/>
+        </p:nvSpPr>
+        <p:spPr>
+          <a:xfrm>
+            <a:off x="2914650" y="521494"/>
+            <a:ext cx="660797" cy="28575"/>
+          </a:xfrm>
+          <a:prstGeom prst="rect">
+            <a:avLst/>
+          </a:prstGeom>
+          <a:solidFill>
+            <a:srgbClr val="0055FF"/>
+          </a:solidFill>
+          <a:ln/>
+        </p:spPr>
+      </p:sp>
+      <p:sp>
+        <p:nvSpPr>
+          <p:cNvPr id="28" name="Text 24"/>
+          <p:cNvSpPr/>
+          <p:nvPr/>
+        </p:nvSpPr>
+        <p:spPr>
+          <a:xfrm>
+            <a:off x="2914650" y="521494"/>
+            <a:ext cx="660797" cy="200025"/>
+          </a:xfrm>
+          <a:prstGeom prst="rect">
+            <a:avLst/>
+          </a:prstGeom>
+          <a:noFill/>
+          <a:ln/>
+        </p:spPr>
+        <p:txBody>
+          <a:bodyPr wrap="none" lIns="85090" tIns="34036" rIns="85090" bIns="0" rtlCol="0" anchor="t">
             <a:spAutoFit/>
           </a:bodyPr>
           <a:lstStyle/>
           <a:p>
             <a:pPr algn="l" indent="0" marL="0">
-              <a:lnSpc>
-                <a:spcPct val="104000"/>
-              </a:lnSpc>
-              <a:buNone/>
-            </a:pPr>
-            <a:r>
-              <a:rPr lang="en-US" sz="900" b="1" dirty="0">
-                <a:solidFill>
-                  <a:srgbClr val="111111"/>
+              <a:buNone/>
+            </a:pPr>
+            <a:r>
+              <a:rPr lang="en-US" sz="600" b="1" dirty="0">
+                <a:solidFill>
+                  <a:srgbClr val="D4D4D4"/>
                 </a:solidFill>
                 <a:latin typeface="Inter Bold" pitchFamily="34" charset="0"/>
                 <a:ea typeface="Inter Bold" pitchFamily="34" charset="-122"/>
                 <a:cs typeface="Inter Bold" pitchFamily="34" charset="-120"/>
               </a:rPr>
-              <a:t>Mandatory read order</a:t>
-            </a:r>
-            <a:endParaRPr lang="en-US" sz="900" dirty="0"/>
-          </a:p>
-        </p:txBody>
-      </p:sp>
-      <p:sp>
-        <p:nvSpPr>
-          <p:cNvPr id="36" name="Shape 32"/>
-          <p:cNvSpPr/>
-          <p:nvPr/>
-        </p:nvSpPr>
-        <p:spPr>
-          <a:xfrm>
-            <a:off x="3200400" y="1545896"/>
-            <a:ext cx="1171575" cy="153591"/>
-          </a:xfrm>
-          <a:prstGeom prst="rect">
-            <a:avLst/>
-          </a:prstGeom>
-          <a:solidFill>
-            <a:srgbClr val="F6F8FA"/>
-          </a:solidFill>
-          <a:ln/>
-        </p:spPr>
-      </p:sp>
-      <p:sp>
-        <p:nvSpPr>
-          <p:cNvPr id="37" name="Text 33"/>
-          <p:cNvSpPr/>
-          <p:nvPr/>
-        </p:nvSpPr>
-        <p:spPr>
-          <a:xfrm>
-            <a:off x="3200400" y="1545896"/>
-            <a:ext cx="1171575" cy="153591"/>
-          </a:xfrm>
-          <a:prstGeom prst="rect">
-            <a:avLst/>
-          </a:prstGeom>
-          <a:noFill/>
-          <a:ln/>
-        </p:spPr>
-        <p:txBody>
-          <a:bodyPr wrap="none" lIns="51054" tIns="17018" rIns="51054" bIns="17018" rtlCol="0" anchor="t">
-            <a:spAutoFit/>
-          </a:bodyPr>
-          <a:lstStyle/>
-          <a:p>
-            <a:pPr algn="l" marL="127000" indent="-127000">
-              <a:lnSpc>
-                <a:spcPct val="104000"/>
-              </a:lnSpc>
-              <a:buSzPct val="100000"/>
-              <a:buFont typeface="+mj-lt"/>
-              <a:buAutoNum type="arabicPeriod" startAt="1"/>
-            </a:pPr>
-            <a:r>
-              <a:rPr lang="en-US" sz="650" b="1" dirty="0">
-                <a:solidFill>
-                  <a:srgbClr val="B42318"/>
-                </a:solidFill>
-                <a:latin typeface="JetBrains Mono Bold" pitchFamily="34" charset="0"/>
-                <a:ea typeface="JetBrains Mono Bold" pitchFamily="34" charset="-122"/>
-                <a:cs typeface="JetBrains Mono Bold" pitchFamily="34" charset="-120"/>
-              </a:rPr>
-              <a:t>config/project.yaml</a:t>
-            </a:r>
-            <a:endParaRPr lang="en-US" sz="650" dirty="0"/>
-          </a:p>
-        </p:txBody>
-      </p:sp>
-      <p:sp>
-        <p:nvSpPr>
-          <p:cNvPr id="38" name="Shape 34"/>
-          <p:cNvSpPr/>
-          <p:nvPr/>
-        </p:nvSpPr>
-        <p:spPr>
-          <a:xfrm>
-            <a:off x="3200400" y="1680511"/>
-            <a:ext cx="1228725" cy="153591"/>
-          </a:xfrm>
-          <a:prstGeom prst="rect">
-            <a:avLst/>
-          </a:prstGeom>
-          <a:solidFill>
-            <a:srgbClr val="F6F8FA"/>
-          </a:solidFill>
-          <a:ln/>
-        </p:spPr>
-      </p:sp>
-      <p:sp>
-        <p:nvSpPr>
-          <p:cNvPr id="39" name="Text 35"/>
-          <p:cNvSpPr/>
-          <p:nvPr/>
-        </p:nvSpPr>
-        <p:spPr>
-          <a:xfrm>
-            <a:off x="3200400" y="1680511"/>
-            <a:ext cx="1228725" cy="153591"/>
-          </a:xfrm>
-          <a:prstGeom prst="rect">
-            <a:avLst/>
-          </a:prstGeom>
-          <a:noFill/>
-          <a:ln/>
-        </p:spPr>
-        <p:txBody>
-          <a:bodyPr wrap="none" lIns="51054" tIns="17018" rIns="51054" bIns="17018" rtlCol="0" anchor="t">
-            <a:spAutoFit/>
-          </a:bodyPr>
-          <a:lstStyle/>
-          <a:p>
-            <a:pPr algn="l" marL="127000" indent="-127000">
-              <a:lnSpc>
-                <a:spcPct val="104000"/>
-              </a:lnSpc>
-              <a:buSzPct val="100000"/>
-              <a:buFont typeface="+mj-lt"/>
-              <a:buAutoNum type="arabicPeriod" startAt="2"/>
-            </a:pPr>
-            <a:r>
-              <a:rPr lang="en-US" sz="650" b="1" dirty="0">
-                <a:solidFill>
-                  <a:srgbClr val="B42318"/>
-                </a:solidFill>
-                <a:latin typeface="JetBrains Mono Bold" pitchFamily="34" charset="0"/>
-                <a:ea typeface="JetBrains Mono Bold" pitchFamily="34" charset="-122"/>
-                <a:cs typeface="JetBrains Mono Bold" pitchFamily="34" charset="-120"/>
-              </a:rPr>
-              <a:t>config/workflow.yaml</a:t>
-            </a:r>
-            <a:endParaRPr lang="en-US" sz="650" dirty="0"/>
-          </a:p>
-        </p:txBody>
-      </p:sp>
-      <p:sp>
-        <p:nvSpPr>
-          <p:cNvPr id="40" name="Text 36"/>
-          <p:cNvSpPr/>
-          <p:nvPr/>
-        </p:nvSpPr>
-        <p:spPr>
-          <a:xfrm>
-            <a:off x="3200400" y="1825842"/>
-            <a:ext cx="742950" cy="125016"/>
+              <a:t>AGENTS.md</a:t>
+            </a:r>
+            <a:endParaRPr lang="en-US" sz="600" dirty="0"/>
+          </a:p>
+        </p:txBody>
+      </p:sp>
+      <p:sp>
+        <p:nvSpPr>
+          <p:cNvPr id="29" name="Text 25"/>
+          <p:cNvSpPr/>
+          <p:nvPr/>
+        </p:nvSpPr>
+        <p:spPr>
+          <a:xfrm>
+            <a:off x="8072438" y="578644"/>
+            <a:ext cx="900113" cy="85725"/>
           </a:xfrm>
           <a:prstGeom prst="rect">
             <a:avLst/>
@@ -27386,475 +25647,98 @@
           </a:bodyPr>
           <a:lstStyle/>
           <a:p>
-            <a:pPr algn="l" marL="127000" indent="-127000">
-              <a:lnSpc>
-                <a:spcPct val="104000"/>
-              </a:lnSpc>
-              <a:buSzPct val="100000"/>
-              <a:buFont typeface="+mj-lt"/>
-              <a:buAutoNum type="arabicPeriod" startAt="3"/>
-            </a:pPr>
-            <a:r>
-              <a:rPr lang="en-US" sz="700" b="1" dirty="0">
-                <a:solidFill>
-                  <a:srgbClr val="222222"/>
+            <a:pPr algn="l" indent="0" marL="0">
+              <a:buNone/>
+            </a:pPr>
+            <a:r>
+              <a:rPr lang="en-US" sz="500" b="1" spc="1" kern="0" dirty="0">
+                <a:solidFill>
+                  <a:srgbClr val="9CDCFE"/>
                 </a:solidFill>
                 <a:latin typeface="Inter SemiBold" pitchFamily="34" charset="0"/>
                 <a:ea typeface="Inter SemiBold" pitchFamily="34" charset="-122"/>
                 <a:cs typeface="Inter SemiBold" pitchFamily="34" charset="-120"/>
               </a:rPr>
-              <a:t>Active module</a:t>
-            </a:r>
-            <a:endParaRPr lang="en-US" sz="700" dirty="0"/>
-          </a:p>
-        </p:txBody>
-      </p:sp>
-      <p:sp>
-        <p:nvSpPr>
-          <p:cNvPr id="41" name="Shape 37"/>
-          <p:cNvSpPr/>
-          <p:nvPr/>
-        </p:nvSpPr>
-        <p:spPr>
-          <a:xfrm>
-            <a:off x="3943350" y="1815126"/>
-            <a:ext cx="314325" cy="153591"/>
-          </a:xfrm>
-          <a:prstGeom prst="rect">
-            <a:avLst/>
-          </a:prstGeom>
-          <a:solidFill>
-            <a:srgbClr val="F6F8FA"/>
-          </a:solidFill>
-          <a:ln/>
-        </p:spPr>
-      </p:sp>
-      <p:sp>
-        <p:nvSpPr>
-          <p:cNvPr id="42" name="Text 38"/>
-          <p:cNvSpPr/>
-          <p:nvPr/>
-        </p:nvSpPr>
-        <p:spPr>
-          <a:xfrm>
-            <a:off x="3943350" y="1815126"/>
-            <a:ext cx="314325" cy="153591"/>
-          </a:xfrm>
-          <a:prstGeom prst="rect">
-            <a:avLst/>
-          </a:prstGeom>
-          <a:noFill/>
-          <a:ln/>
-        </p:spPr>
-        <p:txBody>
-          <a:bodyPr wrap="none" lIns="51054" tIns="17018" rIns="51054" bIns="17018" rtlCol="0" anchor="t">
+              <a:t>MARKDOWN PREVIEW</a:t>
+            </a:r>
+            <a:endParaRPr lang="en-US" sz="500" dirty="0"/>
+          </a:p>
+        </p:txBody>
+      </p:sp>
+      <p:sp>
+        <p:nvSpPr>
+          <p:cNvPr id="30" name="Shape 26"/>
+          <p:cNvSpPr/>
+          <p:nvPr/>
+        </p:nvSpPr>
+        <p:spPr>
+          <a:xfrm>
+            <a:off x="2486025" y="728663"/>
+            <a:ext cx="6543675" cy="4143375"/>
+          </a:xfrm>
+          <a:prstGeom prst="rect">
+            <a:avLst/>
+          </a:prstGeom>
+          <a:solidFill>
+            <a:srgbClr val="FFFFFF"/>
+          </a:solidFill>
+          <a:ln/>
+        </p:spPr>
+      </p:sp>
+      <p:sp>
+        <p:nvSpPr>
+          <p:cNvPr id="31" name="Text 27"/>
+          <p:cNvSpPr/>
+          <p:nvPr/>
+        </p:nvSpPr>
+        <p:spPr>
+          <a:xfrm>
+            <a:off x="2571750" y="800100"/>
+            <a:ext cx="6372225" cy="203597"/>
+          </a:xfrm>
+          <a:prstGeom prst="rect">
+            <a:avLst/>
+          </a:prstGeom>
+          <a:noFill/>
+          <a:ln/>
+        </p:spPr>
+        <p:txBody>
+          <a:bodyPr wrap="none" lIns="0" tIns="0" rIns="0" bIns="34036" rtlCol="0" anchor="t">
             <a:spAutoFit/>
           </a:bodyPr>
           <a:lstStyle/>
           <a:p>
             <a:pPr algn="l" indent="0" marL="0">
               <a:lnSpc>
-                <a:spcPct val="104000"/>
+                <a:spcPct val="100000"/>
               </a:lnSpc>
               <a:buNone/>
             </a:pPr>
             <a:r>
-              <a:rPr lang="en-US" sz="650" b="1" dirty="0">
-                <a:solidFill>
-                  <a:srgbClr val="B42318"/>
-                </a:solidFill>
-                <a:latin typeface="JetBrains Mono Bold" pitchFamily="34" charset="0"/>
-                <a:ea typeface="JetBrains Mono Bold" pitchFamily="34" charset="-122"/>
-                <a:cs typeface="JetBrains Mono Bold" pitchFamily="34" charset="-120"/>
-              </a:rPr>
-              <a:t>SPEC</a:t>
-            </a:r>
-            <a:endParaRPr lang="en-US" sz="650" dirty="0"/>
-          </a:p>
-        </p:txBody>
-      </p:sp>
-      <p:sp>
-        <p:nvSpPr>
-          <p:cNvPr id="43" name="Text 39"/>
-          <p:cNvSpPr/>
-          <p:nvPr/>
-        </p:nvSpPr>
-        <p:spPr>
-          <a:xfrm>
-            <a:off x="4257675" y="1825842"/>
-            <a:ext cx="239316" cy="125016"/>
-          </a:xfrm>
-          <a:prstGeom prst="rect">
-            <a:avLst/>
-          </a:prstGeom>
-          <a:noFill/>
-          <a:ln/>
-        </p:spPr>
-        <p:txBody>
-          <a:bodyPr wrap="none" lIns="0" tIns="0" rIns="0" bIns="0" rtlCol="0" anchor="t">
-            <a:spAutoFit/>
-          </a:bodyPr>
-          <a:lstStyle/>
-          <a:p>
-            <a:pPr algn="l" indent="0" marL="0">
-              <a:lnSpc>
-                <a:spcPct val="104000"/>
-              </a:lnSpc>
-              <a:buNone/>
-            </a:pPr>
-            <a:r>
-              <a:rPr lang="en-US" sz="700" b="1" dirty="0">
+              <a:rPr lang="en-US" sz="900" b="1" dirty="0">
                 <a:solidFill>
                   <a:srgbClr val="222222"/>
                 </a:solidFill>
-                <a:latin typeface="Inter SemiBold" pitchFamily="34" charset="0"/>
-                <a:ea typeface="Inter SemiBold" pitchFamily="34" charset="-122"/>
-                <a:cs typeface="Inter SemiBold" pitchFamily="34" charset="-120"/>
-              </a:rPr>
-              <a:t>and</a:t>
-            </a:r>
-            <a:endParaRPr lang="en-US" sz="700" dirty="0"/>
-          </a:p>
-        </p:txBody>
-      </p:sp>
-      <p:sp>
-        <p:nvSpPr>
-          <p:cNvPr id="44" name="Shape 40"/>
-          <p:cNvSpPr/>
-          <p:nvPr/>
-        </p:nvSpPr>
-        <p:spPr>
-          <a:xfrm>
-            <a:off x="4496991" y="1815126"/>
-            <a:ext cx="257175" cy="153591"/>
-          </a:xfrm>
-          <a:prstGeom prst="rect">
-            <a:avLst/>
-          </a:prstGeom>
-          <a:solidFill>
-            <a:srgbClr val="F6F8FA"/>
-          </a:solidFill>
-          <a:ln/>
-        </p:spPr>
-      </p:sp>
-      <p:sp>
-        <p:nvSpPr>
-          <p:cNvPr id="45" name="Text 41"/>
-          <p:cNvSpPr/>
-          <p:nvPr/>
-        </p:nvSpPr>
-        <p:spPr>
-          <a:xfrm>
-            <a:off x="4496991" y="1815126"/>
-            <a:ext cx="257175" cy="153591"/>
-          </a:xfrm>
-          <a:prstGeom prst="rect">
-            <a:avLst/>
-          </a:prstGeom>
-          <a:noFill/>
-          <a:ln/>
-        </p:spPr>
-        <p:txBody>
-          <a:bodyPr wrap="none" lIns="51054" tIns="17018" rIns="51054" bIns="17018" rtlCol="0" anchor="t">
-            <a:spAutoFit/>
-          </a:bodyPr>
-          <a:lstStyle/>
-          <a:p>
-            <a:pPr algn="l" indent="0" marL="0">
-              <a:lnSpc>
-                <a:spcPct val="104000"/>
-              </a:lnSpc>
-              <a:buNone/>
-            </a:pPr>
-            <a:r>
-              <a:rPr lang="en-US" sz="650" b="1" dirty="0">
-                <a:solidFill>
-                  <a:srgbClr val="B42318"/>
-                </a:solidFill>
-                <a:latin typeface="JetBrains Mono Bold" pitchFamily="34" charset="0"/>
-                <a:ea typeface="JetBrains Mono Bold" pitchFamily="34" charset="-122"/>
-                <a:cs typeface="JetBrains Mono Bold" pitchFamily="34" charset="-120"/>
-              </a:rPr>
-              <a:t>ADR</a:t>
-            </a:r>
-            <a:endParaRPr lang="en-US" sz="650" dirty="0"/>
-          </a:p>
-        </p:txBody>
-      </p:sp>
-      <p:sp>
-        <p:nvSpPr>
-          <p:cNvPr id="46" name="Text 42"/>
-          <p:cNvSpPr/>
-          <p:nvPr/>
-        </p:nvSpPr>
-        <p:spPr>
-          <a:xfrm>
-            <a:off x="3200400" y="1960457"/>
-            <a:ext cx="332184" cy="125016"/>
-          </a:xfrm>
-          <a:prstGeom prst="rect">
-            <a:avLst/>
-          </a:prstGeom>
-          <a:noFill/>
-          <a:ln/>
-        </p:spPr>
-        <p:txBody>
-          <a:bodyPr wrap="none" lIns="0" tIns="0" rIns="0" bIns="0" rtlCol="0" anchor="t">
-            <a:spAutoFit/>
-          </a:bodyPr>
-          <a:lstStyle/>
-          <a:p>
-            <a:pPr algn="l" marL="127000" indent="-127000">
-              <a:lnSpc>
-                <a:spcPct val="104000"/>
-              </a:lnSpc>
-              <a:buSzPct val="100000"/>
-              <a:buFont typeface="+mj-lt"/>
-              <a:buAutoNum type="arabicPeriod" startAt="4"/>
-            </a:pPr>
-            <a:r>
-              <a:rPr lang="en-US" sz="700" b="1" dirty="0">
-                <a:solidFill>
-                  <a:srgbClr val="222222"/>
-                </a:solidFill>
-                <a:latin typeface="Inter SemiBold" pitchFamily="34" charset="0"/>
-                <a:ea typeface="Inter SemiBold" pitchFamily="34" charset="-122"/>
-                <a:cs typeface="Inter SemiBold" pitchFamily="34" charset="-120"/>
-              </a:rPr>
-              <a:t>Latest</a:t>
-            </a:r>
-            <a:endParaRPr lang="en-US" sz="700" dirty="0"/>
-          </a:p>
-        </p:txBody>
-      </p:sp>
-      <p:sp>
-        <p:nvSpPr>
-          <p:cNvPr id="47" name="Shape 43"/>
-          <p:cNvSpPr/>
-          <p:nvPr/>
-        </p:nvSpPr>
-        <p:spPr>
-          <a:xfrm>
-            <a:off x="3532584" y="1949741"/>
-            <a:ext cx="1228725" cy="153591"/>
-          </a:xfrm>
-          <a:prstGeom prst="rect">
-            <a:avLst/>
-          </a:prstGeom>
-          <a:solidFill>
-            <a:srgbClr val="F6F8FA"/>
-          </a:solidFill>
-          <a:ln/>
-        </p:spPr>
-      </p:sp>
-      <p:sp>
-        <p:nvSpPr>
-          <p:cNvPr id="48" name="Text 44"/>
-          <p:cNvSpPr/>
-          <p:nvPr/>
-        </p:nvSpPr>
-        <p:spPr>
-          <a:xfrm>
-            <a:off x="3532584" y="1949741"/>
-            <a:ext cx="1228725" cy="153591"/>
-          </a:xfrm>
-          <a:prstGeom prst="rect">
-            <a:avLst/>
-          </a:prstGeom>
-          <a:noFill/>
-          <a:ln/>
-        </p:spPr>
-        <p:txBody>
-          <a:bodyPr wrap="none" lIns="51054" tIns="17018" rIns="51054" bIns="17018" rtlCol="0" anchor="t">
-            <a:spAutoFit/>
-          </a:bodyPr>
-          <a:lstStyle/>
-          <a:p>
-            <a:pPr algn="l" indent="0" marL="0">
-              <a:lnSpc>
-                <a:spcPct val="104000"/>
-              </a:lnSpc>
-              <a:buNone/>
-            </a:pPr>
-            <a:r>
-              <a:rPr lang="en-US" sz="650" b="1" dirty="0">
-                <a:solidFill>
-                  <a:srgbClr val="B42318"/>
-                </a:solidFill>
-                <a:latin typeface="JetBrains Mono Bold" pitchFamily="34" charset="0"/>
-                <a:ea typeface="JetBrains Mono Bold" pitchFamily="34" charset="-122"/>
-                <a:cs typeface="JetBrains Mono Bold" pitchFamily="34" charset="-120"/>
-              </a:rPr>
-              <a:t>artifacts/run_state/</a:t>
-            </a:r>
-            <a:endParaRPr lang="en-US" sz="650" dirty="0"/>
-          </a:p>
-        </p:txBody>
-      </p:sp>
-      <p:sp>
-        <p:nvSpPr>
-          <p:cNvPr id="49" name="Text 45"/>
-          <p:cNvSpPr/>
-          <p:nvPr/>
-        </p:nvSpPr>
-        <p:spPr>
-          <a:xfrm>
-            <a:off x="3200400" y="2095072"/>
-            <a:ext cx="510778" cy="125016"/>
-          </a:xfrm>
-          <a:prstGeom prst="rect">
-            <a:avLst/>
-          </a:prstGeom>
-          <a:noFill/>
-          <a:ln/>
-        </p:spPr>
-        <p:txBody>
-          <a:bodyPr wrap="none" lIns="0" tIns="0" rIns="0" bIns="0" rtlCol="0" anchor="t">
-            <a:spAutoFit/>
-          </a:bodyPr>
-          <a:lstStyle/>
-          <a:p>
-            <a:pPr algn="l" marL="127000" indent="-127000">
-              <a:lnSpc>
-                <a:spcPct val="104000"/>
-              </a:lnSpc>
-              <a:buSzPct val="100000"/>
-              <a:buFont typeface="+mj-lt"/>
-              <a:buAutoNum type="arabicPeriod" startAt="5"/>
-            </a:pPr>
-            <a:r>
-              <a:rPr lang="en-US" sz="700" b="1" dirty="0">
-                <a:solidFill>
-                  <a:srgbClr val="222222"/>
-                </a:solidFill>
-                <a:latin typeface="Inter SemiBold" pitchFamily="34" charset="0"/>
-                <a:ea typeface="Inter SemiBold" pitchFamily="34" charset="-122"/>
-                <a:cs typeface="Inter SemiBold" pitchFamily="34" charset="-120"/>
-              </a:rPr>
-              <a:t>Triggered</a:t>
-            </a:r>
-            <a:endParaRPr lang="en-US" sz="700" dirty="0"/>
-          </a:p>
-        </p:txBody>
-      </p:sp>
-      <p:sp>
-        <p:nvSpPr>
-          <p:cNvPr id="50" name="Shape 46"/>
-          <p:cNvSpPr/>
-          <p:nvPr/>
-        </p:nvSpPr>
-        <p:spPr>
-          <a:xfrm>
-            <a:off x="3711178" y="2084356"/>
-            <a:ext cx="942975" cy="153591"/>
-          </a:xfrm>
-          <a:prstGeom prst="rect">
-            <a:avLst/>
-          </a:prstGeom>
-          <a:solidFill>
-            <a:srgbClr val="F6F8FA"/>
-          </a:solidFill>
-          <a:ln/>
-        </p:spPr>
-      </p:sp>
-      <p:sp>
-        <p:nvSpPr>
-          <p:cNvPr id="51" name="Text 47"/>
-          <p:cNvSpPr/>
-          <p:nvPr/>
-        </p:nvSpPr>
-        <p:spPr>
-          <a:xfrm>
-            <a:off x="3711178" y="2084356"/>
-            <a:ext cx="942975" cy="153591"/>
-          </a:xfrm>
-          <a:prstGeom prst="rect">
-            <a:avLst/>
-          </a:prstGeom>
-          <a:noFill/>
-          <a:ln/>
-        </p:spPr>
-        <p:txBody>
-          <a:bodyPr wrap="none" lIns="51054" tIns="17018" rIns="51054" bIns="17018" rtlCol="0" anchor="t">
-            <a:spAutoFit/>
-          </a:bodyPr>
-          <a:lstStyle/>
-          <a:p>
-            <a:pPr algn="l" indent="0" marL="0">
-              <a:lnSpc>
-                <a:spcPct val="104000"/>
-              </a:lnSpc>
-              <a:buNone/>
-            </a:pPr>
-            <a:r>
-              <a:rPr lang="en-US" sz="650" b="1" dirty="0">
-                <a:solidFill>
-                  <a:srgbClr val="B42318"/>
-                </a:solidFill>
-                <a:latin typeface="JetBrains Mono Bold" pitchFamily="34" charset="0"/>
-                <a:ea typeface="JetBrains Mono Bold" pitchFamily="34" charset="-122"/>
-                <a:cs typeface="JetBrains Mono Bold" pitchFamily="34" charset="-120"/>
-              </a:rPr>
-              <a:t>.github/skills/</a:t>
-            </a:r>
-            <a:endParaRPr lang="en-US" sz="650" dirty="0"/>
-          </a:p>
-        </p:txBody>
-      </p:sp>
-      <p:sp>
-        <p:nvSpPr>
-          <p:cNvPr id="52" name="Text 48"/>
-          <p:cNvSpPr/>
-          <p:nvPr/>
-        </p:nvSpPr>
-        <p:spPr>
-          <a:xfrm>
-            <a:off x="4654153" y="2095072"/>
-            <a:ext cx="182166" cy="125016"/>
-          </a:xfrm>
-          <a:prstGeom prst="rect">
-            <a:avLst/>
-          </a:prstGeom>
-          <a:noFill/>
-          <a:ln/>
-        </p:spPr>
-        <p:txBody>
-          <a:bodyPr wrap="none" lIns="0" tIns="0" rIns="0" bIns="0" rtlCol="0" anchor="t">
-            <a:spAutoFit/>
-          </a:bodyPr>
-          <a:lstStyle/>
-          <a:p>
-            <a:pPr algn="l" indent="0" marL="0">
-              <a:lnSpc>
-                <a:spcPct val="104000"/>
-              </a:lnSpc>
-              <a:buNone/>
-            </a:pPr>
-            <a:r>
-              <a:rPr lang="en-US" sz="700" b="1" dirty="0">
-                <a:solidFill>
-                  <a:srgbClr val="222222"/>
-                </a:solidFill>
-                <a:latin typeface="Inter SemiBold" pitchFamily="34" charset="0"/>
-                <a:ea typeface="Inter SemiBold" pitchFamily="34" charset="-122"/>
-                <a:cs typeface="Inter SemiBold" pitchFamily="34" charset="-120"/>
-              </a:rPr>
-              <a:t>file</a:t>
-            </a:r>
-            <a:endParaRPr lang="en-US" sz="700" dirty="0"/>
-          </a:p>
-        </p:txBody>
-      </p:sp>
-      <p:sp>
-        <p:nvSpPr>
-          <p:cNvPr id="53" name="Shape 49"/>
-          <p:cNvSpPr/>
-          <p:nvPr/>
-        </p:nvSpPr>
-        <p:spPr>
-          <a:xfrm>
-            <a:off x="2957513" y="2368990"/>
-            <a:ext cx="5929313" cy="944259"/>
+                <a:latin typeface="Inter Bold" pitchFamily="34" charset="0"/>
+                <a:ea typeface="Inter Bold" pitchFamily="34" charset="-122"/>
+                <a:cs typeface="Inter Bold" pitchFamily="34" charset="-120"/>
+              </a:rPr>
+              <a:t>Agent Operating Contract</a:t>
+            </a:r>
+            <a:endParaRPr lang="en-US" sz="900" dirty="0"/>
+          </a:p>
+        </p:txBody>
+      </p:sp>
+      <p:sp>
+        <p:nvSpPr>
+          <p:cNvPr id="32" name="Shape 28"/>
+          <p:cNvSpPr/>
+          <p:nvPr/>
+        </p:nvSpPr>
+        <p:spPr>
+          <a:xfrm>
+            <a:off x="2571750" y="1060847"/>
+            <a:ext cx="6372225" cy="1271588"/>
           </a:xfrm>
           <a:prstGeom prst="rect">
             <a:avLst/>
@@ -27862,7 +25746,7 @@
           <a:solidFill>
             <a:srgbClr val="FFF8F7"/>
           </a:solidFill>
-          <a:ln w="27432">
+          <a:ln w="18288">
             <a:solidFill>
               <a:srgbClr val="FF443A"/>
             </a:solidFill>
@@ -27872,14 +25756,14 @@
       </p:sp>
       <p:sp>
         <p:nvSpPr>
-          <p:cNvPr id="54" name="Shape 50"/>
-          <p:cNvSpPr/>
-          <p:nvPr/>
-        </p:nvSpPr>
-        <p:spPr>
-          <a:xfrm>
-            <a:off x="8758238" y="2297553"/>
-            <a:ext cx="200025" cy="200025"/>
+          <p:cNvPr id="33" name="Shape 29"/>
+          <p:cNvSpPr/>
+          <p:nvPr/>
+        </p:nvSpPr>
+        <p:spPr>
+          <a:xfrm>
+            <a:off x="8829675" y="1003697"/>
+            <a:ext cx="171450" cy="171450"/>
           </a:xfrm>
           <a:prstGeom prst="rect">
             <a:avLst/>
@@ -27897,14 +25781,14 @@
       </p:sp>
       <p:sp>
         <p:nvSpPr>
-          <p:cNvPr id="55" name="Text 51"/>
-          <p:cNvSpPr/>
-          <p:nvPr/>
-        </p:nvSpPr>
-        <p:spPr>
-          <a:xfrm>
-            <a:off x="8758238" y="2297553"/>
-            <a:ext cx="200025" cy="200025"/>
+          <p:cNvPr id="34" name="Text 30"/>
+          <p:cNvSpPr/>
+          <p:nvPr/>
+        </p:nvSpPr>
+        <p:spPr>
+          <a:xfrm>
+            <a:off x="8829675" y="1003697"/>
+            <a:ext cx="171450" cy="171450"/>
           </a:xfrm>
           <a:prstGeom prst="rect">
             <a:avLst/>
@@ -27920,12 +25804,12 @@
           <a:p>
             <a:pPr algn="ctr" indent="0" marL="0">
               <a:lnSpc>
-                <a:spcPct val="104000"/>
+                <a:spcPct val="100000"/>
               </a:lnSpc>
               <a:buNone/>
             </a:pPr>
             <a:r>
-              <a:rPr lang="en-US" sz="850" dirty="0">
+              <a:rPr lang="en-US" sz="750" dirty="0">
                 <a:solidFill>
                   <a:srgbClr val="FFFFFF"/>
                 </a:solidFill>
@@ -27933,22 +25817,22 @@
                 <a:ea typeface="Oswald SemiBold" pitchFamily="34" charset="-122"/>
                 <a:cs typeface="Oswald SemiBold" pitchFamily="34" charset="-120"/>
               </a:rPr>
-              <a:t>2</a:t>
-            </a:r>
-            <a:endParaRPr lang="en-US" sz="850" dirty="0"/>
-          </a:p>
-        </p:txBody>
-      </p:sp>
-      <p:sp>
-        <p:nvSpPr>
-          <p:cNvPr id="56" name="Text 52"/>
-          <p:cNvSpPr/>
-          <p:nvPr/>
-        </p:nvSpPr>
-        <p:spPr>
-          <a:xfrm>
-            <a:off x="3043238" y="2440428"/>
-            <a:ext cx="5757863" cy="167153"/>
+              <a:t>1</a:t>
+            </a:r>
+            <a:endParaRPr lang="en-US" sz="750" dirty="0"/>
+          </a:p>
+        </p:txBody>
+      </p:sp>
+      <p:sp>
+        <p:nvSpPr>
+          <p:cNvPr id="35" name="Text 31"/>
+          <p:cNvSpPr/>
+          <p:nvPr/>
+        </p:nvSpPr>
+        <p:spPr>
+          <a:xfrm>
+            <a:off x="2643188" y="1117997"/>
+            <a:ext cx="6229350" cy="142875"/>
           </a:xfrm>
           <a:prstGeom prst="rect">
             <a:avLst/>
@@ -27964,12 +25848,12 @@
           <a:p>
             <a:pPr algn="l" indent="0" marL="0">
               <a:lnSpc>
-                <a:spcPct val="104000"/>
+                <a:spcPct val="100000"/>
               </a:lnSpc>
               <a:buNone/>
             </a:pPr>
             <a:r>
-              <a:rPr lang="en-US" sz="900" b="1" dirty="0">
+              <a:rPr lang="en-US" sz="800" b="1" dirty="0">
                 <a:solidFill>
                   <a:srgbClr val="111111"/>
                 </a:solidFill>
@@ -27977,135 +25861,687 @@
                 <a:ea typeface="Inter Bold" pitchFamily="34" charset="-122"/>
                 <a:cs typeface="Inter Bold" pitchFamily="34" charset="-120"/>
               </a:rPr>
-              <a:t>Canonical skill sequence</a:t>
-            </a:r>
-            <a:endParaRPr lang="en-US" sz="900" dirty="0"/>
-          </a:p>
-        </p:txBody>
-      </p:sp>
-      <p:sp>
-        <p:nvSpPr>
-          <p:cNvPr id="57" name="Text 53"/>
-          <p:cNvSpPr/>
-          <p:nvPr/>
-        </p:nvSpPr>
-        <p:spPr>
-          <a:xfrm>
-            <a:off x="3043238" y="2664730"/>
-            <a:ext cx="5757863" cy="519931"/>
-          </a:xfrm>
-          <a:prstGeom prst="rect">
-            <a:avLst/>
-          </a:prstGeom>
-          <a:noFill/>
-          <a:ln/>
-        </p:spPr>
-        <p:txBody>
-          <a:bodyPr wrap="square" lIns="0" tIns="0" rIns="0" bIns="0" rtlCol="0" anchor="t">
+              <a:t>Mandatory read order</a:t>
+            </a:r>
+            <a:endParaRPr lang="en-US" sz="800" dirty="0"/>
+          </a:p>
+        </p:txBody>
+      </p:sp>
+      <p:sp>
+        <p:nvSpPr>
+          <p:cNvPr id="36" name="Shape 32"/>
+          <p:cNvSpPr/>
+          <p:nvPr/>
+        </p:nvSpPr>
+        <p:spPr>
+          <a:xfrm>
+            <a:off x="2643188" y="1303734"/>
+            <a:ext cx="6229350" cy="157163"/>
+          </a:xfrm>
+          <a:prstGeom prst="rect">
+            <a:avLst/>
+          </a:prstGeom>
+          <a:solidFill>
+            <a:srgbClr val="FFFFFF"/>
+          </a:solidFill>
+          <a:ln w="9144">
+            <a:solidFill>
+              <a:srgbClr val="D0D7DE"/>
+            </a:solidFill>
+            <a:prstDash val="solid"/>
+          </a:ln>
+        </p:spPr>
+      </p:sp>
+      <p:sp>
+        <p:nvSpPr>
+          <p:cNvPr id="37" name="Shape 33"/>
+          <p:cNvSpPr/>
+          <p:nvPr/>
+        </p:nvSpPr>
+        <p:spPr>
+          <a:xfrm>
+            <a:off x="2643188" y="1303734"/>
+            <a:ext cx="171450" cy="157163"/>
+          </a:xfrm>
+          <a:prstGeom prst="rect">
+            <a:avLst/>
+          </a:prstGeom>
+          <a:solidFill>
+            <a:srgbClr val="EAF1FF"/>
+          </a:solidFill>
+          <a:ln/>
+        </p:spPr>
+      </p:sp>
+      <p:sp>
+        <p:nvSpPr>
+          <p:cNvPr id="38" name="Text 34"/>
+          <p:cNvSpPr/>
+          <p:nvPr/>
+        </p:nvSpPr>
+        <p:spPr>
+          <a:xfrm>
+            <a:off x="2643188" y="1303734"/>
+            <a:ext cx="171450" cy="157163"/>
+          </a:xfrm>
+          <a:prstGeom prst="rect">
+            <a:avLst/>
+          </a:prstGeom>
+          <a:noFill/>
+          <a:ln/>
+        </p:spPr>
+        <p:txBody>
+          <a:bodyPr wrap="none" lIns="0" tIns="0" rIns="0" bIns="0" rtlCol="0" anchor="ctr">
+            <a:spAutoFit/>
+          </a:bodyPr>
+          <a:lstStyle/>
+          <a:p>
+            <a:pPr algn="ctr" indent="0" marL="0">
+              <a:lnSpc>
+                <a:spcPct val="100000"/>
+              </a:lnSpc>
+              <a:buNone/>
+            </a:pPr>
+            <a:r>
+              <a:rPr lang="en-US" sz="650" b="1" dirty="0">
+                <a:solidFill>
+                  <a:srgbClr val="0055FF"/>
+                </a:solidFill>
+                <a:latin typeface="Oswald SemiBold" pitchFamily="34" charset="0"/>
+                <a:ea typeface="Oswald SemiBold" pitchFamily="34" charset="-122"/>
+                <a:cs typeface="Oswald SemiBold" pitchFamily="34" charset="-120"/>
+              </a:rPr>
+              <a:t>1</a:t>
+            </a:r>
+            <a:endParaRPr lang="en-US" sz="650" dirty="0"/>
+          </a:p>
+        </p:txBody>
+      </p:sp>
+      <p:sp>
+        <p:nvSpPr>
+          <p:cNvPr id="39" name="Text 35"/>
+          <p:cNvSpPr/>
+          <p:nvPr/>
+        </p:nvSpPr>
+        <p:spPr>
+          <a:xfrm>
+            <a:off x="2814638" y="1313724"/>
+            <a:ext cx="6057900" cy="137127"/>
+          </a:xfrm>
+          <a:prstGeom prst="rect">
+            <a:avLst/>
+          </a:prstGeom>
+          <a:noFill/>
+          <a:ln/>
+        </p:spPr>
+        <p:txBody>
+          <a:bodyPr wrap="none" lIns="68072" tIns="25527" rIns="68072" bIns="25527" rtlCol="0" anchor="t">
             <a:spAutoFit/>
           </a:bodyPr>
           <a:lstStyle/>
           <a:p>
             <a:pPr algn="l" indent="0" marL="0">
               <a:lnSpc>
-                <a:spcPct val="104000"/>
+                <a:spcPct val="88000"/>
               </a:lnSpc>
               <a:buNone/>
             </a:pPr>
             <a:r>
-              <a:rPr lang="en-US" sz="700" b="1" dirty="0">
-                <a:solidFill>
-                  <a:srgbClr val="0055FF"/>
+              <a:rPr lang="en-US" sz="600" b="1" dirty="0">
+                <a:solidFill>
+                  <a:srgbClr val="B42318"/>
                 </a:solidFill>
                 <a:latin typeface="JetBrains Mono Bold" pitchFamily="34" charset="0"/>
                 <a:ea typeface="JetBrains Mono Bold" pitchFamily="34" charset="-122"/>
                 <a:cs typeface="JetBrains Mono Bold" pitchFamily="34" charset="-120"/>
               </a:rPr>
-              <a:t>interview → specify → decide</a:t>
-            </a:r>
-            <a:r>
-              <a:rPr lang="en-US" sz="700" b="1" dirty="0">
+              <a:t>config/project.yaml</a:t>
+            </a:r>
+            <a:endParaRPr lang="en-US" sz="600" dirty="0"/>
+          </a:p>
+        </p:txBody>
+      </p:sp>
+      <p:sp>
+        <p:nvSpPr>
+          <p:cNvPr id="40" name="Shape 36"/>
+          <p:cNvSpPr/>
+          <p:nvPr/>
+        </p:nvSpPr>
+        <p:spPr>
+          <a:xfrm>
+            <a:off x="2643188" y="1496616"/>
+            <a:ext cx="6229350" cy="157163"/>
+          </a:xfrm>
+          <a:prstGeom prst="rect">
+            <a:avLst/>
+          </a:prstGeom>
+          <a:solidFill>
+            <a:srgbClr val="FFFFFF"/>
+          </a:solidFill>
+          <a:ln w="9144">
+            <a:solidFill>
+              <a:srgbClr val="D0D7DE"/>
+            </a:solidFill>
+            <a:prstDash val="solid"/>
+          </a:ln>
+        </p:spPr>
+      </p:sp>
+      <p:sp>
+        <p:nvSpPr>
+          <p:cNvPr id="41" name="Shape 37"/>
+          <p:cNvSpPr/>
+          <p:nvPr/>
+        </p:nvSpPr>
+        <p:spPr>
+          <a:xfrm>
+            <a:off x="2643188" y="1496616"/>
+            <a:ext cx="171450" cy="157163"/>
+          </a:xfrm>
+          <a:prstGeom prst="rect">
+            <a:avLst/>
+          </a:prstGeom>
+          <a:solidFill>
+            <a:srgbClr val="EAF1FF"/>
+          </a:solidFill>
+          <a:ln/>
+        </p:spPr>
+      </p:sp>
+      <p:sp>
+        <p:nvSpPr>
+          <p:cNvPr id="42" name="Text 38"/>
+          <p:cNvSpPr/>
+          <p:nvPr/>
+        </p:nvSpPr>
+        <p:spPr>
+          <a:xfrm>
+            <a:off x="2643188" y="1496616"/>
+            <a:ext cx="171450" cy="157163"/>
+          </a:xfrm>
+          <a:prstGeom prst="rect">
+            <a:avLst/>
+          </a:prstGeom>
+          <a:noFill/>
+          <a:ln/>
+        </p:spPr>
+        <p:txBody>
+          <a:bodyPr wrap="none" lIns="0" tIns="0" rIns="0" bIns="0" rtlCol="0" anchor="ctr">
+            <a:spAutoFit/>
+          </a:bodyPr>
+          <a:lstStyle/>
+          <a:p>
+            <a:pPr algn="ctr" indent="0" marL="0">
+              <a:lnSpc>
+                <a:spcPct val="100000"/>
+              </a:lnSpc>
+              <a:buNone/>
+            </a:pPr>
+            <a:r>
+              <a:rPr lang="en-US" sz="650" b="1" dirty="0">
                 <a:solidFill>
                   <a:srgbClr val="0055FF"/>
+                </a:solidFill>
+                <a:latin typeface="Oswald SemiBold" pitchFamily="34" charset="0"/>
+                <a:ea typeface="Oswald SemiBold" pitchFamily="34" charset="-122"/>
+                <a:cs typeface="Oswald SemiBold" pitchFamily="34" charset="-120"/>
+              </a:rPr>
+              <a:t>2</a:t>
+            </a:r>
+            <a:endParaRPr lang="en-US" sz="650" dirty="0"/>
+          </a:p>
+        </p:txBody>
+      </p:sp>
+      <p:sp>
+        <p:nvSpPr>
+          <p:cNvPr id="43" name="Text 39"/>
+          <p:cNvSpPr/>
+          <p:nvPr/>
+        </p:nvSpPr>
+        <p:spPr>
+          <a:xfrm>
+            <a:off x="2814638" y="1506606"/>
+            <a:ext cx="6057900" cy="137127"/>
+          </a:xfrm>
+          <a:prstGeom prst="rect">
+            <a:avLst/>
+          </a:prstGeom>
+          <a:noFill/>
+          <a:ln/>
+        </p:spPr>
+        <p:txBody>
+          <a:bodyPr wrap="none" lIns="68072" tIns="25527" rIns="68072" bIns="25527" rtlCol="0" anchor="t">
+            <a:spAutoFit/>
+          </a:bodyPr>
+          <a:lstStyle/>
+          <a:p>
+            <a:pPr algn="l" indent="0" marL="0">
+              <a:lnSpc>
+                <a:spcPct val="88000"/>
+              </a:lnSpc>
+              <a:buNone/>
+            </a:pPr>
+            <a:r>
+              <a:rPr lang="en-US" sz="600" b="1" dirty="0">
+                <a:solidFill>
+                  <a:srgbClr val="B42318"/>
                 </a:solidFill>
                 <a:latin typeface="JetBrains Mono Bold" pitchFamily="34" charset="0"/>
                 <a:ea typeface="JetBrains Mono Bold" pitchFamily="34" charset="-122"/>
                 <a:cs typeface="JetBrains Mono Bold" pitchFamily="34" charset="-120"/>
               </a:rPr>
-              <a:t>
-</a:t>
-            </a:r>
-            <a:r>
-              <a:rPr lang="en-US" sz="700" b="1" dirty="0">
+              <a:t>config/workflow.yaml</a:t>
+            </a:r>
+            <a:endParaRPr lang="en-US" sz="600" dirty="0"/>
+          </a:p>
+        </p:txBody>
+      </p:sp>
+      <p:sp>
+        <p:nvSpPr>
+          <p:cNvPr id="44" name="Shape 40"/>
+          <p:cNvSpPr/>
+          <p:nvPr/>
+        </p:nvSpPr>
+        <p:spPr>
+          <a:xfrm>
+            <a:off x="2643188" y="1689497"/>
+            <a:ext cx="6229350" cy="157163"/>
+          </a:xfrm>
+          <a:prstGeom prst="rect">
+            <a:avLst/>
+          </a:prstGeom>
+          <a:solidFill>
+            <a:srgbClr val="FFFFFF"/>
+          </a:solidFill>
+          <a:ln w="9144">
+            <a:solidFill>
+              <a:srgbClr val="D0D7DE"/>
+            </a:solidFill>
+            <a:prstDash val="solid"/>
+          </a:ln>
+        </p:spPr>
+      </p:sp>
+      <p:sp>
+        <p:nvSpPr>
+          <p:cNvPr id="45" name="Shape 41"/>
+          <p:cNvSpPr/>
+          <p:nvPr/>
+        </p:nvSpPr>
+        <p:spPr>
+          <a:xfrm>
+            <a:off x="2643188" y="1689497"/>
+            <a:ext cx="171450" cy="157163"/>
+          </a:xfrm>
+          <a:prstGeom prst="rect">
+            <a:avLst/>
+          </a:prstGeom>
+          <a:solidFill>
+            <a:srgbClr val="EAF1FF"/>
+          </a:solidFill>
+          <a:ln/>
+        </p:spPr>
+      </p:sp>
+      <p:sp>
+        <p:nvSpPr>
+          <p:cNvPr id="46" name="Text 42"/>
+          <p:cNvSpPr/>
+          <p:nvPr/>
+        </p:nvSpPr>
+        <p:spPr>
+          <a:xfrm>
+            <a:off x="2643188" y="1689497"/>
+            <a:ext cx="171450" cy="157163"/>
+          </a:xfrm>
+          <a:prstGeom prst="rect">
+            <a:avLst/>
+          </a:prstGeom>
+          <a:noFill/>
+          <a:ln/>
+        </p:spPr>
+        <p:txBody>
+          <a:bodyPr wrap="none" lIns="0" tIns="0" rIns="0" bIns="0" rtlCol="0" anchor="ctr">
+            <a:spAutoFit/>
+          </a:bodyPr>
+          <a:lstStyle/>
+          <a:p>
+            <a:pPr algn="ctr" indent="0" marL="0">
+              <a:lnSpc>
+                <a:spcPct val="100000"/>
+              </a:lnSpc>
+              <a:buNone/>
+            </a:pPr>
+            <a:r>
+              <a:rPr lang="en-US" sz="650" b="1" dirty="0">
                 <a:solidFill>
                   <a:srgbClr val="0055FF"/>
+                </a:solidFill>
+                <a:latin typeface="Oswald SemiBold" pitchFamily="34" charset="0"/>
+                <a:ea typeface="Oswald SemiBold" pitchFamily="34" charset="-122"/>
+                <a:cs typeface="Oswald SemiBold" pitchFamily="34" charset="-120"/>
+              </a:rPr>
+              <a:t>3</a:t>
+            </a:r>
+            <a:endParaRPr lang="en-US" sz="650" dirty="0"/>
+          </a:p>
+        </p:txBody>
+      </p:sp>
+      <p:sp>
+        <p:nvSpPr>
+          <p:cNvPr id="47" name="Text 43"/>
+          <p:cNvSpPr/>
+          <p:nvPr/>
+        </p:nvSpPr>
+        <p:spPr>
+          <a:xfrm>
+            <a:off x="2814638" y="1699487"/>
+            <a:ext cx="6057900" cy="137127"/>
+          </a:xfrm>
+          <a:prstGeom prst="rect">
+            <a:avLst/>
+          </a:prstGeom>
+          <a:noFill/>
+          <a:ln/>
+        </p:spPr>
+        <p:txBody>
+          <a:bodyPr wrap="none" lIns="68072" tIns="25527" rIns="68072" bIns="25527" rtlCol="0" anchor="t">
+            <a:spAutoFit/>
+          </a:bodyPr>
+          <a:lstStyle/>
+          <a:p>
+            <a:pPr algn="l" indent="0" marL="0">
+              <a:lnSpc>
+                <a:spcPct val="88000"/>
+              </a:lnSpc>
+              <a:buNone/>
+            </a:pPr>
+            <a:r>
+              <a:rPr lang="en-US" sz="600" b="1" dirty="0">
+                <a:solidFill>
+                  <a:srgbClr val="B42318"/>
                 </a:solidFill>
                 <a:latin typeface="JetBrains Mono Bold" pitchFamily="34" charset="0"/>
                 <a:ea typeface="JetBrains Mono Bold" pitchFamily="34" charset="-122"/>
                 <a:cs typeface="JetBrains Mono Bold" pitchFamily="34" charset="-120"/>
               </a:rPr>
-              <a:t>→ trace → map → model</a:t>
-            </a:r>
-            <a:r>
-              <a:rPr lang="en-US" sz="700" b="1" dirty="0">
+              <a:t>active module SPEC + ADR</a:t>
+            </a:r>
+            <a:endParaRPr lang="en-US" sz="600" dirty="0"/>
+          </a:p>
+        </p:txBody>
+      </p:sp>
+      <p:sp>
+        <p:nvSpPr>
+          <p:cNvPr id="48" name="Shape 44"/>
+          <p:cNvSpPr/>
+          <p:nvPr/>
+        </p:nvSpPr>
+        <p:spPr>
+          <a:xfrm>
+            <a:off x="2643188" y="1882378"/>
+            <a:ext cx="6229350" cy="157163"/>
+          </a:xfrm>
+          <a:prstGeom prst="rect">
+            <a:avLst/>
+          </a:prstGeom>
+          <a:solidFill>
+            <a:srgbClr val="FFFFFF"/>
+          </a:solidFill>
+          <a:ln w="9144">
+            <a:solidFill>
+              <a:srgbClr val="D0D7DE"/>
+            </a:solidFill>
+            <a:prstDash val="solid"/>
+          </a:ln>
+        </p:spPr>
+      </p:sp>
+      <p:sp>
+        <p:nvSpPr>
+          <p:cNvPr id="49" name="Shape 45"/>
+          <p:cNvSpPr/>
+          <p:nvPr/>
+        </p:nvSpPr>
+        <p:spPr>
+          <a:xfrm>
+            <a:off x="2643188" y="1882378"/>
+            <a:ext cx="171450" cy="157163"/>
+          </a:xfrm>
+          <a:prstGeom prst="rect">
+            <a:avLst/>
+          </a:prstGeom>
+          <a:solidFill>
+            <a:srgbClr val="EAF1FF"/>
+          </a:solidFill>
+          <a:ln/>
+        </p:spPr>
+      </p:sp>
+      <p:sp>
+        <p:nvSpPr>
+          <p:cNvPr id="50" name="Text 46"/>
+          <p:cNvSpPr/>
+          <p:nvPr/>
+        </p:nvSpPr>
+        <p:spPr>
+          <a:xfrm>
+            <a:off x="2643188" y="1882378"/>
+            <a:ext cx="171450" cy="157163"/>
+          </a:xfrm>
+          <a:prstGeom prst="rect">
+            <a:avLst/>
+          </a:prstGeom>
+          <a:noFill/>
+          <a:ln/>
+        </p:spPr>
+        <p:txBody>
+          <a:bodyPr wrap="none" lIns="0" tIns="0" rIns="0" bIns="0" rtlCol="0" anchor="ctr">
+            <a:spAutoFit/>
+          </a:bodyPr>
+          <a:lstStyle/>
+          <a:p>
+            <a:pPr algn="ctr" indent="0" marL="0">
+              <a:lnSpc>
+                <a:spcPct val="100000"/>
+              </a:lnSpc>
+              <a:buNone/>
+            </a:pPr>
+            <a:r>
+              <a:rPr lang="en-US" sz="650" b="1" dirty="0">
                 <a:solidFill>
                   <a:srgbClr val="0055FF"/>
+                </a:solidFill>
+                <a:latin typeface="Oswald SemiBold" pitchFamily="34" charset="0"/>
+                <a:ea typeface="Oswald SemiBold" pitchFamily="34" charset="-122"/>
+                <a:cs typeface="Oswald SemiBold" pitchFamily="34" charset="-120"/>
+              </a:rPr>
+              <a:t>4</a:t>
+            </a:r>
+            <a:endParaRPr lang="en-US" sz="650" dirty="0"/>
+          </a:p>
+        </p:txBody>
+      </p:sp>
+      <p:sp>
+        <p:nvSpPr>
+          <p:cNvPr id="51" name="Text 47"/>
+          <p:cNvSpPr/>
+          <p:nvPr/>
+        </p:nvSpPr>
+        <p:spPr>
+          <a:xfrm>
+            <a:off x="2814638" y="1892368"/>
+            <a:ext cx="6057900" cy="137127"/>
+          </a:xfrm>
+          <a:prstGeom prst="rect">
+            <a:avLst/>
+          </a:prstGeom>
+          <a:noFill/>
+          <a:ln/>
+        </p:spPr>
+        <p:txBody>
+          <a:bodyPr wrap="none" lIns="68072" tIns="25527" rIns="68072" bIns="25527" rtlCol="0" anchor="t">
+            <a:spAutoFit/>
+          </a:bodyPr>
+          <a:lstStyle/>
+          <a:p>
+            <a:pPr algn="l" indent="0" marL="0">
+              <a:lnSpc>
+                <a:spcPct val="88000"/>
+              </a:lnSpc>
+              <a:buNone/>
+            </a:pPr>
+            <a:r>
+              <a:rPr lang="en-US" sz="600" b="1" dirty="0">
+                <a:solidFill>
+                  <a:srgbClr val="B42318"/>
                 </a:solidFill>
                 <a:latin typeface="JetBrains Mono Bold" pitchFamily="34" charset="0"/>
                 <a:ea typeface="JetBrains Mono Bold" pitchFamily="34" charset="-122"/>
                 <a:cs typeface="JetBrains Mono Bold" pitchFamily="34" charset="-120"/>
               </a:rPr>
-              <a:t>
-</a:t>
-            </a:r>
-            <a:r>
-              <a:rPr lang="en-US" sz="700" b="1" dirty="0">
+              <a:t>artifacts/run_state/&lt;run-id&gt;.json</a:t>
+            </a:r>
+            <a:endParaRPr lang="en-US" sz="600" dirty="0"/>
+          </a:p>
+        </p:txBody>
+      </p:sp>
+      <p:sp>
+        <p:nvSpPr>
+          <p:cNvPr id="52" name="Shape 48"/>
+          <p:cNvSpPr/>
+          <p:nvPr/>
+        </p:nvSpPr>
+        <p:spPr>
+          <a:xfrm>
+            <a:off x="2643188" y="2075259"/>
+            <a:ext cx="6229350" cy="157163"/>
+          </a:xfrm>
+          <a:prstGeom prst="rect">
+            <a:avLst/>
+          </a:prstGeom>
+          <a:solidFill>
+            <a:srgbClr val="FFFFFF"/>
+          </a:solidFill>
+          <a:ln w="9144">
+            <a:solidFill>
+              <a:srgbClr val="D0D7DE"/>
+            </a:solidFill>
+            <a:prstDash val="solid"/>
+          </a:ln>
+        </p:spPr>
+      </p:sp>
+      <p:sp>
+        <p:nvSpPr>
+          <p:cNvPr id="53" name="Shape 49"/>
+          <p:cNvSpPr/>
+          <p:nvPr/>
+        </p:nvSpPr>
+        <p:spPr>
+          <a:xfrm>
+            <a:off x="2643188" y="2075259"/>
+            <a:ext cx="171450" cy="157163"/>
+          </a:xfrm>
+          <a:prstGeom prst="rect">
+            <a:avLst/>
+          </a:prstGeom>
+          <a:solidFill>
+            <a:srgbClr val="EAF1FF"/>
+          </a:solidFill>
+          <a:ln/>
+        </p:spPr>
+      </p:sp>
+      <p:sp>
+        <p:nvSpPr>
+          <p:cNvPr id="54" name="Text 50"/>
+          <p:cNvSpPr/>
+          <p:nvPr/>
+        </p:nvSpPr>
+        <p:spPr>
+          <a:xfrm>
+            <a:off x="2643188" y="2075259"/>
+            <a:ext cx="171450" cy="157163"/>
+          </a:xfrm>
+          <a:prstGeom prst="rect">
+            <a:avLst/>
+          </a:prstGeom>
+          <a:noFill/>
+          <a:ln/>
+        </p:spPr>
+        <p:txBody>
+          <a:bodyPr wrap="none" lIns="0" tIns="0" rIns="0" bIns="0" rtlCol="0" anchor="ctr">
+            <a:spAutoFit/>
+          </a:bodyPr>
+          <a:lstStyle/>
+          <a:p>
+            <a:pPr algn="ctr" indent="0" marL="0">
+              <a:lnSpc>
+                <a:spcPct val="100000"/>
+              </a:lnSpc>
+              <a:buNone/>
+            </a:pPr>
+            <a:r>
+              <a:rPr lang="en-US" sz="650" b="1" dirty="0">
                 <a:solidFill>
                   <a:srgbClr val="0055FF"/>
+                </a:solidFill>
+                <a:latin typeface="Oswald SemiBold" pitchFamily="34" charset="0"/>
+                <a:ea typeface="Oswald SemiBold" pitchFamily="34" charset="-122"/>
+                <a:cs typeface="Oswald SemiBold" pitchFamily="34" charset="-120"/>
+              </a:rPr>
+              <a:t>5</a:t>
+            </a:r>
+            <a:endParaRPr lang="en-US" sz="650" dirty="0"/>
+          </a:p>
+        </p:txBody>
+      </p:sp>
+      <p:sp>
+        <p:nvSpPr>
+          <p:cNvPr id="55" name="Text 51"/>
+          <p:cNvSpPr/>
+          <p:nvPr/>
+        </p:nvSpPr>
+        <p:spPr>
+          <a:xfrm>
+            <a:off x="2814638" y="2085249"/>
+            <a:ext cx="6057900" cy="137127"/>
+          </a:xfrm>
+          <a:prstGeom prst="rect">
+            <a:avLst/>
+          </a:prstGeom>
+          <a:noFill/>
+          <a:ln/>
+        </p:spPr>
+        <p:txBody>
+          <a:bodyPr wrap="none" lIns="68072" tIns="25527" rIns="68072" bIns="25527" rtlCol="0" anchor="t">
+            <a:spAutoFit/>
+          </a:bodyPr>
+          <a:lstStyle/>
+          <a:p>
+            <a:pPr algn="l" indent="0" marL="0">
+              <a:lnSpc>
+                <a:spcPct val="88000"/>
+              </a:lnSpc>
+              <a:buNone/>
+            </a:pPr>
+            <a:r>
+              <a:rPr lang="en-US" sz="600" b="1" dirty="0">
+                <a:solidFill>
+                  <a:srgbClr val="B42318"/>
                 </a:solidFill>
                 <a:latin typeface="JetBrains Mono Bold" pitchFamily="34" charset="0"/>
                 <a:ea typeface="JetBrains Mono Bold" pitchFamily="34" charset="-122"/>
                 <a:cs typeface="JetBrains Mono Bold" pitchFamily="34" charset="-120"/>
               </a:rPr>
-              <a:t>→ generate → test → validate</a:t>
-            </a:r>
-            <a:r>
-              <a:rPr lang="en-US" sz="700" b="1" dirty="0">
-                <a:solidFill>
-                  <a:srgbClr val="0055FF"/>
-                </a:solidFill>
-                <a:latin typeface="JetBrains Mono Bold" pitchFamily="34" charset="0"/>
-                <a:ea typeface="JetBrains Mono Bold" pitchFamily="34" charset="-122"/>
-                <a:cs typeface="JetBrains Mono Bold" pitchFamily="34" charset="-120"/>
-              </a:rPr>
-              <a:t>
-</a:t>
-            </a:r>
-            <a:r>
-              <a:rPr lang="en-US" sz="700" b="1" dirty="0">
-                <a:solidFill>
-                  <a:srgbClr val="0055FF"/>
-                </a:solidFill>
-                <a:latin typeface="JetBrains Mono Bold" pitchFamily="34" charset="0"/>
-                <a:ea typeface="JetBrains Mono Bold" pitchFamily="34" charset="-122"/>
-                <a:cs typeface="JetBrains Mono Bold" pitchFamily="34" charset="-120"/>
-              </a:rPr>
-              <a:t>→ review → release</a:t>
-            </a:r>
-            <a:endParaRPr lang="en-US" sz="700" dirty="0"/>
-          </a:p>
-        </p:txBody>
-      </p:sp>
-      <p:sp>
-        <p:nvSpPr>
-          <p:cNvPr id="58" name="Shape 54"/>
-          <p:cNvSpPr/>
-          <p:nvPr/>
-        </p:nvSpPr>
-        <p:spPr>
-          <a:xfrm>
-            <a:off x="2957513" y="3327536"/>
-            <a:ext cx="5929313" cy="1216112"/>
+              <a:t>.github/skills/&lt;verb&gt;/SKILL.md</a:t>
+            </a:r>
+            <a:endParaRPr lang="en-US" sz="600" dirty="0"/>
+          </a:p>
+        </p:txBody>
+      </p:sp>
+      <p:sp>
+        <p:nvSpPr>
+          <p:cNvPr id="56" name="Shape 52"/>
+          <p:cNvSpPr/>
+          <p:nvPr/>
+        </p:nvSpPr>
+        <p:spPr>
+          <a:xfrm>
+            <a:off x="2571750" y="2346722"/>
+            <a:ext cx="6372225" cy="825103"/>
           </a:xfrm>
           <a:prstGeom prst="rect">
             <a:avLst/>
@@ -28113,7 +26549,7 @@
           <a:solidFill>
             <a:srgbClr val="FFF8F7"/>
           </a:solidFill>
-          <a:ln w="27432">
+          <a:ln w="18288">
             <a:solidFill>
               <a:srgbClr val="FF443A"/>
             </a:solidFill>
@@ -28123,14 +26559,14 @@
       </p:sp>
       <p:sp>
         <p:nvSpPr>
-          <p:cNvPr id="59" name="Shape 55"/>
-          <p:cNvSpPr/>
-          <p:nvPr/>
-        </p:nvSpPr>
-        <p:spPr>
-          <a:xfrm>
-            <a:off x="8758238" y="3256099"/>
-            <a:ext cx="200025" cy="200025"/>
+          <p:cNvPr id="57" name="Shape 53"/>
+          <p:cNvSpPr/>
+          <p:nvPr/>
+        </p:nvSpPr>
+        <p:spPr>
+          <a:xfrm>
+            <a:off x="8829675" y="2289572"/>
+            <a:ext cx="171450" cy="171450"/>
           </a:xfrm>
           <a:prstGeom prst="rect">
             <a:avLst/>
@@ -28148,14 +26584,14 @@
       </p:sp>
       <p:sp>
         <p:nvSpPr>
-          <p:cNvPr id="60" name="Text 56"/>
-          <p:cNvSpPr/>
-          <p:nvPr/>
-        </p:nvSpPr>
-        <p:spPr>
-          <a:xfrm>
-            <a:off x="8758238" y="3256099"/>
-            <a:ext cx="200025" cy="200025"/>
+          <p:cNvPr id="58" name="Text 54"/>
+          <p:cNvSpPr/>
+          <p:nvPr/>
+        </p:nvSpPr>
+        <p:spPr>
+          <a:xfrm>
+            <a:off x="8829675" y="2289572"/>
+            <a:ext cx="171450" cy="171450"/>
           </a:xfrm>
           <a:prstGeom prst="rect">
             <a:avLst/>
@@ -28171,12 +26607,12 @@
           <a:p>
             <a:pPr algn="ctr" indent="0" marL="0">
               <a:lnSpc>
-                <a:spcPct val="104000"/>
+                <a:spcPct val="100000"/>
               </a:lnSpc>
               <a:buNone/>
             </a:pPr>
             <a:r>
-              <a:rPr lang="en-US" sz="850" dirty="0">
+              <a:rPr lang="en-US" sz="750" dirty="0">
                 <a:solidFill>
                   <a:srgbClr val="FFFFFF"/>
                 </a:solidFill>
@@ -28184,22 +26620,22 @@
                 <a:ea typeface="Oswald SemiBold" pitchFamily="34" charset="-122"/>
                 <a:cs typeface="Oswald SemiBold" pitchFamily="34" charset="-120"/>
               </a:rPr>
-              <a:t>3</a:t>
-            </a:r>
-            <a:endParaRPr lang="en-US" sz="850" dirty="0"/>
-          </a:p>
-        </p:txBody>
-      </p:sp>
-      <p:sp>
-        <p:nvSpPr>
-          <p:cNvPr id="61" name="Text 57"/>
-          <p:cNvSpPr/>
-          <p:nvPr/>
-        </p:nvSpPr>
-        <p:spPr>
-          <a:xfrm>
-            <a:off x="3043238" y="3398974"/>
-            <a:ext cx="5757863" cy="167153"/>
+              <a:t>2</a:t>
+            </a:r>
+            <a:endParaRPr lang="en-US" sz="750" dirty="0"/>
+          </a:p>
+        </p:txBody>
+      </p:sp>
+      <p:sp>
+        <p:nvSpPr>
+          <p:cNvPr id="59" name="Text 55"/>
+          <p:cNvSpPr/>
+          <p:nvPr/>
+        </p:nvSpPr>
+        <p:spPr>
+          <a:xfrm>
+            <a:off x="2643188" y="2403872"/>
+            <a:ext cx="6229350" cy="142875"/>
           </a:xfrm>
           <a:prstGeom prst="rect">
             <a:avLst/>
@@ -28215,12 +26651,12 @@
           <a:p>
             <a:pPr algn="l" indent="0" marL="0">
               <a:lnSpc>
-                <a:spcPct val="104000"/>
+                <a:spcPct val="100000"/>
               </a:lnSpc>
               <a:buNone/>
             </a:pPr>
             <a:r>
-              <a:rPr lang="en-US" sz="900" b="1" dirty="0">
+              <a:rPr lang="en-US" sz="800" b="1" dirty="0">
                 <a:solidFill>
                   <a:srgbClr val="111111"/>
                 </a:solidFill>
@@ -28228,11 +26664,149 @@
                 <a:ea typeface="Inter Bold" pitchFamily="34" charset="-122"/>
                 <a:cs typeface="Inter Bold" pitchFamily="34" charset="-120"/>
               </a:rPr>
-              <a:t>Authority boundaries</a:t>
-            </a:r>
-            <a:endParaRPr lang="en-US" sz="900" dirty="0"/>
-          </a:p>
-        </p:txBody>
+              <a:t>Canonical skill sequence</a:t>
+            </a:r>
+            <a:endParaRPr lang="en-US" sz="800" dirty="0"/>
+          </a:p>
+        </p:txBody>
+      </p:sp>
+      <p:sp>
+        <p:nvSpPr>
+          <p:cNvPr id="60" name="Text 56"/>
+          <p:cNvSpPr/>
+          <p:nvPr/>
+        </p:nvSpPr>
+        <p:spPr>
+          <a:xfrm>
+            <a:off x="2643188" y="2589609"/>
+            <a:ext cx="6229350" cy="482203"/>
+          </a:xfrm>
+          <a:prstGeom prst="rect">
+            <a:avLst/>
+          </a:prstGeom>
+          <a:noFill/>
+          <a:ln/>
+        </p:spPr>
+        <p:txBody>
+          <a:bodyPr wrap="square" lIns="0" tIns="0" rIns="0" bIns="0" rtlCol="0" anchor="t">
+            <a:spAutoFit/>
+          </a:bodyPr>
+          <a:lstStyle/>
+          <a:p>
+            <a:pPr algn="l" indent="0" marL="0">
+              <a:lnSpc>
+                <a:spcPct val="100000"/>
+              </a:lnSpc>
+              <a:buNone/>
+            </a:pPr>
+            <a:r>
+              <a:rPr lang="en-US" sz="650" b="1" dirty="0">
+                <a:solidFill>
+                  <a:srgbClr val="0055FF"/>
+                </a:solidFill>
+                <a:latin typeface="JetBrains Mono Bold" pitchFamily="34" charset="0"/>
+                <a:ea typeface="JetBrains Mono Bold" pitchFamily="34" charset="-122"/>
+                <a:cs typeface="JetBrains Mono Bold" pitchFamily="34" charset="-120"/>
+              </a:rPr>
+              <a:t>interview → specify → decide</a:t>
+            </a:r>
+            <a:r>
+              <a:rPr lang="en-US" sz="650" b="1" dirty="0">
+                <a:solidFill>
+                  <a:srgbClr val="0055FF"/>
+                </a:solidFill>
+                <a:latin typeface="JetBrains Mono Bold" pitchFamily="34" charset="0"/>
+                <a:ea typeface="JetBrains Mono Bold" pitchFamily="34" charset="-122"/>
+                <a:cs typeface="JetBrains Mono Bold" pitchFamily="34" charset="-120"/>
+              </a:rPr>
+              <a:t>
+</a:t>
+            </a:r>
+            <a:r>
+              <a:rPr lang="en-US" sz="650" b="1" dirty="0">
+                <a:solidFill>
+                  <a:srgbClr val="0055FF"/>
+                </a:solidFill>
+                <a:latin typeface="JetBrains Mono Bold" pitchFamily="34" charset="0"/>
+                <a:ea typeface="JetBrains Mono Bold" pitchFamily="34" charset="-122"/>
+                <a:cs typeface="JetBrains Mono Bold" pitchFamily="34" charset="-120"/>
+              </a:rPr>
+              <a:t>→ trace → map → model</a:t>
+            </a:r>
+            <a:r>
+              <a:rPr lang="en-US" sz="650" b="1" dirty="0">
+                <a:solidFill>
+                  <a:srgbClr val="0055FF"/>
+                </a:solidFill>
+                <a:latin typeface="JetBrains Mono Bold" pitchFamily="34" charset="0"/>
+                <a:ea typeface="JetBrains Mono Bold" pitchFamily="34" charset="-122"/>
+                <a:cs typeface="JetBrains Mono Bold" pitchFamily="34" charset="-120"/>
+              </a:rPr>
+              <a:t>
+</a:t>
+            </a:r>
+            <a:r>
+              <a:rPr lang="en-US" sz="650" b="1" dirty="0">
+                <a:solidFill>
+                  <a:srgbClr val="0055FF"/>
+                </a:solidFill>
+                <a:latin typeface="JetBrains Mono Bold" pitchFamily="34" charset="0"/>
+                <a:ea typeface="JetBrains Mono Bold" pitchFamily="34" charset="-122"/>
+                <a:cs typeface="JetBrains Mono Bold" pitchFamily="34" charset="-120"/>
+              </a:rPr>
+              <a:t>→ generate → test → validate</a:t>
+            </a:r>
+            <a:r>
+              <a:rPr lang="en-US" sz="650" b="1" dirty="0">
+                <a:solidFill>
+                  <a:srgbClr val="0055FF"/>
+                </a:solidFill>
+                <a:latin typeface="JetBrains Mono Bold" pitchFamily="34" charset="0"/>
+                <a:ea typeface="JetBrains Mono Bold" pitchFamily="34" charset="-122"/>
+                <a:cs typeface="JetBrains Mono Bold" pitchFamily="34" charset="-120"/>
+              </a:rPr>
+              <a:t>
+</a:t>
+            </a:r>
+            <a:r>
+              <a:rPr lang="en-US" sz="650" b="1" dirty="0">
+                <a:solidFill>
+                  <a:srgbClr val="0055FF"/>
+                </a:solidFill>
+                <a:latin typeface="JetBrains Mono Bold" pitchFamily="34" charset="0"/>
+                <a:ea typeface="JetBrains Mono Bold" pitchFamily="34" charset="-122"/>
+                <a:cs typeface="JetBrains Mono Bold" pitchFamily="34" charset="-120"/>
+              </a:rPr>
+              <a:t>→ review → release</a:t>
+            </a:r>
+            <a:endParaRPr lang="en-US" sz="650" dirty="0"/>
+          </a:p>
+        </p:txBody>
+      </p:sp>
+      <p:sp>
+        <p:nvSpPr>
+          <p:cNvPr id="61" name="Shape 57"/>
+          <p:cNvSpPr/>
+          <p:nvPr/>
+        </p:nvSpPr>
+        <p:spPr>
+          <a:xfrm>
+            <a:off x="2571750" y="3186113"/>
+            <a:ext cx="6372225" cy="1111746"/>
+          </a:xfrm>
+          <a:prstGeom prst="rect">
+            <a:avLst/>
+          </a:prstGeom>
+          <a:solidFill>
+            <a:srgbClr val="FFF8F7"/>
+          </a:solidFill>
+          <a:ln w="18288">
+            <a:solidFill>
+              <a:srgbClr val="FF443A"/>
+            </a:solidFill>
+            <a:prstDash val="solid"/>
+          </a:ln>
+        </p:spPr>
       </p:sp>
       <p:sp>
         <p:nvSpPr>
@@ -28242,14 +26816,14 @@
         </p:nvSpPr>
         <p:spPr>
           <a:xfrm>
-            <a:off x="3043238" y="3623277"/>
-            <a:ext cx="2850356" cy="235353"/>
-          </a:xfrm>
-          <a:prstGeom prst="rect">
-            <a:avLst/>
-          </a:prstGeom>
-          <a:solidFill>
-            <a:srgbClr val="FFFFFF"/>
+            <a:off x="8829675" y="3128963"/>
+            <a:ext cx="171450" cy="171450"/>
+          </a:xfrm>
+          <a:prstGeom prst="rect">
+            <a:avLst/>
+          </a:prstGeom>
+          <a:solidFill>
+            <a:srgbClr val="FF443A"/>
           </a:solidFill>
           <a:ln w="18288">
             <a:solidFill>
@@ -28267,63 +26841,96 @@
         </p:nvSpPr>
         <p:spPr>
           <a:xfrm>
-            <a:off x="3043238" y="3623277"/>
-            <a:ext cx="2850356" cy="235353"/>
-          </a:xfrm>
-          <a:prstGeom prst="rect">
-            <a:avLst/>
-          </a:prstGeom>
-          <a:noFill/>
-          <a:ln/>
-        </p:spPr>
-        <p:txBody>
-          <a:bodyPr wrap="square" lIns="68072" tIns="51054" rIns="68072" bIns="51054" rtlCol="0" anchor="t">
-            <a:spAutoFit/>
-          </a:bodyPr>
-          <a:lstStyle/>
-          <a:p>
-            <a:pPr algn="l" indent="0" marL="0">
+            <a:off x="8829675" y="3128963"/>
+            <a:ext cx="171450" cy="171450"/>
+          </a:xfrm>
+          <a:prstGeom prst="rect">
+            <a:avLst/>
+          </a:prstGeom>
+          <a:noFill/>
+          <a:ln/>
+        </p:spPr>
+        <p:txBody>
+          <a:bodyPr wrap="none" lIns="0" tIns="0" rIns="0" bIns="0" rtlCol="0" anchor="ctr">
+            <a:spAutoFit/>
+          </a:bodyPr>
+          <a:lstStyle/>
+          <a:p>
+            <a:pPr algn="ctr" indent="0" marL="0">
               <a:lnSpc>
-                <a:spcPct val="85429"/>
+                <a:spcPct val="100000"/>
               </a:lnSpc>
               <a:buNone/>
             </a:pPr>
             <a:r>
-              <a:rPr lang="en-US" sz="700" b="1" dirty="0">
-                <a:solidFill>
-                  <a:srgbClr val="0055FF"/>
+              <a:rPr lang="en-US" sz="750" dirty="0">
+                <a:solidFill>
+                  <a:srgbClr val="FFFFFF"/>
                 </a:solidFill>
                 <a:latin typeface="Oswald SemiBold" pitchFamily="34" charset="0"/>
                 <a:ea typeface="Oswald SemiBold" pitchFamily="34" charset="-122"/>
                 <a:cs typeface="Oswald SemiBold" pitchFamily="34" charset="-120"/>
               </a:rPr>
-              <a:t>ANALYST</a:t>
-            </a:r>
-            <a:r>
-              <a:rPr lang="en-US" sz="650" b="1" dirty="0">
-                <a:solidFill>
-                  <a:srgbClr val="222222"/>
+              <a:t>3</a:t>
+            </a:r>
+            <a:endParaRPr lang="en-US" sz="750" dirty="0"/>
+          </a:p>
+        </p:txBody>
+      </p:sp>
+      <p:sp>
+        <p:nvSpPr>
+          <p:cNvPr id="64" name="Text 60"/>
+          <p:cNvSpPr/>
+          <p:nvPr/>
+        </p:nvSpPr>
+        <p:spPr>
+          <a:xfrm>
+            <a:off x="2643188" y="3243263"/>
+            <a:ext cx="6229350" cy="142875"/>
+          </a:xfrm>
+          <a:prstGeom prst="rect">
+            <a:avLst/>
+          </a:prstGeom>
+          <a:noFill/>
+          <a:ln/>
+        </p:spPr>
+        <p:txBody>
+          <a:bodyPr wrap="none" lIns="0" tIns="0" rIns="0" bIns="0" rtlCol="0" anchor="t">
+            <a:spAutoFit/>
+          </a:bodyPr>
+          <a:lstStyle/>
+          <a:p>
+            <a:pPr algn="l" indent="0" marL="0">
+              <a:lnSpc>
+                <a:spcPct val="100000"/>
+              </a:lnSpc>
+              <a:buNone/>
+            </a:pPr>
+            <a:r>
+              <a:rPr lang="en-US" sz="800" b="1" dirty="0">
+                <a:solidFill>
+                  <a:srgbClr val="111111"/>
                 </a:solidFill>
                 <a:latin typeface="Inter Bold" pitchFamily="34" charset="0"/>
                 <a:ea typeface="Inter Bold" pitchFamily="34" charset="-122"/>
                 <a:cs typeface="Inter Bold" pitchFamily="34" charset="-120"/>
               </a:rPr>
-              <a:t> — define behavior</a:t>
-            </a:r>
-            <a:endParaRPr lang="en-US" sz="700" dirty="0"/>
-          </a:p>
-        </p:txBody>
-      </p:sp>
-      <p:sp>
-        <p:nvSpPr>
-          <p:cNvPr id="64" name="Shape 60"/>
-          <p:cNvSpPr/>
-          <p:nvPr/>
-        </p:nvSpPr>
-        <p:spPr>
-          <a:xfrm>
-            <a:off x="5950744" y="3623277"/>
-            <a:ext cx="2850356" cy="235353"/>
+              <a:t>Authority boundaries</a:t>
+            </a:r>
+            <a:endParaRPr lang="en-US" sz="800" dirty="0"/>
+          </a:p>
+        </p:txBody>
+      </p:sp>
+      <p:sp>
+        <p:nvSpPr>
+          <p:cNvPr id="65" name="Shape 61"/>
+          <p:cNvSpPr/>
+          <p:nvPr/>
+        </p:nvSpPr>
+        <p:spPr>
+          <a:xfrm>
+            <a:off x="2643188" y="3429000"/>
+            <a:ext cx="3093244" cy="227707"/>
           </a:xfrm>
           <a:prstGeom prst="rect">
             <a:avLst/>
@@ -28341,14 +26948,14 @@
       </p:sp>
       <p:sp>
         <p:nvSpPr>
-          <p:cNvPr id="65" name="Text 61"/>
-          <p:cNvSpPr/>
-          <p:nvPr/>
-        </p:nvSpPr>
-        <p:spPr>
-          <a:xfrm>
-            <a:off x="5950744" y="3623277"/>
-            <a:ext cx="2850356" cy="235353"/>
+          <p:cNvPr id="66" name="Text 62"/>
+          <p:cNvSpPr/>
+          <p:nvPr/>
+        </p:nvSpPr>
+        <p:spPr>
+          <a:xfrm>
+            <a:off x="2643188" y="3429000"/>
+            <a:ext cx="3093244" cy="227707"/>
           </a:xfrm>
           <a:prstGeom prst="rect">
             <a:avLst/>
@@ -28364,12 +26971,12 @@
           <a:p>
             <a:pPr algn="l" indent="0" marL="0">
               <a:lnSpc>
-                <a:spcPct val="85429"/>
+                <a:spcPct val="88462"/>
               </a:lnSpc>
               <a:buNone/>
             </a:pPr>
             <a:r>
-              <a:rPr lang="en-US" sz="700" b="1" dirty="0">
+              <a:rPr lang="en-US" sz="650" b="1" dirty="0">
                 <a:solidFill>
                   <a:srgbClr val="0055FF"/>
                 </a:solidFill>
@@ -28377,10 +26984,10 @@
                 <a:ea typeface="Oswald SemiBold" pitchFamily="34" charset="-122"/>
                 <a:cs typeface="Oswald SemiBold" pitchFamily="34" charset="-120"/>
               </a:rPr>
-              <a:t>MAKER</a:t>
-            </a:r>
-            <a:r>
-              <a:rPr lang="en-US" sz="650" b="1" dirty="0">
+              <a:t>ANALYST</a:t>
+            </a:r>
+            <a:r>
+              <a:rPr lang="en-US" sz="600" b="1" dirty="0">
                 <a:solidFill>
                   <a:srgbClr val="222222"/>
                 </a:solidFill>
@@ -28388,22 +26995,22 @@
                 <a:ea typeface="Inter Bold" pitchFamily="34" charset="-122"/>
                 <a:cs typeface="Inter Bold" pitchFamily="34" charset="-120"/>
               </a:rPr>
-              <a:t> — build or repair</a:t>
-            </a:r>
-            <a:endParaRPr lang="en-US" sz="700" dirty="0"/>
-          </a:p>
-        </p:txBody>
-      </p:sp>
-      <p:sp>
-        <p:nvSpPr>
-          <p:cNvPr id="66" name="Shape 62"/>
-          <p:cNvSpPr/>
-          <p:nvPr/>
-        </p:nvSpPr>
-        <p:spPr>
-          <a:xfrm>
-            <a:off x="3043238" y="3872917"/>
-            <a:ext cx="2850356" cy="235353"/>
+              <a:t> — define behavior</a:t>
+            </a:r>
+            <a:endParaRPr lang="en-US" sz="650" dirty="0"/>
+          </a:p>
+        </p:txBody>
+      </p:sp>
+      <p:sp>
+        <p:nvSpPr>
+          <p:cNvPr id="67" name="Shape 63"/>
+          <p:cNvSpPr/>
+          <p:nvPr/>
+        </p:nvSpPr>
+        <p:spPr>
+          <a:xfrm>
+            <a:off x="5779294" y="3429000"/>
+            <a:ext cx="3093244" cy="227707"/>
           </a:xfrm>
           <a:prstGeom prst="rect">
             <a:avLst/>
@@ -28421,14 +27028,14 @@
       </p:sp>
       <p:sp>
         <p:nvSpPr>
-          <p:cNvPr id="67" name="Text 63"/>
-          <p:cNvSpPr/>
-          <p:nvPr/>
-        </p:nvSpPr>
-        <p:spPr>
-          <a:xfrm>
-            <a:off x="3043238" y="3872917"/>
-            <a:ext cx="2850356" cy="235353"/>
+          <p:cNvPr id="68" name="Text 64"/>
+          <p:cNvSpPr/>
+          <p:nvPr/>
+        </p:nvSpPr>
+        <p:spPr>
+          <a:xfrm>
+            <a:off x="5779294" y="3429000"/>
+            <a:ext cx="3093244" cy="227707"/>
           </a:xfrm>
           <a:prstGeom prst="rect">
             <a:avLst/>
@@ -28444,12 +27051,12 @@
           <a:p>
             <a:pPr algn="l" indent="0" marL="0">
               <a:lnSpc>
-                <a:spcPct val="85429"/>
+                <a:spcPct val="88462"/>
               </a:lnSpc>
               <a:buNone/>
             </a:pPr>
             <a:r>
-              <a:rPr lang="en-US" sz="700" b="1" dirty="0">
+              <a:rPr lang="en-US" sz="650" b="1" dirty="0">
                 <a:solidFill>
                   <a:srgbClr val="0055FF"/>
                 </a:solidFill>
@@ -28457,10 +27064,10 @@
                 <a:ea typeface="Oswald SemiBold" pitchFamily="34" charset="-122"/>
                 <a:cs typeface="Oswald SemiBold" pitchFamily="34" charset="-120"/>
               </a:rPr>
-              <a:t>EXPLORER</a:t>
-            </a:r>
-            <a:r>
-              <a:rPr lang="en-US" sz="650" b="1" dirty="0">
+              <a:t>MAKER</a:t>
+            </a:r>
+            <a:r>
+              <a:rPr lang="en-US" sz="600" b="1" dirty="0">
                 <a:solidFill>
                   <a:srgbClr val="222222"/>
                 </a:solidFill>
@@ -28468,22 +27075,22 @@
                 <a:ea typeface="Inter Bold" pitchFamily="34" charset="-122"/>
                 <a:cs typeface="Inter Bold" pitchFamily="34" charset="-120"/>
               </a:rPr>
-              <a:t> — diagnose only</a:t>
-            </a:r>
-            <a:endParaRPr lang="en-US" sz="700" dirty="0"/>
-          </a:p>
-        </p:txBody>
-      </p:sp>
-      <p:sp>
-        <p:nvSpPr>
-          <p:cNvPr id="68" name="Shape 64"/>
-          <p:cNvSpPr/>
-          <p:nvPr/>
-        </p:nvSpPr>
-        <p:spPr>
-          <a:xfrm>
-            <a:off x="5950744" y="3872917"/>
-            <a:ext cx="2850356" cy="235353"/>
+              <a:t> — build or repair</a:t>
+            </a:r>
+            <a:endParaRPr lang="en-US" sz="650" dirty="0"/>
+          </a:p>
+        </p:txBody>
+      </p:sp>
+      <p:sp>
+        <p:nvSpPr>
+          <p:cNvPr id="69" name="Shape 65"/>
+          <p:cNvSpPr/>
+          <p:nvPr/>
+        </p:nvSpPr>
+        <p:spPr>
+          <a:xfrm>
+            <a:off x="2643188" y="3670995"/>
+            <a:ext cx="3093244" cy="227707"/>
           </a:xfrm>
           <a:prstGeom prst="rect">
             <a:avLst/>
@@ -28501,14 +27108,14 @@
       </p:sp>
       <p:sp>
         <p:nvSpPr>
-          <p:cNvPr id="69" name="Text 65"/>
-          <p:cNvSpPr/>
-          <p:nvPr/>
-        </p:nvSpPr>
-        <p:spPr>
-          <a:xfrm>
-            <a:off x="5950744" y="3872917"/>
-            <a:ext cx="2850356" cy="235353"/>
+          <p:cNvPr id="70" name="Text 66"/>
+          <p:cNvSpPr/>
+          <p:nvPr/>
+        </p:nvSpPr>
+        <p:spPr>
+          <a:xfrm>
+            <a:off x="2643188" y="3670995"/>
+            <a:ext cx="3093244" cy="227707"/>
           </a:xfrm>
           <a:prstGeom prst="rect">
             <a:avLst/>
@@ -28524,12 +27131,12 @@
           <a:p>
             <a:pPr algn="l" indent="0" marL="0">
               <a:lnSpc>
-                <a:spcPct val="85429"/>
+                <a:spcPct val="88462"/>
               </a:lnSpc>
               <a:buNone/>
             </a:pPr>
             <a:r>
-              <a:rPr lang="en-US" sz="700" b="1" dirty="0">
+              <a:rPr lang="en-US" sz="650" b="1" dirty="0">
                 <a:solidFill>
                   <a:srgbClr val="0055FF"/>
                 </a:solidFill>
@@ -28537,10 +27144,10 @@
                 <a:ea typeface="Oswald SemiBold" pitchFamily="34" charset="-122"/>
                 <a:cs typeface="Oswald SemiBold" pitchFamily="34" charset="-120"/>
               </a:rPr>
-              <a:t>CHECKER</a:t>
-            </a:r>
-            <a:r>
-              <a:rPr lang="en-US" sz="650" b="1" dirty="0">
+              <a:t>EXPLORER</a:t>
+            </a:r>
+            <a:r>
+              <a:rPr lang="en-US" sz="600" b="1" dirty="0">
                 <a:solidFill>
                   <a:srgbClr val="222222"/>
                 </a:solidFill>
@@ -28548,22 +27155,22 @@
                 <a:ea typeface="Inter Bold" pitchFamily="34" charset="-122"/>
                 <a:cs typeface="Inter Bold" pitchFamily="34" charset="-120"/>
               </a:rPr>
-              <a:t> — verify only</a:t>
-            </a:r>
-            <a:endParaRPr lang="en-US" sz="700" dirty="0"/>
-          </a:p>
-        </p:txBody>
-      </p:sp>
-      <p:sp>
-        <p:nvSpPr>
-          <p:cNvPr id="70" name="Shape 66"/>
-          <p:cNvSpPr/>
-          <p:nvPr/>
-        </p:nvSpPr>
-        <p:spPr>
-          <a:xfrm>
-            <a:off x="3043238" y="4122558"/>
-            <a:ext cx="2850356" cy="235353"/>
+              <a:t> — diagnose only</a:t>
+            </a:r>
+            <a:endParaRPr lang="en-US" sz="650" dirty="0"/>
+          </a:p>
+        </p:txBody>
+      </p:sp>
+      <p:sp>
+        <p:nvSpPr>
+          <p:cNvPr id="71" name="Shape 67"/>
+          <p:cNvSpPr/>
+          <p:nvPr/>
+        </p:nvSpPr>
+        <p:spPr>
+          <a:xfrm>
+            <a:off x="5779294" y="3670995"/>
+            <a:ext cx="3093244" cy="227707"/>
           </a:xfrm>
           <a:prstGeom prst="rect">
             <a:avLst/>
@@ -28581,14 +27188,14 @@
       </p:sp>
       <p:sp>
         <p:nvSpPr>
-          <p:cNvPr id="71" name="Text 67"/>
-          <p:cNvSpPr/>
-          <p:nvPr/>
-        </p:nvSpPr>
-        <p:spPr>
-          <a:xfrm>
-            <a:off x="3043238" y="4122558"/>
-            <a:ext cx="2850356" cy="235353"/>
+          <p:cNvPr id="72" name="Text 68"/>
+          <p:cNvSpPr/>
+          <p:nvPr/>
+        </p:nvSpPr>
+        <p:spPr>
+          <a:xfrm>
+            <a:off x="5779294" y="3670995"/>
+            <a:ext cx="3093244" cy="227707"/>
           </a:xfrm>
           <a:prstGeom prst="rect">
             <a:avLst/>
@@ -28604,12 +27211,12 @@
           <a:p>
             <a:pPr algn="l" indent="0" marL="0">
               <a:lnSpc>
-                <a:spcPct val="85429"/>
+                <a:spcPct val="88462"/>
               </a:lnSpc>
               <a:buNone/>
             </a:pPr>
             <a:r>
-              <a:rPr lang="en-US" sz="700" b="1" dirty="0">
+              <a:rPr lang="en-US" sz="650" b="1" dirty="0">
                 <a:solidFill>
                   <a:srgbClr val="0055FF"/>
                 </a:solidFill>
@@ -28617,10 +27224,10 @@
                 <a:ea typeface="Oswald SemiBold" pitchFamily="34" charset="-122"/>
                 <a:cs typeface="Oswald SemiBold" pitchFamily="34" charset="-120"/>
               </a:rPr>
-              <a:t>ORCHESTRATOR</a:t>
-            </a:r>
-            <a:r>
-              <a:rPr lang="en-US" sz="650" b="1" dirty="0">
+              <a:t>CHECKER</a:t>
+            </a:r>
+            <a:r>
+              <a:rPr lang="en-US" sz="600" b="1" dirty="0">
                 <a:solidFill>
                   <a:srgbClr val="222222"/>
                 </a:solidFill>
@@ -28628,22 +27235,22 @@
                 <a:ea typeface="Inter Bold" pitchFamily="34" charset="-122"/>
                 <a:cs typeface="Inter Bold" pitchFamily="34" charset="-120"/>
               </a:rPr>
-              <a:t> — route and stop</a:t>
-            </a:r>
-            <a:endParaRPr lang="en-US" sz="700" dirty="0"/>
-          </a:p>
-        </p:txBody>
-      </p:sp>
-      <p:sp>
-        <p:nvSpPr>
-          <p:cNvPr id="72" name="Shape 68"/>
-          <p:cNvSpPr/>
-          <p:nvPr/>
-        </p:nvSpPr>
-        <p:spPr>
-          <a:xfrm>
-            <a:off x="5950744" y="4122558"/>
-            <a:ext cx="2850356" cy="235353"/>
+              <a:t> — verify only</a:t>
+            </a:r>
+            <a:endParaRPr lang="en-US" sz="650" dirty="0"/>
+          </a:p>
+        </p:txBody>
+      </p:sp>
+      <p:sp>
+        <p:nvSpPr>
+          <p:cNvPr id="73" name="Shape 69"/>
+          <p:cNvSpPr/>
+          <p:nvPr/>
+        </p:nvSpPr>
+        <p:spPr>
+          <a:xfrm>
+            <a:off x="2643188" y="3912989"/>
+            <a:ext cx="3093244" cy="227707"/>
           </a:xfrm>
           <a:prstGeom prst="rect">
             <a:avLst/>
@@ -28661,14 +27268,14 @@
       </p:sp>
       <p:sp>
         <p:nvSpPr>
-          <p:cNvPr id="73" name="Text 69"/>
-          <p:cNvSpPr/>
-          <p:nvPr/>
-        </p:nvSpPr>
-        <p:spPr>
-          <a:xfrm>
-            <a:off x="5950744" y="4122558"/>
-            <a:ext cx="2850356" cy="235353"/>
+          <p:cNvPr id="74" name="Text 70"/>
+          <p:cNvSpPr/>
+          <p:nvPr/>
+        </p:nvSpPr>
+        <p:spPr>
+          <a:xfrm>
+            <a:off x="2643188" y="3912989"/>
+            <a:ext cx="3093244" cy="227707"/>
           </a:xfrm>
           <a:prstGeom prst="rect">
             <a:avLst/>
@@ -28684,12 +27291,12 @@
           <a:p>
             <a:pPr algn="l" indent="0" marL="0">
               <a:lnSpc>
-                <a:spcPct val="85429"/>
+                <a:spcPct val="88462"/>
               </a:lnSpc>
               <a:buNone/>
             </a:pPr>
             <a:r>
-              <a:rPr lang="en-US" sz="700" b="1" dirty="0">
+              <a:rPr lang="en-US" sz="650" b="1" dirty="0">
                 <a:solidFill>
                   <a:srgbClr val="0055FF"/>
                 </a:solidFill>
@@ -28697,10 +27304,10 @@
                 <a:ea typeface="Oswald SemiBold" pitchFamily="34" charset="-122"/>
                 <a:cs typeface="Oswald SemiBold" pitchFamily="34" charset="-120"/>
               </a:rPr>
-              <a:t>HUMAN</a:t>
-            </a:r>
-            <a:r>
-              <a:rPr lang="en-US" sz="650" b="1" dirty="0">
+              <a:t>ORCHESTRATOR</a:t>
+            </a:r>
+            <a:r>
+              <a:rPr lang="en-US" sz="600" b="1" dirty="0">
                 <a:solidFill>
                   <a:srgbClr val="222222"/>
                 </a:solidFill>
@@ -28708,31 +27315,11 @@
                 <a:ea typeface="Inter Bold" pitchFamily="34" charset="-122"/>
                 <a:cs typeface="Inter Bold" pitchFamily="34" charset="-120"/>
               </a:rPr>
-              <a:t> — approve and release</a:t>
-            </a:r>
-            <a:endParaRPr lang="en-US" sz="700" dirty="0"/>
-          </a:p>
-        </p:txBody>
-      </p:sp>
-      <p:sp>
-        <p:nvSpPr>
-          <p:cNvPr id="74" name="Shape 70"/>
-          <p:cNvSpPr/>
-          <p:nvPr/>
-        </p:nvSpPr>
-        <p:spPr>
-          <a:xfrm>
-            <a:off x="0" y="4800600"/>
-            <a:ext cx="9144000" cy="257175"/>
-          </a:xfrm>
-          <a:prstGeom prst="rect">
-            <a:avLst/>
-          </a:prstGeom>
-          <a:solidFill>
-            <a:srgbClr val="0055FF"/>
-          </a:solidFill>
-          <a:ln/>
-        </p:spPr>
+              <a:t> — route and stop</a:t>
+            </a:r>
+            <a:endParaRPr lang="en-US" sz="650" dirty="0"/>
+          </a:p>
+        </p:txBody>
       </p:sp>
       <p:sp>
         <p:nvSpPr>
@@ -28742,16 +27329,21 @@
         </p:nvSpPr>
         <p:spPr>
           <a:xfrm>
-            <a:off x="0" y="4800600"/>
-            <a:ext cx="9144000" cy="28575"/>
-          </a:xfrm>
-          <a:prstGeom prst="rect">
-            <a:avLst/>
-          </a:prstGeom>
-          <a:solidFill>
-            <a:srgbClr val="111111"/>
-          </a:solidFill>
-          <a:ln/>
+            <a:off x="5779294" y="3912989"/>
+            <a:ext cx="3093244" cy="227707"/>
+          </a:xfrm>
+          <a:prstGeom prst="rect">
+            <a:avLst/>
+          </a:prstGeom>
+          <a:solidFill>
+            <a:srgbClr val="FFFFFF"/>
+          </a:solidFill>
+          <a:ln w="18288">
+            <a:solidFill>
+              <a:srgbClr val="111111"/>
+            </a:solidFill>
+            <a:prstDash val="solid"/>
+          </a:ln>
         </p:spPr>
       </p:sp>
       <p:sp>
@@ -28762,33 +27354,128 @@
         </p:nvSpPr>
         <p:spPr>
           <a:xfrm>
-            <a:off x="142875" y="4882753"/>
-            <a:ext cx="1075134" cy="92869"/>
-          </a:xfrm>
-          <a:prstGeom prst="rect">
-            <a:avLst/>
-          </a:prstGeom>
-          <a:noFill/>
-          <a:ln/>
-        </p:spPr>
-        <p:txBody>
-          <a:bodyPr wrap="none" lIns="0" tIns="0" rIns="0" bIns="0" rtlCol="0" anchor="t">
+            <a:off x="5779294" y="3912989"/>
+            <a:ext cx="3093244" cy="227707"/>
+          </a:xfrm>
+          <a:prstGeom prst="rect">
+            <a:avLst/>
+          </a:prstGeom>
+          <a:noFill/>
+          <a:ln/>
+        </p:spPr>
+        <p:txBody>
+          <a:bodyPr wrap="square" lIns="68072" tIns="51054" rIns="68072" bIns="51054" rtlCol="0" anchor="t">
             <a:spAutoFit/>
           </a:bodyPr>
           <a:lstStyle/>
           <a:p>
             <a:pPr algn="l" indent="0" marL="0">
-              <a:buNone/>
-            </a:pPr>
-            <a:r>
-              <a:rPr lang="en-US" sz="550" b="1" spc="1" kern="0" dirty="0">
-                <a:solidFill>
-                  <a:srgbClr val="FFFFFF"/>
+              <a:lnSpc>
+                <a:spcPct val="88462"/>
+              </a:lnSpc>
+              <a:buNone/>
+            </a:pPr>
+            <a:r>
+              <a:rPr lang="en-US" sz="650" b="1" dirty="0">
+                <a:solidFill>
+                  <a:srgbClr val="0055FF"/>
+                </a:solidFill>
+                <a:latin typeface="Oswald SemiBold" pitchFamily="34" charset="0"/>
+                <a:ea typeface="Oswald SemiBold" pitchFamily="34" charset="-122"/>
+                <a:cs typeface="Oswald SemiBold" pitchFamily="34" charset="-120"/>
+              </a:rPr>
+              <a:t>HUMAN</a:t>
+            </a:r>
+            <a:r>
+              <a:rPr lang="en-US" sz="600" b="1" dirty="0">
+                <a:solidFill>
+                  <a:srgbClr val="222222"/>
                 </a:solidFill>
                 <a:latin typeface="Inter Bold" pitchFamily="34" charset="0"/>
                 <a:ea typeface="Inter Bold" pitchFamily="34" charset="-122"/>
                 <a:cs typeface="Inter Bold" pitchFamily="34" charset="-120"/>
               </a:rPr>
+              <a:t> — approve and release</a:t>
+            </a:r>
+            <a:endParaRPr lang="en-US" sz="650" dirty="0"/>
+          </a:p>
+        </p:txBody>
+      </p:sp>
+      <p:sp>
+        <p:nvSpPr>
+          <p:cNvPr id="77" name="Shape 73"/>
+          <p:cNvSpPr/>
+          <p:nvPr/>
+        </p:nvSpPr>
+        <p:spPr>
+          <a:xfrm>
+            <a:off x="0" y="4872038"/>
+            <a:ext cx="9144000" cy="214313"/>
+          </a:xfrm>
+          <a:prstGeom prst="rect">
+            <a:avLst/>
+          </a:prstGeom>
+          <a:solidFill>
+            <a:srgbClr val="0055FF"/>
+          </a:solidFill>
+          <a:ln/>
+        </p:spPr>
+      </p:sp>
+      <p:sp>
+        <p:nvSpPr>
+          <p:cNvPr id="78" name="Shape 74"/>
+          <p:cNvSpPr/>
+          <p:nvPr/>
+        </p:nvSpPr>
+        <p:spPr>
+          <a:xfrm>
+            <a:off x="0" y="4872038"/>
+            <a:ext cx="9144000" cy="28575"/>
+          </a:xfrm>
+          <a:prstGeom prst="rect">
+            <a:avLst/>
+          </a:prstGeom>
+          <a:solidFill>
+            <a:srgbClr val="111111"/>
+          </a:solidFill>
+          <a:ln/>
+        </p:spPr>
+      </p:sp>
+      <p:sp>
+        <p:nvSpPr>
+          <p:cNvPr id="79" name="Text 75"/>
+          <p:cNvSpPr/>
+          <p:nvPr/>
+        </p:nvSpPr>
+        <p:spPr>
+          <a:xfrm>
+            <a:off x="114300" y="4932759"/>
+            <a:ext cx="1075134" cy="92869"/>
+          </a:xfrm>
+          <a:prstGeom prst="rect">
+            <a:avLst/>
+          </a:prstGeom>
+          <a:noFill/>
+          <a:ln/>
+        </p:spPr>
+        <p:txBody>
+          <a:bodyPr wrap="none" lIns="0" tIns="0" rIns="0" bIns="0" rtlCol="0" anchor="t">
+            <a:spAutoFit/>
+          </a:bodyPr>
+          <a:lstStyle/>
+          <a:p>
+            <a:pPr algn="l" indent="0" marL="0">
+              <a:buNone/>
+            </a:pPr>
+            <a:r>
+              <a:rPr lang="en-US" sz="550" b="1" spc="1" kern="0" dirty="0">
+                <a:solidFill>
+                  <a:srgbClr val="FFFFFF"/>
+                </a:solidFill>
+                <a:latin typeface="Inter Bold" pitchFamily="34" charset="0"/>
+                <a:ea typeface="Inter Bold" pitchFamily="34" charset="-122"/>
+                <a:cs typeface="Inter Bold" pitchFamily="34" charset="-120"/>
+              </a:rPr>
               <a:t>STEP 2: THE CONTRACT</a:t>
             </a:r>
             <a:endParaRPr lang="en-US" sz="550" dirty="0"/>
@@ -28797,13 +27484,13 @@
       </p:sp>
       <p:sp>
         <p:nvSpPr>
-          <p:cNvPr id="77" name="Text 73"/>
-          <p:cNvSpPr/>
-          <p:nvPr/>
-        </p:nvSpPr>
-        <p:spPr>
-          <a:xfrm>
-            <a:off x="8033147" y="4882753"/>
+          <p:cNvPr id="80" name="Text 76"/>
+          <p:cNvSpPr/>
+          <p:nvPr/>
+        </p:nvSpPr>
+        <p:spPr>
+          <a:xfrm>
+            <a:off x="8061722" y="4932759"/>
             <a:ext cx="967978" cy="92869"/>
           </a:xfrm>
           <a:prstGeom prst="rect">
@@ -34504,7 +33191,7 @@
         <p:spPr>
           <a:xfrm>
             <a:off x="271463" y="1114425"/>
-            <a:ext cx="2071688" cy="801886"/>
+            <a:ext cx="2071688" cy="724309"/>
           </a:xfrm>
           <a:prstGeom prst="rect">
             <a:avLst/>
@@ -34594,7 +33281,7 @@
         </p:nvSpPr>
         <p:spPr>
           <a:xfrm>
-            <a:off x="685800" y="1207294"/>
+            <a:off x="685800" y="1185863"/>
             <a:ext cx="1571625" cy="142875"/>
           </a:xfrm>
           <a:prstGeom prst="rect">
@@ -34638,8 +33325,8 @@
         </p:nvSpPr>
         <p:spPr>
           <a:xfrm>
-            <a:off x="685800" y="1385888"/>
-            <a:ext cx="1571625" cy="401836"/>
+            <a:off x="685800" y="1364456"/>
+            <a:ext cx="1571625" cy="359978"/>
           </a:xfrm>
           <a:prstGeom prst="rect">
             <a:avLst/>
@@ -34655,12 +33342,12 @@
           <a:p>
             <a:pPr algn="l" indent="0" marL="0">
               <a:lnSpc>
-                <a:spcPct val="100000"/>
+                <a:spcPct val="96000"/>
               </a:lnSpc>
               <a:buNone/>
             </a:pPr>
             <a:r>
-              <a:rPr lang="en-US" sz="750" b="1" dirty="0">
+              <a:rPr lang="en-US" sz="700" b="1" dirty="0">
                 <a:solidFill>
                   <a:srgbClr val="30343B"/>
                 </a:solidFill>
@@ -34670,7 +33357,7 @@
               </a:rPr>
               <a:t>Called by user prompts; requires explicit intent and the durable run state.</a:t>
             </a:r>
-            <a:endParaRPr lang="en-US" sz="750" dirty="0"/>
+            <a:endParaRPr lang="en-US" sz="700" dirty="0"/>
           </a:p>
         </p:txBody>
       </p:sp>
@@ -34682,8 +33369,8 @@
         </p:nvSpPr>
         <p:spPr>
           <a:xfrm>
-            <a:off x="271463" y="1990092"/>
-            <a:ext cx="2071688" cy="801886"/>
+            <a:off x="271463" y="1957388"/>
+            <a:ext cx="2071688" cy="724309"/>
           </a:xfrm>
           <a:prstGeom prst="rect">
             <a:avLst/>
@@ -34707,7 +33394,7 @@
         </p:nvSpPr>
         <p:spPr>
           <a:xfrm>
-            <a:off x="357188" y="2111536"/>
+            <a:off x="357188" y="2078831"/>
             <a:ext cx="242888" cy="242888"/>
           </a:xfrm>
           <a:prstGeom prst="rect">
@@ -34732,7 +33419,7 @@
         </p:nvSpPr>
         <p:spPr>
           <a:xfrm>
-            <a:off x="357188" y="2111536"/>
+            <a:off x="357188" y="2078831"/>
             <a:ext cx="242888" cy="242888"/>
           </a:xfrm>
           <a:prstGeom prst="rect">
@@ -34773,7 +33460,7 @@
         </p:nvSpPr>
         <p:spPr>
           <a:xfrm>
-            <a:off x="685800" y="2097249"/>
+            <a:off x="685800" y="2043113"/>
             <a:ext cx="1571625" cy="142875"/>
           </a:xfrm>
           <a:prstGeom prst="rect">
@@ -34817,8 +33504,8 @@
         </p:nvSpPr>
         <p:spPr>
           <a:xfrm>
-            <a:off x="685800" y="2275842"/>
-            <a:ext cx="1571625" cy="401836"/>
+            <a:off x="685800" y="2221706"/>
+            <a:ext cx="1571625" cy="359978"/>
           </a:xfrm>
           <a:prstGeom prst="rect">
             <a:avLst/>
@@ -34834,12 +33521,12 @@
           <a:p>
             <a:pPr algn="l" indent="0" marL="0">
               <a:lnSpc>
-                <a:spcPct val="100000"/>
+                <a:spcPct val="96000"/>
               </a:lnSpc>
               <a:buNone/>
             </a:pPr>
             <a:r>
-              <a:rPr lang="en-US" sz="750" b="1" dirty="0">
+              <a:rPr lang="en-US" sz="700" b="1" dirty="0">
                 <a:solidFill>
                   <a:srgbClr val="30343B"/>
                 </a:solidFill>
@@ -34849,7 +33536,7 @@
               </a:rPr>
               <a:t>Read state → Select exactly one skill → Update state → Stop at the gate.</a:t>
             </a:r>
-            <a:endParaRPr lang="en-US" sz="750" dirty="0"/>
+            <a:endParaRPr lang="en-US" sz="700" dirty="0"/>
           </a:p>
         </p:txBody>
       </p:sp>
@@ -34861,8 +33548,8 @@
         </p:nvSpPr>
         <p:spPr>
           <a:xfrm>
-            <a:off x="271463" y="2894335"/>
-            <a:ext cx="2071688" cy="801886"/>
+            <a:off x="271463" y="2828925"/>
+            <a:ext cx="2071688" cy="614363"/>
           </a:xfrm>
           <a:prstGeom prst="rect">
             <a:avLst/>
@@ -34886,7 +33573,7 @@
         </p:nvSpPr>
         <p:spPr>
           <a:xfrm>
-            <a:off x="357188" y="3069357"/>
+            <a:off x="357188" y="2936081"/>
             <a:ext cx="242888" cy="242888"/>
           </a:xfrm>
           <a:prstGeom prst="rect">
@@ -34911,7 +33598,7 @@
         </p:nvSpPr>
         <p:spPr>
           <a:xfrm>
-            <a:off x="357188" y="3069357"/>
+            <a:off x="357188" y="2936081"/>
             <a:ext cx="242888" cy="242888"/>
           </a:xfrm>
           <a:prstGeom prst="rect">
@@ -34952,7 +33639,7 @@
         </p:nvSpPr>
         <p:spPr>
           <a:xfrm>
-            <a:off x="685800" y="3055069"/>
+            <a:off x="685800" y="2900363"/>
             <a:ext cx="1571625" cy="142875"/>
           </a:xfrm>
           <a:prstGeom prst="rect">
@@ -34996,8 +33683,8 @@
         </p:nvSpPr>
         <p:spPr>
           <a:xfrm>
-            <a:off x="685800" y="3233663"/>
-            <a:ext cx="1571625" cy="267891"/>
+            <a:off x="685800" y="3078956"/>
+            <a:ext cx="1571625" cy="239985"/>
           </a:xfrm>
           <a:prstGeom prst="rect">
             <a:avLst/>
@@ -35013,12 +33700,12 @@
           <a:p>
             <a:pPr algn="l" indent="0" marL="0">
               <a:lnSpc>
-                <a:spcPct val="100000"/>
+                <a:spcPct val="96000"/>
               </a:lnSpc>
               <a:buNone/>
             </a:pPr>
             <a:r>
-              <a:rPr lang="en-US" sz="750" b="1" dirty="0">
+              <a:rPr lang="en-US" sz="700" b="1" dirty="0">
                 <a:solidFill>
                   <a:srgbClr val="30343B"/>
                 </a:solidFill>
@@ -35028,7 +33715,7 @@
               </a:rPr>
               <a:t>Forbidden to generate code, fake approval, or skip a stage.</a:t>
             </a:r>
-            <a:endParaRPr lang="en-US" sz="750" dirty="0"/>
+            <a:endParaRPr lang="en-US" sz="700" dirty="0"/>
           </a:p>
         </p:txBody>
       </p:sp>
@@ -35040,8 +33727,8 @@
         </p:nvSpPr>
         <p:spPr>
           <a:xfrm>
-            <a:off x="271463" y="3827152"/>
-            <a:ext cx="2071688" cy="801886"/>
+            <a:off x="271463" y="3619091"/>
+            <a:ext cx="2071688" cy="724309"/>
           </a:xfrm>
           <a:prstGeom prst="rect">
             <a:avLst/>
@@ -35065,7 +33752,7 @@
         </p:nvSpPr>
         <p:spPr>
           <a:xfrm>
-            <a:off x="357188" y="3977171"/>
+            <a:off x="357188" y="3769109"/>
             <a:ext cx="242888" cy="242888"/>
           </a:xfrm>
           <a:prstGeom prst="rect">
@@ -35090,7 +33777,7 @@
         </p:nvSpPr>
         <p:spPr>
           <a:xfrm>
-            <a:off x="357188" y="3977171"/>
+            <a:off x="357188" y="3769109"/>
             <a:ext cx="242888" cy="242888"/>
           </a:xfrm>
           <a:prstGeom prst="rect">
@@ -35131,7 +33818,7 @@
         </p:nvSpPr>
         <p:spPr>
           <a:xfrm>
-            <a:off x="685800" y="3962884"/>
+            <a:off x="685800" y="3733391"/>
             <a:ext cx="1571625" cy="142875"/>
           </a:xfrm>
           <a:prstGeom prst="rect">
@@ -35175,8 +33862,8 @@
         </p:nvSpPr>
         <p:spPr>
           <a:xfrm>
-            <a:off x="685800" y="4141477"/>
-            <a:ext cx="1571625" cy="401836"/>
+            <a:off x="685800" y="3911984"/>
+            <a:ext cx="1571625" cy="359978"/>
           </a:xfrm>
           <a:prstGeom prst="rect">
             <a:avLst/>
@@ -35192,12 +33879,12 @@
           <a:p>
             <a:pPr algn="l" indent="0" marL="0">
               <a:lnSpc>
-                <a:spcPct val="100000"/>
+                <a:spcPct val="96000"/>
               </a:lnSpc>
               <a:buNone/>
             </a:pPr>
             <a:r>
-              <a:rPr lang="en-US" sz="750" b="1" dirty="0">
+              <a:rPr lang="en-US" sz="700" b="1" dirty="0">
                 <a:solidFill>
                   <a:srgbClr val="30343B"/>
                 </a:solidFill>
@@ -35207,7 +33894,7 @@
               </a:rPr>
               <a:t>Forces the agent to pause when human input or a valid state is required.</a:t>
             </a:r>
-            <a:endParaRPr lang="en-US" sz="750" dirty="0"/>
+            <a:endParaRPr lang="en-US" sz="700" dirty="0"/>
           </a:p>
         </p:txBody>
       </p:sp>
@@ -35220,7 +33907,7 @@
         <p:spPr>
           <a:xfrm>
             <a:off x="2528888" y="1085850"/>
-            <a:ext cx="6343650" cy="3571875"/>
+            <a:ext cx="6343650" cy="3286125"/>
           </a:xfrm>
           <a:prstGeom prst="rect">
             <a:avLst/>
@@ -35284,7 +33971,7 @@
         </p:nvSpPr>
         <p:spPr>
           <a:xfrm>
-            <a:off x="3143250" y="1092994"/>
+            <a:off x="3143250" y="1085850"/>
             <a:ext cx="1303734" cy="271463"/>
           </a:xfrm>
           <a:prstGeom prst="rect">
@@ -35304,7 +33991,7 @@
         </p:nvSpPr>
         <p:spPr>
           <a:xfrm>
-            <a:off x="3143250" y="1092994"/>
+            <a:off x="3143250" y="1085850"/>
             <a:ext cx="1303734" cy="21431"/>
           </a:xfrm>
           <a:prstGeom prst="rect">
@@ -35324,7 +34011,7 @@
         </p:nvSpPr>
         <p:spPr>
           <a:xfrm>
-            <a:off x="3143250" y="1092994"/>
+            <a:off x="3143250" y="1085850"/>
             <a:ext cx="1303734" cy="271463"/>
           </a:xfrm>
           <a:prstGeom prst="rect">
@@ -35365,7 +34052,7 @@
         </p:nvSpPr>
         <p:spPr>
           <a:xfrm>
-            <a:off x="7827373" y="1182291"/>
+            <a:off x="7827373" y="1175147"/>
             <a:ext cx="945152" cy="92869"/>
           </a:xfrm>
           <a:prstGeom prst="rect">
@@ -35406,8 +34093,8 @@
         </p:nvSpPr>
         <p:spPr>
           <a:xfrm>
-            <a:off x="2528888" y="1371600"/>
-            <a:ext cx="6343650" cy="3286125"/>
+            <a:off x="2528888" y="1357313"/>
+            <a:ext cx="6343650" cy="3129688"/>
           </a:xfrm>
           <a:prstGeom prst="rect">
             <a:avLst/>
@@ -35426,7 +34113,7 @@
         </p:nvSpPr>
         <p:spPr>
           <a:xfrm>
-            <a:off x="2657475" y="1457325"/>
+            <a:off x="2657475" y="1443038"/>
             <a:ext cx="6086475" cy="260300"/>
           </a:xfrm>
           <a:prstGeom prst="rect">
@@ -35470,7 +34157,7 @@
         </p:nvSpPr>
         <p:spPr>
           <a:xfrm>
-            <a:off x="2657475" y="1924403"/>
+            <a:off x="2657475" y="1831925"/>
             <a:ext cx="2986088" cy="1286098"/>
           </a:xfrm>
           <a:prstGeom prst="rect">
@@ -35495,7 +34182,7 @@
         </p:nvSpPr>
         <p:spPr>
           <a:xfrm>
-            <a:off x="5543550" y="1860110"/>
+            <a:off x="5543550" y="1746200"/>
             <a:ext cx="185738" cy="185738"/>
           </a:xfrm>
           <a:prstGeom prst="rect">
@@ -35520,7 +34207,7 @@
         </p:nvSpPr>
         <p:spPr>
           <a:xfrm>
-            <a:off x="5543550" y="1860110"/>
+            <a:off x="5543550" y="1746200"/>
             <a:ext cx="185738" cy="185738"/>
           </a:xfrm>
           <a:prstGeom prst="rect">
@@ -35564,7 +34251,7 @@
         </p:nvSpPr>
         <p:spPr>
           <a:xfrm>
-            <a:off x="2728913" y="1995841"/>
+            <a:off x="2728913" y="1881932"/>
             <a:ext cx="2843213" cy="146279"/>
           </a:xfrm>
           <a:prstGeom prst="rect">
@@ -35608,7 +34295,7 @@
         </p:nvSpPr>
         <p:spPr>
           <a:xfrm>
-            <a:off x="2728913" y="2181411"/>
+            <a:off x="2728913" y="2067502"/>
             <a:ext cx="1432322" cy="107156"/>
           </a:xfrm>
           <a:prstGeom prst="rect">
@@ -35652,7 +34339,7 @@
         </p:nvSpPr>
         <p:spPr>
           <a:xfrm>
-            <a:off x="4161234" y="2188555"/>
+            <a:off x="4161234" y="2074645"/>
             <a:ext cx="182166" cy="103584"/>
           </a:xfrm>
           <a:prstGeom prst="rect">
@@ -35672,7 +34359,7 @@
         </p:nvSpPr>
         <p:spPr>
           <a:xfrm>
-            <a:off x="4161234" y="2188555"/>
+            <a:off x="4161234" y="2074645"/>
             <a:ext cx="182166" cy="103584"/>
           </a:xfrm>
           <a:prstGeom prst="rect">
@@ -35716,7 +34403,7 @@
         </p:nvSpPr>
         <p:spPr>
           <a:xfrm>
-            <a:off x="4343400" y="2181411"/>
+            <a:off x="4343400" y="2067502"/>
             <a:ext cx="50006" cy="107156"/>
           </a:xfrm>
           <a:prstGeom prst="rect">
@@ -35760,7 +34447,7 @@
         </p:nvSpPr>
         <p:spPr>
           <a:xfrm>
-            <a:off x="4393406" y="2188555"/>
+            <a:off x="4393406" y="2074645"/>
             <a:ext cx="321469" cy="103584"/>
           </a:xfrm>
           <a:prstGeom prst="rect">
@@ -35780,7 +34467,7 @@
         </p:nvSpPr>
         <p:spPr>
           <a:xfrm>
-            <a:off x="4393406" y="2188555"/>
+            <a:off x="4393406" y="2074645"/>
             <a:ext cx="321469" cy="103584"/>
           </a:xfrm>
           <a:prstGeom prst="rect">
@@ -35824,7 +34511,7 @@
         </p:nvSpPr>
         <p:spPr>
           <a:xfrm>
-            <a:off x="4714875" y="2181411"/>
+            <a:off x="4714875" y="2067502"/>
             <a:ext cx="50006" cy="107156"/>
           </a:xfrm>
           <a:prstGeom prst="rect">
@@ -35868,7 +34555,7 @@
         </p:nvSpPr>
         <p:spPr>
           <a:xfrm>
-            <a:off x="4764881" y="2188555"/>
+            <a:off x="4764881" y="2074645"/>
             <a:ext cx="367903" cy="103584"/>
           </a:xfrm>
           <a:prstGeom prst="rect">
@@ -35888,7 +34575,7 @@
         </p:nvSpPr>
         <p:spPr>
           <a:xfrm>
-            <a:off x="4764881" y="2188555"/>
+            <a:off x="4764881" y="2074645"/>
             <a:ext cx="367903" cy="103584"/>
           </a:xfrm>
           <a:prstGeom prst="rect">
@@ -35932,7 +34619,7 @@
         </p:nvSpPr>
         <p:spPr>
           <a:xfrm>
-            <a:off x="5132784" y="2181411"/>
+            <a:off x="5132784" y="2067502"/>
             <a:ext cx="282178" cy="107156"/>
           </a:xfrm>
           <a:prstGeom prst="rect">
@@ -35976,7 +34663,7 @@
         </p:nvSpPr>
         <p:spPr>
           <a:xfrm>
-            <a:off x="2728913" y="2296269"/>
+            <a:off x="2728913" y="2182360"/>
             <a:ext cx="1693069" cy="107156"/>
           </a:xfrm>
           <a:prstGeom prst="rect">
@@ -36020,7 +34707,7 @@
         </p:nvSpPr>
         <p:spPr>
           <a:xfrm>
-            <a:off x="2728913" y="2442716"/>
+            <a:off x="2728913" y="2328807"/>
             <a:ext cx="2843213" cy="146279"/>
           </a:xfrm>
           <a:prstGeom prst="rect">
@@ -36064,7 +34751,7 @@
         </p:nvSpPr>
         <p:spPr>
           <a:xfrm>
-            <a:off x="2886075" y="2624714"/>
+            <a:off x="2886075" y="2510805"/>
             <a:ext cx="2686050" cy="114300"/>
           </a:xfrm>
           <a:prstGeom prst="rect">
@@ -36109,7 +34796,7 @@
         </p:nvSpPr>
         <p:spPr>
           <a:xfrm>
-            <a:off x="2886075" y="2753302"/>
+            <a:off x="2886075" y="2639392"/>
             <a:ext cx="2686050" cy="114300"/>
           </a:xfrm>
           <a:prstGeom prst="rect">
@@ -36154,7 +34841,7 @@
         </p:nvSpPr>
         <p:spPr>
           <a:xfrm>
-            <a:off x="2886075" y="2881889"/>
+            <a:off x="2886075" y="2767980"/>
             <a:ext cx="2686050" cy="114300"/>
           </a:xfrm>
           <a:prstGeom prst="rect">
@@ -36199,7 +34886,7 @@
         </p:nvSpPr>
         <p:spPr>
           <a:xfrm>
-            <a:off x="2886075" y="3010477"/>
+            <a:off x="2886075" y="2896567"/>
             <a:ext cx="2686050" cy="114300"/>
           </a:xfrm>
           <a:prstGeom prst="rect">
@@ -36244,7 +34931,7 @@
         </p:nvSpPr>
         <p:spPr>
           <a:xfrm>
-            <a:off x="2657475" y="3246220"/>
+            <a:off x="2657475" y="3132311"/>
             <a:ext cx="2986088" cy="1226102"/>
           </a:xfrm>
           <a:prstGeom prst="rect">
@@ -36269,7 +34956,7 @@
         </p:nvSpPr>
         <p:spPr>
           <a:xfrm>
-            <a:off x="5543550" y="3181927"/>
+            <a:off x="5543550" y="3046586"/>
             <a:ext cx="185738" cy="185738"/>
           </a:xfrm>
           <a:prstGeom prst="rect">
@@ -36294,7 +34981,7 @@
         </p:nvSpPr>
         <p:spPr>
           <a:xfrm>
-            <a:off x="5543550" y="3181927"/>
+            <a:off x="5543550" y="3046586"/>
             <a:ext cx="185738" cy="185738"/>
           </a:xfrm>
           <a:prstGeom prst="rect">
@@ -36338,7 +35025,7 @@
         </p:nvSpPr>
         <p:spPr>
           <a:xfrm>
-            <a:off x="2728913" y="3317658"/>
+            <a:off x="2728913" y="3182317"/>
             <a:ext cx="2843213" cy="146279"/>
           </a:xfrm>
           <a:prstGeom prst="rect">
@@ -36382,7 +35069,7 @@
         </p:nvSpPr>
         <p:spPr>
           <a:xfrm>
-            <a:off x="2886075" y="3499656"/>
+            <a:off x="2886075" y="3364316"/>
             <a:ext cx="2686050" cy="114300"/>
           </a:xfrm>
           <a:prstGeom prst="rect">
@@ -36428,7 +35115,7 @@
         </p:nvSpPr>
         <p:spPr>
           <a:xfrm>
-            <a:off x="2886075" y="3631816"/>
+            <a:off x="2886075" y="3496475"/>
             <a:ext cx="1410891" cy="107156"/>
           </a:xfrm>
           <a:prstGeom prst="rect">
@@ -36474,7 +35161,7 @@
         </p:nvSpPr>
         <p:spPr>
           <a:xfrm>
-            <a:off x="4296966" y="3638959"/>
+            <a:off x="4296966" y="3503619"/>
             <a:ext cx="646509" cy="103584"/>
           </a:xfrm>
           <a:prstGeom prst="rect">
@@ -36494,7 +35181,7 @@
         </p:nvSpPr>
         <p:spPr>
           <a:xfrm>
-            <a:off x="4296966" y="3638959"/>
+            <a:off x="4296966" y="3503619"/>
             <a:ext cx="646509" cy="103584"/>
           </a:xfrm>
           <a:prstGeom prst="rect">
@@ -36538,7 +35225,7 @@
         </p:nvSpPr>
         <p:spPr>
           <a:xfrm>
-            <a:off x="4943475" y="3631816"/>
+            <a:off x="4943475" y="3496475"/>
             <a:ext cx="25003" cy="107156"/>
           </a:xfrm>
           <a:prstGeom prst="rect">
@@ -36582,7 +35269,7 @@
         </p:nvSpPr>
         <p:spPr>
           <a:xfrm>
-            <a:off x="2886075" y="3757389"/>
+            <a:off x="2886075" y="3622049"/>
             <a:ext cx="2686050" cy="114300"/>
           </a:xfrm>
           <a:prstGeom prst="rect">
@@ -36628,7 +35315,7 @@
         </p:nvSpPr>
         <p:spPr>
           <a:xfrm>
-            <a:off x="2886075" y="3889549"/>
+            <a:off x="2886075" y="3754208"/>
             <a:ext cx="1285875" cy="107156"/>
           </a:xfrm>
           <a:prstGeom prst="rect">
@@ -36674,7 +35361,7 @@
         </p:nvSpPr>
         <p:spPr>
           <a:xfrm>
-            <a:off x="4171950" y="3896692"/>
+            <a:off x="4171950" y="3761352"/>
             <a:ext cx="832247" cy="103584"/>
           </a:xfrm>
           <a:prstGeom prst="rect">
@@ -36694,7 +35381,7 @@
         </p:nvSpPr>
         <p:spPr>
           <a:xfrm>
-            <a:off x="4171950" y="3896692"/>
+            <a:off x="4171950" y="3761352"/>
             <a:ext cx="832247" cy="103584"/>
           </a:xfrm>
           <a:prstGeom prst="rect">
@@ -36738,7 +35425,7 @@
         </p:nvSpPr>
         <p:spPr>
           <a:xfrm>
-            <a:off x="5004197" y="3889549"/>
+            <a:off x="5004197" y="3754208"/>
             <a:ext cx="25003" cy="107156"/>
           </a:xfrm>
           <a:prstGeom prst="rect">
@@ -36782,7 +35469,7 @@
         </p:nvSpPr>
         <p:spPr>
           <a:xfrm>
-            <a:off x="2886075" y="4015122"/>
+            <a:off x="2886075" y="3879782"/>
             <a:ext cx="2686050" cy="114300"/>
           </a:xfrm>
           <a:prstGeom prst="rect">
@@ -36828,7 +35515,7 @@
         </p:nvSpPr>
         <p:spPr>
           <a:xfrm>
-            <a:off x="2886075" y="4143710"/>
+            <a:off x="2886075" y="4008369"/>
             <a:ext cx="2686050" cy="114300"/>
           </a:xfrm>
           <a:prstGeom prst="rect">
@@ -36874,7 +35561,7 @@
         </p:nvSpPr>
         <p:spPr>
           <a:xfrm>
-            <a:off x="2886075" y="4272297"/>
+            <a:off x="2886075" y="4136957"/>
             <a:ext cx="2686050" cy="114300"/>
           </a:xfrm>
           <a:prstGeom prst="rect">
@@ -36920,7 +35607,7 @@
         </p:nvSpPr>
         <p:spPr>
           <a:xfrm>
-            <a:off x="5757863" y="1967266"/>
+            <a:off x="5757863" y="1831925"/>
             <a:ext cx="2986088" cy="932092"/>
           </a:xfrm>
           <a:prstGeom prst="rect">
@@ -36945,7 +35632,7 @@
         </p:nvSpPr>
         <p:spPr>
           <a:xfrm>
-            <a:off x="8643938" y="1881541"/>
+            <a:off x="8643938" y="1746200"/>
             <a:ext cx="185738" cy="185738"/>
           </a:xfrm>
           <a:prstGeom prst="rect">
@@ -36970,7 +35657,7 @@
         </p:nvSpPr>
         <p:spPr>
           <a:xfrm>
-            <a:off x="8643938" y="1881541"/>
+            <a:off x="8643938" y="1746200"/>
             <a:ext cx="185738" cy="185738"/>
           </a:xfrm>
           <a:prstGeom prst="rect">
@@ -37014,7 +35701,7 @@
         </p:nvSpPr>
         <p:spPr>
           <a:xfrm>
-            <a:off x="5829300" y="2017272"/>
+            <a:off x="5829300" y="1881932"/>
             <a:ext cx="2843213" cy="146279"/>
           </a:xfrm>
           <a:prstGeom prst="rect">
@@ -37058,7 +35745,7 @@
         </p:nvSpPr>
         <p:spPr>
           <a:xfrm>
-            <a:off x="5829300" y="2199270"/>
+            <a:off x="5829300" y="2063930"/>
             <a:ext cx="2843213" cy="342900"/>
           </a:xfrm>
           <a:prstGeom prst="rect">
@@ -37102,7 +35789,7 @@
         </p:nvSpPr>
         <p:spPr>
           <a:xfrm>
-            <a:off x="5829300" y="2577889"/>
+            <a:off x="5829300" y="2442549"/>
             <a:ext cx="2843213" cy="228600"/>
           </a:xfrm>
           <a:prstGeom prst="rect">
@@ -37146,7 +35833,7 @@
         </p:nvSpPr>
         <p:spPr>
           <a:xfrm>
-            <a:off x="5757863" y="2913645"/>
+            <a:off x="5757863" y="2778305"/>
             <a:ext cx="2986088" cy="782073"/>
           </a:xfrm>
           <a:prstGeom prst="rect">
@@ -37171,7 +35858,7 @@
         </p:nvSpPr>
         <p:spPr>
           <a:xfrm>
-            <a:off x="8643938" y="2827920"/>
+            <a:off x="8643938" y="2692580"/>
             <a:ext cx="185738" cy="185738"/>
           </a:xfrm>
           <a:prstGeom prst="rect">
@@ -37196,7 +35883,7 @@
         </p:nvSpPr>
         <p:spPr>
           <a:xfrm>
-            <a:off x="8643938" y="2827920"/>
+            <a:off x="8643938" y="2692580"/>
             <a:ext cx="185738" cy="185738"/>
           </a:xfrm>
           <a:prstGeom prst="rect">
@@ -37240,7 +35927,7 @@
         </p:nvSpPr>
         <p:spPr>
           <a:xfrm>
-            <a:off x="5829300" y="2963652"/>
+            <a:off x="5829300" y="2828311"/>
             <a:ext cx="2843213" cy="146279"/>
           </a:xfrm>
           <a:prstGeom prst="rect">
@@ -37284,7 +35971,7 @@
         </p:nvSpPr>
         <p:spPr>
           <a:xfrm>
-            <a:off x="5829300" y="3145650"/>
+            <a:off x="5829300" y="3010309"/>
             <a:ext cx="2843213" cy="457200"/>
           </a:xfrm>
           <a:prstGeom prst="rect">
@@ -37328,18 +36015,18 @@
         </p:nvSpPr>
         <p:spPr>
           <a:xfrm>
-            <a:off x="5757863" y="3724294"/>
-            <a:ext cx="2986088" cy="614307"/>
-          </a:xfrm>
-          <a:prstGeom prst="rect">
-            <a:avLst/>
-          </a:prstGeom>
-          <a:solidFill>
-            <a:srgbClr val="FFFFFF"/>
-          </a:solidFill>
-          <a:ln w="9144">
+            <a:off x="5757863" y="3588953"/>
+            <a:ext cx="2986088" cy="561733"/>
+          </a:xfrm>
+          <a:prstGeom prst="rect">
+            <a:avLst/>
+          </a:prstGeom>
+          <a:solidFill>
+            <a:srgbClr val="EAF1FF"/>
+          </a:solidFill>
+          <a:ln w="18288">
             <a:solidFill>
-              <a:srgbClr val="D0D7DE"/>
+              <a:srgbClr val="0055FF"/>
             </a:solidFill>
             <a:prstDash val="solid"/>
           </a:ln>
@@ -37353,7 +36040,7 @@
         </p:nvSpPr>
         <p:spPr>
           <a:xfrm>
-            <a:off x="5829300" y="3774300"/>
+            <a:off x="5829300" y="3646103"/>
             <a:ext cx="2843213" cy="127974"/>
           </a:xfrm>
           <a:prstGeom prst="rect">
@@ -37377,13 +36064,13 @@
             <a:r>
               <a:rPr lang="en-US" sz="700" b="1" dirty="0">
                 <a:solidFill>
-                  <a:srgbClr val="57606A"/>
+                  <a:srgbClr val="0055FF"/>
                 </a:solidFill>
                 <a:latin typeface="Inter Bold" pitchFamily="34" charset="0"/>
                 <a:ea typeface="Inter Bold" pitchFamily="34" charset="-122"/>
                 <a:cs typeface="Inter Bold" pitchFamily="34" charset="-120"/>
               </a:rPr>
-              <a:t>Canonical outputs &amp; Verification</a:t>
+              <a:t>CANONICAL OUTPUTS &amp; VERIFICATION</a:t>
             </a:r>
             <a:endParaRPr lang="en-US" sz="700" dirty="0"/>
           </a:p>
@@ -37397,8 +36084,8 @@
         </p:nvSpPr>
         <p:spPr>
           <a:xfrm>
-            <a:off x="5829300" y="3934420"/>
-            <a:ext cx="1775222" cy="107156"/>
+            <a:off x="5829300" y="3816939"/>
+            <a:ext cx="414338" cy="109724"/>
           </a:xfrm>
           <a:prstGeom prst="rect">
             <a:avLst/>
@@ -37419,17 +36106,17 @@
               <a:buNone/>
             </a:pPr>
             <a:r>
-              <a:rPr lang="en-US" sz="650" dirty="0">
-                <a:solidFill>
-                  <a:srgbClr val="222222"/>
-                </a:solidFill>
-                <a:latin typeface="Inter" pitchFamily="34" charset="0"/>
-                <a:ea typeface="Inter" pitchFamily="34" charset="-122"/>
-                <a:cs typeface="Inter" pitchFamily="34" charset="-120"/>
-              </a:rPr>
-              <a:t>Writes only durable control records under</a:t>
-            </a:r>
-            <a:endParaRPr lang="en-US" sz="650" dirty="0"/>
+              <a:rPr lang="en-US" sz="600" b="1" dirty="0">
+                <a:solidFill>
+                  <a:srgbClr val="111111"/>
+                </a:solidFill>
+                <a:latin typeface="Oswald SemiBold" pitchFamily="34" charset="0"/>
+                <a:ea typeface="Oswald SemiBold" pitchFamily="34" charset="-122"/>
+                <a:cs typeface="Oswald SemiBold" pitchFamily="34" charset="-120"/>
+              </a:rPr>
+              <a:t>OUTPUT</a:t>
+            </a:r>
+            <a:endParaRPr lang="en-US" sz="600" dirty="0"/>
           </a:p>
         </p:txBody>
       </p:sp>
@@ -37441,8 +36128,8 @@
         </p:nvSpPr>
         <p:spPr>
           <a:xfrm>
-            <a:off x="7604522" y="3941564"/>
-            <a:ext cx="971550" cy="103584"/>
+            <a:off x="6293644" y="3816939"/>
+            <a:ext cx="2378869" cy="89967"/>
           </a:xfrm>
           <a:prstGeom prst="rect">
             <a:avLst/>
@@ -37461,8 +36148,8 @@
         </p:nvSpPr>
         <p:spPr>
           <a:xfrm>
-            <a:off x="7604522" y="3941564"/>
-            <a:ext cx="971550" cy="103584"/>
+            <a:off x="6293644" y="3816939"/>
+            <a:ext cx="2378869" cy="89967"/>
           </a:xfrm>
           <a:prstGeom prst="rect">
             <a:avLst/>
@@ -37472,6 +36159,50 @@
         </p:spPr>
         <p:txBody>
           <a:bodyPr wrap="none" lIns="25527" tIns="0" rIns="25527" bIns="0" rtlCol="0" anchor="t">
+            <a:spAutoFit/>
+          </a:bodyPr>
+          <a:lstStyle/>
+          <a:p>
+            <a:pPr algn="l" indent="0" marL="0">
+              <a:lnSpc>
+                <a:spcPct val="96000"/>
+              </a:lnSpc>
+              <a:buNone/>
+            </a:pPr>
+            <a:r>
+              <a:rPr lang="en-US" sz="550" dirty="0">
+                <a:solidFill>
+                  <a:srgbClr val="B42318"/>
+                </a:solidFill>
+                <a:latin typeface="JetBrains Mono" pitchFamily="34" charset="0"/>
+                <a:ea typeface="JetBrains Mono" pitchFamily="34" charset="-122"/>
+                <a:cs typeface="JetBrains Mono" pitchFamily="34" charset="-120"/>
+              </a:rPr>
+              <a:t>artifacts/run_state/&lt;run-id&gt;.json</a:t>
+            </a:r>
+            <a:endParaRPr lang="en-US" sz="550" dirty="0"/>
+          </a:p>
+        </p:txBody>
+      </p:sp>
+      <p:sp>
+        <p:nvSpPr>
+          <p:cNvPr id="89" name="Text 86"/>
+          <p:cNvSpPr/>
+          <p:nvPr/>
+        </p:nvSpPr>
+        <p:spPr>
+          <a:xfrm>
+            <a:off x="5829300" y="3955238"/>
+            <a:ext cx="414338" cy="109724"/>
+          </a:xfrm>
+          <a:prstGeom prst="rect">
+            <a:avLst/>
+          </a:prstGeom>
+          <a:noFill/>
+          <a:ln/>
+        </p:spPr>
+        <p:txBody>
+          <a:bodyPr wrap="none" lIns="0" tIns="0" rIns="0" bIns="0" rtlCol="0" anchor="t">
             <a:spAutoFit/>
           </a:bodyPr>
           <a:lstStyle/>
@@ -37483,30 +36214,30 @@
               <a:buNone/>
             </a:pPr>
             <a:r>
-              <a:rPr lang="en-US" sz="550" dirty="0">
-                <a:solidFill>
-                  <a:srgbClr val="B42318"/>
-                </a:solidFill>
-                <a:latin typeface="JetBrains Mono" pitchFamily="34" charset="0"/>
-                <a:ea typeface="JetBrains Mono" pitchFamily="34" charset="-122"/>
-                <a:cs typeface="JetBrains Mono" pitchFamily="34" charset="-120"/>
-              </a:rPr>
-              <a:t>artifacts/run_state/</a:t>
-            </a:r>
-            <a:endParaRPr lang="en-US" sz="550" dirty="0"/>
-          </a:p>
-        </p:txBody>
-      </p:sp>
-      <p:sp>
-        <p:nvSpPr>
-          <p:cNvPr id="89" name="Text 86"/>
-          <p:cNvSpPr/>
-          <p:nvPr/>
-        </p:nvSpPr>
-        <p:spPr>
-          <a:xfrm>
-            <a:off x="8576072" y="3934420"/>
-            <a:ext cx="25003" cy="107156"/>
+              <a:rPr lang="en-US" sz="600" b="1" dirty="0">
+                <a:solidFill>
+                  <a:srgbClr val="111111"/>
+                </a:solidFill>
+                <a:latin typeface="Oswald SemiBold" pitchFamily="34" charset="0"/>
+                <a:ea typeface="Oswald SemiBold" pitchFamily="34" charset="-122"/>
+                <a:cs typeface="Oswald SemiBold" pitchFamily="34" charset="-120"/>
+              </a:rPr>
+              <a:t>CHECKS</a:t>
+            </a:r>
+            <a:endParaRPr lang="en-US" sz="600" dirty="0"/>
+          </a:p>
+        </p:txBody>
+      </p:sp>
+      <p:sp>
+        <p:nvSpPr>
+          <p:cNvPr id="90" name="Text 87"/>
+          <p:cNvSpPr/>
+          <p:nvPr/>
+        </p:nvSpPr>
+        <p:spPr>
+          <a:xfrm>
+            <a:off x="6293644" y="3955238"/>
+            <a:ext cx="2378869" cy="89967"/>
           </a:xfrm>
           <a:prstGeom prst="rect">
             <a:avLst/>
@@ -37522,12 +36253,12 @@
           <a:p>
             <a:pPr algn="l" indent="0" marL="0">
               <a:lnSpc>
-                <a:spcPct val="102400"/>
+                <a:spcPct val="96000"/>
               </a:lnSpc>
               <a:buNone/>
             </a:pPr>
             <a:r>
-              <a:rPr lang="en-US" sz="650" dirty="0">
+              <a:rPr lang="en-US" sz="550" dirty="0">
                 <a:solidFill>
                   <a:srgbClr val="222222"/>
                 </a:solidFill>
@@ -37535,110 +36266,22 @@
                 <a:ea typeface="Inter" pitchFamily="34" charset="-122"/>
                 <a:cs typeface="Inter" pitchFamily="34" charset="-120"/>
               </a:rPr>
-              <a:t>.</a:t>
-            </a:r>
-            <a:endParaRPr lang="en-US" sz="650" dirty="0"/>
-          </a:p>
-        </p:txBody>
-      </p:sp>
-      <p:sp>
-        <p:nvSpPr>
-          <p:cNvPr id="90" name="Text 87"/>
-          <p:cNvSpPr/>
-          <p:nvPr/>
-        </p:nvSpPr>
-        <p:spPr>
-          <a:xfrm>
-            <a:off x="5829300" y="4049278"/>
-            <a:ext cx="2671763" cy="107156"/>
-          </a:xfrm>
-          <a:prstGeom prst="rect">
-            <a:avLst/>
-          </a:prstGeom>
-          <a:noFill/>
-          <a:ln/>
-        </p:spPr>
-        <p:txBody>
-          <a:bodyPr wrap="none" lIns="0" tIns="0" rIns="0" bIns="0" rtlCol="0" anchor="t">
-            <a:spAutoFit/>
-          </a:bodyPr>
-          <a:lstStyle/>
-          <a:p>
-            <a:pPr algn="l" indent="0" marL="0">
-              <a:lnSpc>
-                <a:spcPct val="102400"/>
-              </a:lnSpc>
-              <a:buNone/>
-            </a:pPr>
-            <a:r>
-              <a:rPr lang="en-US" sz="650" dirty="0">
-                <a:solidFill>
-                  <a:srgbClr val="222222"/>
-                </a:solidFill>
-                <a:latin typeface="Inter" pitchFamily="34" charset="0"/>
-                <a:ea typeface="Inter" pitchFamily="34" charset="-122"/>
-                <a:cs typeface="Inter" pitchFamily="34" charset="-120"/>
-              </a:rPr>
-              <a:t>Verifies transitions, exact one-skill invocation, protected paths,</a:t>
-            </a:r>
-            <a:endParaRPr lang="en-US" sz="650" dirty="0"/>
-          </a:p>
-        </p:txBody>
-      </p:sp>
-      <p:sp>
-        <p:nvSpPr>
-          <p:cNvPr id="91" name="Text 88"/>
-          <p:cNvSpPr/>
-          <p:nvPr/>
-        </p:nvSpPr>
-        <p:spPr>
-          <a:xfrm>
-            <a:off x="5829300" y="4049278"/>
-            <a:ext cx="2828925" cy="221456"/>
-          </a:xfrm>
-          <a:prstGeom prst="rect">
-            <a:avLst/>
-          </a:prstGeom>
-          <a:noFill/>
-          <a:ln/>
-        </p:spPr>
-        <p:txBody>
-          <a:bodyPr wrap="square" lIns="0" tIns="0" rIns="0" bIns="0" rtlCol="0" anchor="t">
-            <a:spAutoFit/>
-          </a:bodyPr>
-          <a:lstStyle/>
-          <a:p>
-            <a:pPr algn="l" indent="0" marL="0">
-              <a:lnSpc>
-                <a:spcPct val="102400"/>
-              </a:lnSpc>
-              <a:buNone/>
-            </a:pPr>
-            <a:r>
-              <a:rPr lang="en-US" sz="650" dirty="0">
-                <a:solidFill>
-                  <a:srgbClr val="222222"/>
-                </a:solidFill>
-                <a:latin typeface="Inter" pitchFamily="34" charset="0"/>
-                <a:ea typeface="Inter" pitchFamily="34" charset="-122"/>
-                <a:cs typeface="Inter" pitchFamily="34" charset="-120"/>
-              </a:rPr>
-              <a:t>and next-action hashes.</a:t>
-            </a:r>
-            <a:endParaRPr lang="en-US" sz="650" dirty="0"/>
-          </a:p>
-        </p:txBody>
-      </p:sp>
-      <p:sp>
-        <p:nvSpPr>
-          <p:cNvPr id="92" name="Shape 89"/>
-          <p:cNvSpPr/>
-          <p:nvPr/>
-        </p:nvSpPr>
-        <p:spPr>
-          <a:xfrm rot="-60000">
-            <a:off x="5614988" y="4301988"/>
-            <a:ext cx="3143250" cy="484324"/>
+              <a:t>transition · exactly one skill · protected paths · next-action hashes</a:t>
+            </a:r>
+            <a:endParaRPr lang="en-US" sz="550" dirty="0"/>
+          </a:p>
+        </p:txBody>
+      </p:sp>
+      <p:sp>
+        <p:nvSpPr>
+          <p:cNvPr id="91" name="Shape 88"/>
+          <p:cNvSpPr/>
+          <p:nvPr/>
+        </p:nvSpPr>
+        <p:spPr>
+          <a:xfrm>
+            <a:off x="1535240" y="4535790"/>
+            <a:ext cx="6073520" cy="302136"/>
           </a:xfrm>
           <a:prstGeom prst="rect">
             <a:avLst/>
@@ -37656,35 +36299,35 @@
       </p:sp>
       <p:sp>
         <p:nvSpPr>
-          <p:cNvPr id="93" name="Text 90"/>
-          <p:cNvSpPr/>
-          <p:nvPr/>
-        </p:nvSpPr>
-        <p:spPr>
-          <a:xfrm rot="-60000">
-            <a:off x="5613412" y="4288348"/>
-            <a:ext cx="3146402" cy="511604"/>
-          </a:xfrm>
-          <a:prstGeom prst="rect">
-            <a:avLst/>
-          </a:prstGeom>
-          <a:noFill/>
-          <a:ln/>
-        </p:spPr>
-        <p:txBody>
-          <a:bodyPr wrap="square" lIns="136017" tIns="85090" rIns="136017" bIns="85090" rtlCol="0" anchor="t">
-            <a:spAutoFit/>
-          </a:bodyPr>
-          <a:lstStyle/>
-          <a:p>
-            <a:pPr algn="l" indent="0" marL="0">
+          <p:cNvPr id="92" name="Text 89"/>
+          <p:cNvSpPr/>
+          <p:nvPr/>
+        </p:nvSpPr>
+        <p:spPr>
+          <a:xfrm>
+            <a:off x="1535240" y="4535790"/>
+            <a:ext cx="6073520" cy="302136"/>
+          </a:xfrm>
+          <a:prstGeom prst="rect">
+            <a:avLst/>
+          </a:prstGeom>
+          <a:noFill/>
+          <a:ln/>
+        </p:spPr>
+        <p:txBody>
+          <a:bodyPr wrap="square" lIns="119126" tIns="59563" rIns="119126" bIns="59563" rtlCol="0" anchor="t">
+            <a:spAutoFit/>
+          </a:bodyPr>
+          <a:lstStyle/>
+          <a:p>
+            <a:pPr algn="ctr" indent="0" marL="0">
               <a:lnSpc>
-                <a:spcPct val="88000"/>
+                <a:spcPct val="84000"/>
               </a:lnSpc>
               <a:buNone/>
             </a:pPr>
             <a:r>
-              <a:rPr lang="en-US" sz="950" b="1" dirty="0">
+              <a:rPr lang="en-US" sz="850" b="1" dirty="0">
                 <a:solidFill>
                   <a:srgbClr val="111111"/>
                 </a:solidFill>
@@ -37695,7 +36338,7 @@
               <a:t>Bottom line:</a:t>
             </a:r>
             <a:r>
-              <a:rPr lang="en-US" sz="1000" dirty="0">
+              <a:rPr lang="en-US" sz="900" dirty="0">
                 <a:solidFill>
                   <a:srgbClr val="111111"/>
                 </a:solidFill>
@@ -37703,10 +36346,10 @@
                 <a:ea typeface="Kalam Bold" pitchFamily="34" charset="-122"/>
                 <a:cs typeface="Kalam Bold" pitchFamily="34" charset="-120"/>
               </a:rPr>
-              <a:t> </a:t>
-            </a:r>
-            <a:r>
-              <a:rPr lang="en-US" sz="1000" dirty="0">
+              <a:t> The orchestrato</a:t>
+            </a:r>
+            <a:r>
+              <a:rPr lang="en-US" sz="900" dirty="0">
                 <a:solidFill>
                   <a:srgbClr val="111111"/>
                 </a:solidFill>
@@ -37714,10 +36357,10 @@
                 <a:ea typeface="Kalam Bold" pitchFamily="34" charset="-122"/>
                 <a:cs typeface="Kalam Bold" pitchFamily="34" charset="-120"/>
               </a:rPr>
-              <a:t>The </a:t>
-            </a:r>
-            <a:r>
-              <a:rPr lang="en-US" sz="1000" dirty="0">
+              <a:t>r is the only thing the pr</a:t>
+            </a:r>
+            <a:r>
+              <a:rPr lang="en-US" sz="900" dirty="0">
                 <a:solidFill>
                   <a:srgbClr val="111111"/>
                 </a:solidFill>
@@ -37725,158 +36368,15 @@
                 <a:ea typeface="Kalam Bold" pitchFamily="34" charset="-122"/>
                 <a:cs typeface="Kalam Bold" pitchFamily="34" charset="-120"/>
               </a:rPr>
-              <a:t>orch</a:t>
-            </a:r>
-            <a:r>
-              <a:rPr lang="en-US" sz="1000" dirty="0">
-                <a:solidFill>
-                  <a:srgbClr val="111111"/>
-                </a:solidFill>
-                <a:latin typeface="Kalam Bold" pitchFamily="34" charset="0"/>
-                <a:ea typeface="Kalam Bold" pitchFamily="34" charset="-122"/>
-                <a:cs typeface="Kalam Bold" pitchFamily="34" charset="-120"/>
-              </a:rPr>
-              <a:t>estra</a:t>
-            </a:r>
-            <a:r>
-              <a:rPr lang="en-US" sz="1000" dirty="0">
-                <a:solidFill>
-                  <a:srgbClr val="111111"/>
-                </a:solidFill>
-                <a:latin typeface="Kalam Bold" pitchFamily="34" charset="0"/>
-                <a:ea typeface="Kalam Bold" pitchFamily="34" charset="-122"/>
-                <a:cs typeface="Kalam Bold" pitchFamily="34" charset="-120"/>
-              </a:rPr>
-              <a:t>tor i</a:t>
-            </a:r>
-            <a:r>
-              <a:rPr lang="en-US" sz="1000" dirty="0">
-                <a:solidFill>
-                  <a:srgbClr val="111111"/>
-                </a:solidFill>
-                <a:latin typeface="Kalam Bold" pitchFamily="34" charset="0"/>
-                <a:ea typeface="Kalam Bold" pitchFamily="34" charset="-122"/>
-                <a:cs typeface="Kalam Bold" pitchFamily="34" charset="-120"/>
-              </a:rPr>
-              <a:t>s th</a:t>
-            </a:r>
-            <a:r>
-              <a:rPr lang="en-US" sz="1000" dirty="0">
-                <a:solidFill>
-                  <a:srgbClr val="111111"/>
-                </a:solidFill>
-                <a:latin typeface="Kalam Bold" pitchFamily="34" charset="0"/>
-                <a:ea typeface="Kalam Bold" pitchFamily="34" charset="-122"/>
-                <a:cs typeface="Kalam Bold" pitchFamily="34" charset="-120"/>
-              </a:rPr>
-              <a:t>e onl</a:t>
-            </a:r>
-            <a:r>
-              <a:rPr lang="en-US" sz="1000" dirty="0">
-                <a:solidFill>
-                  <a:srgbClr val="111111"/>
-                </a:solidFill>
-                <a:latin typeface="Kalam Bold" pitchFamily="34" charset="0"/>
-                <a:ea typeface="Kalam Bold" pitchFamily="34" charset="-122"/>
-                <a:cs typeface="Kalam Bold" pitchFamily="34" charset="-120"/>
-              </a:rPr>
-              <a:t>y th</a:t>
-            </a:r>
-            <a:r>
-              <a:rPr lang="en-US" sz="1000" dirty="0">
-                <a:solidFill>
-                  <a:srgbClr val="111111"/>
-                </a:solidFill>
-                <a:latin typeface="Kalam Bold" pitchFamily="34" charset="0"/>
-                <a:ea typeface="Kalam Bold" pitchFamily="34" charset="-122"/>
-                <a:cs typeface="Kalam Bold" pitchFamily="34" charset="-120"/>
-              </a:rPr>
-              <a:t>ing </a:t>
-            </a:r>
-            <a:r>
-              <a:rPr lang="en-US" sz="1000" dirty="0">
-                <a:solidFill>
-                  <a:srgbClr val="111111"/>
-                </a:solidFill>
-                <a:latin typeface="Kalam Bold" pitchFamily="34" charset="0"/>
-                <a:ea typeface="Kalam Bold" pitchFamily="34" charset="-122"/>
-                <a:cs typeface="Kalam Bold" pitchFamily="34" charset="-120"/>
-              </a:rPr>
-              <a:t>the</a:t>
-            </a:r>
-            <a:r>
-              <a:rPr lang="en-US" sz="1000" dirty="0">
-                <a:solidFill>
-                  <a:srgbClr val="111111"/>
-                </a:solidFill>
-                <a:latin typeface="Kalam Bold" pitchFamily="34" charset="0"/>
-                <a:ea typeface="Kalam Bold" pitchFamily="34" charset="-122"/>
-                <a:cs typeface="Kalam Bold" pitchFamily="34" charset="-120"/>
-              </a:rPr>
-              <a:t> pro</a:t>
-            </a:r>
-            <a:r>
-              <a:rPr lang="en-US" sz="1000" dirty="0">
-                <a:solidFill>
-                  <a:srgbClr val="111111"/>
-                </a:solidFill>
-                <a:latin typeface="Kalam Bold" pitchFamily="34" charset="0"/>
-                <a:ea typeface="Kalam Bold" pitchFamily="34" charset="-122"/>
-                <a:cs typeface="Kalam Bold" pitchFamily="34" charset="-120"/>
-              </a:rPr>
-              <a:t>mpt </a:t>
-            </a:r>
-            <a:r>
-              <a:rPr lang="en-US" sz="1000" dirty="0">
-                <a:solidFill>
-                  <a:srgbClr val="111111"/>
-                </a:solidFill>
-                <a:latin typeface="Kalam Bold" pitchFamily="34" charset="0"/>
-                <a:ea typeface="Kalam Bold" pitchFamily="34" charset="-122"/>
-                <a:cs typeface="Kalam Bold" pitchFamily="34" charset="-120"/>
-              </a:rPr>
-              <a:t>actu</a:t>
-            </a:r>
-            <a:r>
-              <a:rPr lang="en-US" sz="1000" dirty="0">
-                <a:solidFill>
-                  <a:srgbClr val="111111"/>
-                </a:solidFill>
-                <a:latin typeface="Kalam Bold" pitchFamily="34" charset="0"/>
-                <a:ea typeface="Kalam Bold" pitchFamily="34" charset="-122"/>
-                <a:cs typeface="Kalam Bold" pitchFamily="34" charset="-120"/>
-              </a:rPr>
-              <a:t>ally i</a:t>
-            </a:r>
-            <a:r>
-              <a:rPr lang="en-US" sz="1000" dirty="0">
-                <a:solidFill>
-                  <a:srgbClr val="111111"/>
-                </a:solidFill>
-                <a:latin typeface="Kalam Bold" pitchFamily="34" charset="0"/>
-                <a:ea typeface="Kalam Bold" pitchFamily="34" charset="-122"/>
-                <a:cs typeface="Kalam Bold" pitchFamily="34" charset="-120"/>
-              </a:rPr>
-              <a:t>nvok</a:t>
-            </a:r>
-            <a:r>
-              <a:rPr lang="en-US" sz="1000" dirty="0">
-                <a:solidFill>
-                  <a:srgbClr val="111111"/>
-                </a:solidFill>
-                <a:latin typeface="Kalam Bold" pitchFamily="34" charset="0"/>
-                <a:ea typeface="Kalam Bold" pitchFamily="34" charset="-122"/>
-                <a:cs typeface="Kalam Bold" pitchFamily="34" charset="-120"/>
-              </a:rPr>
-              <a:t>es.</a:t>
-            </a:r>
-            <a:endParaRPr lang="en-US" sz="950" dirty="0"/>
-          </a:p>
-        </p:txBody>
-      </p:sp>
-      <p:sp>
-        <p:nvSpPr>
-          <p:cNvPr id="94" name="Shape 91"/>
+              <a:t>ompt actually invokes.</a:t>
+            </a:r>
+            <a:endParaRPr lang="en-US" sz="850" dirty="0"/>
+          </a:p>
+        </p:txBody>
+      </p:sp>
+      <p:sp>
+        <p:nvSpPr>
+          <p:cNvPr id="93" name="Shape 90"/>
           <p:cNvSpPr/>
           <p:nvPr/>
         </p:nvSpPr>
@@ -37896,7 +36396,7 @@
       </p:sp>
       <p:sp>
         <p:nvSpPr>
-          <p:cNvPr id="95" name="Shape 92"/>
+          <p:cNvPr id="94" name="Shape 91"/>
           <p:cNvSpPr/>
           <p:nvPr/>
         </p:nvSpPr>
@@ -37916,7 +36416,7 @@
       </p:sp>
       <p:sp>
         <p:nvSpPr>
-          <p:cNvPr id="96" name="Text 93"/>
+          <p:cNvPr id="95" name="Text 92"/>
           <p:cNvSpPr/>
           <p:nvPr/>
         </p:nvSpPr>
@@ -37957,7 +36457,7 @@
       </p:sp>
       <p:sp>
         <p:nvSpPr>
-          <p:cNvPr id="97" name="Text 94"/>
+          <p:cNvPr id="96" name="Text 93"/>
           <p:cNvSpPr/>
           <p:nvPr/>
         </p:nvSpPr>

--- a/Learning_series_copilot_sas_python.pptx
+++ b/Learning_series_copilot_sas_python.pptx
@@ -5291,7 +5291,7 @@
                 <a:ea typeface="Oswald SemiBold" pitchFamily="34" charset="-122"/>
                 <a:cs typeface="Oswald SemiBold" pitchFamily="34" charset="-120"/>
               </a:rPr>
-              <a:t>WHAT I ASKED COPILOT</a:t>
+              <a:t>COPY-READY COPILOT MESSAGE</a:t>
             </a:r>
             <a:endParaRPr lang="en-US" sz="1400" dirty="0"/>
           </a:p>
@@ -5533,7 +5533,7 @@
                 <a:ea typeface="JetBrains Mono" pitchFamily="34" charset="-122"/>
                 <a:cs typeface="JetBrains Mono" pitchFamily="34" charset="-120"/>
               </a:rPr>
-              <a:t> Migrate the SAS loan-risk logistic scoring workload.</a:t>
+              <a:t> Request a score-only SAS-to-Python migration with keyed tie-</a:t>
             </a:r>
             <a:r>
               <a:rPr lang="en-US" sz="850" dirty="0">
@@ -5544,8 +5544,7 @@
                 <a:ea typeface="JetBrains Mono" pitchFamily="34" charset="-122"/>
                 <a:cs typeface="JetBrains Mono" pitchFamily="34" charset="-120"/>
               </a:rPr>
-              <a:t>
-</a:t>
+              <a:t>out.</a:t>
             </a:r>
             <a:r>
               <a:rPr lang="en-US" sz="850" dirty="0">
@@ -5556,7 +5555,8 @@
                 <a:ea typeface="JetBrains Mono" pitchFamily="34" charset="-122"/>
                 <a:cs typeface="JetBrains Mono" pitchFamily="34" charset="-120"/>
               </a:rPr>
-              <a:t>Score-only SAS-to-Python migration.</a:t>
+              <a:t>
+</a:t>
             </a:r>
             <a:r>
               <a:rPr lang="en-US" sz="850" dirty="0">
@@ -5567,8 +5567,18 @@
                 <a:ea typeface="JetBrains Mono" pitchFamily="34" charset="-122"/>
                 <a:cs typeface="JetBrains Mono" pitchFamily="34" charset="-120"/>
               </a:rPr>
-              <a:t>
-</a:t>
+              <a:t>Record only </a:t>
+            </a:r>
+            <a:r>
+              <a:rPr lang="en-US" sz="800" b="1" dirty="0">
+                <a:solidFill>
+                  <a:srgbClr val="CE9178"/>
+                </a:solidFill>
+                <a:latin typeface="JetBrains Mono Bold" pitchFamily="34" charset="0"/>
+                <a:ea typeface="JetBrains Mono Bold" pitchFamily="34" charset="-122"/>
+                <a:cs typeface="JetBrains Mono Bold" pitchFamily="34" charset="-120"/>
+              </a:rPr>
+              <a:t>local_tieout_requested: true</a:t>
             </a:r>
             <a:r>
               <a:rPr lang="en-US" sz="850" dirty="0">
@@ -5579,7 +5589,7 @@
                 <a:ea typeface="JetBrains Mono" pitchFamily="34" charset="-122"/>
                 <a:cs typeface="JetBrains Mono" pitchFamily="34" charset="-120"/>
               </a:rPr>
-              <a:t>Use keyed tie-out evidence.</a:t>
+              <a:t>.</a:t>
             </a:r>
             <a:r>
               <a:rPr lang="en-US" sz="850" dirty="0">
@@ -5602,7 +5612,7 @@
                 <a:ea typeface="JetBrains Mono" pitchFamily="34" charset="-122"/>
                 <a:cs typeface="JetBrains Mono" pitchFamily="34" charset="-120"/>
               </a:rPr>
-              <a:t>Start from intake readiness only.</a:t>
+              <a:t>Present the population choices; do not choose one for me.</a:t>
             </a:r>
             <a:r>
               <a:rPr lang="en-US" sz="850" dirty="0">
@@ -5625,7 +5635,7 @@
                 <a:ea typeface="JetBrains Mono" pitchFamily="34" charset="-122"/>
                 <a:cs typeface="JetBrains Mono" pitchFamily="34" charset="-120"/>
               </a:rPr>
-              <a:t>Stop at every human gate.</a:t>
+              <a:t>Invoke exactly one authorized skill.</a:t>
             </a:r>
             <a:r>
               <a:rPr lang="en-US" sz="850" dirty="0">
@@ -5648,7 +5658,7 @@
                 <a:ea typeface="JetBrains Mono" pitchFamily="34" charset="-122"/>
                 <a:cs typeface="JetBrains Mono" pitchFamily="34" charset="-120"/>
               </a:rPr>
-              <a:t>Do not choose tie-out population for me.</a:t>
+              <a:t>Stop at the next human gate.</a:t>
             </a:r>
             <a:endParaRPr lang="en-US" sz="850" dirty="0"/>
           </a:p>
@@ -5879,8 +5889,8 @@
         </p:nvSpPr>
         <p:spPr>
           <a:xfrm>
-            <a:off x="271463" y="214313"/>
-            <a:ext cx="8601075" cy="557213"/>
+            <a:off x="200025" y="128588"/>
+            <a:ext cx="8743950" cy="457200"/>
           </a:xfrm>
           <a:prstGeom prst="rect">
             <a:avLst/>
@@ -5901,8 +5911,8 @@
         </p:nvSpPr>
         <p:spPr>
           <a:xfrm>
-            <a:off x="271463" y="742950"/>
-            <a:ext cx="8601075" cy="28575"/>
+            <a:off x="200025" y="557213"/>
+            <a:ext cx="8743950" cy="28575"/>
           </a:xfrm>
           <a:prstGeom prst="rect">
             <a:avLst/>
@@ -5921,8 +5931,8 @@
         </p:nvSpPr>
         <p:spPr>
           <a:xfrm>
-            <a:off x="271463" y="214313"/>
-            <a:ext cx="8601075" cy="352499"/>
+            <a:off x="200025" y="207169"/>
+            <a:ext cx="3957638" cy="300038"/>
           </a:xfrm>
           <a:prstGeom prst="rect">
             <a:avLst/>
@@ -5943,7 +5953,7 @@
               <a:buNone/>
             </a:pPr>
             <a:r>
-              <a:rPr lang="en-US" sz="2400" b="1" dirty="0">
+              <a:rPr lang="en-US" sz="2000" b="1" dirty="0">
                 <a:solidFill>
                   <a:srgbClr val="111111"/>
                 </a:solidFill>
@@ -5953,7 +5963,7 @@
               </a:rPr>
               <a:t>ACT 1: THE FIRST HUMAN DECISION</a:t>
             </a:r>
-            <a:endParaRPr lang="en-US" sz="2400" dirty="0"/>
+            <a:endParaRPr lang="en-US" sz="2000" dirty="0"/>
           </a:p>
         </p:txBody>
       </p:sp>
@@ -5965,8 +5975,8 @@
         </p:nvSpPr>
         <p:spPr>
           <a:xfrm>
-            <a:off x="271463" y="942975"/>
-            <a:ext cx="3429000" cy="275034"/>
+            <a:off x="200025" y="671513"/>
+            <a:ext cx="3143250" cy="232172"/>
           </a:xfrm>
           <a:prstGeom prst="rect">
             <a:avLst/>
@@ -5984,7 +5994,7 @@
               <a:buNone/>
             </a:pPr>
             <a:r>
-              <a:rPr lang="en-US" sz="1400" dirty="0">
+              <a:rPr lang="en-US" sz="1150" dirty="0">
                 <a:solidFill>
                   <a:srgbClr val="0055FF"/>
                 </a:solidFill>
@@ -5994,7 +6004,7 @@
               </a:rPr>
               <a:t>WHAT THE REPO DOES</a:t>
             </a:r>
-            <a:endParaRPr lang="en-US" sz="1400" dirty="0"/>
+            <a:endParaRPr lang="en-US" sz="1150" dirty="0"/>
           </a:p>
         </p:txBody>
       </p:sp>
@@ -6006,8 +6016,8 @@
         </p:nvSpPr>
         <p:spPr>
           <a:xfrm>
-            <a:off x="271463" y="1375172"/>
-            <a:ext cx="3429000" cy="428625"/>
+            <a:off x="200025" y="1017984"/>
+            <a:ext cx="3143250" cy="371475"/>
           </a:xfrm>
           <a:prstGeom prst="rect">
             <a:avLst/>
@@ -6031,8 +6041,8 @@
         </p:nvSpPr>
         <p:spPr>
           <a:xfrm>
-            <a:off x="385763" y="1460897"/>
-            <a:ext cx="214313" cy="214313"/>
+            <a:off x="285750" y="1089422"/>
+            <a:ext cx="185738" cy="185738"/>
           </a:xfrm>
           <a:prstGeom prst="rect">
             <a:avLst/>
@@ -6051,8 +6061,8 @@
         </p:nvSpPr>
         <p:spPr>
           <a:xfrm>
-            <a:off x="385763" y="1460897"/>
-            <a:ext cx="214313" cy="214313"/>
+            <a:off x="285750" y="1089422"/>
+            <a:ext cx="185738" cy="185738"/>
           </a:xfrm>
           <a:prstGeom prst="rect">
             <a:avLst/>
@@ -6070,7 +6080,7 @@
               <a:buNone/>
             </a:pPr>
             <a:r>
-              <a:rPr lang="en-US" sz="950" dirty="0">
+              <a:rPr lang="en-US" sz="850" dirty="0">
                 <a:solidFill>
                   <a:srgbClr val="FFFFFF"/>
                 </a:solidFill>
@@ -6080,7 +6090,7 @@
               </a:rPr>
               <a:t>1</a:t>
             </a:r>
-            <a:endParaRPr lang="en-US" sz="950" dirty="0"/>
+            <a:endParaRPr lang="en-US" sz="850" dirty="0"/>
           </a:p>
         </p:txBody>
       </p:sp>
@@ -6092,8 +6102,8 @@
         </p:nvSpPr>
         <p:spPr>
           <a:xfrm>
-            <a:off x="685800" y="1483221"/>
-            <a:ext cx="2900363" cy="169664"/>
+            <a:off x="542925" y="1109402"/>
+            <a:ext cx="2714625" cy="145721"/>
           </a:xfrm>
           <a:prstGeom prst="rect">
             <a:avLst/>
@@ -6109,12 +6119,12 @@
           <a:p>
             <a:pPr algn="l" indent="0" marL="0">
               <a:lnSpc>
-                <a:spcPct val="100000"/>
+                <a:spcPct val="96000"/>
               </a:lnSpc>
               <a:buNone/>
             </a:pPr>
             <a:r>
-              <a:rPr lang="en-US" sz="950" b="1" dirty="0">
+              <a:rPr lang="en-US" sz="850" b="1" dirty="0">
                 <a:solidFill>
                   <a:srgbClr val="30343B"/>
                 </a:solidFill>
@@ -6124,7 +6134,7 @@
               </a:rPr>
               <a:t>Present proof options</a:t>
             </a:r>
-            <a:endParaRPr lang="en-US" sz="950" dirty="0"/>
+            <a:endParaRPr lang="en-US" sz="850" dirty="0"/>
           </a:p>
         </p:txBody>
       </p:sp>
@@ -6136,8 +6146,8 @@
         </p:nvSpPr>
         <p:spPr>
           <a:xfrm>
-            <a:off x="271463" y="1860947"/>
-            <a:ext cx="3429000" cy="428625"/>
+            <a:off x="200025" y="1418034"/>
+            <a:ext cx="3143250" cy="371475"/>
           </a:xfrm>
           <a:prstGeom prst="rect">
             <a:avLst/>
@@ -6161,8 +6171,8 @@
         </p:nvSpPr>
         <p:spPr>
           <a:xfrm>
-            <a:off x="385763" y="1946672"/>
-            <a:ext cx="214313" cy="214313"/>
+            <a:off x="285750" y="1489472"/>
+            <a:ext cx="185738" cy="185738"/>
           </a:xfrm>
           <a:prstGeom prst="rect">
             <a:avLst/>
@@ -6181,8 +6191,8 @@
         </p:nvSpPr>
         <p:spPr>
           <a:xfrm>
-            <a:off x="385763" y="1946672"/>
-            <a:ext cx="214313" cy="214313"/>
+            <a:off x="285750" y="1489472"/>
+            <a:ext cx="185738" cy="185738"/>
           </a:xfrm>
           <a:prstGeom prst="rect">
             <a:avLst/>
@@ -6200,7 +6210,7 @@
               <a:buNone/>
             </a:pPr>
             <a:r>
-              <a:rPr lang="en-US" sz="950" dirty="0">
+              <a:rPr lang="en-US" sz="850" dirty="0">
                 <a:solidFill>
                   <a:srgbClr val="FFFFFF"/>
                 </a:solidFill>
@@ -6210,7 +6220,7 @@
               </a:rPr>
               <a:t>2</a:t>
             </a:r>
-            <a:endParaRPr lang="en-US" sz="950" dirty="0"/>
+            <a:endParaRPr lang="en-US" sz="850" dirty="0"/>
           </a:p>
         </p:txBody>
       </p:sp>
@@ -6222,8 +6232,8 @@
         </p:nvSpPr>
         <p:spPr>
           <a:xfrm>
-            <a:off x="685800" y="1968996"/>
-            <a:ext cx="2900363" cy="169664"/>
+            <a:off x="542925" y="1509452"/>
+            <a:ext cx="2714625" cy="145721"/>
           </a:xfrm>
           <a:prstGeom prst="rect">
             <a:avLst/>
@@ -6239,12 +6249,12 @@
           <a:p>
             <a:pPr algn="l" indent="0" marL="0">
               <a:lnSpc>
-                <a:spcPct val="100000"/>
+                <a:spcPct val="96000"/>
               </a:lnSpc>
               <a:buNone/>
             </a:pPr>
             <a:r>
-              <a:rPr lang="en-US" sz="950" b="1" dirty="0">
+              <a:rPr lang="en-US" sz="850" b="1" dirty="0">
                 <a:solidFill>
                   <a:srgbClr val="30343B"/>
                 </a:solidFill>
@@ -6254,7 +6264,7 @@
               </a:rPr>
               <a:t>Explain trade-offs</a:t>
             </a:r>
-            <a:endParaRPr lang="en-US" sz="950" dirty="0"/>
+            <a:endParaRPr lang="en-US" sz="850" dirty="0"/>
           </a:p>
         </p:txBody>
       </p:sp>
@@ -6266,8 +6276,8 @@
         </p:nvSpPr>
         <p:spPr>
           <a:xfrm>
-            <a:off x="271463" y="2346722"/>
-            <a:ext cx="3429000" cy="428625"/>
+            <a:off x="200025" y="1818084"/>
+            <a:ext cx="3143250" cy="371475"/>
           </a:xfrm>
           <a:prstGeom prst="rect">
             <a:avLst/>
@@ -6291,8 +6301,8 @@
         </p:nvSpPr>
         <p:spPr>
           <a:xfrm>
-            <a:off x="385763" y="2432447"/>
-            <a:ext cx="214313" cy="214313"/>
+            <a:off x="285750" y="1889522"/>
+            <a:ext cx="185738" cy="185738"/>
           </a:xfrm>
           <a:prstGeom prst="rect">
             <a:avLst/>
@@ -6311,8 +6321,8 @@
         </p:nvSpPr>
         <p:spPr>
           <a:xfrm>
-            <a:off x="385763" y="2432447"/>
-            <a:ext cx="214313" cy="214313"/>
+            <a:off x="285750" y="1889522"/>
+            <a:ext cx="185738" cy="185738"/>
           </a:xfrm>
           <a:prstGeom prst="rect">
             <a:avLst/>
@@ -6330,7 +6340,7 @@
               <a:buNone/>
             </a:pPr>
             <a:r>
-              <a:rPr lang="en-US" sz="950" dirty="0">
+              <a:rPr lang="en-US" sz="850" dirty="0">
                 <a:solidFill>
                   <a:srgbClr val="FFFFFF"/>
                 </a:solidFill>
@@ -6340,7 +6350,7 @@
               </a:rPr>
               <a:t>3</a:t>
             </a:r>
-            <a:endParaRPr lang="en-US" sz="950" dirty="0"/>
+            <a:endParaRPr lang="en-US" sz="850" dirty="0"/>
           </a:p>
         </p:txBody>
       </p:sp>
@@ -6352,8 +6362,8 @@
         </p:nvSpPr>
         <p:spPr>
           <a:xfrm>
-            <a:off x="685800" y="2454771"/>
-            <a:ext cx="2900363" cy="169664"/>
+            <a:off x="542925" y="1909502"/>
+            <a:ext cx="2714625" cy="145721"/>
           </a:xfrm>
           <a:prstGeom prst="rect">
             <a:avLst/>
@@ -6369,12 +6379,12 @@
           <a:p>
             <a:pPr algn="l" indent="0" marL="0">
               <a:lnSpc>
-                <a:spcPct val="100000"/>
+                <a:spcPct val="96000"/>
               </a:lnSpc>
               <a:buNone/>
             </a:pPr>
             <a:r>
-              <a:rPr lang="en-US" sz="950" b="1" dirty="0">
+              <a:rPr lang="en-US" sz="850" b="1" dirty="0">
                 <a:solidFill>
                   <a:srgbClr val="30343B"/>
                 </a:solidFill>
@@ -6384,7 +6394,7 @@
               </a:rPr>
               <a:t>Human selects boundary</a:t>
             </a:r>
-            <a:endParaRPr lang="en-US" sz="950" dirty="0"/>
+            <a:endParaRPr lang="en-US" sz="850" dirty="0"/>
           </a:p>
         </p:txBody>
       </p:sp>
@@ -6396,8 +6406,8 @@
         </p:nvSpPr>
         <p:spPr>
           <a:xfrm>
-            <a:off x="271463" y="2832497"/>
-            <a:ext cx="3429000" cy="428625"/>
+            <a:off x="200025" y="2218134"/>
+            <a:ext cx="3143250" cy="371475"/>
           </a:xfrm>
           <a:prstGeom prst="rect">
             <a:avLst/>
@@ -6421,8 +6431,8 @@
         </p:nvSpPr>
         <p:spPr>
           <a:xfrm>
-            <a:off x="385763" y="2918222"/>
-            <a:ext cx="214313" cy="214313"/>
+            <a:off x="285750" y="2289572"/>
+            <a:ext cx="185738" cy="185738"/>
           </a:xfrm>
           <a:prstGeom prst="rect">
             <a:avLst/>
@@ -6441,8 +6451,8 @@
         </p:nvSpPr>
         <p:spPr>
           <a:xfrm>
-            <a:off x="385763" y="2918222"/>
-            <a:ext cx="214313" cy="214313"/>
+            <a:off x="285750" y="2289572"/>
+            <a:ext cx="185738" cy="185738"/>
           </a:xfrm>
           <a:prstGeom prst="rect">
             <a:avLst/>
@@ -6460,7 +6470,7 @@
               <a:buNone/>
             </a:pPr>
             <a:r>
-              <a:rPr lang="en-US" sz="950" dirty="0">
+              <a:rPr lang="en-US" sz="850" dirty="0">
                 <a:solidFill>
                   <a:srgbClr val="FFFFFF"/>
                 </a:solidFill>
@@ -6470,7 +6480,7 @@
               </a:rPr>
               <a:t>4</a:t>
             </a:r>
-            <a:endParaRPr lang="en-US" sz="950" dirty="0"/>
+            <a:endParaRPr lang="en-US" sz="850" dirty="0"/>
           </a:p>
         </p:txBody>
       </p:sp>
@@ -6482,8 +6492,8 @@
         </p:nvSpPr>
         <p:spPr>
           <a:xfrm>
-            <a:off x="685800" y="2940546"/>
-            <a:ext cx="2900363" cy="169664"/>
+            <a:off x="542925" y="2309552"/>
+            <a:ext cx="2714625" cy="145721"/>
           </a:xfrm>
           <a:prstGeom prst="rect">
             <a:avLst/>
@@ -6499,12 +6509,12 @@
           <a:p>
             <a:pPr algn="l" indent="0" marL="0">
               <a:lnSpc>
-                <a:spcPct val="100000"/>
+                <a:spcPct val="96000"/>
               </a:lnSpc>
               <a:buNone/>
             </a:pPr>
             <a:r>
-              <a:rPr lang="en-US" sz="950" b="1" dirty="0">
+              <a:rPr lang="en-US" sz="850" b="1" dirty="0">
                 <a:solidFill>
                   <a:srgbClr val="30343B"/>
                 </a:solidFill>
@@ -6514,7 +6524,7 @@
               </a:rPr>
               <a:t>Record decision</a:t>
             </a:r>
-            <a:endParaRPr lang="en-US" sz="950" dirty="0"/>
+            <a:endParaRPr lang="en-US" sz="850" dirty="0"/>
           </a:p>
         </p:txBody>
       </p:sp>
@@ -6526,8 +6536,8 @@
         </p:nvSpPr>
         <p:spPr>
           <a:xfrm>
-            <a:off x="271463" y="3318272"/>
-            <a:ext cx="3429000" cy="428625"/>
+            <a:off x="200025" y="2618184"/>
+            <a:ext cx="3143250" cy="371475"/>
           </a:xfrm>
           <a:prstGeom prst="rect">
             <a:avLst/>
@@ -6551,8 +6561,8 @@
         </p:nvSpPr>
         <p:spPr>
           <a:xfrm>
-            <a:off x="385763" y="3403997"/>
-            <a:ext cx="214313" cy="214313"/>
+            <a:off x="285750" y="2689622"/>
+            <a:ext cx="185738" cy="185738"/>
           </a:xfrm>
           <a:prstGeom prst="rect">
             <a:avLst/>
@@ -6571,8 +6581,8 @@
         </p:nvSpPr>
         <p:spPr>
           <a:xfrm>
-            <a:off x="385763" y="3403997"/>
-            <a:ext cx="214313" cy="214313"/>
+            <a:off x="285750" y="2689622"/>
+            <a:ext cx="185738" cy="185738"/>
           </a:xfrm>
           <a:prstGeom prst="rect">
             <a:avLst/>
@@ -6590,7 +6600,7 @@
               <a:buNone/>
             </a:pPr>
             <a:r>
-              <a:rPr lang="en-US" sz="950" dirty="0">
+              <a:rPr lang="en-US" sz="850" dirty="0">
                 <a:solidFill>
                   <a:srgbClr val="FFFFFF"/>
                 </a:solidFill>
@@ -6600,7 +6610,7 @@
               </a:rPr>
               <a:t>5</a:t>
             </a:r>
-            <a:endParaRPr lang="en-US" sz="950" dirty="0"/>
+            <a:endParaRPr lang="en-US" sz="850" dirty="0"/>
           </a:p>
         </p:txBody>
       </p:sp>
@@ -6612,8 +6622,8 @@
         </p:nvSpPr>
         <p:spPr>
           <a:xfrm>
-            <a:off x="685800" y="3426321"/>
-            <a:ext cx="2900363" cy="169664"/>
+            <a:off x="542925" y="2709602"/>
+            <a:ext cx="2714625" cy="145721"/>
           </a:xfrm>
           <a:prstGeom prst="rect">
             <a:avLst/>
@@ -6629,12 +6639,12 @@
           <a:p>
             <a:pPr algn="l" indent="0" marL="0">
               <a:lnSpc>
-                <a:spcPct val="100000"/>
+                <a:spcPct val="96000"/>
               </a:lnSpc>
               <a:buNone/>
             </a:pPr>
             <a:r>
-              <a:rPr lang="en-US" sz="950" b="1" dirty="0">
+              <a:rPr lang="en-US" sz="850" b="1" dirty="0">
                 <a:solidFill>
                   <a:srgbClr val="30343B"/>
                 </a:solidFill>
@@ -6644,7 +6654,7 @@
               </a:rPr>
               <a:t>Stop at next gate</a:t>
             </a:r>
-            <a:endParaRPr lang="en-US" sz="950" dirty="0"/>
+            <a:endParaRPr lang="en-US" sz="850" dirty="0"/>
           </a:p>
         </p:txBody>
       </p:sp>
@@ -6656,8 +6666,8 @@
         </p:nvSpPr>
         <p:spPr>
           <a:xfrm>
-            <a:off x="3929063" y="942975"/>
-            <a:ext cx="4943475" cy="275034"/>
+            <a:off x="3514725" y="671513"/>
+            <a:ext cx="5429250" cy="232172"/>
           </a:xfrm>
           <a:prstGeom prst="rect">
             <a:avLst/>
@@ -6675,7 +6685,7 @@
               <a:buNone/>
             </a:pPr>
             <a:r>
-              <a:rPr lang="en-US" sz="1400" dirty="0">
+              <a:rPr lang="en-US" sz="1150" dirty="0">
                 <a:solidFill>
                   <a:srgbClr val="111111"/>
                 </a:solidFill>
@@ -6683,9 +6693,9 @@
                 <a:ea typeface="Oswald SemiBold" pitchFamily="34" charset="-122"/>
                 <a:cs typeface="Oswald SemiBold" pitchFamily="34" charset="-120"/>
               </a:rPr>
-              <a:t>WHAT I ASKED COPILOT</a:t>
-            </a:r>
-            <a:endParaRPr lang="en-US" sz="1400" dirty="0"/>
+              <a:t>COPILOT ASKS; HUMAN DECIDES</a:t>
+            </a:r>
+            <a:endParaRPr lang="en-US" sz="1150" dirty="0"/>
           </a:p>
         </p:txBody>
       </p:sp>
@@ -6697,8 +6707,8 @@
         </p:nvSpPr>
         <p:spPr>
           <a:xfrm>
-            <a:off x="3929063" y="1332309"/>
-            <a:ext cx="4943475" cy="3282553"/>
+            <a:off x="3514725" y="989409"/>
+            <a:ext cx="5429250" cy="3625453"/>
           </a:xfrm>
           <a:prstGeom prst="rect">
             <a:avLst/>
@@ -6722,8 +6732,8 @@
         </p:nvSpPr>
         <p:spPr>
           <a:xfrm>
-            <a:off x="3929063" y="1332309"/>
-            <a:ext cx="4943475" cy="300038"/>
+            <a:off x="3514725" y="989409"/>
+            <a:ext cx="5429250" cy="271463"/>
           </a:xfrm>
           <a:prstGeom prst="rect">
             <a:avLst/>
@@ -6742,8 +6752,8 @@
         </p:nvSpPr>
         <p:spPr>
           <a:xfrm>
-            <a:off x="3929063" y="1618059"/>
-            <a:ext cx="4943475" cy="14288"/>
+            <a:off x="3514725" y="1246584"/>
+            <a:ext cx="5429250" cy="14288"/>
           </a:xfrm>
           <a:prstGeom prst="rect">
             <a:avLst/>
@@ -6762,8 +6772,8 @@
         </p:nvSpPr>
         <p:spPr>
           <a:xfrm>
-            <a:off x="7943850" y="1426964"/>
-            <a:ext cx="828675" cy="110728"/>
+            <a:off x="8083153" y="1073348"/>
+            <a:ext cx="775097" cy="103584"/>
           </a:xfrm>
           <a:prstGeom prst="rect">
             <a:avLst/>
@@ -6781,7 +6791,7 @@
               <a:buNone/>
             </a:pPr>
             <a:r>
-              <a:rPr lang="en-US" sz="650" b="1" dirty="0">
+              <a:rPr lang="en-US" sz="600" b="1" dirty="0">
                 <a:solidFill>
                   <a:srgbClr val="9CDCFE"/>
                 </a:solidFill>
@@ -6791,7 +6801,7 @@
               </a:rPr>
               <a:t>GITHUB COPILOT</a:t>
             </a:r>
-            <a:endParaRPr lang="en-US" sz="650" dirty="0"/>
+            <a:endParaRPr lang="en-US" sz="600" dirty="0"/>
           </a:p>
         </p:txBody>
       </p:sp>
@@ -6803,8 +6813,8 @@
         </p:nvSpPr>
         <p:spPr>
           <a:xfrm>
-            <a:off x="4129088" y="1803797"/>
-            <a:ext cx="4543425" cy="139303"/>
+            <a:off x="3657600" y="1389459"/>
+            <a:ext cx="5143500" cy="124290"/>
           </a:xfrm>
           <a:prstGeom prst="rect">
             <a:avLst/>
@@ -6820,12 +6830,12 @@
           <a:p>
             <a:pPr algn="l" indent="0" marL="0">
               <a:lnSpc>
-                <a:spcPct val="120000"/>
+                <a:spcPct val="116000"/>
               </a:lnSpc>
               <a:buNone/>
             </a:pPr>
             <a:r>
-              <a:rPr lang="en-US" sz="650" b="1" spc="1" kern="0" dirty="0">
+              <a:rPr lang="en-US" sz="600" b="1" spc="1" kern="0" dirty="0">
                 <a:solidFill>
                   <a:srgbClr val="C586C0"/>
                 </a:solidFill>
@@ -6835,7 +6845,7 @@
               </a:rPr>
               <a:t>COPILOT</a:t>
             </a:r>
-            <a:endParaRPr lang="en-US" sz="650" dirty="0"/>
+            <a:endParaRPr lang="en-US" sz="600" dirty="0"/>
           </a:p>
         </p:txBody>
       </p:sp>
@@ -6847,8 +6857,8 @@
         </p:nvSpPr>
         <p:spPr>
           <a:xfrm>
-            <a:off x="4129088" y="2000250"/>
-            <a:ext cx="4543425" cy="1193006"/>
+            <a:off x="3657600" y="1556612"/>
+            <a:ext cx="5143500" cy="1070000"/>
           </a:xfrm>
           <a:prstGeom prst="rect">
             <a:avLst/>
@@ -6872,29 +6882,29 @@
         </p:nvSpPr>
         <p:spPr>
           <a:xfrm>
-            <a:off x="4129088" y="2000250"/>
-            <a:ext cx="4543425" cy="1193006"/>
-          </a:xfrm>
-          <a:prstGeom prst="rect">
-            <a:avLst/>
-          </a:prstGeom>
-          <a:noFill/>
-          <a:ln/>
-        </p:spPr>
-        <p:txBody>
-          <a:bodyPr wrap="square" lIns="153035" tIns="119126" rIns="153035" bIns="119126" rtlCol="0" anchor="t">
+            <a:off x="3657600" y="1556612"/>
+            <a:ext cx="5143500" cy="1070000"/>
+          </a:xfrm>
+          <a:prstGeom prst="rect">
+            <a:avLst/>
+          </a:prstGeom>
+          <a:noFill/>
+          <a:ln/>
+        </p:spPr>
+        <p:txBody>
+          <a:bodyPr wrap="square" lIns="119126" tIns="102108" rIns="119126" bIns="102108" rtlCol="0" anchor="t">
             <a:spAutoFit/>
           </a:bodyPr>
           <a:lstStyle/>
           <a:p>
             <a:pPr algn="l" indent="0" marL="0">
               <a:lnSpc>
-                <a:spcPct val="120000"/>
+                <a:spcPct val="116000"/>
               </a:lnSpc>
               <a:buNone/>
             </a:pPr>
             <a:r>
-              <a:rPr lang="en-US" sz="800" dirty="0">
+              <a:rPr lang="en-US" sz="750" dirty="0">
                 <a:solidFill>
                   <a:srgbClr val="D4D4D4"/>
                 </a:solidFill>
@@ -6905,7 +6915,7 @@
               <a:t>To proceed with keyed tie-out, select your proof boundary:</a:t>
             </a:r>
             <a:r>
-              <a:rPr lang="en-US" sz="800" dirty="0">
+              <a:rPr lang="en-US" sz="750" dirty="0">
                 <a:solidFill>
                   <a:srgbClr val="D4D4D4"/>
                 </a:solidFill>
@@ -6917,7 +6927,7 @@
 </a:t>
             </a:r>
             <a:r>
-              <a:rPr lang="en-US" sz="800" dirty="0">
+              <a:rPr lang="en-US" sz="750" dirty="0">
                 <a:solidFill>
                   <a:srgbClr val="D4D4D4"/>
                 </a:solidFill>
@@ -6928,7 +6938,7 @@
               <a:t> - </a:t>
             </a:r>
             <a:r>
-              <a:rPr lang="en-US" sz="750" b="1" dirty="0">
+              <a:rPr lang="en-US" sz="700" b="1" dirty="0">
                 <a:solidFill>
                   <a:srgbClr val="CE9178"/>
                 </a:solidFill>
@@ -6939,7 +6949,7 @@
               <a:t>GOVERNED_SAMPLE_50</a:t>
             </a:r>
             <a:r>
-              <a:rPr lang="en-US" sz="800" dirty="0">
+              <a:rPr lang="en-US" sz="750" dirty="0">
                 <a:solidFill>
                   <a:srgbClr val="D4D4D4"/>
                 </a:solidFill>
@@ -6951,7 +6961,7 @@
 </a:t>
             </a:r>
             <a:r>
-              <a:rPr lang="en-US" sz="800" dirty="0">
+              <a:rPr lang="en-US" sz="750" dirty="0">
                 <a:solidFill>
                   <a:srgbClr val="D4D4D4"/>
                 </a:solidFill>
@@ -6962,7 +6972,7 @@
               <a:t>- </a:t>
             </a:r>
             <a:r>
-              <a:rPr lang="en-US" sz="750" b="1" dirty="0">
+              <a:rPr lang="en-US" sz="700" b="1" dirty="0">
                 <a:solidFill>
                   <a:srgbClr val="CE9178"/>
                 </a:solidFill>
@@ -6973,7 +6983,7 @@
               <a:t>FULL_POPULATION</a:t>
             </a:r>
             <a:r>
-              <a:rPr lang="en-US" sz="800" dirty="0">
+              <a:rPr lang="en-US" sz="750" dirty="0">
                 <a:solidFill>
                   <a:srgbClr val="D4D4D4"/>
                 </a:solidFill>
@@ -6985,7 +6995,7 @@
 </a:t>
             </a:r>
             <a:r>
-              <a:rPr lang="en-US" sz="800" dirty="0">
+              <a:rPr lang="en-US" sz="750" dirty="0">
                 <a:solidFill>
                   <a:srgbClr val="D4D4D4"/>
                 </a:solidFill>
@@ -6996,7 +7006,7 @@
               <a:t>- </a:t>
             </a:r>
             <a:r>
-              <a:rPr lang="en-US" sz="750" b="1" dirty="0">
+              <a:rPr lang="en-US" sz="700" b="1" dirty="0">
                 <a:solidFill>
                   <a:srgbClr val="CE9178"/>
                 </a:solidFill>
@@ -7007,7 +7017,7 @@
               <a:t>PHASED_50_THEN_FULL</a:t>
             </a:r>
             <a:r>
-              <a:rPr lang="en-US" sz="800" dirty="0">
+              <a:rPr lang="en-US" sz="750" dirty="0">
                 <a:solidFill>
                   <a:srgbClr val="D4D4D4"/>
                 </a:solidFill>
@@ -7019,7 +7029,7 @@
 </a:t>
             </a:r>
             <a:r>
-              <a:rPr lang="en-US" sz="800" dirty="0">
+              <a:rPr lang="en-US" sz="750" dirty="0">
                 <a:solidFill>
                   <a:srgbClr val="D4D4D4"/>
                 </a:solidFill>
@@ -7030,7 +7040,7 @@
               <a:t>- </a:t>
             </a:r>
             <a:r>
-              <a:rPr lang="en-US" sz="750" b="1" dirty="0">
+              <a:rPr lang="en-US" sz="700" b="1" dirty="0">
                 <a:solidFill>
                   <a:srgbClr val="CE9178"/>
                 </a:solidFill>
@@ -7041,7 +7051,7 @@
               <a:t>CUSTOM_GOVERNED_SAMPLE</a:t>
             </a:r>
             <a:r>
-              <a:rPr lang="en-US" sz="800" dirty="0">
+              <a:rPr lang="en-US" sz="750" dirty="0">
                 <a:solidFill>
                   <a:srgbClr val="D4D4D4"/>
                 </a:solidFill>
@@ -7052,7 +7062,7 @@
               <a:t>
 </a:t>
             </a:r>
-            <a:endParaRPr lang="en-US" sz="800" dirty="0"/>
+            <a:endParaRPr lang="en-US" sz="750" dirty="0"/>
           </a:p>
         </p:txBody>
       </p:sp>
@@ -7064,8 +7074,8 @@
         </p:nvSpPr>
         <p:spPr>
           <a:xfrm>
-            <a:off x="4129088" y="3264694"/>
-            <a:ext cx="4543425" cy="139303"/>
+            <a:off x="4377723" y="2669474"/>
+            <a:ext cx="4423377" cy="124290"/>
           </a:xfrm>
           <a:prstGeom prst="rect">
             <a:avLst/>
@@ -7081,12 +7091,12 @@
           <a:p>
             <a:pPr algn="r" indent="0" marL="0">
               <a:lnSpc>
-                <a:spcPct val="120000"/>
+                <a:spcPct val="116000"/>
               </a:lnSpc>
               <a:buNone/>
             </a:pPr>
             <a:r>
-              <a:rPr lang="en-US" sz="650" b="1" spc="1" kern="0" dirty="0">
+              <a:rPr lang="en-US" sz="600" b="1" spc="1" kern="0" dirty="0">
                 <a:solidFill>
                   <a:srgbClr val="569CD6"/>
                 </a:solidFill>
@@ -7096,7 +7106,7 @@
               </a:rPr>
               <a:t>USER</a:t>
             </a:r>
-            <a:endParaRPr lang="en-US" sz="650" dirty="0"/>
+            <a:endParaRPr lang="en-US" sz="600" dirty="0"/>
           </a:p>
         </p:txBody>
       </p:sp>
@@ -7108,8 +7118,8 @@
         </p:nvSpPr>
         <p:spPr>
           <a:xfrm>
-            <a:off x="4129088" y="3461147"/>
-            <a:ext cx="4543425" cy="550069"/>
+            <a:off x="4377723" y="2836627"/>
+            <a:ext cx="4423377" cy="635012"/>
           </a:xfrm>
           <a:prstGeom prst="rect">
             <a:avLst/>
@@ -7133,29 +7143,29 @@
         </p:nvSpPr>
         <p:spPr>
           <a:xfrm>
-            <a:off x="4129088" y="3461147"/>
-            <a:ext cx="4543425" cy="550069"/>
-          </a:xfrm>
-          <a:prstGeom prst="rect">
-            <a:avLst/>
-          </a:prstGeom>
-          <a:noFill/>
-          <a:ln/>
-        </p:spPr>
-        <p:txBody>
-          <a:bodyPr wrap="square" lIns="153035" tIns="119126" rIns="153035" bIns="119126" rtlCol="0" anchor="t">
+            <a:off x="4377723" y="2836627"/>
+            <a:ext cx="4423377" cy="635012"/>
+          </a:xfrm>
+          <a:prstGeom prst="rect">
+            <a:avLst/>
+          </a:prstGeom>
+          <a:noFill/>
+          <a:ln/>
+        </p:spPr>
+        <p:txBody>
+          <a:bodyPr wrap="square" lIns="119126" tIns="102108" rIns="119126" bIns="102108" rtlCol="0" anchor="t">
             <a:spAutoFit/>
           </a:bodyPr>
           <a:lstStyle/>
           <a:p>
             <a:pPr algn="l" indent="0" marL="0">
               <a:lnSpc>
-                <a:spcPct val="120000"/>
+                <a:spcPct val="116000"/>
               </a:lnSpc>
               <a:buNone/>
             </a:pPr>
             <a:r>
-              <a:rPr lang="en-US" sz="800" dirty="0">
+              <a:rPr lang="en-US" sz="750" dirty="0">
                 <a:solidFill>
                   <a:srgbClr val="D4D4D4"/>
                 </a:solidFill>
@@ -7163,10 +7173,21 @@
                 <a:ea typeface="JetBrains Mono" pitchFamily="34" charset="-122"/>
                 <a:cs typeface="JetBrains Mono" pitchFamily="34" charset="-120"/>
               </a:rPr>
-              <a:t>Tie-out population choice:</a:t>
-            </a:r>
-            <a:r>
-              <a:rPr lang="en-US" sz="800" dirty="0">
+              <a:t>I select </a:t>
+            </a:r>
+            <a:r>
+              <a:rPr lang="en-US" sz="700" b="1" dirty="0">
+                <a:solidFill>
+                  <a:srgbClr val="FFFFFF"/>
+                </a:solidFill>
+                <a:latin typeface="JetBrains Mono Bold" pitchFamily="34" charset="0"/>
+                <a:ea typeface="JetBrains Mono Bold" pitchFamily="34" charset="-122"/>
+                <a:cs typeface="JetBrains Mono Bold" pitchFamily="34" charset="-120"/>
+              </a:rPr>
+              <a:t>GOVERNED_SAMPLE_50</a:t>
+            </a:r>
+            <a:r>
+              <a:rPr lang="en-US" sz="750" dirty="0">
                 <a:solidFill>
                   <a:srgbClr val="D4D4D4"/>
                 </a:solidFill>
@@ -7174,21 +7195,77 @@
                 <a:ea typeface="JetBrains Mono" pitchFamily="34" charset="-122"/>
                 <a:cs typeface="JetBrains Mono" pitchFamily="34" charset="-120"/>
               </a:rPr>
+              <a:t>.</a:t>
+            </a:r>
+            <a:r>
+              <a:rPr lang="en-US" sz="750" dirty="0">
+                <a:solidFill>
+                  <a:srgbClr val="D4D4D4"/>
+                </a:solidFill>
+                <a:latin typeface="JetBrains Mono" pitchFamily="34" charset="0"/>
+                <a:ea typeface="JetBrains Mono" pitchFamily="34" charset="-122"/>
+                <a:cs typeface="JetBrains Mono" pitchFamily="34" charset="-120"/>
+              </a:rPr>
               <a:t>
 </a:t>
             </a:r>
             <a:r>
-              <a:rPr lang="en-US" sz="750" b="1" dirty="0">
-                <a:solidFill>
-                  <a:srgbClr val="FFFFFF"/>
+              <a:rPr lang="en-US" sz="750" dirty="0">
+                <a:solidFill>
+                  <a:srgbClr val="D4D4D4"/>
+                </a:solidFill>
+                <a:latin typeface="JetBrains Mono" pitchFamily="34" charset="0"/>
+                <a:ea typeface="JetBrains Mono" pitchFamily="34" charset="-122"/>
+                <a:cs typeface="JetBrains Mono" pitchFamily="34" charset="-120"/>
+              </a:rPr>
+              <a:t>Record it as the local semantic-core demonstration boundary.</a:t>
+            </a:r>
+            <a:r>
+              <a:rPr lang="en-US" sz="750" dirty="0">
+                <a:solidFill>
+                  <a:srgbClr val="D4D4D4"/>
+                </a:solidFill>
+                <a:latin typeface="JetBrains Mono" pitchFamily="34" charset="0"/>
+                <a:ea typeface="JetBrains Mono" pitchFamily="34" charset="-122"/>
+                <a:cs typeface="JetBrains Mono" pitchFamily="34" charset="-120"/>
+              </a:rPr>
+              <a:t>
+</a:t>
+            </a:r>
+            <a:r>
+              <a:rPr lang="en-US" sz="750" dirty="0">
+                <a:solidFill>
+                  <a:srgbClr val="D4D4D4"/>
+                </a:solidFill>
+                <a:latin typeface="JetBrains Mono" pitchFamily="34" charset="0"/>
+                <a:ea typeface="JetBrains Mono" pitchFamily="34" charset="-122"/>
+                <a:cs typeface="JetBrains Mono" pitchFamily="34" charset="-120"/>
+              </a:rPr>
+              <a:t>Invoke exactly </a:t>
+            </a:r>
+            <a:r>
+              <a:rPr lang="en-US" sz="700" b="1" dirty="0">
+                <a:solidFill>
+                  <a:srgbClr val="CE9178"/>
                 </a:solidFill>
                 <a:latin typeface="JetBrains Mono Bold" pitchFamily="34" charset="0"/>
                 <a:ea typeface="JetBrains Mono Bold" pitchFamily="34" charset="-122"/>
                 <a:cs typeface="JetBrains Mono Bold" pitchFamily="34" charset="-120"/>
               </a:rPr>
-              <a:t>GOVERNED_SAMPLE_50</a:t>
-            </a:r>
-            <a:endParaRPr lang="en-US" sz="800" dirty="0"/>
+              <a:t>specify</a:t>
+            </a:r>
+            <a:r>
+              <a:rPr lang="en-US" sz="750" dirty="0">
+                <a:solidFill>
+                  <a:srgbClr val="D4D4D4"/>
+                </a:solidFill>
+                <a:latin typeface="JetBrains Mono" pitchFamily="34" charset="0"/>
+                <a:ea typeface="JetBrains Mono" pitchFamily="34" charset="-122"/>
+                <a:cs typeface="JetBrains Mono" pitchFamily="34" charset="-120"/>
+              </a:rPr>
+              <a:t> and stop at the PRD / SPEC approval gate.</a:t>
+            </a:r>
+            <a:endParaRPr lang="en-US" sz="750" dirty="0"/>
           </a:p>
         </p:txBody>
       </p:sp>
@@ -7200,8 +7277,8 @@
         </p:nvSpPr>
         <p:spPr>
           <a:xfrm rot="-60000">
-            <a:off x="542925" y="4632052"/>
-            <a:ext cx="8601075" cy="454298"/>
+            <a:off x="400050" y="4586288"/>
+            <a:ext cx="8343900" cy="357188"/>
           </a:xfrm>
           <a:prstGeom prst="rect">
             <a:avLst/>
@@ -7225,29 +7302,29 @@
         </p:nvSpPr>
         <p:spPr>
           <a:xfrm rot="-60000">
-            <a:off x="543762" y="4669543"/>
-            <a:ext cx="8599401" cy="379315"/>
-          </a:xfrm>
-          <a:prstGeom prst="rect">
-            <a:avLst/>
-          </a:prstGeom>
-          <a:noFill/>
-          <a:ln/>
-        </p:spPr>
-        <p:txBody>
-          <a:bodyPr wrap="square" lIns="204089" tIns="119126" rIns="204089" bIns="119126" rtlCol="0" anchor="t">
+            <a:off x="400497" y="4622669"/>
+            <a:ext cx="8343006" cy="284425"/>
+          </a:xfrm>
+          <a:prstGeom prst="rect">
+            <a:avLst/>
+          </a:prstGeom>
+          <a:noFill/>
+          <a:ln/>
+        </p:spPr>
+        <p:txBody>
+          <a:bodyPr wrap="square" lIns="153035" tIns="85090" rIns="153035" bIns="85090" rtlCol="0" anchor="t">
             <a:spAutoFit/>
           </a:bodyPr>
           <a:lstStyle/>
           <a:p>
             <a:pPr algn="ctr" indent="0" marL="0">
               <a:lnSpc>
-                <a:spcPct val="92000"/>
+                <a:spcPct val="88000"/>
               </a:lnSpc>
               <a:buNone/>
             </a:pPr>
             <a:r>
-              <a:rPr lang="en-US" sz="1200" b="1" dirty="0">
+              <a:rPr lang="en-US" sz="1000" b="1" dirty="0">
                 <a:solidFill>
                   <a:srgbClr val="111111"/>
                 </a:solidFill>
@@ -7258,7 +7335,7 @@
               <a:t>Business meaning:</a:t>
             </a:r>
             <a:r>
-              <a:rPr lang="en-US" sz="1250" dirty="0">
+              <a:rPr lang="en-US" sz="1050" dirty="0">
                 <a:solidFill>
                   <a:srgbClr val="111111"/>
                 </a:solidFill>
@@ -7266,10 +7343,10 @@
                 <a:ea typeface="Kalam Bold" pitchFamily="34" charset="-122"/>
                 <a:cs typeface="Kalam Bold" pitchFamily="34" charset="-120"/>
               </a:rPr>
-              <a:t> Th</a:t>
-            </a:r>
-            <a:r>
-              <a:rPr lang="en-US" sz="1250" dirty="0">
+              <a:t> </a:t>
+            </a:r>
+            <a:r>
+              <a:rPr lang="en-US" sz="1050" dirty="0">
                 <a:solidFill>
                   <a:srgbClr val="111111"/>
                 </a:solidFill>
@@ -7277,10 +7354,10 @@
                 <a:ea typeface="Kalam Bold" pitchFamily="34" charset="-122"/>
                 <a:cs typeface="Kalam Bold" pitchFamily="34" charset="-120"/>
               </a:rPr>
-              <a:t>e human c</a:t>
-            </a:r>
-            <a:r>
-              <a:rPr lang="en-US" sz="1250" dirty="0">
+              <a:t>The human c</a:t>
+            </a:r>
+            <a:r>
+              <a:rPr lang="en-US" sz="1050" dirty="0">
                 <a:solidFill>
                   <a:srgbClr val="111111"/>
                 </a:solidFill>
@@ -7288,10 +7365,10 @@
                 <a:ea typeface="Kalam Bold" pitchFamily="34" charset="-122"/>
                 <a:cs typeface="Kalam Bold" pitchFamily="34" charset="-120"/>
               </a:rPr>
-              <a:t>hooses wh</a:t>
-            </a:r>
-            <a:r>
-              <a:rPr lang="en-US" sz="1250" dirty="0">
+              <a:t>hooses what </a:t>
+            </a:r>
+            <a:r>
+              <a:rPr lang="en-US" sz="1050" dirty="0">
                 <a:solidFill>
                   <a:srgbClr val="111111"/>
                 </a:solidFill>
@@ -7299,10 +7376,10 @@
                 <a:ea typeface="Kalam Bold" pitchFamily="34" charset="-122"/>
                 <a:cs typeface="Kalam Bold" pitchFamily="34" charset="-120"/>
               </a:rPr>
-              <a:t>at the evid</a:t>
-            </a:r>
-            <a:r>
-              <a:rPr lang="en-US" sz="1250" dirty="0">
+              <a:t>the evidence</a:t>
+            </a:r>
+            <a:r>
+              <a:rPr lang="en-US" sz="1050" dirty="0">
                 <a:solidFill>
                   <a:srgbClr val="111111"/>
                 </a:solidFill>
@@ -7310,10 +7387,10 @@
                 <a:ea typeface="Kalam Bold" pitchFamily="34" charset="-122"/>
                 <a:cs typeface="Kalam Bold" pitchFamily="34" charset="-120"/>
               </a:rPr>
-              <a:t>ence is allo</a:t>
-            </a:r>
-            <a:r>
-              <a:rPr lang="en-US" sz="1250" dirty="0">
+              <a:t> is allowed t</a:t>
+            </a:r>
+            <a:r>
+              <a:rPr lang="en-US" sz="1050" dirty="0">
                 <a:solidFill>
                   <a:srgbClr val="111111"/>
                 </a:solidFill>
@@ -7321,20 +7398,9 @@
                 <a:ea typeface="Kalam Bold" pitchFamily="34" charset="-122"/>
                 <a:cs typeface="Kalam Bold" pitchFamily="34" charset="-120"/>
               </a:rPr>
-              <a:t>wed to pro</a:t>
-            </a:r>
-            <a:r>
-              <a:rPr lang="en-US" sz="1250" dirty="0">
-                <a:solidFill>
-                  <a:srgbClr val="111111"/>
-                </a:solidFill>
-                <a:latin typeface="Kalam Bold" pitchFamily="34" charset="0"/>
-                <a:ea typeface="Kalam Bold" pitchFamily="34" charset="-122"/>
-                <a:cs typeface="Kalam Bold" pitchFamily="34" charset="-120"/>
-              </a:rPr>
-              <a:t>ve.</a:t>
-            </a:r>
-            <a:endParaRPr lang="en-US" sz="1200" dirty="0"/>
+              <a:t>o prove.</a:t>
+            </a:r>
+            <a:endParaRPr lang="en-US" sz="1000" dirty="0"/>
           </a:p>
         </p:txBody>
       </p:sp>
@@ -8429,7 +8495,7 @@
                 <a:ea typeface="Oswald SemiBold" pitchFamily="34" charset="-122"/>
                 <a:cs typeface="Oswald SemiBold" pitchFamily="34" charset="-120"/>
               </a:rPr>
-              <a:t>WHAT I ASKED COPILOT</a:t>
+              <a:t>HUMAN APPROVALS SENT TO COPILOT</a:t>
             </a:r>
             <a:endParaRPr lang="en-US" sz="1400" dirty="0"/>
           </a:p>
@@ -8549,8 +8615,8 @@
         </p:nvSpPr>
         <p:spPr>
           <a:xfrm>
-            <a:off x="4114800" y="1789509"/>
-            <a:ext cx="4572000" cy="124290"/>
+            <a:off x="4663473" y="1789509"/>
+            <a:ext cx="4023327" cy="124290"/>
           </a:xfrm>
           <a:prstGeom prst="rect">
             <a:avLst/>
@@ -8564,7 +8630,7 @@
           </a:bodyPr>
           <a:lstStyle/>
           <a:p>
-            <a:pPr algn="l" indent="0" marL="0">
+            <a:pPr algn="r" indent="0" marL="0">
               <a:lnSpc>
                 <a:spcPct val="116000"/>
               </a:lnSpc>
@@ -8593,8 +8659,8 @@
         </p:nvSpPr>
         <p:spPr>
           <a:xfrm>
-            <a:off x="4114800" y="1956662"/>
-            <a:ext cx="4572000" cy="979531"/>
+            <a:off x="4663473" y="1956662"/>
+            <a:ext cx="4023327" cy="979531"/>
           </a:xfrm>
           <a:prstGeom prst="rect">
             <a:avLst/>
@@ -8618,8 +8684,8 @@
         </p:nvSpPr>
         <p:spPr>
           <a:xfrm>
-            <a:off x="4114800" y="1956662"/>
-            <a:ext cx="4572000" cy="979531"/>
+            <a:off x="4663473" y="1956662"/>
+            <a:ext cx="4023327" cy="979531"/>
           </a:xfrm>
           <a:prstGeom prst="rect">
             <a:avLst/>
@@ -8648,7 +8714,7 @@
                 <a:ea typeface="JetBrains Mono Bold" pitchFamily="34" charset="-122"/>
                 <a:cs typeface="JetBrains Mono Bold" pitchFamily="34" charset="-120"/>
               </a:rPr>
-              <a:t>/run-next-stage LC-LOGIT-01</a:t>
+              <a:t>I approve the LC-LOGIT-01 interview decisions.</a:t>
             </a:r>
             <a:r>
               <a:rPr lang="en-US" sz="750" dirty="0">
@@ -8671,7 +8737,18 @@
                 <a:ea typeface="JetBrains Mono" pitchFamily="34" charset="-122"/>
                 <a:cs typeface="JetBrains Mono" pitchFamily="34" charset="-120"/>
               </a:rPr>
-              <a:t> Approve interview artifacts...</a:t>
+              <a:t> Invoke exactly </a:t>
+            </a:r>
+            <a:r>
+              <a:rPr lang="en-US" sz="700" b="1" dirty="0">
+                <a:solidFill>
+                  <a:srgbClr val="D4D4D4"/>
+                </a:solidFill>
+                <a:latin typeface="JetBrains Mono Bold" pitchFamily="34" charset="0"/>
+                <a:ea typeface="JetBrains Mono Bold" pitchFamily="34" charset="-122"/>
+                <a:cs typeface="JetBrains Mono Bold" pitchFamily="34" charset="-120"/>
+              </a:rPr>
+              <a:t>specify</a:t>
             </a:r>
             <a:r>
               <a:rPr lang="en-US" sz="750" dirty="0">
@@ -8682,8 +8759,7 @@
                 <a:ea typeface="JetBrains Mono" pitchFamily="34" charset="-122"/>
                 <a:cs typeface="JetBrains Mono" pitchFamily="34" charset="-120"/>
               </a:rPr>
-              <a:t>
-</a:t>
+              <a:t>.</a:t>
             </a:r>
             <a:r>
               <a:rPr lang="en-US" sz="750" dirty="0">
@@ -8694,7 +8770,8 @@
                 <a:ea typeface="JetBrains Mono" pitchFamily="34" charset="-122"/>
                 <a:cs typeface="JetBrains Mono" pitchFamily="34" charset="-120"/>
               </a:rPr>
-              <a:t>Invoke exactly specify...</a:t>
+              <a:t>
+</a:t>
             </a:r>
             <a:r>
               <a:rPr lang="en-US" sz="750" dirty="0">
@@ -8705,8 +8782,7 @@
                 <a:ea typeface="JetBrains Mono" pitchFamily="34" charset="-122"/>
                 <a:cs typeface="JetBrains Mono" pitchFamily="34" charset="-120"/>
               </a:rPr>
-              <a:t>
-</a:t>
+              <a:t>Stop at the PRD, module SPEC, and draft tie-out contract </a:t>
             </a:r>
             <a:r>
               <a:rPr lang="en-US" sz="750" dirty="0">
@@ -8717,7 +8793,7 @@
                 <a:ea typeface="JetBrains Mono" pitchFamily="34" charset="-122"/>
                 <a:cs typeface="JetBrains Mono" pitchFamily="34" charset="-120"/>
               </a:rPr>
-              <a:t>Stop at the next human gate.</a:t>
+              <a:t>approval gate.</a:t>
             </a:r>
             <a:endParaRPr lang="en-US" sz="750" dirty="0"/>
           </a:p>
@@ -8731,8 +8807,8 @@
         </p:nvSpPr>
         <p:spPr>
           <a:xfrm>
-            <a:off x="4114800" y="3007630"/>
-            <a:ext cx="4572000" cy="124290"/>
+            <a:off x="4663473" y="3007630"/>
+            <a:ext cx="4023327" cy="124290"/>
           </a:xfrm>
           <a:prstGeom prst="rect">
             <a:avLst/>
@@ -8746,7 +8822,7 @@
           </a:bodyPr>
           <a:lstStyle/>
           <a:p>
-            <a:pPr algn="l" indent="0" marL="0">
+            <a:pPr algn="r" indent="0" marL="0">
               <a:lnSpc>
                 <a:spcPct val="116000"/>
               </a:lnSpc>
@@ -8775,8 +8851,8 @@
         </p:nvSpPr>
         <p:spPr>
           <a:xfrm>
-            <a:off x="4114800" y="3174783"/>
-            <a:ext cx="4572000" cy="979531"/>
+            <a:off x="4663473" y="3174783"/>
+            <a:ext cx="4023327" cy="829345"/>
           </a:xfrm>
           <a:prstGeom prst="rect">
             <a:avLst/>
@@ -8800,8 +8876,8 @@
         </p:nvSpPr>
         <p:spPr>
           <a:xfrm>
-            <a:off x="4114800" y="3174783"/>
-            <a:ext cx="4572000" cy="979531"/>
+            <a:off x="4663473" y="3174783"/>
+            <a:ext cx="4023327" cy="829345"/>
           </a:xfrm>
           <a:prstGeom prst="rect">
             <a:avLst/>
@@ -8830,7 +8906,7 @@
                 <a:ea typeface="JetBrains Mono Bold" pitchFamily="34" charset="-122"/>
                 <a:cs typeface="JetBrains Mono Bold" pitchFamily="34" charset="-120"/>
               </a:rPr>
-              <a:t>/run-next-stage LC-LOGIT-01</a:t>
+              <a:t>I approve the PRD, module SPEC, and draft tie-out contract.</a:t>
             </a:r>
             <a:r>
               <a:rPr lang="en-US" sz="750" dirty="0">
@@ -8853,7 +8929,18 @@
                 <a:ea typeface="JetBrains Mono" pitchFamily="34" charset="-122"/>
                 <a:cs typeface="JetBrains Mono" pitchFamily="34" charset="-120"/>
               </a:rPr>
-              <a:t> Approve specify-stage artifacts...</a:t>
+              <a:t> Invoke exactly </a:t>
+            </a:r>
+            <a:r>
+              <a:rPr lang="en-US" sz="700" b="1" dirty="0">
+                <a:solidFill>
+                  <a:srgbClr val="D4D4D4"/>
+                </a:solidFill>
+                <a:latin typeface="JetBrains Mono Bold" pitchFamily="34" charset="0"/>
+                <a:ea typeface="JetBrains Mono Bold" pitchFamily="34" charset="-122"/>
+                <a:cs typeface="JetBrains Mono Bold" pitchFamily="34" charset="-120"/>
+              </a:rPr>
+              <a:t>decide</a:t>
             </a:r>
             <a:r>
               <a:rPr lang="en-US" sz="750" dirty="0">
@@ -8864,8 +8951,7 @@
                 <a:ea typeface="JetBrains Mono" pitchFamily="34" charset="-122"/>
                 <a:cs typeface="JetBrains Mono" pitchFamily="34" charset="-120"/>
               </a:rPr>
-              <a:t>
-</a:t>
+              <a:t>.</a:t>
             </a:r>
             <a:r>
               <a:rPr lang="en-US" sz="750" dirty="0">
@@ -8876,7 +8962,8 @@
                 <a:ea typeface="JetBrains Mono" pitchFamily="34" charset="-122"/>
                 <a:cs typeface="JetBrains Mono" pitchFamily="34" charset="-120"/>
               </a:rPr>
-              <a:t>Invoke exactly decide...</a:t>
+              <a:t>
+</a:t>
             </a:r>
             <a:r>
               <a:rPr lang="en-US" sz="750" dirty="0">
@@ -8887,19 +8974,7 @@
                 <a:ea typeface="JetBrains Mono" pitchFamily="34" charset="-122"/>
                 <a:cs typeface="JetBrains Mono" pitchFamily="34" charset="-120"/>
               </a:rPr>
-              <a:t>
-</a:t>
-            </a:r>
-            <a:r>
-              <a:rPr lang="en-US" sz="750" dirty="0">
-                <a:solidFill>
-                  <a:srgbClr val="D4D4D4"/>
-                </a:solidFill>
-                <a:latin typeface="JetBrains Mono" pitchFamily="34" charset="0"/>
-                <a:ea typeface="JetBrains Mono" pitchFamily="34" charset="-122"/>
-                <a:cs typeface="JetBrains Mono" pitchFamily="34" charset="-120"/>
-              </a:rPr>
-              <a:t>Stop at the next human gate.</a:t>
+              <a:t>Stop at the ADR approval gate.</a:t>
             </a:r>
             <a:endParaRPr lang="en-US" sz="750" dirty="0"/>
           </a:p>
@@ -10041,7 +10116,7 @@
                 <a:ea typeface="Oswald SemiBold" pitchFamily="34" charset="-122"/>
                 <a:cs typeface="Oswald SemiBold" pitchFamily="34" charset="-120"/>
               </a:rPr>
-              <a:t>WHAT I ASKED COPILOT</a:t>
+              <a:t>COPY-READY COPILOT MESSAGE</a:t>
             </a:r>
             <a:endParaRPr lang="en-US" sz="1400" dirty="0"/>
           </a:p>
@@ -10260,7 +10335,7 @@
                 <a:ea typeface="JetBrains Mono Bold" pitchFamily="34" charset="-122"/>
                 <a:cs typeface="JetBrains Mono Bold" pitchFamily="34" charset="-120"/>
               </a:rPr>
-              <a:t>/run-next-stage LC-LOGIT-01</a:t>
+              <a:t>/run-stage2 LC-LOGIT-01</a:t>
             </a:r>
             <a:r>
               <a:rPr lang="en-US" sz="850" dirty="0">
@@ -10283,7 +10358,7 @@
                 <a:ea typeface="JetBrains Mono" pitchFamily="34" charset="-122"/>
                 <a:cs typeface="JetBrains Mono" pitchFamily="34" charset="-120"/>
               </a:rPr>
-              <a:t> Continue from stage map...</a:t>
+              <a:t> Use the approved canonical execution trace.</a:t>
             </a:r>
             <a:r>
               <a:rPr lang="en-US" sz="850" dirty="0">
@@ -10306,7 +10381,18 @@
                 <a:ea typeface="JetBrains Mono" pitchFamily="34" charset="-122"/>
                 <a:cs typeface="JetBrains Mono" pitchFamily="34" charset="-120"/>
               </a:rPr>
-              <a:t>Use execution_trace.json...</a:t>
+              <a:t>Invoke only </a:t>
+            </a:r>
+            <a:r>
+              <a:rPr lang="en-US" sz="800" b="1" dirty="0">
+                <a:solidFill>
+                  <a:srgbClr val="D4D4D4"/>
+                </a:solidFill>
+                <a:latin typeface="JetBrains Mono Bold" pitchFamily="34" charset="0"/>
+                <a:ea typeface="JetBrains Mono Bold" pitchFamily="34" charset="-122"/>
+                <a:cs typeface="JetBrains Mono Bold" pitchFamily="34" charset="-120"/>
+              </a:rPr>
+              <a:t>map</a:t>
             </a:r>
             <a:r>
               <a:rPr lang="en-US" sz="850" dirty="0">
@@ -10317,8 +10403,7 @@
                 <a:ea typeface="JetBrains Mono" pitchFamily="34" charset="-122"/>
                 <a:cs typeface="JetBrains Mono" pitchFamily="34" charset="-120"/>
               </a:rPr>
-              <a:t>
-</a:t>
+              <a:t>.</a:t>
             </a:r>
             <a:r>
               <a:rPr lang="en-US" sz="850" dirty="0">
@@ -10329,7 +10414,8 @@
                 <a:ea typeface="JetBrains Mono" pitchFamily="34" charset="-122"/>
                 <a:cs typeface="JetBrains Mono" pitchFamily="34" charset="-120"/>
               </a:rPr>
-              <a:t>Invoke exactly map...</a:t>
+              <a:t>
+</a:t>
             </a:r>
             <a:r>
               <a:rPr lang="en-US" sz="850" dirty="0">
@@ -10340,8 +10426,18 @@
                 <a:ea typeface="JetBrains Mono" pitchFamily="34" charset="-122"/>
                 <a:cs typeface="JetBrains Mono" pitchFamily="34" charset="-120"/>
               </a:rPr>
-              <a:t>
-</a:t>
+              <a:t>Write and validate </a:t>
+            </a:r>
+            <a:r>
+              <a:rPr lang="en-US" sz="800" b="1" dirty="0">
+                <a:solidFill>
+                  <a:srgbClr val="CE9178"/>
+                </a:solidFill>
+                <a:latin typeface="JetBrains Mono Bold" pitchFamily="34" charset="0"/>
+                <a:ea typeface="JetBrains Mono Bold" pitchFamily="34" charset="-122"/>
+                <a:cs typeface="JetBrains Mono Bold" pitchFamily="34" charset="-120"/>
+              </a:rPr>
+              <a:t>policy/policy_registry.yaml</a:t>
             </a:r>
             <a:r>
               <a:rPr lang="en-US" sz="850" dirty="0">
@@ -10352,7 +10448,7 @@
                 <a:ea typeface="JetBrains Mono" pitchFamily="34" charset="-122"/>
                 <a:cs typeface="JetBrains Mono" pitchFamily="34" charset="-120"/>
               </a:rPr>
-              <a:t>Stop after that one skill.</a:t>
+              <a:t>.</a:t>
             </a:r>
             <a:r>
               <a:rPr lang="en-US" sz="850" dirty="0">
@@ -10375,7 +10471,52 @@
                 <a:ea typeface="JetBrains Mono" pitchFamily="34" charset="-122"/>
                 <a:cs typeface="JetBrains Mono" pitchFamily="34" charset="-120"/>
               </a:rPr>
-              <a:t>Stop at the next human gate.</a:t>
+              <a:t>Record its path and hash; stop.</a:t>
+            </a:r>
+            <a:r>
+              <a:rPr lang="en-US" sz="850" dirty="0">
+                <a:solidFill>
+                  <a:srgbClr val="D4D4D4"/>
+                </a:solidFill>
+                <a:latin typeface="JetBrains Mono" pitchFamily="34" charset="0"/>
+                <a:ea typeface="JetBrains Mono" pitchFamily="34" charset="-122"/>
+                <a:cs typeface="JetBrains Mono" pitchFamily="34" charset="-120"/>
+              </a:rPr>
+              <a:t>
+</a:t>
+            </a:r>
+            <a:r>
+              <a:rPr lang="en-US" sz="850" dirty="0">
+                <a:solidFill>
+                  <a:srgbClr val="D4D4D4"/>
+                </a:solidFill>
+                <a:latin typeface="JetBrains Mono" pitchFamily="34" charset="0"/>
+                <a:ea typeface="JetBrains Mono" pitchFamily="34" charset="-122"/>
+                <a:cs typeface="JetBrains Mono" pitchFamily="34" charset="-120"/>
+              </a:rPr>
+              <a:t>Do not invoke </a:t>
+            </a:r>
+            <a:r>
+              <a:rPr lang="en-US" sz="800" b="1" dirty="0">
+                <a:solidFill>
+                  <a:srgbClr val="D4D4D4"/>
+                </a:solidFill>
+                <a:latin typeface="JetBrains Mono Bold" pitchFamily="34" charset="0"/>
+                <a:ea typeface="JetBrains Mono Bold" pitchFamily="34" charset="-122"/>
+                <a:cs typeface="JetBrains Mono Bold" pitchFamily="34" charset="-120"/>
+              </a:rPr>
+              <a:t>model</a:t>
+            </a:r>
+            <a:r>
+              <a:rPr lang="en-US" sz="850" dirty="0">
+                <a:solidFill>
+                  <a:srgbClr val="D4D4D4"/>
+                </a:solidFill>
+                <a:latin typeface="JetBrains Mono" pitchFamily="34" charset="0"/>
+                <a:ea typeface="JetBrains Mono" pitchFamily="34" charset="-122"/>
+                <a:cs typeface="JetBrains Mono" pitchFamily="34" charset="-120"/>
+              </a:rPr>
+              <a:t> automatically.</a:t>
             </a:r>
             <a:endParaRPr lang="en-US" sz="850" dirty="0"/>
           </a:p>
@@ -11904,7 +12045,7 @@
                 <a:ea typeface="Oswald SemiBold" pitchFamily="34" charset="-122"/>
                 <a:cs typeface="Oswald SemiBold" pitchFamily="34" charset="-120"/>
               </a:rPr>
-              <a:t>WHAT I ASKED COPILOT</a:t>
+              <a:t>ONE MESSAGE PER SKILL</a:t>
             </a:r>
             <a:endParaRPr lang="en-US" sz="1400" dirty="0"/>
           </a:p>
@@ -12069,7 +12210,7 @@
         <p:spPr>
           <a:xfrm>
             <a:off x="4114800" y="1956662"/>
-            <a:ext cx="4572000" cy="850106"/>
+            <a:ext cx="4572000" cy="1626989"/>
           </a:xfrm>
           <a:prstGeom prst="rect">
             <a:avLst/>
@@ -12094,7 +12235,7 @@
         <p:spPr>
           <a:xfrm>
             <a:off x="4114800" y="1956662"/>
-            <a:ext cx="4572000" cy="850106"/>
+            <a:ext cx="4572000" cy="1626989"/>
           </a:xfrm>
           <a:prstGeom prst="rect">
             <a:avLst/>
@@ -12146,7 +12287,7 @@
                 <a:ea typeface="JetBrains Mono" pitchFamily="34" charset="-122"/>
                 <a:cs typeface="JetBrains Mono" pitchFamily="34" charset="-120"/>
               </a:rPr>
-              <a:t> Continue from stage map...</a:t>
+              <a:t> Read durable state and run exactly one authorized skill.</a:t>
             </a:r>
             <a:r>
               <a:rPr lang="en-US" sz="800" dirty="0">
@@ -12169,7 +12310,18 @@
                 <a:ea typeface="JetBrains Mono" pitchFamily="34" charset="-122"/>
                 <a:cs typeface="JetBrains Mono" pitchFamily="34" charset="-120"/>
               </a:rPr>
-              <a:t>Invoke exactly model.</a:t>
+              <a:t> </a:t>
+            </a:r>
+            <a:r>
+              <a:rPr lang="en-US" sz="750" b="1" dirty="0">
+                <a:solidFill>
+                  <a:srgbClr val="CE9178"/>
+                </a:solidFill>
+                <a:latin typeface="JetBrains Mono Bold" pitchFamily="34" charset="0"/>
+                <a:ea typeface="JetBrains Mono Bold" pitchFamily="34" charset="-122"/>
+                <a:cs typeface="JetBrains Mono Bold" pitchFamily="34" charset="-120"/>
+              </a:rPr>
+              <a:t>model</a:t>
             </a:r>
             <a:r>
               <a:rPr lang="en-US" sz="800" dirty="0">
@@ -12180,111 +12332,20 @@
                 <a:ea typeface="JetBrains Mono" pitchFamily="34" charset="-122"/>
                 <a:cs typeface="JetBrains Mono" pitchFamily="34" charset="-120"/>
               </a:rPr>
+              <a:t> → write semantic IR → stop</a:t>
+            </a:r>
+            <a:r>
+              <a:rPr lang="en-US" sz="800" dirty="0">
+                <a:solidFill>
+                  <a:srgbClr val="D4D4D4"/>
+                </a:solidFill>
+                <a:latin typeface="JetBrains Mono" pitchFamily="34" charset="0"/>
+                <a:ea typeface="JetBrains Mono" pitchFamily="34" charset="-122"/>
+                <a:cs typeface="JetBrains Mono" pitchFamily="34" charset="-120"/>
+              </a:rPr>
               <a:t>
 </a:t>
             </a:r>
-            <a:endParaRPr lang="en-US" sz="800" dirty="0"/>
-          </a:p>
-        </p:txBody>
-      </p:sp>
-      <p:sp>
-        <p:nvSpPr>
-          <p:cNvPr id="48" name="Text 44"/>
-          <p:cNvSpPr/>
-          <p:nvPr/>
-        </p:nvSpPr>
-        <p:spPr>
-          <a:xfrm>
-            <a:off x="4114800" y="2892493"/>
-            <a:ext cx="4572000" cy="124290"/>
-          </a:xfrm>
-          <a:prstGeom prst="rect">
-            <a:avLst/>
-          </a:prstGeom>
-          <a:noFill/>
-          <a:ln/>
-        </p:spPr>
-        <p:txBody>
-          <a:bodyPr wrap="none" lIns="0" tIns="0" rIns="0" bIns="0" rtlCol="0" anchor="t">
-            <a:spAutoFit/>
-          </a:bodyPr>
-          <a:lstStyle/>
-          <a:p>
-            <a:pPr algn="l" indent="0" marL="0">
-              <a:lnSpc>
-                <a:spcPct val="116000"/>
-              </a:lnSpc>
-              <a:buNone/>
-            </a:pPr>
-            <a:r>
-              <a:rPr lang="en-US" sz="600" b="1" spc="1" kern="0" dirty="0">
-                <a:solidFill>
-                  <a:srgbClr val="569CD6"/>
-                </a:solidFill>
-                <a:latin typeface="Inter Bold" pitchFamily="34" charset="0"/>
-                <a:ea typeface="Inter Bold" pitchFamily="34" charset="-122"/>
-                <a:cs typeface="Inter Bold" pitchFamily="34" charset="-120"/>
-              </a:rPr>
-              <a:t>USER</a:t>
-            </a:r>
-            <a:endParaRPr lang="en-US" sz="600" dirty="0"/>
-          </a:p>
-        </p:txBody>
-      </p:sp>
-      <p:sp>
-        <p:nvSpPr>
-          <p:cNvPr id="49" name="Shape 45"/>
-          <p:cNvSpPr/>
-          <p:nvPr/>
-        </p:nvSpPr>
-        <p:spPr>
-          <a:xfrm>
-            <a:off x="4114800" y="3059646"/>
-            <a:ext cx="4572000" cy="850106"/>
-          </a:xfrm>
-          <a:prstGeom prst="rect">
-            <a:avLst/>
-          </a:prstGeom>
-          <a:solidFill>
-            <a:srgbClr val="2D2D2D"/>
-          </a:solidFill>
-          <a:ln w="18288">
-            <a:solidFill>
-              <a:srgbClr val="444444"/>
-            </a:solidFill>
-            <a:prstDash val="solid"/>
-          </a:ln>
-        </p:spPr>
-      </p:sp>
-      <p:sp>
-        <p:nvSpPr>
-          <p:cNvPr id="50" name="Text 46"/>
-          <p:cNvSpPr/>
-          <p:nvPr/>
-        </p:nvSpPr>
-        <p:spPr>
-          <a:xfrm>
-            <a:off x="4114800" y="3059646"/>
-            <a:ext cx="4572000" cy="850106"/>
-          </a:xfrm>
-          <a:prstGeom prst="rect">
-            <a:avLst/>
-          </a:prstGeom>
-          <a:noFill/>
-          <a:ln/>
-        </p:spPr>
-        <p:txBody>
-          <a:bodyPr wrap="square" lIns="153035" tIns="119126" rIns="153035" bIns="119126" rtlCol="0" anchor="t">
-            <a:spAutoFit/>
-          </a:bodyPr>
-          <a:lstStyle/>
-          <a:p>
-            <a:pPr algn="l" indent="0" marL="0">
-              <a:lnSpc>
-                <a:spcPct val="116000"/>
-              </a:lnSpc>
-              <a:buNone/>
-            </a:pPr>
             <a:r>
               <a:rPr lang="en-US" sz="750" b="1" dirty="0">
                 <a:solidFill>
@@ -12294,7 +12355,7 @@
                 <a:ea typeface="JetBrains Mono Bold" pitchFamily="34" charset="-122"/>
                 <a:cs typeface="JetBrains Mono Bold" pitchFamily="34" charset="-120"/>
               </a:rPr>
-              <a:t>/run-next-stage LC-LOGIT-01</a:t>
+              <a:t>generate</a:t>
             </a:r>
             <a:r>
               <a:rPr lang="en-US" sz="800" dirty="0">
@@ -12305,8 +12366,7 @@
                 <a:ea typeface="JetBrains Mono" pitchFamily="34" charset="-122"/>
                 <a:cs typeface="JetBrains Mono" pitchFamily="34" charset="-120"/>
               </a:rPr>
-              <a:t>
-</a:t>
+              <a:t> → write Python → stop</a:t>
             </a:r>
             <a:r>
               <a:rPr lang="en-US" sz="800" dirty="0">
@@ -12317,7 +12377,19 @@
                 <a:ea typeface="JetBrains Mono" pitchFamily="34" charset="-122"/>
                 <a:cs typeface="JetBrains Mono" pitchFamily="34" charset="-120"/>
               </a:rPr>
-              <a:t> Approve model and invoke exactly generate. Then invoke exactly </a:t>
+              <a:t>
+</a:t>
+            </a:r>
+            <a:r>
+              <a:rPr lang="en-US" sz="750" b="1" dirty="0">
+                <a:solidFill>
+                  <a:srgbClr val="CE9178"/>
+                </a:solidFill>
+                <a:latin typeface="JetBrains Mono Bold" pitchFamily="34" charset="0"/>
+                <a:ea typeface="JetBrains Mono Bold" pitchFamily="34" charset="-122"/>
+                <a:cs typeface="JetBrains Mono Bold" pitchFamily="34" charset="-120"/>
+              </a:rPr>
+              <a:t>test</a:t>
             </a:r>
             <a:r>
               <a:rPr lang="en-US" sz="800" dirty="0">
@@ -12328,7 +12400,30 @@
                 <a:ea typeface="JetBrains Mono" pitchFamily="34" charset="-122"/>
                 <a:cs typeface="JetBrains Mono" pitchFamily="34" charset="-120"/>
               </a:rPr>
-              <a:t>test.</a:t>
+              <a:t> → build governed fixture → stop</a:t>
+            </a:r>
+            <a:r>
+              <a:rPr lang="en-US" sz="800" dirty="0">
+                <a:solidFill>
+                  <a:srgbClr val="D4D4D4"/>
+                </a:solidFill>
+                <a:latin typeface="JetBrains Mono" pitchFamily="34" charset="0"/>
+                <a:ea typeface="JetBrains Mono" pitchFamily="34" charset="-122"/>
+                <a:cs typeface="JetBrains Mono" pitchFamily="34" charset="-120"/>
+              </a:rPr>
+              <a:t>
+</a:t>
+            </a:r>
+            <a:r>
+              <a:rPr lang="en-US" sz="800" dirty="0">
+                <a:solidFill>
+                  <a:srgbClr val="D4D4D4"/>
+                </a:solidFill>
+                <a:latin typeface="JetBrains Mono" pitchFamily="34" charset="0"/>
+                <a:ea typeface="JetBrains Mono" pitchFamily="34" charset="-122"/>
+                <a:cs typeface="JetBrains Mono" pitchFamily="34" charset="-120"/>
+              </a:rPr>
+              <a:t> Never run all three in one response.</a:t>
             </a:r>
             <a:endParaRPr lang="en-US" sz="800" dirty="0"/>
           </a:p>
@@ -12336,7 +12431,7 @@
       </p:sp>
       <p:sp>
         <p:nvSpPr>
-          <p:cNvPr id="51" name="Shape 47"/>
+          <p:cNvPr id="48" name="Shape 44"/>
           <p:cNvSpPr/>
           <p:nvPr/>
         </p:nvSpPr>
@@ -12361,7 +12456,7 @@
       </p:sp>
       <p:sp>
         <p:nvSpPr>
-          <p:cNvPr id="52" name="Text 48"/>
+          <p:cNvPr id="49" name="Text 45"/>
           <p:cNvSpPr/>
           <p:nvPr/>
         </p:nvSpPr>
@@ -13563,7 +13658,7 @@
                 <a:ea typeface="Oswald SemiBold" pitchFamily="34" charset="-122"/>
                 <a:cs typeface="Oswald SemiBold" pitchFamily="34" charset="-120"/>
               </a:rPr>
-              <a:t>WHAT I ASKED COPILOT</a:t>
+              <a:t>HUMAN APPROVAL TO VALIDATE</a:t>
             </a:r>
             <a:endParaRPr lang="en-US" sz="1400" dirty="0"/>
           </a:p>
@@ -13728,7 +13823,7 @@
         <p:spPr>
           <a:xfrm>
             <a:off x="4114800" y="1956662"/>
-            <a:ext cx="4572000" cy="1129717"/>
+            <a:ext cx="4572000" cy="1430089"/>
           </a:xfrm>
           <a:prstGeom prst="rect">
             <a:avLst/>
@@ -13753,7 +13848,7 @@
         <p:spPr>
           <a:xfrm>
             <a:off x="4114800" y="1956662"/>
-            <a:ext cx="4572000" cy="1129717"/>
+            <a:ext cx="4572000" cy="1430089"/>
           </a:xfrm>
           <a:prstGeom prst="rect">
             <a:avLst/>
@@ -13782,7 +13877,18 @@
                 <a:ea typeface="JetBrains Mono Bold" pitchFamily="34" charset="-122"/>
                 <a:cs typeface="JetBrains Mono Bold" pitchFamily="34" charset="-120"/>
               </a:rPr>
-              <a:t>/run-next-stage LC-LOGIT-01</a:t>
+              <a:t>I approve the governed 50-record fixture, SAS oracle, and tie-out </a:t>
+            </a:r>
+            <a:r>
+              <a:rPr lang="en-US" sz="700" b="1" dirty="0">
+                <a:solidFill>
+                  <a:srgbClr val="CE9178"/>
+                </a:solidFill>
+                <a:latin typeface="JetBrains Mono Bold" pitchFamily="34" charset="0"/>
+                <a:ea typeface="JetBrains Mono Bold" pitchFamily="34" charset="-122"/>
+                <a:cs typeface="JetBrains Mono Bold" pitchFamily="34" charset="-120"/>
+              </a:rPr>
+              <a:t>contract.</a:t>
             </a:r>
             <a:r>
               <a:rPr lang="en-US" sz="750" dirty="0">
@@ -13805,7 +13911,18 @@
                 <a:ea typeface="JetBrains Mono" pitchFamily="34" charset="-122"/>
                 <a:cs typeface="JetBrains Mono" pitchFamily="34" charset="-120"/>
               </a:rPr>
-              <a:t> Approve fixture and tie-out contract.</a:t>
+              <a:t> Use absolute tolerance </a:t>
+            </a:r>
+            <a:r>
+              <a:rPr lang="en-US" sz="700" b="1" dirty="0">
+                <a:solidFill>
+                  <a:srgbClr val="D4D4D4"/>
+                </a:solidFill>
+                <a:latin typeface="JetBrains Mono Bold" pitchFamily="34" charset="0"/>
+                <a:ea typeface="JetBrains Mono Bold" pitchFamily="34" charset="-122"/>
+                <a:cs typeface="JetBrains Mono Bold" pitchFamily="34" charset="-120"/>
+              </a:rPr>
+              <a:t>1e-10</a:t>
             </a:r>
             <a:r>
               <a:rPr lang="en-US" sz="750" dirty="0">
@@ -13816,8 +13933,7 @@
                 <a:ea typeface="JetBrains Mono" pitchFamily="34" charset="-122"/>
                 <a:cs typeface="JetBrains Mono" pitchFamily="34" charset="-120"/>
               </a:rPr>
-              <a:t>
-</a:t>
+              <a:t> for eta and probability.</a:t>
             </a:r>
             <a:r>
               <a:rPr lang="en-US" sz="750" dirty="0">
@@ -13828,7 +13944,8 @@
                 <a:ea typeface="JetBrains Mono" pitchFamily="34" charset="-122"/>
                 <a:cs typeface="JetBrains Mono" pitchFamily="34" charset="-120"/>
               </a:rPr>
-              <a:t>Invoke exactly validate.</a:t>
+              <a:t>
+</a:t>
             </a:r>
             <a:r>
               <a:rPr lang="en-US" sz="750" dirty="0">
@@ -13839,8 +13956,18 @@
                 <a:ea typeface="JetBrains Mono" pitchFamily="34" charset="-122"/>
                 <a:cs typeface="JetBrains Mono" pitchFamily="34" charset="-120"/>
               </a:rPr>
-              <a:t>
-</a:t>
+              <a:t>Invoke exactly </a:t>
+            </a:r>
+            <a:r>
+              <a:rPr lang="en-US" sz="700" b="1" dirty="0">
+                <a:solidFill>
+                  <a:srgbClr val="D4D4D4"/>
+                </a:solidFill>
+                <a:latin typeface="JetBrains Mono Bold" pitchFamily="34" charset="0"/>
+                <a:ea typeface="JetBrains Mono Bold" pitchFamily="34" charset="-122"/>
+                <a:cs typeface="JetBrains Mono Bold" pitchFamily="34" charset="-120"/>
+              </a:rPr>
+              <a:t>validate</a:t>
             </a:r>
             <a:r>
               <a:rPr lang="en-US" sz="750" dirty="0">
@@ -13851,7 +13978,7 @@
                 <a:ea typeface="JetBrains Mono" pitchFamily="34" charset="-122"/>
                 <a:cs typeface="JetBrains Mono" pitchFamily="34" charset="-120"/>
               </a:rPr>
-              <a:t>Run the governed tie-out.</a:t>
+              <a:t>.</a:t>
             </a:r>
             <a:r>
               <a:rPr lang="en-US" sz="750" dirty="0">
@@ -13874,7 +14001,53 @@
                 <a:ea typeface="JetBrains Mono" pitchFamily="34" charset="-122"/>
                 <a:cs typeface="JetBrains Mono" pitchFamily="34" charset="-120"/>
               </a:rPr>
+              <a:t>Write the result, summary, and evidence bundle.</a:t>
+            </a:r>
+            <a:r>
+              <a:rPr lang="en-US" sz="750" dirty="0">
+                <a:solidFill>
+                  <a:srgbClr val="D4D4D4"/>
+                </a:solidFill>
+                <a:latin typeface="JetBrains Mono" pitchFamily="34" charset="0"/>
+                <a:ea typeface="JetBrains Mono" pitchFamily="34" charset="-122"/>
+                <a:cs typeface="JetBrains Mono" pitchFamily="34" charset="-120"/>
+              </a:rPr>
+              <a:t>
+</a:t>
+            </a:r>
+            <a:r>
+              <a:rPr lang="en-US" sz="750" dirty="0">
+                <a:solidFill>
+                  <a:srgbClr val="D4D4D4"/>
+                </a:solidFill>
+                <a:latin typeface="JetBrains Mono" pitchFamily="34" charset="0"/>
+                <a:ea typeface="JetBrains Mono" pitchFamily="34" charset="-122"/>
+                <a:cs typeface="JetBrains Mono" pitchFamily="34" charset="-120"/>
+              </a:rPr>
               <a:t>Stop with PASS, FAIL, or BLOCKED.</a:t>
+            </a:r>
+            <a:r>
+              <a:rPr lang="en-US" sz="750" dirty="0">
+                <a:solidFill>
+                  <a:srgbClr val="D4D4D4"/>
+                </a:solidFill>
+                <a:latin typeface="JetBrains Mono" pitchFamily="34" charset="0"/>
+                <a:ea typeface="JetBrains Mono" pitchFamily="34" charset="-122"/>
+                <a:cs typeface="JetBrains Mono" pitchFamily="34" charset="-120"/>
+              </a:rPr>
+              <a:t>
+</a:t>
+            </a:r>
+            <a:r>
+              <a:rPr lang="en-US" sz="750" dirty="0">
+                <a:solidFill>
+                  <a:srgbClr val="D4D4D4"/>
+                </a:solidFill>
+                <a:latin typeface="JetBrains Mono" pitchFamily="34" charset="0"/>
+                <a:ea typeface="JetBrains Mono" pitchFamily="34" charset="-122"/>
+                <a:cs typeface="JetBrains Mono" pitchFamily="34" charset="-120"/>
+              </a:rPr>
+              <a:t>Do not broaden the proof claim.</a:t>
             </a:r>
             <a:endParaRPr lang="en-US" sz="750" dirty="0"/>
           </a:p>
@@ -14865,7 +15038,7 @@
                 <a:ea typeface="Oswald SemiBold" pitchFamily="34" charset="-122"/>
                 <a:cs typeface="Oswald SemiBold" pitchFamily="34" charset="-120"/>
               </a:rPr>
-              <a:t>WHAT I ASKED COPILOT</a:t>
+              <a:t>ACTUAL RECOVERY ENTRY POINT</a:t>
             </a:r>
             <a:endParaRPr lang="en-US" sz="1400" dirty="0"/>
           </a:p>
@@ -15030,7 +15203,7 @@
         <p:spPr>
           <a:xfrm>
             <a:off x="4129088" y="2000250"/>
-            <a:ext cx="4543425" cy="1800225"/>
+            <a:ext cx="4543425" cy="1457325"/>
           </a:xfrm>
           <a:prstGeom prst="rect">
             <a:avLst/>
@@ -15055,7 +15228,7 @@
         <p:spPr>
           <a:xfrm>
             <a:off x="4129088" y="2000250"/>
-            <a:ext cx="4543425" cy="1800225"/>
+            <a:ext cx="4543425" cy="1457325"/>
           </a:xfrm>
           <a:prstGeom prst="rect">
             <a:avLst/>
@@ -15084,7 +15257,18 @@
                 <a:ea typeface="JetBrains Mono Bold" pitchFamily="34" charset="-122"/>
                 <a:cs typeface="JetBrains Mono Bold" pitchFamily="34" charset="-120"/>
               </a:rPr>
-              <a:t>/analyze-failure LC-LOGIT-01</a:t>
+              <a:t>/analyze-failure artifacts/evidence/runs/&lt;run-</a:t>
+            </a:r>
+            <a:r>
+              <a:rPr lang="en-US" sz="800" b="1" dirty="0">
+                <a:solidFill>
+                  <a:srgbClr val="CE9178"/>
+                </a:solidFill>
+                <a:latin typeface="JetBrains Mono Bold" pitchFamily="34" charset="0"/>
+                <a:ea typeface="JetBrains Mono Bold" pitchFamily="34" charset="-122"/>
+                <a:cs typeface="JetBrains Mono Bold" pitchFamily="34" charset="-120"/>
+              </a:rPr>
+              <a:t>id&gt;/evidence.json</a:t>
             </a:r>
             <a:r>
               <a:rPr lang="en-US" sz="850" dirty="0">
@@ -15107,7 +15291,7 @@
                 <a:ea typeface="JetBrains Mono" pitchFamily="34" charset="-122"/>
                 <a:cs typeface="JetBrains Mono" pitchFamily="34" charset="-120"/>
               </a:rPr>
-              <a:t> Use failed tie-out evidence.</a:t>
+              <a:t> Read the latest run state and failed gate.</a:t>
             </a:r>
             <a:r>
               <a:rPr lang="en-US" sz="850" dirty="0">
@@ -15130,7 +15314,18 @@
                 <a:ea typeface="JetBrains Mono" pitchFamily="34" charset="-122"/>
                 <a:cs typeface="JetBrains Mono" pitchFamily="34" charset="-120"/>
               </a:rPr>
-              <a:t>Invoke exactly ingest.</a:t>
+              <a:t>If evidence is raw: invoke only </a:t>
+            </a:r>
+            <a:r>
+              <a:rPr lang="en-US" sz="800" b="1" dirty="0">
+                <a:solidFill>
+                  <a:srgbClr val="D4D4D4"/>
+                </a:solidFill>
+                <a:latin typeface="JetBrains Mono Bold" pitchFamily="34" charset="0"/>
+                <a:ea typeface="JetBrains Mono Bold" pitchFamily="34" charset="-122"/>
+                <a:cs typeface="JetBrains Mono Bold" pitchFamily="34" charset="-120"/>
+              </a:rPr>
+              <a:t>ingest</a:t>
             </a:r>
             <a:r>
               <a:rPr lang="en-US" sz="850" dirty="0">
@@ -15141,8 +15336,7 @@
                 <a:ea typeface="JetBrains Mono" pitchFamily="34" charset="-122"/>
                 <a:cs typeface="JetBrains Mono" pitchFamily="34" charset="-120"/>
               </a:rPr>
-              <a:t>
-</a:t>
+              <a:t>, then stop.</a:t>
             </a:r>
             <a:r>
               <a:rPr lang="en-US" sz="850" dirty="0">
@@ -15153,7 +15347,8 @@
                 <a:ea typeface="JetBrains Mono" pitchFamily="34" charset="-122"/>
                 <a:cs typeface="JetBrains Mono" pitchFamily="34" charset="-120"/>
               </a:rPr>
-              <a:t>Normalize evidence and stop.</a:t>
+              <a:t>
+</a:t>
             </a:r>
             <a:r>
               <a:rPr lang="en-US" sz="850" dirty="0">
@@ -15164,8 +15359,18 @@
                 <a:ea typeface="JetBrains Mono" pitchFamily="34" charset="-122"/>
                 <a:cs typeface="JetBrains Mono" pitchFamily="34" charset="-120"/>
               </a:rPr>
-              <a:t>
-</a:t>
+              <a:t>If normalized: invoke only </a:t>
+            </a:r>
+            <a:r>
+              <a:rPr lang="en-US" sz="800" b="1" dirty="0">
+                <a:solidFill>
+                  <a:srgbClr val="D4D4D4"/>
+                </a:solidFill>
+                <a:latin typeface="JetBrains Mono Bold" pitchFamily="34" charset="0"/>
+                <a:ea typeface="JetBrains Mono Bold" pitchFamily="34" charset="-122"/>
+                <a:cs typeface="JetBrains Mono Bold" pitchFamily="34" charset="-120"/>
+              </a:rPr>
+              <a:t>diagnose</a:t>
             </a:r>
             <a:r>
               <a:rPr lang="en-US" sz="850" dirty="0">
@@ -15176,7 +15381,7 @@
                 <a:ea typeface="JetBrains Mono" pitchFamily="34" charset="-122"/>
                 <a:cs typeface="JetBrains Mono" pitchFamily="34" charset="-120"/>
               </a:rPr>
-              <a:t> Then diagnose.</a:t>
+              <a:t>, then stop for approval.</a:t>
             </a:r>
             <a:r>
               <a:rPr lang="en-US" sz="850" dirty="0">
@@ -15199,30 +15404,7 @@
                 <a:ea typeface="JetBrains Mono" pitchFamily="34" charset="-122"/>
                 <a:cs typeface="JetBrains Mono" pitchFamily="34" charset="-120"/>
               </a:rPr>
-              <a:t>Then repair one owning layer.</a:t>
-            </a:r>
-            <a:r>
-              <a:rPr lang="en-US" sz="850" dirty="0">
-                <a:solidFill>
-                  <a:srgbClr val="D4D4D4"/>
-                </a:solidFill>
-                <a:latin typeface="JetBrains Mono" pitchFamily="34" charset="0"/>
-                <a:ea typeface="JetBrains Mono" pitchFamily="34" charset="-122"/>
-                <a:cs typeface="JetBrains Mono" pitchFamily="34" charset="-120"/>
-              </a:rPr>
-              <a:t>
-</a:t>
-            </a:r>
-            <a:r>
-              <a:rPr lang="en-US" sz="850" dirty="0">
-                <a:solidFill>
-                  <a:srgbClr val="D4D4D4"/>
-                </a:solidFill>
-                <a:latin typeface="JetBrains Mono" pitchFamily="34" charset="0"/>
-                <a:ea typeface="JetBrains Mono" pitchFamily="34" charset="-122"/>
-                <a:cs typeface="JetBrains Mono" pitchFamily="34" charset="-120"/>
-              </a:rPr>
-              <a:t>Then review.</a:t>
+              <a:t>Never repair or review in this message.</a:t>
             </a:r>
             <a:endParaRPr lang="en-US" sz="850" dirty="0"/>
           </a:p>
@@ -15669,7 +15851,7 @@
         <p:spPr>
           <a:xfrm>
             <a:off x="271463" y="2375911"/>
-            <a:ext cx="2571750" cy="1665108"/>
+            <a:ext cx="2571750" cy="1797267"/>
           </a:xfrm>
           <a:prstGeom prst="rect">
             <a:avLst/>
@@ -15779,7 +15961,7 @@
         <p:spPr>
           <a:xfrm>
             <a:off x="414338" y="3523097"/>
-            <a:ext cx="2286000" cy="332184"/>
+            <a:ext cx="2286000" cy="464344"/>
           </a:xfrm>
           <a:prstGeom prst="rect">
             <a:avLst/>
@@ -15804,7 +15986,7 @@
         <p:spPr>
           <a:xfrm>
             <a:off x="414338" y="3523097"/>
-            <a:ext cx="2286000" cy="332184"/>
+            <a:ext cx="2286000" cy="464344"/>
           </a:xfrm>
           <a:prstGeom prst="rect">
             <a:avLst/>
@@ -15830,7 +16012,7 @@
                 <a:ea typeface="JetBrains Mono Bold" pitchFamily="34" charset="-122"/>
                 <a:cs typeface="JetBrains Mono Bold" pitchFamily="34" charset="-120"/>
               </a:rPr>
-              <a:t>execution_trace.json</a:t>
+              <a:t>stage1_extraction/output/execution_trace.json</a:t>
             </a:r>
             <a:endParaRPr lang="en-US" sz="700" dirty="0"/>
           </a:p>
@@ -15990,625 +16172,1258 @@
         </p:nvSpPr>
         <p:spPr>
           <a:xfrm>
-            <a:off x="3071813" y="1400175"/>
-            <a:ext cx="5800725" cy="3243263"/>
-          </a:xfrm>
-          <a:prstGeom prst="rect">
-            <a:avLst/>
-          </a:prstGeom>
-          <a:noFill/>
-          <a:ln/>
-        </p:spPr>
-        <p:txBody>
-          <a:bodyPr wrap="square" lIns="238125" tIns="204089" rIns="238125" bIns="204089" rtlCol="0" anchor="t">
+            <a:off x="7929563" y="1184077"/>
+            <a:ext cx="842963" cy="103584"/>
+          </a:xfrm>
+          <a:prstGeom prst="rect">
+            <a:avLst/>
+          </a:prstGeom>
+          <a:noFill/>
+          <a:ln/>
+        </p:spPr>
+        <p:txBody>
+          <a:bodyPr wrap="none" lIns="0" tIns="0" rIns="0" bIns="0" rtlCol="0" anchor="t">
             <a:spAutoFit/>
           </a:bodyPr>
           <a:lstStyle/>
           <a:p>
             <a:pPr algn="l" indent="0" marL="0">
-              <a:lnSpc>
-                <a:spcPct val="120000"/>
-              </a:lnSpc>
-              <a:buNone/>
-            </a:pPr>
-            <a:r>
-              <a:rPr lang="en-US" sz="900" dirty="0">
-                <a:solidFill>
-                  <a:srgbClr val="D4D4D4"/>
-                </a:solidFill>
-                <a:latin typeface="JetBrains Mono" pitchFamily="34" charset="0"/>
-                <a:ea typeface="JetBrains Mono" pitchFamily="34" charset="-122"/>
-                <a:cs typeface="JetBrains Mono" pitchFamily="34" charset="-120"/>
-              </a:rPr>
-              <a:t>{</a:t>
-            </a:r>
-            <a:r>
-              <a:rPr lang="en-US" sz="900" dirty="0">
-                <a:solidFill>
-                  <a:srgbClr val="D4D4D4"/>
-                </a:solidFill>
-                <a:latin typeface="JetBrains Mono" pitchFamily="34" charset="0"/>
-                <a:ea typeface="JetBrains Mono" pitchFamily="34" charset="-122"/>
-                <a:cs typeface="JetBrains Mono" pitchFamily="34" charset="-120"/>
-              </a:rPr>
-              <a:t>
-</a:t>
-            </a:r>
-            <a:r>
-              <a:rPr lang="en-US" sz="900" dirty="0">
+              <a:buNone/>
+            </a:pPr>
+            <a:r>
+              <a:rPr lang="en-US" sz="600" b="1" spc="1" kern="0" dirty="0">
                 <a:solidFill>
                   <a:srgbClr val="9CDCFE"/>
-                </a:solidFill>
-                <a:latin typeface="JetBrains Mono" pitchFamily="34" charset="0"/>
-                <a:ea typeface="JetBrains Mono" pitchFamily="34" charset="-122"/>
-                <a:cs typeface="JetBrains Mono" pitchFamily="34" charset="-120"/>
-              </a:rPr>
-              <a:t>"step_id"</a:t>
-            </a:r>
-            <a:r>
-              <a:rPr lang="en-US" sz="900" dirty="0">
-                <a:solidFill>
-                  <a:srgbClr val="D4D4D4"/>
-                </a:solidFill>
-                <a:latin typeface="JetBrains Mono" pitchFamily="34" charset="0"/>
-                <a:ea typeface="JetBrains Mono" pitchFamily="34" charset="-122"/>
-                <a:cs typeface="JetBrains Mono" pitchFamily="34" charset="-120"/>
-              </a:rPr>
-              <a:t>: </a:t>
-            </a:r>
-            <a:r>
-              <a:rPr lang="en-US" sz="900" dirty="0">
-                <a:solidFill>
-                  <a:srgbClr val="CE9178"/>
-                </a:solidFill>
-                <a:latin typeface="JetBrains Mono" pitchFamily="34" charset="0"/>
-                <a:ea typeface="JetBrains Mono" pitchFamily="34" charset="-122"/>
-                <a:cs typeface="JetBrains Mono" pitchFamily="34" charset="-120"/>
-              </a:rPr>
-              <a:t>"S04"</a:t>
-            </a:r>
-            <a:r>
-              <a:rPr lang="en-US" sz="900" dirty="0">
-                <a:solidFill>
-                  <a:srgbClr val="D4D4D4"/>
-                </a:solidFill>
-                <a:latin typeface="JetBrains Mono" pitchFamily="34" charset="0"/>
-                <a:ea typeface="JetBrains Mono" pitchFamily="34" charset="-122"/>
-                <a:cs typeface="JetBrains Mono" pitchFamily="34" charset="-120"/>
-              </a:rPr>
-              <a:t>,</a:t>
-            </a:r>
-            <a:r>
-              <a:rPr lang="en-US" sz="900" dirty="0">
-                <a:solidFill>
-                  <a:srgbClr val="D4D4D4"/>
-                </a:solidFill>
-                <a:latin typeface="JetBrains Mono" pitchFamily="34" charset="0"/>
-                <a:ea typeface="JetBrains Mono" pitchFamily="34" charset="-122"/>
-                <a:cs typeface="JetBrains Mono" pitchFamily="34" charset="-120"/>
-              </a:rPr>
-              <a:t>
-</a:t>
-            </a:r>
-            <a:r>
-              <a:rPr lang="en-US" sz="900" dirty="0">
-                <a:solidFill>
-                  <a:srgbClr val="9CDCFE"/>
-                </a:solidFill>
-                <a:latin typeface="JetBrains Mono" pitchFamily="34" charset="0"/>
-                <a:ea typeface="JetBrains Mono" pitchFamily="34" charset="-122"/>
-                <a:cs typeface="JetBrains Mono" pitchFamily="34" charset="-120"/>
-              </a:rPr>
-              <a:t>"command"</a:t>
-            </a:r>
-            <a:r>
-              <a:rPr lang="en-US" sz="900" dirty="0">
-                <a:solidFill>
-                  <a:srgbClr val="D4D4D4"/>
-                </a:solidFill>
-                <a:latin typeface="JetBrains Mono" pitchFamily="34" charset="0"/>
-                <a:ea typeface="JetBrains Mono" pitchFamily="34" charset="-122"/>
-                <a:cs typeface="JetBrains Mono" pitchFamily="34" charset="-120"/>
-              </a:rPr>
-              <a:t>: </a:t>
-            </a:r>
-            <a:r>
-              <a:rPr lang="en-US" sz="900" dirty="0">
-                <a:solidFill>
-                  <a:srgbClr val="CE9178"/>
-                </a:solidFill>
-                <a:latin typeface="JetBrains Mono" pitchFamily="34" charset="0"/>
-                <a:ea typeface="JetBrains Mono" pitchFamily="34" charset="-122"/>
-                <a:cs typeface="JetBrains Mono" pitchFamily="34" charset="-120"/>
-              </a:rPr>
-              <a:t>"PROC LOGISTIC"</a:t>
-            </a:r>
-            <a:r>
-              <a:rPr lang="en-US" sz="900" dirty="0">
-                <a:solidFill>
-                  <a:srgbClr val="D4D4D4"/>
-                </a:solidFill>
-                <a:latin typeface="JetBrains Mono" pitchFamily="34" charset="0"/>
-                <a:ea typeface="JetBrains Mono" pitchFamily="34" charset="-122"/>
-                <a:cs typeface="JetBrains Mono" pitchFamily="34" charset="-120"/>
-              </a:rPr>
-              <a:t>,</a:t>
-            </a:r>
-            <a:r>
-              <a:rPr lang="en-US" sz="900" dirty="0">
-                <a:solidFill>
-                  <a:srgbClr val="D4D4D4"/>
-                </a:solidFill>
-                <a:latin typeface="JetBrains Mono" pitchFamily="34" charset="0"/>
-                <a:ea typeface="JetBrains Mono" pitchFamily="34" charset="-122"/>
-                <a:cs typeface="JetBrains Mono" pitchFamily="34" charset="-120"/>
-              </a:rPr>
-              <a:t>
-</a:t>
-            </a:r>
-            <a:r>
-              <a:rPr lang="en-US" sz="900" dirty="0">
-                <a:solidFill>
-                  <a:srgbClr val="9CDCFE"/>
-                </a:solidFill>
-                <a:latin typeface="JetBrains Mono" pitchFamily="34" charset="0"/>
-                <a:ea typeface="JetBrains Mono" pitchFamily="34" charset="-122"/>
-                <a:cs typeface="JetBrains Mono" pitchFamily="34" charset="-120"/>
-              </a:rPr>
-              <a:t>"inputs"</a:t>
-            </a:r>
-            <a:r>
-              <a:rPr lang="en-US" sz="900" dirty="0">
-                <a:solidFill>
-                  <a:srgbClr val="D4D4D4"/>
-                </a:solidFill>
-                <a:latin typeface="JetBrains Mono" pitchFamily="34" charset="0"/>
-                <a:ea typeface="JetBrains Mono" pitchFamily="34" charset="-122"/>
-                <a:cs typeface="JetBrains Mono" pitchFamily="34" charset="-120"/>
-              </a:rPr>
-              <a:t>: [</a:t>
-            </a:r>
-            <a:r>
-              <a:rPr lang="en-US" sz="900" dirty="0">
-                <a:solidFill>
-                  <a:srgbClr val="CE9178"/>
-                </a:solidFill>
-                <a:latin typeface="JetBrains Mono" pitchFamily="34" charset="0"/>
-                <a:ea typeface="JetBrains Mono" pitchFamily="34" charset="-122"/>
-                <a:cs typeface="JetBrains Mono" pitchFamily="34" charset="-120"/>
-              </a:rPr>
-              <a:t>"WORK.TRAIN_DATA"</a:t>
-            </a:r>
-            <a:r>
-              <a:rPr lang="en-US" sz="900" dirty="0">
-                <a:solidFill>
-                  <a:srgbClr val="D4D4D4"/>
-                </a:solidFill>
-                <a:latin typeface="JetBrains Mono" pitchFamily="34" charset="0"/>
-                <a:ea typeface="JetBrains Mono" pitchFamily="34" charset="-122"/>
-                <a:cs typeface="JetBrains Mono" pitchFamily="34" charset="-120"/>
-              </a:rPr>
-              <a:t>],</a:t>
-            </a:r>
-            <a:r>
-              <a:rPr lang="en-US" sz="900" dirty="0">
-                <a:solidFill>
-                  <a:srgbClr val="D4D4D4"/>
-                </a:solidFill>
-                <a:latin typeface="JetBrains Mono" pitchFamily="34" charset="0"/>
-                <a:ea typeface="JetBrains Mono" pitchFamily="34" charset="-122"/>
-                <a:cs typeface="JetBrains Mono" pitchFamily="34" charset="-120"/>
-              </a:rPr>
-              <a:t>
-</a:t>
-            </a:r>
-            <a:r>
-              <a:rPr lang="en-US" sz="900" dirty="0">
-                <a:solidFill>
-                  <a:srgbClr val="9CDCFE"/>
-                </a:solidFill>
-                <a:latin typeface="JetBrains Mono" pitchFamily="34" charset="0"/>
-                <a:ea typeface="JetBrains Mono" pitchFamily="34" charset="-122"/>
-                <a:cs typeface="JetBrains Mono" pitchFamily="34" charset="-120"/>
-              </a:rPr>
-              <a:t>"outputs"</a:t>
-            </a:r>
-            <a:r>
-              <a:rPr lang="en-US" sz="900" dirty="0">
-                <a:solidFill>
-                  <a:srgbClr val="D4D4D4"/>
-                </a:solidFill>
-                <a:latin typeface="JetBrains Mono" pitchFamily="34" charset="0"/>
-                <a:ea typeface="JetBrains Mono" pitchFamily="34" charset="-122"/>
-                <a:cs typeface="JetBrains Mono" pitchFamily="34" charset="-120"/>
-              </a:rPr>
-              <a:t>: {</a:t>
-            </a:r>
-            <a:r>
-              <a:rPr lang="en-US" sz="900" dirty="0">
-                <a:solidFill>
-                  <a:srgbClr val="D4D4D4"/>
-                </a:solidFill>
-                <a:latin typeface="JetBrains Mono" pitchFamily="34" charset="0"/>
-                <a:ea typeface="JetBrains Mono" pitchFamily="34" charset="-122"/>
-                <a:cs typeface="JetBrains Mono" pitchFamily="34" charset="-120"/>
-              </a:rPr>
-              <a:t>
-</a:t>
-            </a:r>
-            <a:r>
-              <a:rPr lang="en-US" sz="900" dirty="0">
-                <a:solidFill>
-                  <a:srgbClr val="9CDCFE"/>
-                </a:solidFill>
-                <a:latin typeface="JetBrains Mono" pitchFamily="34" charset="0"/>
-                <a:ea typeface="JetBrains Mono" pitchFamily="34" charset="-122"/>
-                <a:cs typeface="JetBrains Mono" pitchFamily="34" charset="-120"/>
-              </a:rPr>
-              <a:t>"model_store"</a:t>
-            </a:r>
-            <a:r>
-              <a:rPr lang="en-US" sz="900" dirty="0">
-                <a:solidFill>
-                  <a:srgbClr val="D4D4D4"/>
-                </a:solidFill>
-                <a:latin typeface="JetBrains Mono" pitchFamily="34" charset="0"/>
-                <a:ea typeface="JetBrains Mono" pitchFamily="34" charset="-122"/>
-                <a:cs typeface="JetBrains Mono" pitchFamily="34" charset="-120"/>
-              </a:rPr>
-              <a:t>: </a:t>
-            </a:r>
-            <a:r>
-              <a:rPr lang="en-US" sz="900" dirty="0">
-                <a:solidFill>
-                  <a:srgbClr val="CE9178"/>
-                </a:solidFill>
-                <a:latin typeface="JetBrains Mono" pitchFamily="34" charset="0"/>
-                <a:ea typeface="JetBrains Mono" pitchFamily="34" charset="-122"/>
-                <a:cs typeface="JetBrains Mono" pitchFamily="34" charset="-120"/>
-              </a:rPr>
-              <a:t>"WORK.LC_LOGIT_01"</a:t>
-            </a:r>
-            <a:r>
-              <a:rPr lang="en-US" sz="900" dirty="0">
-                <a:solidFill>
-                  <a:srgbClr val="D4D4D4"/>
-                </a:solidFill>
-                <a:latin typeface="JetBrains Mono" pitchFamily="34" charset="0"/>
-                <a:ea typeface="JetBrains Mono" pitchFamily="34" charset="-122"/>
-                <a:cs typeface="JetBrains Mono" pitchFamily="34" charset="-120"/>
-              </a:rPr>
-              <a:t>,</a:t>
-            </a:r>
-            <a:r>
-              <a:rPr lang="en-US" sz="900" dirty="0">
-                <a:solidFill>
-                  <a:srgbClr val="D4D4D4"/>
-                </a:solidFill>
-                <a:latin typeface="JetBrains Mono" pitchFamily="34" charset="0"/>
-                <a:ea typeface="JetBrains Mono" pitchFamily="34" charset="-122"/>
-                <a:cs typeface="JetBrains Mono" pitchFamily="34" charset="-120"/>
-              </a:rPr>
-              <a:t>
-</a:t>
-            </a:r>
-            <a:r>
-              <a:rPr lang="en-US" sz="900" dirty="0">
-                <a:solidFill>
-                  <a:srgbClr val="9CDCFE"/>
-                </a:solidFill>
-                <a:latin typeface="JetBrains Mono" pitchFamily="34" charset="0"/>
-                <a:ea typeface="JetBrains Mono" pitchFamily="34" charset="-122"/>
-                <a:cs typeface="JetBrains Mono" pitchFamily="34" charset="-120"/>
-              </a:rPr>
-              <a:t>"target"</a:t>
-            </a:r>
-            <a:r>
-              <a:rPr lang="en-US" sz="900" dirty="0">
-                <a:solidFill>
-                  <a:srgbClr val="D4D4D4"/>
-                </a:solidFill>
-                <a:latin typeface="JetBrains Mono" pitchFamily="34" charset="0"/>
-                <a:ea typeface="JetBrains Mono" pitchFamily="34" charset="-122"/>
-                <a:cs typeface="JetBrains Mono" pitchFamily="34" charset="-120"/>
-              </a:rPr>
-              <a:t>: </a:t>
-            </a:r>
-            <a:r>
-              <a:rPr lang="en-US" sz="900" dirty="0">
-                <a:solidFill>
-                  <a:srgbClr val="CE9178"/>
-                </a:solidFill>
-                <a:latin typeface="JetBrains Mono" pitchFamily="34" charset="0"/>
-                <a:ea typeface="JetBrains Mono" pitchFamily="34" charset="-122"/>
-                <a:cs typeface="JetBrains Mono" pitchFamily="34" charset="-120"/>
-              </a:rPr>
-              <a:t>"Default (Event='1')"</a:t>
-            </a:r>
-            <a:r>
-              <a:rPr lang="en-US" sz="900" dirty="0">
-                <a:solidFill>
-                  <a:srgbClr val="D4D4D4"/>
-                </a:solidFill>
-                <a:latin typeface="JetBrains Mono" pitchFamily="34" charset="0"/>
-                <a:ea typeface="JetBrains Mono" pitchFamily="34" charset="-122"/>
-                <a:cs typeface="JetBrains Mono" pitchFamily="34" charset="-120"/>
-              </a:rPr>
-              <a:t>
-</a:t>
-            </a:r>
-            <a:r>
-              <a:rPr lang="en-US" sz="900" dirty="0">
-                <a:solidFill>
-                  <a:srgbClr val="D4D4D4"/>
-                </a:solidFill>
-                <a:latin typeface="JetBrains Mono" pitchFamily="34" charset="0"/>
-                <a:ea typeface="JetBrains Mono" pitchFamily="34" charset="-122"/>
-                <a:cs typeface="JetBrains Mono" pitchFamily="34" charset="-120"/>
-              </a:rPr>
-              <a:t>},</a:t>
-            </a:r>
-            <a:r>
-              <a:rPr lang="en-US" sz="900" dirty="0">
-                <a:solidFill>
-                  <a:srgbClr val="D4D4D4"/>
-                </a:solidFill>
-                <a:latin typeface="JetBrains Mono" pitchFamily="34" charset="0"/>
-                <a:ea typeface="JetBrains Mono" pitchFamily="34" charset="-122"/>
-                <a:cs typeface="JetBrains Mono" pitchFamily="34" charset="-120"/>
-              </a:rPr>
-              <a:t>
-</a:t>
-            </a:r>
-            <a:r>
-              <a:rPr lang="en-US" sz="900" dirty="0">
-                <a:solidFill>
-                  <a:srgbClr val="9CDCFE"/>
-                </a:solidFill>
-                <a:latin typeface="JetBrains Mono" pitchFamily="34" charset="0"/>
-                <a:ea typeface="JetBrains Mono" pitchFamily="34" charset="-122"/>
-                <a:cs typeface="JetBrains Mono" pitchFamily="34" charset="-120"/>
-              </a:rPr>
-              <a:t>"log_evidence"</a:t>
-            </a:r>
-            <a:r>
-              <a:rPr lang="en-US" sz="900" dirty="0">
-                <a:solidFill>
-                  <a:srgbClr val="D4D4D4"/>
-                </a:solidFill>
-                <a:latin typeface="JetBrains Mono" pitchFamily="34" charset="0"/>
-                <a:ea typeface="JetBrains Mono" pitchFamily="34" charset="-122"/>
-                <a:cs typeface="JetBrains Mono" pitchFamily="34" charset="-120"/>
-              </a:rPr>
-              <a:t>: {</a:t>
-            </a:r>
-            <a:r>
-              <a:rPr lang="en-US" sz="900" dirty="0">
-                <a:solidFill>
-                  <a:srgbClr val="D4D4D4"/>
-                </a:solidFill>
-                <a:latin typeface="JetBrains Mono" pitchFamily="34" charset="0"/>
-                <a:ea typeface="JetBrains Mono" pitchFamily="34" charset="-122"/>
-                <a:cs typeface="JetBrains Mono" pitchFamily="34" charset="-120"/>
-              </a:rPr>
-              <a:t>
-</a:t>
-            </a:r>
-            <a:r>
-              <a:rPr lang="en-US" sz="900" dirty="0">
-                <a:solidFill>
-                  <a:srgbClr val="9CDCFE"/>
-                </a:solidFill>
-                <a:latin typeface="JetBrains Mono" pitchFamily="34" charset="0"/>
-                <a:ea typeface="JetBrains Mono" pitchFamily="34" charset="-122"/>
-                <a:cs typeface="JetBrains Mono" pitchFamily="34" charset="-120"/>
-              </a:rPr>
-              <a:t>"observations_read"</a:t>
-            </a:r>
-            <a:r>
-              <a:rPr lang="en-US" sz="900" dirty="0">
-                <a:solidFill>
-                  <a:srgbClr val="D4D4D4"/>
-                </a:solidFill>
-                <a:latin typeface="JetBrains Mono" pitchFamily="34" charset="0"/>
-                <a:ea typeface="JetBrains Mono" pitchFamily="34" charset="-122"/>
-                <a:cs typeface="JetBrains Mono" pitchFamily="34" charset="-120"/>
-              </a:rPr>
-              <a:t>: </a:t>
-            </a:r>
-            <a:r>
-              <a:rPr lang="en-US" sz="900" dirty="0">
-                <a:solidFill>
-                  <a:srgbClr val="CE9178"/>
-                </a:solidFill>
-                <a:latin typeface="JetBrains Mono" pitchFamily="34" charset="0"/>
-                <a:ea typeface="JetBrains Mono" pitchFamily="34" charset="-122"/>
-                <a:cs typeface="JetBrains Mono" pitchFamily="34" charset="-120"/>
-              </a:rPr>
-              <a:t>"1265975"</a:t>
-            </a:r>
-            <a:r>
-              <a:rPr lang="en-US" sz="900" dirty="0">
-                <a:solidFill>
-                  <a:srgbClr val="D4D4D4"/>
-                </a:solidFill>
-                <a:latin typeface="JetBrains Mono" pitchFamily="34" charset="0"/>
-                <a:ea typeface="JetBrains Mono" pitchFamily="34" charset="-122"/>
-                <a:cs typeface="JetBrains Mono" pitchFamily="34" charset="-120"/>
-              </a:rPr>
-              <a:t>,</a:t>
-            </a:r>
-            <a:r>
-              <a:rPr lang="en-US" sz="900" dirty="0">
-                <a:solidFill>
-                  <a:srgbClr val="D4D4D4"/>
-                </a:solidFill>
-                <a:latin typeface="JetBrains Mono" pitchFamily="34" charset="0"/>
-                <a:ea typeface="JetBrains Mono" pitchFamily="34" charset="-122"/>
-                <a:cs typeface="JetBrains Mono" pitchFamily="34" charset="-120"/>
-              </a:rPr>
-              <a:t>
-</a:t>
-            </a:r>
-            <a:r>
-              <a:rPr lang="en-US" sz="900" dirty="0">
-                <a:solidFill>
-                  <a:srgbClr val="9CDCFE"/>
-                </a:solidFill>
-                <a:latin typeface="JetBrains Mono" pitchFamily="34" charset="0"/>
-                <a:ea typeface="JetBrains Mono" pitchFamily="34" charset="-122"/>
-                <a:cs typeface="JetBrains Mono" pitchFamily="34" charset="-120"/>
-              </a:rPr>
-              <a:t>"convergence"</a:t>
-            </a:r>
-            <a:r>
-              <a:rPr lang="en-US" sz="900" dirty="0">
-                <a:solidFill>
-                  <a:srgbClr val="D4D4D4"/>
-                </a:solidFill>
-                <a:latin typeface="JetBrains Mono" pitchFamily="34" charset="0"/>
-                <a:ea typeface="JetBrains Mono" pitchFamily="34" charset="-122"/>
-                <a:cs typeface="JetBrains Mono" pitchFamily="34" charset="-120"/>
-              </a:rPr>
-              <a:t>: </a:t>
-            </a:r>
-            <a:r>
-              <a:rPr lang="en-US" sz="900" dirty="0">
-                <a:solidFill>
-                  <a:srgbClr val="CE9178"/>
-                </a:solidFill>
-                <a:latin typeface="JetBrains Mono" pitchFamily="34" charset="0"/>
-                <a:ea typeface="JetBrains Mono" pitchFamily="34" charset="-122"/>
-                <a:cs typeface="JetBrains Mono" pitchFamily="34" charset="-120"/>
-              </a:rPr>
-              <a:t>"Satisfied"</a:t>
-            </a:r>
-            <a:r>
-              <a:rPr lang="en-US" sz="900" dirty="0">
-                <a:solidFill>
-                  <a:srgbClr val="D4D4D4"/>
-                </a:solidFill>
-                <a:latin typeface="JetBrains Mono" pitchFamily="34" charset="0"/>
-                <a:ea typeface="JetBrains Mono" pitchFamily="34" charset="-122"/>
-                <a:cs typeface="JetBrains Mono" pitchFamily="34" charset="-120"/>
-              </a:rPr>
-              <a:t>
-</a:t>
-            </a:r>
-            <a:r>
-              <a:rPr lang="en-US" sz="900" dirty="0">
-                <a:solidFill>
-                  <a:srgbClr val="D4D4D4"/>
-                </a:solidFill>
-                <a:latin typeface="JetBrains Mono" pitchFamily="34" charset="0"/>
-                <a:ea typeface="JetBrains Mono" pitchFamily="34" charset="-122"/>
-                <a:cs typeface="JetBrains Mono" pitchFamily="34" charset="-120"/>
-              </a:rPr>
-              <a:t>}</a:t>
-            </a:r>
-            <a:r>
-              <a:rPr lang="en-US" sz="900" dirty="0">
-                <a:solidFill>
-                  <a:srgbClr val="D4D4D4"/>
-                </a:solidFill>
-                <a:latin typeface="JetBrains Mono" pitchFamily="34" charset="0"/>
-                <a:ea typeface="JetBrains Mono" pitchFamily="34" charset="-122"/>
-                <a:cs typeface="JetBrains Mono" pitchFamily="34" charset="-120"/>
-              </a:rPr>
-              <a:t>
-</a:t>
-            </a:r>
-            <a:r>
-              <a:rPr lang="en-US" sz="900" dirty="0">
-                <a:solidFill>
-                  <a:srgbClr val="D4D4D4"/>
-                </a:solidFill>
-                <a:latin typeface="JetBrains Mono" pitchFamily="34" charset="0"/>
-                <a:ea typeface="JetBrains Mono" pitchFamily="34" charset="-122"/>
-                <a:cs typeface="JetBrains Mono" pitchFamily="34" charset="-120"/>
-              </a:rPr>
-              <a:t>}</a:t>
-            </a:r>
-            <a:endParaRPr lang="en-US" sz="900" dirty="0"/>
-          </a:p>
-        </p:txBody>
-      </p:sp>
-      <p:sp>
-        <p:nvSpPr>
-          <p:cNvPr id="23" name="Shape 19"/>
-          <p:cNvSpPr/>
-          <p:nvPr/>
-        </p:nvSpPr>
-        <p:spPr>
-          <a:xfrm>
-            <a:off x="0" y="4814888"/>
-            <a:ext cx="9144000" cy="328613"/>
-          </a:xfrm>
-          <a:prstGeom prst="rect">
-            <a:avLst/>
-          </a:prstGeom>
-          <a:solidFill>
-            <a:srgbClr val="0055FF"/>
-          </a:solidFill>
-          <a:ln/>
-        </p:spPr>
-      </p:sp>
-      <p:sp>
-        <p:nvSpPr>
-          <p:cNvPr id="24" name="Shape 20"/>
-          <p:cNvSpPr/>
-          <p:nvPr/>
-        </p:nvSpPr>
-        <p:spPr>
-          <a:xfrm>
-            <a:off x="0" y="4814888"/>
-            <a:ext cx="9144000" cy="28575"/>
-          </a:xfrm>
-          <a:prstGeom prst="rect">
-            <a:avLst/>
-          </a:prstGeom>
-          <a:solidFill>
-            <a:srgbClr val="111111"/>
-          </a:solidFill>
-          <a:ln/>
-        </p:spPr>
-      </p:sp>
-      <p:sp>
-        <p:nvSpPr>
-          <p:cNvPr id="25" name="Text 21"/>
-          <p:cNvSpPr/>
-          <p:nvPr/>
-        </p:nvSpPr>
-        <p:spPr>
-          <a:xfrm>
-            <a:off x="271463" y="4918472"/>
-            <a:ext cx="1092994" cy="121444"/>
-          </a:xfrm>
-          <a:prstGeom prst="rect">
-            <a:avLst/>
-          </a:prstGeom>
-          <a:noFill/>
-          <a:ln/>
-        </p:spPr>
-        <p:txBody>
-          <a:bodyPr wrap="none" lIns="0" tIns="0" rIns="0" bIns="0" rtlCol="0" anchor="t">
-            <a:spAutoFit/>
-          </a:bodyPr>
-          <a:lstStyle/>
-          <a:p>
-            <a:pPr algn="l" indent="0" marL="0">
-              <a:buNone/>
-            </a:pPr>
-            <a:r>
-              <a:rPr lang="en-US" sz="700" b="1" spc="1" kern="0" dirty="0">
-                <a:solidFill>
-                  <a:srgbClr val="FFFFFF"/>
                 </a:solidFill>
                 <a:latin typeface="Inter Bold" pitchFamily="34" charset="0"/>
                 <a:ea typeface="Inter Bold" pitchFamily="34" charset="-122"/>
                 <a:cs typeface="Inter Bold" pitchFamily="34" charset="-120"/>
               </a:rPr>
-              <a:t>STEP 3: THE TRACE</a:t>
+              <a:t>TRACE ARTIFACT</a:t>
+            </a:r>
+            <a:endParaRPr lang="en-US" sz="600" dirty="0"/>
+          </a:p>
+        </p:txBody>
+      </p:sp>
+      <p:sp>
+        <p:nvSpPr>
+          <p:cNvPr id="23" name="Text 19"/>
+          <p:cNvSpPr/>
+          <p:nvPr/>
+        </p:nvSpPr>
+        <p:spPr>
+          <a:xfrm>
+            <a:off x="3200400" y="1514475"/>
+            <a:ext cx="242888" cy="207169"/>
+          </a:xfrm>
+          <a:prstGeom prst="rect">
+            <a:avLst/>
+          </a:prstGeom>
+          <a:noFill/>
+          <a:ln/>
+        </p:spPr>
+        <p:txBody>
+          <a:bodyPr wrap="square" lIns="0" tIns="0" rIns="76581" bIns="0" rtlCol="0" anchor="t">
+            <a:spAutoFit/>
+          </a:bodyPr>
+          <a:lstStyle/>
+          <a:p>
+            <a:pPr algn="l" indent="0" marL="0">
+              <a:lnSpc>
+                <a:spcPct val="92000"/>
+              </a:lnSpc>
+              <a:buNone/>
+            </a:pPr>
+            <a:r>
+              <a:rPr lang="en-US" sz="550" dirty="0">
+                <a:solidFill>
+                  <a:srgbClr val="707070"/>
+                </a:solidFill>
+                <a:latin typeface="Consolas" pitchFamily="34" charset="0"/>
+                <a:ea typeface="Consolas" pitchFamily="34" charset="-122"/>
+                <a:cs typeface="Consolas" pitchFamily="34" charset="-120"/>
+              </a:rPr>
+              <a:t>1</a:t>
+            </a:r>
+            <a:endParaRPr lang="en-US" sz="550" dirty="0"/>
+          </a:p>
+        </p:txBody>
+      </p:sp>
+      <p:sp>
+        <p:nvSpPr>
+          <p:cNvPr id="24" name="Text 20"/>
+          <p:cNvSpPr/>
+          <p:nvPr/>
+        </p:nvSpPr>
+        <p:spPr>
+          <a:xfrm>
+            <a:off x="3443288" y="1560575"/>
+            <a:ext cx="5300663" cy="114970"/>
+          </a:xfrm>
+          <a:prstGeom prst="rect">
+            <a:avLst/>
+          </a:prstGeom>
+          <a:noFill/>
+          <a:ln/>
+        </p:spPr>
+        <p:txBody>
+          <a:bodyPr wrap="none" lIns="110617" tIns="0" rIns="0" bIns="0" rtlCol="0" anchor="t">
+            <a:spAutoFit/>
+          </a:bodyPr>
+          <a:lstStyle/>
+          <a:p>
+            <a:pPr algn="l" indent="0" marL="0">
+              <a:lnSpc>
+                <a:spcPct val="92000"/>
+              </a:lnSpc>
+              <a:buNone/>
+            </a:pPr>
+            <a:r>
+              <a:rPr lang="en-US" sz="750" dirty="0">
+                <a:solidFill>
+                  <a:srgbClr val="D4D4D4"/>
+                </a:solidFill>
+                <a:latin typeface="Consolas" pitchFamily="34" charset="0"/>
+                <a:ea typeface="Consolas" pitchFamily="34" charset="-122"/>
+                <a:cs typeface="Consolas" pitchFamily="34" charset="-120"/>
+              </a:rPr>
+              <a:t>{</a:t>
+            </a:r>
+            <a:endParaRPr lang="en-US" sz="750" dirty="0"/>
+          </a:p>
+        </p:txBody>
+      </p:sp>
+      <p:sp>
+        <p:nvSpPr>
+          <p:cNvPr id="25" name="Text 21"/>
+          <p:cNvSpPr/>
+          <p:nvPr/>
+        </p:nvSpPr>
+        <p:spPr>
+          <a:xfrm>
+            <a:off x="3200400" y="1728788"/>
+            <a:ext cx="242888" cy="207169"/>
+          </a:xfrm>
+          <a:prstGeom prst="rect">
+            <a:avLst/>
+          </a:prstGeom>
+          <a:noFill/>
+          <a:ln/>
+        </p:spPr>
+        <p:txBody>
+          <a:bodyPr wrap="square" lIns="0" tIns="0" rIns="76581" bIns="0" rtlCol="0" anchor="t">
+            <a:spAutoFit/>
+          </a:bodyPr>
+          <a:lstStyle/>
+          <a:p>
+            <a:pPr algn="l" indent="0" marL="0">
+              <a:lnSpc>
+                <a:spcPct val="92000"/>
+              </a:lnSpc>
+              <a:buNone/>
+            </a:pPr>
+            <a:r>
+              <a:rPr lang="en-US" sz="550" dirty="0">
+                <a:solidFill>
+                  <a:srgbClr val="707070"/>
+                </a:solidFill>
+                <a:latin typeface="Consolas" pitchFamily="34" charset="0"/>
+                <a:ea typeface="Consolas" pitchFamily="34" charset="-122"/>
+                <a:cs typeface="Consolas" pitchFamily="34" charset="-120"/>
+              </a:rPr>
+              <a:t>2</a:t>
+            </a:r>
+            <a:endParaRPr lang="en-US" sz="550" dirty="0"/>
+          </a:p>
+        </p:txBody>
+      </p:sp>
+      <p:sp>
+        <p:nvSpPr>
+          <p:cNvPr id="26" name="Text 22"/>
+          <p:cNvSpPr/>
+          <p:nvPr/>
+        </p:nvSpPr>
+        <p:spPr>
+          <a:xfrm>
+            <a:off x="3443288" y="1774887"/>
+            <a:ext cx="5300663" cy="114970"/>
+          </a:xfrm>
+          <a:prstGeom prst="rect">
+            <a:avLst/>
+          </a:prstGeom>
+          <a:noFill/>
+          <a:ln/>
+        </p:spPr>
+        <p:txBody>
+          <a:bodyPr wrap="none" lIns="323215" tIns="0" rIns="0" bIns="0" rtlCol="0" anchor="t">
+            <a:spAutoFit/>
+          </a:bodyPr>
+          <a:lstStyle/>
+          <a:p>
+            <a:pPr algn="l" indent="0" marL="0">
+              <a:lnSpc>
+                <a:spcPct val="92000"/>
+              </a:lnSpc>
+              <a:buNone/>
+            </a:pPr>
+            <a:r>
+              <a:rPr lang="en-US" sz="750" dirty="0">
+                <a:solidFill>
+                  <a:srgbClr val="9CDCFE"/>
+                </a:solidFill>
+                <a:latin typeface="Consolas" pitchFamily="34" charset="0"/>
+                <a:ea typeface="Consolas" pitchFamily="34" charset="-122"/>
+                <a:cs typeface="Consolas" pitchFamily="34" charset="-120"/>
+              </a:rPr>
+              <a:t>"step_id"</a:t>
+            </a:r>
+            <a:r>
+              <a:rPr lang="en-US" sz="750" dirty="0">
+                <a:solidFill>
+                  <a:srgbClr val="D4D4D4"/>
+                </a:solidFill>
+                <a:latin typeface="Consolas" pitchFamily="34" charset="0"/>
+                <a:ea typeface="Consolas" pitchFamily="34" charset="-122"/>
+                <a:cs typeface="Consolas" pitchFamily="34" charset="-120"/>
+              </a:rPr>
+              <a:t>: </a:t>
+            </a:r>
+            <a:r>
+              <a:rPr lang="en-US" sz="750" dirty="0">
+                <a:solidFill>
+                  <a:srgbClr val="CE9178"/>
+                </a:solidFill>
+                <a:latin typeface="Consolas" pitchFamily="34" charset="0"/>
+                <a:ea typeface="Consolas" pitchFamily="34" charset="-122"/>
+                <a:cs typeface="Consolas" pitchFamily="34" charset="-120"/>
+              </a:rPr>
+              <a:t>"S04"</a:t>
+            </a:r>
+            <a:r>
+              <a:rPr lang="en-US" sz="750" dirty="0">
+                <a:solidFill>
+                  <a:srgbClr val="D4D4D4"/>
+                </a:solidFill>
+                <a:latin typeface="Consolas" pitchFamily="34" charset="0"/>
+                <a:ea typeface="Consolas" pitchFamily="34" charset="-122"/>
+                <a:cs typeface="Consolas" pitchFamily="34" charset="-120"/>
+              </a:rPr>
+              <a:t>,</a:t>
+            </a:r>
+            <a:endParaRPr lang="en-US" sz="750" dirty="0"/>
+          </a:p>
+        </p:txBody>
+      </p:sp>
+      <p:sp>
+        <p:nvSpPr>
+          <p:cNvPr id="27" name="Text 23"/>
+          <p:cNvSpPr/>
+          <p:nvPr/>
+        </p:nvSpPr>
+        <p:spPr>
+          <a:xfrm>
+            <a:off x="3200400" y="1943100"/>
+            <a:ext cx="242888" cy="207169"/>
+          </a:xfrm>
+          <a:prstGeom prst="rect">
+            <a:avLst/>
+          </a:prstGeom>
+          <a:noFill/>
+          <a:ln/>
+        </p:spPr>
+        <p:txBody>
+          <a:bodyPr wrap="square" lIns="0" tIns="0" rIns="76581" bIns="0" rtlCol="0" anchor="t">
+            <a:spAutoFit/>
+          </a:bodyPr>
+          <a:lstStyle/>
+          <a:p>
+            <a:pPr algn="l" indent="0" marL="0">
+              <a:lnSpc>
+                <a:spcPct val="92000"/>
+              </a:lnSpc>
+              <a:buNone/>
+            </a:pPr>
+            <a:r>
+              <a:rPr lang="en-US" sz="550" dirty="0">
+                <a:solidFill>
+                  <a:srgbClr val="707070"/>
+                </a:solidFill>
+                <a:latin typeface="Consolas" pitchFamily="34" charset="0"/>
+                <a:ea typeface="Consolas" pitchFamily="34" charset="-122"/>
+                <a:cs typeface="Consolas" pitchFamily="34" charset="-120"/>
+              </a:rPr>
+              <a:t>3</a:t>
+            </a:r>
+            <a:endParaRPr lang="en-US" sz="550" dirty="0"/>
+          </a:p>
+        </p:txBody>
+      </p:sp>
+      <p:sp>
+        <p:nvSpPr>
+          <p:cNvPr id="28" name="Text 24"/>
+          <p:cNvSpPr/>
+          <p:nvPr/>
+        </p:nvSpPr>
+        <p:spPr>
+          <a:xfrm>
+            <a:off x="3443288" y="1989200"/>
+            <a:ext cx="5300663" cy="114970"/>
+          </a:xfrm>
+          <a:prstGeom prst="rect">
+            <a:avLst/>
+          </a:prstGeom>
+          <a:noFill/>
+          <a:ln/>
+        </p:spPr>
+        <p:txBody>
+          <a:bodyPr wrap="none" lIns="323215" tIns="0" rIns="0" bIns="0" rtlCol="0" anchor="t">
+            <a:spAutoFit/>
+          </a:bodyPr>
+          <a:lstStyle/>
+          <a:p>
+            <a:pPr algn="l" indent="0" marL="0">
+              <a:lnSpc>
+                <a:spcPct val="92000"/>
+              </a:lnSpc>
+              <a:buNone/>
+            </a:pPr>
+            <a:r>
+              <a:rPr lang="en-US" sz="750" dirty="0">
+                <a:solidFill>
+                  <a:srgbClr val="9CDCFE"/>
+                </a:solidFill>
+                <a:latin typeface="Consolas" pitchFamily="34" charset="0"/>
+                <a:ea typeface="Consolas" pitchFamily="34" charset="-122"/>
+                <a:cs typeface="Consolas" pitchFamily="34" charset="-120"/>
+              </a:rPr>
+              <a:t>"command"</a:t>
+            </a:r>
+            <a:r>
+              <a:rPr lang="en-US" sz="750" dirty="0">
+                <a:solidFill>
+                  <a:srgbClr val="D4D4D4"/>
+                </a:solidFill>
+                <a:latin typeface="Consolas" pitchFamily="34" charset="0"/>
+                <a:ea typeface="Consolas" pitchFamily="34" charset="-122"/>
+                <a:cs typeface="Consolas" pitchFamily="34" charset="-120"/>
+              </a:rPr>
+              <a:t>: </a:t>
+            </a:r>
+            <a:r>
+              <a:rPr lang="en-US" sz="750" dirty="0">
+                <a:solidFill>
+                  <a:srgbClr val="CE9178"/>
+                </a:solidFill>
+                <a:latin typeface="Consolas" pitchFamily="34" charset="0"/>
+                <a:ea typeface="Consolas" pitchFamily="34" charset="-122"/>
+                <a:cs typeface="Consolas" pitchFamily="34" charset="-120"/>
+              </a:rPr>
+              <a:t>"PROC LOGISTIC"</a:t>
+            </a:r>
+            <a:r>
+              <a:rPr lang="en-US" sz="750" dirty="0">
+                <a:solidFill>
+                  <a:srgbClr val="D4D4D4"/>
+                </a:solidFill>
+                <a:latin typeface="Consolas" pitchFamily="34" charset="0"/>
+                <a:ea typeface="Consolas" pitchFamily="34" charset="-122"/>
+                <a:cs typeface="Consolas" pitchFamily="34" charset="-120"/>
+              </a:rPr>
+              <a:t>,</a:t>
+            </a:r>
+            <a:endParaRPr lang="en-US" sz="750" dirty="0"/>
+          </a:p>
+        </p:txBody>
+      </p:sp>
+      <p:sp>
+        <p:nvSpPr>
+          <p:cNvPr id="29" name="Text 25"/>
+          <p:cNvSpPr/>
+          <p:nvPr/>
+        </p:nvSpPr>
+        <p:spPr>
+          <a:xfrm>
+            <a:off x="3200400" y="2157413"/>
+            <a:ext cx="242888" cy="207169"/>
+          </a:xfrm>
+          <a:prstGeom prst="rect">
+            <a:avLst/>
+          </a:prstGeom>
+          <a:noFill/>
+          <a:ln/>
+        </p:spPr>
+        <p:txBody>
+          <a:bodyPr wrap="square" lIns="0" tIns="0" rIns="76581" bIns="0" rtlCol="0" anchor="t">
+            <a:spAutoFit/>
+          </a:bodyPr>
+          <a:lstStyle/>
+          <a:p>
+            <a:pPr algn="l" indent="0" marL="0">
+              <a:lnSpc>
+                <a:spcPct val="92000"/>
+              </a:lnSpc>
+              <a:buNone/>
+            </a:pPr>
+            <a:r>
+              <a:rPr lang="en-US" sz="550" dirty="0">
+                <a:solidFill>
+                  <a:srgbClr val="707070"/>
+                </a:solidFill>
+                <a:latin typeface="Consolas" pitchFamily="34" charset="0"/>
+                <a:ea typeface="Consolas" pitchFamily="34" charset="-122"/>
+                <a:cs typeface="Consolas" pitchFamily="34" charset="-120"/>
+              </a:rPr>
+              <a:t>4</a:t>
+            </a:r>
+            <a:endParaRPr lang="en-US" sz="550" dirty="0"/>
+          </a:p>
+        </p:txBody>
+      </p:sp>
+      <p:sp>
+        <p:nvSpPr>
+          <p:cNvPr id="30" name="Text 26"/>
+          <p:cNvSpPr/>
+          <p:nvPr/>
+        </p:nvSpPr>
+        <p:spPr>
+          <a:xfrm>
+            <a:off x="3443288" y="2203512"/>
+            <a:ext cx="5300663" cy="114970"/>
+          </a:xfrm>
+          <a:prstGeom prst="rect">
+            <a:avLst/>
+          </a:prstGeom>
+          <a:noFill/>
+          <a:ln/>
+        </p:spPr>
+        <p:txBody>
+          <a:bodyPr wrap="none" lIns="323215" tIns="0" rIns="0" bIns="0" rtlCol="0" anchor="t">
+            <a:spAutoFit/>
+          </a:bodyPr>
+          <a:lstStyle/>
+          <a:p>
+            <a:pPr algn="l" indent="0" marL="0">
+              <a:lnSpc>
+                <a:spcPct val="92000"/>
+              </a:lnSpc>
+              <a:buNone/>
+            </a:pPr>
+            <a:r>
+              <a:rPr lang="en-US" sz="750" dirty="0">
+                <a:solidFill>
+                  <a:srgbClr val="9CDCFE"/>
+                </a:solidFill>
+                <a:latin typeface="Consolas" pitchFamily="34" charset="0"/>
+                <a:ea typeface="Consolas" pitchFamily="34" charset="-122"/>
+                <a:cs typeface="Consolas" pitchFamily="34" charset="-120"/>
+              </a:rPr>
+              <a:t>"inputs"</a:t>
+            </a:r>
+            <a:r>
+              <a:rPr lang="en-US" sz="750" dirty="0">
+                <a:solidFill>
+                  <a:srgbClr val="D4D4D4"/>
+                </a:solidFill>
+                <a:latin typeface="Consolas" pitchFamily="34" charset="0"/>
+                <a:ea typeface="Consolas" pitchFamily="34" charset="-122"/>
+                <a:cs typeface="Consolas" pitchFamily="34" charset="-120"/>
+              </a:rPr>
+              <a:t>: [</a:t>
+            </a:r>
+            <a:r>
+              <a:rPr lang="en-US" sz="750" dirty="0">
+                <a:solidFill>
+                  <a:srgbClr val="CE9178"/>
+                </a:solidFill>
+                <a:latin typeface="Consolas" pitchFamily="34" charset="0"/>
+                <a:ea typeface="Consolas" pitchFamily="34" charset="-122"/>
+                <a:cs typeface="Consolas" pitchFamily="34" charset="-120"/>
+              </a:rPr>
+              <a:t>"WORK.TRAIN_DATA"</a:t>
+            </a:r>
+            <a:r>
+              <a:rPr lang="en-US" sz="750" dirty="0">
+                <a:solidFill>
+                  <a:srgbClr val="D4D4D4"/>
+                </a:solidFill>
+                <a:latin typeface="Consolas" pitchFamily="34" charset="0"/>
+                <a:ea typeface="Consolas" pitchFamily="34" charset="-122"/>
+                <a:cs typeface="Consolas" pitchFamily="34" charset="-120"/>
+              </a:rPr>
+              <a:t>],</a:t>
+            </a:r>
+            <a:endParaRPr lang="en-US" sz="750" dirty="0"/>
+          </a:p>
+        </p:txBody>
+      </p:sp>
+      <p:sp>
+        <p:nvSpPr>
+          <p:cNvPr id="31" name="Text 27"/>
+          <p:cNvSpPr/>
+          <p:nvPr/>
+        </p:nvSpPr>
+        <p:spPr>
+          <a:xfrm>
+            <a:off x="3200400" y="2371725"/>
+            <a:ext cx="242888" cy="207169"/>
+          </a:xfrm>
+          <a:prstGeom prst="rect">
+            <a:avLst/>
+          </a:prstGeom>
+          <a:noFill/>
+          <a:ln/>
+        </p:spPr>
+        <p:txBody>
+          <a:bodyPr wrap="square" lIns="0" tIns="0" rIns="76581" bIns="0" rtlCol="0" anchor="t">
+            <a:spAutoFit/>
+          </a:bodyPr>
+          <a:lstStyle/>
+          <a:p>
+            <a:pPr algn="l" indent="0" marL="0">
+              <a:lnSpc>
+                <a:spcPct val="92000"/>
+              </a:lnSpc>
+              <a:buNone/>
+            </a:pPr>
+            <a:r>
+              <a:rPr lang="en-US" sz="550" dirty="0">
+                <a:solidFill>
+                  <a:srgbClr val="707070"/>
+                </a:solidFill>
+                <a:latin typeface="Consolas" pitchFamily="34" charset="0"/>
+                <a:ea typeface="Consolas" pitchFamily="34" charset="-122"/>
+                <a:cs typeface="Consolas" pitchFamily="34" charset="-120"/>
+              </a:rPr>
+              <a:t>5</a:t>
+            </a:r>
+            <a:endParaRPr lang="en-US" sz="550" dirty="0"/>
+          </a:p>
+        </p:txBody>
+      </p:sp>
+      <p:sp>
+        <p:nvSpPr>
+          <p:cNvPr id="32" name="Text 28"/>
+          <p:cNvSpPr/>
+          <p:nvPr/>
+        </p:nvSpPr>
+        <p:spPr>
+          <a:xfrm>
+            <a:off x="3443288" y="2417825"/>
+            <a:ext cx="5300663" cy="114970"/>
+          </a:xfrm>
+          <a:prstGeom prst="rect">
+            <a:avLst/>
+          </a:prstGeom>
+          <a:noFill/>
+          <a:ln/>
+        </p:spPr>
+        <p:txBody>
+          <a:bodyPr wrap="none" lIns="323215" tIns="0" rIns="0" bIns="0" rtlCol="0" anchor="t">
+            <a:spAutoFit/>
+          </a:bodyPr>
+          <a:lstStyle/>
+          <a:p>
+            <a:pPr algn="l" indent="0" marL="0">
+              <a:lnSpc>
+                <a:spcPct val="92000"/>
+              </a:lnSpc>
+              <a:buNone/>
+            </a:pPr>
+            <a:r>
+              <a:rPr lang="en-US" sz="750" dirty="0">
+                <a:solidFill>
+                  <a:srgbClr val="9CDCFE"/>
+                </a:solidFill>
+                <a:latin typeface="Consolas" pitchFamily="34" charset="0"/>
+                <a:ea typeface="Consolas" pitchFamily="34" charset="-122"/>
+                <a:cs typeface="Consolas" pitchFamily="34" charset="-120"/>
+              </a:rPr>
+              <a:t>"outputs"</a:t>
+            </a:r>
+            <a:r>
+              <a:rPr lang="en-US" sz="750" dirty="0">
+                <a:solidFill>
+                  <a:srgbClr val="D4D4D4"/>
+                </a:solidFill>
+                <a:latin typeface="Consolas" pitchFamily="34" charset="0"/>
+                <a:ea typeface="Consolas" pitchFamily="34" charset="-122"/>
+                <a:cs typeface="Consolas" pitchFamily="34" charset="-120"/>
+              </a:rPr>
+              <a:t>: {</a:t>
+            </a:r>
+            <a:endParaRPr lang="en-US" sz="750" dirty="0"/>
+          </a:p>
+        </p:txBody>
+      </p:sp>
+      <p:sp>
+        <p:nvSpPr>
+          <p:cNvPr id="33" name="Text 29"/>
+          <p:cNvSpPr/>
+          <p:nvPr/>
+        </p:nvSpPr>
+        <p:spPr>
+          <a:xfrm>
+            <a:off x="3200400" y="2586038"/>
+            <a:ext cx="242888" cy="207169"/>
+          </a:xfrm>
+          <a:prstGeom prst="rect">
+            <a:avLst/>
+          </a:prstGeom>
+          <a:noFill/>
+          <a:ln/>
+        </p:spPr>
+        <p:txBody>
+          <a:bodyPr wrap="square" lIns="0" tIns="0" rIns="76581" bIns="0" rtlCol="0" anchor="t">
+            <a:spAutoFit/>
+          </a:bodyPr>
+          <a:lstStyle/>
+          <a:p>
+            <a:pPr algn="l" indent="0" marL="0">
+              <a:lnSpc>
+                <a:spcPct val="92000"/>
+              </a:lnSpc>
+              <a:buNone/>
+            </a:pPr>
+            <a:r>
+              <a:rPr lang="en-US" sz="550" dirty="0">
+                <a:solidFill>
+                  <a:srgbClr val="707070"/>
+                </a:solidFill>
+                <a:latin typeface="Consolas" pitchFamily="34" charset="0"/>
+                <a:ea typeface="Consolas" pitchFamily="34" charset="-122"/>
+                <a:cs typeface="Consolas" pitchFamily="34" charset="-120"/>
+              </a:rPr>
+              <a:t>6</a:t>
+            </a:r>
+            <a:endParaRPr lang="en-US" sz="550" dirty="0"/>
+          </a:p>
+        </p:txBody>
+      </p:sp>
+      <p:sp>
+        <p:nvSpPr>
+          <p:cNvPr id="34" name="Text 30"/>
+          <p:cNvSpPr/>
+          <p:nvPr/>
+        </p:nvSpPr>
+        <p:spPr>
+          <a:xfrm>
+            <a:off x="3443288" y="2632137"/>
+            <a:ext cx="5300663" cy="114970"/>
+          </a:xfrm>
+          <a:prstGeom prst="rect">
+            <a:avLst/>
+          </a:prstGeom>
+          <a:noFill/>
+          <a:ln/>
+        </p:spPr>
+        <p:txBody>
+          <a:bodyPr wrap="none" lIns="544322" tIns="0" rIns="0" bIns="0" rtlCol="0" anchor="t">
+            <a:spAutoFit/>
+          </a:bodyPr>
+          <a:lstStyle/>
+          <a:p>
+            <a:pPr algn="l" indent="0" marL="0">
+              <a:lnSpc>
+                <a:spcPct val="92000"/>
+              </a:lnSpc>
+              <a:buNone/>
+            </a:pPr>
+            <a:r>
+              <a:rPr lang="en-US" sz="750" dirty="0">
+                <a:solidFill>
+                  <a:srgbClr val="9CDCFE"/>
+                </a:solidFill>
+                <a:latin typeface="Consolas" pitchFamily="34" charset="0"/>
+                <a:ea typeface="Consolas" pitchFamily="34" charset="-122"/>
+                <a:cs typeface="Consolas" pitchFamily="34" charset="-120"/>
+              </a:rPr>
+              <a:t>"model_store"</a:t>
+            </a:r>
+            <a:r>
+              <a:rPr lang="en-US" sz="750" dirty="0">
+                <a:solidFill>
+                  <a:srgbClr val="D4D4D4"/>
+                </a:solidFill>
+                <a:latin typeface="Consolas" pitchFamily="34" charset="0"/>
+                <a:ea typeface="Consolas" pitchFamily="34" charset="-122"/>
+                <a:cs typeface="Consolas" pitchFamily="34" charset="-120"/>
+              </a:rPr>
+              <a:t>: </a:t>
+            </a:r>
+            <a:r>
+              <a:rPr lang="en-US" sz="750" dirty="0">
+                <a:solidFill>
+                  <a:srgbClr val="CE9178"/>
+                </a:solidFill>
+                <a:latin typeface="Consolas" pitchFamily="34" charset="0"/>
+                <a:ea typeface="Consolas" pitchFamily="34" charset="-122"/>
+                <a:cs typeface="Consolas" pitchFamily="34" charset="-120"/>
+              </a:rPr>
+              <a:t>"WORK.LC_LOGIT_01"</a:t>
+            </a:r>
+            <a:r>
+              <a:rPr lang="en-US" sz="750" dirty="0">
+                <a:solidFill>
+                  <a:srgbClr val="D4D4D4"/>
+                </a:solidFill>
+                <a:latin typeface="Consolas" pitchFamily="34" charset="0"/>
+                <a:ea typeface="Consolas" pitchFamily="34" charset="-122"/>
+                <a:cs typeface="Consolas" pitchFamily="34" charset="-120"/>
+              </a:rPr>
+              <a:t>,</a:t>
+            </a:r>
+            <a:endParaRPr lang="en-US" sz="750" dirty="0"/>
+          </a:p>
+        </p:txBody>
+      </p:sp>
+      <p:sp>
+        <p:nvSpPr>
+          <p:cNvPr id="35" name="Text 31"/>
+          <p:cNvSpPr/>
+          <p:nvPr/>
+        </p:nvSpPr>
+        <p:spPr>
+          <a:xfrm>
+            <a:off x="3200400" y="2800350"/>
+            <a:ext cx="242888" cy="207169"/>
+          </a:xfrm>
+          <a:prstGeom prst="rect">
+            <a:avLst/>
+          </a:prstGeom>
+          <a:noFill/>
+          <a:ln/>
+        </p:spPr>
+        <p:txBody>
+          <a:bodyPr wrap="square" lIns="0" tIns="0" rIns="76581" bIns="0" rtlCol="0" anchor="t">
+            <a:spAutoFit/>
+          </a:bodyPr>
+          <a:lstStyle/>
+          <a:p>
+            <a:pPr algn="l" indent="0" marL="0">
+              <a:lnSpc>
+                <a:spcPct val="92000"/>
+              </a:lnSpc>
+              <a:buNone/>
+            </a:pPr>
+            <a:r>
+              <a:rPr lang="en-US" sz="550" dirty="0">
+                <a:solidFill>
+                  <a:srgbClr val="707070"/>
+                </a:solidFill>
+                <a:latin typeface="Consolas" pitchFamily="34" charset="0"/>
+                <a:ea typeface="Consolas" pitchFamily="34" charset="-122"/>
+                <a:cs typeface="Consolas" pitchFamily="34" charset="-120"/>
+              </a:rPr>
+              <a:t>7</a:t>
+            </a:r>
+            <a:endParaRPr lang="en-US" sz="550" dirty="0"/>
+          </a:p>
+        </p:txBody>
+      </p:sp>
+      <p:sp>
+        <p:nvSpPr>
+          <p:cNvPr id="36" name="Text 32"/>
+          <p:cNvSpPr/>
+          <p:nvPr/>
+        </p:nvSpPr>
+        <p:spPr>
+          <a:xfrm>
+            <a:off x="3443288" y="2846450"/>
+            <a:ext cx="5300663" cy="114970"/>
+          </a:xfrm>
+          <a:prstGeom prst="rect">
+            <a:avLst/>
+          </a:prstGeom>
+          <a:noFill/>
+          <a:ln/>
+        </p:spPr>
+        <p:txBody>
+          <a:bodyPr wrap="none" lIns="544322" tIns="0" rIns="0" bIns="0" rtlCol="0" anchor="t">
+            <a:spAutoFit/>
+          </a:bodyPr>
+          <a:lstStyle/>
+          <a:p>
+            <a:pPr algn="l" indent="0" marL="0">
+              <a:lnSpc>
+                <a:spcPct val="92000"/>
+              </a:lnSpc>
+              <a:buNone/>
+            </a:pPr>
+            <a:r>
+              <a:rPr lang="en-US" sz="750" dirty="0">
+                <a:solidFill>
+                  <a:srgbClr val="9CDCFE"/>
+                </a:solidFill>
+                <a:latin typeface="Consolas" pitchFamily="34" charset="0"/>
+                <a:ea typeface="Consolas" pitchFamily="34" charset="-122"/>
+                <a:cs typeface="Consolas" pitchFamily="34" charset="-120"/>
+              </a:rPr>
+              <a:t>"target"</a:t>
+            </a:r>
+            <a:r>
+              <a:rPr lang="en-US" sz="750" dirty="0">
+                <a:solidFill>
+                  <a:srgbClr val="D4D4D4"/>
+                </a:solidFill>
+                <a:latin typeface="Consolas" pitchFamily="34" charset="0"/>
+                <a:ea typeface="Consolas" pitchFamily="34" charset="-122"/>
+                <a:cs typeface="Consolas" pitchFamily="34" charset="-120"/>
+              </a:rPr>
+              <a:t>: </a:t>
+            </a:r>
+            <a:r>
+              <a:rPr lang="en-US" sz="750" dirty="0">
+                <a:solidFill>
+                  <a:srgbClr val="CE9178"/>
+                </a:solidFill>
+                <a:latin typeface="Consolas" pitchFamily="34" charset="0"/>
+                <a:ea typeface="Consolas" pitchFamily="34" charset="-122"/>
+                <a:cs typeface="Consolas" pitchFamily="34" charset="-120"/>
+              </a:rPr>
+              <a:t>"Default (Event='1')"</a:t>
+            </a:r>
+            <a:endParaRPr lang="en-US" sz="750" dirty="0"/>
+          </a:p>
+        </p:txBody>
+      </p:sp>
+      <p:sp>
+        <p:nvSpPr>
+          <p:cNvPr id="37" name="Text 33"/>
+          <p:cNvSpPr/>
+          <p:nvPr/>
+        </p:nvSpPr>
+        <p:spPr>
+          <a:xfrm>
+            <a:off x="3200400" y="3014663"/>
+            <a:ext cx="242888" cy="207169"/>
+          </a:xfrm>
+          <a:prstGeom prst="rect">
+            <a:avLst/>
+          </a:prstGeom>
+          <a:noFill/>
+          <a:ln/>
+        </p:spPr>
+        <p:txBody>
+          <a:bodyPr wrap="square" lIns="0" tIns="0" rIns="76581" bIns="0" rtlCol="0" anchor="t">
+            <a:spAutoFit/>
+          </a:bodyPr>
+          <a:lstStyle/>
+          <a:p>
+            <a:pPr algn="l" indent="0" marL="0">
+              <a:lnSpc>
+                <a:spcPct val="92000"/>
+              </a:lnSpc>
+              <a:buNone/>
+            </a:pPr>
+            <a:r>
+              <a:rPr lang="en-US" sz="550" dirty="0">
+                <a:solidFill>
+                  <a:srgbClr val="707070"/>
+                </a:solidFill>
+                <a:latin typeface="Consolas" pitchFamily="34" charset="0"/>
+                <a:ea typeface="Consolas" pitchFamily="34" charset="-122"/>
+                <a:cs typeface="Consolas" pitchFamily="34" charset="-120"/>
+              </a:rPr>
+              <a:t>8</a:t>
+            </a:r>
+            <a:endParaRPr lang="en-US" sz="550" dirty="0"/>
+          </a:p>
+        </p:txBody>
+      </p:sp>
+      <p:sp>
+        <p:nvSpPr>
+          <p:cNvPr id="38" name="Text 34"/>
+          <p:cNvSpPr/>
+          <p:nvPr/>
+        </p:nvSpPr>
+        <p:spPr>
+          <a:xfrm>
+            <a:off x="3443288" y="3060762"/>
+            <a:ext cx="5300663" cy="114970"/>
+          </a:xfrm>
+          <a:prstGeom prst="rect">
+            <a:avLst/>
+          </a:prstGeom>
+          <a:noFill/>
+          <a:ln/>
+        </p:spPr>
+        <p:txBody>
+          <a:bodyPr wrap="none" lIns="323215" tIns="0" rIns="0" bIns="0" rtlCol="0" anchor="t">
+            <a:spAutoFit/>
+          </a:bodyPr>
+          <a:lstStyle/>
+          <a:p>
+            <a:pPr algn="l" indent="0" marL="0">
+              <a:lnSpc>
+                <a:spcPct val="92000"/>
+              </a:lnSpc>
+              <a:buNone/>
+            </a:pPr>
+            <a:r>
+              <a:rPr lang="en-US" sz="750" dirty="0">
+                <a:solidFill>
+                  <a:srgbClr val="D4D4D4"/>
+                </a:solidFill>
+                <a:latin typeface="Consolas" pitchFamily="34" charset="0"/>
+                <a:ea typeface="Consolas" pitchFamily="34" charset="-122"/>
+                <a:cs typeface="Consolas" pitchFamily="34" charset="-120"/>
+              </a:rPr>
+              <a:t>},</a:t>
+            </a:r>
+            <a:endParaRPr lang="en-US" sz="750" dirty="0"/>
+          </a:p>
+        </p:txBody>
+      </p:sp>
+      <p:sp>
+        <p:nvSpPr>
+          <p:cNvPr id="39" name="Text 35"/>
+          <p:cNvSpPr/>
+          <p:nvPr/>
+        </p:nvSpPr>
+        <p:spPr>
+          <a:xfrm>
+            <a:off x="3200400" y="3228975"/>
+            <a:ext cx="242888" cy="207169"/>
+          </a:xfrm>
+          <a:prstGeom prst="rect">
+            <a:avLst/>
+          </a:prstGeom>
+          <a:noFill/>
+          <a:ln/>
+        </p:spPr>
+        <p:txBody>
+          <a:bodyPr wrap="square" lIns="0" tIns="0" rIns="76581" bIns="0" rtlCol="0" anchor="t">
+            <a:spAutoFit/>
+          </a:bodyPr>
+          <a:lstStyle/>
+          <a:p>
+            <a:pPr algn="l" indent="0" marL="0">
+              <a:lnSpc>
+                <a:spcPct val="92000"/>
+              </a:lnSpc>
+              <a:buNone/>
+            </a:pPr>
+            <a:r>
+              <a:rPr lang="en-US" sz="550" dirty="0">
+                <a:solidFill>
+                  <a:srgbClr val="707070"/>
+                </a:solidFill>
+                <a:latin typeface="Consolas" pitchFamily="34" charset="0"/>
+                <a:ea typeface="Consolas" pitchFamily="34" charset="-122"/>
+                <a:cs typeface="Consolas" pitchFamily="34" charset="-120"/>
+              </a:rPr>
+              <a:t>9</a:t>
+            </a:r>
+            <a:endParaRPr lang="en-US" sz="550" dirty="0"/>
+          </a:p>
+        </p:txBody>
+      </p:sp>
+      <p:sp>
+        <p:nvSpPr>
+          <p:cNvPr id="40" name="Text 36"/>
+          <p:cNvSpPr/>
+          <p:nvPr/>
+        </p:nvSpPr>
+        <p:spPr>
+          <a:xfrm>
+            <a:off x="3443288" y="3275075"/>
+            <a:ext cx="5300663" cy="114970"/>
+          </a:xfrm>
+          <a:prstGeom prst="rect">
+            <a:avLst/>
+          </a:prstGeom>
+          <a:noFill/>
+          <a:ln/>
+        </p:spPr>
+        <p:txBody>
+          <a:bodyPr wrap="none" lIns="323215" tIns="0" rIns="0" bIns="0" rtlCol="0" anchor="t">
+            <a:spAutoFit/>
+          </a:bodyPr>
+          <a:lstStyle/>
+          <a:p>
+            <a:pPr algn="l" indent="0" marL="0">
+              <a:lnSpc>
+                <a:spcPct val="92000"/>
+              </a:lnSpc>
+              <a:buNone/>
+            </a:pPr>
+            <a:r>
+              <a:rPr lang="en-US" sz="750" dirty="0">
+                <a:solidFill>
+                  <a:srgbClr val="9CDCFE"/>
+                </a:solidFill>
+                <a:latin typeface="Consolas" pitchFamily="34" charset="0"/>
+                <a:ea typeface="Consolas" pitchFamily="34" charset="-122"/>
+                <a:cs typeface="Consolas" pitchFamily="34" charset="-120"/>
+              </a:rPr>
+              <a:t>"log_evidence"</a:t>
+            </a:r>
+            <a:r>
+              <a:rPr lang="en-US" sz="750" dirty="0">
+                <a:solidFill>
+                  <a:srgbClr val="D4D4D4"/>
+                </a:solidFill>
+                <a:latin typeface="Consolas" pitchFamily="34" charset="0"/>
+                <a:ea typeface="Consolas" pitchFamily="34" charset="-122"/>
+                <a:cs typeface="Consolas" pitchFamily="34" charset="-120"/>
+              </a:rPr>
+              <a:t>: {</a:t>
+            </a:r>
+            <a:endParaRPr lang="en-US" sz="750" dirty="0"/>
+          </a:p>
+        </p:txBody>
+      </p:sp>
+      <p:sp>
+        <p:nvSpPr>
+          <p:cNvPr id="41" name="Text 37"/>
+          <p:cNvSpPr/>
+          <p:nvPr/>
+        </p:nvSpPr>
+        <p:spPr>
+          <a:xfrm>
+            <a:off x="3200400" y="3443288"/>
+            <a:ext cx="242888" cy="207169"/>
+          </a:xfrm>
+          <a:prstGeom prst="rect">
+            <a:avLst/>
+          </a:prstGeom>
+          <a:noFill/>
+          <a:ln/>
+        </p:spPr>
+        <p:txBody>
+          <a:bodyPr wrap="square" lIns="0" tIns="0" rIns="76581" bIns="0" rtlCol="0" anchor="t">
+            <a:spAutoFit/>
+          </a:bodyPr>
+          <a:lstStyle/>
+          <a:p>
+            <a:pPr algn="l" indent="0" marL="0">
+              <a:lnSpc>
+                <a:spcPct val="92000"/>
+              </a:lnSpc>
+              <a:buNone/>
+            </a:pPr>
+            <a:r>
+              <a:rPr lang="en-US" sz="550" dirty="0">
+                <a:solidFill>
+                  <a:srgbClr val="707070"/>
+                </a:solidFill>
+                <a:latin typeface="Consolas" pitchFamily="34" charset="0"/>
+                <a:ea typeface="Consolas" pitchFamily="34" charset="-122"/>
+                <a:cs typeface="Consolas" pitchFamily="34" charset="-120"/>
+              </a:rPr>
+              <a:t>10</a:t>
+            </a:r>
+            <a:endParaRPr lang="en-US" sz="550" dirty="0"/>
+          </a:p>
+        </p:txBody>
+      </p:sp>
+      <p:sp>
+        <p:nvSpPr>
+          <p:cNvPr id="42" name="Text 38"/>
+          <p:cNvSpPr/>
+          <p:nvPr/>
+        </p:nvSpPr>
+        <p:spPr>
+          <a:xfrm>
+            <a:off x="3443288" y="3489387"/>
+            <a:ext cx="5300663" cy="114970"/>
+          </a:xfrm>
+          <a:prstGeom prst="rect">
+            <a:avLst/>
+          </a:prstGeom>
+          <a:noFill/>
+          <a:ln/>
+        </p:spPr>
+        <p:txBody>
+          <a:bodyPr wrap="none" lIns="544322" tIns="0" rIns="0" bIns="0" rtlCol="0" anchor="t">
+            <a:spAutoFit/>
+          </a:bodyPr>
+          <a:lstStyle/>
+          <a:p>
+            <a:pPr algn="l" indent="0" marL="0">
+              <a:lnSpc>
+                <a:spcPct val="92000"/>
+              </a:lnSpc>
+              <a:buNone/>
+            </a:pPr>
+            <a:r>
+              <a:rPr lang="en-US" sz="750" dirty="0">
+                <a:solidFill>
+                  <a:srgbClr val="9CDCFE"/>
+                </a:solidFill>
+                <a:latin typeface="Consolas" pitchFamily="34" charset="0"/>
+                <a:ea typeface="Consolas" pitchFamily="34" charset="-122"/>
+                <a:cs typeface="Consolas" pitchFamily="34" charset="-120"/>
+              </a:rPr>
+              <a:t>"observations_read"</a:t>
+            </a:r>
+            <a:r>
+              <a:rPr lang="en-US" sz="750" dirty="0">
+                <a:solidFill>
+                  <a:srgbClr val="D4D4D4"/>
+                </a:solidFill>
+                <a:latin typeface="Consolas" pitchFamily="34" charset="0"/>
+                <a:ea typeface="Consolas" pitchFamily="34" charset="-122"/>
+                <a:cs typeface="Consolas" pitchFamily="34" charset="-120"/>
+              </a:rPr>
+              <a:t>: </a:t>
+            </a:r>
+            <a:r>
+              <a:rPr lang="en-US" sz="750" dirty="0">
+                <a:solidFill>
+                  <a:srgbClr val="CE9178"/>
+                </a:solidFill>
+                <a:latin typeface="Consolas" pitchFamily="34" charset="0"/>
+                <a:ea typeface="Consolas" pitchFamily="34" charset="-122"/>
+                <a:cs typeface="Consolas" pitchFamily="34" charset="-120"/>
+              </a:rPr>
+              <a:t>"1265975"</a:t>
+            </a:r>
+            <a:r>
+              <a:rPr lang="en-US" sz="750" dirty="0">
+                <a:solidFill>
+                  <a:srgbClr val="D4D4D4"/>
+                </a:solidFill>
+                <a:latin typeface="Consolas" pitchFamily="34" charset="0"/>
+                <a:ea typeface="Consolas" pitchFamily="34" charset="-122"/>
+                <a:cs typeface="Consolas" pitchFamily="34" charset="-120"/>
+              </a:rPr>
+              <a:t>,</a:t>
+            </a:r>
+            <a:endParaRPr lang="en-US" sz="750" dirty="0"/>
+          </a:p>
+        </p:txBody>
+      </p:sp>
+      <p:sp>
+        <p:nvSpPr>
+          <p:cNvPr id="43" name="Shape 39"/>
+          <p:cNvSpPr/>
+          <p:nvPr/>
+        </p:nvSpPr>
+        <p:spPr>
+          <a:xfrm>
+            <a:off x="3200400" y="3671888"/>
+            <a:ext cx="5543550" cy="214313"/>
+          </a:xfrm>
+          <a:prstGeom prst="rect">
+            <a:avLst/>
+          </a:prstGeom>
+          <a:solidFill>
+            <a:srgbClr val="FFDF00"/>
+          </a:solidFill>
+          <a:ln w="18288">
+            <a:solidFill>
+              <a:srgbClr val="111111"/>
+            </a:solidFill>
+            <a:prstDash val="solid"/>
+          </a:ln>
+        </p:spPr>
+      </p:sp>
+      <p:sp>
+        <p:nvSpPr>
+          <p:cNvPr id="44" name="Text 40"/>
+          <p:cNvSpPr/>
+          <p:nvPr/>
+        </p:nvSpPr>
+        <p:spPr>
+          <a:xfrm>
+            <a:off x="3200400" y="3671888"/>
+            <a:ext cx="242888" cy="214313"/>
+          </a:xfrm>
+          <a:prstGeom prst="rect">
+            <a:avLst/>
+          </a:prstGeom>
+          <a:noFill/>
+          <a:ln/>
+        </p:spPr>
+        <p:txBody>
+          <a:bodyPr wrap="square" lIns="0" tIns="0" rIns="76581" bIns="0" rtlCol="0" anchor="t">
+            <a:spAutoFit/>
+          </a:bodyPr>
+          <a:lstStyle/>
+          <a:p>
+            <a:pPr algn="l" indent="0" marL="0">
+              <a:lnSpc>
+                <a:spcPct val="92000"/>
+              </a:lnSpc>
+              <a:buNone/>
+            </a:pPr>
+            <a:r>
+              <a:rPr lang="en-US" sz="550" dirty="0">
+                <a:solidFill>
+                  <a:srgbClr val="111111"/>
+                </a:solidFill>
+                <a:latin typeface="Consolas" pitchFamily="34" charset="0"/>
+                <a:ea typeface="Consolas" pitchFamily="34" charset="-122"/>
+                <a:cs typeface="Consolas" pitchFamily="34" charset="-120"/>
+              </a:rPr>
+              <a:t>11</a:t>
+            </a:r>
+            <a:endParaRPr lang="en-US" sz="550" dirty="0"/>
+          </a:p>
+        </p:txBody>
+      </p:sp>
+      <p:sp>
+        <p:nvSpPr>
+          <p:cNvPr id="45" name="Text 41"/>
+          <p:cNvSpPr/>
+          <p:nvPr/>
+        </p:nvSpPr>
+        <p:spPr>
+          <a:xfrm>
+            <a:off x="3443288" y="3721559"/>
+            <a:ext cx="5300663" cy="114970"/>
+          </a:xfrm>
+          <a:prstGeom prst="rect">
+            <a:avLst/>
+          </a:prstGeom>
+          <a:noFill/>
+          <a:ln/>
+        </p:spPr>
+        <p:txBody>
+          <a:bodyPr wrap="none" lIns="544322" tIns="0" rIns="0" bIns="0" rtlCol="0" anchor="t">
+            <a:spAutoFit/>
+          </a:bodyPr>
+          <a:lstStyle/>
+          <a:p>
+            <a:pPr algn="l" indent="0" marL="0">
+              <a:lnSpc>
+                <a:spcPct val="92000"/>
+              </a:lnSpc>
+              <a:buNone/>
+            </a:pPr>
+            <a:r>
+              <a:rPr lang="en-US" sz="700" b="1" dirty="0">
+                <a:solidFill>
+                  <a:srgbClr val="111111"/>
+                </a:solidFill>
+                <a:latin typeface="Consolas" pitchFamily="34" charset="0"/>
+                <a:ea typeface="Consolas" pitchFamily="34" charset="-122"/>
+                <a:cs typeface="Consolas" pitchFamily="34" charset="-120"/>
+              </a:rPr>
+              <a:t>"convergence"</a:t>
+            </a:r>
+            <a:r>
+              <a:rPr lang="en-US" sz="750" dirty="0">
+                <a:solidFill>
+                  <a:srgbClr val="D4D4D4"/>
+                </a:solidFill>
+                <a:latin typeface="Consolas" pitchFamily="34" charset="0"/>
+                <a:ea typeface="Consolas" pitchFamily="34" charset="-122"/>
+                <a:cs typeface="Consolas" pitchFamily="34" charset="-120"/>
+              </a:rPr>
+              <a:t>: </a:t>
+            </a:r>
+            <a:r>
+              <a:rPr lang="en-US" sz="700" b="1" dirty="0">
+                <a:solidFill>
+                  <a:srgbClr val="111111"/>
+                </a:solidFill>
+                <a:latin typeface="Consolas" pitchFamily="34" charset="0"/>
+                <a:ea typeface="Consolas" pitchFamily="34" charset="-122"/>
+                <a:cs typeface="Consolas" pitchFamily="34" charset="-120"/>
+              </a:rPr>
+              <a:t>"Satisfied"</a:t>
             </a:r>
             <a:endParaRPr lang="en-US" sz="700" dirty="0"/>
           </a:p>
@@ -16616,23 +17431,239 @@
       </p:sp>
       <p:sp>
         <p:nvSpPr>
-          <p:cNvPr id="26" name="Text 22"/>
-          <p:cNvSpPr/>
-          <p:nvPr/>
-        </p:nvSpPr>
-        <p:spPr>
-          <a:xfrm>
-            <a:off x="6240066" y="4918472"/>
-            <a:ext cx="2632472" cy="121444"/>
-          </a:xfrm>
-          <a:prstGeom prst="rect">
-            <a:avLst/>
-          </a:prstGeom>
-          <a:noFill/>
-          <a:ln/>
-        </p:spPr>
-        <p:txBody>
-          <a:bodyPr wrap="square" lIns="0" tIns="0" rIns="0" bIns="0" rtlCol="0" anchor="t">
+          <p:cNvPr id="46" name="Text 42"/>
+          <p:cNvSpPr/>
+          <p:nvPr/>
+        </p:nvSpPr>
+        <p:spPr>
+          <a:xfrm>
+            <a:off x="3200400" y="3900488"/>
+            <a:ext cx="242888" cy="207169"/>
+          </a:xfrm>
+          <a:prstGeom prst="rect">
+            <a:avLst/>
+          </a:prstGeom>
+          <a:noFill/>
+          <a:ln/>
+        </p:spPr>
+        <p:txBody>
+          <a:bodyPr wrap="square" lIns="0" tIns="0" rIns="76581" bIns="0" rtlCol="0" anchor="t">
+            <a:spAutoFit/>
+          </a:bodyPr>
+          <a:lstStyle/>
+          <a:p>
+            <a:pPr algn="l" indent="0" marL="0">
+              <a:lnSpc>
+                <a:spcPct val="92000"/>
+              </a:lnSpc>
+              <a:buNone/>
+            </a:pPr>
+            <a:r>
+              <a:rPr lang="en-US" sz="550" dirty="0">
+                <a:solidFill>
+                  <a:srgbClr val="707070"/>
+                </a:solidFill>
+                <a:latin typeface="Consolas" pitchFamily="34" charset="0"/>
+                <a:ea typeface="Consolas" pitchFamily="34" charset="-122"/>
+                <a:cs typeface="Consolas" pitchFamily="34" charset="-120"/>
+              </a:rPr>
+              <a:t>12</a:t>
+            </a:r>
+            <a:endParaRPr lang="en-US" sz="550" dirty="0"/>
+          </a:p>
+        </p:txBody>
+      </p:sp>
+      <p:sp>
+        <p:nvSpPr>
+          <p:cNvPr id="47" name="Text 43"/>
+          <p:cNvSpPr/>
+          <p:nvPr/>
+        </p:nvSpPr>
+        <p:spPr>
+          <a:xfrm>
+            <a:off x="3443288" y="3946587"/>
+            <a:ext cx="5300663" cy="114970"/>
+          </a:xfrm>
+          <a:prstGeom prst="rect">
+            <a:avLst/>
+          </a:prstGeom>
+          <a:noFill/>
+          <a:ln/>
+        </p:spPr>
+        <p:txBody>
+          <a:bodyPr wrap="none" lIns="323215" tIns="0" rIns="0" bIns="0" rtlCol="0" anchor="t">
+            <a:spAutoFit/>
+          </a:bodyPr>
+          <a:lstStyle/>
+          <a:p>
+            <a:pPr algn="l" indent="0" marL="0">
+              <a:lnSpc>
+                <a:spcPct val="92000"/>
+              </a:lnSpc>
+              <a:buNone/>
+            </a:pPr>
+            <a:r>
+              <a:rPr lang="en-US" sz="750" dirty="0">
+                <a:solidFill>
+                  <a:srgbClr val="D4D4D4"/>
+                </a:solidFill>
+                <a:latin typeface="Consolas" pitchFamily="34" charset="0"/>
+                <a:ea typeface="Consolas" pitchFamily="34" charset="-122"/>
+                <a:cs typeface="Consolas" pitchFamily="34" charset="-120"/>
+              </a:rPr>
+              <a:t>}</a:t>
+            </a:r>
+            <a:endParaRPr lang="en-US" sz="750" dirty="0"/>
+          </a:p>
+        </p:txBody>
+      </p:sp>
+      <p:sp>
+        <p:nvSpPr>
+          <p:cNvPr id="48" name="Text 44"/>
+          <p:cNvSpPr/>
+          <p:nvPr/>
+        </p:nvSpPr>
+        <p:spPr>
+          <a:xfrm>
+            <a:off x="3200400" y="4114800"/>
+            <a:ext cx="242888" cy="207169"/>
+          </a:xfrm>
+          <a:prstGeom prst="rect">
+            <a:avLst/>
+          </a:prstGeom>
+          <a:noFill/>
+          <a:ln/>
+        </p:spPr>
+        <p:txBody>
+          <a:bodyPr wrap="square" lIns="0" tIns="0" rIns="76581" bIns="0" rtlCol="0" anchor="t">
+            <a:spAutoFit/>
+          </a:bodyPr>
+          <a:lstStyle/>
+          <a:p>
+            <a:pPr algn="l" indent="0" marL="0">
+              <a:lnSpc>
+                <a:spcPct val="92000"/>
+              </a:lnSpc>
+              <a:buNone/>
+            </a:pPr>
+            <a:r>
+              <a:rPr lang="en-US" sz="550" dirty="0">
+                <a:solidFill>
+                  <a:srgbClr val="707070"/>
+                </a:solidFill>
+                <a:latin typeface="Consolas" pitchFamily="34" charset="0"/>
+                <a:ea typeface="Consolas" pitchFamily="34" charset="-122"/>
+                <a:cs typeface="Consolas" pitchFamily="34" charset="-120"/>
+              </a:rPr>
+              <a:t>13</a:t>
+            </a:r>
+            <a:endParaRPr lang="en-US" sz="550" dirty="0"/>
+          </a:p>
+        </p:txBody>
+      </p:sp>
+      <p:sp>
+        <p:nvSpPr>
+          <p:cNvPr id="49" name="Text 45"/>
+          <p:cNvSpPr/>
+          <p:nvPr/>
+        </p:nvSpPr>
+        <p:spPr>
+          <a:xfrm>
+            <a:off x="3443288" y="4160900"/>
+            <a:ext cx="5300663" cy="114970"/>
+          </a:xfrm>
+          <a:prstGeom prst="rect">
+            <a:avLst/>
+          </a:prstGeom>
+          <a:noFill/>
+          <a:ln/>
+        </p:spPr>
+        <p:txBody>
+          <a:bodyPr wrap="none" lIns="110617" tIns="0" rIns="0" bIns="0" rtlCol="0" anchor="t">
+            <a:spAutoFit/>
+          </a:bodyPr>
+          <a:lstStyle/>
+          <a:p>
+            <a:pPr algn="l" indent="0" marL="0">
+              <a:lnSpc>
+                <a:spcPct val="92000"/>
+              </a:lnSpc>
+              <a:buNone/>
+            </a:pPr>
+            <a:r>
+              <a:rPr lang="en-US" sz="750" dirty="0">
+                <a:solidFill>
+                  <a:srgbClr val="D4D4D4"/>
+                </a:solidFill>
+                <a:latin typeface="Consolas" pitchFamily="34" charset="0"/>
+                <a:ea typeface="Consolas" pitchFamily="34" charset="-122"/>
+                <a:cs typeface="Consolas" pitchFamily="34" charset="-120"/>
+              </a:rPr>
+              <a:t>}</a:t>
+            </a:r>
+            <a:endParaRPr lang="en-US" sz="750" dirty="0"/>
+          </a:p>
+        </p:txBody>
+      </p:sp>
+      <p:sp>
+        <p:nvSpPr>
+          <p:cNvPr id="50" name="Shape 46"/>
+          <p:cNvSpPr/>
+          <p:nvPr/>
+        </p:nvSpPr>
+        <p:spPr>
+          <a:xfrm>
+            <a:off x="0" y="4814888"/>
+            <a:ext cx="9144000" cy="328613"/>
+          </a:xfrm>
+          <a:prstGeom prst="rect">
+            <a:avLst/>
+          </a:prstGeom>
+          <a:solidFill>
+            <a:srgbClr val="0055FF"/>
+          </a:solidFill>
+          <a:ln/>
+        </p:spPr>
+      </p:sp>
+      <p:sp>
+        <p:nvSpPr>
+          <p:cNvPr id="51" name="Shape 47"/>
+          <p:cNvSpPr/>
+          <p:nvPr/>
+        </p:nvSpPr>
+        <p:spPr>
+          <a:xfrm>
+            <a:off x="0" y="4814888"/>
+            <a:ext cx="9144000" cy="28575"/>
+          </a:xfrm>
+          <a:prstGeom prst="rect">
+            <a:avLst/>
+          </a:prstGeom>
+          <a:solidFill>
+            <a:srgbClr val="111111"/>
+          </a:solidFill>
+          <a:ln/>
+        </p:spPr>
+      </p:sp>
+      <p:sp>
+        <p:nvSpPr>
+          <p:cNvPr id="52" name="Text 48"/>
+          <p:cNvSpPr/>
+          <p:nvPr/>
+        </p:nvSpPr>
+        <p:spPr>
+          <a:xfrm>
+            <a:off x="271463" y="4918472"/>
+            <a:ext cx="1092994" cy="121444"/>
+          </a:xfrm>
+          <a:prstGeom prst="rect">
+            <a:avLst/>
+          </a:prstGeom>
+          <a:noFill/>
+          <a:ln/>
+        </p:spPr>
+        <p:txBody>
+          <a:bodyPr wrap="none" lIns="0" tIns="0" rIns="0" bIns="0" rtlCol="0" anchor="t">
             <a:spAutoFit/>
           </a:bodyPr>
           <a:lstStyle/>
@@ -16649,7 +17680,48 @@
                 <a:ea typeface="Inter Bold" pitchFamily="34" charset="-122"/>
                 <a:cs typeface="Inter Bold" pitchFamily="34" charset="-120"/>
               </a:rPr>
-              <a:t>SOURCE: ARTIFACTS/EXECUTION_TRACE.JSON</a:t>
+              <a:t>STEP 3: THE TRACE</a:t>
+            </a:r>
+            <a:endParaRPr lang="en-US" sz="700" dirty="0"/>
+          </a:p>
+        </p:txBody>
+      </p:sp>
+      <p:sp>
+        <p:nvSpPr>
+          <p:cNvPr id="53" name="Text 49"/>
+          <p:cNvSpPr/>
+          <p:nvPr/>
+        </p:nvSpPr>
+        <p:spPr>
+          <a:xfrm>
+            <a:off x="5139928" y="4918472"/>
+            <a:ext cx="3732609" cy="121444"/>
+          </a:xfrm>
+          <a:prstGeom prst="rect">
+            <a:avLst/>
+          </a:prstGeom>
+          <a:noFill/>
+          <a:ln/>
+        </p:spPr>
+        <p:txBody>
+          <a:bodyPr wrap="square" lIns="0" tIns="0" rIns="0" bIns="0" rtlCol="0" anchor="t">
+            <a:spAutoFit/>
+          </a:bodyPr>
+          <a:lstStyle/>
+          <a:p>
+            <a:pPr algn="l" indent="0" marL="0">
+              <a:buNone/>
+            </a:pPr>
+            <a:r>
+              <a:rPr lang="en-US" sz="700" b="1" spc="1" kern="0" dirty="0">
+                <a:solidFill>
+                  <a:srgbClr val="FFFFFF"/>
+                </a:solidFill>
+                <a:latin typeface="Inter Bold" pitchFamily="34" charset="0"/>
+                <a:ea typeface="Inter Bold" pitchFamily="34" charset="-122"/>
+                <a:cs typeface="Inter Bold" pitchFamily="34" charset="-120"/>
+              </a:rPr>
+              <a:t>SOURCE: STAGE1_EXTRACTION/OUTPUT/EXECUTION_TRACE.JSON</a:t>
             </a:r>
             <a:endParaRPr lang="en-US" sz="700" dirty="0"/>
           </a:p>
@@ -16950,7 +18022,7 @@
         <p:spPr>
           <a:xfrm>
             <a:off x="271463" y="2375911"/>
-            <a:ext cx="2571750" cy="1665108"/>
+            <a:ext cx="2571750" cy="1797267"/>
           </a:xfrm>
           <a:prstGeom prst="rect">
             <a:avLst/>
@@ -17060,7 +18132,7 @@
         <p:spPr>
           <a:xfrm>
             <a:off x="414338" y="3523097"/>
-            <a:ext cx="2286000" cy="332184"/>
+            <a:ext cx="2286000" cy="464344"/>
           </a:xfrm>
           <a:prstGeom prst="rect">
             <a:avLst/>
@@ -17085,7 +18157,7 @@
         <p:spPr>
           <a:xfrm>
             <a:off x="414338" y="3523097"/>
-            <a:ext cx="2286000" cy="332184"/>
+            <a:ext cx="2286000" cy="464344"/>
           </a:xfrm>
           <a:prstGeom prst="rect">
             <a:avLst/>
@@ -17111,7 +18183,7 @@
                 <a:ea typeface="JetBrains Mono Bold" pitchFamily="34" charset="-122"/>
                 <a:cs typeface="JetBrains Mono Bold" pitchFamily="34" charset="-120"/>
               </a:rPr>
-              <a:t>semantic_ir/LC-LOGIT-01.json</a:t>
+              <a:t>artifacts/semantic_ir/LC-LOGIT-01.json</a:t>
             </a:r>
             <a:endParaRPr lang="en-US" sz="700" dirty="0"/>
           </a:p>
@@ -17271,17 +18343,58 @@
         </p:nvSpPr>
         <p:spPr>
           <a:xfrm>
-            <a:off x="3071813" y="1400175"/>
-            <a:ext cx="5800725" cy="3243263"/>
-          </a:xfrm>
-          <a:prstGeom prst="rect">
-            <a:avLst/>
-          </a:prstGeom>
-          <a:noFill/>
-          <a:ln/>
-        </p:spPr>
-        <p:txBody>
-          <a:bodyPr wrap="square" lIns="238125" tIns="204089" rIns="238125" bIns="204089" rtlCol="0" anchor="t">
+            <a:off x="7736681" y="1184077"/>
+            <a:ext cx="1035844" cy="103584"/>
+          </a:xfrm>
+          <a:prstGeom prst="rect">
+            <a:avLst/>
+          </a:prstGeom>
+          <a:noFill/>
+          <a:ln/>
+        </p:spPr>
+        <p:txBody>
+          <a:bodyPr wrap="none" lIns="0" tIns="0" rIns="0" bIns="0" rtlCol="0" anchor="t">
+            <a:spAutoFit/>
+          </a:bodyPr>
+          <a:lstStyle/>
+          <a:p>
+            <a:pPr algn="l" indent="0" marL="0">
+              <a:buNone/>
+            </a:pPr>
+            <a:r>
+              <a:rPr lang="en-US" sz="600" b="1" spc="1" kern="0" dirty="0">
+                <a:solidFill>
+                  <a:srgbClr val="9CDCFE"/>
+                </a:solidFill>
+                <a:latin typeface="Inter Bold" pitchFamily="34" charset="0"/>
+                <a:ea typeface="Inter Bold" pitchFamily="34" charset="-122"/>
+                <a:cs typeface="Inter Bold" pitchFamily="34" charset="-120"/>
+              </a:rPr>
+              <a:t>SEMANTIC ARTIFACT</a:t>
+            </a:r>
+            <a:endParaRPr lang="en-US" sz="600" dirty="0"/>
+          </a:p>
+        </p:txBody>
+      </p:sp>
+      <p:sp>
+        <p:nvSpPr>
+          <p:cNvPr id="23" name="Text 19"/>
+          <p:cNvSpPr/>
+          <p:nvPr/>
+        </p:nvSpPr>
+        <p:spPr>
+          <a:xfrm>
+            <a:off x="3271838" y="1582341"/>
+            <a:ext cx="71438" cy="160734"/>
+          </a:xfrm>
+          <a:prstGeom prst="rect">
+            <a:avLst/>
+          </a:prstGeom>
+          <a:noFill/>
+          <a:ln/>
+        </p:spPr>
+        <p:txBody>
+          <a:bodyPr wrap="none" lIns="0" tIns="0" rIns="0" bIns="0" rtlCol="0" anchor="t">
             <a:spAutoFit/>
           </a:bodyPr>
           <a:lstStyle/>
@@ -17303,62 +18416,259 @@
               </a:rPr>
               <a:t>{</a:t>
             </a:r>
+            <a:endParaRPr lang="en-US" sz="900" dirty="0"/>
+          </a:p>
+        </p:txBody>
+      </p:sp>
+      <p:sp>
+        <p:nvSpPr>
+          <p:cNvPr id="24" name="Text 20"/>
+          <p:cNvSpPr/>
+          <p:nvPr/>
+        </p:nvSpPr>
+        <p:spPr>
+          <a:xfrm>
+            <a:off x="3271838" y="1764506"/>
+            <a:ext cx="642938" cy="160734"/>
+          </a:xfrm>
+          <a:prstGeom prst="rect">
+            <a:avLst/>
+          </a:prstGeom>
+          <a:noFill/>
+          <a:ln/>
+        </p:spPr>
+        <p:txBody>
+          <a:bodyPr wrap="none" lIns="0" tIns="0" rIns="0" bIns="0" rtlCol="0" anchor="t">
+            <a:spAutoFit/>
+          </a:bodyPr>
+          <a:lstStyle/>
+          <a:p>
+            <a:pPr algn="l" indent="0" marL="0">
+              <a:lnSpc>
+                <a:spcPct val="120000"/>
+              </a:lnSpc>
+              <a:buNone/>
+            </a:pPr>
             <a:r>
               <a:rPr lang="en-US" sz="900" dirty="0">
                 <a:solidFill>
-                  <a:srgbClr val="D4D4D4"/>
+                  <a:srgbClr val="9CDCFE"/>
                 </a:solidFill>
                 <a:latin typeface="JetBrains Mono" pitchFamily="34" charset="0"/>
                 <a:ea typeface="JetBrains Mono" pitchFamily="34" charset="-122"/>
                 <a:cs typeface="JetBrains Mono" pitchFamily="34" charset="-120"/>
               </a:rPr>
-              <a:t>
-</a:t>
-            </a:r>
+              <a:t>"step_id"</a:t>
+            </a:r>
+            <a:endParaRPr lang="en-US" sz="900" dirty="0"/>
+          </a:p>
+        </p:txBody>
+      </p:sp>
+      <p:sp>
+        <p:nvSpPr>
+          <p:cNvPr id="25" name="Text 21"/>
+          <p:cNvSpPr/>
+          <p:nvPr/>
+        </p:nvSpPr>
+        <p:spPr>
+          <a:xfrm>
+            <a:off x="3914775" y="1764506"/>
+            <a:ext cx="142875" cy="160734"/>
+          </a:xfrm>
+          <a:prstGeom prst="rect">
+            <a:avLst/>
+          </a:prstGeom>
+          <a:noFill/>
+          <a:ln/>
+        </p:spPr>
+        <p:txBody>
+          <a:bodyPr wrap="none" lIns="0" tIns="0" rIns="0" bIns="0" rtlCol="0" anchor="t">
+            <a:spAutoFit/>
+          </a:bodyPr>
+          <a:lstStyle/>
+          <a:p>
+            <a:pPr algn="l" indent="0" marL="0">
+              <a:lnSpc>
+                <a:spcPct val="120000"/>
+              </a:lnSpc>
+              <a:buNone/>
+            </a:pPr>
             <a:r>
               <a:rPr lang="en-US" sz="900" dirty="0">
                 <a:solidFill>
-                  <a:srgbClr val="9CDCFE"/>
+                  <a:srgbClr val="D4D4D4"/>
                 </a:solidFill>
                 <a:latin typeface="JetBrains Mono" pitchFamily="34" charset="0"/>
                 <a:ea typeface="JetBrains Mono" pitchFamily="34" charset="-122"/>
                 <a:cs typeface="JetBrains Mono" pitchFamily="34" charset="-120"/>
               </a:rPr>
-              <a:t>"step_id"</a:t>
-            </a:r>
+              <a:t>:</a:t>
+            </a:r>
+            <a:endParaRPr lang="en-US" sz="900" dirty="0"/>
+          </a:p>
+        </p:txBody>
+      </p:sp>
+      <p:sp>
+        <p:nvSpPr>
+          <p:cNvPr id="26" name="Text 22"/>
+          <p:cNvSpPr/>
+          <p:nvPr/>
+        </p:nvSpPr>
+        <p:spPr>
+          <a:xfrm>
+            <a:off x="4057650" y="1764506"/>
+            <a:ext cx="428625" cy="160734"/>
+          </a:xfrm>
+          <a:prstGeom prst="rect">
+            <a:avLst/>
+          </a:prstGeom>
+          <a:noFill/>
+          <a:ln/>
+        </p:spPr>
+        <p:txBody>
+          <a:bodyPr wrap="none" lIns="0" tIns="0" rIns="0" bIns="0" rtlCol="0" anchor="t">
+            <a:spAutoFit/>
+          </a:bodyPr>
+          <a:lstStyle/>
+          <a:p>
+            <a:pPr algn="l" indent="0" marL="0">
+              <a:lnSpc>
+                <a:spcPct val="120000"/>
+              </a:lnSpc>
+              <a:buNone/>
+            </a:pPr>
             <a:r>
               <a:rPr lang="en-US" sz="900" dirty="0">
                 <a:solidFill>
-                  <a:srgbClr val="D4D4D4"/>
+                  <a:srgbClr val="CE9178"/>
                 </a:solidFill>
                 <a:latin typeface="JetBrains Mono" pitchFamily="34" charset="0"/>
                 <a:ea typeface="JetBrains Mono" pitchFamily="34" charset="-122"/>
                 <a:cs typeface="JetBrains Mono" pitchFamily="34" charset="-120"/>
               </a:rPr>
-              <a:t>: </a:t>
-            </a:r>
+              <a:t>"T003"</a:t>
+            </a:r>
+            <a:endParaRPr lang="en-US" sz="900" dirty="0"/>
+          </a:p>
+        </p:txBody>
+      </p:sp>
+      <p:sp>
+        <p:nvSpPr>
+          <p:cNvPr id="27" name="Text 23"/>
+          <p:cNvSpPr/>
+          <p:nvPr/>
+        </p:nvSpPr>
+        <p:spPr>
+          <a:xfrm>
+            <a:off x="4486275" y="1764506"/>
+            <a:ext cx="71438" cy="160734"/>
+          </a:xfrm>
+          <a:prstGeom prst="rect">
+            <a:avLst/>
+          </a:prstGeom>
+          <a:noFill/>
+          <a:ln/>
+        </p:spPr>
+        <p:txBody>
+          <a:bodyPr wrap="none" lIns="0" tIns="0" rIns="0" bIns="0" rtlCol="0" anchor="t">
+            <a:spAutoFit/>
+          </a:bodyPr>
+          <a:lstStyle/>
+          <a:p>
+            <a:pPr algn="l" indent="0" marL="0">
+              <a:lnSpc>
+                <a:spcPct val="120000"/>
+              </a:lnSpc>
+              <a:buNone/>
+            </a:pPr>
             <a:r>
               <a:rPr lang="en-US" sz="900" dirty="0">
                 <a:solidFill>
-                  <a:srgbClr val="CE9178"/>
+                  <a:srgbClr val="D4D4D4"/>
                 </a:solidFill>
                 <a:latin typeface="JetBrains Mono" pitchFamily="34" charset="0"/>
                 <a:ea typeface="JetBrains Mono" pitchFamily="34" charset="-122"/>
                 <a:cs typeface="JetBrains Mono" pitchFamily="34" charset="-120"/>
               </a:rPr>
-              <a:t>"T003"</a:t>
-            </a:r>
+              <a:t>,</a:t>
+            </a:r>
+            <a:endParaRPr lang="en-US" sz="900" dirty="0"/>
+          </a:p>
+        </p:txBody>
+      </p:sp>
+      <p:sp>
+        <p:nvSpPr>
+          <p:cNvPr id="28" name="Text 24"/>
+          <p:cNvSpPr/>
+          <p:nvPr/>
+        </p:nvSpPr>
+        <p:spPr>
+          <a:xfrm>
+            <a:off x="3271838" y="1946672"/>
+            <a:ext cx="428625" cy="160734"/>
+          </a:xfrm>
+          <a:prstGeom prst="rect">
+            <a:avLst/>
+          </a:prstGeom>
+          <a:noFill/>
+          <a:ln/>
+        </p:spPr>
+        <p:txBody>
+          <a:bodyPr wrap="none" lIns="0" tIns="0" rIns="0" bIns="0" rtlCol="0" anchor="t">
+            <a:spAutoFit/>
+          </a:bodyPr>
+          <a:lstStyle/>
+          <a:p>
+            <a:pPr algn="l" indent="0" marL="0">
+              <a:lnSpc>
+                <a:spcPct val="120000"/>
+              </a:lnSpc>
+              <a:buNone/>
+            </a:pPr>
             <a:r>
               <a:rPr lang="en-US" sz="900" dirty="0">
                 <a:solidFill>
-                  <a:srgbClr val="D4D4D4"/>
+                  <a:srgbClr val="9CDCFE"/>
                 </a:solidFill>
                 <a:latin typeface="JetBrains Mono" pitchFamily="34" charset="0"/>
                 <a:ea typeface="JetBrains Mono" pitchFamily="34" charset="-122"/>
                 <a:cs typeface="JetBrains Mono" pitchFamily="34" charset="-120"/>
               </a:rPr>
-              <a:t>,</a:t>
-            </a:r>
+              <a:t>"name"</a:t>
+            </a:r>
+            <a:endParaRPr lang="en-US" sz="900" dirty="0"/>
+          </a:p>
+        </p:txBody>
+      </p:sp>
+      <p:sp>
+        <p:nvSpPr>
+          <p:cNvPr id="29" name="Text 25"/>
+          <p:cNvSpPr/>
+          <p:nvPr/>
+        </p:nvSpPr>
+        <p:spPr>
+          <a:xfrm>
+            <a:off x="3700463" y="1946672"/>
+            <a:ext cx="142875" cy="160734"/>
+          </a:xfrm>
+          <a:prstGeom prst="rect">
+            <a:avLst/>
+          </a:prstGeom>
+          <a:noFill/>
+          <a:ln/>
+        </p:spPr>
+        <p:txBody>
+          <a:bodyPr wrap="none" lIns="0" tIns="0" rIns="0" bIns="0" rtlCol="0" anchor="t">
+            <a:spAutoFit/>
+          </a:bodyPr>
+          <a:lstStyle/>
+          <a:p>
+            <a:pPr algn="l" indent="0" marL="0">
+              <a:lnSpc>
+                <a:spcPct val="120000"/>
+              </a:lnSpc>
+              <a:buNone/>
+            </a:pPr>
             <a:r>
               <a:rPr lang="en-US" sz="900" dirty="0">
                 <a:solidFill>
@@ -17368,20 +18678,85 @@
                 <a:ea typeface="JetBrains Mono" pitchFamily="34" charset="-122"/>
                 <a:cs typeface="JetBrains Mono" pitchFamily="34" charset="-120"/>
               </a:rPr>
-              <a:t>
-</a:t>
-            </a:r>
+              <a:t>:</a:t>
+            </a:r>
+            <a:endParaRPr lang="en-US" sz="900" dirty="0"/>
+          </a:p>
+        </p:txBody>
+      </p:sp>
+      <p:sp>
+        <p:nvSpPr>
+          <p:cNvPr id="30" name="Text 26"/>
+          <p:cNvSpPr/>
+          <p:nvPr/>
+        </p:nvSpPr>
+        <p:spPr>
+          <a:xfrm>
+            <a:off x="3843338" y="1946672"/>
+            <a:ext cx="2143125" cy="160734"/>
+          </a:xfrm>
+          <a:prstGeom prst="rect">
+            <a:avLst/>
+          </a:prstGeom>
+          <a:noFill/>
+          <a:ln/>
+        </p:spPr>
+        <p:txBody>
+          <a:bodyPr wrap="none" lIns="0" tIns="0" rIns="0" bIns="0" rtlCol="0" anchor="t">
+            <a:spAutoFit/>
+          </a:bodyPr>
+          <a:lstStyle/>
+          <a:p>
+            <a:pPr algn="l" indent="0" marL="0">
+              <a:lnSpc>
+                <a:spcPct val="120000"/>
+              </a:lnSpc>
+              <a:buNone/>
+            </a:pPr>
             <a:r>
               <a:rPr lang="en-US" sz="900" dirty="0">
                 <a:solidFill>
-                  <a:srgbClr val="9CDCFE"/>
+                  <a:srgbClr val="CE9178"/>
                 </a:solidFill>
                 <a:latin typeface="JetBrains Mono" pitchFamily="34" charset="0"/>
                 <a:ea typeface="JetBrains Mono" pitchFamily="34" charset="-122"/>
                 <a:cs typeface="JetBrains Mono" pitchFamily="34" charset="-120"/>
               </a:rPr>
-              <a:t>"name"</a:t>
-            </a:r>
+              <a:t>"logistic_link_transformation"</a:t>
+            </a:r>
+            <a:endParaRPr lang="en-US" sz="900" dirty="0"/>
+          </a:p>
+        </p:txBody>
+      </p:sp>
+      <p:sp>
+        <p:nvSpPr>
+          <p:cNvPr id="31" name="Text 27"/>
+          <p:cNvSpPr/>
+          <p:nvPr/>
+        </p:nvSpPr>
+        <p:spPr>
+          <a:xfrm>
+            <a:off x="5986463" y="1946672"/>
+            <a:ext cx="71438" cy="160734"/>
+          </a:xfrm>
+          <a:prstGeom prst="rect">
+            <a:avLst/>
+          </a:prstGeom>
+          <a:noFill/>
+          <a:ln/>
+        </p:spPr>
+        <p:txBody>
+          <a:bodyPr wrap="none" lIns="0" tIns="0" rIns="0" bIns="0" rtlCol="0" anchor="t">
+            <a:spAutoFit/>
+          </a:bodyPr>
+          <a:lstStyle/>
+          <a:p>
+            <a:pPr algn="l" indent="0" marL="0">
+              <a:lnSpc>
+                <a:spcPct val="120000"/>
+              </a:lnSpc>
+              <a:buNone/>
+            </a:pPr>
             <a:r>
               <a:rPr lang="en-US" sz="900" dirty="0">
                 <a:solidFill>
@@ -17391,19 +18766,85 @@
                 <a:ea typeface="JetBrains Mono" pitchFamily="34" charset="-122"/>
                 <a:cs typeface="JetBrains Mono" pitchFamily="34" charset="-120"/>
               </a:rPr>
-              <a:t>: </a:t>
-            </a:r>
+              <a:t>,</a:t>
+            </a:r>
+            <a:endParaRPr lang="en-US" sz="900" dirty="0"/>
+          </a:p>
+        </p:txBody>
+      </p:sp>
+      <p:sp>
+        <p:nvSpPr>
+          <p:cNvPr id="32" name="Text 28"/>
+          <p:cNvSpPr/>
+          <p:nvPr/>
+        </p:nvSpPr>
+        <p:spPr>
+          <a:xfrm>
+            <a:off x="3271838" y="2128838"/>
+            <a:ext cx="928688" cy="160734"/>
+          </a:xfrm>
+          <a:prstGeom prst="rect">
+            <a:avLst/>
+          </a:prstGeom>
+          <a:noFill/>
+          <a:ln/>
+        </p:spPr>
+        <p:txBody>
+          <a:bodyPr wrap="none" lIns="0" tIns="0" rIns="0" bIns="0" rtlCol="0" anchor="t">
+            <a:spAutoFit/>
+          </a:bodyPr>
+          <a:lstStyle/>
+          <a:p>
+            <a:pPr algn="l" indent="0" marL="0">
+              <a:lnSpc>
+                <a:spcPct val="120000"/>
+              </a:lnSpc>
+              <a:buNone/>
+            </a:pPr>
             <a:r>
               <a:rPr lang="en-US" sz="900" dirty="0">
                 <a:solidFill>
-                  <a:srgbClr val="CE9178"/>
+                  <a:srgbClr val="9CDCFE"/>
                 </a:solidFill>
                 <a:latin typeface="JetBrains Mono" pitchFamily="34" charset="0"/>
                 <a:ea typeface="JetBrains Mono" pitchFamily="34" charset="-122"/>
                 <a:cs typeface="JetBrains Mono" pitchFamily="34" charset="-120"/>
               </a:rPr>
-              <a:t>"logistic_link_transformation"</a:t>
-            </a:r>
+              <a:t>"description"</a:t>
+            </a:r>
+            <a:endParaRPr lang="en-US" sz="900" dirty="0"/>
+          </a:p>
+        </p:txBody>
+      </p:sp>
+      <p:sp>
+        <p:nvSpPr>
+          <p:cNvPr id="33" name="Text 29"/>
+          <p:cNvSpPr/>
+          <p:nvPr/>
+        </p:nvSpPr>
+        <p:spPr>
+          <a:xfrm>
+            <a:off x="4200525" y="2128838"/>
+            <a:ext cx="142875" cy="160734"/>
+          </a:xfrm>
+          <a:prstGeom prst="rect">
+            <a:avLst/>
+          </a:prstGeom>
+          <a:noFill/>
+          <a:ln/>
+        </p:spPr>
+        <p:txBody>
+          <a:bodyPr wrap="none" lIns="0" tIns="0" rIns="0" bIns="0" rtlCol="0" anchor="t">
+            <a:spAutoFit/>
+          </a:bodyPr>
+          <a:lstStyle/>
+          <a:p>
+            <a:pPr algn="l" indent="0" marL="0">
+              <a:lnSpc>
+                <a:spcPct val="120000"/>
+              </a:lnSpc>
+              <a:buNone/>
+            </a:pPr>
             <a:r>
               <a:rPr lang="en-US" sz="900" dirty="0">
                 <a:solidFill>
@@ -17413,53 +18854,286 @@
                 <a:ea typeface="JetBrains Mono" pitchFamily="34" charset="-122"/>
                 <a:cs typeface="JetBrains Mono" pitchFamily="34" charset="-120"/>
               </a:rPr>
-              <a:t>,</a:t>
-            </a:r>
+              <a:t>:</a:t>
+            </a:r>
+            <a:endParaRPr lang="en-US" sz="900" dirty="0"/>
+          </a:p>
+        </p:txBody>
+      </p:sp>
+      <p:sp>
+        <p:nvSpPr>
+          <p:cNvPr id="34" name="Text 30"/>
+          <p:cNvSpPr/>
+          <p:nvPr/>
+        </p:nvSpPr>
+        <p:spPr>
+          <a:xfrm>
+            <a:off x="4343400" y="2128838"/>
+            <a:ext cx="3214688" cy="160734"/>
+          </a:xfrm>
+          <a:prstGeom prst="rect">
+            <a:avLst/>
+          </a:prstGeom>
+          <a:noFill/>
+          <a:ln/>
+        </p:spPr>
+        <p:txBody>
+          <a:bodyPr wrap="none" lIns="0" tIns="0" rIns="0" bIns="0" rtlCol="0" anchor="t">
+            <a:spAutoFit/>
+          </a:bodyPr>
+          <a:lstStyle/>
+          <a:p>
+            <a:pPr algn="l" indent="0" marL="0">
+              <a:lnSpc>
+                <a:spcPct val="120000"/>
+              </a:lnSpc>
+              <a:buNone/>
+            </a:pPr>
             <a:r>
               <a:rPr lang="en-US" sz="900" dirty="0">
                 <a:solidFill>
-                  <a:srgbClr val="D4D4D4"/>
+                  <a:srgbClr val="CE9178"/>
                 </a:solidFill>
                 <a:latin typeface="JetBrains Mono" pitchFamily="34" charset="0"/>
                 <a:ea typeface="JetBrains Mono" pitchFamily="34" charset="-122"/>
                 <a:cs typeface="JetBrains Mono" pitchFamily="34" charset="-120"/>
               </a:rPr>
-              <a:t>
-</a:t>
-            </a:r>
+              <a:t>"Calculate probability with stability guards"</a:t>
+            </a:r>
+            <a:endParaRPr lang="en-US" sz="900" dirty="0"/>
+          </a:p>
+        </p:txBody>
+      </p:sp>
+      <p:sp>
+        <p:nvSpPr>
+          <p:cNvPr id="35" name="Text 31"/>
+          <p:cNvSpPr/>
+          <p:nvPr/>
+        </p:nvSpPr>
+        <p:spPr>
+          <a:xfrm>
+            <a:off x="7558088" y="2128838"/>
+            <a:ext cx="71438" cy="160734"/>
+          </a:xfrm>
+          <a:prstGeom prst="rect">
+            <a:avLst/>
+          </a:prstGeom>
+          <a:noFill/>
+          <a:ln/>
+        </p:spPr>
+        <p:txBody>
+          <a:bodyPr wrap="none" lIns="0" tIns="0" rIns="0" bIns="0" rtlCol="0" anchor="t">
+            <a:spAutoFit/>
+          </a:bodyPr>
+          <a:lstStyle/>
+          <a:p>
+            <a:pPr algn="l" indent="0" marL="0">
+              <a:lnSpc>
+                <a:spcPct val="120000"/>
+              </a:lnSpc>
+              <a:buNone/>
+            </a:pPr>
             <a:r>
               <a:rPr lang="en-US" sz="900" dirty="0">
                 <a:solidFill>
-                  <a:srgbClr val="9CDCFE"/>
+                  <a:srgbClr val="D4D4D4"/>
                 </a:solidFill>
                 <a:latin typeface="JetBrains Mono" pitchFamily="34" charset="0"/>
                 <a:ea typeface="JetBrains Mono" pitchFamily="34" charset="-122"/>
                 <a:cs typeface="JetBrains Mono" pitchFamily="34" charset="-120"/>
               </a:rPr>
-              <a:t>"description"</a:t>
-            </a:r>
+              <a:t>,</a:t>
+            </a:r>
+            <a:endParaRPr lang="en-US" sz="900" dirty="0"/>
+          </a:p>
+        </p:txBody>
+      </p:sp>
+      <p:sp>
+        <p:nvSpPr>
+          <p:cNvPr id="36" name="Text 32"/>
+          <p:cNvSpPr/>
+          <p:nvPr/>
+        </p:nvSpPr>
+        <p:spPr>
+          <a:xfrm>
+            <a:off x="3271838" y="2339578"/>
+            <a:ext cx="642938" cy="160734"/>
+          </a:xfrm>
+          <a:prstGeom prst="rect">
+            <a:avLst/>
+          </a:prstGeom>
+          <a:noFill/>
+          <a:ln/>
+        </p:spPr>
+        <p:txBody>
+          <a:bodyPr wrap="none" lIns="0" tIns="0" rIns="0" bIns="0" rtlCol="0" anchor="t">
+            <a:spAutoFit/>
+          </a:bodyPr>
+          <a:lstStyle/>
+          <a:p>
+            <a:pPr algn="l" indent="0" marL="0">
+              <a:lnSpc>
+                <a:spcPct val="120000"/>
+              </a:lnSpc>
+              <a:buNone/>
+            </a:pPr>
             <a:r>
               <a:rPr lang="en-US" sz="900" dirty="0">
                 <a:solidFill>
-                  <a:srgbClr val="D4D4D4"/>
+                  <a:srgbClr val="9CDCFE"/>
                 </a:solidFill>
                 <a:latin typeface="JetBrains Mono" pitchFamily="34" charset="0"/>
                 <a:ea typeface="JetBrains Mono" pitchFamily="34" charset="-122"/>
                 <a:cs typeface="JetBrains Mono" pitchFamily="34" charset="-120"/>
               </a:rPr>
-              <a:t>: </a:t>
-            </a:r>
+              <a:t>"formula"</a:t>
+            </a:r>
+            <a:endParaRPr lang="en-US" sz="900" dirty="0"/>
+          </a:p>
+        </p:txBody>
+      </p:sp>
+      <p:sp>
+        <p:nvSpPr>
+          <p:cNvPr id="37" name="Text 33"/>
+          <p:cNvSpPr/>
+          <p:nvPr/>
+        </p:nvSpPr>
+        <p:spPr>
+          <a:xfrm>
+            <a:off x="3914775" y="2339578"/>
+            <a:ext cx="142875" cy="160734"/>
+          </a:xfrm>
+          <a:prstGeom prst="rect">
+            <a:avLst/>
+          </a:prstGeom>
+          <a:noFill/>
+          <a:ln/>
+        </p:spPr>
+        <p:txBody>
+          <a:bodyPr wrap="none" lIns="0" tIns="0" rIns="0" bIns="0" rtlCol="0" anchor="t">
+            <a:spAutoFit/>
+          </a:bodyPr>
+          <a:lstStyle/>
+          <a:p>
+            <a:pPr algn="l" indent="0" marL="0">
+              <a:lnSpc>
+                <a:spcPct val="120000"/>
+              </a:lnSpc>
+              <a:buNone/>
+            </a:pPr>
             <a:r>
               <a:rPr lang="en-US" sz="900" dirty="0">
                 <a:solidFill>
-                  <a:srgbClr val="CE9178"/>
+                  <a:srgbClr val="D4D4D4"/>
                 </a:solidFill>
                 <a:latin typeface="JetBrains Mono" pitchFamily="34" charset="0"/>
                 <a:ea typeface="JetBrains Mono" pitchFamily="34" charset="-122"/>
                 <a:cs typeface="JetBrains Mono" pitchFamily="34" charset="-120"/>
               </a:rPr>
-              <a:t>"Calculate probability with stability guards"</a:t>
-            </a:r>
+              <a:t>:</a:t>
+            </a:r>
+            <a:endParaRPr lang="en-US" sz="900" dirty="0"/>
+          </a:p>
+        </p:txBody>
+      </p:sp>
+      <p:sp>
+        <p:nvSpPr>
+          <p:cNvPr id="38" name="Shape 34"/>
+          <p:cNvSpPr/>
+          <p:nvPr/>
+        </p:nvSpPr>
+        <p:spPr>
+          <a:xfrm>
+            <a:off x="4057650" y="2300288"/>
+            <a:ext cx="2414588" cy="239316"/>
+          </a:xfrm>
+          <a:prstGeom prst="rect">
+            <a:avLst/>
+          </a:prstGeom>
+          <a:solidFill>
+            <a:srgbClr val="FFDF00"/>
+          </a:solidFill>
+          <a:ln w="18288">
+            <a:solidFill>
+              <a:srgbClr val="111111"/>
+            </a:solidFill>
+            <a:prstDash val="solid"/>
+          </a:ln>
+        </p:spPr>
+      </p:sp>
+      <p:sp>
+        <p:nvSpPr>
+          <p:cNvPr id="39" name="Text 35"/>
+          <p:cNvSpPr/>
+          <p:nvPr/>
+        </p:nvSpPr>
+        <p:spPr>
+          <a:xfrm>
+            <a:off x="4107656" y="2325291"/>
+            <a:ext cx="2286000" cy="160734"/>
+          </a:xfrm>
+          <a:prstGeom prst="rect">
+            <a:avLst/>
+          </a:prstGeom>
+          <a:noFill/>
+          <a:ln/>
+        </p:spPr>
+        <p:txBody>
+          <a:bodyPr wrap="none" lIns="0" tIns="0" rIns="0" bIns="0" rtlCol="0" anchor="t">
+            <a:spAutoFit/>
+          </a:bodyPr>
+          <a:lstStyle/>
+          <a:p>
+            <a:pPr algn="l" indent="0" marL="0">
+              <a:lnSpc>
+                <a:spcPct val="120000"/>
+              </a:lnSpc>
+              <a:buNone/>
+            </a:pPr>
+            <a:r>
+              <a:rPr lang="en-US" sz="850" b="1" dirty="0">
+                <a:solidFill>
+                  <a:srgbClr val="CE9178"/>
+                </a:solidFill>
+                <a:latin typeface="JetBrains Mono Bold" pitchFamily="34" charset="0"/>
+                <a:ea typeface="JetBrains Mono Bold" pitchFamily="34" charset="-122"/>
+                <a:cs typeface="JetBrains Mono Bold" pitchFamily="34" charset="-120"/>
+              </a:rPr>
+              <a:t>"phat = 1.0 / (1.0 + exp(-eta))"</a:t>
+            </a:r>
+            <a:endParaRPr lang="en-US" sz="850" dirty="0"/>
+          </a:p>
+        </p:txBody>
+      </p:sp>
+      <p:sp>
+        <p:nvSpPr>
+          <p:cNvPr id="40" name="Text 36"/>
+          <p:cNvSpPr/>
+          <p:nvPr/>
+        </p:nvSpPr>
+        <p:spPr>
+          <a:xfrm>
+            <a:off x="6443663" y="2325291"/>
+            <a:ext cx="71438" cy="160734"/>
+          </a:xfrm>
+          <a:prstGeom prst="rect">
+            <a:avLst/>
+          </a:prstGeom>
+          <a:noFill/>
+          <a:ln/>
+        </p:spPr>
+        <p:txBody>
+          <a:bodyPr wrap="none" lIns="0" tIns="0" rIns="0" bIns="0" rtlCol="0" anchor="t">
+            <a:spAutoFit/>
+          </a:bodyPr>
+          <a:lstStyle/>
+          <a:p>
+            <a:pPr algn="l" indent="0" marL="0">
+              <a:lnSpc>
+                <a:spcPct val="120000"/>
+              </a:lnSpc>
+              <a:buNone/>
+            </a:pPr>
             <a:r>
               <a:rPr lang="en-US" sz="900" dirty="0">
                 <a:solidFill>
@@ -17471,62 +19145,259 @@
               </a:rPr>
               <a:t>,</a:t>
             </a:r>
+            <a:endParaRPr lang="en-US" sz="900" dirty="0"/>
+          </a:p>
+        </p:txBody>
+      </p:sp>
+      <p:sp>
+        <p:nvSpPr>
+          <p:cNvPr id="41" name="Text 37"/>
+          <p:cNvSpPr/>
+          <p:nvPr/>
+        </p:nvSpPr>
+        <p:spPr>
+          <a:xfrm>
+            <a:off x="3271838" y="2521744"/>
+            <a:ext cx="1000125" cy="160734"/>
+          </a:xfrm>
+          <a:prstGeom prst="rect">
+            <a:avLst/>
+          </a:prstGeom>
+          <a:noFill/>
+          <a:ln/>
+        </p:spPr>
+        <p:txBody>
+          <a:bodyPr wrap="none" lIns="0" tIns="0" rIns="0" bIns="0" rtlCol="0" anchor="t">
+            <a:spAutoFit/>
+          </a:bodyPr>
+          <a:lstStyle/>
+          <a:p>
+            <a:pPr algn="l" indent="0" marL="0">
+              <a:lnSpc>
+                <a:spcPct val="120000"/>
+              </a:lnSpc>
+              <a:buNone/>
+            </a:pPr>
             <a:r>
               <a:rPr lang="en-US" sz="900" dirty="0">
                 <a:solidFill>
-                  <a:srgbClr val="D4D4D4"/>
+                  <a:srgbClr val="9CDCFE"/>
                 </a:solidFill>
                 <a:latin typeface="JetBrains Mono" pitchFamily="34" charset="0"/>
                 <a:ea typeface="JetBrains Mono" pitchFamily="34" charset="-122"/>
                 <a:cs typeface="JetBrains Mono" pitchFamily="34" charset="-120"/>
               </a:rPr>
-              <a:t>
-</a:t>
-            </a:r>
+              <a:t>"target_event"</a:t>
+            </a:r>
+            <a:endParaRPr lang="en-US" sz="900" dirty="0"/>
+          </a:p>
+        </p:txBody>
+      </p:sp>
+      <p:sp>
+        <p:nvSpPr>
+          <p:cNvPr id="42" name="Text 38"/>
+          <p:cNvSpPr/>
+          <p:nvPr/>
+        </p:nvSpPr>
+        <p:spPr>
+          <a:xfrm>
+            <a:off x="4271963" y="2521744"/>
+            <a:ext cx="142875" cy="160734"/>
+          </a:xfrm>
+          <a:prstGeom prst="rect">
+            <a:avLst/>
+          </a:prstGeom>
+          <a:noFill/>
+          <a:ln/>
+        </p:spPr>
+        <p:txBody>
+          <a:bodyPr wrap="none" lIns="0" tIns="0" rIns="0" bIns="0" rtlCol="0" anchor="t">
+            <a:spAutoFit/>
+          </a:bodyPr>
+          <a:lstStyle/>
+          <a:p>
+            <a:pPr algn="l" indent="0" marL="0">
+              <a:lnSpc>
+                <a:spcPct val="120000"/>
+              </a:lnSpc>
+              <a:buNone/>
+            </a:pPr>
             <a:r>
               <a:rPr lang="en-US" sz="900" dirty="0">
                 <a:solidFill>
-                  <a:srgbClr val="9CDCFE"/>
+                  <a:srgbClr val="D4D4D4"/>
                 </a:solidFill>
                 <a:latin typeface="JetBrains Mono" pitchFamily="34" charset="0"/>
                 <a:ea typeface="JetBrains Mono" pitchFamily="34" charset="-122"/>
                 <a:cs typeface="JetBrains Mono" pitchFamily="34" charset="-120"/>
               </a:rPr>
-              <a:t>"formula"</a:t>
-            </a:r>
+              <a:t>:</a:t>
+            </a:r>
+            <a:endParaRPr lang="en-US" sz="900" dirty="0"/>
+          </a:p>
+        </p:txBody>
+      </p:sp>
+      <p:sp>
+        <p:nvSpPr>
+          <p:cNvPr id="43" name="Text 39"/>
+          <p:cNvSpPr/>
+          <p:nvPr/>
+        </p:nvSpPr>
+        <p:spPr>
+          <a:xfrm>
+            <a:off x="4414838" y="2521744"/>
+            <a:ext cx="785813" cy="160734"/>
+          </a:xfrm>
+          <a:prstGeom prst="rect">
+            <a:avLst/>
+          </a:prstGeom>
+          <a:noFill/>
+          <a:ln/>
+        </p:spPr>
+        <p:txBody>
+          <a:bodyPr wrap="none" lIns="0" tIns="0" rIns="0" bIns="0" rtlCol="0" anchor="t">
+            <a:spAutoFit/>
+          </a:bodyPr>
+          <a:lstStyle/>
+          <a:p>
+            <a:pPr algn="l" indent="0" marL="0">
+              <a:lnSpc>
+                <a:spcPct val="120000"/>
+              </a:lnSpc>
+              <a:buNone/>
+            </a:pPr>
             <a:r>
               <a:rPr lang="en-US" sz="900" dirty="0">
                 <a:solidFill>
-                  <a:srgbClr val="D4D4D4"/>
+                  <a:srgbClr val="CE9178"/>
                 </a:solidFill>
                 <a:latin typeface="JetBrains Mono" pitchFamily="34" charset="0"/>
                 <a:ea typeface="JetBrains Mono" pitchFamily="34" charset="-122"/>
                 <a:cs typeface="JetBrains Mono" pitchFamily="34" charset="-120"/>
               </a:rPr>
-              <a:t>: </a:t>
-            </a:r>
+              <a:t>"Default=1"</a:t>
+            </a:r>
+            <a:endParaRPr lang="en-US" sz="900" dirty="0"/>
+          </a:p>
+        </p:txBody>
+      </p:sp>
+      <p:sp>
+        <p:nvSpPr>
+          <p:cNvPr id="44" name="Text 40"/>
+          <p:cNvSpPr/>
+          <p:nvPr/>
+        </p:nvSpPr>
+        <p:spPr>
+          <a:xfrm>
+            <a:off x="5200650" y="2521744"/>
+            <a:ext cx="71438" cy="160734"/>
+          </a:xfrm>
+          <a:prstGeom prst="rect">
+            <a:avLst/>
+          </a:prstGeom>
+          <a:noFill/>
+          <a:ln/>
+        </p:spPr>
+        <p:txBody>
+          <a:bodyPr wrap="none" lIns="0" tIns="0" rIns="0" bIns="0" rtlCol="0" anchor="t">
+            <a:spAutoFit/>
+          </a:bodyPr>
+          <a:lstStyle/>
+          <a:p>
+            <a:pPr algn="l" indent="0" marL="0">
+              <a:lnSpc>
+                <a:spcPct val="120000"/>
+              </a:lnSpc>
+              <a:buNone/>
+            </a:pPr>
             <a:r>
               <a:rPr lang="en-US" sz="900" dirty="0">
                 <a:solidFill>
-                  <a:srgbClr val="CE9178"/>
+                  <a:srgbClr val="D4D4D4"/>
                 </a:solidFill>
                 <a:latin typeface="JetBrains Mono" pitchFamily="34" charset="0"/>
                 <a:ea typeface="JetBrains Mono" pitchFamily="34" charset="-122"/>
                 <a:cs typeface="JetBrains Mono" pitchFamily="34" charset="-120"/>
               </a:rPr>
-              <a:t>"phat = 1.0 / (1.0 + exp(-eta))"</a:t>
-            </a:r>
+              <a:t>,</a:t>
+            </a:r>
+            <a:endParaRPr lang="en-US" sz="900" dirty="0"/>
+          </a:p>
+        </p:txBody>
+      </p:sp>
+      <p:sp>
+        <p:nvSpPr>
+          <p:cNvPr id="45" name="Text 41"/>
+          <p:cNvSpPr/>
+          <p:nvPr/>
+        </p:nvSpPr>
+        <p:spPr>
+          <a:xfrm>
+            <a:off x="3271838" y="2703909"/>
+            <a:ext cx="785813" cy="160734"/>
+          </a:xfrm>
+          <a:prstGeom prst="rect">
+            <a:avLst/>
+          </a:prstGeom>
+          <a:noFill/>
+          <a:ln/>
+        </p:spPr>
+        <p:txBody>
+          <a:bodyPr wrap="none" lIns="0" tIns="0" rIns="0" bIns="0" rtlCol="0" anchor="t">
+            <a:spAutoFit/>
+          </a:bodyPr>
+          <a:lstStyle/>
+          <a:p>
+            <a:pPr algn="l" indent="0" marL="0">
+              <a:lnSpc>
+                <a:spcPct val="120000"/>
+              </a:lnSpc>
+              <a:buNone/>
+            </a:pPr>
             <a:r>
               <a:rPr lang="en-US" sz="900" dirty="0">
                 <a:solidFill>
-                  <a:srgbClr val="D4D4D4"/>
+                  <a:srgbClr val="9CDCFE"/>
                 </a:solidFill>
                 <a:latin typeface="JetBrains Mono" pitchFamily="34" charset="0"/>
                 <a:ea typeface="JetBrains Mono" pitchFamily="34" charset="-122"/>
                 <a:cs typeface="JetBrains Mono" pitchFamily="34" charset="-120"/>
               </a:rPr>
-              <a:t>,</a:t>
-            </a:r>
+              <a:t>"direction"</a:t>
+            </a:r>
+            <a:endParaRPr lang="en-US" sz="900" dirty="0"/>
+          </a:p>
+        </p:txBody>
+      </p:sp>
+      <p:sp>
+        <p:nvSpPr>
+          <p:cNvPr id="46" name="Text 42"/>
+          <p:cNvSpPr/>
+          <p:nvPr/>
+        </p:nvSpPr>
+        <p:spPr>
+          <a:xfrm>
+            <a:off x="4057650" y="2703909"/>
+            <a:ext cx="142875" cy="160734"/>
+          </a:xfrm>
+          <a:prstGeom prst="rect">
+            <a:avLst/>
+          </a:prstGeom>
+          <a:noFill/>
+          <a:ln/>
+        </p:spPr>
+        <p:txBody>
+          <a:bodyPr wrap="none" lIns="0" tIns="0" rIns="0" bIns="0" rtlCol="0" anchor="t">
+            <a:spAutoFit/>
+          </a:bodyPr>
+          <a:lstStyle/>
+          <a:p>
+            <a:pPr algn="l" indent="0" marL="0">
+              <a:lnSpc>
+                <a:spcPct val="120000"/>
+              </a:lnSpc>
+              <a:buNone/>
+            </a:pPr>
             <a:r>
               <a:rPr lang="en-US" sz="900" dirty="0">
                 <a:solidFill>
@@ -17536,20 +19407,85 @@
                 <a:ea typeface="JetBrains Mono" pitchFamily="34" charset="-122"/>
                 <a:cs typeface="JetBrains Mono" pitchFamily="34" charset="-120"/>
               </a:rPr>
-              <a:t>
-</a:t>
-            </a:r>
+              <a:t>:</a:t>
+            </a:r>
+            <a:endParaRPr lang="en-US" sz="900" dirty="0"/>
+          </a:p>
+        </p:txBody>
+      </p:sp>
+      <p:sp>
+        <p:nvSpPr>
+          <p:cNvPr id="47" name="Text 43"/>
+          <p:cNvSpPr/>
+          <p:nvPr/>
+        </p:nvSpPr>
+        <p:spPr>
+          <a:xfrm>
+            <a:off x="4200525" y="2703909"/>
+            <a:ext cx="857250" cy="160734"/>
+          </a:xfrm>
+          <a:prstGeom prst="rect">
+            <a:avLst/>
+          </a:prstGeom>
+          <a:noFill/>
+          <a:ln/>
+        </p:spPr>
+        <p:txBody>
+          <a:bodyPr wrap="none" lIns="0" tIns="0" rIns="0" bIns="0" rtlCol="0" anchor="t">
+            <a:spAutoFit/>
+          </a:bodyPr>
+          <a:lstStyle/>
+          <a:p>
+            <a:pPr algn="l" indent="0" marL="0">
+              <a:lnSpc>
+                <a:spcPct val="120000"/>
+              </a:lnSpc>
+              <a:buNone/>
+            </a:pPr>
             <a:r>
               <a:rPr lang="en-US" sz="900" dirty="0">
                 <a:solidFill>
-                  <a:srgbClr val="9CDCFE"/>
+                  <a:srgbClr val="CE9178"/>
                 </a:solidFill>
                 <a:latin typeface="JetBrains Mono" pitchFamily="34" charset="0"/>
                 <a:ea typeface="JetBrains Mono" pitchFamily="34" charset="-122"/>
                 <a:cs typeface="JetBrains Mono" pitchFamily="34" charset="-120"/>
               </a:rPr>
-              <a:t>"target_event"</a:t>
-            </a:r>
+              <a:t>"DESCENDING"</a:t>
+            </a:r>
+            <a:endParaRPr lang="en-US" sz="900" dirty="0"/>
+          </a:p>
+        </p:txBody>
+      </p:sp>
+      <p:sp>
+        <p:nvSpPr>
+          <p:cNvPr id="48" name="Text 44"/>
+          <p:cNvSpPr/>
+          <p:nvPr/>
+        </p:nvSpPr>
+        <p:spPr>
+          <a:xfrm>
+            <a:off x="3271838" y="2886075"/>
+            <a:ext cx="71438" cy="160734"/>
+          </a:xfrm>
+          <a:prstGeom prst="rect">
+            <a:avLst/>
+          </a:prstGeom>
+          <a:noFill/>
+          <a:ln/>
+        </p:spPr>
+        <p:txBody>
+          <a:bodyPr wrap="none" lIns="0" tIns="0" rIns="0" bIns="0" rtlCol="0" anchor="t">
+            <a:spAutoFit/>
+          </a:bodyPr>
+          <a:lstStyle/>
+          <a:p>
+            <a:pPr algn="l" indent="0" marL="0">
+              <a:lnSpc>
+                <a:spcPct val="120000"/>
+              </a:lnSpc>
+              <a:buNone/>
+            </a:pPr>
             <a:r>
               <a:rPr lang="en-US" sz="900" dirty="0">
                 <a:solidFill>
@@ -17559,96 +19495,6 @@
                 <a:ea typeface="JetBrains Mono" pitchFamily="34" charset="-122"/>
                 <a:cs typeface="JetBrains Mono" pitchFamily="34" charset="-120"/>
               </a:rPr>
-              <a:t>: </a:t>
-            </a:r>
-            <a:r>
-              <a:rPr lang="en-US" sz="900" dirty="0">
-                <a:solidFill>
-                  <a:srgbClr val="CE9178"/>
-                </a:solidFill>
-                <a:latin typeface="JetBrains Mono" pitchFamily="34" charset="0"/>
-                <a:ea typeface="JetBrains Mono" pitchFamily="34" charset="-122"/>
-                <a:cs typeface="JetBrains Mono" pitchFamily="34" charset="-120"/>
-              </a:rPr>
-              <a:t>"Default=1"</a:t>
-            </a:r>
-            <a:r>
-              <a:rPr lang="en-US" sz="900" dirty="0">
-                <a:solidFill>
-                  <a:srgbClr val="D4D4D4"/>
-                </a:solidFill>
-                <a:latin typeface="JetBrains Mono" pitchFamily="34" charset="0"/>
-                <a:ea typeface="JetBrains Mono" pitchFamily="34" charset="-122"/>
-                <a:cs typeface="JetBrains Mono" pitchFamily="34" charset="-120"/>
-              </a:rPr>
-              <a:t>,</a:t>
-            </a:r>
-            <a:r>
-              <a:rPr lang="en-US" sz="900" dirty="0">
-                <a:solidFill>
-                  <a:srgbClr val="D4D4D4"/>
-                </a:solidFill>
-                <a:latin typeface="JetBrains Mono" pitchFamily="34" charset="0"/>
-                <a:ea typeface="JetBrains Mono" pitchFamily="34" charset="-122"/>
-                <a:cs typeface="JetBrains Mono" pitchFamily="34" charset="-120"/>
-              </a:rPr>
-              <a:t>
-</a:t>
-            </a:r>
-            <a:r>
-              <a:rPr lang="en-US" sz="900" dirty="0">
-                <a:solidFill>
-                  <a:srgbClr val="9CDCFE"/>
-                </a:solidFill>
-                <a:latin typeface="JetBrains Mono" pitchFamily="34" charset="0"/>
-                <a:ea typeface="JetBrains Mono" pitchFamily="34" charset="-122"/>
-                <a:cs typeface="JetBrains Mono" pitchFamily="34" charset="-120"/>
-              </a:rPr>
-              <a:t>"direction"</a:t>
-            </a:r>
-            <a:r>
-              <a:rPr lang="en-US" sz="900" dirty="0">
-                <a:solidFill>
-                  <a:srgbClr val="D4D4D4"/>
-                </a:solidFill>
-                <a:latin typeface="JetBrains Mono" pitchFamily="34" charset="0"/>
-                <a:ea typeface="JetBrains Mono" pitchFamily="34" charset="-122"/>
-                <a:cs typeface="JetBrains Mono" pitchFamily="34" charset="-120"/>
-              </a:rPr>
-              <a:t>: </a:t>
-            </a:r>
-            <a:r>
-              <a:rPr lang="en-US" sz="900" dirty="0">
-                <a:solidFill>
-                  <a:srgbClr val="CE9178"/>
-                </a:solidFill>
-                <a:latin typeface="JetBrains Mono" pitchFamily="34" charset="0"/>
-                <a:ea typeface="JetBrains Mono" pitchFamily="34" charset="-122"/>
-                <a:cs typeface="JetBrains Mono" pitchFamily="34" charset="-120"/>
-              </a:rPr>
-              <a:t>"DESCENDING"</a:t>
-            </a:r>
-            <a:r>
-              <a:rPr lang="en-US" sz="900" dirty="0">
-                <a:solidFill>
-                  <a:srgbClr val="D4D4D4"/>
-                </a:solidFill>
-                <a:latin typeface="JetBrains Mono" pitchFamily="34" charset="0"/>
-                <a:ea typeface="JetBrains Mono" pitchFamily="34" charset="-122"/>
-                <a:cs typeface="JetBrains Mono" pitchFamily="34" charset="-120"/>
-              </a:rPr>
-              <a:t>
-</a:t>
-            </a:r>
-            <a:r>
-              <a:rPr lang="en-US" sz="900" dirty="0">
-                <a:solidFill>
-                  <a:srgbClr val="D4D4D4"/>
-                </a:solidFill>
-                <a:latin typeface="JetBrains Mono" pitchFamily="34" charset="0"/>
-                <a:ea typeface="JetBrains Mono" pitchFamily="34" charset="-122"/>
-                <a:cs typeface="JetBrains Mono" pitchFamily="34" charset="-120"/>
-              </a:rPr>
               <a:t>}</a:t>
             </a:r>
             <a:endParaRPr lang="en-US" sz="900" dirty="0"/>
@@ -17657,7 +19503,7 @@
       </p:sp>
       <p:sp>
         <p:nvSpPr>
-          <p:cNvPr id="23" name="Shape 19"/>
+          <p:cNvPr id="49" name="Shape 45"/>
           <p:cNvSpPr/>
           <p:nvPr/>
         </p:nvSpPr>
@@ -17677,7 +19523,7 @@
       </p:sp>
       <p:sp>
         <p:nvSpPr>
-          <p:cNvPr id="24" name="Shape 20"/>
+          <p:cNvPr id="50" name="Shape 46"/>
           <p:cNvSpPr/>
           <p:nvPr/>
         </p:nvSpPr>
@@ -17697,7 +19543,7 @@
       </p:sp>
       <p:sp>
         <p:nvSpPr>
-          <p:cNvPr id="25" name="Text 21"/>
+          <p:cNvPr id="51" name="Text 47"/>
           <p:cNvSpPr/>
           <p:nvPr/>
         </p:nvSpPr>
@@ -17738,7 +19584,7 @@
       </p:sp>
       <p:sp>
         <p:nvSpPr>
-          <p:cNvPr id="26" name="Text 22"/>
+          <p:cNvPr id="52" name="Text 48"/>
           <p:cNvSpPr/>
           <p:nvPr/>
         </p:nvSpPr>
@@ -18593,8 +20439,8 @@
         </p:nvSpPr>
         <p:spPr>
           <a:xfrm>
-            <a:off x="3271838" y="1578769"/>
-            <a:ext cx="203597" cy="153591"/>
+            <a:off x="7747397" y="1184077"/>
+            <a:ext cx="1025128" cy="103584"/>
           </a:xfrm>
           <a:prstGeom prst="rect">
             <a:avLst/>
@@ -18604,129 +20450,247 @@
         </p:spPr>
         <p:txBody>
           <a:bodyPr wrap="none" lIns="0" tIns="0" rIns="0" bIns="0" rtlCol="0" anchor="t">
+            <a:spAutoFit/>
+          </a:bodyPr>
+          <a:lstStyle/>
+          <a:p>
+            <a:pPr algn="l" indent="0" marL="0">
+              <a:buNone/>
+            </a:pPr>
+            <a:r>
+              <a:rPr lang="en-US" sz="600" b="1" spc="1" kern="0" dirty="0">
+                <a:solidFill>
+                  <a:srgbClr val="9CDCFE"/>
+                </a:solidFill>
+                <a:latin typeface="Inter Bold" pitchFamily="34" charset="0"/>
+                <a:ea typeface="Inter Bold" pitchFamily="34" charset="-122"/>
+                <a:cs typeface="Inter Bold" pitchFamily="34" charset="-120"/>
+              </a:rPr>
+              <a:t>GENERATED OUTPUT</a:t>
+            </a:r>
+            <a:endParaRPr lang="en-US" sz="600" dirty="0"/>
+          </a:p>
+        </p:txBody>
+      </p:sp>
+      <p:sp>
+        <p:nvSpPr>
+          <p:cNvPr id="23" name="Text 19"/>
+          <p:cNvSpPr/>
+          <p:nvPr/>
+        </p:nvSpPr>
+        <p:spPr>
+          <a:xfrm>
+            <a:off x="3200400" y="1528763"/>
+            <a:ext cx="242888" cy="235744"/>
+          </a:xfrm>
+          <a:prstGeom prst="rect">
+            <a:avLst/>
+          </a:prstGeom>
+          <a:noFill/>
+          <a:ln/>
+        </p:spPr>
+        <p:txBody>
+          <a:bodyPr wrap="square" lIns="0" tIns="0" rIns="85090" bIns="0" rtlCol="0" anchor="t">
             <a:spAutoFit/>
           </a:bodyPr>
           <a:lstStyle/>
           <a:p>
             <a:pPr algn="l" indent="0" marL="0">
               <a:lnSpc>
-                <a:spcPct val="120000"/>
+                <a:spcPct val="96000"/>
               </a:lnSpc>
               <a:buNone/>
             </a:pPr>
             <a:r>
-              <a:rPr lang="en-US" sz="800" b="1" dirty="0">
-                <a:solidFill>
-                  <a:srgbClr val="569CD6"/>
-                </a:solidFill>
-                <a:latin typeface="JetBrains Mono Bold" pitchFamily="34" charset="0"/>
-                <a:ea typeface="JetBrains Mono Bold" pitchFamily="34" charset="-122"/>
-                <a:cs typeface="JetBrains Mono Bold" pitchFamily="34" charset="-120"/>
-              </a:rPr>
-              <a:t>def</a:t>
-            </a:r>
-            <a:endParaRPr lang="en-US" sz="800" dirty="0"/>
-          </a:p>
-        </p:txBody>
-      </p:sp>
-      <p:sp>
-        <p:nvSpPr>
-          <p:cNvPr id="23" name="Text 19"/>
-          <p:cNvSpPr/>
-          <p:nvPr/>
-        </p:nvSpPr>
-        <p:spPr>
-          <a:xfrm>
-            <a:off x="3543300" y="1578769"/>
-            <a:ext cx="542925" cy="153591"/>
-          </a:xfrm>
-          <a:prstGeom prst="rect">
-            <a:avLst/>
-          </a:prstGeom>
-          <a:noFill/>
-          <a:ln/>
-        </p:spPr>
-        <p:txBody>
-          <a:bodyPr wrap="none" lIns="0" tIns="0" rIns="0" bIns="0" rtlCol="0" anchor="t">
+              <a:rPr lang="en-US" sz="600" dirty="0">
+                <a:solidFill>
+                  <a:srgbClr val="707070"/>
+                </a:solidFill>
+                <a:latin typeface="Consolas" pitchFamily="34" charset="0"/>
+                <a:ea typeface="Consolas" pitchFamily="34" charset="-122"/>
+                <a:cs typeface="Consolas" pitchFamily="34" charset="-120"/>
+              </a:rPr>
+              <a:t>1</a:t>
+            </a:r>
+            <a:endParaRPr lang="en-US" sz="600" dirty="0"/>
+          </a:p>
+        </p:txBody>
+      </p:sp>
+      <p:sp>
+        <p:nvSpPr>
+          <p:cNvPr id="24" name="Text 20"/>
+          <p:cNvSpPr/>
+          <p:nvPr/>
+        </p:nvSpPr>
+        <p:spPr>
+          <a:xfrm>
+            <a:off x="3443288" y="1584461"/>
+            <a:ext cx="5300663" cy="124290"/>
+          </a:xfrm>
+          <a:prstGeom prst="rect">
+            <a:avLst/>
+          </a:prstGeom>
+          <a:noFill/>
+          <a:ln/>
+        </p:spPr>
+        <p:txBody>
+          <a:bodyPr wrap="none" lIns="119126" tIns="0" rIns="0" bIns="0" rtlCol="0" anchor="t">
             <a:spAutoFit/>
           </a:bodyPr>
           <a:lstStyle/>
           <a:p>
             <a:pPr algn="l" indent="0" marL="0">
               <a:lnSpc>
-                <a:spcPct val="120000"/>
+                <a:spcPct val="96000"/>
               </a:lnSpc>
               <a:buNone/>
             </a:pPr>
             <a:r>
-              <a:rPr lang="en-US" sz="850" dirty="0">
+              <a:rPr lang="en-US" sz="700" b="1" dirty="0">
+                <a:solidFill>
+                  <a:srgbClr val="569CD6"/>
+                </a:solidFill>
+                <a:latin typeface="Consolas" pitchFamily="34" charset="0"/>
+                <a:ea typeface="Consolas" pitchFamily="34" charset="-122"/>
+                <a:cs typeface="Consolas" pitchFamily="34" charset="-120"/>
+              </a:rPr>
+              <a:t>def</a:t>
+            </a:r>
+            <a:r>
+              <a:rPr lang="en-US" sz="750" dirty="0">
+                <a:solidFill>
+                  <a:srgbClr val="D4D4D4"/>
+                </a:solidFill>
+                <a:latin typeface="Consolas" pitchFamily="34" charset="0"/>
+                <a:ea typeface="Consolas" pitchFamily="34" charset="-122"/>
+                <a:cs typeface="Consolas" pitchFamily="34" charset="-120"/>
+              </a:rPr>
+              <a:t> </a:t>
+            </a:r>
+            <a:r>
+              <a:rPr lang="en-US" sz="750" dirty="0">
                 <a:solidFill>
                   <a:srgbClr val="DCDCAA"/>
                 </a:solidFill>
-                <a:latin typeface="JetBrains Mono" pitchFamily="34" charset="0"/>
-                <a:ea typeface="JetBrains Mono" pitchFamily="34" charset="-122"/>
-                <a:cs typeface="JetBrains Mono" pitchFamily="34" charset="-120"/>
+                <a:latin typeface="Consolas" pitchFamily="34" charset="0"/>
+                <a:ea typeface="Consolas" pitchFamily="34" charset="-122"/>
+                <a:cs typeface="Consolas" pitchFamily="34" charset="-120"/>
               </a:rPr>
               <a:t>logistic</a:t>
             </a:r>
-            <a:endParaRPr lang="en-US" sz="850" dirty="0"/>
-          </a:p>
-        </p:txBody>
-      </p:sp>
-      <p:sp>
-        <p:nvSpPr>
-          <p:cNvPr id="24" name="Text 20"/>
-          <p:cNvSpPr/>
-          <p:nvPr/>
-        </p:nvSpPr>
-        <p:spPr>
-          <a:xfrm>
-            <a:off x="4086225" y="1578769"/>
-            <a:ext cx="407194" cy="153591"/>
-          </a:xfrm>
-          <a:prstGeom prst="rect">
-            <a:avLst/>
-          </a:prstGeom>
-          <a:noFill/>
-          <a:ln/>
-        </p:spPr>
-        <p:txBody>
-          <a:bodyPr wrap="none" lIns="0" tIns="0" rIns="0" bIns="0" rtlCol="0" anchor="t">
+            <a:r>
+              <a:rPr lang="en-US" sz="750" dirty="0">
+                <a:solidFill>
+                  <a:srgbClr val="D4D4D4"/>
+                </a:solidFill>
+                <a:latin typeface="Consolas" pitchFamily="34" charset="0"/>
+                <a:ea typeface="Consolas" pitchFamily="34" charset="-122"/>
+                <a:cs typeface="Consolas" pitchFamily="34" charset="-120"/>
+              </a:rPr>
+              <a:t>(eta: </a:t>
+            </a:r>
+            <a:r>
+              <a:rPr lang="en-US" sz="700" b="1" dirty="0">
+                <a:solidFill>
+                  <a:srgbClr val="569CD6"/>
+                </a:solidFill>
+                <a:latin typeface="Consolas" pitchFamily="34" charset="0"/>
+                <a:ea typeface="Consolas" pitchFamily="34" charset="-122"/>
+                <a:cs typeface="Consolas" pitchFamily="34" charset="-120"/>
+              </a:rPr>
+              <a:t>float</a:t>
+            </a:r>
+            <a:r>
+              <a:rPr lang="en-US" sz="750" dirty="0">
+                <a:solidFill>
+                  <a:srgbClr val="D4D4D4"/>
+                </a:solidFill>
+                <a:latin typeface="Consolas" pitchFamily="34" charset="0"/>
+                <a:ea typeface="Consolas" pitchFamily="34" charset="-122"/>
+                <a:cs typeface="Consolas" pitchFamily="34" charset="-120"/>
+              </a:rPr>
+              <a:t>) -&gt; </a:t>
+            </a:r>
+            <a:r>
+              <a:rPr lang="en-US" sz="700" b="1" dirty="0">
+                <a:solidFill>
+                  <a:srgbClr val="569CD6"/>
+                </a:solidFill>
+                <a:latin typeface="Consolas" pitchFamily="34" charset="0"/>
+                <a:ea typeface="Consolas" pitchFamily="34" charset="-122"/>
+                <a:cs typeface="Consolas" pitchFamily="34" charset="-120"/>
+              </a:rPr>
+              <a:t>float</a:t>
+            </a:r>
+            <a:r>
+              <a:rPr lang="en-US" sz="750" dirty="0">
+                <a:solidFill>
+                  <a:srgbClr val="D4D4D4"/>
+                </a:solidFill>
+                <a:latin typeface="Consolas" pitchFamily="34" charset="0"/>
+                <a:ea typeface="Consolas" pitchFamily="34" charset="-122"/>
+                <a:cs typeface="Consolas" pitchFamily="34" charset="-120"/>
+              </a:rPr>
+              <a:t>:</a:t>
+            </a:r>
+            <a:endParaRPr lang="en-US" sz="700" dirty="0"/>
+          </a:p>
+        </p:txBody>
+      </p:sp>
+      <p:sp>
+        <p:nvSpPr>
+          <p:cNvPr id="25" name="Text 21"/>
+          <p:cNvSpPr/>
+          <p:nvPr/>
+        </p:nvSpPr>
+        <p:spPr>
+          <a:xfrm>
+            <a:off x="3200400" y="1771650"/>
+            <a:ext cx="242888" cy="235744"/>
+          </a:xfrm>
+          <a:prstGeom prst="rect">
+            <a:avLst/>
+          </a:prstGeom>
+          <a:noFill/>
+          <a:ln/>
+        </p:spPr>
+        <p:txBody>
+          <a:bodyPr wrap="square" lIns="0" tIns="0" rIns="85090" bIns="0" rtlCol="0" anchor="t">
             <a:spAutoFit/>
           </a:bodyPr>
           <a:lstStyle/>
           <a:p>
             <a:pPr algn="l" indent="0" marL="0">
               <a:lnSpc>
-                <a:spcPct val="120000"/>
+                <a:spcPct val="96000"/>
               </a:lnSpc>
               <a:buNone/>
             </a:pPr>
             <a:r>
-              <a:rPr lang="en-US" sz="850" dirty="0">
-                <a:solidFill>
-                  <a:srgbClr val="D4D4D4"/>
-                </a:solidFill>
-                <a:latin typeface="JetBrains Mono" pitchFamily="34" charset="0"/>
-                <a:ea typeface="JetBrains Mono" pitchFamily="34" charset="-122"/>
-                <a:cs typeface="JetBrains Mono" pitchFamily="34" charset="-120"/>
-              </a:rPr>
-              <a:t>(eta:</a:t>
-            </a:r>
-            <a:endParaRPr lang="en-US" sz="850" dirty="0"/>
-          </a:p>
-        </p:txBody>
-      </p:sp>
-      <p:sp>
-        <p:nvSpPr>
-          <p:cNvPr id="25" name="Text 21"/>
-          <p:cNvSpPr/>
-          <p:nvPr/>
-        </p:nvSpPr>
-        <p:spPr>
-          <a:xfrm>
-            <a:off x="4493419" y="1578769"/>
-            <a:ext cx="339328" cy="153591"/>
+              <a:rPr lang="en-US" sz="600" dirty="0">
+                <a:solidFill>
+                  <a:srgbClr val="707070"/>
+                </a:solidFill>
+                <a:latin typeface="Consolas" pitchFamily="34" charset="0"/>
+                <a:ea typeface="Consolas" pitchFamily="34" charset="-122"/>
+                <a:cs typeface="Consolas" pitchFamily="34" charset="-120"/>
+              </a:rPr>
+              <a:t>2</a:t>
+            </a:r>
+            <a:endParaRPr lang="en-US" sz="600" dirty="0"/>
+          </a:p>
+        </p:txBody>
+      </p:sp>
+      <p:sp>
+        <p:nvSpPr>
+          <p:cNvPr id="26" name="Text 22"/>
+          <p:cNvSpPr/>
+          <p:nvPr/>
+        </p:nvSpPr>
+        <p:spPr>
+          <a:xfrm>
+            <a:off x="3743325" y="1827349"/>
+            <a:ext cx="3232379" cy="117872"/>
           </a:xfrm>
           <a:prstGeom prst="rect">
             <a:avLst/>
@@ -18742,79 +20706,79 @@
           <a:p>
             <a:pPr algn="l" indent="0" marL="0">
               <a:lnSpc>
-                <a:spcPct val="120000"/>
+                <a:spcPct val="96000"/>
               </a:lnSpc>
               <a:buNone/>
             </a:pPr>
             <a:r>
-              <a:rPr lang="en-US" sz="800" b="1" dirty="0">
-                <a:solidFill>
-                  <a:srgbClr val="569CD6"/>
-                </a:solidFill>
-                <a:latin typeface="JetBrains Mono Bold" pitchFamily="34" charset="0"/>
-                <a:ea typeface="JetBrains Mono Bold" pitchFamily="34" charset="-122"/>
-                <a:cs typeface="JetBrains Mono Bold" pitchFamily="34" charset="-120"/>
-              </a:rPr>
-              <a:t>float</a:t>
-            </a:r>
-            <a:endParaRPr lang="en-US" sz="800" dirty="0"/>
-          </a:p>
-        </p:txBody>
-      </p:sp>
-      <p:sp>
-        <p:nvSpPr>
-          <p:cNvPr id="26" name="Text 22"/>
-          <p:cNvSpPr/>
-          <p:nvPr/>
-        </p:nvSpPr>
-        <p:spPr>
-          <a:xfrm>
-            <a:off x="4832747" y="1578769"/>
-            <a:ext cx="339328" cy="153591"/>
-          </a:xfrm>
-          <a:prstGeom prst="rect">
-            <a:avLst/>
-          </a:prstGeom>
-          <a:noFill/>
-          <a:ln/>
-        </p:spPr>
-        <p:txBody>
-          <a:bodyPr wrap="none" lIns="0" tIns="0" rIns="0" bIns="0" rtlCol="0" anchor="t">
+              <a:rPr lang="en-US" sz="750" dirty="0">
+                <a:solidFill>
+                  <a:srgbClr val="CE9178"/>
+                </a:solidFill>
+                <a:latin typeface="Consolas" pitchFamily="34" charset="0"/>
+                <a:ea typeface="Consolas" pitchFamily="34" charset="-122"/>
+                <a:cs typeface="Consolas" pitchFamily="34" charset="-120"/>
+              </a:rPr>
+              <a:t>"""Return a numerically stable logistic probability.</a:t>
+            </a:r>
+            <a:endParaRPr lang="en-US" sz="750" dirty="0"/>
+          </a:p>
+        </p:txBody>
+      </p:sp>
+      <p:sp>
+        <p:nvSpPr>
+          <p:cNvPr id="27" name="Text 23"/>
+          <p:cNvSpPr/>
+          <p:nvPr/>
+        </p:nvSpPr>
+        <p:spPr>
+          <a:xfrm>
+            <a:off x="3200400" y="2014538"/>
+            <a:ext cx="242888" cy="235744"/>
+          </a:xfrm>
+          <a:prstGeom prst="rect">
+            <a:avLst/>
+          </a:prstGeom>
+          <a:noFill/>
+          <a:ln/>
+        </p:spPr>
+        <p:txBody>
+          <a:bodyPr wrap="square" lIns="0" tIns="0" rIns="85090" bIns="0" rtlCol="0" anchor="t">
             <a:spAutoFit/>
           </a:bodyPr>
           <a:lstStyle/>
           <a:p>
             <a:pPr algn="l" indent="0" marL="0">
               <a:lnSpc>
-                <a:spcPct val="120000"/>
+                <a:spcPct val="96000"/>
               </a:lnSpc>
               <a:buNone/>
             </a:pPr>
             <a:r>
-              <a:rPr lang="en-US" sz="850" dirty="0">
-                <a:solidFill>
-                  <a:srgbClr val="D4D4D4"/>
-                </a:solidFill>
-                <a:latin typeface="JetBrains Mono" pitchFamily="34" charset="0"/>
-                <a:ea typeface="JetBrains Mono" pitchFamily="34" charset="-122"/>
-                <a:cs typeface="JetBrains Mono" pitchFamily="34" charset="-120"/>
-              </a:rPr>
-              <a:t>) -&gt;</a:t>
-            </a:r>
-            <a:endParaRPr lang="en-US" sz="850" dirty="0"/>
-          </a:p>
-        </p:txBody>
-      </p:sp>
-      <p:sp>
-        <p:nvSpPr>
-          <p:cNvPr id="27" name="Text 23"/>
-          <p:cNvSpPr/>
-          <p:nvPr/>
-        </p:nvSpPr>
-        <p:spPr>
-          <a:xfrm>
-            <a:off x="5172075" y="1578769"/>
-            <a:ext cx="339328" cy="153591"/>
+              <a:rPr lang="en-US" sz="600" dirty="0">
+                <a:solidFill>
+                  <a:srgbClr val="707070"/>
+                </a:solidFill>
+                <a:latin typeface="Consolas" pitchFamily="34" charset="0"/>
+                <a:ea typeface="Consolas" pitchFamily="34" charset="-122"/>
+                <a:cs typeface="Consolas" pitchFamily="34" charset="-120"/>
+              </a:rPr>
+              <a:t>3</a:t>
+            </a:r>
+            <a:endParaRPr lang="en-US" sz="600" dirty="0"/>
+          </a:p>
+        </p:txBody>
+      </p:sp>
+      <p:sp>
+        <p:nvSpPr>
+          <p:cNvPr id="28" name="Text 24"/>
+          <p:cNvSpPr/>
+          <p:nvPr/>
+        </p:nvSpPr>
+        <p:spPr>
+          <a:xfrm>
+            <a:off x="3743325" y="2070236"/>
+            <a:ext cx="2610762" cy="117872"/>
           </a:xfrm>
           <a:prstGeom prst="rect">
             <a:avLst/>
@@ -18830,79 +20794,79 @@
           <a:p>
             <a:pPr algn="l" indent="0" marL="0">
               <a:lnSpc>
-                <a:spcPct val="120000"/>
+                <a:spcPct val="96000"/>
               </a:lnSpc>
               <a:buNone/>
             </a:pPr>
             <a:r>
-              <a:rPr lang="en-US" sz="800" b="1" dirty="0">
-                <a:solidFill>
-                  <a:srgbClr val="569CD6"/>
-                </a:solidFill>
-                <a:latin typeface="JetBrains Mono Bold" pitchFamily="34" charset="0"/>
-                <a:ea typeface="JetBrains Mono Bold" pitchFamily="34" charset="-122"/>
-                <a:cs typeface="JetBrains Mono Bold" pitchFamily="34" charset="-120"/>
-              </a:rPr>
-              <a:t>float</a:t>
-            </a:r>
-            <a:endParaRPr lang="en-US" sz="800" dirty="0"/>
-          </a:p>
-        </p:txBody>
-      </p:sp>
-      <p:sp>
-        <p:nvSpPr>
-          <p:cNvPr id="28" name="Text 24"/>
-          <p:cNvSpPr/>
-          <p:nvPr/>
-        </p:nvSpPr>
-        <p:spPr>
-          <a:xfrm>
-            <a:off x="5511403" y="1578769"/>
-            <a:ext cx="67866" cy="153591"/>
-          </a:xfrm>
-          <a:prstGeom prst="rect">
-            <a:avLst/>
-          </a:prstGeom>
-          <a:noFill/>
-          <a:ln/>
-        </p:spPr>
-        <p:txBody>
-          <a:bodyPr wrap="none" lIns="0" tIns="0" rIns="0" bIns="0" rtlCol="0" anchor="t">
+              <a:rPr lang="en-US" sz="750" dirty="0">
+                <a:solidFill>
+                  <a:srgbClr val="CE9178"/>
+                </a:solidFill>
+                <a:latin typeface="Consolas" pitchFamily="34" charset="0"/>
+                <a:ea typeface="Consolas" pitchFamily="34" charset="-122"/>
+                <a:cs typeface="Consolas" pitchFamily="34" charset="-120"/>
+              </a:rPr>
+              <a:t>Transforms eta to probability p in [0, 1].</a:t>
+            </a:r>
+            <a:endParaRPr lang="en-US" sz="750" dirty="0"/>
+          </a:p>
+        </p:txBody>
+      </p:sp>
+      <p:sp>
+        <p:nvSpPr>
+          <p:cNvPr id="29" name="Text 25"/>
+          <p:cNvSpPr/>
+          <p:nvPr/>
+        </p:nvSpPr>
+        <p:spPr>
+          <a:xfrm>
+            <a:off x="3200400" y="2257425"/>
+            <a:ext cx="242888" cy="235744"/>
+          </a:xfrm>
+          <a:prstGeom prst="rect">
+            <a:avLst/>
+          </a:prstGeom>
+          <a:noFill/>
+          <a:ln/>
+        </p:spPr>
+        <p:txBody>
+          <a:bodyPr wrap="square" lIns="0" tIns="0" rIns="85090" bIns="0" rtlCol="0" anchor="t">
             <a:spAutoFit/>
           </a:bodyPr>
           <a:lstStyle/>
           <a:p>
             <a:pPr algn="l" indent="0" marL="0">
               <a:lnSpc>
-                <a:spcPct val="120000"/>
+                <a:spcPct val="96000"/>
               </a:lnSpc>
               <a:buNone/>
             </a:pPr>
             <a:r>
-              <a:rPr lang="en-US" sz="850" dirty="0">
-                <a:solidFill>
-                  <a:srgbClr val="D4D4D4"/>
-                </a:solidFill>
-                <a:latin typeface="JetBrains Mono" pitchFamily="34" charset="0"/>
-                <a:ea typeface="JetBrains Mono" pitchFamily="34" charset="-122"/>
-                <a:cs typeface="JetBrains Mono" pitchFamily="34" charset="-120"/>
-              </a:rPr>
-              <a:t>:</a:t>
-            </a:r>
-            <a:endParaRPr lang="en-US" sz="850" dirty="0"/>
-          </a:p>
-        </p:txBody>
-      </p:sp>
-      <p:sp>
-        <p:nvSpPr>
-          <p:cNvPr id="29" name="Text 25"/>
-          <p:cNvSpPr/>
-          <p:nvPr/>
-        </p:nvSpPr>
-        <p:spPr>
-          <a:xfrm>
-            <a:off x="3271838" y="1750219"/>
-            <a:ext cx="3529013" cy="153591"/>
+              <a:rPr lang="en-US" sz="600" dirty="0">
+                <a:solidFill>
+                  <a:srgbClr val="707070"/>
+                </a:solidFill>
+                <a:latin typeface="Consolas" pitchFamily="34" charset="0"/>
+                <a:ea typeface="Consolas" pitchFamily="34" charset="-122"/>
+                <a:cs typeface="Consolas" pitchFamily="34" charset="-120"/>
+              </a:rPr>
+              <a:t>4</a:t>
+            </a:r>
+            <a:endParaRPr lang="en-US" sz="600" dirty="0"/>
+          </a:p>
+        </p:txBody>
+      </p:sp>
+      <p:sp>
+        <p:nvSpPr>
+          <p:cNvPr id="30" name="Text 26"/>
+          <p:cNvSpPr/>
+          <p:nvPr/>
+        </p:nvSpPr>
+        <p:spPr>
+          <a:xfrm>
+            <a:off x="3743325" y="2313124"/>
+            <a:ext cx="3108089" cy="117872"/>
           </a:xfrm>
           <a:prstGeom prst="rect">
             <a:avLst/>
@@ -18918,79 +20882,79 @@
           <a:p>
             <a:pPr algn="l" indent="0" marL="0">
               <a:lnSpc>
-                <a:spcPct val="120000"/>
+                <a:spcPct val="96000"/>
               </a:lnSpc>
               <a:buNone/>
             </a:pPr>
             <a:r>
-              <a:rPr lang="en-US" sz="850" dirty="0">
+              <a:rPr lang="en-US" sz="750" dirty="0">
                 <a:solidFill>
                   <a:srgbClr val="CE9178"/>
                 </a:solidFill>
-                <a:latin typeface="JetBrains Mono" pitchFamily="34" charset="0"/>
-                <a:ea typeface="JetBrains Mono" pitchFamily="34" charset="-122"/>
-                <a:cs typeface="JetBrains Mono" pitchFamily="34" charset="-120"/>
-              </a:rPr>
-              <a:t>"""Return a numerically stable logistic probability.</a:t>
-            </a:r>
-            <a:endParaRPr lang="en-US" sz="850" dirty="0"/>
-          </a:p>
-        </p:txBody>
-      </p:sp>
-      <p:sp>
-        <p:nvSpPr>
-          <p:cNvPr id="30" name="Text 26"/>
-          <p:cNvSpPr/>
-          <p:nvPr/>
-        </p:nvSpPr>
-        <p:spPr>
-          <a:xfrm>
-            <a:off x="3271838" y="1921669"/>
-            <a:ext cx="4004072" cy="153591"/>
-          </a:xfrm>
-          <a:prstGeom prst="rect">
-            <a:avLst/>
-          </a:prstGeom>
-          <a:noFill/>
-          <a:ln/>
-        </p:spPr>
-        <p:txBody>
-          <a:bodyPr wrap="none" lIns="0" tIns="0" rIns="0" bIns="0" rtlCol="0" anchor="t">
+                <a:latin typeface="Consolas" pitchFamily="34" charset="0"/>
+                <a:ea typeface="Consolas" pitchFamily="34" charset="-122"/>
+                <a:cs typeface="Consolas" pitchFamily="34" charset="-120"/>
+              </a:rPr>
+              <a:t>SAS citation: intake/sas/log_reg_model.sas:423-441</a:t>
+            </a:r>
+            <a:endParaRPr lang="en-US" sz="750" dirty="0"/>
+          </a:p>
+        </p:txBody>
+      </p:sp>
+      <p:sp>
+        <p:nvSpPr>
+          <p:cNvPr id="31" name="Text 27"/>
+          <p:cNvSpPr/>
+          <p:nvPr/>
+        </p:nvSpPr>
+        <p:spPr>
+          <a:xfrm>
+            <a:off x="3200400" y="2500313"/>
+            <a:ext cx="242888" cy="235744"/>
+          </a:xfrm>
+          <a:prstGeom prst="rect">
+            <a:avLst/>
+          </a:prstGeom>
+          <a:noFill/>
+          <a:ln/>
+        </p:spPr>
+        <p:txBody>
+          <a:bodyPr wrap="square" lIns="0" tIns="0" rIns="85090" bIns="0" rtlCol="0" anchor="t">
             <a:spAutoFit/>
           </a:bodyPr>
           <a:lstStyle/>
           <a:p>
             <a:pPr algn="l" indent="0" marL="0">
               <a:lnSpc>
-                <a:spcPct val="120000"/>
+                <a:spcPct val="96000"/>
               </a:lnSpc>
               <a:buNone/>
             </a:pPr>
             <a:r>
-              <a:rPr lang="en-US" sz="850" dirty="0">
-                <a:solidFill>
-                  <a:srgbClr val="CE9178"/>
-                </a:solidFill>
-                <a:latin typeface="JetBrains Mono" pitchFamily="34" charset="0"/>
-                <a:ea typeface="JetBrains Mono" pitchFamily="34" charset="-122"/>
-                <a:cs typeface="JetBrains Mono" pitchFamily="34" charset="-120"/>
-              </a:rPr>
-              <a:t>Transforms linear predictor eta to probability p in [0, 1].</a:t>
-            </a:r>
-            <a:endParaRPr lang="en-US" sz="850" dirty="0"/>
-          </a:p>
-        </p:txBody>
-      </p:sp>
-      <p:sp>
-        <p:nvSpPr>
-          <p:cNvPr id="31" name="Text 27"/>
-          <p:cNvSpPr/>
-          <p:nvPr/>
-        </p:nvSpPr>
-        <p:spPr>
-          <a:xfrm>
-            <a:off x="3271838" y="2093119"/>
-            <a:ext cx="3393281" cy="153591"/>
+              <a:rPr lang="en-US" sz="600" dirty="0">
+                <a:solidFill>
+                  <a:srgbClr val="707070"/>
+                </a:solidFill>
+                <a:latin typeface="Consolas" pitchFamily="34" charset="0"/>
+                <a:ea typeface="Consolas" pitchFamily="34" charset="-122"/>
+                <a:cs typeface="Consolas" pitchFamily="34" charset="-120"/>
+              </a:rPr>
+              <a:t>5</a:t>
+            </a:r>
+            <a:endParaRPr lang="en-US" sz="600" dirty="0"/>
+          </a:p>
+        </p:txBody>
+      </p:sp>
+      <p:sp>
+        <p:nvSpPr>
+          <p:cNvPr id="32" name="Text 28"/>
+          <p:cNvSpPr/>
+          <p:nvPr/>
+        </p:nvSpPr>
+        <p:spPr>
+          <a:xfrm>
+            <a:off x="3743325" y="2556011"/>
+            <a:ext cx="186519" cy="117872"/>
           </a:xfrm>
           <a:prstGeom prst="rect">
             <a:avLst/>
@@ -19006,351 +20970,228 @@
           <a:p>
             <a:pPr algn="l" indent="0" marL="0">
               <a:lnSpc>
-                <a:spcPct val="120000"/>
+                <a:spcPct val="96000"/>
               </a:lnSpc>
               <a:buNone/>
             </a:pPr>
             <a:r>
-              <a:rPr lang="en-US" sz="850" dirty="0">
+              <a:rPr lang="en-US" sz="750" dirty="0">
                 <a:solidFill>
                   <a:srgbClr val="CE9178"/>
                 </a:solidFill>
-                <a:latin typeface="JetBrains Mono" pitchFamily="34" charset="0"/>
-                <a:ea typeface="JetBrains Mono" pitchFamily="34" charset="-122"/>
-                <a:cs typeface="JetBrains Mono" pitchFamily="34" charset="-120"/>
-              </a:rPr>
-              <a:t>SAS citation: intake/sas/log_reg_model.sas:423-441</a:t>
-            </a:r>
-            <a:endParaRPr lang="en-US" sz="850" dirty="0"/>
-          </a:p>
-        </p:txBody>
-      </p:sp>
-      <p:sp>
-        <p:nvSpPr>
-          <p:cNvPr id="32" name="Text 28"/>
-          <p:cNvSpPr/>
-          <p:nvPr/>
-        </p:nvSpPr>
-        <p:spPr>
-          <a:xfrm>
-            <a:off x="3271838" y="2264569"/>
-            <a:ext cx="203597" cy="153591"/>
-          </a:xfrm>
-          <a:prstGeom prst="rect">
-            <a:avLst/>
-          </a:prstGeom>
-          <a:noFill/>
-          <a:ln/>
-        </p:spPr>
-        <p:txBody>
-          <a:bodyPr wrap="none" lIns="0" tIns="0" rIns="0" bIns="0" rtlCol="0" anchor="t">
+                <a:latin typeface="Consolas" pitchFamily="34" charset="0"/>
+                <a:ea typeface="Consolas" pitchFamily="34" charset="-122"/>
+                <a:cs typeface="Consolas" pitchFamily="34" charset="-120"/>
+              </a:rPr>
+              <a:t>"""</a:t>
+            </a:r>
+            <a:endParaRPr lang="en-US" sz="750" dirty="0"/>
+          </a:p>
+        </p:txBody>
+      </p:sp>
+      <p:sp>
+        <p:nvSpPr>
+          <p:cNvPr id="33" name="Text 29"/>
+          <p:cNvSpPr/>
+          <p:nvPr/>
+        </p:nvSpPr>
+        <p:spPr>
+          <a:xfrm>
+            <a:off x="3200400" y="2743200"/>
+            <a:ext cx="242888" cy="235744"/>
+          </a:xfrm>
+          <a:prstGeom prst="rect">
+            <a:avLst/>
+          </a:prstGeom>
+          <a:noFill/>
+          <a:ln/>
+        </p:spPr>
+        <p:txBody>
+          <a:bodyPr wrap="square" lIns="0" tIns="0" rIns="85090" bIns="0" rtlCol="0" anchor="t">
             <a:spAutoFit/>
           </a:bodyPr>
           <a:lstStyle/>
           <a:p>
             <a:pPr algn="l" indent="0" marL="0">
               <a:lnSpc>
-                <a:spcPct val="120000"/>
+                <a:spcPct val="96000"/>
               </a:lnSpc>
               <a:buNone/>
             </a:pPr>
             <a:r>
-              <a:rPr lang="en-US" sz="850" dirty="0">
-                <a:solidFill>
-                  <a:srgbClr val="CE9178"/>
-                </a:solidFill>
-                <a:latin typeface="JetBrains Mono" pitchFamily="34" charset="0"/>
-                <a:ea typeface="JetBrains Mono" pitchFamily="34" charset="-122"/>
-                <a:cs typeface="JetBrains Mono" pitchFamily="34" charset="-120"/>
-              </a:rPr>
-              <a:t>"""</a:t>
-            </a:r>
-            <a:endParaRPr lang="en-US" sz="850" dirty="0"/>
-          </a:p>
-        </p:txBody>
-      </p:sp>
-      <p:sp>
-        <p:nvSpPr>
-          <p:cNvPr id="33" name="Text 29"/>
-          <p:cNvSpPr/>
-          <p:nvPr/>
-        </p:nvSpPr>
-        <p:spPr>
-          <a:xfrm>
-            <a:off x="3271838" y="2436019"/>
-            <a:ext cx="135731" cy="153591"/>
-          </a:xfrm>
-          <a:prstGeom prst="rect">
-            <a:avLst/>
-          </a:prstGeom>
-          <a:noFill/>
-          <a:ln/>
-        </p:spPr>
-        <p:txBody>
-          <a:bodyPr wrap="none" lIns="0" tIns="0" rIns="0" bIns="0" rtlCol="0" anchor="t">
+              <a:rPr lang="en-US" sz="600" dirty="0">
+                <a:solidFill>
+                  <a:srgbClr val="707070"/>
+                </a:solidFill>
+                <a:latin typeface="Consolas" pitchFamily="34" charset="0"/>
+                <a:ea typeface="Consolas" pitchFamily="34" charset="-122"/>
+                <a:cs typeface="Consolas" pitchFamily="34" charset="-120"/>
+              </a:rPr>
+              <a:t>6</a:t>
+            </a:r>
+            <a:endParaRPr lang="en-US" sz="600" dirty="0"/>
+          </a:p>
+        </p:txBody>
+      </p:sp>
+      <p:sp>
+        <p:nvSpPr>
+          <p:cNvPr id="34" name="Text 30"/>
+          <p:cNvSpPr/>
+          <p:nvPr/>
+        </p:nvSpPr>
+        <p:spPr>
+          <a:xfrm>
+            <a:off x="3443288" y="2798899"/>
+            <a:ext cx="5300663" cy="124290"/>
+          </a:xfrm>
+          <a:prstGeom prst="rect">
+            <a:avLst/>
+          </a:prstGeom>
+          <a:noFill/>
+          <a:ln/>
+        </p:spPr>
+        <p:txBody>
+          <a:bodyPr wrap="none" lIns="357251" tIns="0" rIns="0" bIns="0" rtlCol="0" anchor="t">
             <a:spAutoFit/>
           </a:bodyPr>
           <a:lstStyle/>
           <a:p>
             <a:pPr algn="l" indent="0" marL="0">
               <a:lnSpc>
-                <a:spcPct val="120000"/>
+                <a:spcPct val="96000"/>
               </a:lnSpc>
               <a:buNone/>
             </a:pPr>
             <a:r>
-              <a:rPr lang="en-US" sz="800" b="1" dirty="0">
+              <a:rPr lang="en-US" sz="700" b="1" dirty="0">
                 <a:solidFill>
                   <a:srgbClr val="569CD6"/>
                 </a:solidFill>
-                <a:latin typeface="JetBrains Mono Bold" pitchFamily="34" charset="0"/>
-                <a:ea typeface="JetBrains Mono Bold" pitchFamily="34" charset="-122"/>
-                <a:cs typeface="JetBrains Mono Bold" pitchFamily="34" charset="-120"/>
+                <a:latin typeface="Consolas" pitchFamily="34" charset="0"/>
+                <a:ea typeface="Consolas" pitchFamily="34" charset="-122"/>
+                <a:cs typeface="Consolas" pitchFamily="34" charset="-120"/>
               </a:rPr>
               <a:t>if</a:t>
             </a:r>
-            <a:endParaRPr lang="en-US" sz="800" dirty="0"/>
-          </a:p>
-        </p:txBody>
-      </p:sp>
-      <p:sp>
-        <p:nvSpPr>
-          <p:cNvPr id="34" name="Text 30"/>
-          <p:cNvSpPr/>
-          <p:nvPr/>
-        </p:nvSpPr>
-        <p:spPr>
-          <a:xfrm>
-            <a:off x="3407569" y="2436019"/>
-            <a:ext cx="542925" cy="153591"/>
-          </a:xfrm>
-          <a:prstGeom prst="rect">
-            <a:avLst/>
-          </a:prstGeom>
-          <a:noFill/>
-          <a:ln/>
-        </p:spPr>
-        <p:txBody>
-          <a:bodyPr wrap="none" lIns="0" tIns="0" rIns="0" bIns="0" rtlCol="0" anchor="t">
+            <a:r>
+              <a:rPr lang="en-US" sz="750" dirty="0">
+                <a:solidFill>
+                  <a:srgbClr val="D4D4D4"/>
+                </a:solidFill>
+                <a:latin typeface="Consolas" pitchFamily="34" charset="0"/>
+                <a:ea typeface="Consolas" pitchFamily="34" charset="-122"/>
+                <a:cs typeface="Consolas" pitchFamily="34" charset="-120"/>
+              </a:rPr>
+              <a:t> eta &gt;= 0:</a:t>
+            </a:r>
+            <a:endParaRPr lang="en-US" sz="700" dirty="0"/>
+          </a:p>
+        </p:txBody>
+      </p:sp>
+      <p:sp>
+        <p:nvSpPr>
+          <p:cNvPr id="35" name="Text 31"/>
+          <p:cNvSpPr/>
+          <p:nvPr/>
+        </p:nvSpPr>
+        <p:spPr>
+          <a:xfrm>
+            <a:off x="3200400" y="2986088"/>
+            <a:ext cx="242888" cy="235744"/>
+          </a:xfrm>
+          <a:prstGeom prst="rect">
+            <a:avLst/>
+          </a:prstGeom>
+          <a:noFill/>
+          <a:ln/>
+        </p:spPr>
+        <p:txBody>
+          <a:bodyPr wrap="square" lIns="0" tIns="0" rIns="85090" bIns="0" rtlCol="0" anchor="t">
             <a:spAutoFit/>
           </a:bodyPr>
           <a:lstStyle/>
           <a:p>
             <a:pPr algn="l" indent="0" marL="0">
               <a:lnSpc>
-                <a:spcPct val="120000"/>
+                <a:spcPct val="96000"/>
               </a:lnSpc>
               <a:buNone/>
             </a:pPr>
             <a:r>
-              <a:rPr lang="en-US" sz="850" dirty="0">
-                <a:solidFill>
-                  <a:srgbClr val="D4D4D4"/>
-                </a:solidFill>
-                <a:latin typeface="JetBrains Mono" pitchFamily="34" charset="0"/>
-                <a:ea typeface="JetBrains Mono" pitchFamily="34" charset="-122"/>
-                <a:cs typeface="JetBrains Mono" pitchFamily="34" charset="-120"/>
-              </a:rPr>
-              <a:t>eta &gt;=</a:t>
-            </a:r>
-            <a:endParaRPr lang="en-US" sz="850" dirty="0"/>
-          </a:p>
-        </p:txBody>
-      </p:sp>
-      <p:sp>
-        <p:nvSpPr>
-          <p:cNvPr id="35" name="Text 31"/>
-          <p:cNvSpPr/>
-          <p:nvPr/>
-        </p:nvSpPr>
-        <p:spPr>
-          <a:xfrm>
-            <a:off x="3950494" y="2436019"/>
-            <a:ext cx="67866" cy="153591"/>
-          </a:xfrm>
-          <a:prstGeom prst="rect">
-            <a:avLst/>
-          </a:prstGeom>
-          <a:noFill/>
-          <a:ln/>
-        </p:spPr>
-        <p:txBody>
-          <a:bodyPr wrap="none" lIns="0" tIns="0" rIns="0" bIns="0" rtlCol="0" anchor="t">
+              <a:rPr lang="en-US" sz="600" dirty="0">
+                <a:solidFill>
+                  <a:srgbClr val="707070"/>
+                </a:solidFill>
+                <a:latin typeface="Consolas" pitchFamily="34" charset="0"/>
+                <a:ea typeface="Consolas" pitchFamily="34" charset="-122"/>
+                <a:cs typeface="Consolas" pitchFamily="34" charset="-120"/>
+              </a:rPr>
+              <a:t>7</a:t>
+            </a:r>
+            <a:endParaRPr lang="en-US" sz="600" dirty="0"/>
+          </a:p>
+        </p:txBody>
+      </p:sp>
+      <p:sp>
+        <p:nvSpPr>
+          <p:cNvPr id="36" name="Text 32"/>
+          <p:cNvSpPr/>
+          <p:nvPr/>
+        </p:nvSpPr>
+        <p:spPr>
+          <a:xfrm>
+            <a:off x="3443288" y="3041786"/>
+            <a:ext cx="5300663" cy="124290"/>
+          </a:xfrm>
+          <a:prstGeom prst="rect">
+            <a:avLst/>
+          </a:prstGeom>
+          <a:noFill/>
+          <a:ln/>
+        </p:spPr>
+        <p:txBody>
+          <a:bodyPr wrap="none" lIns="595376" tIns="0" rIns="0" bIns="0" rtlCol="0" anchor="t">
             <a:spAutoFit/>
           </a:bodyPr>
           <a:lstStyle/>
           <a:p>
             <a:pPr algn="l" indent="0" marL="0">
               <a:lnSpc>
-                <a:spcPct val="120000"/>
+                <a:spcPct val="96000"/>
               </a:lnSpc>
               <a:buNone/>
             </a:pPr>
             <a:r>
-              <a:rPr lang="en-US" sz="800" b="1" dirty="0">
-                <a:solidFill>
-                  <a:srgbClr val="569CD6"/>
-                </a:solidFill>
-                <a:latin typeface="JetBrains Mono Bold" pitchFamily="34" charset="0"/>
-                <a:ea typeface="JetBrains Mono Bold" pitchFamily="34" charset="-122"/>
-                <a:cs typeface="JetBrains Mono Bold" pitchFamily="34" charset="-120"/>
-              </a:rPr>
-              <a:t>0</a:t>
-            </a:r>
-            <a:endParaRPr lang="en-US" sz="800" dirty="0"/>
-          </a:p>
-        </p:txBody>
-      </p:sp>
-      <p:sp>
-        <p:nvSpPr>
-          <p:cNvPr id="36" name="Text 32"/>
-          <p:cNvSpPr/>
-          <p:nvPr/>
-        </p:nvSpPr>
-        <p:spPr>
-          <a:xfrm>
-            <a:off x="4018359" y="2436019"/>
-            <a:ext cx="67866" cy="153591"/>
-          </a:xfrm>
-          <a:prstGeom prst="rect">
-            <a:avLst/>
-          </a:prstGeom>
-          <a:noFill/>
-          <a:ln/>
-        </p:spPr>
-        <p:txBody>
-          <a:bodyPr wrap="none" lIns="0" tIns="0" rIns="0" bIns="0" rtlCol="0" anchor="t">
-            <a:spAutoFit/>
-          </a:bodyPr>
-          <a:lstStyle/>
-          <a:p>
-            <a:pPr algn="l" indent="0" marL="0">
-              <a:lnSpc>
-                <a:spcPct val="120000"/>
-              </a:lnSpc>
-              <a:buNone/>
-            </a:pPr>
-            <a:r>
-              <a:rPr lang="en-US" sz="850" dirty="0">
+              <a:rPr lang="en-US" sz="750" dirty="0">
                 <a:solidFill>
                   <a:srgbClr val="D4D4D4"/>
                 </a:solidFill>
-                <a:latin typeface="JetBrains Mono" pitchFamily="34" charset="0"/>
-                <a:ea typeface="JetBrains Mono" pitchFamily="34" charset="-122"/>
-                <a:cs typeface="JetBrains Mono" pitchFamily="34" charset="-120"/>
-              </a:rPr>
-              <a:t>:</a:t>
-            </a:r>
-            <a:endParaRPr lang="en-US" sz="850" dirty="0"/>
-          </a:p>
-        </p:txBody>
-      </p:sp>
-      <p:sp>
-        <p:nvSpPr>
-          <p:cNvPr id="37" name="Text 33"/>
-          <p:cNvSpPr/>
-          <p:nvPr/>
-        </p:nvSpPr>
-        <p:spPr>
-          <a:xfrm>
-            <a:off x="3271838" y="2607469"/>
-            <a:ext cx="1221581" cy="153591"/>
-          </a:xfrm>
-          <a:prstGeom prst="rect">
-            <a:avLst/>
-          </a:prstGeom>
-          <a:noFill/>
-          <a:ln/>
-        </p:spPr>
-        <p:txBody>
-          <a:bodyPr wrap="none" lIns="0" tIns="0" rIns="0" bIns="0" rtlCol="0" anchor="t">
-            <a:spAutoFit/>
-          </a:bodyPr>
-          <a:lstStyle/>
-          <a:p>
-            <a:pPr algn="l" indent="0" marL="0">
-              <a:lnSpc>
-                <a:spcPct val="120000"/>
-              </a:lnSpc>
-              <a:buNone/>
-            </a:pPr>
-            <a:r>
-              <a:rPr lang="en-US" sz="850" dirty="0">
-                <a:solidFill>
-                  <a:srgbClr val="D4D4D4"/>
-                </a:solidFill>
-                <a:latin typeface="JetBrains Mono" pitchFamily="34" charset="0"/>
-                <a:ea typeface="JetBrains Mono" pitchFamily="34" charset="-122"/>
-                <a:cs typeface="JetBrains Mono" pitchFamily="34" charset="-120"/>
+                <a:latin typeface="Consolas" pitchFamily="34" charset="0"/>
+                <a:ea typeface="Consolas" pitchFamily="34" charset="-122"/>
+                <a:cs typeface="Consolas" pitchFamily="34" charset="-120"/>
               </a:rPr>
               <a:t>z = math.exp(-eta)</a:t>
             </a:r>
-            <a:endParaRPr lang="en-US" sz="850" dirty="0"/>
-          </a:p>
-        </p:txBody>
-      </p:sp>
-      <p:sp>
-        <p:nvSpPr>
-          <p:cNvPr id="38" name="Text 34"/>
-          <p:cNvSpPr/>
-          <p:nvPr/>
-        </p:nvSpPr>
-        <p:spPr>
-          <a:xfrm>
-            <a:off x="3271838" y="2778919"/>
-            <a:ext cx="407194" cy="153591"/>
-          </a:xfrm>
-          <a:prstGeom prst="rect">
-            <a:avLst/>
-          </a:prstGeom>
-          <a:noFill/>
-          <a:ln/>
-        </p:spPr>
-        <p:txBody>
-          <a:bodyPr wrap="none" lIns="0" tIns="0" rIns="0" bIns="0" rtlCol="0" anchor="t">
-            <a:spAutoFit/>
-          </a:bodyPr>
-          <a:lstStyle/>
-          <a:p>
-            <a:pPr algn="l" indent="0" marL="0">
-              <a:lnSpc>
-                <a:spcPct val="120000"/>
-              </a:lnSpc>
-              <a:buNone/>
-            </a:pPr>
-            <a:r>
-              <a:rPr lang="en-US" sz="800" b="1" dirty="0">
-                <a:solidFill>
-                  <a:srgbClr val="569CD6"/>
-                </a:solidFill>
-                <a:latin typeface="JetBrains Mono Bold" pitchFamily="34" charset="0"/>
-                <a:ea typeface="JetBrains Mono Bold" pitchFamily="34" charset="-122"/>
-                <a:cs typeface="JetBrains Mono Bold" pitchFamily="34" charset="-120"/>
-              </a:rPr>
-              <a:t>return</a:t>
-            </a:r>
-            <a:endParaRPr lang="en-US" sz="800" dirty="0"/>
-          </a:p>
-        </p:txBody>
-      </p:sp>
-      <p:sp>
-        <p:nvSpPr>
-          <p:cNvPr id="39" name="Shape 35"/>
-          <p:cNvSpPr/>
-          <p:nvPr/>
-        </p:nvSpPr>
-        <p:spPr>
-          <a:xfrm>
-            <a:off x="3704034" y="2743200"/>
-            <a:ext cx="1103709" cy="228600"/>
-          </a:xfrm>
-          <a:prstGeom prst="rect">
-            <a:avLst/>
-          </a:prstGeom>
-          <a:solidFill>
-            <a:srgbClr val="FFDF00">
-              <a:alpha val="20000"/>
-            </a:srgbClr>
+            <a:endParaRPr lang="en-US" sz="750" dirty="0"/>
+          </a:p>
+        </p:txBody>
+      </p:sp>
+      <p:sp>
+        <p:nvSpPr>
+          <p:cNvPr id="37" name="Shape 33"/>
+          <p:cNvSpPr/>
+          <p:nvPr/>
+        </p:nvSpPr>
+        <p:spPr>
+          <a:xfrm>
+            <a:off x="3200400" y="3243263"/>
+            <a:ext cx="5543550" cy="271463"/>
+          </a:xfrm>
+          <a:prstGeom prst="rect">
+            <a:avLst/>
+          </a:prstGeom>
+          <a:solidFill>
+            <a:srgbClr val="2A2600"/>
           </a:solidFill>
           <a:ln w="18288">
             <a:solidFill>
@@ -19362,177 +21203,287 @@
       </p:sp>
       <p:sp>
         <p:nvSpPr>
-          <p:cNvPr id="40" name="Text 36"/>
-          <p:cNvSpPr/>
-          <p:nvPr/>
-        </p:nvSpPr>
-        <p:spPr>
-          <a:xfrm>
-            <a:off x="3704034" y="2743200"/>
-            <a:ext cx="1103709" cy="228600"/>
-          </a:xfrm>
-          <a:prstGeom prst="rect">
-            <a:avLst/>
-          </a:prstGeom>
-          <a:noFill/>
-          <a:ln/>
-        </p:spPr>
-        <p:txBody>
-          <a:bodyPr wrap="none" lIns="34036" tIns="17018" rIns="34036" bIns="17018" rtlCol="0" anchor="t">
+          <p:cNvPr id="38" name="Text 34"/>
+          <p:cNvSpPr/>
+          <p:nvPr/>
+        </p:nvSpPr>
+        <p:spPr>
+          <a:xfrm>
+            <a:off x="3200400" y="3243263"/>
+            <a:ext cx="242888" cy="271463"/>
+          </a:xfrm>
+          <a:prstGeom prst="rect">
+            <a:avLst/>
+          </a:prstGeom>
+          <a:noFill/>
+          <a:ln/>
+        </p:spPr>
+        <p:txBody>
+          <a:bodyPr wrap="square" lIns="0" tIns="0" rIns="85090" bIns="0" rtlCol="0" anchor="t">
             <a:spAutoFit/>
           </a:bodyPr>
           <a:lstStyle/>
           <a:p>
             <a:pPr algn="l" indent="0" marL="0">
               <a:lnSpc>
-                <a:spcPct val="120000"/>
+                <a:spcPct val="96000"/>
               </a:lnSpc>
               <a:buNone/>
             </a:pPr>
             <a:r>
-              <a:rPr lang="en-US" sz="850" dirty="0">
-                <a:solidFill>
-                  <a:srgbClr val="D4D4D4"/>
-                </a:solidFill>
-                <a:latin typeface="JetBrains Mono" pitchFamily="34" charset="0"/>
-                <a:ea typeface="JetBrains Mono" pitchFamily="34" charset="-122"/>
-                <a:cs typeface="JetBrains Mono" pitchFamily="34" charset="-120"/>
-              </a:rPr>
-              <a:t>1.0 / (1.0 + z)</a:t>
-            </a:r>
-            <a:endParaRPr lang="en-US" sz="850" dirty="0"/>
-          </a:p>
-        </p:txBody>
-      </p:sp>
-      <p:sp>
-        <p:nvSpPr>
-          <p:cNvPr id="41" name="Text 37"/>
-          <p:cNvSpPr/>
-          <p:nvPr/>
-        </p:nvSpPr>
-        <p:spPr>
-          <a:xfrm>
-            <a:off x="3271838" y="2950369"/>
-            <a:ext cx="1153716" cy="153591"/>
-          </a:xfrm>
-          <a:prstGeom prst="rect">
-            <a:avLst/>
-          </a:prstGeom>
-          <a:noFill/>
-          <a:ln/>
-        </p:spPr>
-        <p:txBody>
-          <a:bodyPr wrap="none" lIns="0" tIns="0" rIns="0" bIns="0" rtlCol="0" anchor="t">
+              <a:rPr lang="en-US" sz="600" dirty="0">
+                <a:solidFill>
+                  <a:srgbClr val="FFDF00"/>
+                </a:solidFill>
+                <a:latin typeface="Consolas" pitchFamily="34" charset="0"/>
+                <a:ea typeface="Consolas" pitchFamily="34" charset="-122"/>
+                <a:cs typeface="Consolas" pitchFamily="34" charset="-120"/>
+              </a:rPr>
+              <a:t>8</a:t>
+            </a:r>
+            <a:endParaRPr lang="en-US" sz="600" dirty="0"/>
+          </a:p>
+        </p:txBody>
+      </p:sp>
+      <p:sp>
+        <p:nvSpPr>
+          <p:cNvPr id="39" name="Text 35"/>
+          <p:cNvSpPr/>
+          <p:nvPr/>
+        </p:nvSpPr>
+        <p:spPr>
+          <a:xfrm>
+            <a:off x="3443288" y="3316821"/>
+            <a:ext cx="5300663" cy="124290"/>
+          </a:xfrm>
+          <a:prstGeom prst="rect">
+            <a:avLst/>
+          </a:prstGeom>
+          <a:noFill/>
+          <a:ln/>
+        </p:spPr>
+        <p:txBody>
+          <a:bodyPr wrap="none" lIns="595376" tIns="0" rIns="0" bIns="0" rtlCol="0" anchor="t">
             <a:spAutoFit/>
           </a:bodyPr>
           <a:lstStyle/>
           <a:p>
             <a:pPr algn="l" indent="0" marL="0">
               <a:lnSpc>
-                <a:spcPct val="120000"/>
+                <a:spcPct val="96000"/>
               </a:lnSpc>
               <a:buNone/>
             </a:pPr>
             <a:r>
-              <a:rPr lang="en-US" sz="850" dirty="0">
-                <a:solidFill>
-                  <a:srgbClr val="D4D4D4"/>
-                </a:solidFill>
-                <a:latin typeface="JetBrains Mono" pitchFamily="34" charset="0"/>
-                <a:ea typeface="JetBrains Mono" pitchFamily="34" charset="-122"/>
-                <a:cs typeface="JetBrains Mono" pitchFamily="34" charset="-120"/>
-              </a:rPr>
-              <a:t>z = math.exp(eta)</a:t>
-            </a:r>
-            <a:endParaRPr lang="en-US" sz="850" dirty="0"/>
-          </a:p>
-        </p:txBody>
-      </p:sp>
-      <p:sp>
-        <p:nvSpPr>
-          <p:cNvPr id="42" name="Text 38"/>
-          <p:cNvSpPr/>
-          <p:nvPr/>
-        </p:nvSpPr>
-        <p:spPr>
-          <a:xfrm>
-            <a:off x="3271838" y="3121819"/>
-            <a:ext cx="407194" cy="153591"/>
-          </a:xfrm>
-          <a:prstGeom prst="rect">
-            <a:avLst/>
-          </a:prstGeom>
-          <a:noFill/>
-          <a:ln/>
-        </p:spPr>
-        <p:txBody>
-          <a:bodyPr wrap="none" lIns="0" tIns="0" rIns="0" bIns="0" rtlCol="0" anchor="t">
+              <a:rPr lang="en-US" sz="700" b="1" dirty="0">
+                <a:solidFill>
+                  <a:srgbClr val="569CD6"/>
+                </a:solidFill>
+                <a:latin typeface="Consolas" pitchFamily="34" charset="0"/>
+                <a:ea typeface="Consolas" pitchFamily="34" charset="-122"/>
+                <a:cs typeface="Consolas" pitchFamily="34" charset="-120"/>
+              </a:rPr>
+              <a:t>return</a:t>
+            </a:r>
+            <a:r>
+              <a:rPr lang="en-US" sz="700" b="1" dirty="0">
+                <a:solidFill>
+                  <a:srgbClr val="FFFFFF"/>
+                </a:solidFill>
+                <a:latin typeface="Consolas" pitchFamily="34" charset="0"/>
+                <a:ea typeface="Consolas" pitchFamily="34" charset="-122"/>
+                <a:cs typeface="Consolas" pitchFamily="34" charset="-120"/>
+              </a:rPr>
+              <a:t> 1.0 / (1.0 + z)</a:t>
+            </a:r>
+            <a:endParaRPr lang="en-US" sz="700" dirty="0"/>
+          </a:p>
+        </p:txBody>
+      </p:sp>
+      <p:sp>
+        <p:nvSpPr>
+          <p:cNvPr id="40" name="Text 36"/>
+          <p:cNvSpPr/>
+          <p:nvPr/>
+        </p:nvSpPr>
+        <p:spPr>
+          <a:xfrm>
+            <a:off x="3200400" y="3529013"/>
+            <a:ext cx="242888" cy="235744"/>
+          </a:xfrm>
+          <a:prstGeom prst="rect">
+            <a:avLst/>
+          </a:prstGeom>
+          <a:noFill/>
+          <a:ln/>
+        </p:spPr>
+        <p:txBody>
+          <a:bodyPr wrap="square" lIns="0" tIns="0" rIns="85090" bIns="0" rtlCol="0" anchor="t">
             <a:spAutoFit/>
           </a:bodyPr>
           <a:lstStyle/>
           <a:p>
             <a:pPr algn="l" indent="0" marL="0">
               <a:lnSpc>
-                <a:spcPct val="120000"/>
+                <a:spcPct val="96000"/>
               </a:lnSpc>
               <a:buNone/>
             </a:pPr>
             <a:r>
-              <a:rPr lang="en-US" sz="800" b="1" dirty="0">
-                <a:solidFill>
-                  <a:srgbClr val="569CD6"/>
-                </a:solidFill>
-                <a:latin typeface="JetBrains Mono Bold" pitchFamily="34" charset="0"/>
-                <a:ea typeface="JetBrains Mono Bold" pitchFamily="34" charset="-122"/>
-                <a:cs typeface="JetBrains Mono Bold" pitchFamily="34" charset="-120"/>
-              </a:rPr>
-              <a:t>return</a:t>
-            </a:r>
-            <a:endParaRPr lang="en-US" sz="800" dirty="0"/>
-          </a:p>
-        </p:txBody>
-      </p:sp>
-      <p:sp>
-        <p:nvSpPr>
-          <p:cNvPr id="43" name="Text 39"/>
-          <p:cNvSpPr/>
-          <p:nvPr/>
-        </p:nvSpPr>
-        <p:spPr>
-          <a:xfrm>
-            <a:off x="3679031" y="3121819"/>
-            <a:ext cx="950119" cy="153591"/>
-          </a:xfrm>
-          <a:prstGeom prst="rect">
-            <a:avLst/>
-          </a:prstGeom>
-          <a:noFill/>
-          <a:ln/>
-        </p:spPr>
-        <p:txBody>
-          <a:bodyPr wrap="none" lIns="0" tIns="0" rIns="0" bIns="0" rtlCol="0" anchor="t">
+              <a:rPr lang="en-US" sz="600" dirty="0">
+                <a:solidFill>
+                  <a:srgbClr val="707070"/>
+                </a:solidFill>
+                <a:latin typeface="Consolas" pitchFamily="34" charset="0"/>
+                <a:ea typeface="Consolas" pitchFamily="34" charset="-122"/>
+                <a:cs typeface="Consolas" pitchFamily="34" charset="-120"/>
+              </a:rPr>
+              <a:t>9</a:t>
+            </a:r>
+            <a:endParaRPr lang="en-US" sz="600" dirty="0"/>
+          </a:p>
+        </p:txBody>
+      </p:sp>
+      <p:sp>
+        <p:nvSpPr>
+          <p:cNvPr id="41" name="Text 37"/>
+          <p:cNvSpPr/>
+          <p:nvPr/>
+        </p:nvSpPr>
+        <p:spPr>
+          <a:xfrm>
+            <a:off x="3443288" y="3584711"/>
+            <a:ext cx="5300663" cy="124290"/>
+          </a:xfrm>
+          <a:prstGeom prst="rect">
+            <a:avLst/>
+          </a:prstGeom>
+          <a:noFill/>
+          <a:ln/>
+        </p:spPr>
+        <p:txBody>
+          <a:bodyPr wrap="none" lIns="357251" tIns="0" rIns="0" bIns="0" rtlCol="0" anchor="t">
             <a:spAutoFit/>
           </a:bodyPr>
           <a:lstStyle/>
           <a:p>
             <a:pPr algn="l" indent="0" marL="0">
               <a:lnSpc>
-                <a:spcPct val="120000"/>
+                <a:spcPct val="96000"/>
               </a:lnSpc>
               <a:buNone/>
             </a:pPr>
             <a:r>
-              <a:rPr lang="en-US" sz="850" dirty="0">
+              <a:rPr lang="en-US" sz="750" dirty="0">
                 <a:solidFill>
                   <a:srgbClr val="D4D4D4"/>
                 </a:solidFill>
-                <a:latin typeface="JetBrains Mono" pitchFamily="34" charset="0"/>
-                <a:ea typeface="JetBrains Mono" pitchFamily="34" charset="-122"/>
-                <a:cs typeface="JetBrains Mono" pitchFamily="34" charset="-120"/>
-              </a:rPr>
-              <a:t>z / (1.0 + z)</a:t>
-            </a:r>
-            <a:endParaRPr lang="en-US" sz="850" dirty="0"/>
+                <a:latin typeface="Consolas" pitchFamily="34" charset="0"/>
+                <a:ea typeface="Consolas" pitchFamily="34" charset="-122"/>
+                <a:cs typeface="Consolas" pitchFamily="34" charset="-120"/>
+              </a:rPr>
+              <a:t>z = math.exp(eta)</a:t>
+            </a:r>
+            <a:endParaRPr lang="en-US" sz="750" dirty="0"/>
+          </a:p>
+        </p:txBody>
+      </p:sp>
+      <p:sp>
+        <p:nvSpPr>
+          <p:cNvPr id="42" name="Text 38"/>
+          <p:cNvSpPr/>
+          <p:nvPr/>
+        </p:nvSpPr>
+        <p:spPr>
+          <a:xfrm>
+            <a:off x="3200400" y="3771900"/>
+            <a:ext cx="242888" cy="235744"/>
+          </a:xfrm>
+          <a:prstGeom prst="rect">
+            <a:avLst/>
+          </a:prstGeom>
+          <a:noFill/>
+          <a:ln/>
+        </p:spPr>
+        <p:txBody>
+          <a:bodyPr wrap="square" lIns="0" tIns="0" rIns="85090" bIns="0" rtlCol="0" anchor="t">
+            <a:spAutoFit/>
+          </a:bodyPr>
+          <a:lstStyle/>
+          <a:p>
+            <a:pPr algn="l" indent="0" marL="0">
+              <a:lnSpc>
+                <a:spcPct val="96000"/>
+              </a:lnSpc>
+              <a:buNone/>
+            </a:pPr>
+            <a:r>
+              <a:rPr lang="en-US" sz="600" dirty="0">
+                <a:solidFill>
+                  <a:srgbClr val="707070"/>
+                </a:solidFill>
+                <a:latin typeface="Consolas" pitchFamily="34" charset="0"/>
+                <a:ea typeface="Consolas" pitchFamily="34" charset="-122"/>
+                <a:cs typeface="Consolas" pitchFamily="34" charset="-120"/>
+              </a:rPr>
+              <a:t>10</a:t>
+            </a:r>
+            <a:endParaRPr lang="en-US" sz="600" dirty="0"/>
+          </a:p>
+        </p:txBody>
+      </p:sp>
+      <p:sp>
+        <p:nvSpPr>
+          <p:cNvPr id="43" name="Text 39"/>
+          <p:cNvSpPr/>
+          <p:nvPr/>
+        </p:nvSpPr>
+        <p:spPr>
+          <a:xfrm>
+            <a:off x="3443288" y="3827599"/>
+            <a:ext cx="5300663" cy="124290"/>
+          </a:xfrm>
+          <a:prstGeom prst="rect">
+            <a:avLst/>
+          </a:prstGeom>
+          <a:noFill/>
+          <a:ln/>
+        </p:spPr>
+        <p:txBody>
+          <a:bodyPr wrap="none" lIns="357251" tIns="0" rIns="0" bIns="0" rtlCol="0" anchor="t">
+            <a:spAutoFit/>
+          </a:bodyPr>
+          <a:lstStyle/>
+          <a:p>
+            <a:pPr algn="l" indent="0" marL="0">
+              <a:lnSpc>
+                <a:spcPct val="96000"/>
+              </a:lnSpc>
+              <a:buNone/>
+            </a:pPr>
+            <a:r>
+              <a:rPr lang="en-US" sz="700" b="1" dirty="0">
+                <a:solidFill>
+                  <a:srgbClr val="569CD6"/>
+                </a:solidFill>
+                <a:latin typeface="Consolas" pitchFamily="34" charset="0"/>
+                <a:ea typeface="Consolas" pitchFamily="34" charset="-122"/>
+                <a:cs typeface="Consolas" pitchFamily="34" charset="-120"/>
+              </a:rPr>
+              <a:t>return</a:t>
+            </a:r>
+            <a:r>
+              <a:rPr lang="en-US" sz="750" dirty="0">
+                <a:solidFill>
+                  <a:srgbClr val="D4D4D4"/>
+                </a:solidFill>
+                <a:latin typeface="Consolas" pitchFamily="34" charset="0"/>
+                <a:ea typeface="Consolas" pitchFamily="34" charset="-122"/>
+                <a:cs typeface="Consolas" pitchFamily="34" charset="-120"/>
+              </a:rPr>
+              <a:t> z / (1.0 + z)</a:t>
+            </a:r>
+            <a:endParaRPr lang="en-US" sz="700" dirty="0"/>
           </a:p>
         </p:txBody>
       </p:sp>
@@ -20274,6 +22225,47 @@
         </p:nvSpPr>
         <p:spPr>
           <a:xfrm>
+            <a:off x="7650956" y="1184077"/>
+            <a:ext cx="1121569" cy="103584"/>
+          </a:xfrm>
+          <a:prstGeom prst="rect">
+            <a:avLst/>
+          </a:prstGeom>
+          <a:noFill/>
+          <a:ln/>
+        </p:spPr>
+        <p:txBody>
+          <a:bodyPr wrap="none" lIns="0" tIns="0" rIns="0" bIns="0" rtlCol="0" anchor="t">
+            <a:spAutoFit/>
+          </a:bodyPr>
+          <a:lstStyle/>
+          <a:p>
+            <a:pPr algn="l" indent="0" marL="0">
+              <a:buNone/>
+            </a:pPr>
+            <a:r>
+              <a:rPr lang="en-US" sz="600" b="1" spc="1" kern="0" dirty="0">
+                <a:solidFill>
+                  <a:srgbClr val="9CDCFE"/>
+                </a:solidFill>
+                <a:latin typeface="Inter Bold" pitchFamily="34" charset="0"/>
+                <a:ea typeface="Inter Bold" pitchFamily="34" charset="-122"/>
+                <a:cs typeface="Inter Bold" pitchFamily="34" charset="-120"/>
+              </a:rPr>
+              <a:t>VALIDATION EVIDENCE</a:t>
+            </a:r>
+            <a:endParaRPr lang="en-US" sz="600" dirty="0"/>
+          </a:p>
+        </p:txBody>
+      </p:sp>
+      <p:sp>
+        <p:nvSpPr>
+          <p:cNvPr id="23" name="Text 19"/>
+          <p:cNvSpPr/>
+          <p:nvPr/>
+        </p:nvSpPr>
+        <p:spPr>
+          <a:xfrm>
             <a:off x="3071813" y="1400175"/>
             <a:ext cx="5800725" cy="3243263"/>
           </a:xfrm>
@@ -20773,7 +22765,7 @@
       </p:sp>
       <p:sp>
         <p:nvSpPr>
-          <p:cNvPr id="23" name="Shape 19"/>
+          <p:cNvPr id="24" name="Shape 20"/>
           <p:cNvSpPr/>
           <p:nvPr/>
         </p:nvSpPr>
@@ -20793,7 +22785,7 @@
       </p:sp>
       <p:sp>
         <p:nvSpPr>
-          <p:cNvPr id="24" name="Shape 20"/>
+          <p:cNvPr id="25" name="Shape 21"/>
           <p:cNvSpPr/>
           <p:nvPr/>
         </p:nvSpPr>
@@ -20813,7 +22805,7 @@
       </p:sp>
       <p:sp>
         <p:nvSpPr>
-          <p:cNvPr id="25" name="Text 21"/>
+          <p:cNvPr id="26" name="Text 22"/>
           <p:cNvSpPr/>
           <p:nvPr/>
         </p:nvSpPr>
@@ -20854,7 +22846,7 @@
       </p:sp>
       <p:sp>
         <p:nvSpPr>
-          <p:cNvPr id="26" name="Text 22"/>
+          <p:cNvPr id="27" name="Text 23"/>
           <p:cNvSpPr/>
           <p:nvPr/>
         </p:nvSpPr>

--- a/Learning_series_copilot_sas_python.pptx
+++ b/Learning_series_copilot_sas_python.pptx
@@ -10335,7 +10335,7 @@
                 <a:ea typeface="JetBrains Mono Bold" pitchFamily="34" charset="-122"/>
                 <a:cs typeface="JetBrains Mono Bold" pitchFamily="34" charset="-120"/>
               </a:rPr>
-              <a:t>/run-stage2 LC-LOGIT-01</a:t>
+              <a:t>/run-next-stage LC-LOGIT-01</a:t>
             </a:r>
             <a:r>
               <a:rPr lang="en-US" sz="850" dirty="0">

--- a/Learning_series_copilot_sas_python.pptx
+++ b/Learning_series_copilot_sas_python.pptx
@@ -965,7 +965,7 @@
           <a:p>
             <a:r>
               <a:rPr lang="en-US" dirty="0"/>
-              <a:t>Map turns the trace into implementation policy. It says which behavior belongs to the semantic core, which behavior is deferred to adapters, and which patterns must be preserved.</a:t>
+              <a:t>This is where we stop treating SAS as just code text. Copilot reads the program, log, and LST output to reconstruct behavior: filters, PROC LOGISTIC, scored outputs, row counts, convergence, and exports.</a:t>
             </a:r>
             <a:endParaRPr lang="en-US" dirty="0"/>
           </a:p>
@@ -1053,11 +1053,7 @@
           <a:p>
             <a:r>
               <a:rPr lang="en-US" dirty="0"/>
-              <a:t>You are right to expect one more execution step here. After Act 2 maps SAS behavior into policy, the repo still has to create the implementation path before validation can run.
-This is where the model and generate skills come in. The model skill turns trace and policy into a semantic IR: an explicit, reviewable contract for the math, transformations, target event, and scoring behavior. Then the generate skill turns that semantic IR into Python code.
-This bridge matters because we do not want Copilot to generate Python directly from a vague business request or from raw SAS alone. The repo forces an intermediate semantic layer first, so code generation is grounded in approved behavior.
-Act 2 preserves meaning as policy. Act 3 turns that policy into a semantic model, generates Python from the model, and only then validates the result against SAS.
-Now the validate stage can run because we have an approved behavior contract and generated Python output to test.</a:t>
+              <a:t>Map turns the trace into implementation policy. It says which behavior belongs to the semantic core, which behavior is deferred to adapters, and which patterns must be preserved.</a:t>
             </a:r>
             <a:endParaRPr lang="en-US" dirty="0"/>
           </a:p>
@@ -1145,7 +1141,11 @@
           <a:p>
             <a:r>
               <a:rPr lang="en-US" dirty="0"/>
-              <a:t>The tie-out is the proof step. Python produces actual scores. The runner compares them to the SAS oracle under the approved contract. The result is not a feeling from chat. It is a structured evidence bundle.</a:t>
+              <a:t>You are right to expect one more execution step here. After Act 2 maps SAS behavior into policy, the repo still has to create the implementation path before validation can run.
+This is where the model and generate skills come in. The model skill turns trace and policy into a semantic IR: an explicit, reviewable contract for the math, transformations, target event, and scoring behavior. Then the generate skill turns that semantic IR into Python code.
+This bridge matters because we do not want Copilot to generate Python directly from a vague business request or from raw SAS alone. The repo forces an intermediate semantic layer first, so code generation is grounded in approved behavior.
+Act 2 preserves meaning as policy. Act 3 turns that policy into a semantic model, generates Python from the model, and only then validates the result against SAS.
+Now the validate stage can run because we have an approved behavior contract and generated Python output to test.</a:t>
             </a:r>
             <a:endParaRPr lang="en-US" dirty="0"/>
           </a:p>
@@ -1233,7 +1233,7 @@
           <a:p>
             <a:r>
               <a:rPr lang="en-US" dirty="0"/>
-              <a:t>If tie-out fails, we do not patch the easiest visible symptom. The workflow routes the failure to the earliest failed gate. Maybe the issue is SAS behavior mapping. Maybe it is generated Python. Maybe it is fixture selection. Maybe it is the contract. The repair must name one hypothesis and one owning layer.</a:t>
+              <a:t>The tie-out is the proof step. Python produces actual scores. The runner compares them to the SAS oracle under the approved contract. The result is not a feeling from chat. It is a structured evidence bundle.</a:t>
             </a:r>
             <a:endParaRPr lang="en-US" dirty="0"/>
           </a:p>
@@ -1321,7 +1321,7 @@
           <a:p>
             <a:r>
               <a:rPr lang="en-US" dirty="0"/>
-              <a:t>Now let's see how that governance looks on a real SAS file. We start by extracting the behavior. Copilot reads the SAS program and log, and creates this trace. The trace records exactly which mathematical model ran—in this case, PROC LOGISTIC—and verifies that the model successfully converged.</a:t>
+              <a:t>If tie-out fails, we do not patch the easiest visible symptom. The workflow routes the failure to the earliest failed gate. Maybe the issue is SAS behavior mapping. Maybe it is generated Python. Maybe it is fixture selection. Maybe it is the contract. The repair must name one hypothesis and one owning layer.</a:t>
             </a:r>
             <a:endParaRPr lang="en-US" dirty="0"/>
           </a:p>
@@ -9277,7 +9277,7 @@
                 <a:ea typeface="Oswald SemiBold" pitchFamily="34" charset="-122"/>
                 <a:cs typeface="Oswald SemiBold" pitchFamily="34" charset="-120"/>
               </a:rPr>
-              <a:t>ACT 2: SAS BEHAVIOR BECOMES POLICY</a:t>
+              <a:t>ACT 2: SAS BEHAVIOR IS RECONSTRUCTED</a:t>
             </a:r>
             <a:endParaRPr lang="en-US" sz="2400" dirty="0"/>
           </a:p>
@@ -9333,7 +9333,7 @@
         <p:spPr>
           <a:xfrm>
             <a:off x="271463" y="1375172"/>
-            <a:ext cx="3429000" cy="414338"/>
+            <a:ext cx="3429000" cy="385763"/>
           </a:xfrm>
           <a:prstGeom prst="rect">
             <a:avLst/>
@@ -9357,7 +9357,7 @@
         </p:nvSpPr>
         <p:spPr>
           <a:xfrm>
-            <a:off x="371475" y="1460897"/>
+            <a:off x="371475" y="1446609"/>
             <a:ext cx="200025" cy="200025"/>
           </a:xfrm>
           <a:prstGeom prst="rect">
@@ -9377,7 +9377,7 @@
         </p:nvSpPr>
         <p:spPr>
           <a:xfrm>
-            <a:off x="371475" y="1460897"/>
+            <a:off x="371475" y="1446609"/>
             <a:ext cx="200025" cy="200025"/>
           </a:xfrm>
           <a:prstGeom prst="rect">
@@ -9418,8 +9418,8 @@
         </p:nvSpPr>
         <p:spPr>
           <a:xfrm>
-            <a:off x="657225" y="1480542"/>
-            <a:ext cx="2943225" cy="160734"/>
+            <a:off x="657225" y="1473733"/>
+            <a:ext cx="2943225" cy="145721"/>
           </a:xfrm>
           <a:prstGeom prst="rect">
             <a:avLst/>
@@ -9435,12 +9435,12 @@
           <a:p>
             <a:pPr algn="l" indent="0" marL="0">
               <a:lnSpc>
-                <a:spcPct val="100000"/>
+                <a:spcPct val="96000"/>
               </a:lnSpc>
               <a:buNone/>
             </a:pPr>
             <a:r>
-              <a:rPr lang="en-US" sz="900" b="1" dirty="0">
+              <a:rPr lang="en-US" sz="850" b="1" dirty="0">
                 <a:solidFill>
                   <a:srgbClr val="30343B"/>
                 </a:solidFill>
@@ -9448,9 +9448,9 @@
                 <a:ea typeface="Inter Bold" pitchFamily="34" charset="-122"/>
                 <a:cs typeface="Inter Bold" pitchFamily="34" charset="-120"/>
               </a:rPr>
-              <a:t>Take trace evidence</a:t>
-            </a:r>
-            <a:endParaRPr lang="en-US" sz="900" dirty="0"/>
+              <a:t>Read SAS program</a:t>
+            </a:r>
+            <a:endParaRPr lang="en-US" sz="850" dirty="0"/>
           </a:p>
         </p:txBody>
       </p:sp>
@@ -9462,8 +9462,8 @@
         </p:nvSpPr>
         <p:spPr>
           <a:xfrm>
-            <a:off x="271463" y="1832372"/>
-            <a:ext cx="3429000" cy="414338"/>
+            <a:off x="271463" y="1789509"/>
+            <a:ext cx="3429000" cy="385763"/>
           </a:xfrm>
           <a:prstGeom prst="rect">
             <a:avLst/>
@@ -9487,7 +9487,7 @@
         </p:nvSpPr>
         <p:spPr>
           <a:xfrm>
-            <a:off x="371475" y="1918097"/>
+            <a:off x="371475" y="1860947"/>
             <a:ext cx="200025" cy="200025"/>
           </a:xfrm>
           <a:prstGeom prst="rect">
@@ -9507,7 +9507,7 @@
         </p:nvSpPr>
         <p:spPr>
           <a:xfrm>
-            <a:off x="371475" y="1918097"/>
+            <a:off x="371475" y="1860947"/>
             <a:ext cx="200025" cy="200025"/>
           </a:xfrm>
           <a:prstGeom prst="rect">
@@ -9548,8 +9548,8 @@
         </p:nvSpPr>
         <p:spPr>
           <a:xfrm>
-            <a:off x="657225" y="1937742"/>
-            <a:ext cx="2943225" cy="160734"/>
+            <a:off x="657225" y="1888071"/>
+            <a:ext cx="2943225" cy="145721"/>
           </a:xfrm>
           <a:prstGeom prst="rect">
             <a:avLst/>
@@ -9565,12 +9565,12 @@
           <a:p>
             <a:pPr algn="l" indent="0" marL="0">
               <a:lnSpc>
-                <a:spcPct val="100000"/>
+                <a:spcPct val="96000"/>
               </a:lnSpc>
               <a:buNone/>
             </a:pPr>
             <a:r>
-              <a:rPr lang="en-US" sz="900" b="1" dirty="0">
+              <a:rPr lang="en-US" sz="850" b="1" dirty="0">
                 <a:solidFill>
                   <a:srgbClr val="30343B"/>
                 </a:solidFill>
@@ -9578,9 +9578,9 @@
                 <a:ea typeface="Inter Bold" pitchFamily="34" charset="-122"/>
                 <a:cs typeface="Inter Bold" pitchFamily="34" charset="-120"/>
               </a:rPr>
-              <a:t>Identify behavior patterns</a:t>
-            </a:r>
-            <a:endParaRPr lang="en-US" sz="900" dirty="0"/>
+              <a:t>Read SAS log</a:t>
+            </a:r>
+            <a:endParaRPr lang="en-US" sz="850" dirty="0"/>
           </a:p>
         </p:txBody>
       </p:sp>
@@ -9592,8 +9592,8 @@
         </p:nvSpPr>
         <p:spPr>
           <a:xfrm>
-            <a:off x="271463" y="2289572"/>
-            <a:ext cx="3429000" cy="414338"/>
+            <a:off x="271463" y="2203847"/>
+            <a:ext cx="3429000" cy="385763"/>
           </a:xfrm>
           <a:prstGeom prst="rect">
             <a:avLst/>
@@ -9617,7 +9617,7 @@
         </p:nvSpPr>
         <p:spPr>
           <a:xfrm>
-            <a:off x="371475" y="2375297"/>
+            <a:off x="371475" y="2275284"/>
             <a:ext cx="200025" cy="200025"/>
           </a:xfrm>
           <a:prstGeom prst="rect">
@@ -9637,7 +9637,7 @@
         </p:nvSpPr>
         <p:spPr>
           <a:xfrm>
-            <a:off x="371475" y="2375297"/>
+            <a:off x="371475" y="2275284"/>
             <a:ext cx="200025" cy="200025"/>
           </a:xfrm>
           <a:prstGeom prst="rect">
@@ -9678,8 +9678,8 @@
         </p:nvSpPr>
         <p:spPr>
           <a:xfrm>
-            <a:off x="657225" y="2394942"/>
-            <a:ext cx="2943225" cy="160734"/>
+            <a:off x="657225" y="2302408"/>
+            <a:ext cx="2943225" cy="145721"/>
           </a:xfrm>
           <a:prstGeom prst="rect">
             <a:avLst/>
@@ -9695,12 +9695,12 @@
           <a:p>
             <a:pPr algn="l" indent="0" marL="0">
               <a:lnSpc>
-                <a:spcPct val="100000"/>
+                <a:spcPct val="96000"/>
               </a:lnSpc>
               <a:buNone/>
             </a:pPr>
             <a:r>
-              <a:rPr lang="en-US" sz="900" b="1" dirty="0">
+              <a:rPr lang="en-US" sz="850" b="1" dirty="0">
                 <a:solidFill>
                   <a:srgbClr val="30343B"/>
                 </a:solidFill>
@@ -9708,9 +9708,9 @@
                 <a:ea typeface="Inter Bold" pitchFamily="34" charset="-122"/>
                 <a:cs typeface="Inter Bold" pitchFamily="34" charset="-120"/>
               </a:rPr>
-              <a:t>Assign ownership</a:t>
-            </a:r>
-            <a:endParaRPr lang="en-US" sz="900" dirty="0"/>
+              <a:t>Read LST output</a:t>
+            </a:r>
+            <a:endParaRPr lang="en-US" sz="850" dirty="0"/>
           </a:p>
         </p:txBody>
       </p:sp>
@@ -9722,8 +9722,8 @@
         </p:nvSpPr>
         <p:spPr>
           <a:xfrm>
-            <a:off x="271463" y="2746772"/>
-            <a:ext cx="3429000" cy="414338"/>
+            <a:off x="271463" y="2618184"/>
+            <a:ext cx="3429000" cy="385763"/>
           </a:xfrm>
           <a:prstGeom prst="rect">
             <a:avLst/>
@@ -9747,7 +9747,7 @@
         </p:nvSpPr>
         <p:spPr>
           <a:xfrm>
-            <a:off x="371475" y="2832497"/>
+            <a:off x="371475" y="2689622"/>
             <a:ext cx="200025" cy="200025"/>
           </a:xfrm>
           <a:prstGeom prst="rect">
@@ -9767,7 +9767,7 @@
         </p:nvSpPr>
         <p:spPr>
           <a:xfrm>
-            <a:off x="371475" y="2832497"/>
+            <a:off x="371475" y="2689622"/>
             <a:ext cx="200025" cy="200025"/>
           </a:xfrm>
           <a:prstGeom prst="rect">
@@ -9808,8 +9808,8 @@
         </p:nvSpPr>
         <p:spPr>
           <a:xfrm>
-            <a:off x="657225" y="2852142"/>
-            <a:ext cx="2943225" cy="160734"/>
+            <a:off x="657225" y="2716746"/>
+            <a:ext cx="2943225" cy="145721"/>
           </a:xfrm>
           <a:prstGeom prst="rect">
             <a:avLst/>
@@ -9825,12 +9825,12 @@
           <a:p>
             <a:pPr algn="l" indent="0" marL="0">
               <a:lnSpc>
-                <a:spcPct val="100000"/>
+                <a:spcPct val="96000"/>
               </a:lnSpc>
               <a:buNone/>
             </a:pPr>
             <a:r>
-              <a:rPr lang="en-US" sz="900" b="1" dirty="0">
+              <a:rPr lang="en-US" sz="850" b="1" dirty="0">
                 <a:solidFill>
                   <a:srgbClr val="30343B"/>
                 </a:solidFill>
@@ -9838,9 +9838,9 @@
                 <a:ea typeface="Inter Bold" pitchFamily="34" charset="-122"/>
                 <a:cs typeface="Inter Bold" pitchFamily="34" charset="-120"/>
               </a:rPr>
-              <a:t>Mark unresolved runtime work</a:t>
-            </a:r>
-            <a:endParaRPr lang="en-US" sz="900" dirty="0"/>
+              <a:t>Extract procedures and data steps</a:t>
+            </a:r>
+            <a:endParaRPr lang="en-US" sz="850" dirty="0"/>
           </a:p>
         </p:txBody>
       </p:sp>
@@ -9852,8 +9852,8 @@
         </p:nvSpPr>
         <p:spPr>
           <a:xfrm>
-            <a:off x="271463" y="3203972"/>
-            <a:ext cx="3429000" cy="414338"/>
+            <a:off x="271463" y="3032522"/>
+            <a:ext cx="3429000" cy="385763"/>
           </a:xfrm>
           <a:prstGeom prst="rect">
             <a:avLst/>
@@ -9877,7 +9877,7 @@
         </p:nvSpPr>
         <p:spPr>
           <a:xfrm>
-            <a:off x="371475" y="3289697"/>
+            <a:off x="371475" y="3103959"/>
             <a:ext cx="200025" cy="200025"/>
           </a:xfrm>
           <a:prstGeom prst="rect">
@@ -9897,7 +9897,7 @@
         </p:nvSpPr>
         <p:spPr>
           <a:xfrm>
-            <a:off x="371475" y="3289697"/>
+            <a:off x="371475" y="3103959"/>
             <a:ext cx="200025" cy="200025"/>
           </a:xfrm>
           <a:prstGeom prst="rect">
@@ -9938,8 +9938,8 @@
         </p:nvSpPr>
         <p:spPr>
           <a:xfrm>
-            <a:off x="657225" y="3309342"/>
-            <a:ext cx="2943225" cy="160734"/>
+            <a:off x="657225" y="3131083"/>
+            <a:ext cx="2943225" cy="145721"/>
           </a:xfrm>
           <a:prstGeom prst="rect">
             <a:avLst/>
@@ -9955,12 +9955,12 @@
           <a:p>
             <a:pPr algn="l" indent="0" marL="0">
               <a:lnSpc>
-                <a:spcPct val="100000"/>
+                <a:spcPct val="96000"/>
               </a:lnSpc>
               <a:buNone/>
             </a:pPr>
             <a:r>
-              <a:rPr lang="en-US" sz="900" b="1" dirty="0">
+              <a:rPr lang="en-US" sz="850" b="1" dirty="0">
                 <a:solidFill>
                   <a:srgbClr val="30343B"/>
                 </a:solidFill>
@@ -9968,9 +9968,9 @@
                 <a:ea typeface="Inter Bold" pitchFamily="34" charset="-122"/>
                 <a:cs typeface="Inter Bold" pitchFamily="34" charset="-120"/>
               </a:rPr>
-              <a:t>Write policy registry</a:t>
-            </a:r>
-            <a:endParaRPr lang="en-US" sz="900" dirty="0"/>
+              <a:t>Write execution trace</a:t>
+            </a:r>
+            <a:endParaRPr lang="en-US" sz="850" dirty="0"/>
           </a:p>
         </p:txBody>
       </p:sp>
@@ -9982,8 +9982,8 @@
         </p:nvSpPr>
         <p:spPr>
           <a:xfrm>
-            <a:off x="271463" y="3732609"/>
-            <a:ext cx="3429000" cy="635794"/>
+            <a:off x="271463" y="3504009"/>
+            <a:ext cx="3429000" cy="592931"/>
           </a:xfrm>
           <a:prstGeom prst="rect">
             <a:avLst/>
@@ -10007,8 +10007,8 @@
         </p:nvSpPr>
         <p:spPr>
           <a:xfrm>
-            <a:off x="385763" y="3846909"/>
-            <a:ext cx="3200400" cy="182166"/>
+            <a:off x="371475" y="3604022"/>
+            <a:ext cx="3228975" cy="167878"/>
           </a:xfrm>
           <a:prstGeom prst="rect">
             <a:avLst/>
@@ -10026,7 +10026,7 @@
               <a:buNone/>
             </a:pPr>
             <a:r>
-              <a:rPr lang="en-US" sz="900" dirty="0">
+              <a:rPr lang="en-US" sz="850" dirty="0">
                 <a:solidFill>
                   <a:srgbClr val="111111"/>
                 </a:solidFill>
@@ -10036,7 +10036,7 @@
               </a:rPr>
               <a:t>CANONICAL ARTIFACT CREATED</a:t>
             </a:r>
-            <a:endParaRPr lang="en-US" sz="900" dirty="0"/>
+            <a:endParaRPr lang="en-US" sz="850" dirty="0"/>
           </a:p>
         </p:txBody>
       </p:sp>
@@ -10048,8 +10048,8 @@
         </p:nvSpPr>
         <p:spPr>
           <a:xfrm>
-            <a:off x="385763" y="4086225"/>
-            <a:ext cx="3200400" cy="125016"/>
+            <a:off x="371475" y="3829050"/>
+            <a:ext cx="3228975" cy="125016"/>
           </a:xfrm>
           <a:prstGeom prst="rect">
             <a:avLst/>
@@ -10075,7 +10075,7 @@
                 <a:ea typeface="JetBrains Mono Bold" pitchFamily="34" charset="-122"/>
                 <a:cs typeface="JetBrains Mono Bold" pitchFamily="34" charset="-120"/>
               </a:rPr>
-              <a:t>policy/policy_registry.yaml</a:t>
+              <a:t>stage1_extraction/output/execution_trace.json</a:t>
             </a:r>
             <a:endParaRPr lang="en-US" sz="650" dirty="0"/>
           </a:p>
@@ -10116,7 +10116,7 @@
                 <a:ea typeface="Oswald SemiBold" pitchFamily="34" charset="-122"/>
                 <a:cs typeface="Oswald SemiBold" pitchFamily="34" charset="-120"/>
               </a:rPr>
-              <a:t>COPY-READY COPILOT MESSAGE</a:t>
+              <a:t>WHAT I ASKED COPILOT</a:t>
             </a:r>
             <a:endParaRPr lang="en-US" sz="1400" dirty="0"/>
           </a:p>
@@ -10236,8 +10236,8 @@
         </p:nvSpPr>
         <p:spPr>
           <a:xfrm>
-            <a:off x="4129088" y="1803797"/>
-            <a:ext cx="4543425" cy="139303"/>
+            <a:off x="4674301" y="1803797"/>
+            <a:ext cx="3998212" cy="139303"/>
           </a:xfrm>
           <a:prstGeom prst="rect">
             <a:avLst/>
@@ -10251,7 +10251,7 @@
           </a:bodyPr>
           <a:lstStyle/>
           <a:p>
-            <a:pPr algn="l" indent="0" marL="0">
+            <a:pPr algn="r" indent="0" marL="0">
               <a:lnSpc>
                 <a:spcPct val="120000"/>
               </a:lnSpc>
@@ -10280,8 +10280,8 @@
         </p:nvSpPr>
         <p:spPr>
           <a:xfrm>
-            <a:off x="4129088" y="2000250"/>
-            <a:ext cx="4543425" cy="1457325"/>
+            <a:off x="4674301" y="2000250"/>
+            <a:ext cx="3998212" cy="1314450"/>
           </a:xfrm>
           <a:prstGeom prst="rect">
             <a:avLst/>
@@ -10305,17 +10305,17 @@
         </p:nvSpPr>
         <p:spPr>
           <a:xfrm>
-            <a:off x="4129088" y="2000250"/>
-            <a:ext cx="4543425" cy="1457325"/>
-          </a:xfrm>
-          <a:prstGeom prst="rect">
-            <a:avLst/>
-          </a:prstGeom>
-          <a:noFill/>
-          <a:ln/>
-        </p:spPr>
-        <p:txBody>
-          <a:bodyPr wrap="square" lIns="170053" tIns="136017" rIns="170053" bIns="136017" rtlCol="0" anchor="t">
+            <a:off x="4674301" y="2000250"/>
+            <a:ext cx="3998212" cy="1314450"/>
+          </a:xfrm>
+          <a:prstGeom prst="rect">
+            <a:avLst/>
+          </a:prstGeom>
+          <a:noFill/>
+          <a:ln/>
+        </p:spPr>
+        <p:txBody>
+          <a:bodyPr wrap="square" lIns="170053" tIns="153035" rIns="170053" bIns="153035" rtlCol="0" anchor="t">
             <a:spAutoFit/>
           </a:bodyPr>
           <a:lstStyle/>
@@ -10335,7 +10335,7 @@
                 <a:ea typeface="JetBrains Mono Bold" pitchFamily="34" charset="-122"/>
                 <a:cs typeface="JetBrains Mono Bold" pitchFamily="34" charset="-120"/>
               </a:rPr>
-              <a:t>/run-next-stage LC-LOGIT-01</a:t>
+              <a:t>I approve the decide-stage architecture artifact.</a:t>
             </a:r>
             <a:r>
               <a:rPr lang="en-US" sz="850" dirty="0">
@@ -10358,7 +10358,18 @@
                 <a:ea typeface="JetBrains Mono" pitchFamily="34" charset="-122"/>
                 <a:cs typeface="JetBrains Mono" pitchFamily="34" charset="-120"/>
               </a:rPr>
-              <a:t> Use the approved canonical execution trace.</a:t>
+              <a:t> Invoke exactly </a:t>
+            </a:r>
+            <a:r>
+              <a:rPr lang="en-US" sz="800" b="1" dirty="0">
+                <a:solidFill>
+                  <a:srgbClr val="D4D4D4"/>
+                </a:solidFill>
+                <a:latin typeface="JetBrains Mono Bold" pitchFamily="34" charset="0"/>
+                <a:ea typeface="JetBrains Mono Bold" pitchFamily="34" charset="-122"/>
+                <a:cs typeface="JetBrains Mono Bold" pitchFamily="34" charset="-120"/>
+              </a:rPr>
+              <a:t>trace</a:t>
             </a:r>
             <a:r>
               <a:rPr lang="en-US" sz="850" dirty="0">
@@ -10369,8 +10380,7 @@
                 <a:ea typeface="JetBrains Mono" pitchFamily="34" charset="-122"/>
                 <a:cs typeface="JetBrains Mono" pitchFamily="34" charset="-120"/>
               </a:rPr>
-              <a:t>
-</a:t>
+              <a:t>.</a:t>
             </a:r>
             <a:r>
               <a:rPr lang="en-US" sz="850" dirty="0">
@@ -10381,18 +10391,53 @@
                 <a:ea typeface="JetBrains Mono" pitchFamily="34" charset="-122"/>
                 <a:cs typeface="JetBrains Mono" pitchFamily="34" charset="-120"/>
               </a:rPr>
-              <a:t>Invoke only </a:t>
+              <a:t>
+</a:t>
+            </a:r>
+            <a:r>
+              <a:rPr lang="en-US" sz="850" dirty="0">
+                <a:solidFill>
+                  <a:srgbClr val="D4D4D4"/>
+                </a:solidFill>
+                <a:latin typeface="JetBrains Mono" pitchFamily="34" charset="0"/>
+                <a:ea typeface="JetBrains Mono" pitchFamily="34" charset="-122"/>
+                <a:cs typeface="JetBrains Mono" pitchFamily="34" charset="-120"/>
+              </a:rPr>
+              <a:t>Read the SAS program, log, and LST output.</a:t>
+            </a:r>
+            <a:r>
+              <a:rPr lang="en-US" sz="850" dirty="0">
+                <a:solidFill>
+                  <a:srgbClr val="D4D4D4"/>
+                </a:solidFill>
+                <a:latin typeface="JetBrains Mono" pitchFamily="34" charset="0"/>
+                <a:ea typeface="JetBrains Mono" pitchFamily="34" charset="-122"/>
+                <a:cs typeface="JetBrains Mono" pitchFamily="34" charset="-120"/>
+              </a:rPr>
+              <a:t>
+</a:t>
+            </a:r>
+            <a:r>
+              <a:rPr lang="en-US" sz="850" dirty="0">
+                <a:solidFill>
+                  <a:srgbClr val="D4D4D4"/>
+                </a:solidFill>
+                <a:latin typeface="JetBrains Mono" pitchFamily="34" charset="0"/>
+                <a:ea typeface="JetBrains Mono" pitchFamily="34" charset="-122"/>
+                <a:cs typeface="JetBrains Mono" pitchFamily="34" charset="-120"/>
+              </a:rPr>
+              <a:t>Write </a:t>
             </a:r>
             <a:r>
               <a:rPr lang="en-US" sz="800" b="1" dirty="0">
                 <a:solidFill>
-                  <a:srgbClr val="D4D4D4"/>
+                  <a:srgbClr val="CE9178"/>
                 </a:solidFill>
                 <a:latin typeface="JetBrains Mono Bold" pitchFamily="34" charset="0"/>
                 <a:ea typeface="JetBrains Mono Bold" pitchFamily="34" charset="-122"/>
                 <a:cs typeface="JetBrains Mono Bold" pitchFamily="34" charset="-120"/>
               </a:rPr>
-              <a:t>map</a:t>
+              <a:t>stage1_extraction/output/execution_trace.json</a:t>
             </a:r>
             <a:r>
               <a:rPr lang="en-US" sz="850" dirty="0">
@@ -10426,97 +10471,7 @@
                 <a:ea typeface="JetBrains Mono" pitchFamily="34" charset="-122"/>
                 <a:cs typeface="JetBrains Mono" pitchFamily="34" charset="-120"/>
               </a:rPr>
-              <a:t>Write and validate </a:t>
-            </a:r>
-            <a:r>
-              <a:rPr lang="en-US" sz="800" b="1" dirty="0">
-                <a:solidFill>
-                  <a:srgbClr val="CE9178"/>
-                </a:solidFill>
-                <a:latin typeface="JetBrains Mono Bold" pitchFamily="34" charset="0"/>
-                <a:ea typeface="JetBrains Mono Bold" pitchFamily="34" charset="-122"/>
-                <a:cs typeface="JetBrains Mono Bold" pitchFamily="34" charset="-120"/>
-              </a:rPr>
-              <a:t>policy/policy_registry.yaml</a:t>
-            </a:r>
-            <a:r>
-              <a:rPr lang="en-US" sz="850" dirty="0">
-                <a:solidFill>
-                  <a:srgbClr val="D4D4D4"/>
-                </a:solidFill>
-                <a:latin typeface="JetBrains Mono" pitchFamily="34" charset="0"/>
-                <a:ea typeface="JetBrains Mono" pitchFamily="34" charset="-122"/>
-                <a:cs typeface="JetBrains Mono" pitchFamily="34" charset="-120"/>
-              </a:rPr>
-              <a:t>.</a:t>
-            </a:r>
-            <a:r>
-              <a:rPr lang="en-US" sz="850" dirty="0">
-                <a:solidFill>
-                  <a:srgbClr val="D4D4D4"/>
-                </a:solidFill>
-                <a:latin typeface="JetBrains Mono" pitchFamily="34" charset="0"/>
-                <a:ea typeface="JetBrains Mono" pitchFamily="34" charset="-122"/>
-                <a:cs typeface="JetBrains Mono" pitchFamily="34" charset="-120"/>
-              </a:rPr>
-              <a:t>
-</a:t>
-            </a:r>
-            <a:r>
-              <a:rPr lang="en-US" sz="850" dirty="0">
-                <a:solidFill>
-                  <a:srgbClr val="D4D4D4"/>
-                </a:solidFill>
-                <a:latin typeface="JetBrains Mono" pitchFamily="34" charset="0"/>
-                <a:ea typeface="JetBrains Mono" pitchFamily="34" charset="-122"/>
-                <a:cs typeface="JetBrains Mono" pitchFamily="34" charset="-120"/>
-              </a:rPr>
-              <a:t>Record its path and hash; stop.</a:t>
-            </a:r>
-            <a:r>
-              <a:rPr lang="en-US" sz="850" dirty="0">
-                <a:solidFill>
-                  <a:srgbClr val="D4D4D4"/>
-                </a:solidFill>
-                <a:latin typeface="JetBrains Mono" pitchFamily="34" charset="0"/>
-                <a:ea typeface="JetBrains Mono" pitchFamily="34" charset="-122"/>
-                <a:cs typeface="JetBrains Mono" pitchFamily="34" charset="-120"/>
-              </a:rPr>
-              <a:t>
-</a:t>
-            </a:r>
-            <a:r>
-              <a:rPr lang="en-US" sz="850" dirty="0">
-                <a:solidFill>
-                  <a:srgbClr val="D4D4D4"/>
-                </a:solidFill>
-                <a:latin typeface="JetBrains Mono" pitchFamily="34" charset="0"/>
-                <a:ea typeface="JetBrains Mono" pitchFamily="34" charset="-122"/>
-                <a:cs typeface="JetBrains Mono" pitchFamily="34" charset="-120"/>
-              </a:rPr>
-              <a:t>Do not invoke </a:t>
-            </a:r>
-            <a:r>
-              <a:rPr lang="en-US" sz="800" b="1" dirty="0">
-                <a:solidFill>
-                  <a:srgbClr val="D4D4D4"/>
-                </a:solidFill>
-                <a:latin typeface="JetBrains Mono Bold" pitchFamily="34" charset="0"/>
-                <a:ea typeface="JetBrains Mono Bold" pitchFamily="34" charset="-122"/>
-                <a:cs typeface="JetBrains Mono Bold" pitchFamily="34" charset="-120"/>
-              </a:rPr>
-              <a:t>model</a:t>
-            </a:r>
-            <a:r>
-              <a:rPr lang="en-US" sz="850" dirty="0">
-                <a:solidFill>
-                  <a:srgbClr val="D4D4D4"/>
-                </a:solidFill>
-                <a:latin typeface="JetBrains Mono" pitchFamily="34" charset="0"/>
-                <a:ea typeface="JetBrains Mono" pitchFamily="34" charset="-122"/>
-                <a:cs typeface="JetBrains Mono" pitchFamily="34" charset="-120"/>
-              </a:rPr>
-              <a:t> automatically.</a:t>
+              <a:t>Do not invoke any later skill.</a:t>
             </a:r>
             <a:endParaRPr lang="en-US" sz="850" dirty="0"/>
           </a:p>
@@ -10596,7 +10551,7 @@
                 <a:ea typeface="Kalam Bold" pitchFamily="34" charset="-122"/>
                 <a:cs typeface="Kalam Bold" pitchFamily="34" charset="-120"/>
               </a:rPr>
-              <a:t> T</a:t>
+              <a:t> The </a:t>
             </a:r>
             <a:r>
               <a:rPr lang="en-US" sz="1250" dirty="0">
@@ -10607,7 +10562,7 @@
                 <a:ea typeface="Kalam Bold" pitchFamily="34" charset="-122"/>
                 <a:cs typeface="Kalam Bold" pitchFamily="34" charset="-120"/>
               </a:rPr>
-              <a:t>he repo co</a:t>
+              <a:t>agent studi</a:t>
             </a:r>
             <a:r>
               <a:rPr lang="en-US" sz="1250" dirty="0">
@@ -10618,7 +10573,7 @@
                 <a:ea typeface="Kalam Bold" pitchFamily="34" charset="-122"/>
                 <a:cs typeface="Kalam Bold" pitchFamily="34" charset="-120"/>
               </a:rPr>
-              <a:t>nverts lega</a:t>
+              <a:t>es what S</a:t>
             </a:r>
             <a:r>
               <a:rPr lang="en-US" sz="1250" dirty="0">
@@ -10629,7 +10584,7 @@
                 <a:ea typeface="Kalam Bold" pitchFamily="34" charset="-122"/>
                 <a:cs typeface="Kalam Bold" pitchFamily="34" charset="-120"/>
               </a:rPr>
-              <a:t>cy behavio</a:t>
+              <a:t>AS actually</a:t>
             </a:r>
             <a:r>
               <a:rPr lang="en-US" sz="1250" dirty="0">
@@ -10640,7 +10595,7 @@
                 <a:ea typeface="Kalam Bold" pitchFamily="34" charset="-122"/>
                 <a:cs typeface="Kalam Bold" pitchFamily="34" charset="-120"/>
               </a:rPr>
-              <a:t>r into rules</a:t>
+              <a:t> did before</a:t>
             </a:r>
             <a:r>
               <a:rPr lang="en-US" sz="1250" dirty="0">
@@ -10651,7 +10606,7 @@
                 <a:ea typeface="Kalam Bold" pitchFamily="34" charset="-122"/>
                 <a:cs typeface="Kalam Bold" pitchFamily="34" charset="-120"/>
               </a:rPr>
-              <a:t> for safe P</a:t>
+              <a:t> writing Py</a:t>
             </a:r>
             <a:r>
               <a:rPr lang="en-US" sz="1250" dirty="0">
@@ -10662,29 +10617,7 @@
                 <a:ea typeface="Kalam Bold" pitchFamily="34" charset="-122"/>
                 <a:cs typeface="Kalam Bold" pitchFamily="34" charset="-120"/>
               </a:rPr>
-              <a:t>ython impl</a:t>
-            </a:r>
-            <a:r>
-              <a:rPr lang="en-US" sz="1250" dirty="0">
-                <a:solidFill>
-                  <a:srgbClr val="111111"/>
-                </a:solidFill>
-                <a:latin typeface="Kalam Bold" pitchFamily="34" charset="0"/>
-                <a:ea typeface="Kalam Bold" pitchFamily="34" charset="-122"/>
-                <a:cs typeface="Kalam Bold" pitchFamily="34" charset="-120"/>
-              </a:rPr>
-              <a:t>ementatio</a:t>
-            </a:r>
-            <a:r>
-              <a:rPr lang="en-US" sz="1250" dirty="0">
-                <a:solidFill>
-                  <a:srgbClr val="111111"/>
-                </a:solidFill>
-                <a:latin typeface="Kalam Bold" pitchFamily="34" charset="0"/>
-                <a:ea typeface="Kalam Bold" pitchFamily="34" charset="-122"/>
-                <a:cs typeface="Kalam Bold" pitchFamily="34" charset="-120"/>
-              </a:rPr>
-              <a:t>n.</a:t>
+              <a:t>thon.</a:t>
             </a:r>
             <a:endParaRPr lang="en-US" sz="1200" dirty="0"/>
           </a:p>
@@ -10819,7 +10752,7 @@
                 <a:ea typeface="Oswald SemiBold" pitchFamily="34" charset="-122"/>
                 <a:cs typeface="Oswald SemiBold" pitchFamily="34" charset="-120"/>
               </a:rPr>
-              <a:t>ACT 3: POLICY BECOMES PYTHON</a:t>
+              <a:t>ACT 2: SAS BEHAVIOR BECOMES POLICY</a:t>
             </a:r>
             <a:endParaRPr lang="en-US" sz="2400" dirty="0"/>
           </a:p>
@@ -10875,7 +10808,7 @@
         <p:spPr>
           <a:xfrm>
             <a:off x="271463" y="1375172"/>
-            <a:ext cx="3429000" cy="385763"/>
+            <a:ext cx="3429000" cy="414338"/>
           </a:xfrm>
           <a:prstGeom prst="rect">
             <a:avLst/>
@@ -10899,7 +10832,7 @@
         </p:nvSpPr>
         <p:spPr>
           <a:xfrm>
-            <a:off x="371475" y="1446609"/>
+            <a:off x="371475" y="1460897"/>
             <a:ext cx="200025" cy="200025"/>
           </a:xfrm>
           <a:prstGeom prst="rect">
@@ -10919,7 +10852,7 @@
         </p:nvSpPr>
         <p:spPr>
           <a:xfrm>
-            <a:off x="371475" y="1446609"/>
+            <a:off x="371475" y="1460897"/>
             <a:ext cx="200025" cy="200025"/>
           </a:xfrm>
           <a:prstGeom prst="rect">
@@ -10960,8 +10893,8 @@
         </p:nvSpPr>
         <p:spPr>
           <a:xfrm>
-            <a:off x="657225" y="1471947"/>
-            <a:ext cx="417909" cy="146447"/>
+            <a:off x="657225" y="1480542"/>
+            <a:ext cx="2943225" cy="160734"/>
           </a:xfrm>
           <a:prstGeom prst="rect">
             <a:avLst/>
@@ -10977,12 +10910,12 @@
           <a:p>
             <a:pPr algn="l" indent="0" marL="0">
               <a:lnSpc>
-                <a:spcPct val="96000"/>
+                <a:spcPct val="100000"/>
               </a:lnSpc>
               <a:buNone/>
             </a:pPr>
             <a:r>
-              <a:rPr lang="en-US" sz="850" b="1" dirty="0">
+              <a:rPr lang="en-US" sz="900" b="1" dirty="0">
                 <a:solidFill>
                   <a:srgbClr val="30343B"/>
                 </a:solidFill>
@@ -10990,110 +10923,22 @@
                 <a:ea typeface="Inter Bold" pitchFamily="34" charset="-122"/>
                 <a:cs typeface="Inter Bold" pitchFamily="34" charset="-120"/>
               </a:rPr>
-              <a:t>Invoke</a:t>
-            </a:r>
-            <a:endParaRPr lang="en-US" sz="850" dirty="0"/>
-          </a:p>
-        </p:txBody>
-      </p:sp>
-      <p:sp>
-        <p:nvSpPr>
-          <p:cNvPr id="12" name="Text 8"/>
-          <p:cNvSpPr/>
-          <p:nvPr/>
-        </p:nvSpPr>
-        <p:spPr>
-          <a:xfrm>
-            <a:off x="1075134" y="1461232"/>
-            <a:ext cx="364331" cy="164306"/>
-          </a:xfrm>
-          <a:prstGeom prst="rect">
-            <a:avLst/>
-          </a:prstGeom>
-          <a:noFill/>
-          <a:ln/>
-        </p:spPr>
-        <p:txBody>
-          <a:bodyPr wrap="none" lIns="0" tIns="0" rIns="0" bIns="0" rtlCol="0" anchor="t">
-            <a:spAutoFit/>
-          </a:bodyPr>
-          <a:lstStyle/>
-          <a:p>
-            <a:pPr algn="l" indent="0" marL="0">
-              <a:lnSpc>
-                <a:spcPct val="96000"/>
-              </a:lnSpc>
-              <a:buNone/>
-            </a:pPr>
-            <a:r>
-              <a:rPr lang="en-US" sz="850" b="1" dirty="0">
-                <a:solidFill>
-                  <a:srgbClr val="30343B"/>
-                </a:solidFill>
-                <a:latin typeface="monospace" pitchFamily="34" charset="0"/>
-                <a:ea typeface="monospace" pitchFamily="34" charset="-122"/>
-                <a:cs typeface="monospace" pitchFamily="34" charset="-120"/>
-              </a:rPr>
-              <a:t>model</a:t>
-            </a:r>
-            <a:endParaRPr lang="en-US" sz="850" dirty="0"/>
-          </a:p>
-        </p:txBody>
-      </p:sp>
-      <p:sp>
-        <p:nvSpPr>
-          <p:cNvPr id="13" name="Text 9"/>
-          <p:cNvSpPr/>
-          <p:nvPr/>
-        </p:nvSpPr>
-        <p:spPr>
-          <a:xfrm>
-            <a:off x="1439466" y="1471947"/>
-            <a:ext cx="821531" cy="146447"/>
-          </a:xfrm>
-          <a:prstGeom prst="rect">
-            <a:avLst/>
-          </a:prstGeom>
-          <a:noFill/>
-          <a:ln/>
-        </p:spPr>
-        <p:txBody>
-          <a:bodyPr wrap="none" lIns="0" tIns="0" rIns="0" bIns="0" rtlCol="0" anchor="t">
-            <a:spAutoFit/>
-          </a:bodyPr>
-          <a:lstStyle/>
-          <a:p>
-            <a:pPr algn="l" indent="0" marL="0">
-              <a:lnSpc>
-                <a:spcPct val="96000"/>
-              </a:lnSpc>
-              <a:buNone/>
-            </a:pPr>
-            <a:r>
-              <a:rPr lang="en-US" sz="850" b="1" dirty="0">
-                <a:solidFill>
-                  <a:srgbClr val="30343B"/>
-                </a:solidFill>
-                <a:latin typeface="Inter Bold" pitchFamily="34" charset="0"/>
-                <a:ea typeface="Inter Bold" pitchFamily="34" charset="-122"/>
-                <a:cs typeface="Inter Bold" pitchFamily="34" charset="-120"/>
-              </a:rPr>
-              <a:t>to read policy</a:t>
-            </a:r>
-            <a:endParaRPr lang="en-US" sz="850" dirty="0"/>
-          </a:p>
-        </p:txBody>
-      </p:sp>
-      <p:sp>
-        <p:nvSpPr>
-          <p:cNvPr id="14" name="Shape 10"/>
-          <p:cNvSpPr/>
-          <p:nvPr/>
-        </p:nvSpPr>
-        <p:spPr>
-          <a:xfrm>
-            <a:off x="271463" y="1789509"/>
-            <a:ext cx="3429000" cy="385763"/>
+              <a:t>Take trace evidence</a:t>
+            </a:r>
+            <a:endParaRPr lang="en-US" sz="900" dirty="0"/>
+          </a:p>
+        </p:txBody>
+      </p:sp>
+      <p:sp>
+        <p:nvSpPr>
+          <p:cNvPr id="12" name="Shape 8"/>
+          <p:cNvSpPr/>
+          <p:nvPr/>
+        </p:nvSpPr>
+        <p:spPr>
+          <a:xfrm>
+            <a:off x="271463" y="1832372"/>
+            <a:ext cx="3429000" cy="414338"/>
           </a:xfrm>
           <a:prstGeom prst="rect">
             <a:avLst/>
@@ -11111,13 +10956,13 @@
       </p:sp>
       <p:sp>
         <p:nvSpPr>
-          <p:cNvPr id="15" name="Shape 11"/>
-          <p:cNvSpPr/>
-          <p:nvPr/>
-        </p:nvSpPr>
-        <p:spPr>
-          <a:xfrm>
-            <a:off x="371475" y="1860947"/>
+          <p:cNvPr id="13" name="Shape 9"/>
+          <p:cNvSpPr/>
+          <p:nvPr/>
+        </p:nvSpPr>
+        <p:spPr>
+          <a:xfrm>
+            <a:off x="371475" y="1918097"/>
             <a:ext cx="200025" cy="200025"/>
           </a:xfrm>
           <a:prstGeom prst="rect">
@@ -11131,13 +10976,13 @@
       </p:sp>
       <p:sp>
         <p:nvSpPr>
-          <p:cNvPr id="16" name="Text 12"/>
-          <p:cNvSpPr/>
-          <p:nvPr/>
-        </p:nvSpPr>
-        <p:spPr>
-          <a:xfrm>
-            <a:off x="371475" y="1860947"/>
+          <p:cNvPr id="14" name="Text 10"/>
+          <p:cNvSpPr/>
+          <p:nvPr/>
+        </p:nvSpPr>
+        <p:spPr>
+          <a:xfrm>
+            <a:off x="371475" y="1918097"/>
             <a:ext cx="200025" cy="200025"/>
           </a:xfrm>
           <a:prstGeom prst="rect">
@@ -11172,14 +11017,14 @@
       </p:sp>
       <p:sp>
         <p:nvSpPr>
-          <p:cNvPr id="17" name="Text 13"/>
-          <p:cNvSpPr/>
-          <p:nvPr/>
-        </p:nvSpPr>
-        <p:spPr>
-          <a:xfrm>
-            <a:off x="657225" y="1888071"/>
-            <a:ext cx="2943225" cy="145721"/>
+          <p:cNvPr id="15" name="Text 11"/>
+          <p:cNvSpPr/>
+          <p:nvPr/>
+        </p:nvSpPr>
+        <p:spPr>
+          <a:xfrm>
+            <a:off x="657225" y="1937742"/>
+            <a:ext cx="2943225" cy="160734"/>
           </a:xfrm>
           <a:prstGeom prst="rect">
             <a:avLst/>
@@ -11195,12 +11040,12 @@
           <a:p>
             <a:pPr algn="l" indent="0" marL="0">
               <a:lnSpc>
-                <a:spcPct val="96000"/>
+                <a:spcPct val="100000"/>
               </a:lnSpc>
               <a:buNone/>
             </a:pPr>
             <a:r>
-              <a:rPr lang="en-US" sz="850" b="1" dirty="0">
+              <a:rPr lang="en-US" sz="900" b="1" dirty="0">
                 <a:solidFill>
                   <a:srgbClr val="30343B"/>
                 </a:solidFill>
@@ -11208,22 +11053,22 @@
                 <a:ea typeface="Inter Bold" pitchFamily="34" charset="-122"/>
                 <a:cs typeface="Inter Bold" pitchFamily="34" charset="-120"/>
               </a:rPr>
-              <a:t>Write semantic IR explicit contract</a:t>
-            </a:r>
-            <a:endParaRPr lang="en-US" sz="850" dirty="0"/>
-          </a:p>
-        </p:txBody>
-      </p:sp>
-      <p:sp>
-        <p:nvSpPr>
-          <p:cNvPr id="18" name="Shape 14"/>
-          <p:cNvSpPr/>
-          <p:nvPr/>
-        </p:nvSpPr>
-        <p:spPr>
-          <a:xfrm>
-            <a:off x="271463" y="2203847"/>
-            <a:ext cx="3429000" cy="385763"/>
+              <a:t>Identify behavior patterns</a:t>
+            </a:r>
+            <a:endParaRPr lang="en-US" sz="900" dirty="0"/>
+          </a:p>
+        </p:txBody>
+      </p:sp>
+      <p:sp>
+        <p:nvSpPr>
+          <p:cNvPr id="16" name="Shape 12"/>
+          <p:cNvSpPr/>
+          <p:nvPr/>
+        </p:nvSpPr>
+        <p:spPr>
+          <a:xfrm>
+            <a:off x="271463" y="2289572"/>
+            <a:ext cx="3429000" cy="414338"/>
           </a:xfrm>
           <a:prstGeom prst="rect">
             <a:avLst/>
@@ -11241,13 +11086,13 @@
       </p:sp>
       <p:sp>
         <p:nvSpPr>
-          <p:cNvPr id="19" name="Shape 15"/>
-          <p:cNvSpPr/>
-          <p:nvPr/>
-        </p:nvSpPr>
-        <p:spPr>
-          <a:xfrm>
-            <a:off x="371475" y="2275284"/>
+          <p:cNvPr id="17" name="Shape 13"/>
+          <p:cNvSpPr/>
+          <p:nvPr/>
+        </p:nvSpPr>
+        <p:spPr>
+          <a:xfrm>
+            <a:off x="371475" y="2375297"/>
             <a:ext cx="200025" cy="200025"/>
           </a:xfrm>
           <a:prstGeom prst="rect">
@@ -11261,13 +11106,13 @@
       </p:sp>
       <p:sp>
         <p:nvSpPr>
-          <p:cNvPr id="20" name="Text 16"/>
-          <p:cNvSpPr/>
-          <p:nvPr/>
-        </p:nvSpPr>
-        <p:spPr>
-          <a:xfrm>
-            <a:off x="371475" y="2275284"/>
+          <p:cNvPr id="18" name="Text 14"/>
+          <p:cNvSpPr/>
+          <p:nvPr/>
+        </p:nvSpPr>
+        <p:spPr>
+          <a:xfrm>
+            <a:off x="371475" y="2375297"/>
             <a:ext cx="200025" cy="200025"/>
           </a:xfrm>
           <a:prstGeom prst="rect">
@@ -11302,14 +11147,14 @@
       </p:sp>
       <p:sp>
         <p:nvSpPr>
-          <p:cNvPr id="21" name="Text 17"/>
-          <p:cNvSpPr/>
-          <p:nvPr/>
-        </p:nvSpPr>
-        <p:spPr>
-          <a:xfrm>
-            <a:off x="657225" y="2300622"/>
-            <a:ext cx="417909" cy="146447"/>
+          <p:cNvPr id="19" name="Text 15"/>
+          <p:cNvSpPr/>
+          <p:nvPr/>
+        </p:nvSpPr>
+        <p:spPr>
+          <a:xfrm>
+            <a:off x="657225" y="2394942"/>
+            <a:ext cx="2943225" cy="160734"/>
           </a:xfrm>
           <a:prstGeom prst="rect">
             <a:avLst/>
@@ -11325,12 +11170,12 @@
           <a:p>
             <a:pPr algn="l" indent="0" marL="0">
               <a:lnSpc>
-                <a:spcPct val="96000"/>
+                <a:spcPct val="100000"/>
               </a:lnSpc>
               <a:buNone/>
             </a:pPr>
             <a:r>
-              <a:rPr lang="en-US" sz="850" b="1" dirty="0">
+              <a:rPr lang="en-US" sz="900" b="1" dirty="0">
                 <a:solidFill>
                   <a:srgbClr val="30343B"/>
                 </a:solidFill>
@@ -11338,110 +11183,22 @@
                 <a:ea typeface="Inter Bold" pitchFamily="34" charset="-122"/>
                 <a:cs typeface="Inter Bold" pitchFamily="34" charset="-120"/>
               </a:rPr>
-              <a:t>Invoke</a:t>
-            </a:r>
-            <a:endParaRPr lang="en-US" sz="850" dirty="0"/>
-          </a:p>
-        </p:txBody>
-      </p:sp>
-      <p:sp>
-        <p:nvSpPr>
-          <p:cNvPr id="22" name="Text 18"/>
-          <p:cNvSpPr/>
-          <p:nvPr/>
-        </p:nvSpPr>
-        <p:spPr>
-          <a:xfrm>
-            <a:off x="1075134" y="2289907"/>
-            <a:ext cx="582941" cy="164306"/>
-          </a:xfrm>
-          <a:prstGeom prst="rect">
-            <a:avLst/>
-          </a:prstGeom>
-          <a:noFill/>
-          <a:ln/>
-        </p:spPr>
-        <p:txBody>
-          <a:bodyPr wrap="none" lIns="0" tIns="0" rIns="0" bIns="0" rtlCol="0" anchor="t">
-            <a:spAutoFit/>
-          </a:bodyPr>
-          <a:lstStyle/>
-          <a:p>
-            <a:pPr algn="l" indent="0" marL="0">
-              <a:lnSpc>
-                <a:spcPct val="96000"/>
-              </a:lnSpc>
-              <a:buNone/>
-            </a:pPr>
-            <a:r>
-              <a:rPr lang="en-US" sz="850" b="1" dirty="0">
-                <a:solidFill>
-                  <a:srgbClr val="30343B"/>
-                </a:solidFill>
-                <a:latin typeface="monospace" pitchFamily="34" charset="0"/>
-                <a:ea typeface="monospace" pitchFamily="34" charset="-122"/>
-                <a:cs typeface="monospace" pitchFamily="34" charset="-120"/>
-              </a:rPr>
-              <a:t>generate</a:t>
-            </a:r>
-            <a:endParaRPr lang="en-US" sz="850" dirty="0"/>
-          </a:p>
-        </p:txBody>
-      </p:sp>
-      <p:sp>
-        <p:nvSpPr>
-          <p:cNvPr id="23" name="Text 19"/>
-          <p:cNvSpPr/>
-          <p:nvPr/>
-        </p:nvSpPr>
-        <p:spPr>
-          <a:xfrm>
-            <a:off x="1658076" y="2300622"/>
-            <a:ext cx="582216" cy="146447"/>
-          </a:xfrm>
-          <a:prstGeom prst="rect">
-            <a:avLst/>
-          </a:prstGeom>
-          <a:noFill/>
-          <a:ln/>
-        </p:spPr>
-        <p:txBody>
-          <a:bodyPr wrap="none" lIns="0" tIns="0" rIns="0" bIns="0" rtlCol="0" anchor="t">
-            <a:spAutoFit/>
-          </a:bodyPr>
-          <a:lstStyle/>
-          <a:p>
-            <a:pPr algn="l" indent="0" marL="0">
-              <a:lnSpc>
-                <a:spcPct val="96000"/>
-              </a:lnSpc>
-              <a:buNone/>
-            </a:pPr>
-            <a:r>
-              <a:rPr lang="en-US" sz="850" b="1" dirty="0">
-                <a:solidFill>
-                  <a:srgbClr val="30343B"/>
-                </a:solidFill>
-                <a:latin typeface="Inter Bold" pitchFamily="34" charset="0"/>
-                <a:ea typeface="Inter Bold" pitchFamily="34" charset="-122"/>
-                <a:cs typeface="Inter Bold" pitchFamily="34" charset="-120"/>
-              </a:rPr>
-              <a:t>to read IR</a:t>
-            </a:r>
-            <a:endParaRPr lang="en-US" sz="850" dirty="0"/>
-          </a:p>
-        </p:txBody>
-      </p:sp>
-      <p:sp>
-        <p:nvSpPr>
-          <p:cNvPr id="24" name="Shape 20"/>
-          <p:cNvSpPr/>
-          <p:nvPr/>
-        </p:nvSpPr>
-        <p:spPr>
-          <a:xfrm>
-            <a:off x="271463" y="2618184"/>
-            <a:ext cx="3429000" cy="385763"/>
+              <a:t>Assign ownership</a:t>
+            </a:r>
+            <a:endParaRPr lang="en-US" sz="900" dirty="0"/>
+          </a:p>
+        </p:txBody>
+      </p:sp>
+      <p:sp>
+        <p:nvSpPr>
+          <p:cNvPr id="20" name="Shape 16"/>
+          <p:cNvSpPr/>
+          <p:nvPr/>
+        </p:nvSpPr>
+        <p:spPr>
+          <a:xfrm>
+            <a:off x="271463" y="2746772"/>
+            <a:ext cx="3429000" cy="414338"/>
           </a:xfrm>
           <a:prstGeom prst="rect">
             <a:avLst/>
@@ -11459,13 +11216,13 @@
       </p:sp>
       <p:sp>
         <p:nvSpPr>
-          <p:cNvPr id="25" name="Shape 21"/>
-          <p:cNvSpPr/>
-          <p:nvPr/>
-        </p:nvSpPr>
-        <p:spPr>
-          <a:xfrm>
-            <a:off x="371475" y="2689622"/>
+          <p:cNvPr id="21" name="Shape 17"/>
+          <p:cNvSpPr/>
+          <p:nvPr/>
+        </p:nvSpPr>
+        <p:spPr>
+          <a:xfrm>
+            <a:off x="371475" y="2832497"/>
             <a:ext cx="200025" cy="200025"/>
           </a:xfrm>
           <a:prstGeom prst="rect">
@@ -11479,13 +11236,13 @@
       </p:sp>
       <p:sp>
         <p:nvSpPr>
-          <p:cNvPr id="26" name="Text 22"/>
-          <p:cNvSpPr/>
-          <p:nvPr/>
-        </p:nvSpPr>
-        <p:spPr>
-          <a:xfrm>
-            <a:off x="371475" y="2689622"/>
+          <p:cNvPr id="22" name="Text 18"/>
+          <p:cNvSpPr/>
+          <p:nvPr/>
+        </p:nvSpPr>
+        <p:spPr>
+          <a:xfrm>
+            <a:off x="371475" y="2832497"/>
             <a:ext cx="200025" cy="200025"/>
           </a:xfrm>
           <a:prstGeom prst="rect">
@@ -11520,14 +11277,14 @@
       </p:sp>
       <p:sp>
         <p:nvSpPr>
-          <p:cNvPr id="27" name="Text 23"/>
-          <p:cNvSpPr/>
-          <p:nvPr/>
-        </p:nvSpPr>
-        <p:spPr>
-          <a:xfrm>
-            <a:off x="657225" y="2716746"/>
-            <a:ext cx="2943225" cy="145721"/>
+          <p:cNvPr id="23" name="Text 19"/>
+          <p:cNvSpPr/>
+          <p:nvPr/>
+        </p:nvSpPr>
+        <p:spPr>
+          <a:xfrm>
+            <a:off x="657225" y="2852142"/>
+            <a:ext cx="2943225" cy="160734"/>
           </a:xfrm>
           <a:prstGeom prst="rect">
             <a:avLst/>
@@ -11543,12 +11300,12 @@
           <a:p>
             <a:pPr algn="l" indent="0" marL="0">
               <a:lnSpc>
-                <a:spcPct val="96000"/>
+                <a:spcPct val="100000"/>
               </a:lnSpc>
               <a:buNone/>
             </a:pPr>
             <a:r>
-              <a:rPr lang="en-US" sz="850" b="1" dirty="0">
+              <a:rPr lang="en-US" sz="900" b="1" dirty="0">
                 <a:solidFill>
                   <a:srgbClr val="30343B"/>
                 </a:solidFill>
@@ -11556,22 +11313,22 @@
                 <a:ea typeface="Inter Bold" pitchFamily="34" charset="-122"/>
                 <a:cs typeface="Inter Bold" pitchFamily="34" charset="-120"/>
               </a:rPr>
-              <a:t>Write pure Python semantic core</a:t>
-            </a:r>
-            <a:endParaRPr lang="en-US" sz="850" dirty="0"/>
-          </a:p>
-        </p:txBody>
-      </p:sp>
-      <p:sp>
-        <p:nvSpPr>
-          <p:cNvPr id="28" name="Shape 24"/>
-          <p:cNvSpPr/>
-          <p:nvPr/>
-        </p:nvSpPr>
-        <p:spPr>
-          <a:xfrm>
-            <a:off x="271463" y="3032522"/>
-            <a:ext cx="3429000" cy="385763"/>
+              <a:t>Mark unresolved runtime work</a:t>
+            </a:r>
+            <a:endParaRPr lang="en-US" sz="900" dirty="0"/>
+          </a:p>
+        </p:txBody>
+      </p:sp>
+      <p:sp>
+        <p:nvSpPr>
+          <p:cNvPr id="24" name="Shape 20"/>
+          <p:cNvSpPr/>
+          <p:nvPr/>
+        </p:nvSpPr>
+        <p:spPr>
+          <a:xfrm>
+            <a:off x="271463" y="3203972"/>
+            <a:ext cx="3429000" cy="414338"/>
           </a:xfrm>
           <a:prstGeom prst="rect">
             <a:avLst/>
@@ -11589,13 +11346,13 @@
       </p:sp>
       <p:sp>
         <p:nvSpPr>
-          <p:cNvPr id="29" name="Shape 25"/>
-          <p:cNvSpPr/>
-          <p:nvPr/>
-        </p:nvSpPr>
-        <p:spPr>
-          <a:xfrm>
-            <a:off x="371475" y="3103959"/>
+          <p:cNvPr id="25" name="Shape 21"/>
+          <p:cNvSpPr/>
+          <p:nvPr/>
+        </p:nvSpPr>
+        <p:spPr>
+          <a:xfrm>
+            <a:off x="371475" y="3289697"/>
             <a:ext cx="200025" cy="200025"/>
           </a:xfrm>
           <a:prstGeom prst="rect">
@@ -11609,13 +11366,13 @@
       </p:sp>
       <p:sp>
         <p:nvSpPr>
-          <p:cNvPr id="30" name="Text 26"/>
-          <p:cNvSpPr/>
-          <p:nvPr/>
-        </p:nvSpPr>
-        <p:spPr>
-          <a:xfrm>
-            <a:off x="371475" y="3103959"/>
+          <p:cNvPr id="26" name="Text 22"/>
+          <p:cNvSpPr/>
+          <p:nvPr/>
+        </p:nvSpPr>
+        <p:spPr>
+          <a:xfrm>
+            <a:off x="371475" y="3289697"/>
             <a:ext cx="200025" cy="200025"/>
           </a:xfrm>
           <a:prstGeom prst="rect">
@@ -11650,14 +11407,14 @@
       </p:sp>
       <p:sp>
         <p:nvSpPr>
-          <p:cNvPr id="31" name="Text 27"/>
-          <p:cNvSpPr/>
-          <p:nvPr/>
-        </p:nvSpPr>
-        <p:spPr>
-          <a:xfrm>
-            <a:off x="657225" y="3129297"/>
-            <a:ext cx="417909" cy="146447"/>
+          <p:cNvPr id="27" name="Text 23"/>
+          <p:cNvSpPr/>
+          <p:nvPr/>
+        </p:nvSpPr>
+        <p:spPr>
+          <a:xfrm>
+            <a:off x="657225" y="3309342"/>
+            <a:ext cx="2943225" cy="160734"/>
           </a:xfrm>
           <a:prstGeom prst="rect">
             <a:avLst/>
@@ -11673,12 +11430,12 @@
           <a:p>
             <a:pPr algn="l" indent="0" marL="0">
               <a:lnSpc>
-                <a:spcPct val="96000"/>
+                <a:spcPct val="100000"/>
               </a:lnSpc>
               <a:buNone/>
             </a:pPr>
             <a:r>
-              <a:rPr lang="en-US" sz="850" b="1" dirty="0">
+              <a:rPr lang="en-US" sz="900" b="1" dirty="0">
                 <a:solidFill>
                   <a:srgbClr val="30343B"/>
                 </a:solidFill>
@@ -11686,110 +11443,22 @@
                 <a:ea typeface="Inter Bold" pitchFamily="34" charset="-122"/>
                 <a:cs typeface="Inter Bold" pitchFamily="34" charset="-120"/>
               </a:rPr>
-              <a:t>Invoke</a:t>
-            </a:r>
-            <a:endParaRPr lang="en-US" sz="850" dirty="0"/>
-          </a:p>
-        </p:txBody>
-      </p:sp>
-      <p:sp>
-        <p:nvSpPr>
-          <p:cNvPr id="32" name="Text 28"/>
-          <p:cNvSpPr/>
-          <p:nvPr/>
-        </p:nvSpPr>
-        <p:spPr>
-          <a:xfrm>
-            <a:off x="1075134" y="3118582"/>
-            <a:ext cx="291498" cy="164306"/>
-          </a:xfrm>
-          <a:prstGeom prst="rect">
-            <a:avLst/>
-          </a:prstGeom>
-          <a:noFill/>
-          <a:ln/>
-        </p:spPr>
-        <p:txBody>
-          <a:bodyPr wrap="none" lIns="0" tIns="0" rIns="0" bIns="0" rtlCol="0" anchor="t">
-            <a:spAutoFit/>
-          </a:bodyPr>
-          <a:lstStyle/>
-          <a:p>
-            <a:pPr algn="l" indent="0" marL="0">
-              <a:lnSpc>
-                <a:spcPct val="96000"/>
-              </a:lnSpc>
-              <a:buNone/>
-            </a:pPr>
-            <a:r>
-              <a:rPr lang="en-US" sz="850" b="1" dirty="0">
-                <a:solidFill>
-                  <a:srgbClr val="30343B"/>
-                </a:solidFill>
-                <a:latin typeface="monospace" pitchFamily="34" charset="0"/>
-                <a:ea typeface="monospace" pitchFamily="34" charset="-122"/>
-                <a:cs typeface="monospace" pitchFamily="34" charset="-120"/>
-              </a:rPr>
-              <a:t>test</a:t>
-            </a:r>
-            <a:endParaRPr lang="en-US" sz="850" dirty="0"/>
-          </a:p>
-        </p:txBody>
-      </p:sp>
-      <p:sp>
-        <p:nvSpPr>
-          <p:cNvPr id="33" name="Text 29"/>
-          <p:cNvSpPr/>
-          <p:nvPr/>
-        </p:nvSpPr>
-        <p:spPr>
-          <a:xfrm>
-            <a:off x="1366633" y="3129297"/>
-            <a:ext cx="1468041" cy="146447"/>
-          </a:xfrm>
-          <a:prstGeom prst="rect">
-            <a:avLst/>
-          </a:prstGeom>
-          <a:noFill/>
-          <a:ln/>
-        </p:spPr>
-        <p:txBody>
-          <a:bodyPr wrap="none" lIns="0" tIns="0" rIns="0" bIns="0" rtlCol="0" anchor="t">
-            <a:spAutoFit/>
-          </a:bodyPr>
-          <a:lstStyle/>
-          <a:p>
-            <a:pPr algn="l" indent="0" marL="0">
-              <a:lnSpc>
-                <a:spcPct val="96000"/>
-              </a:lnSpc>
-              <a:buNone/>
-            </a:pPr>
-            <a:r>
-              <a:rPr lang="en-US" sz="850" b="1" dirty="0">
-                <a:solidFill>
-                  <a:srgbClr val="30343B"/>
-                </a:solidFill>
-                <a:latin typeface="Inter Bold" pitchFamily="34" charset="0"/>
-                <a:ea typeface="Inter Bold" pitchFamily="34" charset="-122"/>
-                <a:cs typeface="Inter Bold" pitchFamily="34" charset="-120"/>
-              </a:rPr>
-              <a:t>to build governed fixture</a:t>
-            </a:r>
-            <a:endParaRPr lang="en-US" sz="850" dirty="0"/>
-          </a:p>
-        </p:txBody>
-      </p:sp>
-      <p:sp>
-        <p:nvSpPr>
-          <p:cNvPr id="34" name="Shape 30"/>
-          <p:cNvSpPr/>
-          <p:nvPr/>
-        </p:nvSpPr>
-        <p:spPr>
-          <a:xfrm>
-            <a:off x="271463" y="3504009"/>
-            <a:ext cx="3429000" cy="1096566"/>
+              <a:t>Write policy registry</a:t>
+            </a:r>
+            <a:endParaRPr lang="en-US" sz="900" dirty="0"/>
+          </a:p>
+        </p:txBody>
+      </p:sp>
+      <p:sp>
+        <p:nvSpPr>
+          <p:cNvPr id="28" name="Shape 24"/>
+          <p:cNvSpPr/>
+          <p:nvPr/>
+        </p:nvSpPr>
+        <p:spPr>
+          <a:xfrm>
+            <a:off x="271463" y="3732609"/>
+            <a:ext cx="3429000" cy="635794"/>
           </a:xfrm>
           <a:prstGeom prst="rect">
             <a:avLst/>
@@ -11807,14 +11476,14 @@
       </p:sp>
       <p:sp>
         <p:nvSpPr>
-          <p:cNvPr id="35" name="Text 31"/>
-          <p:cNvSpPr/>
-          <p:nvPr/>
-        </p:nvSpPr>
-        <p:spPr>
-          <a:xfrm>
-            <a:off x="371475" y="3604022"/>
-            <a:ext cx="3228975" cy="167878"/>
+          <p:cNvPr id="29" name="Text 25"/>
+          <p:cNvSpPr/>
+          <p:nvPr/>
+        </p:nvSpPr>
+        <p:spPr>
+          <a:xfrm>
+            <a:off x="385763" y="3846909"/>
+            <a:ext cx="3200400" cy="182166"/>
           </a:xfrm>
           <a:prstGeom prst="rect">
             <a:avLst/>
@@ -11832,7 +11501,7 @@
               <a:buNone/>
             </a:pPr>
             <a:r>
-              <a:rPr lang="en-US" sz="850" dirty="0">
+              <a:rPr lang="en-US" sz="900" dirty="0">
                 <a:solidFill>
                   <a:srgbClr val="111111"/>
                 </a:solidFill>
@@ -11840,22 +11509,22 @@
                 <a:ea typeface="Oswald SemiBold" pitchFamily="34" charset="-122"/>
                 <a:cs typeface="Oswald SemiBold" pitchFamily="34" charset="-120"/>
               </a:rPr>
-              <a:t>THE PATH TO CODE</a:t>
-            </a:r>
-            <a:endParaRPr lang="en-US" sz="850" dirty="0"/>
-          </a:p>
-        </p:txBody>
-      </p:sp>
-      <p:sp>
-        <p:nvSpPr>
-          <p:cNvPr id="36" name="Text 32"/>
-          <p:cNvSpPr/>
-          <p:nvPr/>
-        </p:nvSpPr>
-        <p:spPr>
-          <a:xfrm>
-            <a:off x="371475" y="3829050"/>
-            <a:ext cx="3228975" cy="128588"/>
+              <a:t>CANONICAL ARTIFACT CREATED</a:t>
+            </a:r>
+            <a:endParaRPr lang="en-US" sz="900" dirty="0"/>
+          </a:p>
+        </p:txBody>
+      </p:sp>
+      <p:sp>
+        <p:nvSpPr>
+          <p:cNvPr id="30" name="Text 26"/>
+          <p:cNvSpPr/>
+          <p:nvPr/>
+        </p:nvSpPr>
+        <p:spPr>
+          <a:xfrm>
+            <a:off x="385763" y="4086225"/>
+            <a:ext cx="3200400" cy="125016"/>
           </a:xfrm>
           <a:prstGeom prst="rect">
             <a:avLst/>
@@ -11889,130 +11558,7 @@
       </p:sp>
       <p:sp>
         <p:nvSpPr>
-          <p:cNvPr id="37" name="Text 33"/>
-          <p:cNvSpPr/>
-          <p:nvPr/>
-        </p:nvSpPr>
-        <p:spPr>
-          <a:xfrm>
-            <a:off x="371475" y="3986213"/>
-            <a:ext cx="3228975" cy="128588"/>
-          </a:xfrm>
-          <a:prstGeom prst="rect">
-            <a:avLst/>
-          </a:prstGeom>
-          <a:noFill/>
-          <a:ln/>
-        </p:spPr>
-        <p:txBody>
-          <a:bodyPr wrap="square" lIns="85090" tIns="0" rIns="0" bIns="0" rtlCol="0" anchor="t">
-            <a:spAutoFit/>
-          </a:bodyPr>
-          <a:lstStyle/>
-          <a:p>
-            <a:pPr algn="l" indent="0" marL="0">
-              <a:buNone/>
-            </a:pPr>
-            <a:r>
-              <a:rPr lang="en-US" sz="650" b="1" dirty="0">
-                <a:solidFill>
-                  <a:srgbClr val="B42318"/>
-                </a:solidFill>
-                <a:latin typeface="JetBrains Mono Bold" pitchFamily="34" charset="0"/>
-                <a:ea typeface="JetBrains Mono Bold" pitchFamily="34" charset="-122"/>
-                <a:cs typeface="JetBrains Mono Bold" pitchFamily="34" charset="-120"/>
-              </a:rPr>
-              <a:t>semantic_ir/LC-LOGIT-01.json</a:t>
-            </a:r>
-            <a:endParaRPr lang="en-US" sz="650" dirty="0"/>
-          </a:p>
-        </p:txBody>
-      </p:sp>
-      <p:sp>
-        <p:nvSpPr>
-          <p:cNvPr id="38" name="Text 34"/>
-          <p:cNvSpPr/>
-          <p:nvPr/>
-        </p:nvSpPr>
-        <p:spPr>
-          <a:xfrm>
-            <a:off x="371475" y="4143375"/>
-            <a:ext cx="3228975" cy="128588"/>
-          </a:xfrm>
-          <a:prstGeom prst="rect">
-            <a:avLst/>
-          </a:prstGeom>
-          <a:noFill/>
-          <a:ln/>
-        </p:spPr>
-        <p:txBody>
-          <a:bodyPr wrap="square" lIns="85090" tIns="0" rIns="0" bIns="0" rtlCol="0" anchor="t">
-            <a:spAutoFit/>
-          </a:bodyPr>
-          <a:lstStyle/>
-          <a:p>
-            <a:pPr algn="l" indent="0" marL="0">
-              <a:buNone/>
-            </a:pPr>
-            <a:r>
-              <a:rPr lang="en-US" sz="650" b="1" dirty="0">
-                <a:solidFill>
-                  <a:srgbClr val="B42318"/>
-                </a:solidFill>
-                <a:latin typeface="JetBrains Mono Bold" pitchFamily="34" charset="0"/>
-                <a:ea typeface="JetBrains Mono Bold" pitchFamily="34" charset="-122"/>
-                <a:cs typeface="JetBrains Mono Bold" pitchFamily="34" charset="-120"/>
-              </a:rPr>
-              <a:t>src/sas_logit/semantic/scoring.py</a:t>
-            </a:r>
-            <a:endParaRPr lang="en-US" sz="650" dirty="0"/>
-          </a:p>
-        </p:txBody>
-      </p:sp>
-      <p:sp>
-        <p:nvSpPr>
-          <p:cNvPr id="39" name="Text 35"/>
-          <p:cNvSpPr/>
-          <p:nvPr/>
-        </p:nvSpPr>
-        <p:spPr>
-          <a:xfrm>
-            <a:off x="371475" y="4300538"/>
-            <a:ext cx="3228975" cy="128588"/>
-          </a:xfrm>
-          <a:prstGeom prst="rect">
-            <a:avLst/>
-          </a:prstGeom>
-          <a:noFill/>
-          <a:ln/>
-        </p:spPr>
-        <p:txBody>
-          <a:bodyPr wrap="square" lIns="85090" tIns="0" rIns="0" bIns="0" rtlCol="0" anchor="t">
-            <a:spAutoFit/>
-          </a:bodyPr>
-          <a:lstStyle/>
-          <a:p>
-            <a:pPr algn="l" indent="0" marL="0">
-              <a:buNone/>
-            </a:pPr>
-            <a:r>
-              <a:rPr lang="en-US" sz="650" b="1" dirty="0">
-                <a:solidFill>
-                  <a:srgbClr val="B42318"/>
-                </a:solidFill>
-                <a:latin typeface="JetBrains Mono Bold" pitchFamily="34" charset="0"/>
-                <a:ea typeface="JetBrains Mono Bold" pitchFamily="34" charset="-122"/>
-                <a:cs typeface="JetBrains Mono Bold" pitchFamily="34" charset="-120"/>
-              </a:rPr>
-              <a:t>tests/fixtures/.../fixture.csv</a:t>
-            </a:r>
-            <a:endParaRPr lang="en-US" sz="650" dirty="0"/>
-          </a:p>
-        </p:txBody>
-      </p:sp>
-      <p:sp>
-        <p:nvSpPr>
-          <p:cNvPr id="40" name="Text 36"/>
+          <p:cNvPr id="31" name="Text 27"/>
           <p:cNvSpPr/>
           <p:nvPr/>
         </p:nvSpPr>
@@ -12045,7 +11591,7 @@
                 <a:ea typeface="Oswald SemiBold" pitchFamily="34" charset="-122"/>
                 <a:cs typeface="Oswald SemiBold" pitchFamily="34" charset="-120"/>
               </a:rPr>
-              <a:t>ONE MESSAGE PER SKILL</a:t>
+              <a:t>COPY-READY COPILOT MESSAGE</a:t>
             </a:r>
             <a:endParaRPr lang="en-US" sz="1400" dirty="0"/>
           </a:p>
@@ -12053,7 +11599,7 @@
       </p:sp>
       <p:sp>
         <p:nvSpPr>
-          <p:cNvPr id="41" name="Shape 37"/>
+          <p:cNvPr id="32" name="Shape 28"/>
           <p:cNvSpPr/>
           <p:nvPr/>
         </p:nvSpPr>
@@ -12078,7 +11624,7 @@
       </p:sp>
       <p:sp>
         <p:nvSpPr>
-          <p:cNvPr id="42" name="Shape 38"/>
+          <p:cNvPr id="33" name="Shape 29"/>
           <p:cNvSpPr/>
           <p:nvPr/>
         </p:nvSpPr>
@@ -12098,7 +11644,7 @@
       </p:sp>
       <p:sp>
         <p:nvSpPr>
-          <p:cNvPr id="43" name="Shape 39"/>
+          <p:cNvPr id="34" name="Shape 30"/>
           <p:cNvSpPr/>
           <p:nvPr/>
         </p:nvSpPr>
@@ -12118,7 +11664,7 @@
       </p:sp>
       <p:sp>
         <p:nvSpPr>
-          <p:cNvPr id="44" name="Text 40"/>
+          <p:cNvPr id="35" name="Text 31"/>
           <p:cNvSpPr/>
           <p:nvPr/>
         </p:nvSpPr>
@@ -12159,14 +11705,14 @@
       </p:sp>
       <p:sp>
         <p:nvSpPr>
-          <p:cNvPr id="45" name="Text 41"/>
-          <p:cNvSpPr/>
-          <p:nvPr/>
-        </p:nvSpPr>
-        <p:spPr>
-          <a:xfrm>
-            <a:off x="4114800" y="1789509"/>
-            <a:ext cx="4572000" cy="124290"/>
+          <p:cNvPr id="36" name="Text 32"/>
+          <p:cNvSpPr/>
+          <p:nvPr/>
+        </p:nvSpPr>
+        <p:spPr>
+          <a:xfrm>
+            <a:off x="4129088" y="1803797"/>
+            <a:ext cx="4543425" cy="139303"/>
           </a:xfrm>
           <a:prstGeom prst="rect">
             <a:avLst/>
@@ -12182,12 +11728,12 @@
           <a:p>
             <a:pPr algn="l" indent="0" marL="0">
               <a:lnSpc>
-                <a:spcPct val="116000"/>
+                <a:spcPct val="120000"/>
               </a:lnSpc>
               <a:buNone/>
             </a:pPr>
             <a:r>
-              <a:rPr lang="en-US" sz="600" b="1" spc="1" kern="0" dirty="0">
+              <a:rPr lang="en-US" sz="650" b="1" spc="1" kern="0" dirty="0">
                 <a:solidFill>
                   <a:srgbClr val="569CD6"/>
                 </a:solidFill>
@@ -12197,20 +11743,20 @@
               </a:rPr>
               <a:t>USER</a:t>
             </a:r>
-            <a:endParaRPr lang="en-US" sz="600" dirty="0"/>
-          </a:p>
-        </p:txBody>
-      </p:sp>
-      <p:sp>
-        <p:nvSpPr>
-          <p:cNvPr id="46" name="Shape 42"/>
-          <p:cNvSpPr/>
-          <p:nvPr/>
-        </p:nvSpPr>
-        <p:spPr>
-          <a:xfrm>
-            <a:off x="4114800" y="1956662"/>
-            <a:ext cx="4572000" cy="1626989"/>
+            <a:endParaRPr lang="en-US" sz="650" dirty="0"/>
+          </a:p>
+        </p:txBody>
+      </p:sp>
+      <p:sp>
+        <p:nvSpPr>
+          <p:cNvPr id="37" name="Shape 33"/>
+          <p:cNvSpPr/>
+          <p:nvPr/>
+        </p:nvSpPr>
+        <p:spPr>
+          <a:xfrm>
+            <a:off x="4129088" y="2000250"/>
+            <a:ext cx="4543425" cy="1457325"/>
           </a:xfrm>
           <a:prstGeom prst="rect">
             <a:avLst/>
@@ -12228,35 +11774,35 @@
       </p:sp>
       <p:sp>
         <p:nvSpPr>
-          <p:cNvPr id="47" name="Text 43"/>
-          <p:cNvSpPr/>
-          <p:nvPr/>
-        </p:nvSpPr>
-        <p:spPr>
-          <a:xfrm>
-            <a:off x="4114800" y="1956662"/>
-            <a:ext cx="4572000" cy="1626989"/>
-          </a:xfrm>
-          <a:prstGeom prst="rect">
-            <a:avLst/>
-          </a:prstGeom>
-          <a:noFill/>
-          <a:ln/>
-        </p:spPr>
-        <p:txBody>
-          <a:bodyPr wrap="square" lIns="153035" tIns="119126" rIns="153035" bIns="119126" rtlCol="0" anchor="t">
+          <p:cNvPr id="38" name="Text 34"/>
+          <p:cNvSpPr/>
+          <p:nvPr/>
+        </p:nvSpPr>
+        <p:spPr>
+          <a:xfrm>
+            <a:off x="4129088" y="2000250"/>
+            <a:ext cx="4543425" cy="1457325"/>
+          </a:xfrm>
+          <a:prstGeom prst="rect">
+            <a:avLst/>
+          </a:prstGeom>
+          <a:noFill/>
+          <a:ln/>
+        </p:spPr>
+        <p:txBody>
+          <a:bodyPr wrap="square" lIns="170053" tIns="136017" rIns="170053" bIns="136017" rtlCol="0" anchor="t">
             <a:spAutoFit/>
           </a:bodyPr>
           <a:lstStyle/>
           <a:p>
             <a:pPr algn="l" indent="0" marL="0">
               <a:lnSpc>
-                <a:spcPct val="116000"/>
+                <a:spcPct val="120000"/>
               </a:lnSpc>
               <a:buNone/>
             </a:pPr>
             <a:r>
-              <a:rPr lang="en-US" sz="750" b="1" dirty="0">
+              <a:rPr lang="en-US" sz="800" b="1" dirty="0">
                 <a:solidFill>
                   <a:srgbClr val="CE9178"/>
                 </a:solidFill>
@@ -12267,7 +11813,7 @@
               <a:t>/run-next-stage LC-LOGIT-01</a:t>
             </a:r>
             <a:r>
-              <a:rPr lang="en-US" sz="800" dirty="0">
+              <a:rPr lang="en-US" sz="850" dirty="0">
                 <a:solidFill>
                   <a:srgbClr val="D4D4D4"/>
                 </a:solidFill>
@@ -12279,7 +11825,7 @@
 </a:t>
             </a:r>
             <a:r>
-              <a:rPr lang="en-US" sz="800" dirty="0">
+              <a:rPr lang="en-US" sz="850" dirty="0">
                 <a:solidFill>
                   <a:srgbClr val="D4D4D4"/>
                 </a:solidFill>
@@ -12287,10 +11833,10 @@
                 <a:ea typeface="JetBrains Mono" pitchFamily="34" charset="-122"/>
                 <a:cs typeface="JetBrains Mono" pitchFamily="34" charset="-120"/>
               </a:rPr>
-              <a:t> Read durable state and run exactly one authorized skill.</a:t>
-            </a:r>
-            <a:r>
-              <a:rPr lang="en-US" sz="800" dirty="0">
+              <a:t> Use the approved canonical execution trace.</a:t>
+            </a:r>
+            <a:r>
+              <a:rPr lang="en-US" sz="850" dirty="0">
                 <a:solidFill>
                   <a:srgbClr val="D4D4D4"/>
                 </a:solidFill>
@@ -12302,7 +11848,7 @@
 </a:t>
             </a:r>
             <a:r>
-              <a:rPr lang="en-US" sz="800" dirty="0">
+              <a:rPr lang="en-US" sz="850" dirty="0">
                 <a:solidFill>
                   <a:srgbClr val="D4D4D4"/>
                 </a:solidFill>
@@ -12310,21 +11856,21 @@
                 <a:ea typeface="JetBrains Mono" pitchFamily="34" charset="-122"/>
                 <a:cs typeface="JetBrains Mono" pitchFamily="34" charset="-120"/>
               </a:rPr>
-              <a:t> </a:t>
-            </a:r>
-            <a:r>
-              <a:rPr lang="en-US" sz="750" b="1" dirty="0">
-                <a:solidFill>
-                  <a:srgbClr val="CE9178"/>
+              <a:t>Invoke only </a:t>
+            </a:r>
+            <a:r>
+              <a:rPr lang="en-US" sz="800" b="1" dirty="0">
+                <a:solidFill>
+                  <a:srgbClr val="D4D4D4"/>
                 </a:solidFill>
                 <a:latin typeface="JetBrains Mono Bold" pitchFamily="34" charset="0"/>
                 <a:ea typeface="JetBrains Mono Bold" pitchFamily="34" charset="-122"/>
                 <a:cs typeface="JetBrains Mono Bold" pitchFamily="34" charset="-120"/>
               </a:rPr>
-              <a:t>model</a:t>
-            </a:r>
-            <a:r>
-              <a:rPr lang="en-US" sz="800" dirty="0">
+              <a:t>map</a:t>
+            </a:r>
+            <a:r>
+              <a:rPr lang="en-US" sz="850" dirty="0">
                 <a:solidFill>
                   <a:srgbClr val="D4D4D4"/>
                 </a:solidFill>
@@ -12332,10 +11878,10 @@
                 <a:ea typeface="JetBrains Mono" pitchFamily="34" charset="-122"/>
                 <a:cs typeface="JetBrains Mono" pitchFamily="34" charset="-120"/>
               </a:rPr>
-              <a:t> → write semantic IR → stop</a:t>
-            </a:r>
-            <a:r>
-              <a:rPr lang="en-US" sz="800" dirty="0">
+              <a:t>.</a:t>
+            </a:r>
+            <a:r>
+              <a:rPr lang="en-US" sz="850" dirty="0">
                 <a:solidFill>
                   <a:srgbClr val="D4D4D4"/>
                 </a:solidFill>
@@ -12347,7 +11893,18 @@
 </a:t>
             </a:r>
             <a:r>
-              <a:rPr lang="en-US" sz="750" b="1" dirty="0">
+              <a:rPr lang="en-US" sz="850" dirty="0">
+                <a:solidFill>
+                  <a:srgbClr val="D4D4D4"/>
+                </a:solidFill>
+                <a:latin typeface="JetBrains Mono" pitchFamily="34" charset="0"/>
+                <a:ea typeface="JetBrains Mono" pitchFamily="34" charset="-122"/>
+                <a:cs typeface="JetBrains Mono" pitchFamily="34" charset="-120"/>
+              </a:rPr>
+              <a:t>Write and validate </a:t>
+            </a:r>
+            <a:r>
+              <a:rPr lang="en-US" sz="800" b="1" dirty="0">
                 <a:solidFill>
                   <a:srgbClr val="CE9178"/>
                 </a:solidFill>
@@ -12355,10 +11912,10 @@
                 <a:ea typeface="JetBrains Mono Bold" pitchFamily="34" charset="-122"/>
                 <a:cs typeface="JetBrains Mono Bold" pitchFamily="34" charset="-120"/>
               </a:rPr>
-              <a:t>generate</a:t>
-            </a:r>
-            <a:r>
-              <a:rPr lang="en-US" sz="800" dirty="0">
+              <a:t>policy/policy_registry.yaml</a:t>
+            </a:r>
+            <a:r>
+              <a:rPr lang="en-US" sz="850" dirty="0">
                 <a:solidFill>
                   <a:srgbClr val="D4D4D4"/>
                 </a:solidFill>
@@ -12366,10 +11923,10 @@
                 <a:ea typeface="JetBrains Mono" pitchFamily="34" charset="-122"/>
                 <a:cs typeface="JetBrains Mono" pitchFamily="34" charset="-120"/>
               </a:rPr>
-              <a:t> → write Python → stop</a:t>
-            </a:r>
-            <a:r>
-              <a:rPr lang="en-US" sz="800" dirty="0">
+              <a:t>.</a:t>
+            </a:r>
+            <a:r>
+              <a:rPr lang="en-US" sz="850" dirty="0">
                 <a:solidFill>
                   <a:srgbClr val="D4D4D4"/>
                 </a:solidFill>
@@ -12381,18 +11938,52 @@
 </a:t>
             </a:r>
             <a:r>
-              <a:rPr lang="en-US" sz="750" b="1" dirty="0">
-                <a:solidFill>
-                  <a:srgbClr val="CE9178"/>
+              <a:rPr lang="en-US" sz="850" dirty="0">
+                <a:solidFill>
+                  <a:srgbClr val="D4D4D4"/>
+                </a:solidFill>
+                <a:latin typeface="JetBrains Mono" pitchFamily="34" charset="0"/>
+                <a:ea typeface="JetBrains Mono" pitchFamily="34" charset="-122"/>
+                <a:cs typeface="JetBrains Mono" pitchFamily="34" charset="-120"/>
+              </a:rPr>
+              <a:t>Record its path and hash; stop.</a:t>
+            </a:r>
+            <a:r>
+              <a:rPr lang="en-US" sz="850" dirty="0">
+                <a:solidFill>
+                  <a:srgbClr val="D4D4D4"/>
+                </a:solidFill>
+                <a:latin typeface="JetBrains Mono" pitchFamily="34" charset="0"/>
+                <a:ea typeface="JetBrains Mono" pitchFamily="34" charset="-122"/>
+                <a:cs typeface="JetBrains Mono" pitchFamily="34" charset="-120"/>
+              </a:rPr>
+              <a:t>
+</a:t>
+            </a:r>
+            <a:r>
+              <a:rPr lang="en-US" sz="850" dirty="0">
+                <a:solidFill>
+                  <a:srgbClr val="D4D4D4"/>
+                </a:solidFill>
+                <a:latin typeface="JetBrains Mono" pitchFamily="34" charset="0"/>
+                <a:ea typeface="JetBrains Mono" pitchFamily="34" charset="-122"/>
+                <a:cs typeface="JetBrains Mono" pitchFamily="34" charset="-120"/>
+              </a:rPr>
+              <a:t>Do not invoke </a:t>
+            </a:r>
+            <a:r>
+              <a:rPr lang="en-US" sz="800" b="1" dirty="0">
+                <a:solidFill>
+                  <a:srgbClr val="D4D4D4"/>
                 </a:solidFill>
                 <a:latin typeface="JetBrains Mono Bold" pitchFamily="34" charset="0"/>
                 <a:ea typeface="JetBrains Mono Bold" pitchFamily="34" charset="-122"/>
                 <a:cs typeface="JetBrains Mono Bold" pitchFamily="34" charset="-120"/>
               </a:rPr>
-              <a:t>test</a:t>
-            </a:r>
-            <a:r>
-              <a:rPr lang="en-US" sz="800" dirty="0">
+              <a:t>model</a:t>
+            </a:r>
+            <a:r>
+              <a:rPr lang="en-US" sz="850" dirty="0">
                 <a:solidFill>
                   <a:srgbClr val="D4D4D4"/>
                 </a:solidFill>
@@ -12400,45 +11991,22 @@
                 <a:ea typeface="JetBrains Mono" pitchFamily="34" charset="-122"/>
                 <a:cs typeface="JetBrains Mono" pitchFamily="34" charset="-120"/>
               </a:rPr>
-              <a:t> → build governed fixture → stop</a:t>
-            </a:r>
-            <a:r>
-              <a:rPr lang="en-US" sz="800" dirty="0">
-                <a:solidFill>
-                  <a:srgbClr val="D4D4D4"/>
-                </a:solidFill>
-                <a:latin typeface="JetBrains Mono" pitchFamily="34" charset="0"/>
-                <a:ea typeface="JetBrains Mono" pitchFamily="34" charset="-122"/>
-                <a:cs typeface="JetBrains Mono" pitchFamily="34" charset="-120"/>
-              </a:rPr>
-              <a:t>
-</a:t>
-            </a:r>
-            <a:r>
-              <a:rPr lang="en-US" sz="800" dirty="0">
-                <a:solidFill>
-                  <a:srgbClr val="D4D4D4"/>
-                </a:solidFill>
-                <a:latin typeface="JetBrains Mono" pitchFamily="34" charset="0"/>
-                <a:ea typeface="JetBrains Mono" pitchFamily="34" charset="-122"/>
-                <a:cs typeface="JetBrains Mono" pitchFamily="34" charset="-120"/>
-              </a:rPr>
-              <a:t> Never run all three in one response.</a:t>
-            </a:r>
-            <a:endParaRPr lang="en-US" sz="800" dirty="0"/>
-          </a:p>
-        </p:txBody>
-      </p:sp>
-      <p:sp>
-        <p:nvSpPr>
-          <p:cNvPr id="48" name="Shape 44"/>
+              <a:t> automatically.</a:t>
+            </a:r>
+            <a:endParaRPr lang="en-US" sz="850" dirty="0"/>
+          </a:p>
+        </p:txBody>
+      </p:sp>
+      <p:sp>
+        <p:nvSpPr>
+          <p:cNvPr id="39" name="Shape 35"/>
           <p:cNvSpPr/>
           <p:nvPr/>
         </p:nvSpPr>
         <p:spPr>
           <a:xfrm rot="-60000">
-            <a:off x="542925" y="4434929"/>
-            <a:ext cx="8601075" cy="651421"/>
+            <a:off x="542925" y="4632052"/>
+            <a:ext cx="8601075" cy="454298"/>
           </a:xfrm>
           <a:prstGeom prst="rect">
             <a:avLst/>
@@ -12456,14 +12024,14 @@
       </p:sp>
       <p:sp>
         <p:nvSpPr>
-          <p:cNvPr id="49" name="Text 45"/>
+          <p:cNvPr id="40" name="Text 36"/>
           <p:cNvSpPr/>
           <p:nvPr/>
         </p:nvSpPr>
         <p:spPr>
           <a:xfrm rot="-60000">
-            <a:off x="544622" y="4472394"/>
-            <a:ext cx="8597681" cy="576491"/>
+            <a:off x="543762" y="4669543"/>
+            <a:ext cx="8599401" cy="379315"/>
           </a:xfrm>
           <a:prstGeom prst="rect">
             <a:avLst/>
@@ -12503,7 +12071,7 @@
                 <a:ea typeface="Kalam Bold" pitchFamily="34" charset="-122"/>
                 <a:cs typeface="Kalam Bold" pitchFamily="34" charset="-120"/>
               </a:rPr>
-              <a:t> Policy bec</a:t>
+              <a:t> T</a:t>
             </a:r>
             <a:r>
               <a:rPr lang="en-US" sz="1250" dirty="0">
@@ -12514,7 +12082,7 @@
                 <a:ea typeface="Kalam Bold" pitchFamily="34" charset="-122"/>
                 <a:cs typeface="Kalam Bold" pitchFamily="34" charset="-120"/>
               </a:rPr>
-              <a:t>omes sema</a:t>
+              <a:t>he repo co</a:t>
             </a:r>
             <a:r>
               <a:rPr lang="en-US" sz="1250" dirty="0">
@@ -12525,7 +12093,7 @@
                 <a:ea typeface="Kalam Bold" pitchFamily="34" charset="-122"/>
                 <a:cs typeface="Kalam Bold" pitchFamily="34" charset="-120"/>
               </a:rPr>
-              <a:t>ntic IR, se</a:t>
+              <a:t>nverts lega</a:t>
             </a:r>
             <a:r>
               <a:rPr lang="en-US" sz="1250" dirty="0">
@@ -12536,7 +12104,7 @@
                 <a:ea typeface="Kalam Bold" pitchFamily="34" charset="-122"/>
                 <a:cs typeface="Kalam Bold" pitchFamily="34" charset="-120"/>
               </a:rPr>
-              <a:t>mantic IR </a:t>
+              <a:t>cy behavio</a:t>
             </a:r>
             <a:r>
               <a:rPr lang="en-US" sz="1250" dirty="0">
@@ -12547,7 +12115,7 @@
                 <a:ea typeface="Kalam Bold" pitchFamily="34" charset="-122"/>
                 <a:cs typeface="Kalam Bold" pitchFamily="34" charset="-120"/>
               </a:rPr>
-              <a:t>becomes Py</a:t>
+              <a:t>r into rules</a:t>
             </a:r>
             <a:r>
               <a:rPr lang="en-US" sz="1250" dirty="0">
@@ -12558,7 +12126,7 @@
                 <a:ea typeface="Kalam Bold" pitchFamily="34" charset="-122"/>
                 <a:cs typeface="Kalam Bold" pitchFamily="34" charset="-120"/>
               </a:rPr>
-              <a:t>thon, Pyth</a:t>
+              <a:t> for safe P</a:t>
             </a:r>
             <a:r>
               <a:rPr lang="en-US" sz="1250" dirty="0">
@@ -12569,7 +12137,7 @@
                 <a:ea typeface="Kalam Bold" pitchFamily="34" charset="-122"/>
                 <a:cs typeface="Kalam Bold" pitchFamily="34" charset="-120"/>
               </a:rPr>
-              <a:t>on must s</a:t>
+              <a:t>ython impl</a:t>
             </a:r>
             <a:r>
               <a:rPr lang="en-US" sz="1250" dirty="0">
@@ -12580,7 +12148,7 @@
                 <a:ea typeface="Kalam Bold" pitchFamily="34" charset="-122"/>
                 <a:cs typeface="Kalam Bold" pitchFamily="34" charset="-120"/>
               </a:rPr>
-              <a:t>till pass ti</a:t>
+              <a:t>ementatio</a:t>
             </a:r>
             <a:r>
               <a:rPr lang="en-US" sz="1250" dirty="0">
@@ -12591,18 +12159,7 @@
                 <a:ea typeface="Kalam Bold" pitchFamily="34" charset="-122"/>
                 <a:cs typeface="Kalam Bold" pitchFamily="34" charset="-120"/>
               </a:rPr>
-              <a:t>e-</a:t>
-            </a:r>
-            <a:r>
-              <a:rPr lang="en-US" sz="1250" dirty="0">
-                <a:solidFill>
-                  <a:srgbClr val="111111"/>
-                </a:solidFill>
-                <a:latin typeface="Kalam Bold" pitchFamily="34" charset="0"/>
-                <a:ea typeface="Kalam Bold" pitchFamily="34" charset="-122"/>
-                <a:cs typeface="Kalam Bold" pitchFamily="34" charset="-120"/>
-              </a:rPr>
-              <a:t>out.</a:t>
+              <a:t>n.</a:t>
             </a:r>
             <a:endParaRPr lang="en-US" sz="1200" dirty="0"/>
           </a:p>
@@ -12737,7 +12294,7 @@
                 <a:ea typeface="Oswald SemiBold" pitchFamily="34" charset="-122"/>
                 <a:cs typeface="Oswald SemiBold" pitchFamily="34" charset="-120"/>
               </a:rPr>
-              <a:t>ACT 3: VALIDATE RUNS THE TIE-OUT</a:t>
+              <a:t>ACT 3: POLICY BECOMES PYTHON</a:t>
             </a:r>
             <a:endParaRPr lang="en-US" sz="2400" dirty="0"/>
           </a:p>
@@ -12908,7 +12465,7 @@
                 <a:ea typeface="Inter Bold" pitchFamily="34" charset="-122"/>
                 <a:cs typeface="Inter Bold" pitchFamily="34" charset="-120"/>
               </a:rPr>
-              <a:t>Run approved Python producer</a:t>
+              <a:t>Invoke model to read policy</a:t>
             </a:r>
             <a:endParaRPr lang="en-US" sz="850" dirty="0"/>
           </a:p>
@@ -13038,7 +12595,7 @@
                 <a:ea typeface="Inter Bold" pitchFamily="34" charset="-122"/>
                 <a:cs typeface="Inter Bold" pitchFamily="34" charset="-120"/>
               </a:rPr>
-              <a:t>Write actual.csv</a:t>
+              <a:t>Write semantic IR explicit contract</a:t>
             </a:r>
             <a:endParaRPr lang="en-US" sz="850" dirty="0"/>
           </a:p>
@@ -13168,7 +12725,7 @@
                 <a:ea typeface="Inter Bold" pitchFamily="34" charset="-122"/>
                 <a:cs typeface="Inter Bold" pitchFamily="34" charset="-120"/>
               </a:rPr>
-              <a:t>Compare against SAS oracle</a:t>
+              <a:t>Invoke generate to read IR</a:t>
             </a:r>
             <a:endParaRPr lang="en-US" sz="850" dirty="0"/>
           </a:p>
@@ -13298,7 +12855,7 @@
                 <a:ea typeface="Inter Bold" pitchFamily="34" charset="-122"/>
                 <a:cs typeface="Inter Bold" pitchFamily="34" charset="-120"/>
               </a:rPr>
-              <a:t>Apply keys and tolerances</a:t>
+              <a:t>Write pure Python semantic core</a:t>
             </a:r>
             <a:endParaRPr lang="en-US" sz="850" dirty="0"/>
           </a:p>
@@ -13428,7 +12985,7 @@
                 <a:ea typeface="Inter Bold" pitchFamily="34" charset="-122"/>
                 <a:cs typeface="Inter Bold" pitchFamily="34" charset="-120"/>
               </a:rPr>
-              <a:t>Write evidence bundle</a:t>
+              <a:t>Invoke test to build governed fixture</a:t>
             </a:r>
             <a:endParaRPr lang="en-US" sz="850" dirty="0"/>
           </a:p>
@@ -13442,8 +12999,8 @@
         </p:nvSpPr>
         <p:spPr>
           <a:xfrm>
-            <a:off x="271463" y="3504009"/>
-            <a:ext cx="3429000" cy="917972"/>
+            <a:off x="271463" y="3489722"/>
+            <a:ext cx="3429000" cy="1010841"/>
           </a:xfrm>
           <a:prstGeom prst="rect">
             <a:avLst/>
@@ -13467,7 +13024,7 @@
         </p:nvSpPr>
         <p:spPr>
           <a:xfrm>
-            <a:off x="371475" y="3604022"/>
+            <a:off x="371475" y="3561159"/>
             <a:ext cx="3228975" cy="167878"/>
           </a:xfrm>
           <a:prstGeom prst="rect">
@@ -13494,7 +13051,7 @@
                 <a:ea typeface="Oswald SemiBold" pitchFamily="34" charset="-122"/>
                 <a:cs typeface="Oswald SemiBold" pitchFamily="34" charset="-120"/>
               </a:rPr>
-              <a:t>CANONICAL ARTIFACTS CREATED</a:t>
+              <a:t>THE PATH TO CODE</a:t>
             </a:r>
             <a:endParaRPr lang="en-US" sz="850" dirty="0"/>
           </a:p>
@@ -13508,8 +13065,8 @@
         </p:nvSpPr>
         <p:spPr>
           <a:xfrm>
-            <a:off x="371475" y="3829050"/>
-            <a:ext cx="3228975" cy="121444"/>
+            <a:off x="371475" y="3786188"/>
+            <a:ext cx="3228975" cy="128588"/>
           </a:xfrm>
           <a:prstGeom prst="rect">
             <a:avLst/>
@@ -13527,7 +13084,7 @@
               <a:buNone/>
             </a:pPr>
             <a:r>
-              <a:rPr lang="en-US" sz="600" b="1" dirty="0">
+              <a:rPr lang="en-US" sz="650" b="1" dirty="0">
                 <a:solidFill>
                   <a:srgbClr val="B42318"/>
                 </a:solidFill>
@@ -13535,9 +13092,9 @@
                 <a:ea typeface="JetBrains Mono Bold" pitchFamily="34" charset="-122"/>
                 <a:cs typeface="JetBrains Mono Bold" pitchFamily="34" charset="-120"/>
               </a:rPr>
-              <a:t>artifacts/evidence/.../tieout_result.json</a:t>
-            </a:r>
-            <a:endParaRPr lang="en-US" sz="600" dirty="0"/>
+              <a:t>policy/policy_registry.yaml</a:t>
+            </a:r>
+            <a:endParaRPr lang="en-US" sz="650" dirty="0"/>
           </a:p>
         </p:txBody>
       </p:sp>
@@ -13549,8 +13106,8 @@
         </p:nvSpPr>
         <p:spPr>
           <a:xfrm>
-            <a:off x="371475" y="3979069"/>
-            <a:ext cx="3228975" cy="121444"/>
+            <a:off x="371475" y="3943350"/>
+            <a:ext cx="3228975" cy="128588"/>
           </a:xfrm>
           <a:prstGeom prst="rect">
             <a:avLst/>
@@ -13568,7 +13125,7 @@
               <a:buNone/>
             </a:pPr>
             <a:r>
-              <a:rPr lang="en-US" sz="600" b="1" dirty="0">
+              <a:rPr lang="en-US" sz="650" b="1" dirty="0">
                 <a:solidFill>
                   <a:srgbClr val="B42318"/>
                 </a:solidFill>
@@ -13576,9 +13133,9 @@
                 <a:ea typeface="JetBrains Mono Bold" pitchFamily="34" charset="-122"/>
                 <a:cs typeface="JetBrains Mono Bold" pitchFamily="34" charset="-120"/>
               </a:rPr>
-              <a:t>artifacts/evidence/.../tieout_summary.md</a:t>
-            </a:r>
-            <a:endParaRPr lang="en-US" sz="600" dirty="0"/>
+              <a:t>semantic_ir/LC-LOGIT-01.json</a:t>
+            </a:r>
+            <a:endParaRPr lang="en-US" sz="650" dirty="0"/>
           </a:p>
         </p:txBody>
       </p:sp>
@@ -13590,8 +13147,8 @@
         </p:nvSpPr>
         <p:spPr>
           <a:xfrm>
-            <a:off x="371475" y="4129088"/>
-            <a:ext cx="3228975" cy="121444"/>
+            <a:off x="371475" y="4100513"/>
+            <a:ext cx="3228975" cy="128588"/>
           </a:xfrm>
           <a:prstGeom prst="rect">
             <a:avLst/>
@@ -13609,7 +13166,7 @@
               <a:buNone/>
             </a:pPr>
             <a:r>
-              <a:rPr lang="en-US" sz="600" b="1" dirty="0">
+              <a:rPr lang="en-US" sz="650" b="1" dirty="0">
                 <a:solidFill>
                   <a:srgbClr val="B42318"/>
                 </a:solidFill>
@@ -13617,15 +13174,56 @@
                 <a:ea typeface="JetBrains Mono Bold" pitchFamily="34" charset="-122"/>
                 <a:cs typeface="JetBrains Mono Bold" pitchFamily="34" charset="-120"/>
               </a:rPr>
-              <a:t>artifacts/evidence/.../evidence.json</a:t>
-            </a:r>
-            <a:endParaRPr lang="en-US" sz="600" dirty="0"/>
+              <a:t>src/sas_logit/semantic/scoring.py</a:t>
+            </a:r>
+            <a:endParaRPr lang="en-US" sz="650" dirty="0"/>
           </a:p>
         </p:txBody>
       </p:sp>
       <p:sp>
         <p:nvSpPr>
           <p:cNvPr id="33" name="Text 29"/>
+          <p:cNvSpPr/>
+          <p:nvPr/>
+        </p:nvSpPr>
+        <p:spPr>
+          <a:xfrm>
+            <a:off x="371475" y="4257675"/>
+            <a:ext cx="3228975" cy="128588"/>
+          </a:xfrm>
+          <a:prstGeom prst="rect">
+            <a:avLst/>
+          </a:prstGeom>
+          <a:noFill/>
+          <a:ln/>
+        </p:spPr>
+        <p:txBody>
+          <a:bodyPr wrap="square" lIns="85090" tIns="0" rIns="0" bIns="0" rtlCol="0" anchor="t">
+            <a:spAutoFit/>
+          </a:bodyPr>
+          <a:lstStyle/>
+          <a:p>
+            <a:pPr algn="l" indent="0" marL="0">
+              <a:buNone/>
+            </a:pPr>
+            <a:r>
+              <a:rPr lang="en-US" sz="650" b="1" dirty="0">
+                <a:solidFill>
+                  <a:srgbClr val="B42318"/>
+                </a:solidFill>
+                <a:latin typeface="JetBrains Mono Bold" pitchFamily="34" charset="0"/>
+                <a:ea typeface="JetBrains Mono Bold" pitchFamily="34" charset="-122"/>
+                <a:cs typeface="JetBrains Mono Bold" pitchFamily="34" charset="-120"/>
+              </a:rPr>
+              <a:t>tests/fixtures/.../fixture.csv</a:t>
+            </a:r>
+            <a:endParaRPr lang="en-US" sz="650" dirty="0"/>
+          </a:p>
+        </p:txBody>
+      </p:sp>
+      <p:sp>
+        <p:nvSpPr>
+          <p:cNvPr id="34" name="Text 30"/>
           <p:cNvSpPr/>
           <p:nvPr/>
         </p:nvSpPr>
@@ -13658,7 +13256,7 @@
                 <a:ea typeface="Oswald SemiBold" pitchFamily="34" charset="-122"/>
                 <a:cs typeface="Oswald SemiBold" pitchFamily="34" charset="-120"/>
               </a:rPr>
-              <a:t>HUMAN APPROVAL TO VALIDATE</a:t>
+              <a:t>ONE MESSAGE PER SKILL</a:t>
             </a:r>
             <a:endParaRPr lang="en-US" sz="1400" dirty="0"/>
           </a:p>
@@ -13666,7 +13264,7 @@
       </p:sp>
       <p:sp>
         <p:nvSpPr>
-          <p:cNvPr id="34" name="Shape 30"/>
+          <p:cNvPr id="35" name="Shape 31"/>
           <p:cNvSpPr/>
           <p:nvPr/>
         </p:nvSpPr>
@@ -13691,7 +13289,7 @@
       </p:sp>
       <p:sp>
         <p:nvSpPr>
-          <p:cNvPr id="35" name="Shape 31"/>
+          <p:cNvPr id="36" name="Shape 32"/>
           <p:cNvSpPr/>
           <p:nvPr/>
         </p:nvSpPr>
@@ -13711,7 +13309,7 @@
       </p:sp>
       <p:sp>
         <p:nvSpPr>
-          <p:cNvPr id="36" name="Shape 32"/>
+          <p:cNvPr id="37" name="Shape 33"/>
           <p:cNvSpPr/>
           <p:nvPr/>
         </p:nvSpPr>
@@ -13731,7 +13329,7 @@
       </p:sp>
       <p:sp>
         <p:nvSpPr>
-          <p:cNvPr id="37" name="Text 33"/>
+          <p:cNvPr id="38" name="Text 34"/>
           <p:cNvSpPr/>
           <p:nvPr/>
         </p:nvSpPr>
@@ -13772,7 +13370,7 @@
       </p:sp>
       <p:sp>
         <p:nvSpPr>
-          <p:cNvPr id="38" name="Text 34"/>
+          <p:cNvPr id="39" name="Text 35"/>
           <p:cNvSpPr/>
           <p:nvPr/>
         </p:nvSpPr>
@@ -13816,14 +13414,14 @@
       </p:sp>
       <p:sp>
         <p:nvSpPr>
-          <p:cNvPr id="39" name="Shape 35"/>
+          <p:cNvPr id="40" name="Shape 36"/>
           <p:cNvSpPr/>
           <p:nvPr/>
         </p:nvSpPr>
         <p:spPr>
           <a:xfrm>
             <a:off x="4114800" y="1956662"/>
-            <a:ext cx="4572000" cy="1430089"/>
+            <a:ext cx="4572000" cy="1626989"/>
           </a:xfrm>
           <a:prstGeom prst="rect">
             <a:avLst/>
@@ -13841,14 +13439,14 @@
       </p:sp>
       <p:sp>
         <p:nvSpPr>
-          <p:cNvPr id="40" name="Text 36"/>
+          <p:cNvPr id="41" name="Text 37"/>
           <p:cNvSpPr/>
           <p:nvPr/>
         </p:nvSpPr>
         <p:spPr>
           <a:xfrm>
             <a:off x="4114800" y="1956662"/>
-            <a:ext cx="4572000" cy="1430089"/>
+            <a:ext cx="4572000" cy="1626989"/>
           </a:xfrm>
           <a:prstGeom prst="rect">
             <a:avLst/>
@@ -13869,7 +13467,7 @@
               <a:buNone/>
             </a:pPr>
             <a:r>
-              <a:rPr lang="en-US" sz="700" b="1" dirty="0">
+              <a:rPr lang="en-US" sz="750" b="1" dirty="0">
                 <a:solidFill>
                   <a:srgbClr val="CE9178"/>
                 </a:solidFill>
@@ -13877,10 +13475,56 @@
                 <a:ea typeface="JetBrains Mono Bold" pitchFamily="34" charset="-122"/>
                 <a:cs typeface="JetBrains Mono Bold" pitchFamily="34" charset="-120"/>
               </a:rPr>
-              <a:t>I approve the governed 50-record fixture, SAS oracle, and tie-out </a:t>
-            </a:r>
-            <a:r>
-              <a:rPr lang="en-US" sz="700" b="1" dirty="0">
+              <a:t>/run-next-stage LC-LOGIT-01</a:t>
+            </a:r>
+            <a:r>
+              <a:rPr lang="en-US" sz="800" dirty="0">
+                <a:solidFill>
+                  <a:srgbClr val="D4D4D4"/>
+                </a:solidFill>
+                <a:latin typeface="JetBrains Mono" pitchFamily="34" charset="0"/>
+                <a:ea typeface="JetBrains Mono" pitchFamily="34" charset="-122"/>
+                <a:cs typeface="JetBrains Mono" pitchFamily="34" charset="-120"/>
+              </a:rPr>
+              <a:t>
+</a:t>
+            </a:r>
+            <a:r>
+              <a:rPr lang="en-US" sz="800" dirty="0">
+                <a:solidFill>
+                  <a:srgbClr val="D4D4D4"/>
+                </a:solidFill>
+                <a:latin typeface="JetBrains Mono" pitchFamily="34" charset="0"/>
+                <a:ea typeface="JetBrains Mono" pitchFamily="34" charset="-122"/>
+                <a:cs typeface="JetBrains Mono" pitchFamily="34" charset="-120"/>
+              </a:rPr>
+              <a:t> Read durable state and run exactly one authorized skill.</a:t>
+            </a:r>
+            <a:r>
+              <a:rPr lang="en-US" sz="800" dirty="0">
+                <a:solidFill>
+                  <a:srgbClr val="D4D4D4"/>
+                </a:solidFill>
+                <a:latin typeface="JetBrains Mono" pitchFamily="34" charset="0"/>
+                <a:ea typeface="JetBrains Mono" pitchFamily="34" charset="-122"/>
+                <a:cs typeface="JetBrains Mono" pitchFamily="34" charset="-120"/>
+              </a:rPr>
+              <a:t>
+</a:t>
+            </a:r>
+            <a:r>
+              <a:rPr lang="en-US" sz="800" dirty="0">
+                <a:solidFill>
+                  <a:srgbClr val="D4D4D4"/>
+                </a:solidFill>
+                <a:latin typeface="JetBrains Mono" pitchFamily="34" charset="0"/>
+                <a:ea typeface="JetBrains Mono" pitchFamily="34" charset="-122"/>
+                <a:cs typeface="JetBrains Mono" pitchFamily="34" charset="-120"/>
+              </a:rPr>
+              <a:t> </a:t>
+            </a:r>
+            <a:r>
+              <a:rPr lang="en-US" sz="750" b="1" dirty="0">
                 <a:solidFill>
                   <a:srgbClr val="CE9178"/>
                 </a:solidFill>
@@ -13888,10 +13532,10 @@
                 <a:ea typeface="JetBrains Mono Bold" pitchFamily="34" charset="-122"/>
                 <a:cs typeface="JetBrains Mono Bold" pitchFamily="34" charset="-120"/>
               </a:rPr>
-              <a:t>contract.</a:t>
-            </a:r>
-            <a:r>
-              <a:rPr lang="en-US" sz="750" dirty="0">
+              <a:t>model</a:t>
+            </a:r>
+            <a:r>
+              <a:rPr lang="en-US" sz="800" dirty="0">
                 <a:solidFill>
                   <a:srgbClr val="D4D4D4"/>
                 </a:solidFill>
@@ -13899,11 +13543,10 @@
                 <a:ea typeface="JetBrains Mono" pitchFamily="34" charset="-122"/>
                 <a:cs typeface="JetBrains Mono" pitchFamily="34" charset="-120"/>
               </a:rPr>
-              <a:t>
-</a:t>
-            </a:r>
-            <a:r>
-              <a:rPr lang="en-US" sz="750" dirty="0">
+              <a:t> → write semantic IR → stop</a:t>
+            </a:r>
+            <a:r>
+              <a:rPr lang="en-US" sz="800" dirty="0">
                 <a:solidFill>
                   <a:srgbClr val="D4D4D4"/>
                 </a:solidFill>
@@ -13911,21 +13554,22 @@
                 <a:ea typeface="JetBrains Mono" pitchFamily="34" charset="-122"/>
                 <a:cs typeface="JetBrains Mono" pitchFamily="34" charset="-120"/>
               </a:rPr>
-              <a:t> Use absolute tolerance </a:t>
-            </a:r>
-            <a:r>
-              <a:rPr lang="en-US" sz="700" b="1" dirty="0">
-                <a:solidFill>
-                  <a:srgbClr val="D4D4D4"/>
+              <a:t>
+</a:t>
+            </a:r>
+            <a:r>
+              <a:rPr lang="en-US" sz="750" b="1" dirty="0">
+                <a:solidFill>
+                  <a:srgbClr val="CE9178"/>
                 </a:solidFill>
                 <a:latin typeface="JetBrains Mono Bold" pitchFamily="34" charset="0"/>
                 <a:ea typeface="JetBrains Mono Bold" pitchFamily="34" charset="-122"/>
                 <a:cs typeface="JetBrains Mono Bold" pitchFamily="34" charset="-120"/>
               </a:rPr>
-              <a:t>1e-10</a:t>
-            </a:r>
-            <a:r>
-              <a:rPr lang="en-US" sz="750" dirty="0">
+              <a:t>generate</a:t>
+            </a:r>
+            <a:r>
+              <a:rPr lang="en-US" sz="800" dirty="0">
                 <a:solidFill>
                   <a:srgbClr val="D4D4D4"/>
                 </a:solidFill>
@@ -13933,10 +13577,10 @@
                 <a:ea typeface="JetBrains Mono" pitchFamily="34" charset="-122"/>
                 <a:cs typeface="JetBrains Mono" pitchFamily="34" charset="-120"/>
               </a:rPr>
-              <a:t> for eta and probability.</a:t>
-            </a:r>
-            <a:r>
-              <a:rPr lang="en-US" sz="750" dirty="0">
+              <a:t> → write Python → stop</a:t>
+            </a:r>
+            <a:r>
+              <a:rPr lang="en-US" sz="800" dirty="0">
                 <a:solidFill>
                   <a:srgbClr val="D4D4D4"/>
                 </a:solidFill>
@@ -13948,7 +13592,18 @@
 </a:t>
             </a:r>
             <a:r>
-              <a:rPr lang="en-US" sz="750" dirty="0">
+              <a:rPr lang="en-US" sz="750" b="1" dirty="0">
+                <a:solidFill>
+                  <a:srgbClr val="CE9178"/>
+                </a:solidFill>
+                <a:latin typeface="JetBrains Mono Bold" pitchFamily="34" charset="0"/>
+                <a:ea typeface="JetBrains Mono Bold" pitchFamily="34" charset="-122"/>
+                <a:cs typeface="JetBrains Mono Bold" pitchFamily="34" charset="-120"/>
+              </a:rPr>
+              <a:t>test</a:t>
+            </a:r>
+            <a:r>
+              <a:rPr lang="en-US" sz="800" dirty="0">
                 <a:solidFill>
                   <a:srgbClr val="D4D4D4"/>
                 </a:solidFill>
@@ -13956,21 +13611,10 @@
                 <a:ea typeface="JetBrains Mono" pitchFamily="34" charset="-122"/>
                 <a:cs typeface="JetBrains Mono" pitchFamily="34" charset="-120"/>
               </a:rPr>
-              <a:t>Invoke exactly </a:t>
-            </a:r>
-            <a:r>
-              <a:rPr lang="en-US" sz="700" b="1" dirty="0">
-                <a:solidFill>
-                  <a:srgbClr val="D4D4D4"/>
-                </a:solidFill>
-                <a:latin typeface="JetBrains Mono Bold" pitchFamily="34" charset="0"/>
-                <a:ea typeface="JetBrains Mono Bold" pitchFamily="34" charset="-122"/>
-                <a:cs typeface="JetBrains Mono Bold" pitchFamily="34" charset="-120"/>
-              </a:rPr>
-              <a:t>validate</a:t>
-            </a:r>
-            <a:r>
-              <a:rPr lang="en-US" sz="750" dirty="0">
+              <a:t> → build governed fixture → stop</a:t>
+            </a:r>
+            <a:r>
+              <a:rPr lang="en-US" sz="800" dirty="0">
                 <a:solidFill>
                   <a:srgbClr val="D4D4D4"/>
                 </a:solidFill>
@@ -13978,10 +13622,11 @@
                 <a:ea typeface="JetBrains Mono" pitchFamily="34" charset="-122"/>
                 <a:cs typeface="JetBrains Mono" pitchFamily="34" charset="-120"/>
               </a:rPr>
-              <a:t>.</a:t>
-            </a:r>
-            <a:r>
-              <a:rPr lang="en-US" sz="750" dirty="0">
+              <a:t>
+</a:t>
+            </a:r>
+            <a:r>
+              <a:rPr lang="en-US" sz="800" dirty="0">
                 <a:solidFill>
                   <a:srgbClr val="D4D4D4"/>
                 </a:solidFill>
@@ -13989,80 +13634,22 @@
                 <a:ea typeface="JetBrains Mono" pitchFamily="34" charset="-122"/>
                 <a:cs typeface="JetBrains Mono" pitchFamily="34" charset="-120"/>
               </a:rPr>
-              <a:t>
-</a:t>
-            </a:r>
-            <a:r>
-              <a:rPr lang="en-US" sz="750" dirty="0">
-                <a:solidFill>
-                  <a:srgbClr val="D4D4D4"/>
-                </a:solidFill>
-                <a:latin typeface="JetBrains Mono" pitchFamily="34" charset="0"/>
-                <a:ea typeface="JetBrains Mono" pitchFamily="34" charset="-122"/>
-                <a:cs typeface="JetBrains Mono" pitchFamily="34" charset="-120"/>
-              </a:rPr>
-              <a:t>Write the result, summary, and evidence bundle.</a:t>
-            </a:r>
-            <a:r>
-              <a:rPr lang="en-US" sz="750" dirty="0">
-                <a:solidFill>
-                  <a:srgbClr val="D4D4D4"/>
-                </a:solidFill>
-                <a:latin typeface="JetBrains Mono" pitchFamily="34" charset="0"/>
-                <a:ea typeface="JetBrains Mono" pitchFamily="34" charset="-122"/>
-                <a:cs typeface="JetBrains Mono" pitchFamily="34" charset="-120"/>
-              </a:rPr>
-              <a:t>
-</a:t>
-            </a:r>
-            <a:r>
-              <a:rPr lang="en-US" sz="750" dirty="0">
-                <a:solidFill>
-                  <a:srgbClr val="D4D4D4"/>
-                </a:solidFill>
-                <a:latin typeface="JetBrains Mono" pitchFamily="34" charset="0"/>
-                <a:ea typeface="JetBrains Mono" pitchFamily="34" charset="-122"/>
-                <a:cs typeface="JetBrains Mono" pitchFamily="34" charset="-120"/>
-              </a:rPr>
-              <a:t>Stop with PASS, FAIL, or BLOCKED.</a:t>
-            </a:r>
-            <a:r>
-              <a:rPr lang="en-US" sz="750" dirty="0">
-                <a:solidFill>
-                  <a:srgbClr val="D4D4D4"/>
-                </a:solidFill>
-                <a:latin typeface="JetBrains Mono" pitchFamily="34" charset="0"/>
-                <a:ea typeface="JetBrains Mono" pitchFamily="34" charset="-122"/>
-                <a:cs typeface="JetBrains Mono" pitchFamily="34" charset="-120"/>
-              </a:rPr>
-              <a:t>
-</a:t>
-            </a:r>
-            <a:r>
-              <a:rPr lang="en-US" sz="750" dirty="0">
-                <a:solidFill>
-                  <a:srgbClr val="D4D4D4"/>
-                </a:solidFill>
-                <a:latin typeface="JetBrains Mono" pitchFamily="34" charset="0"/>
-                <a:ea typeface="JetBrains Mono" pitchFamily="34" charset="-122"/>
-                <a:cs typeface="JetBrains Mono" pitchFamily="34" charset="-120"/>
-              </a:rPr>
-              <a:t>Do not broaden the proof claim.</a:t>
-            </a:r>
-            <a:endParaRPr lang="en-US" sz="750" dirty="0"/>
-          </a:p>
-        </p:txBody>
-      </p:sp>
-      <p:sp>
-        <p:nvSpPr>
-          <p:cNvPr id="41" name="Shape 37"/>
+              <a:t> Never run all three in one response.</a:t>
+            </a:r>
+            <a:endParaRPr lang="en-US" sz="800" dirty="0"/>
+          </a:p>
+        </p:txBody>
+      </p:sp>
+      <p:sp>
+        <p:nvSpPr>
+          <p:cNvPr id="42" name="Shape 38"/>
           <p:cNvSpPr/>
           <p:nvPr/>
         </p:nvSpPr>
         <p:spPr>
           <a:xfrm rot="-60000">
-            <a:off x="542925" y="4632052"/>
-            <a:ext cx="8601075" cy="454298"/>
+            <a:off x="542925" y="4434929"/>
+            <a:ext cx="8601075" cy="651421"/>
           </a:xfrm>
           <a:prstGeom prst="rect">
             <a:avLst/>
@@ -14080,14 +13667,14 @@
       </p:sp>
       <p:sp>
         <p:nvSpPr>
-          <p:cNvPr id="42" name="Text 38"/>
+          <p:cNvPr id="43" name="Text 39"/>
           <p:cNvSpPr/>
           <p:nvPr/>
         </p:nvSpPr>
         <p:spPr>
           <a:xfrm rot="-60000">
-            <a:off x="543762" y="4669543"/>
-            <a:ext cx="8599401" cy="379315"/>
+            <a:off x="544622" y="4472394"/>
+            <a:ext cx="8597681" cy="576491"/>
           </a:xfrm>
           <a:prstGeom prst="rect">
             <a:avLst/>
@@ -14127,7 +13714,7 @@
                 <a:ea typeface="Kalam Bold" pitchFamily="34" charset="-122"/>
                 <a:cs typeface="Kalam Bold" pitchFamily="34" charset="-120"/>
               </a:rPr>
-              <a:t> Parity is </a:t>
+              <a:t> Policy bec</a:t>
             </a:r>
             <a:r>
               <a:rPr lang="en-US" sz="1250" dirty="0">
@@ -14138,7 +13725,7 @@
                 <a:ea typeface="Kalam Bold" pitchFamily="34" charset="-122"/>
                 <a:cs typeface="Kalam Bold" pitchFamily="34" charset="-120"/>
               </a:rPr>
-              <a:t>claimed on</a:t>
+              <a:t>omes sema</a:t>
             </a:r>
             <a:r>
               <a:rPr lang="en-US" sz="1250" dirty="0">
@@ -14149,7 +13736,7 @@
                 <a:ea typeface="Kalam Bold" pitchFamily="34" charset="-122"/>
                 <a:cs typeface="Kalam Bold" pitchFamily="34" charset="-120"/>
               </a:rPr>
-              <a:t>ly through</a:t>
+              <a:t>ntic IR, se</a:t>
             </a:r>
             <a:r>
               <a:rPr lang="en-US" sz="1250" dirty="0">
@@ -14160,7 +13747,7 @@
                 <a:ea typeface="Kalam Bold" pitchFamily="34" charset="-122"/>
                 <a:cs typeface="Kalam Bold" pitchFamily="34" charset="-120"/>
               </a:rPr>
-              <a:t> generated </a:t>
+              <a:t>mantic IR </a:t>
             </a:r>
             <a:r>
               <a:rPr lang="en-US" sz="1250" dirty="0">
@@ -14171,7 +13758,62 @@
                 <a:ea typeface="Kalam Bold" pitchFamily="34" charset="-122"/>
                 <a:cs typeface="Kalam Bold" pitchFamily="34" charset="-120"/>
               </a:rPr>
-              <a:t>evidence.</a:t>
+              <a:t>becomes Py</a:t>
+            </a:r>
+            <a:r>
+              <a:rPr lang="en-US" sz="1250" dirty="0">
+                <a:solidFill>
+                  <a:srgbClr val="111111"/>
+                </a:solidFill>
+                <a:latin typeface="Kalam Bold" pitchFamily="34" charset="0"/>
+                <a:ea typeface="Kalam Bold" pitchFamily="34" charset="-122"/>
+                <a:cs typeface="Kalam Bold" pitchFamily="34" charset="-120"/>
+              </a:rPr>
+              <a:t>thon, Pyth</a:t>
+            </a:r>
+            <a:r>
+              <a:rPr lang="en-US" sz="1250" dirty="0">
+                <a:solidFill>
+                  <a:srgbClr val="111111"/>
+                </a:solidFill>
+                <a:latin typeface="Kalam Bold" pitchFamily="34" charset="0"/>
+                <a:ea typeface="Kalam Bold" pitchFamily="34" charset="-122"/>
+                <a:cs typeface="Kalam Bold" pitchFamily="34" charset="-120"/>
+              </a:rPr>
+              <a:t>on must s</a:t>
+            </a:r>
+            <a:r>
+              <a:rPr lang="en-US" sz="1250" dirty="0">
+                <a:solidFill>
+                  <a:srgbClr val="111111"/>
+                </a:solidFill>
+                <a:latin typeface="Kalam Bold" pitchFamily="34" charset="0"/>
+                <a:ea typeface="Kalam Bold" pitchFamily="34" charset="-122"/>
+                <a:cs typeface="Kalam Bold" pitchFamily="34" charset="-120"/>
+              </a:rPr>
+              <a:t>till pass ti</a:t>
+            </a:r>
+            <a:r>
+              <a:rPr lang="en-US" sz="1250" dirty="0">
+                <a:solidFill>
+                  <a:srgbClr val="111111"/>
+                </a:solidFill>
+                <a:latin typeface="Kalam Bold" pitchFamily="34" charset="0"/>
+                <a:ea typeface="Kalam Bold" pitchFamily="34" charset="-122"/>
+                <a:cs typeface="Kalam Bold" pitchFamily="34" charset="-120"/>
+              </a:rPr>
+              <a:t>e-</a:t>
+            </a:r>
+            <a:r>
+              <a:rPr lang="en-US" sz="1250" dirty="0">
+                <a:solidFill>
+                  <a:srgbClr val="111111"/>
+                </a:solidFill>
+                <a:latin typeface="Kalam Bold" pitchFamily="34" charset="0"/>
+                <a:ea typeface="Kalam Bold" pitchFamily="34" charset="-122"/>
+                <a:cs typeface="Kalam Bold" pitchFamily="34" charset="-120"/>
+              </a:rPr>
+              <a:t>out.</a:t>
             </a:r>
             <a:endParaRPr lang="en-US" sz="1200" dirty="0"/>
           </a:p>
@@ -14306,7 +13948,7 @@
                 <a:ea typeface="Oswald SemiBold" pitchFamily="34" charset="-122"/>
                 <a:cs typeface="Oswald SemiBold" pitchFamily="34" charset="-120"/>
               </a:rPr>
-              <a:t>TIE-OUT FAIL: ROUTE THE FAILURE</a:t>
+              <a:t>ACT 3: VALIDATE RUNS THE TIE-OUT</a:t>
             </a:r>
             <a:endParaRPr lang="en-US" sz="2400" dirty="0"/>
           </a:p>
@@ -14362,7 +14004,7 @@
         <p:spPr>
           <a:xfrm>
             <a:off x="271463" y="1375172"/>
-            <a:ext cx="3429000" cy="428625"/>
+            <a:ext cx="3429000" cy="385763"/>
           </a:xfrm>
           <a:prstGeom prst="rect">
             <a:avLst/>
@@ -14386,8 +14028,8 @@
         </p:nvSpPr>
         <p:spPr>
           <a:xfrm>
-            <a:off x="385763" y="1460897"/>
-            <a:ext cx="214313" cy="214313"/>
+            <a:off x="371475" y="1446609"/>
+            <a:ext cx="200025" cy="200025"/>
           </a:xfrm>
           <a:prstGeom prst="rect">
             <a:avLst/>
@@ -14406,8 +14048,8 @@
         </p:nvSpPr>
         <p:spPr>
           <a:xfrm>
-            <a:off x="385763" y="1460897"/>
-            <a:ext cx="214313" cy="214313"/>
+            <a:off x="371475" y="1446609"/>
+            <a:ext cx="200025" cy="200025"/>
           </a:xfrm>
           <a:prstGeom prst="rect">
             <a:avLst/>
@@ -14425,7 +14067,7 @@
               <a:buNone/>
             </a:pPr>
             <a:r>
-              <a:rPr lang="en-US" sz="950" dirty="0">
+              <a:rPr lang="en-US" sz="850" dirty="0">
                 <a:solidFill>
                   <a:srgbClr val="FFFFFF"/>
                 </a:solidFill>
@@ -14435,7 +14077,7 @@
               </a:rPr>
               <a:t>1</a:t>
             </a:r>
-            <a:endParaRPr lang="en-US" sz="950" dirty="0"/>
+            <a:endParaRPr lang="en-US" sz="850" dirty="0"/>
           </a:p>
         </p:txBody>
       </p:sp>
@@ -14447,8 +14089,8 @@
         </p:nvSpPr>
         <p:spPr>
           <a:xfrm>
-            <a:off x="685800" y="1483221"/>
-            <a:ext cx="2900363" cy="169664"/>
+            <a:off x="657225" y="1473733"/>
+            <a:ext cx="2943225" cy="145721"/>
           </a:xfrm>
           <a:prstGeom prst="rect">
             <a:avLst/>
@@ -14464,12 +14106,12 @@
           <a:p>
             <a:pPr algn="l" indent="0" marL="0">
               <a:lnSpc>
-                <a:spcPct val="100000"/>
+                <a:spcPct val="96000"/>
               </a:lnSpc>
               <a:buNone/>
             </a:pPr>
             <a:r>
-              <a:rPr lang="en-US" sz="950" b="1" dirty="0">
+              <a:rPr lang="en-US" sz="850" b="1" dirty="0">
                 <a:solidFill>
                   <a:srgbClr val="30343B"/>
                 </a:solidFill>
@@ -14477,9 +14119,9 @@
                 <a:ea typeface="Inter Bold" pitchFamily="34" charset="-122"/>
                 <a:cs typeface="Inter Bold" pitchFamily="34" charset="-120"/>
               </a:rPr>
-              <a:t>Preserve failed evidence</a:t>
-            </a:r>
-            <a:endParaRPr lang="en-US" sz="950" dirty="0"/>
+              <a:t>Run approved Python producer</a:t>
+            </a:r>
+            <a:endParaRPr lang="en-US" sz="850" dirty="0"/>
           </a:p>
         </p:txBody>
       </p:sp>
@@ -14491,8 +14133,8 @@
         </p:nvSpPr>
         <p:spPr>
           <a:xfrm>
-            <a:off x="271463" y="1860947"/>
-            <a:ext cx="3429000" cy="428625"/>
+            <a:off x="271463" y="1789509"/>
+            <a:ext cx="3429000" cy="385763"/>
           </a:xfrm>
           <a:prstGeom prst="rect">
             <a:avLst/>
@@ -14516,8 +14158,8 @@
         </p:nvSpPr>
         <p:spPr>
           <a:xfrm>
-            <a:off x="385763" y="1946672"/>
-            <a:ext cx="214313" cy="214313"/>
+            <a:off x="371475" y="1860947"/>
+            <a:ext cx="200025" cy="200025"/>
           </a:xfrm>
           <a:prstGeom prst="rect">
             <a:avLst/>
@@ -14536,8 +14178,8 @@
         </p:nvSpPr>
         <p:spPr>
           <a:xfrm>
-            <a:off x="385763" y="1946672"/>
-            <a:ext cx="214313" cy="214313"/>
+            <a:off x="371475" y="1860947"/>
+            <a:ext cx="200025" cy="200025"/>
           </a:xfrm>
           <a:prstGeom prst="rect">
             <a:avLst/>
@@ -14555,7 +14197,7 @@
               <a:buNone/>
             </a:pPr>
             <a:r>
-              <a:rPr lang="en-US" sz="950" dirty="0">
+              <a:rPr lang="en-US" sz="850" dirty="0">
                 <a:solidFill>
                   <a:srgbClr val="FFFFFF"/>
                 </a:solidFill>
@@ -14565,7 +14207,7 @@
               </a:rPr>
               <a:t>2</a:t>
             </a:r>
-            <a:endParaRPr lang="en-US" sz="950" dirty="0"/>
+            <a:endParaRPr lang="en-US" sz="850" dirty="0"/>
           </a:p>
         </p:txBody>
       </p:sp>
@@ -14577,8 +14219,8 @@
         </p:nvSpPr>
         <p:spPr>
           <a:xfrm>
-            <a:off x="685800" y="1968996"/>
-            <a:ext cx="2900363" cy="169664"/>
+            <a:off x="657225" y="1888071"/>
+            <a:ext cx="2943225" cy="145721"/>
           </a:xfrm>
           <a:prstGeom prst="rect">
             <a:avLst/>
@@ -14594,12 +14236,12 @@
           <a:p>
             <a:pPr algn="l" indent="0" marL="0">
               <a:lnSpc>
-                <a:spcPct val="100000"/>
+                <a:spcPct val="96000"/>
               </a:lnSpc>
               <a:buNone/>
             </a:pPr>
             <a:r>
-              <a:rPr lang="en-US" sz="950" b="1" dirty="0">
+              <a:rPr lang="en-US" sz="850" b="1" dirty="0">
                 <a:solidFill>
                   <a:srgbClr val="30343B"/>
                 </a:solidFill>
@@ -14607,9 +14249,9 @@
                 <a:ea typeface="Inter Bold" pitchFamily="34" charset="-122"/>
                 <a:cs typeface="Inter Bold" pitchFamily="34" charset="-120"/>
               </a:rPr>
-              <a:t>Normalize failure evidence</a:t>
-            </a:r>
-            <a:endParaRPr lang="en-US" sz="950" dirty="0"/>
+              <a:t>Write actual.csv</a:t>
+            </a:r>
+            <a:endParaRPr lang="en-US" sz="850" dirty="0"/>
           </a:p>
         </p:txBody>
       </p:sp>
@@ -14621,8 +14263,8 @@
         </p:nvSpPr>
         <p:spPr>
           <a:xfrm>
-            <a:off x="271463" y="2346722"/>
-            <a:ext cx="3429000" cy="428625"/>
+            <a:off x="271463" y="2203847"/>
+            <a:ext cx="3429000" cy="385763"/>
           </a:xfrm>
           <a:prstGeom prst="rect">
             <a:avLst/>
@@ -14646,8 +14288,8 @@
         </p:nvSpPr>
         <p:spPr>
           <a:xfrm>
-            <a:off x="385763" y="2432447"/>
-            <a:ext cx="214313" cy="214313"/>
+            <a:off x="371475" y="2275284"/>
+            <a:ext cx="200025" cy="200025"/>
           </a:xfrm>
           <a:prstGeom prst="rect">
             <a:avLst/>
@@ -14666,8 +14308,8 @@
         </p:nvSpPr>
         <p:spPr>
           <a:xfrm>
-            <a:off x="385763" y="2432447"/>
-            <a:ext cx="214313" cy="214313"/>
+            <a:off x="371475" y="2275284"/>
+            <a:ext cx="200025" cy="200025"/>
           </a:xfrm>
           <a:prstGeom prst="rect">
             <a:avLst/>
@@ -14685,7 +14327,7 @@
               <a:buNone/>
             </a:pPr>
             <a:r>
-              <a:rPr lang="en-US" sz="950" dirty="0">
+              <a:rPr lang="en-US" sz="850" dirty="0">
                 <a:solidFill>
                   <a:srgbClr val="FFFFFF"/>
                 </a:solidFill>
@@ -14695,7 +14337,7 @@
               </a:rPr>
               <a:t>3</a:t>
             </a:r>
-            <a:endParaRPr lang="en-US" sz="950" dirty="0"/>
+            <a:endParaRPr lang="en-US" sz="850" dirty="0"/>
           </a:p>
         </p:txBody>
       </p:sp>
@@ -14707,8 +14349,8 @@
         </p:nvSpPr>
         <p:spPr>
           <a:xfrm>
-            <a:off x="685800" y="2454771"/>
-            <a:ext cx="2900363" cy="169664"/>
+            <a:off x="657225" y="2302408"/>
+            <a:ext cx="2943225" cy="145721"/>
           </a:xfrm>
           <a:prstGeom prst="rect">
             <a:avLst/>
@@ -14724,12 +14366,12 @@
           <a:p>
             <a:pPr algn="l" indent="0" marL="0">
               <a:lnSpc>
-                <a:spcPct val="100000"/>
+                <a:spcPct val="96000"/>
               </a:lnSpc>
               <a:buNone/>
             </a:pPr>
             <a:r>
-              <a:rPr lang="en-US" sz="950" b="1" dirty="0">
+              <a:rPr lang="en-US" sz="850" b="1" dirty="0">
                 <a:solidFill>
                   <a:srgbClr val="30343B"/>
                 </a:solidFill>
@@ -14737,9 +14379,9 @@
                 <a:ea typeface="Inter Bold" pitchFamily="34" charset="-122"/>
                 <a:cs typeface="Inter Bold" pitchFamily="34" charset="-120"/>
               </a:rPr>
-              <a:t>Diagnose earliest failed gate</a:t>
-            </a:r>
-            <a:endParaRPr lang="en-US" sz="950" dirty="0"/>
+              <a:t>Compare against SAS oracle</a:t>
+            </a:r>
+            <a:endParaRPr lang="en-US" sz="850" dirty="0"/>
           </a:p>
         </p:txBody>
       </p:sp>
@@ -14751,8 +14393,8 @@
         </p:nvSpPr>
         <p:spPr>
           <a:xfrm>
-            <a:off x="271463" y="2832497"/>
-            <a:ext cx="3429000" cy="428625"/>
+            <a:off x="271463" y="2618184"/>
+            <a:ext cx="3429000" cy="385763"/>
           </a:xfrm>
           <a:prstGeom prst="rect">
             <a:avLst/>
@@ -14776,8 +14418,8 @@
         </p:nvSpPr>
         <p:spPr>
           <a:xfrm>
-            <a:off x="385763" y="2918222"/>
-            <a:ext cx="214313" cy="214313"/>
+            <a:off x="371475" y="2689622"/>
+            <a:ext cx="200025" cy="200025"/>
           </a:xfrm>
           <a:prstGeom prst="rect">
             <a:avLst/>
@@ -14796,8 +14438,8 @@
         </p:nvSpPr>
         <p:spPr>
           <a:xfrm>
-            <a:off x="385763" y="2918222"/>
-            <a:ext cx="214313" cy="214313"/>
+            <a:off x="371475" y="2689622"/>
+            <a:ext cx="200025" cy="200025"/>
           </a:xfrm>
           <a:prstGeom prst="rect">
             <a:avLst/>
@@ -14815,7 +14457,7 @@
               <a:buNone/>
             </a:pPr>
             <a:r>
-              <a:rPr lang="en-US" sz="950" dirty="0">
+              <a:rPr lang="en-US" sz="850" dirty="0">
                 <a:solidFill>
                   <a:srgbClr val="FFFFFF"/>
                 </a:solidFill>
@@ -14825,7 +14467,7 @@
               </a:rPr>
               <a:t>4</a:t>
             </a:r>
-            <a:endParaRPr lang="en-US" sz="950" dirty="0"/>
+            <a:endParaRPr lang="en-US" sz="850" dirty="0"/>
           </a:p>
         </p:txBody>
       </p:sp>
@@ -14837,8 +14479,8 @@
         </p:nvSpPr>
         <p:spPr>
           <a:xfrm>
-            <a:off x="685800" y="2940546"/>
-            <a:ext cx="2900363" cy="169664"/>
+            <a:off x="657225" y="2716746"/>
+            <a:ext cx="2943225" cy="145721"/>
           </a:xfrm>
           <a:prstGeom prst="rect">
             <a:avLst/>
@@ -14854,12 +14496,12 @@
           <a:p>
             <a:pPr algn="l" indent="0" marL="0">
               <a:lnSpc>
-                <a:spcPct val="100000"/>
+                <a:spcPct val="96000"/>
               </a:lnSpc>
               <a:buNone/>
             </a:pPr>
             <a:r>
-              <a:rPr lang="en-US" sz="950" b="1" dirty="0">
+              <a:rPr lang="en-US" sz="850" b="1" dirty="0">
                 <a:solidFill>
                   <a:srgbClr val="30343B"/>
                 </a:solidFill>
@@ -14867,9 +14509,9 @@
                 <a:ea typeface="Inter Bold" pitchFamily="34" charset="-122"/>
                 <a:cs typeface="Inter Bold" pitchFamily="34" charset="-120"/>
               </a:rPr>
-              <a:t>Repair one owning layer</a:t>
-            </a:r>
-            <a:endParaRPr lang="en-US" sz="950" dirty="0"/>
+              <a:t>Apply keys and tolerances</a:t>
+            </a:r>
+            <a:endParaRPr lang="en-US" sz="850" dirty="0"/>
           </a:p>
         </p:txBody>
       </p:sp>
@@ -14881,8 +14523,8 @@
         </p:nvSpPr>
         <p:spPr>
           <a:xfrm>
-            <a:off x="271463" y="3318272"/>
-            <a:ext cx="3429000" cy="428625"/>
+            <a:off x="271463" y="3032522"/>
+            <a:ext cx="3429000" cy="385763"/>
           </a:xfrm>
           <a:prstGeom prst="rect">
             <a:avLst/>
@@ -14906,8 +14548,8 @@
         </p:nvSpPr>
         <p:spPr>
           <a:xfrm>
-            <a:off x="385763" y="3403997"/>
-            <a:ext cx="214313" cy="214313"/>
+            <a:off x="371475" y="3103959"/>
+            <a:ext cx="200025" cy="200025"/>
           </a:xfrm>
           <a:prstGeom prst="rect">
             <a:avLst/>
@@ -14926,8 +14568,8 @@
         </p:nvSpPr>
         <p:spPr>
           <a:xfrm>
-            <a:off x="385763" y="3403997"/>
-            <a:ext cx="214313" cy="214313"/>
+            <a:off x="371475" y="3103959"/>
+            <a:ext cx="200025" cy="200025"/>
           </a:xfrm>
           <a:prstGeom prst="rect">
             <a:avLst/>
@@ -14945,7 +14587,7 @@
               <a:buNone/>
             </a:pPr>
             <a:r>
-              <a:rPr lang="en-US" sz="950" dirty="0">
+              <a:rPr lang="en-US" sz="850" dirty="0">
                 <a:solidFill>
                   <a:srgbClr val="FFFFFF"/>
                 </a:solidFill>
@@ -14955,7 +14597,7 @@
               </a:rPr>
               <a:t>5</a:t>
             </a:r>
-            <a:endParaRPr lang="en-US" sz="950" dirty="0"/>
+            <a:endParaRPr lang="en-US" sz="850" dirty="0"/>
           </a:p>
         </p:txBody>
       </p:sp>
@@ -14967,8 +14609,8 @@
         </p:nvSpPr>
         <p:spPr>
           <a:xfrm>
-            <a:off x="685800" y="3426321"/>
-            <a:ext cx="2900363" cy="169664"/>
+            <a:off x="657225" y="3131083"/>
+            <a:ext cx="2943225" cy="145721"/>
           </a:xfrm>
           <a:prstGeom prst="rect">
             <a:avLst/>
@@ -14984,12 +14626,12 @@
           <a:p>
             <a:pPr algn="l" indent="0" marL="0">
               <a:lnSpc>
-                <a:spcPct val="100000"/>
+                <a:spcPct val="96000"/>
               </a:lnSpc>
               <a:buNone/>
             </a:pPr>
             <a:r>
-              <a:rPr lang="en-US" sz="950" b="1" dirty="0">
+              <a:rPr lang="en-US" sz="850" b="1" dirty="0">
                 <a:solidFill>
                   <a:srgbClr val="30343B"/>
                 </a:solidFill>
@@ -14997,22 +14639,47 @@
                 <a:ea typeface="Inter Bold" pitchFamily="34" charset="-122"/>
                 <a:cs typeface="Inter Bold" pitchFamily="34" charset="-120"/>
               </a:rPr>
-              <a:t>Review independently</a:t>
-            </a:r>
-            <a:endParaRPr lang="en-US" sz="950" dirty="0"/>
-          </a:p>
-        </p:txBody>
-      </p:sp>
-      <p:sp>
-        <p:nvSpPr>
-          <p:cNvPr id="28" name="Text 24"/>
-          <p:cNvSpPr/>
-          <p:nvPr/>
-        </p:nvSpPr>
-        <p:spPr>
-          <a:xfrm>
-            <a:off x="3929063" y="942975"/>
-            <a:ext cx="4943475" cy="275034"/>
+              <a:t>Write evidence bundle</a:t>
+            </a:r>
+            <a:endParaRPr lang="en-US" sz="850" dirty="0"/>
+          </a:p>
+        </p:txBody>
+      </p:sp>
+      <p:sp>
+        <p:nvSpPr>
+          <p:cNvPr id="28" name="Shape 24"/>
+          <p:cNvSpPr/>
+          <p:nvPr/>
+        </p:nvSpPr>
+        <p:spPr>
+          <a:xfrm>
+            <a:off x="271463" y="3504009"/>
+            <a:ext cx="3429000" cy="917972"/>
+          </a:xfrm>
+          <a:prstGeom prst="rect">
+            <a:avLst/>
+          </a:prstGeom>
+          <a:solidFill>
+            <a:srgbClr val="EAF1FF"/>
+          </a:solidFill>
+          <a:ln w="18288">
+            <a:solidFill>
+              <a:srgbClr val="111111"/>
+            </a:solidFill>
+            <a:prstDash val="solid"/>
+          </a:ln>
+        </p:spPr>
+      </p:sp>
+      <p:sp>
+        <p:nvSpPr>
+          <p:cNvPr id="29" name="Text 25"/>
+          <p:cNvSpPr/>
+          <p:nvPr/>
+        </p:nvSpPr>
+        <p:spPr>
+          <a:xfrm>
+            <a:off x="371475" y="3604022"/>
+            <a:ext cx="3228975" cy="167878"/>
           </a:xfrm>
           <a:prstGeom prst="rect">
             <a:avLst/>
@@ -15030,7 +14697,7 @@
               <a:buNone/>
             </a:pPr>
             <a:r>
-              <a:rPr lang="en-US" sz="1400" dirty="0">
+              <a:rPr lang="en-US" sz="850" dirty="0">
                 <a:solidFill>
                   <a:srgbClr val="111111"/>
                 </a:solidFill>
@@ -15038,7 +14705,171 @@
                 <a:ea typeface="Oswald SemiBold" pitchFamily="34" charset="-122"/>
                 <a:cs typeface="Oswald SemiBold" pitchFamily="34" charset="-120"/>
               </a:rPr>
-              <a:t>ACTUAL RECOVERY ENTRY POINT</a:t>
+              <a:t>CANONICAL ARTIFACTS CREATED</a:t>
+            </a:r>
+            <a:endParaRPr lang="en-US" sz="850" dirty="0"/>
+          </a:p>
+        </p:txBody>
+      </p:sp>
+      <p:sp>
+        <p:nvSpPr>
+          <p:cNvPr id="30" name="Text 26"/>
+          <p:cNvSpPr/>
+          <p:nvPr/>
+        </p:nvSpPr>
+        <p:spPr>
+          <a:xfrm>
+            <a:off x="371475" y="3829050"/>
+            <a:ext cx="3228975" cy="121444"/>
+          </a:xfrm>
+          <a:prstGeom prst="rect">
+            <a:avLst/>
+          </a:prstGeom>
+          <a:noFill/>
+          <a:ln/>
+        </p:spPr>
+        <p:txBody>
+          <a:bodyPr wrap="square" lIns="85090" tIns="0" rIns="0" bIns="0" rtlCol="0" anchor="t">
+            <a:spAutoFit/>
+          </a:bodyPr>
+          <a:lstStyle/>
+          <a:p>
+            <a:pPr algn="l" indent="0" marL="0">
+              <a:buNone/>
+            </a:pPr>
+            <a:r>
+              <a:rPr lang="en-US" sz="600" b="1" dirty="0">
+                <a:solidFill>
+                  <a:srgbClr val="B42318"/>
+                </a:solidFill>
+                <a:latin typeface="JetBrains Mono Bold" pitchFamily="34" charset="0"/>
+                <a:ea typeface="JetBrains Mono Bold" pitchFamily="34" charset="-122"/>
+                <a:cs typeface="JetBrains Mono Bold" pitchFamily="34" charset="-120"/>
+              </a:rPr>
+              <a:t>artifacts/evidence/.../tieout_result.json</a:t>
+            </a:r>
+            <a:endParaRPr lang="en-US" sz="600" dirty="0"/>
+          </a:p>
+        </p:txBody>
+      </p:sp>
+      <p:sp>
+        <p:nvSpPr>
+          <p:cNvPr id="31" name="Text 27"/>
+          <p:cNvSpPr/>
+          <p:nvPr/>
+        </p:nvSpPr>
+        <p:spPr>
+          <a:xfrm>
+            <a:off x="371475" y="3979069"/>
+            <a:ext cx="3228975" cy="121444"/>
+          </a:xfrm>
+          <a:prstGeom prst="rect">
+            <a:avLst/>
+          </a:prstGeom>
+          <a:noFill/>
+          <a:ln/>
+        </p:spPr>
+        <p:txBody>
+          <a:bodyPr wrap="square" lIns="85090" tIns="0" rIns="0" bIns="0" rtlCol="0" anchor="t">
+            <a:spAutoFit/>
+          </a:bodyPr>
+          <a:lstStyle/>
+          <a:p>
+            <a:pPr algn="l" indent="0" marL="0">
+              <a:buNone/>
+            </a:pPr>
+            <a:r>
+              <a:rPr lang="en-US" sz="600" b="1" dirty="0">
+                <a:solidFill>
+                  <a:srgbClr val="B42318"/>
+                </a:solidFill>
+                <a:latin typeface="JetBrains Mono Bold" pitchFamily="34" charset="0"/>
+                <a:ea typeface="JetBrains Mono Bold" pitchFamily="34" charset="-122"/>
+                <a:cs typeface="JetBrains Mono Bold" pitchFamily="34" charset="-120"/>
+              </a:rPr>
+              <a:t>artifacts/evidence/.../tieout_summary.md</a:t>
+            </a:r>
+            <a:endParaRPr lang="en-US" sz="600" dirty="0"/>
+          </a:p>
+        </p:txBody>
+      </p:sp>
+      <p:sp>
+        <p:nvSpPr>
+          <p:cNvPr id="32" name="Text 28"/>
+          <p:cNvSpPr/>
+          <p:nvPr/>
+        </p:nvSpPr>
+        <p:spPr>
+          <a:xfrm>
+            <a:off x="371475" y="4129088"/>
+            <a:ext cx="3228975" cy="121444"/>
+          </a:xfrm>
+          <a:prstGeom prst="rect">
+            <a:avLst/>
+          </a:prstGeom>
+          <a:noFill/>
+          <a:ln/>
+        </p:spPr>
+        <p:txBody>
+          <a:bodyPr wrap="square" lIns="85090" tIns="0" rIns="0" bIns="0" rtlCol="0" anchor="t">
+            <a:spAutoFit/>
+          </a:bodyPr>
+          <a:lstStyle/>
+          <a:p>
+            <a:pPr algn="l" indent="0" marL="0">
+              <a:buNone/>
+            </a:pPr>
+            <a:r>
+              <a:rPr lang="en-US" sz="600" b="1" dirty="0">
+                <a:solidFill>
+                  <a:srgbClr val="B42318"/>
+                </a:solidFill>
+                <a:latin typeface="JetBrains Mono Bold" pitchFamily="34" charset="0"/>
+                <a:ea typeface="JetBrains Mono Bold" pitchFamily="34" charset="-122"/>
+                <a:cs typeface="JetBrains Mono Bold" pitchFamily="34" charset="-120"/>
+              </a:rPr>
+              <a:t>artifacts/evidence/.../evidence.json</a:t>
+            </a:r>
+            <a:endParaRPr lang="en-US" sz="600" dirty="0"/>
+          </a:p>
+        </p:txBody>
+      </p:sp>
+      <p:sp>
+        <p:nvSpPr>
+          <p:cNvPr id="33" name="Text 29"/>
+          <p:cNvSpPr/>
+          <p:nvPr/>
+        </p:nvSpPr>
+        <p:spPr>
+          <a:xfrm>
+            <a:off x="3929063" y="942975"/>
+            <a:ext cx="4943475" cy="275034"/>
+          </a:xfrm>
+          <a:prstGeom prst="rect">
+            <a:avLst/>
+          </a:prstGeom>
+          <a:noFill/>
+          <a:ln/>
+        </p:spPr>
+        <p:txBody>
+          <a:bodyPr wrap="square" lIns="0" tIns="0" rIns="0" bIns="0" rtlCol="0" anchor="t">
+            <a:spAutoFit/>
+          </a:bodyPr>
+          <a:lstStyle/>
+          <a:p>
+            <a:pPr algn="l" indent="0" marL="0">
+              <a:buNone/>
+            </a:pPr>
+            <a:r>
+              <a:rPr lang="en-US" sz="1400" dirty="0">
+                <a:solidFill>
+                  <a:srgbClr val="111111"/>
+                </a:solidFill>
+                <a:latin typeface="Oswald SemiBold" pitchFamily="34" charset="0"/>
+                <a:ea typeface="Oswald SemiBold" pitchFamily="34" charset="-122"/>
+                <a:cs typeface="Oswald SemiBold" pitchFamily="34" charset="-120"/>
+              </a:rPr>
+              <a:t>HUMAN APPROVAL TO VALIDATE</a:t>
             </a:r>
             <a:endParaRPr lang="en-US" sz="1400" dirty="0"/>
           </a:p>
@@ -15046,7 +14877,7 @@
       </p:sp>
       <p:sp>
         <p:nvSpPr>
-          <p:cNvPr id="29" name="Shape 25"/>
+          <p:cNvPr id="34" name="Shape 30"/>
           <p:cNvSpPr/>
           <p:nvPr/>
         </p:nvSpPr>
@@ -15071,7 +14902,7 @@
       </p:sp>
       <p:sp>
         <p:nvSpPr>
-          <p:cNvPr id="30" name="Shape 26"/>
+          <p:cNvPr id="35" name="Shape 31"/>
           <p:cNvSpPr/>
           <p:nvPr/>
         </p:nvSpPr>
@@ -15091,7 +14922,7 @@
       </p:sp>
       <p:sp>
         <p:nvSpPr>
-          <p:cNvPr id="31" name="Shape 27"/>
+          <p:cNvPr id="36" name="Shape 32"/>
           <p:cNvSpPr/>
           <p:nvPr/>
         </p:nvSpPr>
@@ -15111,7 +14942,7 @@
       </p:sp>
       <p:sp>
         <p:nvSpPr>
-          <p:cNvPr id="32" name="Text 28"/>
+          <p:cNvPr id="37" name="Text 33"/>
           <p:cNvSpPr/>
           <p:nvPr/>
         </p:nvSpPr>
@@ -15152,14 +14983,14 @@
       </p:sp>
       <p:sp>
         <p:nvSpPr>
-          <p:cNvPr id="33" name="Text 29"/>
-          <p:cNvSpPr/>
-          <p:nvPr/>
-        </p:nvSpPr>
-        <p:spPr>
-          <a:xfrm>
-            <a:off x="4129088" y="1803797"/>
-            <a:ext cx="4543425" cy="139303"/>
+          <p:cNvPr id="38" name="Text 34"/>
+          <p:cNvSpPr/>
+          <p:nvPr/>
+        </p:nvSpPr>
+        <p:spPr>
+          <a:xfrm>
+            <a:off x="4114800" y="1789509"/>
+            <a:ext cx="4572000" cy="124290"/>
           </a:xfrm>
           <a:prstGeom prst="rect">
             <a:avLst/>
@@ -15175,12 +15006,12 @@
           <a:p>
             <a:pPr algn="l" indent="0" marL="0">
               <a:lnSpc>
-                <a:spcPct val="120000"/>
+                <a:spcPct val="116000"/>
               </a:lnSpc>
               <a:buNone/>
             </a:pPr>
             <a:r>
-              <a:rPr lang="en-US" sz="650" b="1" spc="1" kern="0" dirty="0">
+              <a:rPr lang="en-US" sz="600" b="1" spc="1" kern="0" dirty="0">
                 <a:solidFill>
                   <a:srgbClr val="569CD6"/>
                 </a:solidFill>
@@ -15190,20 +15021,20 @@
               </a:rPr>
               <a:t>USER</a:t>
             </a:r>
-            <a:endParaRPr lang="en-US" sz="650" dirty="0"/>
-          </a:p>
-        </p:txBody>
-      </p:sp>
-      <p:sp>
-        <p:nvSpPr>
-          <p:cNvPr id="34" name="Shape 30"/>
-          <p:cNvSpPr/>
-          <p:nvPr/>
-        </p:nvSpPr>
-        <p:spPr>
-          <a:xfrm>
-            <a:off x="4129088" y="2000250"/>
-            <a:ext cx="4543425" cy="1457325"/>
+            <a:endParaRPr lang="en-US" sz="600" dirty="0"/>
+          </a:p>
+        </p:txBody>
+      </p:sp>
+      <p:sp>
+        <p:nvSpPr>
+          <p:cNvPr id="39" name="Shape 35"/>
+          <p:cNvSpPr/>
+          <p:nvPr/>
+        </p:nvSpPr>
+        <p:spPr>
+          <a:xfrm>
+            <a:off x="4114800" y="1956662"/>
+            <a:ext cx="4572000" cy="1430089"/>
           </a:xfrm>
           <a:prstGeom prst="rect">
             <a:avLst/>
@@ -15221,35 +15052,35 @@
       </p:sp>
       <p:sp>
         <p:nvSpPr>
-          <p:cNvPr id="35" name="Text 31"/>
-          <p:cNvSpPr/>
-          <p:nvPr/>
-        </p:nvSpPr>
-        <p:spPr>
-          <a:xfrm>
-            <a:off x="4129088" y="2000250"/>
-            <a:ext cx="4543425" cy="1457325"/>
-          </a:xfrm>
-          <a:prstGeom prst="rect">
-            <a:avLst/>
-          </a:prstGeom>
-          <a:noFill/>
-          <a:ln/>
-        </p:spPr>
-        <p:txBody>
-          <a:bodyPr wrap="square" lIns="170053" tIns="136017" rIns="170053" bIns="136017" rtlCol="0" anchor="t">
+          <p:cNvPr id="40" name="Text 36"/>
+          <p:cNvSpPr/>
+          <p:nvPr/>
+        </p:nvSpPr>
+        <p:spPr>
+          <a:xfrm>
+            <a:off x="4114800" y="1956662"/>
+            <a:ext cx="4572000" cy="1430089"/>
+          </a:xfrm>
+          <a:prstGeom prst="rect">
+            <a:avLst/>
+          </a:prstGeom>
+          <a:noFill/>
+          <a:ln/>
+        </p:spPr>
+        <p:txBody>
+          <a:bodyPr wrap="square" lIns="153035" tIns="119126" rIns="153035" bIns="119126" rtlCol="0" anchor="t">
             <a:spAutoFit/>
           </a:bodyPr>
           <a:lstStyle/>
           <a:p>
             <a:pPr algn="l" indent="0" marL="0">
               <a:lnSpc>
-                <a:spcPct val="120000"/>
+                <a:spcPct val="116000"/>
               </a:lnSpc>
               <a:buNone/>
             </a:pPr>
             <a:r>
-              <a:rPr lang="en-US" sz="800" b="1" dirty="0">
+              <a:rPr lang="en-US" sz="700" b="1" dirty="0">
                 <a:solidFill>
                   <a:srgbClr val="CE9178"/>
                 </a:solidFill>
@@ -15257,10 +15088,10 @@
                 <a:ea typeface="JetBrains Mono Bold" pitchFamily="34" charset="-122"/>
                 <a:cs typeface="JetBrains Mono Bold" pitchFamily="34" charset="-120"/>
               </a:rPr>
-              <a:t>/analyze-failure artifacts/evidence/runs/&lt;run-</a:t>
-            </a:r>
-            <a:r>
-              <a:rPr lang="en-US" sz="800" b="1" dirty="0">
+              <a:t>I approve the governed 50-record fixture, SAS oracle, and tie-out </a:t>
+            </a:r>
+            <a:r>
+              <a:rPr lang="en-US" sz="700" b="1" dirty="0">
                 <a:solidFill>
                   <a:srgbClr val="CE9178"/>
                 </a:solidFill>
@@ -15268,10 +15099,10 @@
                 <a:ea typeface="JetBrains Mono Bold" pitchFamily="34" charset="-122"/>
                 <a:cs typeface="JetBrains Mono Bold" pitchFamily="34" charset="-120"/>
               </a:rPr>
-              <a:t>id&gt;/evidence.json</a:t>
-            </a:r>
-            <a:r>
-              <a:rPr lang="en-US" sz="850" dirty="0">
+              <a:t>contract.</a:t>
+            </a:r>
+            <a:r>
+              <a:rPr lang="en-US" sz="750" dirty="0">
                 <a:solidFill>
                   <a:srgbClr val="D4D4D4"/>
                 </a:solidFill>
@@ -15283,7 +15114,7 @@
 </a:t>
             </a:r>
             <a:r>
-              <a:rPr lang="en-US" sz="850" dirty="0">
+              <a:rPr lang="en-US" sz="750" dirty="0">
                 <a:solidFill>
                   <a:srgbClr val="D4D4D4"/>
                 </a:solidFill>
@@ -15291,10 +15122,21 @@
                 <a:ea typeface="JetBrains Mono" pitchFamily="34" charset="-122"/>
                 <a:cs typeface="JetBrains Mono" pitchFamily="34" charset="-120"/>
               </a:rPr>
-              <a:t> Read the latest run state and failed gate.</a:t>
-            </a:r>
-            <a:r>
-              <a:rPr lang="en-US" sz="850" dirty="0">
+              <a:t> Use absolute tolerance </a:t>
+            </a:r>
+            <a:r>
+              <a:rPr lang="en-US" sz="700" b="1" dirty="0">
+                <a:solidFill>
+                  <a:srgbClr val="D4D4D4"/>
+                </a:solidFill>
+                <a:latin typeface="JetBrains Mono Bold" pitchFamily="34" charset="0"/>
+                <a:ea typeface="JetBrains Mono Bold" pitchFamily="34" charset="-122"/>
+                <a:cs typeface="JetBrains Mono Bold" pitchFamily="34" charset="-120"/>
+              </a:rPr>
+              <a:t>1e-10</a:t>
+            </a:r>
+            <a:r>
+              <a:rPr lang="en-US" sz="750" dirty="0">
                 <a:solidFill>
                   <a:srgbClr val="D4D4D4"/>
                 </a:solidFill>
@@ -15302,11 +15144,10 @@
                 <a:ea typeface="JetBrains Mono" pitchFamily="34" charset="-122"/>
                 <a:cs typeface="JetBrains Mono" pitchFamily="34" charset="-120"/>
               </a:rPr>
-              <a:t>
-</a:t>
-            </a:r>
-            <a:r>
-              <a:rPr lang="en-US" sz="850" dirty="0">
+              <a:t> for eta and probability.</a:t>
+            </a:r>
+            <a:r>
+              <a:rPr lang="en-US" sz="750" dirty="0">
                 <a:solidFill>
                   <a:srgbClr val="D4D4D4"/>
                 </a:solidFill>
@@ -15314,10 +15155,22 @@
                 <a:ea typeface="JetBrains Mono" pitchFamily="34" charset="-122"/>
                 <a:cs typeface="JetBrains Mono" pitchFamily="34" charset="-120"/>
               </a:rPr>
-              <a:t>If evidence is raw: invoke only </a:t>
-            </a:r>
-            <a:r>
-              <a:rPr lang="en-US" sz="800" b="1" dirty="0">
+              <a:t>
+</a:t>
+            </a:r>
+            <a:r>
+              <a:rPr lang="en-US" sz="750" dirty="0">
+                <a:solidFill>
+                  <a:srgbClr val="D4D4D4"/>
+                </a:solidFill>
+                <a:latin typeface="JetBrains Mono" pitchFamily="34" charset="0"/>
+                <a:ea typeface="JetBrains Mono" pitchFamily="34" charset="-122"/>
+                <a:cs typeface="JetBrains Mono" pitchFamily="34" charset="-120"/>
+              </a:rPr>
+              <a:t>Invoke exactly </a:t>
+            </a:r>
+            <a:r>
+              <a:rPr lang="en-US" sz="700" b="1" dirty="0">
                 <a:solidFill>
                   <a:srgbClr val="D4D4D4"/>
                 </a:solidFill>
@@ -15325,10 +15178,10 @@
                 <a:ea typeface="JetBrains Mono Bold" pitchFamily="34" charset="-122"/>
                 <a:cs typeface="JetBrains Mono Bold" pitchFamily="34" charset="-120"/>
               </a:rPr>
-              <a:t>ingest</a:t>
-            </a:r>
-            <a:r>
-              <a:rPr lang="en-US" sz="850" dirty="0">
+              <a:t>validate</a:t>
+            </a:r>
+            <a:r>
+              <a:rPr lang="en-US" sz="750" dirty="0">
                 <a:solidFill>
                   <a:srgbClr val="D4D4D4"/>
                 </a:solidFill>
@@ -15336,10 +15189,10 @@
                 <a:ea typeface="JetBrains Mono" pitchFamily="34" charset="-122"/>
                 <a:cs typeface="JetBrains Mono" pitchFamily="34" charset="-120"/>
               </a:rPr>
-              <a:t>, then stop.</a:t>
-            </a:r>
-            <a:r>
-              <a:rPr lang="en-US" sz="850" dirty="0">
+              <a:t>.</a:t>
+            </a:r>
+            <a:r>
+              <a:rPr lang="en-US" sz="750" dirty="0">
                 <a:solidFill>
                   <a:srgbClr val="D4D4D4"/>
                 </a:solidFill>
@@ -15351,7 +15204,7 @@
 </a:t>
             </a:r>
             <a:r>
-              <a:rPr lang="en-US" sz="850" dirty="0">
+              <a:rPr lang="en-US" sz="750" dirty="0">
                 <a:solidFill>
                   <a:srgbClr val="D4D4D4"/>
                 </a:solidFill>
@@ -15359,21 +15212,10 @@
                 <a:ea typeface="JetBrains Mono" pitchFamily="34" charset="-122"/>
                 <a:cs typeface="JetBrains Mono" pitchFamily="34" charset="-120"/>
               </a:rPr>
-              <a:t>If normalized: invoke only </a:t>
-            </a:r>
-            <a:r>
-              <a:rPr lang="en-US" sz="800" b="1" dirty="0">
-                <a:solidFill>
-                  <a:srgbClr val="D4D4D4"/>
-                </a:solidFill>
-                <a:latin typeface="JetBrains Mono Bold" pitchFamily="34" charset="0"/>
-                <a:ea typeface="JetBrains Mono Bold" pitchFamily="34" charset="-122"/>
-                <a:cs typeface="JetBrains Mono Bold" pitchFamily="34" charset="-120"/>
-              </a:rPr>
-              <a:t>diagnose</a:t>
-            </a:r>
-            <a:r>
-              <a:rPr lang="en-US" sz="850" dirty="0">
+              <a:t>Write the result, summary, and evidence bundle.</a:t>
+            </a:r>
+            <a:r>
+              <a:rPr lang="en-US" sz="750" dirty="0">
                 <a:solidFill>
                   <a:srgbClr val="D4D4D4"/>
                 </a:solidFill>
@@ -15381,10 +15223,11 @@
                 <a:ea typeface="JetBrains Mono" pitchFamily="34" charset="-122"/>
                 <a:cs typeface="JetBrains Mono" pitchFamily="34" charset="-120"/>
               </a:rPr>
-              <a:t>, then stop for approval.</a:t>
-            </a:r>
-            <a:r>
-              <a:rPr lang="en-US" sz="850" dirty="0">
+              <a:t>
+</a:t>
+            </a:r>
+            <a:r>
+              <a:rPr lang="en-US" sz="750" dirty="0">
                 <a:solidFill>
                   <a:srgbClr val="D4D4D4"/>
                 </a:solidFill>
@@ -15392,11 +15235,10 @@
                 <a:ea typeface="JetBrains Mono" pitchFamily="34" charset="-122"/>
                 <a:cs typeface="JetBrains Mono" pitchFamily="34" charset="-120"/>
               </a:rPr>
-              <a:t>
-</a:t>
-            </a:r>
-            <a:r>
-              <a:rPr lang="en-US" sz="850" dirty="0">
+              <a:t>Stop with PASS, FAIL, or BLOCKED.</a:t>
+            </a:r>
+            <a:r>
+              <a:rPr lang="en-US" sz="750" dirty="0">
                 <a:solidFill>
                   <a:srgbClr val="D4D4D4"/>
                 </a:solidFill>
@@ -15404,15 +15246,27 @@
                 <a:ea typeface="JetBrains Mono" pitchFamily="34" charset="-122"/>
                 <a:cs typeface="JetBrains Mono" pitchFamily="34" charset="-120"/>
               </a:rPr>
-              <a:t>Never repair or review in this message.</a:t>
-            </a:r>
-            <a:endParaRPr lang="en-US" sz="850" dirty="0"/>
-          </a:p>
-        </p:txBody>
-      </p:sp>
-      <p:sp>
-        <p:nvSpPr>
-          <p:cNvPr id="36" name="Shape 32"/>
+              <a:t>
+</a:t>
+            </a:r>
+            <a:r>
+              <a:rPr lang="en-US" sz="750" dirty="0">
+                <a:solidFill>
+                  <a:srgbClr val="D4D4D4"/>
+                </a:solidFill>
+                <a:latin typeface="JetBrains Mono" pitchFamily="34" charset="0"/>
+                <a:ea typeface="JetBrains Mono" pitchFamily="34" charset="-122"/>
+                <a:cs typeface="JetBrains Mono" pitchFamily="34" charset="-120"/>
+              </a:rPr>
+              <a:t>Do not broaden the proof claim.</a:t>
+            </a:r>
+            <a:endParaRPr lang="en-US" sz="750" dirty="0"/>
+          </a:p>
+        </p:txBody>
+      </p:sp>
+      <p:sp>
+        <p:nvSpPr>
+          <p:cNvPr id="41" name="Shape 37"/>
           <p:cNvSpPr/>
           <p:nvPr/>
         </p:nvSpPr>
@@ -15437,7 +15291,7 @@
       </p:sp>
       <p:sp>
         <p:nvSpPr>
-          <p:cNvPr id="37" name="Text 33"/>
+          <p:cNvPr id="42" name="Text 38"/>
           <p:cNvSpPr/>
           <p:nvPr/>
         </p:nvSpPr>
@@ -15484,7 +15338,7 @@
                 <a:ea typeface="Kalam Bold" pitchFamily="34" charset="-122"/>
                 <a:cs typeface="Kalam Bold" pitchFamily="34" charset="-120"/>
               </a:rPr>
-              <a:t> Fai</a:t>
+              <a:t> Parity is </a:t>
             </a:r>
             <a:r>
               <a:rPr lang="en-US" sz="1250" dirty="0">
@@ -15495,7 +15349,7 @@
                 <a:ea typeface="Kalam Bold" pitchFamily="34" charset="-122"/>
                 <a:cs typeface="Kalam Bold" pitchFamily="34" charset="-120"/>
               </a:rPr>
-              <a:t>lure becom</a:t>
+              <a:t>claimed on</a:t>
             </a:r>
             <a:r>
               <a:rPr lang="en-US" sz="1250" dirty="0">
@@ -15506,7 +15360,7 @@
                 <a:ea typeface="Kalam Bold" pitchFamily="34" charset="-122"/>
                 <a:cs typeface="Kalam Bold" pitchFamily="34" charset="-120"/>
               </a:rPr>
-              <a:t>es evidenc</a:t>
+              <a:t>ly through</a:t>
             </a:r>
             <a:r>
               <a:rPr lang="en-US" sz="1250" dirty="0">
@@ -15517,7 +15371,7 @@
                 <a:ea typeface="Kalam Bold" pitchFamily="34" charset="-122"/>
                 <a:cs typeface="Kalam Bold" pitchFamily="34" charset="-120"/>
               </a:rPr>
-              <a:t>e, not a re</a:t>
+              <a:t> generated </a:t>
             </a:r>
             <a:r>
               <a:rPr lang="en-US" sz="1250" dirty="0">
@@ -15528,29 +15382,7 @@
                 <a:ea typeface="Kalam Bold" pitchFamily="34" charset="-122"/>
                 <a:cs typeface="Kalam Bold" pitchFamily="34" charset="-120"/>
               </a:rPr>
-              <a:t>ason to loo</a:t>
-            </a:r>
-            <a:r>
-              <a:rPr lang="en-US" sz="1250" dirty="0">
-                <a:solidFill>
-                  <a:srgbClr val="111111"/>
-                </a:solidFill>
-                <a:latin typeface="Kalam Bold" pitchFamily="34" charset="0"/>
-                <a:ea typeface="Kalam Bold" pitchFamily="34" charset="-122"/>
-                <a:cs typeface="Kalam Bold" pitchFamily="34" charset="-120"/>
-              </a:rPr>
-              <a:t>sen the pro</a:t>
-            </a:r>
-            <a:r>
-              <a:rPr lang="en-US" sz="1250" dirty="0">
-                <a:solidFill>
-                  <a:srgbClr val="111111"/>
-                </a:solidFill>
-                <a:latin typeface="Kalam Bold" pitchFamily="34" charset="0"/>
-                <a:ea typeface="Kalam Bold" pitchFamily="34" charset="-122"/>
-                <a:cs typeface="Kalam Bold" pitchFamily="34" charset="-120"/>
-              </a:rPr>
-              <a:t>of.</a:t>
+              <a:t>evidence.</a:t>
             </a:r>
             <a:endParaRPr lang="en-US" sz="1200" dirty="0"/>
           </a:p>
@@ -15614,7 +15446,7 @@
         <p:spPr>
           <a:xfrm>
             <a:off x="271463" y="214313"/>
-            <a:ext cx="8601075" cy="685800"/>
+            <a:ext cx="8601075" cy="557213"/>
           </a:xfrm>
           <a:prstGeom prst="rect">
             <a:avLst/>
@@ -15635,7 +15467,7 @@
         </p:nvSpPr>
         <p:spPr>
           <a:xfrm>
-            <a:off x="271463" y="871538"/>
+            <a:off x="271463" y="742950"/>
             <a:ext cx="8601075" cy="28575"/>
           </a:xfrm>
           <a:prstGeom prst="rect">
@@ -15656,7 +15488,7 @@
         <p:spPr>
           <a:xfrm>
             <a:off x="271463" y="214313"/>
-            <a:ext cx="5557838" cy="375047"/>
+            <a:ext cx="8601075" cy="352499"/>
           </a:xfrm>
           <a:prstGeom prst="rect">
             <a:avLst/>
@@ -15677,7 +15509,7 @@
               <a:buNone/>
             </a:pPr>
             <a:r>
-              <a:rPr lang="en-US" sz="2550" b="1" dirty="0">
+              <a:rPr lang="en-US" sz="2400" b="1" dirty="0">
                 <a:solidFill>
                   <a:srgbClr val="111111"/>
                 </a:solidFill>
@@ -15685,9 +15517,9 @@
                 <a:ea typeface="Oswald SemiBold" pitchFamily="34" charset="-122"/>
                 <a:cs typeface="Oswald SemiBold" pitchFamily="34" charset="-120"/>
               </a:rPr>
-              <a:t>PROOF IN ACTION: THE EVIDENCE TRAIL</a:t>
-            </a:r>
-            <a:endParaRPr lang="en-US" sz="2550" dirty="0"/>
+              <a:t>TIE-OUT FAIL: ROUTE THE FAILURE</a:t>
+            </a:r>
+            <a:endParaRPr lang="en-US" sz="2400" dirty="0"/>
           </a:p>
         </p:txBody>
       </p:sp>
@@ -15699,8 +15531,8 @@
         </p:nvSpPr>
         <p:spPr>
           <a:xfrm>
-            <a:off x="271463" y="632222"/>
-            <a:ext cx="5557838" cy="192881"/>
+            <a:off x="271463" y="942975"/>
+            <a:ext cx="3429000" cy="275034"/>
           </a:xfrm>
           <a:prstGeom prst="rect">
             <a:avLst/>
@@ -15718,17 +15550,17 @@
               <a:buNone/>
             </a:pPr>
             <a:r>
-              <a:rPr lang="en-US" sz="1100" b="1" dirty="0">
+              <a:rPr lang="en-US" sz="1400" dirty="0">
                 <a:solidFill>
                   <a:srgbClr val="0055FF"/>
                 </a:solidFill>
-                <a:latin typeface="Inter Bold" pitchFamily="34" charset="0"/>
-                <a:ea typeface="Inter Bold" pitchFamily="34" charset="-122"/>
-                <a:cs typeface="Inter Bold" pitchFamily="34" charset="-120"/>
-              </a:rPr>
-              <a:t>Step 1: Extract exactly what SAS executed.</a:t>
-            </a:r>
-            <a:endParaRPr lang="en-US" sz="1100" dirty="0"/>
+                <a:latin typeface="Oswald SemiBold" pitchFamily="34" charset="0"/>
+                <a:ea typeface="Oswald SemiBold" pitchFamily="34" charset="-122"/>
+                <a:cs typeface="Oswald SemiBold" pitchFamily="34" charset="-120"/>
+              </a:rPr>
+              <a:t>WHAT THE REPO DOES</a:t>
+            </a:r>
+            <a:endParaRPr lang="en-US" sz="1400" dirty="0"/>
           </a:p>
         </p:txBody>
       </p:sp>
@@ -15740,8 +15572,8 @@
         </p:nvSpPr>
         <p:spPr>
           <a:xfrm>
-            <a:off x="271463" y="1071563"/>
-            <a:ext cx="2571750" cy="1175761"/>
+            <a:off x="271463" y="1375172"/>
+            <a:ext cx="3429000" cy="428625"/>
           </a:xfrm>
           <a:prstGeom prst="rect">
             <a:avLst/>
@@ -15759,71 +15591,91 @@
       </p:sp>
       <p:sp>
         <p:nvSpPr>
-          <p:cNvPr id="9" name="Text 5"/>
-          <p:cNvSpPr/>
-          <p:nvPr/>
-        </p:nvSpPr>
-        <p:spPr>
-          <a:xfrm>
-            <a:off x="414338" y="1214438"/>
-            <a:ext cx="2286000" cy="232172"/>
-          </a:xfrm>
-          <a:prstGeom prst="rect">
-            <a:avLst/>
-          </a:prstGeom>
-          <a:noFill/>
-          <a:ln/>
-        </p:spPr>
-        <p:txBody>
-          <a:bodyPr wrap="square" lIns="0" tIns="0" rIns="0" bIns="0" rtlCol="0" anchor="t">
-            <a:spAutoFit/>
-          </a:bodyPr>
-          <a:lstStyle/>
-          <a:p>
-            <a:pPr algn="l" indent="0" marL="0">
-              <a:buNone/>
-            </a:pPr>
-            <a:r>
-              <a:rPr lang="en-US" sz="1150" dirty="0">
-                <a:solidFill>
-                  <a:srgbClr val="0055FF"/>
+          <p:cNvPr id="9" name="Shape 5"/>
+          <p:cNvSpPr/>
+          <p:nvPr/>
+        </p:nvSpPr>
+        <p:spPr>
+          <a:xfrm>
+            <a:off x="385763" y="1460897"/>
+            <a:ext cx="214313" cy="214313"/>
+          </a:xfrm>
+          <a:prstGeom prst="rect">
+            <a:avLst/>
+          </a:prstGeom>
+          <a:solidFill>
+            <a:srgbClr val="111111"/>
+          </a:solidFill>
+          <a:ln/>
+        </p:spPr>
+      </p:sp>
+      <p:sp>
+        <p:nvSpPr>
+          <p:cNvPr id="10" name="Text 6"/>
+          <p:cNvSpPr/>
+          <p:nvPr/>
+        </p:nvSpPr>
+        <p:spPr>
+          <a:xfrm>
+            <a:off x="385763" y="1460897"/>
+            <a:ext cx="214313" cy="214313"/>
+          </a:xfrm>
+          <a:prstGeom prst="rect">
+            <a:avLst/>
+          </a:prstGeom>
+          <a:noFill/>
+          <a:ln/>
+        </p:spPr>
+        <p:txBody>
+          <a:bodyPr wrap="none" lIns="0" tIns="0" rIns="0" bIns="0" rtlCol="0" anchor="ctr">
+            <a:spAutoFit/>
+          </a:bodyPr>
+          <a:lstStyle/>
+          <a:p>
+            <a:pPr algn="ctr" indent="0" marL="0">
+              <a:buNone/>
+            </a:pPr>
+            <a:r>
+              <a:rPr lang="en-US" sz="950" dirty="0">
+                <a:solidFill>
+                  <a:srgbClr val="FFFFFF"/>
                 </a:solidFill>
                 <a:latin typeface="Oswald SemiBold" pitchFamily="34" charset="0"/>
                 <a:ea typeface="Oswald SemiBold" pitchFamily="34" charset="-122"/>
                 <a:cs typeface="Oswald SemiBold" pitchFamily="34" charset="-120"/>
               </a:rPr>
-              <a:t>ACTION</a:t>
-            </a:r>
-            <a:endParaRPr lang="en-US" sz="1150" dirty="0"/>
-          </a:p>
-        </p:txBody>
-      </p:sp>
-      <p:sp>
-        <p:nvSpPr>
-          <p:cNvPr id="10" name="Text 6"/>
-          <p:cNvSpPr/>
-          <p:nvPr/>
-        </p:nvSpPr>
-        <p:spPr>
-          <a:xfrm>
-            <a:off x="414338" y="1532334"/>
-            <a:ext cx="2286000" cy="529251"/>
-          </a:xfrm>
-          <a:prstGeom prst="rect">
-            <a:avLst/>
-          </a:prstGeom>
-          <a:noFill/>
-          <a:ln/>
-        </p:spPr>
-        <p:txBody>
-          <a:bodyPr wrap="square" lIns="0" tIns="0" rIns="0" bIns="0" rtlCol="0" anchor="t">
+              <a:t>1</a:t>
+            </a:r>
+            <a:endParaRPr lang="en-US" sz="950" dirty="0"/>
+          </a:p>
+        </p:txBody>
+      </p:sp>
+      <p:sp>
+        <p:nvSpPr>
+          <p:cNvPr id="11" name="Text 7"/>
+          <p:cNvSpPr/>
+          <p:nvPr/>
+        </p:nvSpPr>
+        <p:spPr>
+          <a:xfrm>
+            <a:off x="685800" y="1483221"/>
+            <a:ext cx="2900363" cy="169664"/>
+          </a:xfrm>
+          <a:prstGeom prst="rect">
+            <a:avLst/>
+          </a:prstGeom>
+          <a:noFill/>
+          <a:ln/>
+        </p:spPr>
+        <p:txBody>
+          <a:bodyPr wrap="none" lIns="0" tIns="0" rIns="0" bIns="0" rtlCol="0" anchor="t">
             <a:spAutoFit/>
           </a:bodyPr>
           <a:lstStyle/>
           <a:p>
             <a:pPr algn="l" indent="0" marL="0">
               <a:lnSpc>
-                <a:spcPct val="104000"/>
+                <a:spcPct val="100000"/>
               </a:lnSpc>
               <a:buNone/>
             </a:pPr>
@@ -15836,7 +15688,7 @@
                 <a:ea typeface="Inter Bold" pitchFamily="34" charset="-122"/>
                 <a:cs typeface="Inter Bold" pitchFamily="34" charset="-120"/>
               </a:rPr>
-              <a:t>Copilot reads the SAS program and logs to reconstruct behavior without writing any Python.</a:t>
+              <a:t>Preserve failed evidence</a:t>
             </a:r>
             <a:endParaRPr lang="en-US" sz="950" dirty="0"/>
           </a:p>
@@ -15844,14 +15696,14 @@
       </p:sp>
       <p:sp>
         <p:nvSpPr>
-          <p:cNvPr id="11" name="Shape 7"/>
-          <p:cNvSpPr/>
-          <p:nvPr/>
-        </p:nvSpPr>
-        <p:spPr>
-          <a:xfrm>
-            <a:off x="271463" y="2375911"/>
-            <a:ext cx="2571750" cy="1797267"/>
+          <p:cNvPr id="12" name="Shape 8"/>
+          <p:cNvSpPr/>
+          <p:nvPr/>
+        </p:nvSpPr>
+        <p:spPr>
+          <a:xfrm>
+            <a:off x="271463" y="1860947"/>
+            <a:ext cx="3429000" cy="428625"/>
           </a:xfrm>
           <a:prstGeom prst="rect">
             <a:avLst/>
@@ -15869,71 +15721,91 @@
       </p:sp>
       <p:sp>
         <p:nvSpPr>
-          <p:cNvPr id="12" name="Text 8"/>
-          <p:cNvSpPr/>
-          <p:nvPr/>
-        </p:nvSpPr>
-        <p:spPr>
-          <a:xfrm>
-            <a:off x="414338" y="2518786"/>
-            <a:ext cx="2286000" cy="232172"/>
-          </a:xfrm>
-          <a:prstGeom prst="rect">
-            <a:avLst/>
-          </a:prstGeom>
-          <a:noFill/>
-          <a:ln/>
-        </p:spPr>
-        <p:txBody>
-          <a:bodyPr wrap="square" lIns="0" tIns="0" rIns="0" bIns="0" rtlCol="0" anchor="t">
-            <a:spAutoFit/>
-          </a:bodyPr>
-          <a:lstStyle/>
-          <a:p>
-            <a:pPr algn="l" indent="0" marL="0">
-              <a:buNone/>
-            </a:pPr>
-            <a:r>
-              <a:rPr lang="en-US" sz="1150" dirty="0">
-                <a:solidFill>
-                  <a:srgbClr val="0055FF"/>
+          <p:cNvPr id="13" name="Shape 9"/>
+          <p:cNvSpPr/>
+          <p:nvPr/>
+        </p:nvSpPr>
+        <p:spPr>
+          <a:xfrm>
+            <a:off x="385763" y="1946672"/>
+            <a:ext cx="214313" cy="214313"/>
+          </a:xfrm>
+          <a:prstGeom prst="rect">
+            <a:avLst/>
+          </a:prstGeom>
+          <a:solidFill>
+            <a:srgbClr val="111111"/>
+          </a:solidFill>
+          <a:ln/>
+        </p:spPr>
+      </p:sp>
+      <p:sp>
+        <p:nvSpPr>
+          <p:cNvPr id="14" name="Text 10"/>
+          <p:cNvSpPr/>
+          <p:nvPr/>
+        </p:nvSpPr>
+        <p:spPr>
+          <a:xfrm>
+            <a:off x="385763" y="1946672"/>
+            <a:ext cx="214313" cy="214313"/>
+          </a:xfrm>
+          <a:prstGeom prst="rect">
+            <a:avLst/>
+          </a:prstGeom>
+          <a:noFill/>
+          <a:ln/>
+        </p:spPr>
+        <p:txBody>
+          <a:bodyPr wrap="none" lIns="0" tIns="0" rIns="0" bIns="0" rtlCol="0" anchor="ctr">
+            <a:spAutoFit/>
+          </a:bodyPr>
+          <a:lstStyle/>
+          <a:p>
+            <a:pPr algn="ctr" indent="0" marL="0">
+              <a:buNone/>
+            </a:pPr>
+            <a:r>
+              <a:rPr lang="en-US" sz="950" dirty="0">
+                <a:solidFill>
+                  <a:srgbClr val="FFFFFF"/>
                 </a:solidFill>
                 <a:latin typeface="Oswald SemiBold" pitchFamily="34" charset="0"/>
                 <a:ea typeface="Oswald SemiBold" pitchFamily="34" charset="-122"/>
                 <a:cs typeface="Oswald SemiBold" pitchFamily="34" charset="-120"/>
               </a:rPr>
-              <a:t>ARTIFACT CREATED</a:t>
-            </a:r>
-            <a:endParaRPr lang="en-US" sz="1150" dirty="0"/>
-          </a:p>
-        </p:txBody>
-      </p:sp>
-      <p:sp>
-        <p:nvSpPr>
-          <p:cNvPr id="13" name="Text 9"/>
-          <p:cNvSpPr/>
-          <p:nvPr/>
-        </p:nvSpPr>
-        <p:spPr>
-          <a:xfrm>
-            <a:off x="414338" y="2836683"/>
-            <a:ext cx="2286000" cy="529251"/>
-          </a:xfrm>
-          <a:prstGeom prst="rect">
-            <a:avLst/>
-          </a:prstGeom>
-          <a:noFill/>
-          <a:ln/>
-        </p:spPr>
-        <p:txBody>
-          <a:bodyPr wrap="square" lIns="0" tIns="0" rIns="0" bIns="0" rtlCol="0" anchor="t">
+              <a:t>2</a:t>
+            </a:r>
+            <a:endParaRPr lang="en-US" sz="950" dirty="0"/>
+          </a:p>
+        </p:txBody>
+      </p:sp>
+      <p:sp>
+        <p:nvSpPr>
+          <p:cNvPr id="15" name="Text 11"/>
+          <p:cNvSpPr/>
+          <p:nvPr/>
+        </p:nvSpPr>
+        <p:spPr>
+          <a:xfrm>
+            <a:off x="685800" y="1968996"/>
+            <a:ext cx="2900363" cy="169664"/>
+          </a:xfrm>
+          <a:prstGeom prst="rect">
+            <a:avLst/>
+          </a:prstGeom>
+          <a:noFill/>
+          <a:ln/>
+        </p:spPr>
+        <p:txBody>
+          <a:bodyPr wrap="none" lIns="0" tIns="0" rIns="0" bIns="0" rtlCol="0" anchor="t">
             <a:spAutoFit/>
           </a:bodyPr>
           <a:lstStyle/>
           <a:p>
             <a:pPr algn="l" indent="0" marL="0">
               <a:lnSpc>
-                <a:spcPct val="104000"/>
+                <a:spcPct val="100000"/>
               </a:lnSpc>
               <a:buNone/>
             </a:pPr>
@@ -15946,7 +15818,7 @@
                 <a:ea typeface="Inter Bold" pitchFamily="34" charset="-122"/>
                 <a:cs typeface="Inter Bold" pitchFamily="34" charset="-120"/>
               </a:rPr>
-              <a:t>The trace file records exactly which models ran and how they converged.</a:t>
+              <a:t>Normalize failure evidence</a:t>
             </a:r>
             <a:endParaRPr lang="en-US" sz="950" dirty="0"/>
           </a:p>
@@ -15954,20 +15826,20 @@
       </p:sp>
       <p:sp>
         <p:nvSpPr>
-          <p:cNvPr id="14" name="Shape 10"/>
-          <p:cNvSpPr/>
-          <p:nvPr/>
-        </p:nvSpPr>
-        <p:spPr>
-          <a:xfrm>
-            <a:off x="414338" y="3523097"/>
-            <a:ext cx="2286000" cy="464344"/>
-          </a:xfrm>
-          <a:prstGeom prst="rect">
-            <a:avLst/>
-          </a:prstGeom>
-          <a:solidFill>
-            <a:srgbClr val="FFF7CC"/>
+          <p:cNvPr id="16" name="Shape 12"/>
+          <p:cNvSpPr/>
+          <p:nvPr/>
+        </p:nvSpPr>
+        <p:spPr>
+          <a:xfrm>
+            <a:off x="271463" y="2346722"/>
+            <a:ext cx="3429000" cy="428625"/>
+          </a:xfrm>
+          <a:prstGeom prst="rect">
+            <a:avLst/>
+          </a:prstGeom>
+          <a:solidFill>
+            <a:srgbClr val="FFFFFF"/>
           </a:solidFill>
           <a:ln w="18288">
             <a:solidFill>
@@ -15979,55 +15851,420 @@
       </p:sp>
       <p:sp>
         <p:nvSpPr>
-          <p:cNvPr id="15" name="Text 11"/>
-          <p:cNvSpPr/>
-          <p:nvPr/>
-        </p:nvSpPr>
-        <p:spPr>
-          <a:xfrm>
-            <a:off x="414338" y="3523097"/>
-            <a:ext cx="2286000" cy="464344"/>
-          </a:xfrm>
-          <a:prstGeom prst="rect">
-            <a:avLst/>
-          </a:prstGeom>
-          <a:noFill/>
-          <a:ln/>
-        </p:spPr>
-        <p:txBody>
-          <a:bodyPr wrap="square" lIns="102108" tIns="102108" rIns="102108" bIns="102108" rtlCol="0" anchor="t">
+          <p:cNvPr id="17" name="Shape 13"/>
+          <p:cNvSpPr/>
+          <p:nvPr/>
+        </p:nvSpPr>
+        <p:spPr>
+          <a:xfrm>
+            <a:off x="385763" y="2432447"/>
+            <a:ext cx="214313" cy="214313"/>
+          </a:xfrm>
+          <a:prstGeom prst="rect">
+            <a:avLst/>
+          </a:prstGeom>
+          <a:solidFill>
+            <a:srgbClr val="111111"/>
+          </a:solidFill>
+          <a:ln/>
+        </p:spPr>
+      </p:sp>
+      <p:sp>
+        <p:nvSpPr>
+          <p:cNvPr id="18" name="Text 14"/>
+          <p:cNvSpPr/>
+          <p:nvPr/>
+        </p:nvSpPr>
+        <p:spPr>
+          <a:xfrm>
+            <a:off x="385763" y="2432447"/>
+            <a:ext cx="214313" cy="214313"/>
+          </a:xfrm>
+          <a:prstGeom prst="rect">
+            <a:avLst/>
+          </a:prstGeom>
+          <a:noFill/>
+          <a:ln/>
+        </p:spPr>
+        <p:txBody>
+          <a:bodyPr wrap="none" lIns="0" tIns="0" rIns="0" bIns="0" rtlCol="0" anchor="ctr">
+            <a:spAutoFit/>
+          </a:bodyPr>
+          <a:lstStyle/>
+          <a:p>
+            <a:pPr algn="ctr" indent="0" marL="0">
+              <a:buNone/>
+            </a:pPr>
+            <a:r>
+              <a:rPr lang="en-US" sz="950" dirty="0">
+                <a:solidFill>
+                  <a:srgbClr val="FFFFFF"/>
+                </a:solidFill>
+                <a:latin typeface="Oswald SemiBold" pitchFamily="34" charset="0"/>
+                <a:ea typeface="Oswald SemiBold" pitchFamily="34" charset="-122"/>
+                <a:cs typeface="Oswald SemiBold" pitchFamily="34" charset="-120"/>
+              </a:rPr>
+              <a:t>3</a:t>
+            </a:r>
+            <a:endParaRPr lang="en-US" sz="950" dirty="0"/>
+          </a:p>
+        </p:txBody>
+      </p:sp>
+      <p:sp>
+        <p:nvSpPr>
+          <p:cNvPr id="19" name="Text 15"/>
+          <p:cNvSpPr/>
+          <p:nvPr/>
+        </p:nvSpPr>
+        <p:spPr>
+          <a:xfrm>
+            <a:off x="685800" y="2454771"/>
+            <a:ext cx="2900363" cy="169664"/>
+          </a:xfrm>
+          <a:prstGeom prst="rect">
+            <a:avLst/>
+          </a:prstGeom>
+          <a:noFill/>
+          <a:ln/>
+        </p:spPr>
+        <p:txBody>
+          <a:bodyPr wrap="none" lIns="0" tIns="0" rIns="0" bIns="0" rtlCol="0" anchor="t">
             <a:spAutoFit/>
           </a:bodyPr>
           <a:lstStyle/>
           <a:p>
             <a:pPr algn="l" indent="0" marL="0">
-              <a:buNone/>
-            </a:pPr>
-            <a:r>
-              <a:rPr lang="en-US" sz="700" b="1" dirty="0">
-                <a:solidFill>
-                  <a:srgbClr val="B42318"/>
-                </a:solidFill>
-                <a:latin typeface="JetBrains Mono Bold" pitchFamily="34" charset="0"/>
-                <a:ea typeface="JetBrains Mono Bold" pitchFamily="34" charset="-122"/>
-                <a:cs typeface="JetBrains Mono Bold" pitchFamily="34" charset="-120"/>
-              </a:rPr>
-              <a:t>stage1_extraction/output/execution_trace.json</a:t>
-            </a:r>
-            <a:endParaRPr lang="en-US" sz="700" dirty="0"/>
-          </a:p>
-        </p:txBody>
-      </p:sp>
-      <p:sp>
-        <p:nvSpPr>
-          <p:cNvPr id="16" name="Shape 12"/>
-          <p:cNvSpPr/>
-          <p:nvPr/>
-        </p:nvSpPr>
-        <p:spPr>
-          <a:xfrm>
-            <a:off x="3071813" y="1071563"/>
-            <a:ext cx="5800725" cy="3571875"/>
+              <a:lnSpc>
+                <a:spcPct val="100000"/>
+              </a:lnSpc>
+              <a:buNone/>
+            </a:pPr>
+            <a:r>
+              <a:rPr lang="en-US" sz="950" b="1" dirty="0">
+                <a:solidFill>
+                  <a:srgbClr val="30343B"/>
+                </a:solidFill>
+                <a:latin typeface="Inter Bold" pitchFamily="34" charset="0"/>
+                <a:ea typeface="Inter Bold" pitchFamily="34" charset="-122"/>
+                <a:cs typeface="Inter Bold" pitchFamily="34" charset="-120"/>
+              </a:rPr>
+              <a:t>Diagnose earliest failed gate</a:t>
+            </a:r>
+            <a:endParaRPr lang="en-US" sz="950" dirty="0"/>
+          </a:p>
+        </p:txBody>
+      </p:sp>
+      <p:sp>
+        <p:nvSpPr>
+          <p:cNvPr id="20" name="Shape 16"/>
+          <p:cNvSpPr/>
+          <p:nvPr/>
+        </p:nvSpPr>
+        <p:spPr>
+          <a:xfrm>
+            <a:off x="271463" y="2832497"/>
+            <a:ext cx="3429000" cy="428625"/>
+          </a:xfrm>
+          <a:prstGeom prst="rect">
+            <a:avLst/>
+          </a:prstGeom>
+          <a:solidFill>
+            <a:srgbClr val="FFFFFF"/>
+          </a:solidFill>
+          <a:ln w="18288">
+            <a:solidFill>
+              <a:srgbClr val="111111"/>
+            </a:solidFill>
+            <a:prstDash val="solid"/>
+          </a:ln>
+        </p:spPr>
+      </p:sp>
+      <p:sp>
+        <p:nvSpPr>
+          <p:cNvPr id="21" name="Shape 17"/>
+          <p:cNvSpPr/>
+          <p:nvPr/>
+        </p:nvSpPr>
+        <p:spPr>
+          <a:xfrm>
+            <a:off x="385763" y="2918222"/>
+            <a:ext cx="214313" cy="214313"/>
+          </a:xfrm>
+          <a:prstGeom prst="rect">
+            <a:avLst/>
+          </a:prstGeom>
+          <a:solidFill>
+            <a:srgbClr val="111111"/>
+          </a:solidFill>
+          <a:ln/>
+        </p:spPr>
+      </p:sp>
+      <p:sp>
+        <p:nvSpPr>
+          <p:cNvPr id="22" name="Text 18"/>
+          <p:cNvSpPr/>
+          <p:nvPr/>
+        </p:nvSpPr>
+        <p:spPr>
+          <a:xfrm>
+            <a:off x="385763" y="2918222"/>
+            <a:ext cx="214313" cy="214313"/>
+          </a:xfrm>
+          <a:prstGeom prst="rect">
+            <a:avLst/>
+          </a:prstGeom>
+          <a:noFill/>
+          <a:ln/>
+        </p:spPr>
+        <p:txBody>
+          <a:bodyPr wrap="none" lIns="0" tIns="0" rIns="0" bIns="0" rtlCol="0" anchor="ctr">
+            <a:spAutoFit/>
+          </a:bodyPr>
+          <a:lstStyle/>
+          <a:p>
+            <a:pPr algn="ctr" indent="0" marL="0">
+              <a:buNone/>
+            </a:pPr>
+            <a:r>
+              <a:rPr lang="en-US" sz="950" dirty="0">
+                <a:solidFill>
+                  <a:srgbClr val="FFFFFF"/>
+                </a:solidFill>
+                <a:latin typeface="Oswald SemiBold" pitchFamily="34" charset="0"/>
+                <a:ea typeface="Oswald SemiBold" pitchFamily="34" charset="-122"/>
+                <a:cs typeface="Oswald SemiBold" pitchFamily="34" charset="-120"/>
+              </a:rPr>
+              <a:t>4</a:t>
+            </a:r>
+            <a:endParaRPr lang="en-US" sz="950" dirty="0"/>
+          </a:p>
+        </p:txBody>
+      </p:sp>
+      <p:sp>
+        <p:nvSpPr>
+          <p:cNvPr id="23" name="Text 19"/>
+          <p:cNvSpPr/>
+          <p:nvPr/>
+        </p:nvSpPr>
+        <p:spPr>
+          <a:xfrm>
+            <a:off x="685800" y="2940546"/>
+            <a:ext cx="2900363" cy="169664"/>
+          </a:xfrm>
+          <a:prstGeom prst="rect">
+            <a:avLst/>
+          </a:prstGeom>
+          <a:noFill/>
+          <a:ln/>
+        </p:spPr>
+        <p:txBody>
+          <a:bodyPr wrap="none" lIns="0" tIns="0" rIns="0" bIns="0" rtlCol="0" anchor="t">
+            <a:spAutoFit/>
+          </a:bodyPr>
+          <a:lstStyle/>
+          <a:p>
+            <a:pPr algn="l" indent="0" marL="0">
+              <a:lnSpc>
+                <a:spcPct val="100000"/>
+              </a:lnSpc>
+              <a:buNone/>
+            </a:pPr>
+            <a:r>
+              <a:rPr lang="en-US" sz="950" b="1" dirty="0">
+                <a:solidFill>
+                  <a:srgbClr val="30343B"/>
+                </a:solidFill>
+                <a:latin typeface="Inter Bold" pitchFamily="34" charset="0"/>
+                <a:ea typeface="Inter Bold" pitchFamily="34" charset="-122"/>
+                <a:cs typeface="Inter Bold" pitchFamily="34" charset="-120"/>
+              </a:rPr>
+              <a:t>Repair one owning layer</a:t>
+            </a:r>
+            <a:endParaRPr lang="en-US" sz="950" dirty="0"/>
+          </a:p>
+        </p:txBody>
+      </p:sp>
+      <p:sp>
+        <p:nvSpPr>
+          <p:cNvPr id="24" name="Shape 20"/>
+          <p:cNvSpPr/>
+          <p:nvPr/>
+        </p:nvSpPr>
+        <p:spPr>
+          <a:xfrm>
+            <a:off x="271463" y="3318272"/>
+            <a:ext cx="3429000" cy="428625"/>
+          </a:xfrm>
+          <a:prstGeom prst="rect">
+            <a:avLst/>
+          </a:prstGeom>
+          <a:solidFill>
+            <a:srgbClr val="FFFFFF"/>
+          </a:solidFill>
+          <a:ln w="18288">
+            <a:solidFill>
+              <a:srgbClr val="111111"/>
+            </a:solidFill>
+            <a:prstDash val="solid"/>
+          </a:ln>
+        </p:spPr>
+      </p:sp>
+      <p:sp>
+        <p:nvSpPr>
+          <p:cNvPr id="25" name="Shape 21"/>
+          <p:cNvSpPr/>
+          <p:nvPr/>
+        </p:nvSpPr>
+        <p:spPr>
+          <a:xfrm>
+            <a:off x="385763" y="3403997"/>
+            <a:ext cx="214313" cy="214313"/>
+          </a:xfrm>
+          <a:prstGeom prst="rect">
+            <a:avLst/>
+          </a:prstGeom>
+          <a:solidFill>
+            <a:srgbClr val="111111"/>
+          </a:solidFill>
+          <a:ln/>
+        </p:spPr>
+      </p:sp>
+      <p:sp>
+        <p:nvSpPr>
+          <p:cNvPr id="26" name="Text 22"/>
+          <p:cNvSpPr/>
+          <p:nvPr/>
+        </p:nvSpPr>
+        <p:spPr>
+          <a:xfrm>
+            <a:off x="385763" y="3403997"/>
+            <a:ext cx="214313" cy="214313"/>
+          </a:xfrm>
+          <a:prstGeom prst="rect">
+            <a:avLst/>
+          </a:prstGeom>
+          <a:noFill/>
+          <a:ln/>
+        </p:spPr>
+        <p:txBody>
+          <a:bodyPr wrap="none" lIns="0" tIns="0" rIns="0" bIns="0" rtlCol="0" anchor="ctr">
+            <a:spAutoFit/>
+          </a:bodyPr>
+          <a:lstStyle/>
+          <a:p>
+            <a:pPr algn="ctr" indent="0" marL="0">
+              <a:buNone/>
+            </a:pPr>
+            <a:r>
+              <a:rPr lang="en-US" sz="950" dirty="0">
+                <a:solidFill>
+                  <a:srgbClr val="FFFFFF"/>
+                </a:solidFill>
+                <a:latin typeface="Oswald SemiBold" pitchFamily="34" charset="0"/>
+                <a:ea typeface="Oswald SemiBold" pitchFamily="34" charset="-122"/>
+                <a:cs typeface="Oswald SemiBold" pitchFamily="34" charset="-120"/>
+              </a:rPr>
+              <a:t>5</a:t>
+            </a:r>
+            <a:endParaRPr lang="en-US" sz="950" dirty="0"/>
+          </a:p>
+        </p:txBody>
+      </p:sp>
+      <p:sp>
+        <p:nvSpPr>
+          <p:cNvPr id="27" name="Text 23"/>
+          <p:cNvSpPr/>
+          <p:nvPr/>
+        </p:nvSpPr>
+        <p:spPr>
+          <a:xfrm>
+            <a:off x="685800" y="3426321"/>
+            <a:ext cx="2900363" cy="169664"/>
+          </a:xfrm>
+          <a:prstGeom prst="rect">
+            <a:avLst/>
+          </a:prstGeom>
+          <a:noFill/>
+          <a:ln/>
+        </p:spPr>
+        <p:txBody>
+          <a:bodyPr wrap="none" lIns="0" tIns="0" rIns="0" bIns="0" rtlCol="0" anchor="t">
+            <a:spAutoFit/>
+          </a:bodyPr>
+          <a:lstStyle/>
+          <a:p>
+            <a:pPr algn="l" indent="0" marL="0">
+              <a:lnSpc>
+                <a:spcPct val="100000"/>
+              </a:lnSpc>
+              <a:buNone/>
+            </a:pPr>
+            <a:r>
+              <a:rPr lang="en-US" sz="950" b="1" dirty="0">
+                <a:solidFill>
+                  <a:srgbClr val="30343B"/>
+                </a:solidFill>
+                <a:latin typeface="Inter Bold" pitchFamily="34" charset="0"/>
+                <a:ea typeface="Inter Bold" pitchFamily="34" charset="-122"/>
+                <a:cs typeface="Inter Bold" pitchFamily="34" charset="-120"/>
+              </a:rPr>
+              <a:t>Review independently</a:t>
+            </a:r>
+            <a:endParaRPr lang="en-US" sz="950" dirty="0"/>
+          </a:p>
+        </p:txBody>
+      </p:sp>
+      <p:sp>
+        <p:nvSpPr>
+          <p:cNvPr id="28" name="Text 24"/>
+          <p:cNvSpPr/>
+          <p:nvPr/>
+        </p:nvSpPr>
+        <p:spPr>
+          <a:xfrm>
+            <a:off x="3929063" y="942975"/>
+            <a:ext cx="4943475" cy="275034"/>
+          </a:xfrm>
+          <a:prstGeom prst="rect">
+            <a:avLst/>
+          </a:prstGeom>
+          <a:noFill/>
+          <a:ln/>
+        </p:spPr>
+        <p:txBody>
+          <a:bodyPr wrap="square" lIns="0" tIns="0" rIns="0" bIns="0" rtlCol="0" anchor="t">
+            <a:spAutoFit/>
+          </a:bodyPr>
+          <a:lstStyle/>
+          <a:p>
+            <a:pPr algn="l" indent="0" marL="0">
+              <a:buNone/>
+            </a:pPr>
+            <a:r>
+              <a:rPr lang="en-US" sz="1400" dirty="0">
+                <a:solidFill>
+                  <a:srgbClr val="111111"/>
+                </a:solidFill>
+                <a:latin typeface="Oswald SemiBold" pitchFamily="34" charset="0"/>
+                <a:ea typeface="Oswald SemiBold" pitchFamily="34" charset="-122"/>
+                <a:cs typeface="Oswald SemiBold" pitchFamily="34" charset="-120"/>
+              </a:rPr>
+              <a:t>ACTUAL RECOVERY ENTRY POINT</a:t>
+            </a:r>
+            <a:endParaRPr lang="en-US" sz="1400" dirty="0"/>
+          </a:p>
+        </p:txBody>
+      </p:sp>
+      <p:sp>
+        <p:nvSpPr>
+          <p:cNvPr id="29" name="Shape 25"/>
+          <p:cNvSpPr/>
+          <p:nvPr/>
+        </p:nvSpPr>
+        <p:spPr>
+          <a:xfrm>
+            <a:off x="3929063" y="1332309"/>
+            <a:ext cx="4943475" cy="3282553"/>
           </a:xfrm>
           <a:prstGeom prst="rect">
             <a:avLst/>
@@ -16045,14 +16282,14 @@
       </p:sp>
       <p:sp>
         <p:nvSpPr>
-          <p:cNvPr id="17" name="Shape 13"/>
-          <p:cNvSpPr/>
-          <p:nvPr/>
-        </p:nvSpPr>
-        <p:spPr>
-          <a:xfrm>
-            <a:off x="3071813" y="1071563"/>
-            <a:ext cx="5800725" cy="328613"/>
+          <p:cNvPr id="30" name="Shape 26"/>
+          <p:cNvSpPr/>
+          <p:nvPr/>
+        </p:nvSpPr>
+        <p:spPr>
+          <a:xfrm>
+            <a:off x="3929063" y="1332309"/>
+            <a:ext cx="4943475" cy="300038"/>
           </a:xfrm>
           <a:prstGeom prst="rect">
             <a:avLst/>
@@ -16065,14 +16302,14 @@
       </p:sp>
       <p:sp>
         <p:nvSpPr>
-          <p:cNvPr id="18" name="Shape 14"/>
-          <p:cNvSpPr/>
-          <p:nvPr/>
-        </p:nvSpPr>
-        <p:spPr>
-          <a:xfrm>
-            <a:off x="3071813" y="1385888"/>
-            <a:ext cx="5800725" cy="14288"/>
+          <p:cNvPr id="31" name="Shape 27"/>
+          <p:cNvSpPr/>
+          <p:nvPr/>
+        </p:nvSpPr>
+        <p:spPr>
+          <a:xfrm>
+            <a:off x="3929063" y="1618059"/>
+            <a:ext cx="4943475" cy="14288"/>
           </a:xfrm>
           <a:prstGeom prst="rect">
             <a:avLst/>
@@ -16085,63 +16322,23 @@
       </p:sp>
       <p:sp>
         <p:nvSpPr>
-          <p:cNvPr id="19" name="Shape 15"/>
-          <p:cNvSpPr/>
-          <p:nvPr/>
-        </p:nvSpPr>
-        <p:spPr>
-          <a:xfrm>
-            <a:off x="3729038" y="1078706"/>
-            <a:ext cx="1414463" cy="314325"/>
-          </a:xfrm>
-          <a:prstGeom prst="rect">
-            <a:avLst/>
-          </a:prstGeom>
-          <a:solidFill>
-            <a:srgbClr val="1E1E1E"/>
-          </a:solidFill>
-          <a:ln/>
-        </p:spPr>
-      </p:sp>
-      <p:sp>
-        <p:nvSpPr>
-          <p:cNvPr id="20" name="Shape 16"/>
-          <p:cNvSpPr/>
-          <p:nvPr/>
-        </p:nvSpPr>
-        <p:spPr>
-          <a:xfrm>
-            <a:off x="3729038" y="1078706"/>
-            <a:ext cx="1414463" cy="28575"/>
-          </a:xfrm>
-          <a:prstGeom prst="rect">
-            <a:avLst/>
-          </a:prstGeom>
-          <a:solidFill>
-            <a:srgbClr val="0055FF"/>
-          </a:solidFill>
-          <a:ln/>
-        </p:spPr>
-      </p:sp>
-      <p:sp>
-        <p:nvSpPr>
-          <p:cNvPr id="21" name="Text 17"/>
-          <p:cNvSpPr/>
-          <p:nvPr/>
-        </p:nvSpPr>
-        <p:spPr>
-          <a:xfrm>
-            <a:off x="3729038" y="1078706"/>
-            <a:ext cx="1414463" cy="314325"/>
-          </a:xfrm>
-          <a:prstGeom prst="rect">
-            <a:avLst/>
-          </a:prstGeom>
-          <a:noFill/>
-          <a:ln/>
-        </p:spPr>
-        <p:txBody>
-          <a:bodyPr wrap="square" lIns="204089" tIns="102108" rIns="204089" bIns="0" rtlCol="0" anchor="t">
+          <p:cNvPr id="32" name="Text 28"/>
+          <p:cNvSpPr/>
+          <p:nvPr/>
+        </p:nvSpPr>
+        <p:spPr>
+          <a:xfrm>
+            <a:off x="7943850" y="1426964"/>
+            <a:ext cx="828675" cy="110728"/>
+          </a:xfrm>
+          <a:prstGeom prst="rect">
+            <a:avLst/>
+          </a:prstGeom>
+          <a:noFill/>
+          <a:ln/>
+        </p:spPr>
+        <p:txBody>
+          <a:bodyPr wrap="none" lIns="0" tIns="0" rIns="0" bIns="0" rtlCol="0" anchor="t">
             <a:spAutoFit/>
           </a:bodyPr>
           <a:lstStyle/>
@@ -16150,30 +16347,30 @@
               <a:buNone/>
             </a:pPr>
             <a:r>
-              <a:rPr lang="en-US" sz="750" b="1" dirty="0">
-                <a:solidFill>
-                  <a:srgbClr val="D4D4D4"/>
+              <a:rPr lang="en-US" sz="650" b="1" dirty="0">
+                <a:solidFill>
+                  <a:srgbClr val="9CDCFE"/>
                 </a:solidFill>
                 <a:latin typeface="Inter SemiBold" pitchFamily="34" charset="0"/>
                 <a:ea typeface="Inter SemiBold" pitchFamily="34" charset="-122"/>
                 <a:cs typeface="Inter SemiBold" pitchFamily="34" charset="-120"/>
               </a:rPr>
-              <a:t>execution_trace.json</a:t>
-            </a:r>
-            <a:endParaRPr lang="en-US" sz="750" dirty="0"/>
-          </a:p>
-        </p:txBody>
-      </p:sp>
-      <p:sp>
-        <p:nvSpPr>
-          <p:cNvPr id="22" name="Text 18"/>
-          <p:cNvSpPr/>
-          <p:nvPr/>
-        </p:nvSpPr>
-        <p:spPr>
-          <a:xfrm>
-            <a:off x="7929563" y="1184077"/>
-            <a:ext cx="842963" cy="103584"/>
+              <a:t>GITHUB COPILOT</a:t>
+            </a:r>
+            <a:endParaRPr lang="en-US" sz="650" dirty="0"/>
+          </a:p>
+        </p:txBody>
+      </p:sp>
+      <p:sp>
+        <p:nvSpPr>
+          <p:cNvPr id="33" name="Text 29"/>
+          <p:cNvSpPr/>
+          <p:nvPr/>
+        </p:nvSpPr>
+        <p:spPr>
+          <a:xfrm>
+            <a:off x="4129088" y="1803797"/>
+            <a:ext cx="4543425" cy="139303"/>
           </a:xfrm>
           <a:prstGeom prst="rect">
             <a:avLst/>
@@ -16188,1122 +16385,252 @@
           <a:lstStyle/>
           <a:p>
             <a:pPr algn="l" indent="0" marL="0">
-              <a:buNone/>
-            </a:pPr>
-            <a:r>
-              <a:rPr lang="en-US" sz="600" b="1" spc="1" kern="0" dirty="0">
-                <a:solidFill>
-                  <a:srgbClr val="9CDCFE"/>
+              <a:lnSpc>
+                <a:spcPct val="120000"/>
+              </a:lnSpc>
+              <a:buNone/>
+            </a:pPr>
+            <a:r>
+              <a:rPr lang="en-US" sz="650" b="1" spc="1" kern="0" dirty="0">
+                <a:solidFill>
+                  <a:srgbClr val="569CD6"/>
                 </a:solidFill>
                 <a:latin typeface="Inter Bold" pitchFamily="34" charset="0"/>
                 <a:ea typeface="Inter Bold" pitchFamily="34" charset="-122"/>
                 <a:cs typeface="Inter Bold" pitchFamily="34" charset="-120"/>
               </a:rPr>
-              <a:t>TRACE ARTIFACT</a:t>
-            </a:r>
-            <a:endParaRPr lang="en-US" sz="600" dirty="0"/>
-          </a:p>
-        </p:txBody>
-      </p:sp>
-      <p:sp>
-        <p:nvSpPr>
-          <p:cNvPr id="23" name="Text 19"/>
-          <p:cNvSpPr/>
-          <p:nvPr/>
-        </p:nvSpPr>
-        <p:spPr>
-          <a:xfrm>
-            <a:off x="3200400" y="1514475"/>
-            <a:ext cx="242888" cy="207169"/>
-          </a:xfrm>
-          <a:prstGeom prst="rect">
-            <a:avLst/>
-          </a:prstGeom>
-          <a:noFill/>
-          <a:ln/>
-        </p:spPr>
-        <p:txBody>
-          <a:bodyPr wrap="square" lIns="0" tIns="0" rIns="76581" bIns="0" rtlCol="0" anchor="t">
+              <a:t>USER</a:t>
+            </a:r>
+            <a:endParaRPr lang="en-US" sz="650" dirty="0"/>
+          </a:p>
+        </p:txBody>
+      </p:sp>
+      <p:sp>
+        <p:nvSpPr>
+          <p:cNvPr id="34" name="Shape 30"/>
+          <p:cNvSpPr/>
+          <p:nvPr/>
+        </p:nvSpPr>
+        <p:spPr>
+          <a:xfrm>
+            <a:off x="4129088" y="2000250"/>
+            <a:ext cx="4543425" cy="1457325"/>
+          </a:xfrm>
+          <a:prstGeom prst="rect">
+            <a:avLst/>
+          </a:prstGeom>
+          <a:solidFill>
+            <a:srgbClr val="2D2D2D"/>
+          </a:solidFill>
+          <a:ln w="18288">
+            <a:solidFill>
+              <a:srgbClr val="444444"/>
+            </a:solidFill>
+            <a:prstDash val="solid"/>
+          </a:ln>
+        </p:spPr>
+      </p:sp>
+      <p:sp>
+        <p:nvSpPr>
+          <p:cNvPr id="35" name="Text 31"/>
+          <p:cNvSpPr/>
+          <p:nvPr/>
+        </p:nvSpPr>
+        <p:spPr>
+          <a:xfrm>
+            <a:off x="4129088" y="2000250"/>
+            <a:ext cx="4543425" cy="1457325"/>
+          </a:xfrm>
+          <a:prstGeom prst="rect">
+            <a:avLst/>
+          </a:prstGeom>
+          <a:noFill/>
+          <a:ln/>
+        </p:spPr>
+        <p:txBody>
+          <a:bodyPr wrap="square" lIns="170053" tIns="136017" rIns="170053" bIns="136017" rtlCol="0" anchor="t">
             <a:spAutoFit/>
           </a:bodyPr>
           <a:lstStyle/>
           <a:p>
             <a:pPr algn="l" indent="0" marL="0">
               <a:lnSpc>
-                <a:spcPct val="92000"/>
+                <a:spcPct val="120000"/>
               </a:lnSpc>
               <a:buNone/>
             </a:pPr>
             <a:r>
-              <a:rPr lang="en-US" sz="550" dirty="0">
-                <a:solidFill>
-                  <a:srgbClr val="707070"/>
-                </a:solidFill>
-                <a:latin typeface="Consolas" pitchFamily="34" charset="0"/>
-                <a:ea typeface="Consolas" pitchFamily="34" charset="-122"/>
-                <a:cs typeface="Consolas" pitchFamily="34" charset="-120"/>
-              </a:rPr>
-              <a:t>1</a:t>
-            </a:r>
-            <a:endParaRPr lang="en-US" sz="550" dirty="0"/>
-          </a:p>
-        </p:txBody>
-      </p:sp>
-      <p:sp>
-        <p:nvSpPr>
-          <p:cNvPr id="24" name="Text 20"/>
-          <p:cNvSpPr/>
-          <p:nvPr/>
-        </p:nvSpPr>
-        <p:spPr>
-          <a:xfrm>
-            <a:off x="3443288" y="1560575"/>
-            <a:ext cx="5300663" cy="114970"/>
-          </a:xfrm>
-          <a:prstGeom prst="rect">
-            <a:avLst/>
-          </a:prstGeom>
-          <a:noFill/>
-          <a:ln/>
-        </p:spPr>
-        <p:txBody>
-          <a:bodyPr wrap="none" lIns="110617" tIns="0" rIns="0" bIns="0" rtlCol="0" anchor="t">
-            <a:spAutoFit/>
-          </a:bodyPr>
-          <a:lstStyle/>
-          <a:p>
-            <a:pPr algn="l" indent="0" marL="0">
-              <a:lnSpc>
-                <a:spcPct val="92000"/>
-              </a:lnSpc>
-              <a:buNone/>
-            </a:pPr>
-            <a:r>
-              <a:rPr lang="en-US" sz="750" dirty="0">
+              <a:rPr lang="en-US" sz="800" b="1" dirty="0">
+                <a:solidFill>
+                  <a:srgbClr val="CE9178"/>
+                </a:solidFill>
+                <a:latin typeface="JetBrains Mono Bold" pitchFamily="34" charset="0"/>
+                <a:ea typeface="JetBrains Mono Bold" pitchFamily="34" charset="-122"/>
+                <a:cs typeface="JetBrains Mono Bold" pitchFamily="34" charset="-120"/>
+              </a:rPr>
+              <a:t>/analyze-failure artifacts/evidence/runs/&lt;run-</a:t>
+            </a:r>
+            <a:r>
+              <a:rPr lang="en-US" sz="800" b="1" dirty="0">
+                <a:solidFill>
+                  <a:srgbClr val="CE9178"/>
+                </a:solidFill>
+                <a:latin typeface="JetBrains Mono Bold" pitchFamily="34" charset="0"/>
+                <a:ea typeface="JetBrains Mono Bold" pitchFamily="34" charset="-122"/>
+                <a:cs typeface="JetBrains Mono Bold" pitchFamily="34" charset="-120"/>
+              </a:rPr>
+              <a:t>id&gt;/evidence.json</a:t>
+            </a:r>
+            <a:r>
+              <a:rPr lang="en-US" sz="850" dirty="0">
                 <a:solidFill>
                   <a:srgbClr val="D4D4D4"/>
                 </a:solidFill>
-                <a:latin typeface="Consolas" pitchFamily="34" charset="0"/>
-                <a:ea typeface="Consolas" pitchFamily="34" charset="-122"/>
-                <a:cs typeface="Consolas" pitchFamily="34" charset="-120"/>
-              </a:rPr>
-              <a:t>{</a:t>
-            </a:r>
-            <a:endParaRPr lang="en-US" sz="750" dirty="0"/>
-          </a:p>
-        </p:txBody>
-      </p:sp>
-      <p:sp>
-        <p:nvSpPr>
-          <p:cNvPr id="25" name="Text 21"/>
-          <p:cNvSpPr/>
-          <p:nvPr/>
-        </p:nvSpPr>
-        <p:spPr>
-          <a:xfrm>
-            <a:off x="3200400" y="1728788"/>
-            <a:ext cx="242888" cy="207169"/>
-          </a:xfrm>
-          <a:prstGeom prst="rect">
-            <a:avLst/>
-          </a:prstGeom>
-          <a:noFill/>
-          <a:ln/>
-        </p:spPr>
-        <p:txBody>
-          <a:bodyPr wrap="square" lIns="0" tIns="0" rIns="76581" bIns="0" rtlCol="0" anchor="t">
-            <a:spAutoFit/>
-          </a:bodyPr>
-          <a:lstStyle/>
-          <a:p>
-            <a:pPr algn="l" indent="0" marL="0">
-              <a:lnSpc>
-                <a:spcPct val="92000"/>
-              </a:lnSpc>
-              <a:buNone/>
-            </a:pPr>
-            <a:r>
-              <a:rPr lang="en-US" sz="550" dirty="0">
-                <a:solidFill>
-                  <a:srgbClr val="707070"/>
-                </a:solidFill>
-                <a:latin typeface="Consolas" pitchFamily="34" charset="0"/>
-                <a:ea typeface="Consolas" pitchFamily="34" charset="-122"/>
-                <a:cs typeface="Consolas" pitchFamily="34" charset="-120"/>
-              </a:rPr>
-              <a:t>2</a:t>
-            </a:r>
-            <a:endParaRPr lang="en-US" sz="550" dirty="0"/>
-          </a:p>
-        </p:txBody>
-      </p:sp>
-      <p:sp>
-        <p:nvSpPr>
-          <p:cNvPr id="26" name="Text 22"/>
-          <p:cNvSpPr/>
-          <p:nvPr/>
-        </p:nvSpPr>
-        <p:spPr>
-          <a:xfrm>
-            <a:off x="3443288" y="1774887"/>
-            <a:ext cx="5300663" cy="114970"/>
-          </a:xfrm>
-          <a:prstGeom prst="rect">
-            <a:avLst/>
-          </a:prstGeom>
-          <a:noFill/>
-          <a:ln/>
-        </p:spPr>
-        <p:txBody>
-          <a:bodyPr wrap="none" lIns="323215" tIns="0" rIns="0" bIns="0" rtlCol="0" anchor="t">
-            <a:spAutoFit/>
-          </a:bodyPr>
-          <a:lstStyle/>
-          <a:p>
-            <a:pPr algn="l" indent="0" marL="0">
-              <a:lnSpc>
-                <a:spcPct val="92000"/>
-              </a:lnSpc>
-              <a:buNone/>
-            </a:pPr>
-            <a:r>
-              <a:rPr lang="en-US" sz="750" dirty="0">
-                <a:solidFill>
-                  <a:srgbClr val="9CDCFE"/>
-                </a:solidFill>
-                <a:latin typeface="Consolas" pitchFamily="34" charset="0"/>
-                <a:ea typeface="Consolas" pitchFamily="34" charset="-122"/>
-                <a:cs typeface="Consolas" pitchFamily="34" charset="-120"/>
-              </a:rPr>
-              <a:t>"step_id"</a:t>
-            </a:r>
-            <a:r>
-              <a:rPr lang="en-US" sz="750" dirty="0">
+                <a:latin typeface="JetBrains Mono" pitchFamily="34" charset="0"/>
+                <a:ea typeface="JetBrains Mono" pitchFamily="34" charset="-122"/>
+                <a:cs typeface="JetBrains Mono" pitchFamily="34" charset="-120"/>
+              </a:rPr>
+              <a:t>
+</a:t>
+            </a:r>
+            <a:r>
+              <a:rPr lang="en-US" sz="850" dirty="0">
                 <a:solidFill>
                   <a:srgbClr val="D4D4D4"/>
                 </a:solidFill>
-                <a:latin typeface="Consolas" pitchFamily="34" charset="0"/>
-                <a:ea typeface="Consolas" pitchFamily="34" charset="-122"/>
-                <a:cs typeface="Consolas" pitchFamily="34" charset="-120"/>
-              </a:rPr>
-              <a:t>: </a:t>
-            </a:r>
-            <a:r>
-              <a:rPr lang="en-US" sz="750" dirty="0">
-                <a:solidFill>
-                  <a:srgbClr val="CE9178"/>
-                </a:solidFill>
-                <a:latin typeface="Consolas" pitchFamily="34" charset="0"/>
-                <a:ea typeface="Consolas" pitchFamily="34" charset="-122"/>
-                <a:cs typeface="Consolas" pitchFamily="34" charset="-120"/>
-              </a:rPr>
-              <a:t>"S04"</a:t>
-            </a:r>
-            <a:r>
-              <a:rPr lang="en-US" sz="750" dirty="0">
+                <a:latin typeface="JetBrains Mono" pitchFamily="34" charset="0"/>
+                <a:ea typeface="JetBrains Mono" pitchFamily="34" charset="-122"/>
+                <a:cs typeface="JetBrains Mono" pitchFamily="34" charset="-120"/>
+              </a:rPr>
+              <a:t> Read the latest run state and failed gate.</a:t>
+            </a:r>
+            <a:r>
+              <a:rPr lang="en-US" sz="850" dirty="0">
                 <a:solidFill>
                   <a:srgbClr val="D4D4D4"/>
                 </a:solidFill>
-                <a:latin typeface="Consolas" pitchFamily="34" charset="0"/>
-                <a:ea typeface="Consolas" pitchFamily="34" charset="-122"/>
-                <a:cs typeface="Consolas" pitchFamily="34" charset="-120"/>
-              </a:rPr>
-              <a:t>,</a:t>
-            </a:r>
-            <a:endParaRPr lang="en-US" sz="750" dirty="0"/>
-          </a:p>
-        </p:txBody>
-      </p:sp>
-      <p:sp>
-        <p:nvSpPr>
-          <p:cNvPr id="27" name="Text 23"/>
-          <p:cNvSpPr/>
-          <p:nvPr/>
-        </p:nvSpPr>
-        <p:spPr>
-          <a:xfrm>
-            <a:off x="3200400" y="1943100"/>
-            <a:ext cx="242888" cy="207169"/>
-          </a:xfrm>
-          <a:prstGeom prst="rect">
-            <a:avLst/>
-          </a:prstGeom>
-          <a:noFill/>
-          <a:ln/>
-        </p:spPr>
-        <p:txBody>
-          <a:bodyPr wrap="square" lIns="0" tIns="0" rIns="76581" bIns="0" rtlCol="0" anchor="t">
-            <a:spAutoFit/>
-          </a:bodyPr>
-          <a:lstStyle/>
-          <a:p>
-            <a:pPr algn="l" indent="0" marL="0">
-              <a:lnSpc>
-                <a:spcPct val="92000"/>
-              </a:lnSpc>
-              <a:buNone/>
-            </a:pPr>
-            <a:r>
-              <a:rPr lang="en-US" sz="550" dirty="0">
-                <a:solidFill>
-                  <a:srgbClr val="707070"/>
-                </a:solidFill>
-                <a:latin typeface="Consolas" pitchFamily="34" charset="0"/>
-                <a:ea typeface="Consolas" pitchFamily="34" charset="-122"/>
-                <a:cs typeface="Consolas" pitchFamily="34" charset="-120"/>
-              </a:rPr>
-              <a:t>3</a:t>
-            </a:r>
-            <a:endParaRPr lang="en-US" sz="550" dirty="0"/>
-          </a:p>
-        </p:txBody>
-      </p:sp>
-      <p:sp>
-        <p:nvSpPr>
-          <p:cNvPr id="28" name="Text 24"/>
-          <p:cNvSpPr/>
-          <p:nvPr/>
-        </p:nvSpPr>
-        <p:spPr>
-          <a:xfrm>
-            <a:off x="3443288" y="1989200"/>
-            <a:ext cx="5300663" cy="114970"/>
-          </a:xfrm>
-          <a:prstGeom prst="rect">
-            <a:avLst/>
-          </a:prstGeom>
-          <a:noFill/>
-          <a:ln/>
-        </p:spPr>
-        <p:txBody>
-          <a:bodyPr wrap="none" lIns="323215" tIns="0" rIns="0" bIns="0" rtlCol="0" anchor="t">
-            <a:spAutoFit/>
-          </a:bodyPr>
-          <a:lstStyle/>
-          <a:p>
-            <a:pPr algn="l" indent="0" marL="0">
-              <a:lnSpc>
-                <a:spcPct val="92000"/>
-              </a:lnSpc>
-              <a:buNone/>
-            </a:pPr>
-            <a:r>
-              <a:rPr lang="en-US" sz="750" dirty="0">
-                <a:solidFill>
-                  <a:srgbClr val="9CDCFE"/>
-                </a:solidFill>
-                <a:latin typeface="Consolas" pitchFamily="34" charset="0"/>
-                <a:ea typeface="Consolas" pitchFamily="34" charset="-122"/>
-                <a:cs typeface="Consolas" pitchFamily="34" charset="-120"/>
-              </a:rPr>
-              <a:t>"command"</a:t>
-            </a:r>
-            <a:r>
-              <a:rPr lang="en-US" sz="750" dirty="0">
+                <a:latin typeface="JetBrains Mono" pitchFamily="34" charset="0"/>
+                <a:ea typeface="JetBrains Mono" pitchFamily="34" charset="-122"/>
+                <a:cs typeface="JetBrains Mono" pitchFamily="34" charset="-120"/>
+              </a:rPr>
+              <a:t>
+</a:t>
+            </a:r>
+            <a:r>
+              <a:rPr lang="en-US" sz="850" dirty="0">
                 <a:solidFill>
                   <a:srgbClr val="D4D4D4"/>
                 </a:solidFill>
-                <a:latin typeface="Consolas" pitchFamily="34" charset="0"/>
-                <a:ea typeface="Consolas" pitchFamily="34" charset="-122"/>
-                <a:cs typeface="Consolas" pitchFamily="34" charset="-120"/>
-              </a:rPr>
-              <a:t>: </a:t>
-            </a:r>
-            <a:r>
-              <a:rPr lang="en-US" sz="750" dirty="0">
-                <a:solidFill>
-                  <a:srgbClr val="CE9178"/>
-                </a:solidFill>
-                <a:latin typeface="Consolas" pitchFamily="34" charset="0"/>
-                <a:ea typeface="Consolas" pitchFamily="34" charset="-122"/>
-                <a:cs typeface="Consolas" pitchFamily="34" charset="-120"/>
-              </a:rPr>
-              <a:t>"PROC LOGISTIC"</a:t>
-            </a:r>
-            <a:r>
-              <a:rPr lang="en-US" sz="750" dirty="0">
+                <a:latin typeface="JetBrains Mono" pitchFamily="34" charset="0"/>
+                <a:ea typeface="JetBrains Mono" pitchFamily="34" charset="-122"/>
+                <a:cs typeface="JetBrains Mono" pitchFamily="34" charset="-120"/>
+              </a:rPr>
+              <a:t>If evidence is raw: invoke only </a:t>
+            </a:r>
+            <a:r>
+              <a:rPr lang="en-US" sz="800" b="1" dirty="0">
                 <a:solidFill>
                   <a:srgbClr val="D4D4D4"/>
                 </a:solidFill>
-                <a:latin typeface="Consolas" pitchFamily="34" charset="0"/>
-                <a:ea typeface="Consolas" pitchFamily="34" charset="-122"/>
-                <a:cs typeface="Consolas" pitchFamily="34" charset="-120"/>
-              </a:rPr>
-              <a:t>,</a:t>
-            </a:r>
-            <a:endParaRPr lang="en-US" sz="750" dirty="0"/>
-          </a:p>
-        </p:txBody>
-      </p:sp>
-      <p:sp>
-        <p:nvSpPr>
-          <p:cNvPr id="29" name="Text 25"/>
-          <p:cNvSpPr/>
-          <p:nvPr/>
-        </p:nvSpPr>
-        <p:spPr>
-          <a:xfrm>
-            <a:off x="3200400" y="2157413"/>
-            <a:ext cx="242888" cy="207169"/>
-          </a:xfrm>
-          <a:prstGeom prst="rect">
-            <a:avLst/>
-          </a:prstGeom>
-          <a:noFill/>
-          <a:ln/>
-        </p:spPr>
-        <p:txBody>
-          <a:bodyPr wrap="square" lIns="0" tIns="0" rIns="76581" bIns="0" rtlCol="0" anchor="t">
-            <a:spAutoFit/>
-          </a:bodyPr>
-          <a:lstStyle/>
-          <a:p>
-            <a:pPr algn="l" indent="0" marL="0">
-              <a:lnSpc>
-                <a:spcPct val="92000"/>
-              </a:lnSpc>
-              <a:buNone/>
-            </a:pPr>
-            <a:r>
-              <a:rPr lang="en-US" sz="550" dirty="0">
-                <a:solidFill>
-                  <a:srgbClr val="707070"/>
-                </a:solidFill>
-                <a:latin typeface="Consolas" pitchFamily="34" charset="0"/>
-                <a:ea typeface="Consolas" pitchFamily="34" charset="-122"/>
-                <a:cs typeface="Consolas" pitchFamily="34" charset="-120"/>
-              </a:rPr>
-              <a:t>4</a:t>
-            </a:r>
-            <a:endParaRPr lang="en-US" sz="550" dirty="0"/>
-          </a:p>
-        </p:txBody>
-      </p:sp>
-      <p:sp>
-        <p:nvSpPr>
-          <p:cNvPr id="30" name="Text 26"/>
-          <p:cNvSpPr/>
-          <p:nvPr/>
-        </p:nvSpPr>
-        <p:spPr>
-          <a:xfrm>
-            <a:off x="3443288" y="2203512"/>
-            <a:ext cx="5300663" cy="114970"/>
-          </a:xfrm>
-          <a:prstGeom prst="rect">
-            <a:avLst/>
-          </a:prstGeom>
-          <a:noFill/>
-          <a:ln/>
-        </p:spPr>
-        <p:txBody>
-          <a:bodyPr wrap="none" lIns="323215" tIns="0" rIns="0" bIns="0" rtlCol="0" anchor="t">
-            <a:spAutoFit/>
-          </a:bodyPr>
-          <a:lstStyle/>
-          <a:p>
-            <a:pPr algn="l" indent="0" marL="0">
-              <a:lnSpc>
-                <a:spcPct val="92000"/>
-              </a:lnSpc>
-              <a:buNone/>
-            </a:pPr>
-            <a:r>
-              <a:rPr lang="en-US" sz="750" dirty="0">
-                <a:solidFill>
-                  <a:srgbClr val="9CDCFE"/>
-                </a:solidFill>
-                <a:latin typeface="Consolas" pitchFamily="34" charset="0"/>
-                <a:ea typeface="Consolas" pitchFamily="34" charset="-122"/>
-                <a:cs typeface="Consolas" pitchFamily="34" charset="-120"/>
-              </a:rPr>
-              <a:t>"inputs"</a:t>
-            </a:r>
-            <a:r>
-              <a:rPr lang="en-US" sz="750" dirty="0">
+                <a:latin typeface="JetBrains Mono Bold" pitchFamily="34" charset="0"/>
+                <a:ea typeface="JetBrains Mono Bold" pitchFamily="34" charset="-122"/>
+                <a:cs typeface="JetBrains Mono Bold" pitchFamily="34" charset="-120"/>
+              </a:rPr>
+              <a:t>ingest</a:t>
+            </a:r>
+            <a:r>
+              <a:rPr lang="en-US" sz="850" dirty="0">
                 <a:solidFill>
                   <a:srgbClr val="D4D4D4"/>
                 </a:solidFill>
-                <a:latin typeface="Consolas" pitchFamily="34" charset="0"/>
-                <a:ea typeface="Consolas" pitchFamily="34" charset="-122"/>
-                <a:cs typeface="Consolas" pitchFamily="34" charset="-120"/>
-              </a:rPr>
-              <a:t>: [</a:t>
-            </a:r>
-            <a:r>
-              <a:rPr lang="en-US" sz="750" dirty="0">
-                <a:solidFill>
-                  <a:srgbClr val="CE9178"/>
-                </a:solidFill>
-                <a:latin typeface="Consolas" pitchFamily="34" charset="0"/>
-                <a:ea typeface="Consolas" pitchFamily="34" charset="-122"/>
-                <a:cs typeface="Consolas" pitchFamily="34" charset="-120"/>
-              </a:rPr>
-              <a:t>"WORK.TRAIN_DATA"</a:t>
-            </a:r>
-            <a:r>
-              <a:rPr lang="en-US" sz="750" dirty="0">
+                <a:latin typeface="JetBrains Mono" pitchFamily="34" charset="0"/>
+                <a:ea typeface="JetBrains Mono" pitchFamily="34" charset="-122"/>
+                <a:cs typeface="JetBrains Mono" pitchFamily="34" charset="-120"/>
+              </a:rPr>
+              <a:t>, then stop.</a:t>
+            </a:r>
+            <a:r>
+              <a:rPr lang="en-US" sz="850" dirty="0">
                 <a:solidFill>
                   <a:srgbClr val="D4D4D4"/>
                 </a:solidFill>
-                <a:latin typeface="Consolas" pitchFamily="34" charset="0"/>
-                <a:ea typeface="Consolas" pitchFamily="34" charset="-122"/>
-                <a:cs typeface="Consolas" pitchFamily="34" charset="-120"/>
-              </a:rPr>
-              <a:t>],</a:t>
-            </a:r>
-            <a:endParaRPr lang="en-US" sz="750" dirty="0"/>
-          </a:p>
-        </p:txBody>
-      </p:sp>
-      <p:sp>
-        <p:nvSpPr>
-          <p:cNvPr id="31" name="Text 27"/>
-          <p:cNvSpPr/>
-          <p:nvPr/>
-        </p:nvSpPr>
-        <p:spPr>
-          <a:xfrm>
-            <a:off x="3200400" y="2371725"/>
-            <a:ext cx="242888" cy="207169"/>
-          </a:xfrm>
-          <a:prstGeom prst="rect">
-            <a:avLst/>
-          </a:prstGeom>
-          <a:noFill/>
-          <a:ln/>
-        </p:spPr>
-        <p:txBody>
-          <a:bodyPr wrap="square" lIns="0" tIns="0" rIns="76581" bIns="0" rtlCol="0" anchor="t">
-            <a:spAutoFit/>
-          </a:bodyPr>
-          <a:lstStyle/>
-          <a:p>
-            <a:pPr algn="l" indent="0" marL="0">
-              <a:lnSpc>
-                <a:spcPct val="92000"/>
-              </a:lnSpc>
-              <a:buNone/>
-            </a:pPr>
-            <a:r>
-              <a:rPr lang="en-US" sz="550" dirty="0">
-                <a:solidFill>
-                  <a:srgbClr val="707070"/>
-                </a:solidFill>
-                <a:latin typeface="Consolas" pitchFamily="34" charset="0"/>
-                <a:ea typeface="Consolas" pitchFamily="34" charset="-122"/>
-                <a:cs typeface="Consolas" pitchFamily="34" charset="-120"/>
-              </a:rPr>
-              <a:t>5</a:t>
-            </a:r>
-            <a:endParaRPr lang="en-US" sz="550" dirty="0"/>
-          </a:p>
-        </p:txBody>
-      </p:sp>
-      <p:sp>
-        <p:nvSpPr>
-          <p:cNvPr id="32" name="Text 28"/>
-          <p:cNvSpPr/>
-          <p:nvPr/>
-        </p:nvSpPr>
-        <p:spPr>
-          <a:xfrm>
-            <a:off x="3443288" y="2417825"/>
-            <a:ext cx="5300663" cy="114970"/>
-          </a:xfrm>
-          <a:prstGeom prst="rect">
-            <a:avLst/>
-          </a:prstGeom>
-          <a:noFill/>
-          <a:ln/>
-        </p:spPr>
-        <p:txBody>
-          <a:bodyPr wrap="none" lIns="323215" tIns="0" rIns="0" bIns="0" rtlCol="0" anchor="t">
-            <a:spAutoFit/>
-          </a:bodyPr>
-          <a:lstStyle/>
-          <a:p>
-            <a:pPr algn="l" indent="0" marL="0">
-              <a:lnSpc>
-                <a:spcPct val="92000"/>
-              </a:lnSpc>
-              <a:buNone/>
-            </a:pPr>
-            <a:r>
-              <a:rPr lang="en-US" sz="750" dirty="0">
-                <a:solidFill>
-                  <a:srgbClr val="9CDCFE"/>
-                </a:solidFill>
-                <a:latin typeface="Consolas" pitchFamily="34" charset="0"/>
-                <a:ea typeface="Consolas" pitchFamily="34" charset="-122"/>
-                <a:cs typeface="Consolas" pitchFamily="34" charset="-120"/>
-              </a:rPr>
-              <a:t>"outputs"</a:t>
-            </a:r>
-            <a:r>
-              <a:rPr lang="en-US" sz="750" dirty="0">
+                <a:latin typeface="JetBrains Mono" pitchFamily="34" charset="0"/>
+                <a:ea typeface="JetBrains Mono" pitchFamily="34" charset="-122"/>
+                <a:cs typeface="JetBrains Mono" pitchFamily="34" charset="-120"/>
+              </a:rPr>
+              <a:t>
+</a:t>
+            </a:r>
+            <a:r>
+              <a:rPr lang="en-US" sz="850" dirty="0">
                 <a:solidFill>
                   <a:srgbClr val="D4D4D4"/>
                 </a:solidFill>
-                <a:latin typeface="Consolas" pitchFamily="34" charset="0"/>
-                <a:ea typeface="Consolas" pitchFamily="34" charset="-122"/>
-                <a:cs typeface="Consolas" pitchFamily="34" charset="-120"/>
-              </a:rPr>
-              <a:t>: {</a:t>
-            </a:r>
-            <a:endParaRPr lang="en-US" sz="750" dirty="0"/>
-          </a:p>
-        </p:txBody>
-      </p:sp>
-      <p:sp>
-        <p:nvSpPr>
-          <p:cNvPr id="33" name="Text 29"/>
-          <p:cNvSpPr/>
-          <p:nvPr/>
-        </p:nvSpPr>
-        <p:spPr>
-          <a:xfrm>
-            <a:off x="3200400" y="2586038"/>
-            <a:ext cx="242888" cy="207169"/>
-          </a:xfrm>
-          <a:prstGeom prst="rect">
-            <a:avLst/>
-          </a:prstGeom>
-          <a:noFill/>
-          <a:ln/>
-        </p:spPr>
-        <p:txBody>
-          <a:bodyPr wrap="square" lIns="0" tIns="0" rIns="76581" bIns="0" rtlCol="0" anchor="t">
-            <a:spAutoFit/>
-          </a:bodyPr>
-          <a:lstStyle/>
-          <a:p>
-            <a:pPr algn="l" indent="0" marL="0">
-              <a:lnSpc>
-                <a:spcPct val="92000"/>
-              </a:lnSpc>
-              <a:buNone/>
-            </a:pPr>
-            <a:r>
-              <a:rPr lang="en-US" sz="550" dirty="0">
-                <a:solidFill>
-                  <a:srgbClr val="707070"/>
-                </a:solidFill>
-                <a:latin typeface="Consolas" pitchFamily="34" charset="0"/>
-                <a:ea typeface="Consolas" pitchFamily="34" charset="-122"/>
-                <a:cs typeface="Consolas" pitchFamily="34" charset="-120"/>
-              </a:rPr>
-              <a:t>6</a:t>
-            </a:r>
-            <a:endParaRPr lang="en-US" sz="550" dirty="0"/>
-          </a:p>
-        </p:txBody>
-      </p:sp>
-      <p:sp>
-        <p:nvSpPr>
-          <p:cNvPr id="34" name="Text 30"/>
-          <p:cNvSpPr/>
-          <p:nvPr/>
-        </p:nvSpPr>
-        <p:spPr>
-          <a:xfrm>
-            <a:off x="3443288" y="2632137"/>
-            <a:ext cx="5300663" cy="114970"/>
-          </a:xfrm>
-          <a:prstGeom prst="rect">
-            <a:avLst/>
-          </a:prstGeom>
-          <a:noFill/>
-          <a:ln/>
-        </p:spPr>
-        <p:txBody>
-          <a:bodyPr wrap="none" lIns="544322" tIns="0" rIns="0" bIns="0" rtlCol="0" anchor="t">
-            <a:spAutoFit/>
-          </a:bodyPr>
-          <a:lstStyle/>
-          <a:p>
-            <a:pPr algn="l" indent="0" marL="0">
-              <a:lnSpc>
-                <a:spcPct val="92000"/>
-              </a:lnSpc>
-              <a:buNone/>
-            </a:pPr>
-            <a:r>
-              <a:rPr lang="en-US" sz="750" dirty="0">
-                <a:solidFill>
-                  <a:srgbClr val="9CDCFE"/>
-                </a:solidFill>
-                <a:latin typeface="Consolas" pitchFamily="34" charset="0"/>
-                <a:ea typeface="Consolas" pitchFamily="34" charset="-122"/>
-                <a:cs typeface="Consolas" pitchFamily="34" charset="-120"/>
-              </a:rPr>
-              <a:t>"model_store"</a:t>
-            </a:r>
-            <a:r>
-              <a:rPr lang="en-US" sz="750" dirty="0">
+                <a:latin typeface="JetBrains Mono" pitchFamily="34" charset="0"/>
+                <a:ea typeface="JetBrains Mono" pitchFamily="34" charset="-122"/>
+                <a:cs typeface="JetBrains Mono" pitchFamily="34" charset="-120"/>
+              </a:rPr>
+              <a:t>If normalized: invoke only </a:t>
+            </a:r>
+            <a:r>
+              <a:rPr lang="en-US" sz="800" b="1" dirty="0">
                 <a:solidFill>
                   <a:srgbClr val="D4D4D4"/>
                 </a:solidFill>
-                <a:latin typeface="Consolas" pitchFamily="34" charset="0"/>
-                <a:ea typeface="Consolas" pitchFamily="34" charset="-122"/>
-                <a:cs typeface="Consolas" pitchFamily="34" charset="-120"/>
-              </a:rPr>
-              <a:t>: </a:t>
-            </a:r>
-            <a:r>
-              <a:rPr lang="en-US" sz="750" dirty="0">
-                <a:solidFill>
-                  <a:srgbClr val="CE9178"/>
-                </a:solidFill>
-                <a:latin typeface="Consolas" pitchFamily="34" charset="0"/>
-                <a:ea typeface="Consolas" pitchFamily="34" charset="-122"/>
-                <a:cs typeface="Consolas" pitchFamily="34" charset="-120"/>
-              </a:rPr>
-              <a:t>"WORK.LC_LOGIT_01"</a:t>
-            </a:r>
-            <a:r>
-              <a:rPr lang="en-US" sz="750" dirty="0">
+                <a:latin typeface="JetBrains Mono Bold" pitchFamily="34" charset="0"/>
+                <a:ea typeface="JetBrains Mono Bold" pitchFamily="34" charset="-122"/>
+                <a:cs typeface="JetBrains Mono Bold" pitchFamily="34" charset="-120"/>
+              </a:rPr>
+              <a:t>diagnose</a:t>
+            </a:r>
+            <a:r>
+              <a:rPr lang="en-US" sz="850" dirty="0">
                 <a:solidFill>
                   <a:srgbClr val="D4D4D4"/>
                 </a:solidFill>
-                <a:latin typeface="Consolas" pitchFamily="34" charset="0"/>
-                <a:ea typeface="Consolas" pitchFamily="34" charset="-122"/>
-                <a:cs typeface="Consolas" pitchFamily="34" charset="-120"/>
-              </a:rPr>
-              <a:t>,</a:t>
-            </a:r>
-            <a:endParaRPr lang="en-US" sz="750" dirty="0"/>
-          </a:p>
-        </p:txBody>
-      </p:sp>
-      <p:sp>
-        <p:nvSpPr>
-          <p:cNvPr id="35" name="Text 31"/>
-          <p:cNvSpPr/>
-          <p:nvPr/>
-        </p:nvSpPr>
-        <p:spPr>
-          <a:xfrm>
-            <a:off x="3200400" y="2800350"/>
-            <a:ext cx="242888" cy="207169"/>
-          </a:xfrm>
-          <a:prstGeom prst="rect">
-            <a:avLst/>
-          </a:prstGeom>
-          <a:noFill/>
-          <a:ln/>
-        </p:spPr>
-        <p:txBody>
-          <a:bodyPr wrap="square" lIns="0" tIns="0" rIns="76581" bIns="0" rtlCol="0" anchor="t">
-            <a:spAutoFit/>
-          </a:bodyPr>
-          <a:lstStyle/>
-          <a:p>
-            <a:pPr algn="l" indent="0" marL="0">
-              <a:lnSpc>
-                <a:spcPct val="92000"/>
-              </a:lnSpc>
-              <a:buNone/>
-            </a:pPr>
-            <a:r>
-              <a:rPr lang="en-US" sz="550" dirty="0">
-                <a:solidFill>
-                  <a:srgbClr val="707070"/>
-                </a:solidFill>
-                <a:latin typeface="Consolas" pitchFamily="34" charset="0"/>
-                <a:ea typeface="Consolas" pitchFamily="34" charset="-122"/>
-                <a:cs typeface="Consolas" pitchFamily="34" charset="-120"/>
-              </a:rPr>
-              <a:t>7</a:t>
-            </a:r>
-            <a:endParaRPr lang="en-US" sz="550" dirty="0"/>
-          </a:p>
-        </p:txBody>
-      </p:sp>
-      <p:sp>
-        <p:nvSpPr>
-          <p:cNvPr id="36" name="Text 32"/>
-          <p:cNvSpPr/>
-          <p:nvPr/>
-        </p:nvSpPr>
-        <p:spPr>
-          <a:xfrm>
-            <a:off x="3443288" y="2846450"/>
-            <a:ext cx="5300663" cy="114970"/>
-          </a:xfrm>
-          <a:prstGeom prst="rect">
-            <a:avLst/>
-          </a:prstGeom>
-          <a:noFill/>
-          <a:ln/>
-        </p:spPr>
-        <p:txBody>
-          <a:bodyPr wrap="none" lIns="544322" tIns="0" rIns="0" bIns="0" rtlCol="0" anchor="t">
-            <a:spAutoFit/>
-          </a:bodyPr>
-          <a:lstStyle/>
-          <a:p>
-            <a:pPr algn="l" indent="0" marL="0">
-              <a:lnSpc>
-                <a:spcPct val="92000"/>
-              </a:lnSpc>
-              <a:buNone/>
-            </a:pPr>
-            <a:r>
-              <a:rPr lang="en-US" sz="750" dirty="0">
-                <a:solidFill>
-                  <a:srgbClr val="9CDCFE"/>
-                </a:solidFill>
-                <a:latin typeface="Consolas" pitchFamily="34" charset="0"/>
-                <a:ea typeface="Consolas" pitchFamily="34" charset="-122"/>
-                <a:cs typeface="Consolas" pitchFamily="34" charset="-120"/>
-              </a:rPr>
-              <a:t>"target"</a:t>
-            </a:r>
-            <a:r>
-              <a:rPr lang="en-US" sz="750" dirty="0">
+                <a:latin typeface="JetBrains Mono" pitchFamily="34" charset="0"/>
+                <a:ea typeface="JetBrains Mono" pitchFamily="34" charset="-122"/>
+                <a:cs typeface="JetBrains Mono" pitchFamily="34" charset="-120"/>
+              </a:rPr>
+              <a:t>, then stop for approval.</a:t>
+            </a:r>
+            <a:r>
+              <a:rPr lang="en-US" sz="850" dirty="0">
                 <a:solidFill>
                   <a:srgbClr val="D4D4D4"/>
                 </a:solidFill>
-                <a:latin typeface="Consolas" pitchFamily="34" charset="0"/>
-                <a:ea typeface="Consolas" pitchFamily="34" charset="-122"/>
-                <a:cs typeface="Consolas" pitchFamily="34" charset="-120"/>
-              </a:rPr>
-              <a:t>: </a:t>
-            </a:r>
-            <a:r>
-              <a:rPr lang="en-US" sz="750" dirty="0">
-                <a:solidFill>
-                  <a:srgbClr val="CE9178"/>
-                </a:solidFill>
-                <a:latin typeface="Consolas" pitchFamily="34" charset="0"/>
-                <a:ea typeface="Consolas" pitchFamily="34" charset="-122"/>
-                <a:cs typeface="Consolas" pitchFamily="34" charset="-120"/>
-              </a:rPr>
-              <a:t>"Default (Event='1')"</a:t>
-            </a:r>
-            <a:endParaRPr lang="en-US" sz="750" dirty="0"/>
-          </a:p>
-        </p:txBody>
-      </p:sp>
-      <p:sp>
-        <p:nvSpPr>
-          <p:cNvPr id="37" name="Text 33"/>
-          <p:cNvSpPr/>
-          <p:nvPr/>
-        </p:nvSpPr>
-        <p:spPr>
-          <a:xfrm>
-            <a:off x="3200400" y="3014663"/>
-            <a:ext cx="242888" cy="207169"/>
-          </a:xfrm>
-          <a:prstGeom prst="rect">
-            <a:avLst/>
-          </a:prstGeom>
-          <a:noFill/>
-          <a:ln/>
-        </p:spPr>
-        <p:txBody>
-          <a:bodyPr wrap="square" lIns="0" tIns="0" rIns="76581" bIns="0" rtlCol="0" anchor="t">
-            <a:spAutoFit/>
-          </a:bodyPr>
-          <a:lstStyle/>
-          <a:p>
-            <a:pPr algn="l" indent="0" marL="0">
-              <a:lnSpc>
-                <a:spcPct val="92000"/>
-              </a:lnSpc>
-              <a:buNone/>
-            </a:pPr>
-            <a:r>
-              <a:rPr lang="en-US" sz="550" dirty="0">
-                <a:solidFill>
-                  <a:srgbClr val="707070"/>
-                </a:solidFill>
-                <a:latin typeface="Consolas" pitchFamily="34" charset="0"/>
-                <a:ea typeface="Consolas" pitchFamily="34" charset="-122"/>
-                <a:cs typeface="Consolas" pitchFamily="34" charset="-120"/>
-              </a:rPr>
-              <a:t>8</a:t>
-            </a:r>
-            <a:endParaRPr lang="en-US" sz="550" dirty="0"/>
-          </a:p>
-        </p:txBody>
-      </p:sp>
-      <p:sp>
-        <p:nvSpPr>
-          <p:cNvPr id="38" name="Text 34"/>
-          <p:cNvSpPr/>
-          <p:nvPr/>
-        </p:nvSpPr>
-        <p:spPr>
-          <a:xfrm>
-            <a:off x="3443288" y="3060762"/>
-            <a:ext cx="5300663" cy="114970"/>
-          </a:xfrm>
-          <a:prstGeom prst="rect">
-            <a:avLst/>
-          </a:prstGeom>
-          <a:noFill/>
-          <a:ln/>
-        </p:spPr>
-        <p:txBody>
-          <a:bodyPr wrap="none" lIns="323215" tIns="0" rIns="0" bIns="0" rtlCol="0" anchor="t">
-            <a:spAutoFit/>
-          </a:bodyPr>
-          <a:lstStyle/>
-          <a:p>
-            <a:pPr algn="l" indent="0" marL="0">
-              <a:lnSpc>
-                <a:spcPct val="92000"/>
-              </a:lnSpc>
-              <a:buNone/>
-            </a:pPr>
-            <a:r>
-              <a:rPr lang="en-US" sz="750" dirty="0">
+                <a:latin typeface="JetBrains Mono" pitchFamily="34" charset="0"/>
+                <a:ea typeface="JetBrains Mono" pitchFamily="34" charset="-122"/>
+                <a:cs typeface="JetBrains Mono" pitchFamily="34" charset="-120"/>
+              </a:rPr>
+              <a:t>
+</a:t>
+            </a:r>
+            <a:r>
+              <a:rPr lang="en-US" sz="850" dirty="0">
                 <a:solidFill>
                   <a:srgbClr val="D4D4D4"/>
                 </a:solidFill>
-                <a:latin typeface="Consolas" pitchFamily="34" charset="0"/>
-                <a:ea typeface="Consolas" pitchFamily="34" charset="-122"/>
-                <a:cs typeface="Consolas" pitchFamily="34" charset="-120"/>
-              </a:rPr>
-              <a:t>},</a:t>
-            </a:r>
-            <a:endParaRPr lang="en-US" sz="750" dirty="0"/>
-          </a:p>
-        </p:txBody>
-      </p:sp>
-      <p:sp>
-        <p:nvSpPr>
-          <p:cNvPr id="39" name="Text 35"/>
-          <p:cNvSpPr/>
-          <p:nvPr/>
-        </p:nvSpPr>
-        <p:spPr>
-          <a:xfrm>
-            <a:off x="3200400" y="3228975"/>
-            <a:ext cx="242888" cy="207169"/>
-          </a:xfrm>
-          <a:prstGeom prst="rect">
-            <a:avLst/>
-          </a:prstGeom>
-          <a:noFill/>
-          <a:ln/>
-        </p:spPr>
-        <p:txBody>
-          <a:bodyPr wrap="square" lIns="0" tIns="0" rIns="76581" bIns="0" rtlCol="0" anchor="t">
-            <a:spAutoFit/>
-          </a:bodyPr>
-          <a:lstStyle/>
-          <a:p>
-            <a:pPr algn="l" indent="0" marL="0">
-              <a:lnSpc>
-                <a:spcPct val="92000"/>
-              </a:lnSpc>
-              <a:buNone/>
-            </a:pPr>
-            <a:r>
-              <a:rPr lang="en-US" sz="550" dirty="0">
-                <a:solidFill>
-                  <a:srgbClr val="707070"/>
-                </a:solidFill>
-                <a:latin typeface="Consolas" pitchFamily="34" charset="0"/>
-                <a:ea typeface="Consolas" pitchFamily="34" charset="-122"/>
-                <a:cs typeface="Consolas" pitchFamily="34" charset="-120"/>
-              </a:rPr>
-              <a:t>9</a:t>
-            </a:r>
-            <a:endParaRPr lang="en-US" sz="550" dirty="0"/>
-          </a:p>
-        </p:txBody>
-      </p:sp>
-      <p:sp>
-        <p:nvSpPr>
-          <p:cNvPr id="40" name="Text 36"/>
-          <p:cNvSpPr/>
-          <p:nvPr/>
-        </p:nvSpPr>
-        <p:spPr>
-          <a:xfrm>
-            <a:off x="3443288" y="3275075"/>
-            <a:ext cx="5300663" cy="114970"/>
-          </a:xfrm>
-          <a:prstGeom prst="rect">
-            <a:avLst/>
-          </a:prstGeom>
-          <a:noFill/>
-          <a:ln/>
-        </p:spPr>
-        <p:txBody>
-          <a:bodyPr wrap="none" lIns="323215" tIns="0" rIns="0" bIns="0" rtlCol="0" anchor="t">
-            <a:spAutoFit/>
-          </a:bodyPr>
-          <a:lstStyle/>
-          <a:p>
-            <a:pPr algn="l" indent="0" marL="0">
-              <a:lnSpc>
-                <a:spcPct val="92000"/>
-              </a:lnSpc>
-              <a:buNone/>
-            </a:pPr>
-            <a:r>
-              <a:rPr lang="en-US" sz="750" dirty="0">
-                <a:solidFill>
-                  <a:srgbClr val="9CDCFE"/>
-                </a:solidFill>
-                <a:latin typeface="Consolas" pitchFamily="34" charset="0"/>
-                <a:ea typeface="Consolas" pitchFamily="34" charset="-122"/>
-                <a:cs typeface="Consolas" pitchFamily="34" charset="-120"/>
-              </a:rPr>
-              <a:t>"log_evidence"</a:t>
-            </a:r>
-            <a:r>
-              <a:rPr lang="en-US" sz="750" dirty="0">
-                <a:solidFill>
-                  <a:srgbClr val="D4D4D4"/>
-                </a:solidFill>
-                <a:latin typeface="Consolas" pitchFamily="34" charset="0"/>
-                <a:ea typeface="Consolas" pitchFamily="34" charset="-122"/>
-                <a:cs typeface="Consolas" pitchFamily="34" charset="-120"/>
-              </a:rPr>
-              <a:t>: {</a:t>
-            </a:r>
-            <a:endParaRPr lang="en-US" sz="750" dirty="0"/>
-          </a:p>
-        </p:txBody>
-      </p:sp>
-      <p:sp>
-        <p:nvSpPr>
-          <p:cNvPr id="41" name="Text 37"/>
-          <p:cNvSpPr/>
-          <p:nvPr/>
-        </p:nvSpPr>
-        <p:spPr>
-          <a:xfrm>
-            <a:off x="3200400" y="3443288"/>
-            <a:ext cx="242888" cy="207169"/>
-          </a:xfrm>
-          <a:prstGeom prst="rect">
-            <a:avLst/>
-          </a:prstGeom>
-          <a:noFill/>
-          <a:ln/>
-        </p:spPr>
-        <p:txBody>
-          <a:bodyPr wrap="square" lIns="0" tIns="0" rIns="76581" bIns="0" rtlCol="0" anchor="t">
-            <a:spAutoFit/>
-          </a:bodyPr>
-          <a:lstStyle/>
-          <a:p>
-            <a:pPr algn="l" indent="0" marL="0">
-              <a:lnSpc>
-                <a:spcPct val="92000"/>
-              </a:lnSpc>
-              <a:buNone/>
-            </a:pPr>
-            <a:r>
-              <a:rPr lang="en-US" sz="550" dirty="0">
-                <a:solidFill>
-                  <a:srgbClr val="707070"/>
-                </a:solidFill>
-                <a:latin typeface="Consolas" pitchFamily="34" charset="0"/>
-                <a:ea typeface="Consolas" pitchFamily="34" charset="-122"/>
-                <a:cs typeface="Consolas" pitchFamily="34" charset="-120"/>
-              </a:rPr>
-              <a:t>10</a:t>
-            </a:r>
-            <a:endParaRPr lang="en-US" sz="550" dirty="0"/>
-          </a:p>
-        </p:txBody>
-      </p:sp>
-      <p:sp>
-        <p:nvSpPr>
-          <p:cNvPr id="42" name="Text 38"/>
-          <p:cNvSpPr/>
-          <p:nvPr/>
-        </p:nvSpPr>
-        <p:spPr>
-          <a:xfrm>
-            <a:off x="3443288" y="3489387"/>
-            <a:ext cx="5300663" cy="114970"/>
-          </a:xfrm>
-          <a:prstGeom prst="rect">
-            <a:avLst/>
-          </a:prstGeom>
-          <a:noFill/>
-          <a:ln/>
-        </p:spPr>
-        <p:txBody>
-          <a:bodyPr wrap="none" lIns="544322" tIns="0" rIns="0" bIns="0" rtlCol="0" anchor="t">
-            <a:spAutoFit/>
-          </a:bodyPr>
-          <a:lstStyle/>
-          <a:p>
-            <a:pPr algn="l" indent="0" marL="0">
-              <a:lnSpc>
-                <a:spcPct val="92000"/>
-              </a:lnSpc>
-              <a:buNone/>
-            </a:pPr>
-            <a:r>
-              <a:rPr lang="en-US" sz="750" dirty="0">
-                <a:solidFill>
-                  <a:srgbClr val="9CDCFE"/>
-                </a:solidFill>
-                <a:latin typeface="Consolas" pitchFamily="34" charset="0"/>
-                <a:ea typeface="Consolas" pitchFamily="34" charset="-122"/>
-                <a:cs typeface="Consolas" pitchFamily="34" charset="-120"/>
-              </a:rPr>
-              <a:t>"observations_read"</a:t>
-            </a:r>
-            <a:r>
-              <a:rPr lang="en-US" sz="750" dirty="0">
-                <a:solidFill>
-                  <a:srgbClr val="D4D4D4"/>
-                </a:solidFill>
-                <a:latin typeface="Consolas" pitchFamily="34" charset="0"/>
-                <a:ea typeface="Consolas" pitchFamily="34" charset="-122"/>
-                <a:cs typeface="Consolas" pitchFamily="34" charset="-120"/>
-              </a:rPr>
-              <a:t>: </a:t>
-            </a:r>
-            <a:r>
-              <a:rPr lang="en-US" sz="750" dirty="0">
-                <a:solidFill>
-                  <a:srgbClr val="CE9178"/>
-                </a:solidFill>
-                <a:latin typeface="Consolas" pitchFamily="34" charset="0"/>
-                <a:ea typeface="Consolas" pitchFamily="34" charset="-122"/>
-                <a:cs typeface="Consolas" pitchFamily="34" charset="-120"/>
-              </a:rPr>
-              <a:t>"1265975"</a:t>
-            </a:r>
-            <a:r>
-              <a:rPr lang="en-US" sz="750" dirty="0">
-                <a:solidFill>
-                  <a:srgbClr val="D4D4D4"/>
-                </a:solidFill>
-                <a:latin typeface="Consolas" pitchFamily="34" charset="0"/>
-                <a:ea typeface="Consolas" pitchFamily="34" charset="-122"/>
-                <a:cs typeface="Consolas" pitchFamily="34" charset="-120"/>
-              </a:rPr>
-              <a:t>,</a:t>
-            </a:r>
-            <a:endParaRPr lang="en-US" sz="750" dirty="0"/>
-          </a:p>
-        </p:txBody>
-      </p:sp>
-      <p:sp>
-        <p:nvSpPr>
-          <p:cNvPr id="43" name="Shape 39"/>
-          <p:cNvSpPr/>
-          <p:nvPr/>
-        </p:nvSpPr>
-        <p:spPr>
-          <a:xfrm>
-            <a:off x="3200400" y="3671888"/>
-            <a:ext cx="5543550" cy="214313"/>
+                <a:latin typeface="JetBrains Mono" pitchFamily="34" charset="0"/>
+                <a:ea typeface="JetBrains Mono" pitchFamily="34" charset="-122"/>
+                <a:cs typeface="JetBrains Mono" pitchFamily="34" charset="-120"/>
+              </a:rPr>
+              <a:t>Never repair or review in this message.</a:t>
+            </a:r>
+            <a:endParaRPr lang="en-US" sz="850" dirty="0"/>
+          </a:p>
+        </p:txBody>
+      </p:sp>
+      <p:sp>
+        <p:nvSpPr>
+          <p:cNvPr id="36" name="Shape 32"/>
+          <p:cNvSpPr/>
+          <p:nvPr/>
+        </p:nvSpPr>
+        <p:spPr>
+          <a:xfrm rot="-60000">
+            <a:off x="542925" y="4632052"/>
+            <a:ext cx="8601075" cy="454298"/>
           </a:xfrm>
           <a:prstGeom prst="rect">
             <a:avLst/>
@@ -17311,7 +16638,7 @@
           <a:solidFill>
             <a:srgbClr val="FFDF00"/>
           </a:solidFill>
-          <a:ln w="18288">
+          <a:ln w="27432">
             <a:solidFill>
               <a:srgbClr val="111111"/>
             </a:solidFill>
@@ -17321,409 +16648,122 @@
       </p:sp>
       <p:sp>
         <p:nvSpPr>
-          <p:cNvPr id="44" name="Text 40"/>
-          <p:cNvSpPr/>
-          <p:nvPr/>
-        </p:nvSpPr>
-        <p:spPr>
-          <a:xfrm>
-            <a:off x="3200400" y="3671888"/>
-            <a:ext cx="242888" cy="214313"/>
-          </a:xfrm>
-          <a:prstGeom prst="rect">
-            <a:avLst/>
-          </a:prstGeom>
-          <a:noFill/>
-          <a:ln/>
-        </p:spPr>
-        <p:txBody>
-          <a:bodyPr wrap="square" lIns="0" tIns="0" rIns="76581" bIns="0" rtlCol="0" anchor="t">
-            <a:spAutoFit/>
-          </a:bodyPr>
-          <a:lstStyle/>
-          <a:p>
-            <a:pPr algn="l" indent="0" marL="0">
+          <p:cNvPr id="37" name="Text 33"/>
+          <p:cNvSpPr/>
+          <p:nvPr/>
+        </p:nvSpPr>
+        <p:spPr>
+          <a:xfrm rot="-60000">
+            <a:off x="543762" y="4669543"/>
+            <a:ext cx="8599401" cy="379315"/>
+          </a:xfrm>
+          <a:prstGeom prst="rect">
+            <a:avLst/>
+          </a:prstGeom>
+          <a:noFill/>
+          <a:ln/>
+        </p:spPr>
+        <p:txBody>
+          <a:bodyPr wrap="square" lIns="204089" tIns="119126" rIns="204089" bIns="119126" rtlCol="0" anchor="t">
+            <a:spAutoFit/>
+          </a:bodyPr>
+          <a:lstStyle/>
+          <a:p>
+            <a:pPr algn="ctr" indent="0" marL="0">
               <a:lnSpc>
                 <a:spcPct val="92000"/>
               </a:lnSpc>
               <a:buNone/>
             </a:pPr>
             <a:r>
-              <a:rPr lang="en-US" sz="550" dirty="0">
+              <a:rPr lang="en-US" sz="1200" b="1" dirty="0">
                 <a:solidFill>
                   <a:srgbClr val="111111"/>
                 </a:solidFill>
-                <a:latin typeface="Consolas" pitchFamily="34" charset="0"/>
-                <a:ea typeface="Consolas" pitchFamily="34" charset="-122"/>
-                <a:cs typeface="Consolas" pitchFamily="34" charset="-120"/>
-              </a:rPr>
-              <a:t>11</a:t>
-            </a:r>
-            <a:endParaRPr lang="en-US" sz="550" dirty="0"/>
-          </a:p>
-        </p:txBody>
-      </p:sp>
-      <p:sp>
-        <p:nvSpPr>
-          <p:cNvPr id="45" name="Text 41"/>
-          <p:cNvSpPr/>
-          <p:nvPr/>
-        </p:nvSpPr>
-        <p:spPr>
-          <a:xfrm>
-            <a:off x="3443288" y="3721559"/>
-            <a:ext cx="5300663" cy="114970"/>
-          </a:xfrm>
-          <a:prstGeom prst="rect">
-            <a:avLst/>
-          </a:prstGeom>
-          <a:noFill/>
-          <a:ln/>
-        </p:spPr>
-        <p:txBody>
-          <a:bodyPr wrap="none" lIns="544322" tIns="0" rIns="0" bIns="0" rtlCol="0" anchor="t">
-            <a:spAutoFit/>
-          </a:bodyPr>
-          <a:lstStyle/>
-          <a:p>
-            <a:pPr algn="l" indent="0" marL="0">
-              <a:lnSpc>
-                <a:spcPct val="92000"/>
-              </a:lnSpc>
-              <a:buNone/>
-            </a:pPr>
-            <a:r>
-              <a:rPr lang="en-US" sz="700" b="1" dirty="0">
+                <a:latin typeface="Kalam Bold" pitchFamily="34" charset="0"/>
+                <a:ea typeface="Kalam Bold" pitchFamily="34" charset="-122"/>
+                <a:cs typeface="Kalam Bold" pitchFamily="34" charset="-120"/>
+              </a:rPr>
+              <a:t>Business meaning:</a:t>
+            </a:r>
+            <a:r>
+              <a:rPr lang="en-US" sz="1250" dirty="0">
                 <a:solidFill>
                   <a:srgbClr val="111111"/>
                 </a:solidFill>
-                <a:latin typeface="Consolas" pitchFamily="34" charset="0"/>
-                <a:ea typeface="Consolas" pitchFamily="34" charset="-122"/>
-                <a:cs typeface="Consolas" pitchFamily="34" charset="-120"/>
-              </a:rPr>
-              <a:t>"convergence"</a:t>
-            </a:r>
-            <a:r>
-              <a:rPr lang="en-US" sz="750" dirty="0">
-                <a:solidFill>
-                  <a:srgbClr val="D4D4D4"/>
-                </a:solidFill>
-                <a:latin typeface="Consolas" pitchFamily="34" charset="0"/>
-                <a:ea typeface="Consolas" pitchFamily="34" charset="-122"/>
-                <a:cs typeface="Consolas" pitchFamily="34" charset="-120"/>
-              </a:rPr>
-              <a:t>: </a:t>
-            </a:r>
-            <a:r>
-              <a:rPr lang="en-US" sz="700" b="1" dirty="0">
+                <a:latin typeface="Kalam Bold" pitchFamily="34" charset="0"/>
+                <a:ea typeface="Kalam Bold" pitchFamily="34" charset="-122"/>
+                <a:cs typeface="Kalam Bold" pitchFamily="34" charset="-120"/>
+              </a:rPr>
+              <a:t> Fai</a:t>
+            </a:r>
+            <a:r>
+              <a:rPr lang="en-US" sz="1250" dirty="0">
                 <a:solidFill>
                   <a:srgbClr val="111111"/>
                 </a:solidFill>
-                <a:latin typeface="Consolas" pitchFamily="34" charset="0"/>
-                <a:ea typeface="Consolas" pitchFamily="34" charset="-122"/>
-                <a:cs typeface="Consolas" pitchFamily="34" charset="-120"/>
-              </a:rPr>
-              <a:t>"Satisfied"</a:t>
-            </a:r>
-            <a:endParaRPr lang="en-US" sz="700" dirty="0"/>
-          </a:p>
-        </p:txBody>
-      </p:sp>
-      <p:sp>
-        <p:nvSpPr>
-          <p:cNvPr id="46" name="Text 42"/>
-          <p:cNvSpPr/>
-          <p:nvPr/>
-        </p:nvSpPr>
-        <p:spPr>
-          <a:xfrm>
-            <a:off x="3200400" y="3900488"/>
-            <a:ext cx="242888" cy="207169"/>
-          </a:xfrm>
-          <a:prstGeom prst="rect">
-            <a:avLst/>
-          </a:prstGeom>
-          <a:noFill/>
-          <a:ln/>
-        </p:spPr>
-        <p:txBody>
-          <a:bodyPr wrap="square" lIns="0" tIns="0" rIns="76581" bIns="0" rtlCol="0" anchor="t">
-            <a:spAutoFit/>
-          </a:bodyPr>
-          <a:lstStyle/>
-          <a:p>
-            <a:pPr algn="l" indent="0" marL="0">
-              <a:lnSpc>
-                <a:spcPct val="92000"/>
-              </a:lnSpc>
-              <a:buNone/>
-            </a:pPr>
-            <a:r>
-              <a:rPr lang="en-US" sz="550" dirty="0">
-                <a:solidFill>
-                  <a:srgbClr val="707070"/>
-                </a:solidFill>
-                <a:latin typeface="Consolas" pitchFamily="34" charset="0"/>
-                <a:ea typeface="Consolas" pitchFamily="34" charset="-122"/>
-                <a:cs typeface="Consolas" pitchFamily="34" charset="-120"/>
-              </a:rPr>
-              <a:t>12</a:t>
-            </a:r>
-            <a:endParaRPr lang="en-US" sz="550" dirty="0"/>
-          </a:p>
-        </p:txBody>
-      </p:sp>
-      <p:sp>
-        <p:nvSpPr>
-          <p:cNvPr id="47" name="Text 43"/>
-          <p:cNvSpPr/>
-          <p:nvPr/>
-        </p:nvSpPr>
-        <p:spPr>
-          <a:xfrm>
-            <a:off x="3443288" y="3946587"/>
-            <a:ext cx="5300663" cy="114970"/>
-          </a:xfrm>
-          <a:prstGeom prst="rect">
-            <a:avLst/>
-          </a:prstGeom>
-          <a:noFill/>
-          <a:ln/>
-        </p:spPr>
-        <p:txBody>
-          <a:bodyPr wrap="none" lIns="323215" tIns="0" rIns="0" bIns="0" rtlCol="0" anchor="t">
-            <a:spAutoFit/>
-          </a:bodyPr>
-          <a:lstStyle/>
-          <a:p>
-            <a:pPr algn="l" indent="0" marL="0">
-              <a:lnSpc>
-                <a:spcPct val="92000"/>
-              </a:lnSpc>
-              <a:buNone/>
-            </a:pPr>
-            <a:r>
-              <a:rPr lang="en-US" sz="750" dirty="0">
-                <a:solidFill>
-                  <a:srgbClr val="D4D4D4"/>
-                </a:solidFill>
-                <a:latin typeface="Consolas" pitchFamily="34" charset="0"/>
-                <a:ea typeface="Consolas" pitchFamily="34" charset="-122"/>
-                <a:cs typeface="Consolas" pitchFamily="34" charset="-120"/>
-              </a:rPr>
-              <a:t>}</a:t>
-            </a:r>
-            <a:endParaRPr lang="en-US" sz="750" dirty="0"/>
-          </a:p>
-        </p:txBody>
-      </p:sp>
-      <p:sp>
-        <p:nvSpPr>
-          <p:cNvPr id="48" name="Text 44"/>
-          <p:cNvSpPr/>
-          <p:nvPr/>
-        </p:nvSpPr>
-        <p:spPr>
-          <a:xfrm>
-            <a:off x="3200400" y="4114800"/>
-            <a:ext cx="242888" cy="207169"/>
-          </a:xfrm>
-          <a:prstGeom prst="rect">
-            <a:avLst/>
-          </a:prstGeom>
-          <a:noFill/>
-          <a:ln/>
-        </p:spPr>
-        <p:txBody>
-          <a:bodyPr wrap="square" lIns="0" tIns="0" rIns="76581" bIns="0" rtlCol="0" anchor="t">
-            <a:spAutoFit/>
-          </a:bodyPr>
-          <a:lstStyle/>
-          <a:p>
-            <a:pPr algn="l" indent="0" marL="0">
-              <a:lnSpc>
-                <a:spcPct val="92000"/>
-              </a:lnSpc>
-              <a:buNone/>
-            </a:pPr>
-            <a:r>
-              <a:rPr lang="en-US" sz="550" dirty="0">
-                <a:solidFill>
-                  <a:srgbClr val="707070"/>
-                </a:solidFill>
-                <a:latin typeface="Consolas" pitchFamily="34" charset="0"/>
-                <a:ea typeface="Consolas" pitchFamily="34" charset="-122"/>
-                <a:cs typeface="Consolas" pitchFamily="34" charset="-120"/>
-              </a:rPr>
-              <a:t>13</a:t>
-            </a:r>
-            <a:endParaRPr lang="en-US" sz="550" dirty="0"/>
-          </a:p>
-        </p:txBody>
-      </p:sp>
-      <p:sp>
-        <p:nvSpPr>
-          <p:cNvPr id="49" name="Text 45"/>
-          <p:cNvSpPr/>
-          <p:nvPr/>
-        </p:nvSpPr>
-        <p:spPr>
-          <a:xfrm>
-            <a:off x="3443288" y="4160900"/>
-            <a:ext cx="5300663" cy="114970"/>
-          </a:xfrm>
-          <a:prstGeom prst="rect">
-            <a:avLst/>
-          </a:prstGeom>
-          <a:noFill/>
-          <a:ln/>
-        </p:spPr>
-        <p:txBody>
-          <a:bodyPr wrap="none" lIns="110617" tIns="0" rIns="0" bIns="0" rtlCol="0" anchor="t">
-            <a:spAutoFit/>
-          </a:bodyPr>
-          <a:lstStyle/>
-          <a:p>
-            <a:pPr algn="l" indent="0" marL="0">
-              <a:lnSpc>
-                <a:spcPct val="92000"/>
-              </a:lnSpc>
-              <a:buNone/>
-            </a:pPr>
-            <a:r>
-              <a:rPr lang="en-US" sz="750" dirty="0">
-                <a:solidFill>
-                  <a:srgbClr val="D4D4D4"/>
-                </a:solidFill>
-                <a:latin typeface="Consolas" pitchFamily="34" charset="0"/>
-                <a:ea typeface="Consolas" pitchFamily="34" charset="-122"/>
-                <a:cs typeface="Consolas" pitchFamily="34" charset="-120"/>
-              </a:rPr>
-              <a:t>}</a:t>
-            </a:r>
-            <a:endParaRPr lang="en-US" sz="750" dirty="0"/>
-          </a:p>
-        </p:txBody>
-      </p:sp>
-      <p:sp>
-        <p:nvSpPr>
-          <p:cNvPr id="50" name="Shape 46"/>
-          <p:cNvSpPr/>
-          <p:nvPr/>
-        </p:nvSpPr>
-        <p:spPr>
-          <a:xfrm>
-            <a:off x="0" y="4814888"/>
-            <a:ext cx="9144000" cy="328613"/>
-          </a:xfrm>
-          <a:prstGeom prst="rect">
-            <a:avLst/>
-          </a:prstGeom>
-          <a:solidFill>
-            <a:srgbClr val="0055FF"/>
-          </a:solidFill>
-          <a:ln/>
-        </p:spPr>
-      </p:sp>
-      <p:sp>
-        <p:nvSpPr>
-          <p:cNvPr id="51" name="Shape 47"/>
-          <p:cNvSpPr/>
-          <p:nvPr/>
-        </p:nvSpPr>
-        <p:spPr>
-          <a:xfrm>
-            <a:off x="0" y="4814888"/>
-            <a:ext cx="9144000" cy="28575"/>
-          </a:xfrm>
-          <a:prstGeom prst="rect">
-            <a:avLst/>
-          </a:prstGeom>
-          <a:solidFill>
-            <a:srgbClr val="111111"/>
-          </a:solidFill>
-          <a:ln/>
-        </p:spPr>
-      </p:sp>
-      <p:sp>
-        <p:nvSpPr>
-          <p:cNvPr id="52" name="Text 48"/>
-          <p:cNvSpPr/>
-          <p:nvPr/>
-        </p:nvSpPr>
-        <p:spPr>
-          <a:xfrm>
-            <a:off x="271463" y="4918472"/>
-            <a:ext cx="1092994" cy="121444"/>
-          </a:xfrm>
-          <a:prstGeom prst="rect">
-            <a:avLst/>
-          </a:prstGeom>
-          <a:noFill/>
-          <a:ln/>
-        </p:spPr>
-        <p:txBody>
-          <a:bodyPr wrap="none" lIns="0" tIns="0" rIns="0" bIns="0" rtlCol="0" anchor="t">
-            <a:spAutoFit/>
-          </a:bodyPr>
-          <a:lstStyle/>
-          <a:p>
-            <a:pPr algn="l" indent="0" marL="0">
-              <a:buNone/>
-            </a:pPr>
-            <a:r>
-              <a:rPr lang="en-US" sz="700" b="1" spc="1" kern="0" dirty="0">
-                <a:solidFill>
-                  <a:srgbClr val="FFFFFF"/>
-                </a:solidFill>
-                <a:latin typeface="Inter Bold" pitchFamily="34" charset="0"/>
-                <a:ea typeface="Inter Bold" pitchFamily="34" charset="-122"/>
-                <a:cs typeface="Inter Bold" pitchFamily="34" charset="-120"/>
-              </a:rPr>
-              <a:t>STEP 3: THE TRACE</a:t>
-            </a:r>
-            <a:endParaRPr lang="en-US" sz="700" dirty="0"/>
-          </a:p>
-        </p:txBody>
-      </p:sp>
-      <p:sp>
-        <p:nvSpPr>
-          <p:cNvPr id="53" name="Text 49"/>
-          <p:cNvSpPr/>
-          <p:nvPr/>
-        </p:nvSpPr>
-        <p:spPr>
-          <a:xfrm>
-            <a:off x="5139928" y="4918472"/>
-            <a:ext cx="3732609" cy="121444"/>
-          </a:xfrm>
-          <a:prstGeom prst="rect">
-            <a:avLst/>
-          </a:prstGeom>
-          <a:noFill/>
-          <a:ln/>
-        </p:spPr>
-        <p:txBody>
-          <a:bodyPr wrap="square" lIns="0" tIns="0" rIns="0" bIns="0" rtlCol="0" anchor="t">
-            <a:spAutoFit/>
-          </a:bodyPr>
-          <a:lstStyle/>
-          <a:p>
-            <a:pPr algn="l" indent="0" marL="0">
-              <a:buNone/>
-            </a:pPr>
-            <a:r>
-              <a:rPr lang="en-US" sz="700" b="1" spc="1" kern="0" dirty="0">
-                <a:solidFill>
-                  <a:srgbClr val="FFFFFF"/>
-                </a:solidFill>
-                <a:latin typeface="Inter Bold" pitchFamily="34" charset="0"/>
-                <a:ea typeface="Inter Bold" pitchFamily="34" charset="-122"/>
-                <a:cs typeface="Inter Bold" pitchFamily="34" charset="-120"/>
-              </a:rPr>
-              <a:t>SOURCE: STAGE1_EXTRACTION/OUTPUT/EXECUTION_TRACE.JSON</a:t>
-            </a:r>
-            <a:endParaRPr lang="en-US" sz="700" dirty="0"/>
+                <a:latin typeface="Kalam Bold" pitchFamily="34" charset="0"/>
+                <a:ea typeface="Kalam Bold" pitchFamily="34" charset="-122"/>
+                <a:cs typeface="Kalam Bold" pitchFamily="34" charset="-120"/>
+              </a:rPr>
+              <a:t>lure becom</a:t>
+            </a:r>
+            <a:r>
+              <a:rPr lang="en-US" sz="1250" dirty="0">
+                <a:solidFill>
+                  <a:srgbClr val="111111"/>
+                </a:solidFill>
+                <a:latin typeface="Kalam Bold" pitchFamily="34" charset="0"/>
+                <a:ea typeface="Kalam Bold" pitchFamily="34" charset="-122"/>
+                <a:cs typeface="Kalam Bold" pitchFamily="34" charset="-120"/>
+              </a:rPr>
+              <a:t>es evidenc</a:t>
+            </a:r>
+            <a:r>
+              <a:rPr lang="en-US" sz="1250" dirty="0">
+                <a:solidFill>
+                  <a:srgbClr val="111111"/>
+                </a:solidFill>
+                <a:latin typeface="Kalam Bold" pitchFamily="34" charset="0"/>
+                <a:ea typeface="Kalam Bold" pitchFamily="34" charset="-122"/>
+                <a:cs typeface="Kalam Bold" pitchFamily="34" charset="-120"/>
+              </a:rPr>
+              <a:t>e, not a re</a:t>
+            </a:r>
+            <a:r>
+              <a:rPr lang="en-US" sz="1250" dirty="0">
+                <a:solidFill>
+                  <a:srgbClr val="111111"/>
+                </a:solidFill>
+                <a:latin typeface="Kalam Bold" pitchFamily="34" charset="0"/>
+                <a:ea typeface="Kalam Bold" pitchFamily="34" charset="-122"/>
+                <a:cs typeface="Kalam Bold" pitchFamily="34" charset="-120"/>
+              </a:rPr>
+              <a:t>ason to loo</a:t>
+            </a:r>
+            <a:r>
+              <a:rPr lang="en-US" sz="1250" dirty="0">
+                <a:solidFill>
+                  <a:srgbClr val="111111"/>
+                </a:solidFill>
+                <a:latin typeface="Kalam Bold" pitchFamily="34" charset="0"/>
+                <a:ea typeface="Kalam Bold" pitchFamily="34" charset="-122"/>
+                <a:cs typeface="Kalam Bold" pitchFamily="34" charset="-120"/>
+              </a:rPr>
+              <a:t>sen the pro</a:t>
+            </a:r>
+            <a:r>
+              <a:rPr lang="en-US" sz="1250" dirty="0">
+                <a:solidFill>
+                  <a:srgbClr val="111111"/>
+                </a:solidFill>
+                <a:latin typeface="Kalam Bold" pitchFamily="34" charset="0"/>
+                <a:ea typeface="Kalam Bold" pitchFamily="34" charset="-122"/>
+                <a:cs typeface="Kalam Bold" pitchFamily="34" charset="-120"/>
+              </a:rPr>
+              <a:t>of.</a:t>
+            </a:r>
+            <a:endParaRPr lang="en-US" sz="1200" dirty="0"/>
           </a:p>
         </p:txBody>
       </p:sp>
